--- a/downloads/presentations/modules/gov-420.pptx
+++ b/downloads/presentations/modules/gov-420.pptx
@@ -614,7 +614,8 @@
               <a:t>Technical and Governance Deep Dive
 Transparency reporting should be risk-based. Low-risk internal tools may be documented in an internal registry. Tools that influence public communication, prioritization, access, enforcement, or public-facing interactions may require public notice. High-impact tools may require more detailed documentation, such as intended use, data sources, validation approach, human review, limitations, contact information, and review schedule.
 The reporting process should be accessible. Public-facing explanations should use plain language, avoid technical jargon, and be available in appropriate languages and accessible formats. Transparency is not achieved by publishing a dense technical document that affected communities cannot understand. Agencies should consider how communities, partners, and staff will actually interpret the information.
-Transparency should also include mechanisms for accountability. A notice or registry should identify how concerns can be raised, how corrections can be requested when appropriate, and how the agency reviews incidents or complaints. Public reporting should connect to internal governance processes so that feedback can lead to action.</a:t>
+Transparency should also include mechanisms for accountability. A notice or registry should identify how concerns can be raised, how corrections can be requested when appropriate, and how the agency reviews incidents or complaints. Public reporting should connect to internal governance processes so that feedback can lead to action.
+Application guidance: Translate this concept into clear decision rights, review steps, documentation expectations, and escalation paths before an AI-supported workflow is approved.</a:t>
             </a:r>
             <a:endParaRPr lang="en-US" dirty="0"/>
           </a:p>
@@ -704,7 +705,8 @@
               <a:rPr lang="en-US" dirty="0"/>
               <a:t>Risks, Failure Modes, and Guardrails
 One risk is transparency theater. Agencies may publish broad statements about responsible AI without disclosing actual uses, owners, or safeguards. A guardrail is to maintain an AI use registry with concrete information about approved and operational use cases.
-Another risk is over-disclosure of sensitive details. Publishing system architecture, vulnerabilities, or confidential data flows could create security or privacy risks. A guardrail is to review transparency materials through privacy, legal, security, and communications before release.</a:t>
+Another risk is over-disclosure of sensitive details. Publishing system architecture, vulnerabilities, or confidential data flows could create security or privacy risks. A guardrail is to review transparency materials through privacy, legal, security, and communications before release.
+Application guidance: Identify what could go wrong, who could be affected, what safeguards are needed, and what evidence should be reviewed before use expands.</a:t>
             </a:r>
             <a:endParaRPr lang="en-US" dirty="0"/>
           </a:p>
@@ -793,7 +795,8 @@
             <a:r>
               <a:rPr lang="en-US" dirty="0"/>
               <a:t>Application to AI-Supported Workflows
-Generative AI transparency may explain when AI assists drafting and how human review occurs. Predictive analytics transparency may explain what the model supports, what decisions remain human, and how fairness is monitored. Agentic AI transparency may explain what actions are automated, what approvals are required, and how errors can be reported.</a:t>
+Generative AI transparency may explain when AI assists drafting and how human review occurs. Predictive analytics transparency may explain what the model supports, what decisions remain human, and how fairness is monitored. Agentic AI transparency may explain what actions are automated, what approvals are required, and how errors can be reported.
+Application guidance: Use the concept to clarify workflow changes, dependencies, staffing, procurement requirements, training needs, and implementation checkpoints.</a:t>
             </a:r>
             <a:endParaRPr lang="en-US" dirty="0"/>
           </a:p>
@@ -884,7 +887,8 @@
               <a:t>Reflection Questions
 Which current or proposed AI use case in your agency raises this leadership or governance issue most clearly?
 Who currently has authority to make decisions about this issue, and is that authority documented?
-What evidence would governance or leadership need before approving the use case?</a:t>
+What evidence would governance or leadership need before approving the use case?
+Application guidance: Connect the concept to public health purpose, responsible use, required safeguards, documentation, and the next action a department should take.</a:t>
             </a:r>
             <a:endParaRPr lang="en-US" dirty="0"/>
           </a:p>
@@ -974,7 +978,8 @@
               <a:rPr lang="en-US" dirty="0"/>
               <a:t>Reflection Questions
 Which staff, partners, or communities would be affected if this issue were handled poorly?
-What policy, process, or artifact should be created or updated after this module?</a:t>
+What policy, process, or artifact should be created or updated after this module?
+Application guidance: Connect the concept to public health purpose, responsible use, required safeguards, documentation, and the next action a department should take.</a:t>
             </a:r>
             <a:endParaRPr lang="en-US" dirty="0"/>
           </a:p>
@@ -1063,7 +1068,8 @@
             <a:r>
               <a:rPr lang="en-US" dirty="0"/>
               <a:t>Practical Exercise
-Create a transparency reporting template and apply it to one AI use case. Include purpose, owner, users, data categories, risk level, safeguards, human review, limitations, review date, and contact pathway.</a:t>
+Create a transparency reporting template and apply it to one AI use case. Include purpose, owner, users, data categories, risk level, safeguards, human review, limitations, review date, and contact pathway.
+Application guidance: Use the assignment to test whether you can explain the concept, apply it to a realistic public health situation, and identify what would need review before the work moves forward.</a:t>
             </a:r>
             <a:endParaRPr lang="en-US" dirty="0"/>
           </a:p>
@@ -1152,7 +1158,8 @@
             <a:r>
               <a:rPr lang="en-US" dirty="0"/>
               <a:t>Before You Begin
-Choose a real or realistic public health AI use case. Document assumptions, unresolved questions, and which agency roles would need to review the artifact before it is adopted. The exercise should produce a work product that could support governance review, leadership discussion, implementation planning, or policy development.</a:t>
+Choose a real or realistic public health AI use case. Document assumptions, unresolved questions, and which agency roles would need to review the artifact before it is adopted. The exercise should produce a work product that could support governance review, leadership discussion, implementation planning, or policy development.
+Application guidance: Connect the concept to public health purpose, responsible use, required safeguards, documentation, and the next action a department should take.</a:t>
             </a:r>
             <a:endParaRPr lang="en-US" dirty="0"/>
           </a:p>
@@ -1241,7 +1248,8 @@
             <a:r>
               <a:rPr lang="en-US" dirty="0"/>
               <a:t>Expected Artifact or Evidence
-AI transparency template; sample AI use registry entry; public notice draft; internal review checklist.</a:t>
+AI transparency template; sample AI use registry entry; public notice draft; internal review checklist.
+Application guidance: Connect the concept to public health purpose, responsible use, required safeguards, documentation, and the next action a department should take.</a:t>
             </a:r>
             <a:endParaRPr lang="en-US" dirty="0"/>
           </a:p>
@@ -1330,7 +1338,8 @@
             <a:r>
               <a:rPr lang="en-US" dirty="0"/>
               <a:t>Expected Assignment
-AI transparency template; sample AI use registry entry; public notice draft; internal review checklist.</a:t>
+AI transparency template; sample AI use registry entry; public notice draft; internal review checklist.
+Application guidance: Use the assignment to test whether you can explain the concept, apply it to a realistic public health situation, and identify what would need review before the work moves forward.</a:t>
             </a:r>
             <a:endParaRPr lang="en-US" dirty="0"/>
           </a:p>
@@ -1423,7 +1432,8 @@
 2. Which practice best supports accountable public health AI governance?
 3. When should an AI use case be escalated for leadership or governance review?
 4. What is weak evidence of completion for a leadership and governance module?
-5. What should leaders do when an AI use case has meaningful benefits but unresolved risks?</a:t>
+5. What should leaders do when an AI use case has meaningful benefits but unresolved risks?
+Application guidance: Use the assignment to test whether you can explain the concept, apply it to a realistic public health situation, and identify what would need review before the work moves forward.</a:t>
             </a:r>
             <a:endParaRPr lang="en-US" dirty="0"/>
           </a:p>
@@ -1608,7 +1618,8 @@
 NIST Generative AI Profile: https://www.nist.gov/publications/artificial-intelligence-risk-management-framework-generative-artificial-intelligence
 NIST Privacy Framework
 CDC Public Health Data Strategy and Data Modernization resources: https://www.cdc.gov/public-health-data-strategy/php/about/index.html
-WHO Ethics and Governance of Artificial Intelligence for Health: https://www.who.int/publications/i/item/9789240029200</a:t>
+WHO Ethics and Governance of Artificial Intelligence for Health: https://www.who.int/publications/i/item/9789240029200
+Application guidance: Connect the concept to public health purpose, responsible use, required safeguards, documentation, and the next action a department should take.</a:t>
             </a:r>
             <a:endParaRPr lang="en-US" dirty="0"/>
           </a:p>
@@ -1698,7 +1709,8 @@
               <a:rPr lang="en-US" dirty="0"/>
               <a:t>References and Resources
 OMB Memorandum M-24-10 on federal AI governance, risk management, and innovation, where relevant to public-sector governance models
-Agency strategic plans, procurement policies, privacy policies, cybersecurity policies, records policies, and equity plans</a:t>
+Agency strategic plans, procurement policies, privacy policies, cybersecurity policies, records policies, and equity plans
+Application guidance: Connect the concept to public health purpose, responsible use, required safeguards, documentation, and the next action a department should take.</a:t>
             </a:r>
             <a:endParaRPr lang="en-US" dirty="0"/>
           </a:p>
@@ -1977,7 +1989,8 @@
 Identify which AI uses should be disclosed internally, publicly, or to specific partners.
 Develop contents for an AI transparency notice or AI use registry.
 Balance transparency with privacy, security, confidentiality, and operational sensitivity.
-Produce a draft AI transparency reporting template.</a:t>
+Produce a draft AI transparency reporting template.
+Application guidance: Use the assignment to test whether you can explain the concept, apply it to a realistic public health situation, and identify what would need review before the work moves forward.</a:t>
             </a:r>
             <a:endParaRPr lang="en-US" dirty="0"/>
           </a:p>
@@ -2067,7 +2080,8 @@
               <a:rPr lang="en-US" dirty="0"/>
               <a:t>Module Overview
 Public health agencies have a responsibility to explain how AI is used in ways that affect public services, public communication, surveillance, resource allocation, or community trust. Transparency reporting helps agencies communicate what AI tools are in use, why they are used, what safeguards are in place, and how the public or partners can raise concerns.
-This module helps leaders design AI transparency practices that are meaningful, not performative. Transparency should be understandable, accessible, and proportionate to risk. It should support public accountability while protecting security, privacy, confidential data, and sensitive operational details.</a:t>
+This module helps leaders design AI transparency practices that are meaningful, not performative. Transparency should be understandable, accessible, and proportionate to risk. It should support public accountability while protecting security, privacy, confidential data, and sensitive operational details.
+Application guidance: Connect the concept to public health purpose, responsible use, required safeguards, documentation, and the next action a department should take.</a:t>
             </a:r>
             <a:endParaRPr lang="en-US" dirty="0"/>
           </a:p>
@@ -2156,7 +2170,8 @@
             <a:r>
               <a:rPr lang="en-US" dirty="0"/>
               <a:t>Jurisdiction and Agency Policy Note
-This module provides national-level training guidance for public health agencies and partners. It is not legal advice and does not replace review by agency legal counsel, privacy officers, procurement officials, civil rights staff, records officers, or other authorized decision-makers. Requirements may vary by state, locality, territory, Tribe, agency, funding source, data-sharing agreement, emergency authority, and organizational policy. Learners should use this module to identify the issues that require review and should confirm applicable requirements before approving, procuring, deploying, or publicly communicating about AI-supported work.</a:t>
+This module provides national-level training guidance for public health agencies and partners. It is not legal advice and does not replace review by agency legal counsel, privacy officers, procurement officials, civil rights staff, records officers, or other authorized decision-makers. Requirements may vary by state, locality, territory, Tribe, agency, funding source, data-sharing agreement, emergency authority, and organizational policy. Learners should use this module to identify the issues that require review and should confirm applicable requirements before approving, procuring, deploying, or publicly communicating about AI-supported work.
+Application guidance: Translate this concept into clear decision rights, review steps, documentation expectations, and escalation paths before an AI-supported workflow is approved.</a:t>
             </a:r>
             <a:endParaRPr lang="en-US" dirty="0"/>
           </a:p>
@@ -2246,7 +2261,8 @@
               <a:rPr lang="en-US" dirty="0"/>
               <a:t>Why This Topic Matters for Public Health AI
 Public health depends on trust. If communities discover that AI is being used in surveillance, communication, service routing, or resource allocation without explanation, they may question whether decisions are fair, accurate, or accountable. Transparency does not require agencies to disclose every technical detail, but it does require clear communication about the purpose and safeguards of consequential AI uses.
-Transparency also improves internal accountability. A registry of AI use cases helps leaders know what tools are active, who owns them, what data they use, and when they were last reviewed. It reduces the chance that tools continue operating after their purpose, vendor terms, data sources, or risk profile changes.</a:t>
+Transparency also improves internal accountability. A registry of AI use cases helps leaders know what tools are active, who owns them, what data they use, and when they were last reviewed. It reduces the chance that tools continue operating after their purpose, vendor terms, data sources, or risk profile changes.
+Application guidance: Connect the concept to public health purpose, responsible use, required safeguards, documentation, and the next action a department should take.</a:t>
             </a:r>
             <a:endParaRPr lang="en-US" dirty="0"/>
           </a:p>
@@ -2336,7 +2352,8 @@
               <a:rPr lang="en-US" dirty="0"/>
               <a:t>Public Health Example
 A health department uses AI to draft public health messages, summarize internal reports, and prioritize inspection follow-up. Some uses may not require broad public disclosure, while others may affect public services and should be listed in an AI use registry. The registry does not need to reveal sensitive security details, but it should identify the purpose, owner, data categories, review process, and human oversight.
-For a public-facing tool, the agency may also create a plain-language notice explaining that AI assists with initial responses, that staff review high-risk content, that personal information should not be entered unless requested through approved channels, and that users can contact the agency for help or correction. This type of notice supports trust and sets realistic expectations.</a:t>
+For a public-facing tool, the agency may also create a plain-language notice explaining that AI assists with initial responses, that staff review high-risk content, that personal information should not be entered unless requested through approved channels, and that users can contact the agency for help or correction. This type of notice supports trust and sets realistic expectations.
+Application guidance: Connect the concept to public health purpose, responsible use, required safeguards, documentation, and the next action a department should take.</a:t>
             </a:r>
             <a:endParaRPr lang="en-US" dirty="0"/>
           </a:p>
@@ -3107,8 +3124,8 @@
         </p:nvSpPr>
         <p:spPr>
           <a:xfrm>
-            <a:off x="9966960" y="6537960"/>
-            <a:ext cx="1645920" cy="201168"/>
+            <a:off x="9646920" y="6537960"/>
+            <a:ext cx="1965960" cy="201168"/>
           </a:xfrm>
           <a:prstGeom prst="rect">
             <a:avLst/>
@@ -3132,7 +3149,7 @@
                 <a:ea typeface="Aptos" pitchFamily="34" charset="-122"/>
                 <a:cs typeface="Aptos" pitchFamily="34" charset="-120"/>
               </a:rPr>
-              <a:t>Â© Paula Soper</a:t>
+              <a:t>Copyright Paula Soper</a:t>
             </a:r>
             <a:endParaRPr lang="en-US" sz="800" dirty="0"/>
           </a:p>
@@ -3179,14 +3196,257 @@
       </p:sp>
       <p:sp>
         <p:nvSpPr>
-          <p:cNvPr id="8" name="Shape 6"/>
+          <p:cNvPr id="8" name="Text 6"/>
           <p:cNvSpPr/>
           <p:nvPr/>
         </p:nvSpPr>
         <p:spPr>
           <a:xfrm>
             <a:off x="640080" y="658368"/>
-            <a:ext cx="420624" cy="420624"/>
+            <a:ext cx="10881360" cy="713232"/>
+          </a:xfrm>
+          <a:prstGeom prst="rect">
+            <a:avLst/>
+          </a:prstGeom>
+          <a:noFill/>
+          <a:ln/>
+        </p:spPr>
+        <p:txBody>
+          <a:bodyPr wrap="square" lIns="0" tIns="0" rIns="0" bIns="0" rtlCol="0" anchor="ctr">
+            <a:normAutofit/>
+          </a:bodyPr>
+          <a:lstStyle/>
+          <a:p>
+            <a:pPr indent="0" marL="0">
+              <a:buNone/>
+            </a:pPr>
+            <a:r>
+              <a:rPr lang="en-US" sz="3400" b="1" dirty="0">
+                <a:solidFill>
+                  <a:srgbClr val="003A63"/>
+                </a:solidFill>
+                <a:latin typeface="Aptos Display" pitchFamily="34" charset="0"/>
+                <a:ea typeface="Aptos Display" pitchFamily="34" charset="-122"/>
+                <a:cs typeface="Aptos Display" pitchFamily="34" charset="-120"/>
+              </a:rPr>
+              <a:t>Technical and Governance Deep Dive</a:t>
+            </a:r>
+            <a:endParaRPr lang="en-US" sz="3400" dirty="0"/>
+          </a:p>
+        </p:txBody>
+      </p:sp>
+      <p:sp>
+        <p:nvSpPr>
+          <p:cNvPr id="9" name="Text 7"/>
+          <p:cNvSpPr/>
+          <p:nvPr/>
+        </p:nvSpPr>
+        <p:spPr>
+          <a:xfrm>
+            <a:off x="868680" y="1508760"/>
+            <a:ext cx="6309360" cy="4160520"/>
+          </a:xfrm>
+          <a:prstGeom prst="rect">
+            <a:avLst/>
+          </a:prstGeom>
+          <a:noFill/>
+          <a:ln/>
+        </p:spPr>
+        <p:txBody>
+          <a:bodyPr wrap="square" lIns="635" tIns="635" rIns="635" bIns="635" rtlCol="0" anchor="t">
+            <a:normAutofit/>
+          </a:bodyPr>
+          <a:lstStyle/>
+          <a:p>
+            <a:r>
+              <a:rPr lang="en-US" sz="2100" dirty="0">
+                <a:solidFill>
+                  <a:srgbClr val="17364A"/>
+                </a:solidFill>
+                <a:latin typeface="Aptos" pitchFamily="34" charset="0"/>
+                <a:ea typeface="Aptos" pitchFamily="34" charset="-122"/>
+                <a:cs typeface="Aptos" pitchFamily="34" charset="-120"/>
+              </a:rPr>
+              <a:t>Transparency reporting should be risk-based.</a:t>
+            </a:r>
+            <a:endParaRPr lang="en-US" sz="2100" dirty="0"/>
+          </a:p>
+          <a:p>
+            <a:r>
+              <a:rPr lang="en-US" sz="2100" dirty="0">
+                <a:solidFill>
+                  <a:srgbClr val="17364A"/>
+                </a:solidFill>
+                <a:latin typeface="Aptos" pitchFamily="34" charset="0"/>
+                <a:ea typeface="Aptos" pitchFamily="34" charset="-122"/>
+                <a:cs typeface="Aptos" pitchFamily="34" charset="-120"/>
+              </a:rPr>
+              <a:t>Low-risk internal tools may be documented in an internal registry.</a:t>
+            </a:r>
+            <a:endParaRPr lang="en-US" sz="2100" dirty="0"/>
+          </a:p>
+          <a:p>
+            <a:r>
+              <a:rPr lang="en-US" sz="2100" dirty="0">
+                <a:solidFill>
+                  <a:srgbClr val="17364A"/>
+                </a:solidFill>
+                <a:latin typeface="Aptos" pitchFamily="34" charset="0"/>
+                <a:ea typeface="Aptos" pitchFamily="34" charset="-122"/>
+                <a:cs typeface="Aptos" pitchFamily="34" charset="-120"/>
+              </a:rPr>
+              <a:t>Tools that influence public communication, prioritization, access, enforcement, or public-facing.</a:t>
+            </a:r>
+            <a:endParaRPr lang="en-US" sz="2100" dirty="0"/>
+          </a:p>
+        </p:txBody>
+      </p:sp>
+      <p:sp>
+        <p:nvSpPr>
+          <p:cNvPr id="10" name="Shape 8"/>
+          <p:cNvSpPr/>
+          <p:nvPr/>
+        </p:nvSpPr>
+        <p:spPr>
+          <a:xfrm>
+            <a:off x="7635240" y="1325880"/>
+            <a:ext cx="3474720" cy="1325880"/>
+          </a:xfrm>
+          <a:prstGeom prst="roundRect">
+            <a:avLst>
+              <a:gd name="adj" fmla="val 8276"/>
+            </a:avLst>
+          </a:prstGeom>
+          <a:solidFill>
+            <a:srgbClr val="EEF8ED"/>
+          </a:solidFill>
+          <a:ln w="12700">
+            <a:solidFill>
+              <a:srgbClr val="B9D7E6"/>
+            </a:solidFill>
+            <a:prstDash val="solid"/>
+          </a:ln>
+        </p:spPr>
+      </p:sp>
+      <p:sp>
+        <p:nvSpPr>
+          <p:cNvPr id="11" name="Text 9"/>
+          <p:cNvSpPr/>
+          <p:nvPr/>
+        </p:nvSpPr>
+        <p:spPr>
+          <a:xfrm>
+            <a:off x="7799832" y="1472184"/>
+            <a:ext cx="3145536" cy="256032"/>
+          </a:xfrm>
+          <a:prstGeom prst="rect">
+            <a:avLst/>
+          </a:prstGeom>
+          <a:noFill/>
+          <a:ln/>
+        </p:spPr>
+        <p:txBody>
+          <a:bodyPr wrap="square" lIns="0" tIns="0" rIns="0" bIns="0" rtlCol="0" anchor="ctr"/>
+          <a:lstStyle/>
+          <a:p>
+            <a:pPr indent="0" marL="0">
+              <a:buNone/>
+            </a:pPr>
+            <a:r>
+              <a:rPr lang="en-US" sz="1300" b="1" dirty="0">
+                <a:solidFill>
+                  <a:srgbClr val="0068B7"/>
+                </a:solidFill>
+                <a:latin typeface="Aptos" pitchFamily="34" charset="0"/>
+                <a:ea typeface="Aptos" pitchFamily="34" charset="-122"/>
+                <a:cs typeface="Aptos" pitchFamily="34" charset="-120"/>
+              </a:rPr>
+              <a:t>Governance lens</a:t>
+            </a:r>
+            <a:endParaRPr lang="en-US" sz="1300" dirty="0"/>
+          </a:p>
+        </p:txBody>
+      </p:sp>
+      <p:sp>
+        <p:nvSpPr>
+          <p:cNvPr id="12" name="Text 10"/>
+          <p:cNvSpPr/>
+          <p:nvPr/>
+        </p:nvSpPr>
+        <p:spPr>
+          <a:xfrm>
+            <a:off x="7799832" y="1828800"/>
+            <a:ext cx="3145536" cy="685800"/>
+          </a:xfrm>
+          <a:prstGeom prst="rect">
+            <a:avLst/>
+          </a:prstGeom>
+          <a:noFill/>
+          <a:ln/>
+        </p:spPr>
+        <p:txBody>
+          <a:bodyPr wrap="square" lIns="0" tIns="0" rIns="0" bIns="0" rtlCol="0" anchor="t">
+            <a:normAutofit/>
+          </a:bodyPr>
+          <a:lstStyle/>
+          <a:p>
+            <a:pPr indent="0" marL="0">
+              <a:buNone/>
+            </a:pPr>
+            <a:r>
+              <a:rPr lang="en-US" sz="1550" dirty="0">
+                <a:solidFill>
+                  <a:srgbClr val="17364A"/>
+                </a:solidFill>
+                <a:latin typeface="Aptos" pitchFamily="34" charset="0"/>
+                <a:ea typeface="Aptos" pitchFamily="34" charset="-122"/>
+                <a:cs typeface="Aptos" pitchFamily="34" charset="-120"/>
+              </a:rPr>
+              <a:t>Transparency reporting should be risk-based.</a:t>
+            </a:r>
+            <a:endParaRPr lang="en-US" sz="1550" dirty="0"/>
+          </a:p>
+        </p:txBody>
+      </p:sp>
+      <p:sp>
+        <p:nvSpPr>
+          <p:cNvPr id="13" name="Shape 11"/>
+          <p:cNvSpPr/>
+          <p:nvPr/>
+        </p:nvSpPr>
+        <p:spPr>
+          <a:xfrm>
+            <a:off x="7635240" y="2788920"/>
+            <a:ext cx="3474720" cy="1536192"/>
+          </a:xfrm>
+          <a:prstGeom prst="roundRect">
+            <a:avLst>
+              <a:gd name="adj" fmla="val 7143"/>
+            </a:avLst>
+          </a:prstGeom>
+          <a:solidFill>
+            <a:srgbClr val="FFFFFF">
+              <a:alpha val="88000"/>
+            </a:srgbClr>
+          </a:solidFill>
+          <a:ln w="12700">
+            <a:solidFill>
+              <a:srgbClr val="D6E8F2"/>
+            </a:solidFill>
+            <a:prstDash val="solid"/>
+          </a:ln>
+        </p:spPr>
+      </p:sp>
+      <p:sp>
+        <p:nvSpPr>
+          <p:cNvPr id="14" name="Shape 12"/>
+          <p:cNvSpPr/>
+          <p:nvPr/>
+        </p:nvSpPr>
+        <p:spPr>
+          <a:xfrm>
+            <a:off x="7891272" y="3108960"/>
+            <a:ext cx="566928" cy="566928"/>
           </a:xfrm>
           <a:prstGeom prst="ellipse">
             <a:avLst/>
@@ -3204,172 +3464,24 @@
       </p:sp>
       <p:sp>
         <p:nvSpPr>
-          <p:cNvPr id="9" name="Text 7"/>
-          <p:cNvSpPr/>
-          <p:nvPr/>
-        </p:nvSpPr>
-        <p:spPr>
-          <a:xfrm>
-            <a:off x="640080" y="731520"/>
-            <a:ext cx="420624" cy="164592"/>
-          </a:xfrm>
-          <a:prstGeom prst="rect">
-            <a:avLst/>
-          </a:prstGeom>
-          <a:noFill/>
-          <a:ln/>
-        </p:spPr>
-        <p:txBody>
-          <a:bodyPr wrap="square" lIns="0" tIns="0" rIns="0" bIns="0" rtlCol="0" anchor="ctr"/>
-          <a:lstStyle/>
-          <a:p>
-            <a:pPr algn="ctr" indent="0" marL="0">
-              <a:buNone/>
-            </a:pPr>
-            <a:r>
-              <a:rPr lang="en-US" sz="1100" b="1" dirty="0">
-                <a:solidFill>
-                  <a:srgbClr val="FFFFFF"/>
-                </a:solidFill>
-                <a:latin typeface="Aptos" pitchFamily="34" charset="0"/>
-                <a:ea typeface="Aptos" pitchFamily="34" charset="-122"/>
-                <a:cs typeface="Aptos" pitchFamily="34" charset="-120"/>
-              </a:rPr>
-              <a:t>6</a:t>
-            </a:r>
-            <a:endParaRPr lang="en-US" sz="1100" dirty="0"/>
-          </a:p>
-        </p:txBody>
-      </p:sp>
-      <p:sp>
-        <p:nvSpPr>
-          <p:cNvPr id="10" name="Text 8"/>
-          <p:cNvSpPr/>
-          <p:nvPr/>
-        </p:nvSpPr>
-        <p:spPr>
-          <a:xfrm>
-            <a:off x="640080" y="621792"/>
-            <a:ext cx="10881360" cy="713232"/>
-          </a:xfrm>
-          <a:prstGeom prst="rect">
-            <a:avLst/>
-          </a:prstGeom>
-          <a:noFill/>
-          <a:ln/>
-        </p:spPr>
-        <p:txBody>
-          <a:bodyPr wrap="square" lIns="0" tIns="0" rIns="0" bIns="0" rtlCol="0" anchor="ctr">
-            <a:normAutofit/>
-          </a:bodyPr>
-          <a:lstStyle/>
-          <a:p>
-            <a:pPr indent="0" marL="0">
-              <a:buNone/>
-            </a:pPr>
-            <a:r>
-              <a:rPr lang="en-US" sz="3400" b="1" dirty="0">
-                <a:solidFill>
-                  <a:srgbClr val="003A63"/>
-                </a:solidFill>
-                <a:latin typeface="Aptos Display" pitchFamily="34" charset="0"/>
-                <a:ea typeface="Aptos Display" pitchFamily="34" charset="-122"/>
-                <a:cs typeface="Aptos Display" pitchFamily="34" charset="-120"/>
-              </a:rPr>
-              <a:t>Technical and Governance Deep Dive</a:t>
-            </a:r>
-            <a:endParaRPr lang="en-US" sz="3400" dirty="0"/>
-          </a:p>
-        </p:txBody>
-      </p:sp>
-      <p:sp>
-        <p:nvSpPr>
-          <p:cNvPr id="11" name="Text 9"/>
-          <p:cNvSpPr/>
-          <p:nvPr/>
-        </p:nvSpPr>
-        <p:spPr>
-          <a:xfrm>
-            <a:off x="868680" y="1508760"/>
-            <a:ext cx="6537960" cy="4160520"/>
-          </a:xfrm>
-          <a:prstGeom prst="rect">
-            <a:avLst/>
-          </a:prstGeom>
-          <a:noFill/>
-          <a:ln/>
-        </p:spPr>
-        <p:txBody>
-          <a:bodyPr wrap="square" lIns="635" tIns="635" rIns="635" bIns="635" rtlCol="0" anchor="t">
-            <a:normAutofit/>
-          </a:bodyPr>
-          <a:lstStyle/>
-          <a:p>
-            <a:r>
-              <a:rPr lang="en-US" sz="2100" dirty="0">
-                <a:solidFill>
-                  <a:srgbClr val="17364A"/>
-                </a:solidFill>
-                <a:latin typeface="Aptos" pitchFamily="34" charset="0"/>
-                <a:ea typeface="Aptos" pitchFamily="34" charset="-122"/>
-                <a:cs typeface="Aptos" pitchFamily="34" charset="-120"/>
-              </a:rPr>
-              <a:t>Transparency reporting should be risk-based.</a:t>
-            </a:r>
-            <a:endParaRPr lang="en-US" sz="2100" dirty="0"/>
-          </a:p>
-          <a:p>
-            <a:r>
-              <a:rPr lang="en-US" sz="2100" dirty="0">
-                <a:solidFill>
-                  <a:srgbClr val="17364A"/>
-                </a:solidFill>
-                <a:latin typeface="Aptos" pitchFamily="34" charset="0"/>
-                <a:ea typeface="Aptos" pitchFamily="34" charset="-122"/>
-                <a:cs typeface="Aptos" pitchFamily="34" charset="-120"/>
-              </a:rPr>
-              <a:t>Low-risk internal tools may be documented in an internal registry.</a:t>
-            </a:r>
-            <a:endParaRPr lang="en-US" sz="2100" dirty="0"/>
-          </a:p>
-          <a:p>
-            <a:r>
-              <a:rPr lang="en-US" sz="2100" dirty="0">
-                <a:solidFill>
-                  <a:srgbClr val="17364A"/>
-                </a:solidFill>
-                <a:latin typeface="Aptos" pitchFamily="34" charset="0"/>
-                <a:ea typeface="Aptos" pitchFamily="34" charset="-122"/>
-                <a:cs typeface="Aptos" pitchFamily="34" charset="-120"/>
-              </a:rPr>
-              <a:t>Tools that influence public communication, prioritization, access, enforcement, or public-facing.</a:t>
-            </a:r>
-            <a:endParaRPr lang="en-US" sz="2100" dirty="0"/>
-          </a:p>
-        </p:txBody>
-      </p:sp>
-      <p:sp>
-        <p:nvSpPr>
-          <p:cNvPr id="12" name="Shape 10"/>
-          <p:cNvSpPr/>
-          <p:nvPr/>
-        </p:nvSpPr>
-        <p:spPr>
-          <a:xfrm>
-            <a:off x="7909560" y="1417320"/>
-            <a:ext cx="3154680" cy="1828800"/>
-          </a:xfrm>
-          <a:prstGeom prst="roundRect">
-            <a:avLst>
-              <a:gd name="adj" fmla="val 6000"/>
-            </a:avLst>
+          <p:cNvPr id="15" name="Shape 13"/>
+          <p:cNvSpPr/>
+          <p:nvPr/>
+        </p:nvSpPr>
+        <p:spPr>
+          <a:xfrm>
+            <a:off x="10287000" y="3108960"/>
+            <a:ext cx="566928" cy="566928"/>
+          </a:xfrm>
+          <a:prstGeom prst="ellipse">
+            <a:avLst/>
           </a:prstGeom>
           <a:solidFill>
-            <a:srgbClr val="EEF8ED"/>
+            <a:srgbClr val="2F8A28"/>
           </a:solidFill>
           <a:ln w="12700">
             <a:solidFill>
-              <a:srgbClr val="B9D7E6"/>
+              <a:srgbClr val="2F8A28"/>
             </a:solidFill>
             <a:prstDash val="solid"/>
           </a:ln>
@@ -3377,14 +3489,108 @@
       </p:sp>
       <p:sp>
         <p:nvSpPr>
-          <p:cNvPr id="13" name="Text 11"/>
-          <p:cNvSpPr/>
-          <p:nvPr/>
-        </p:nvSpPr>
-        <p:spPr>
-          <a:xfrm>
-            <a:off x="8074152" y="1563624"/>
-            <a:ext cx="2825496" cy="256032"/>
+          <p:cNvPr id="16" name="Shape 14"/>
+          <p:cNvSpPr/>
+          <p:nvPr/>
+        </p:nvSpPr>
+        <p:spPr>
+          <a:xfrm>
+            <a:off x="9089136" y="3456432"/>
+            <a:ext cx="566928" cy="566928"/>
+          </a:xfrm>
+          <a:prstGeom prst="ellipse">
+            <a:avLst/>
+          </a:prstGeom>
+          <a:solidFill>
+            <a:srgbClr val="6A4CA3"/>
+          </a:solidFill>
+          <a:ln w="12700">
+            <a:solidFill>
+              <a:srgbClr val="6A4CA3"/>
+            </a:solidFill>
+            <a:prstDash val="solid"/>
+          </a:ln>
+        </p:spPr>
+      </p:sp>
+      <p:sp>
+        <p:nvSpPr>
+          <p:cNvPr id="17" name="Shape 15"/>
+          <p:cNvSpPr/>
+          <p:nvPr/>
+        </p:nvSpPr>
+        <p:spPr>
+          <a:xfrm>
+            <a:off x="8385048" y="3419856"/>
+            <a:ext cx="1975104" cy="0"/>
+          </a:xfrm>
+          <a:prstGeom prst="line">
+            <a:avLst/>
+          </a:prstGeom>
+          <a:noFill/>
+          <a:ln w="25400">
+            <a:solidFill>
+              <a:srgbClr val="8ABBD8"/>
+            </a:solidFill>
+            <a:prstDash val="solid"/>
+          </a:ln>
+        </p:spPr>
+      </p:sp>
+      <p:sp>
+        <p:nvSpPr>
+          <p:cNvPr id="18" name="Shape 16"/>
+          <p:cNvSpPr/>
+          <p:nvPr/>
+        </p:nvSpPr>
+        <p:spPr>
+          <a:xfrm>
+            <a:off x="8202168" y="3630168"/>
+            <a:ext cx="1170432" cy="118872"/>
+          </a:xfrm>
+          <a:prstGeom prst="line">
+            <a:avLst/>
+          </a:prstGeom>
+          <a:noFill/>
+          <a:ln w="25400">
+            <a:solidFill>
+              <a:srgbClr val="8ABBD8"/>
+            </a:solidFill>
+            <a:prstDash val="solid"/>
+          </a:ln>
+        </p:spPr>
+      </p:sp>
+      <p:sp>
+        <p:nvSpPr>
+          <p:cNvPr id="19" name="Shape 17"/>
+          <p:cNvSpPr/>
+          <p:nvPr/>
+        </p:nvSpPr>
+        <p:spPr>
+          <a:xfrm>
+            <a:off x="10543032" y="3630168"/>
+            <a:ext cx="-1170432" cy="118872"/>
+          </a:xfrm>
+          <a:prstGeom prst="line">
+            <a:avLst/>
+          </a:prstGeom>
+          <a:noFill/>
+          <a:ln w="25400">
+            <a:solidFill>
+              <a:srgbClr val="8ABBD8"/>
+            </a:solidFill>
+            <a:prstDash val="solid"/>
+          </a:ln>
+        </p:spPr>
+      </p:sp>
+      <p:sp>
+        <p:nvSpPr>
+          <p:cNvPr id="20" name="Text 18"/>
+          <p:cNvSpPr/>
+          <p:nvPr/>
+        </p:nvSpPr>
+        <p:spPr>
+          <a:xfrm>
+            <a:off x="7863840" y="4069080"/>
+            <a:ext cx="3017520" cy="164592"/>
           </a:xfrm>
           <a:prstGeom prst="rect">
             <a:avLst/>
@@ -3396,79 +3602,38 @@
           <a:bodyPr wrap="square" lIns="0" tIns="0" rIns="0" bIns="0" rtlCol="0" anchor="ctr"/>
           <a:lstStyle/>
           <a:p>
-            <a:pPr indent="0" marL="0">
-              <a:buNone/>
-            </a:pPr>
-            <a:r>
-              <a:rPr lang="en-US" sz="1300" b="1" dirty="0">
-                <a:solidFill>
-                  <a:srgbClr val="0068B7"/>
-                </a:solidFill>
-                <a:latin typeface="Aptos" pitchFamily="34" charset="0"/>
-                <a:ea typeface="Aptos" pitchFamily="34" charset="-122"/>
-                <a:cs typeface="Aptos" pitchFamily="34" charset="-120"/>
-              </a:rPr>
-              <a:t>Key idea</a:t>
-            </a:r>
-            <a:endParaRPr lang="en-US" sz="1300" dirty="0"/>
-          </a:p>
-        </p:txBody>
-      </p:sp>
-      <p:sp>
-        <p:nvSpPr>
-          <p:cNvPr id="14" name="Text 12"/>
-          <p:cNvSpPr/>
-          <p:nvPr/>
-        </p:nvSpPr>
-        <p:spPr>
-          <a:xfrm>
-            <a:off x="8074152" y="1920240"/>
-            <a:ext cx="2825496" cy="1188720"/>
-          </a:xfrm>
-          <a:prstGeom prst="rect">
-            <a:avLst/>
-          </a:prstGeom>
-          <a:noFill/>
-          <a:ln/>
-        </p:spPr>
-        <p:txBody>
-          <a:bodyPr wrap="square" lIns="0" tIns="0" rIns="0" bIns="0" rtlCol="0" anchor="t">
-            <a:normAutofit/>
-          </a:bodyPr>
-          <a:lstStyle/>
-          <a:p>
-            <a:pPr indent="0" marL="0">
-              <a:buNone/>
-            </a:pPr>
-            <a:r>
-              <a:rPr lang="en-US" sz="1550" dirty="0">
-                <a:solidFill>
-                  <a:srgbClr val="17364A"/>
-                </a:solidFill>
-                <a:latin typeface="Aptos" pitchFamily="34" charset="0"/>
-                <a:ea typeface="Aptos" pitchFamily="34" charset="-122"/>
-                <a:cs typeface="Aptos" pitchFamily="34" charset="-120"/>
-              </a:rPr>
-              <a:t>Transparency reporting should be risk-based.</a:t>
-            </a:r>
-            <a:endParaRPr lang="en-US" sz="1550" dirty="0"/>
-          </a:p>
-        </p:txBody>
-      </p:sp>
-      <p:sp>
-        <p:nvSpPr>
-          <p:cNvPr id="15" name="Shape 13"/>
-          <p:cNvSpPr/>
-          <p:nvPr/>
-        </p:nvSpPr>
-        <p:spPr>
-          <a:xfrm>
-            <a:off x="7909560" y="3520440"/>
-            <a:ext cx="3154680" cy="1737360"/>
+            <a:pPr algn="ctr" indent="0" marL="0">
+              <a:buNone/>
+            </a:pPr>
+            <a:r>
+              <a:rPr lang="en-US" sz="900" b="1" dirty="0">
+                <a:solidFill>
+                  <a:srgbClr val="003A63"/>
+                </a:solidFill>
+                <a:latin typeface="Aptos" pitchFamily="34" charset="0"/>
+                <a:ea typeface="Aptos" pitchFamily="34" charset="-122"/>
+                <a:cs typeface="Aptos" pitchFamily="34" charset="-120"/>
+              </a:rPr>
+              <a:t>Decision rights</a:t>
+            </a:r>
+            <a:endParaRPr lang="en-US" sz="900" dirty="0"/>
+          </a:p>
+        </p:txBody>
+      </p:sp>
+      <p:sp>
+        <p:nvSpPr>
+          <p:cNvPr id="21" name="Shape 19"/>
+          <p:cNvSpPr/>
+          <p:nvPr/>
+        </p:nvSpPr>
+        <p:spPr>
+          <a:xfrm>
+            <a:off x="7635240" y="4498848"/>
+            <a:ext cx="3474720" cy="1143000"/>
           </a:xfrm>
           <a:prstGeom prst="roundRect">
             <a:avLst>
-              <a:gd name="adj" fmla="val 6316"/>
+              <a:gd name="adj" fmla="val 9600"/>
             </a:avLst>
           </a:prstGeom>
           <a:solidFill>
@@ -3484,14 +3649,14 @@
       </p:sp>
       <p:sp>
         <p:nvSpPr>
-          <p:cNvPr id="16" name="Text 14"/>
-          <p:cNvSpPr/>
-          <p:nvPr/>
-        </p:nvSpPr>
-        <p:spPr>
-          <a:xfrm>
-            <a:off x="8074152" y="3666744"/>
-            <a:ext cx="2825496" cy="256032"/>
+          <p:cNvPr id="22" name="Text 20"/>
+          <p:cNvSpPr/>
+          <p:nvPr/>
+        </p:nvSpPr>
+        <p:spPr>
+          <a:xfrm>
+            <a:off x="7799832" y="4645152"/>
+            <a:ext cx="3145536" cy="256032"/>
           </a:xfrm>
           <a:prstGeom prst="rect">
             <a:avLst/>
@@ -3515,7 +3680,7 @@
                 <a:ea typeface="Aptos" pitchFamily="34" charset="-122"/>
                 <a:cs typeface="Aptos" pitchFamily="34" charset="-120"/>
               </a:rPr>
-              <a:t>Use this for</a:t>
+              <a:t>What to document</a:t>
             </a:r>
             <a:endParaRPr lang="en-US" sz="1300" dirty="0"/>
           </a:p>
@@ -3523,14 +3688,14 @@
       </p:sp>
       <p:sp>
         <p:nvSpPr>
-          <p:cNvPr id="17" name="Text 15"/>
-          <p:cNvSpPr/>
-          <p:nvPr/>
-        </p:nvSpPr>
-        <p:spPr>
-          <a:xfrm>
-            <a:off x="8074152" y="4023360"/>
-            <a:ext cx="2825496" cy="1097280"/>
+          <p:cNvPr id="23" name="Text 21"/>
+          <p:cNvSpPr/>
+          <p:nvPr/>
+        </p:nvSpPr>
+        <p:spPr>
+          <a:xfrm>
+            <a:off x="7799832" y="5001768"/>
+            <a:ext cx="3145536" cy="502920"/>
           </a:xfrm>
           <a:prstGeom prst="rect">
             <a:avLst/>
@@ -3556,7 +3721,7 @@
                 <a:ea typeface="Aptos" pitchFamily="34" charset="-122"/>
                 <a:cs typeface="Aptos" pitchFamily="34" charset="-120"/>
               </a:rPr>
-              <a:t>Connect the concept to public health decisions, safeguards, documentation, or implementation work.</a:t>
+              <a:t>Translate this concept into clear decision rights, review steps, documentation expectations, and escalation paths before an AI-supported workflow is approved.</a:t>
             </a:r>
             <a:endParaRPr lang="en-US" sz="1550" dirty="0"/>
           </a:p>
@@ -3730,8 +3895,8 @@
         </p:nvSpPr>
         <p:spPr>
           <a:xfrm>
-            <a:off x="9966960" y="6537960"/>
-            <a:ext cx="1645920" cy="201168"/>
+            <a:off x="9646920" y="6537960"/>
+            <a:ext cx="1965960" cy="201168"/>
           </a:xfrm>
           <a:prstGeom prst="rect">
             <a:avLst/>
@@ -3755,7 +3920,7 @@
                 <a:ea typeface="Aptos" pitchFamily="34" charset="-122"/>
                 <a:cs typeface="Aptos" pitchFamily="34" charset="-120"/>
               </a:rPr>
-              <a:t>Â© Paula Soper</a:t>
+              <a:t>Copyright Paula Soper</a:t>
             </a:r>
             <a:endParaRPr lang="en-US" sz="800" dirty="0"/>
           </a:p>
@@ -3802,77 +3967,13 @@
       </p:sp>
       <p:sp>
         <p:nvSpPr>
-          <p:cNvPr id="8" name="Shape 6"/>
+          <p:cNvPr id="8" name="Text 6"/>
           <p:cNvSpPr/>
           <p:nvPr/>
         </p:nvSpPr>
         <p:spPr>
           <a:xfrm>
             <a:off x="640080" y="658368"/>
-            <a:ext cx="420624" cy="420624"/>
-          </a:xfrm>
-          <a:prstGeom prst="ellipse">
-            <a:avLst/>
-          </a:prstGeom>
-          <a:solidFill>
-            <a:srgbClr val="0068B7"/>
-          </a:solidFill>
-          <a:ln w="12700">
-            <a:solidFill>
-              <a:srgbClr val="0068B7"/>
-            </a:solidFill>
-            <a:prstDash val="solid"/>
-          </a:ln>
-        </p:spPr>
-      </p:sp>
-      <p:sp>
-        <p:nvSpPr>
-          <p:cNvPr id="9" name="Text 7"/>
-          <p:cNvSpPr/>
-          <p:nvPr/>
-        </p:nvSpPr>
-        <p:spPr>
-          <a:xfrm>
-            <a:off x="640080" y="731520"/>
-            <a:ext cx="420624" cy="164592"/>
-          </a:xfrm>
-          <a:prstGeom prst="rect">
-            <a:avLst/>
-          </a:prstGeom>
-          <a:noFill/>
-          <a:ln/>
-        </p:spPr>
-        <p:txBody>
-          <a:bodyPr wrap="square" lIns="0" tIns="0" rIns="0" bIns="0" rtlCol="0" anchor="ctr"/>
-          <a:lstStyle/>
-          <a:p>
-            <a:pPr algn="ctr" indent="0" marL="0">
-              <a:buNone/>
-            </a:pPr>
-            <a:r>
-              <a:rPr lang="en-US" sz="1100" b="1" dirty="0">
-                <a:solidFill>
-                  <a:srgbClr val="FFFFFF"/>
-                </a:solidFill>
-                <a:latin typeface="Aptos" pitchFamily="34" charset="0"/>
-                <a:ea typeface="Aptos" pitchFamily="34" charset="-122"/>
-                <a:cs typeface="Aptos" pitchFamily="34" charset="-120"/>
-              </a:rPr>
-              <a:t>7</a:t>
-            </a:r>
-            <a:endParaRPr lang="en-US" sz="1100" dirty="0"/>
-          </a:p>
-        </p:txBody>
-      </p:sp>
-      <p:sp>
-        <p:nvSpPr>
-          <p:cNvPr id="10" name="Text 8"/>
-          <p:cNvSpPr/>
-          <p:nvPr/>
-        </p:nvSpPr>
-        <p:spPr>
-          <a:xfrm>
-            <a:off x="640080" y="621792"/>
             <a:ext cx="10881360" cy="713232"/>
           </a:xfrm>
           <a:prstGeom prst="rect">
@@ -3907,14 +4008,14 @@
       </p:sp>
       <p:sp>
         <p:nvSpPr>
-          <p:cNvPr id="11" name="Text 9"/>
+          <p:cNvPr id="9" name="Text 7"/>
           <p:cNvSpPr/>
           <p:nvPr/>
         </p:nvSpPr>
         <p:spPr>
           <a:xfrm>
             <a:off x="868680" y="1508760"/>
-            <a:ext cx="6537960" cy="4160520"/>
+            <a:ext cx="6309360" cy="4160520"/>
           </a:xfrm>
           <a:prstGeom prst="rect">
             <a:avLst/>
@@ -3973,18 +4074,18 @@
       </p:sp>
       <p:sp>
         <p:nvSpPr>
-          <p:cNvPr id="12" name="Shape 10"/>
-          <p:cNvSpPr/>
-          <p:nvPr/>
-        </p:nvSpPr>
-        <p:spPr>
-          <a:xfrm>
-            <a:off x="7909560" y="1417320"/>
-            <a:ext cx="3154680" cy="1828800"/>
+          <p:cNvPr id="10" name="Shape 8"/>
+          <p:cNvSpPr/>
+          <p:nvPr/>
+        </p:nvSpPr>
+        <p:spPr>
+          <a:xfrm>
+            <a:off x="7635240" y="1325880"/>
+            <a:ext cx="3474720" cy="1325880"/>
           </a:xfrm>
           <a:prstGeom prst="roundRect">
             <a:avLst>
-              <a:gd name="adj" fmla="val 6000"/>
+              <a:gd name="adj" fmla="val 8276"/>
             </a:avLst>
           </a:prstGeom>
           <a:solidFill>
@@ -4000,14 +4101,14 @@
       </p:sp>
       <p:sp>
         <p:nvSpPr>
-          <p:cNvPr id="13" name="Text 11"/>
-          <p:cNvSpPr/>
-          <p:nvPr/>
-        </p:nvSpPr>
-        <p:spPr>
-          <a:xfrm>
-            <a:off x="8074152" y="1563624"/>
-            <a:ext cx="2825496" cy="256032"/>
+          <p:cNvPr id="11" name="Text 9"/>
+          <p:cNvSpPr/>
+          <p:nvPr/>
+        </p:nvSpPr>
+        <p:spPr>
+          <a:xfrm>
+            <a:off x="7799832" y="1472184"/>
+            <a:ext cx="3145536" cy="256032"/>
           </a:xfrm>
           <a:prstGeom prst="rect">
             <a:avLst/>
@@ -4031,7 +4132,7 @@
                 <a:ea typeface="Aptos" pitchFamily="34" charset="-122"/>
                 <a:cs typeface="Aptos" pitchFamily="34" charset="-120"/>
               </a:rPr>
-              <a:t>Key idea</a:t>
+              <a:t>Governance lens</a:t>
             </a:r>
             <a:endParaRPr lang="en-US" sz="1300" dirty="0"/>
           </a:p>
@@ -4039,14 +4140,14 @@
       </p:sp>
       <p:sp>
         <p:nvSpPr>
-          <p:cNvPr id="14" name="Text 12"/>
-          <p:cNvSpPr/>
-          <p:nvPr/>
-        </p:nvSpPr>
-        <p:spPr>
-          <a:xfrm>
-            <a:off x="8074152" y="1920240"/>
-            <a:ext cx="2825496" cy="1188720"/>
+          <p:cNvPr id="12" name="Text 10"/>
+          <p:cNvSpPr/>
+          <p:nvPr/>
+        </p:nvSpPr>
+        <p:spPr>
+          <a:xfrm>
+            <a:off x="7799832" y="1828800"/>
+            <a:ext cx="3145536" cy="685800"/>
           </a:xfrm>
           <a:prstGeom prst="rect">
             <a:avLst/>
@@ -4080,18 +4181,171 @@
       </p:sp>
       <p:sp>
         <p:nvSpPr>
-          <p:cNvPr id="15" name="Shape 13"/>
-          <p:cNvSpPr/>
-          <p:nvPr/>
-        </p:nvSpPr>
-        <p:spPr>
-          <a:xfrm>
-            <a:off x="7909560" y="3520440"/>
-            <a:ext cx="3154680" cy="1737360"/>
+          <p:cNvPr id="13" name="Shape 11"/>
+          <p:cNvSpPr/>
+          <p:nvPr/>
+        </p:nvSpPr>
+        <p:spPr>
+          <a:xfrm>
+            <a:off x="7635240" y="2788920"/>
+            <a:ext cx="3474720" cy="1536192"/>
           </a:xfrm>
           <a:prstGeom prst="roundRect">
             <a:avLst>
-              <a:gd name="adj" fmla="val 6316"/>
+              <a:gd name="adj" fmla="val 7143"/>
+            </a:avLst>
+          </a:prstGeom>
+          <a:solidFill>
+            <a:srgbClr val="FFFFFF">
+              <a:alpha val="88000"/>
+            </a:srgbClr>
+          </a:solidFill>
+          <a:ln w="12700">
+            <a:solidFill>
+              <a:srgbClr val="D6E8F2"/>
+            </a:solidFill>
+            <a:prstDash val="solid"/>
+          </a:ln>
+        </p:spPr>
+      </p:sp>
+      <p:sp>
+        <p:nvSpPr>
+          <p:cNvPr id="14" name="Shape 12"/>
+          <p:cNvSpPr/>
+          <p:nvPr/>
+        </p:nvSpPr>
+        <p:spPr>
+          <a:xfrm>
+            <a:off x="8046720" y="3108960"/>
+            <a:ext cx="2651760" cy="896112"/>
+          </a:xfrm>
+          <a:prstGeom prst="arc">
+            <a:avLst/>
+          </a:prstGeom>
+          <a:noFill/>
+          <a:ln w="25400">
+            <a:solidFill>
+              <a:srgbClr val="0068B7"/>
+            </a:solidFill>
+            <a:prstDash val="solid"/>
+          </a:ln>
+        </p:spPr>
+      </p:sp>
+      <p:sp>
+        <p:nvSpPr>
+          <p:cNvPr id="15" name="Text 13"/>
+          <p:cNvSpPr/>
+          <p:nvPr/>
+        </p:nvSpPr>
+        <p:spPr>
+          <a:xfrm>
+            <a:off x="7909560" y="3099816"/>
+            <a:ext cx="2926080" cy="256032"/>
+          </a:xfrm>
+          <a:prstGeom prst="rect">
+            <a:avLst/>
+          </a:prstGeom>
+          <a:noFill/>
+          <a:ln/>
+        </p:spPr>
+        <p:txBody>
+          <a:bodyPr wrap="square" lIns="0" tIns="0" rIns="0" bIns="0" rtlCol="0" anchor="ctr"/>
+          <a:lstStyle/>
+          <a:p>
+            <a:pPr algn="ctr" indent="0" marL="0">
+              <a:buNone/>
+            </a:pPr>
+            <a:r>
+              <a:rPr lang="en-US" sz="1500" b="1" dirty="0">
+                <a:solidFill>
+                  <a:srgbClr val="003A63"/>
+                </a:solidFill>
+                <a:latin typeface="Aptos" pitchFamily="34" charset="0"/>
+                <a:ea typeface="Aptos" pitchFamily="34" charset="-122"/>
+                <a:cs typeface="Aptos" pitchFamily="34" charset="-120"/>
+              </a:rPr>
+              <a:t>Risk</a:t>
+            </a:r>
+            <a:endParaRPr lang="en-US" sz="1500" dirty="0"/>
+          </a:p>
+        </p:txBody>
+      </p:sp>
+      <p:sp>
+        <p:nvSpPr>
+          <p:cNvPr id="16" name="Shape 14"/>
+          <p:cNvSpPr/>
+          <p:nvPr/>
+        </p:nvSpPr>
+        <p:spPr>
+          <a:xfrm>
+            <a:off x="8366760" y="3639312"/>
+            <a:ext cx="2011680" cy="0"/>
+          </a:xfrm>
+          <a:prstGeom prst="line">
+            <a:avLst/>
+          </a:prstGeom>
+          <a:noFill/>
+          <a:ln w="63500">
+            <a:solidFill>
+              <a:srgbClr val="2F8A28"/>
+            </a:solidFill>
+            <a:prstDash val="solid"/>
+          </a:ln>
+        </p:spPr>
+      </p:sp>
+      <p:sp>
+        <p:nvSpPr>
+          <p:cNvPr id="17" name="Text 15"/>
+          <p:cNvSpPr/>
+          <p:nvPr/>
+        </p:nvSpPr>
+        <p:spPr>
+          <a:xfrm>
+            <a:off x="7909560" y="3849624"/>
+            <a:ext cx="2926080" cy="164592"/>
+          </a:xfrm>
+          <a:prstGeom prst="rect">
+            <a:avLst/>
+          </a:prstGeom>
+          <a:noFill/>
+          <a:ln/>
+        </p:spPr>
+        <p:txBody>
+          <a:bodyPr wrap="square" lIns="0" tIns="0" rIns="0" bIns="0" rtlCol="0" anchor="ctr"/>
+          <a:lstStyle/>
+          <a:p>
+            <a:pPr algn="ctr" indent="0" marL="0">
+              <a:buNone/>
+            </a:pPr>
+            <a:r>
+              <a:rPr lang="en-US" sz="900" dirty="0">
+                <a:solidFill>
+                  <a:srgbClr val="003A63"/>
+                </a:solidFill>
+                <a:latin typeface="Aptos" pitchFamily="34" charset="0"/>
+                <a:ea typeface="Aptos" pitchFamily="34" charset="-122"/>
+                <a:cs typeface="Aptos" pitchFamily="34" charset="-120"/>
+              </a:rPr>
+              <a:t>Human review</a:t>
+            </a:r>
+            <a:endParaRPr lang="en-US" sz="900" dirty="0"/>
+          </a:p>
+        </p:txBody>
+      </p:sp>
+      <p:sp>
+        <p:nvSpPr>
+          <p:cNvPr id="18" name="Shape 16"/>
+          <p:cNvSpPr/>
+          <p:nvPr/>
+        </p:nvSpPr>
+        <p:spPr>
+          <a:xfrm>
+            <a:off x="7635240" y="4498848"/>
+            <a:ext cx="3474720" cy="1143000"/>
+          </a:xfrm>
+          <a:prstGeom prst="roundRect">
+            <a:avLst>
+              <a:gd name="adj" fmla="val 9600"/>
             </a:avLst>
           </a:prstGeom>
           <a:solidFill>
@@ -4107,14 +4361,14 @@
       </p:sp>
       <p:sp>
         <p:nvSpPr>
-          <p:cNvPr id="16" name="Text 14"/>
-          <p:cNvSpPr/>
-          <p:nvPr/>
-        </p:nvSpPr>
-        <p:spPr>
-          <a:xfrm>
-            <a:off x="8074152" y="3666744"/>
-            <a:ext cx="2825496" cy="256032"/>
+          <p:cNvPr id="19" name="Text 17"/>
+          <p:cNvSpPr/>
+          <p:nvPr/>
+        </p:nvSpPr>
+        <p:spPr>
+          <a:xfrm>
+            <a:off x="7799832" y="4645152"/>
+            <a:ext cx="3145536" cy="256032"/>
           </a:xfrm>
           <a:prstGeom prst="rect">
             <a:avLst/>
@@ -4138,7 +4392,7 @@
                 <a:ea typeface="Aptos" pitchFamily="34" charset="-122"/>
                 <a:cs typeface="Aptos" pitchFamily="34" charset="-120"/>
               </a:rPr>
-              <a:t>Use this for</a:t>
+              <a:t>What to document</a:t>
             </a:r>
             <a:endParaRPr lang="en-US" sz="1300" dirty="0"/>
           </a:p>
@@ -4146,14 +4400,14 @@
       </p:sp>
       <p:sp>
         <p:nvSpPr>
-          <p:cNvPr id="17" name="Text 15"/>
-          <p:cNvSpPr/>
-          <p:nvPr/>
-        </p:nvSpPr>
-        <p:spPr>
-          <a:xfrm>
-            <a:off x="8074152" y="4023360"/>
-            <a:ext cx="2825496" cy="1097280"/>
+          <p:cNvPr id="20" name="Text 18"/>
+          <p:cNvSpPr/>
+          <p:nvPr/>
+        </p:nvSpPr>
+        <p:spPr>
+          <a:xfrm>
+            <a:off x="7799832" y="5001768"/>
+            <a:ext cx="3145536" cy="502920"/>
           </a:xfrm>
           <a:prstGeom prst="rect">
             <a:avLst/>
@@ -4179,7 +4433,7 @@
                 <a:ea typeface="Aptos" pitchFamily="34" charset="-122"/>
                 <a:cs typeface="Aptos" pitchFamily="34" charset="-120"/>
               </a:rPr>
-              <a:t>Connect the concept to public health decisions, safeguards, documentation, or implementation work.</a:t>
+              <a:t>Identify what could go wrong, who could be affected, what safeguards are needed, and what evidence should be reviewed before use expands.</a:t>
             </a:r>
             <a:endParaRPr lang="en-US" sz="1550" dirty="0"/>
           </a:p>
@@ -4353,8 +4607,8 @@
         </p:nvSpPr>
         <p:spPr>
           <a:xfrm>
-            <a:off x="9966960" y="6537960"/>
-            <a:ext cx="1645920" cy="201168"/>
+            <a:off x="9646920" y="6537960"/>
+            <a:ext cx="1965960" cy="201168"/>
           </a:xfrm>
           <a:prstGeom prst="rect">
             <a:avLst/>
@@ -4378,7 +4632,7 @@
                 <a:ea typeface="Aptos" pitchFamily="34" charset="-122"/>
                 <a:cs typeface="Aptos" pitchFamily="34" charset="-120"/>
               </a:rPr>
-              <a:t>Â© Paula Soper</a:t>
+              <a:t>Copyright Paula Soper</a:t>
             </a:r>
             <a:endParaRPr lang="en-US" sz="800" dirty="0"/>
           </a:p>
@@ -4425,17 +4679,262 @@
       </p:sp>
       <p:sp>
         <p:nvSpPr>
-          <p:cNvPr id="8" name="Shape 6"/>
+          <p:cNvPr id="8" name="Text 6"/>
           <p:cNvSpPr/>
           <p:nvPr/>
         </p:nvSpPr>
         <p:spPr>
           <a:xfrm>
             <a:off x="640080" y="658368"/>
-            <a:ext cx="420624" cy="420624"/>
-          </a:xfrm>
-          <a:prstGeom prst="ellipse">
-            <a:avLst/>
+            <a:ext cx="10881360" cy="713232"/>
+          </a:xfrm>
+          <a:prstGeom prst="rect">
+            <a:avLst/>
+          </a:prstGeom>
+          <a:noFill/>
+          <a:ln/>
+        </p:spPr>
+        <p:txBody>
+          <a:bodyPr wrap="square" lIns="0" tIns="0" rIns="0" bIns="0" rtlCol="0" anchor="ctr">
+            <a:normAutofit/>
+          </a:bodyPr>
+          <a:lstStyle/>
+          <a:p>
+            <a:pPr indent="0" marL="0">
+              <a:buNone/>
+            </a:pPr>
+            <a:r>
+              <a:rPr lang="en-US" sz="3400" b="1" dirty="0">
+                <a:solidFill>
+                  <a:srgbClr val="003A63"/>
+                </a:solidFill>
+                <a:latin typeface="Aptos Display" pitchFamily="34" charset="0"/>
+                <a:ea typeface="Aptos Display" pitchFamily="34" charset="-122"/>
+                <a:cs typeface="Aptos Display" pitchFamily="34" charset="-120"/>
+              </a:rPr>
+              <a:t>Application to AI-Supported Workflows</a:t>
+            </a:r>
+            <a:endParaRPr lang="en-US" sz="3400" dirty="0"/>
+          </a:p>
+        </p:txBody>
+      </p:sp>
+      <p:sp>
+        <p:nvSpPr>
+          <p:cNvPr id="9" name="Text 7"/>
+          <p:cNvSpPr/>
+          <p:nvPr/>
+        </p:nvSpPr>
+        <p:spPr>
+          <a:xfrm>
+            <a:off x="868680" y="1508760"/>
+            <a:ext cx="6309360" cy="4160520"/>
+          </a:xfrm>
+          <a:prstGeom prst="rect">
+            <a:avLst/>
+          </a:prstGeom>
+          <a:noFill/>
+          <a:ln/>
+        </p:spPr>
+        <p:txBody>
+          <a:bodyPr wrap="square" lIns="635" tIns="635" rIns="635" bIns="635" rtlCol="0" anchor="t">
+            <a:normAutofit/>
+          </a:bodyPr>
+          <a:lstStyle/>
+          <a:p>
+            <a:r>
+              <a:rPr lang="en-US" sz="2100" dirty="0">
+                <a:solidFill>
+                  <a:srgbClr val="17364A"/>
+                </a:solidFill>
+                <a:latin typeface="Aptos" pitchFamily="34" charset="0"/>
+                <a:ea typeface="Aptos" pitchFamily="34" charset="-122"/>
+                <a:cs typeface="Aptos" pitchFamily="34" charset="-120"/>
+              </a:rPr>
+              <a:t>Generative AI transparency may explain when AI assists drafting and how human review occurs.</a:t>
+            </a:r>
+            <a:endParaRPr lang="en-US" sz="2100" dirty="0"/>
+          </a:p>
+          <a:p>
+            <a:r>
+              <a:rPr lang="en-US" sz="2100" dirty="0">
+                <a:solidFill>
+                  <a:srgbClr val="17364A"/>
+                </a:solidFill>
+                <a:latin typeface="Aptos" pitchFamily="34" charset="0"/>
+                <a:ea typeface="Aptos" pitchFamily="34" charset="-122"/>
+                <a:cs typeface="Aptos" pitchFamily="34" charset="-120"/>
+              </a:rPr>
+              <a:t>Predictive analytics transparency may explain what the model supports, what decisions remain human, and.</a:t>
+            </a:r>
+            <a:endParaRPr lang="en-US" sz="2100" dirty="0"/>
+          </a:p>
+          <a:p>
+            <a:r>
+              <a:rPr lang="en-US" sz="2100" dirty="0">
+                <a:solidFill>
+                  <a:srgbClr val="17364A"/>
+                </a:solidFill>
+                <a:latin typeface="Aptos" pitchFamily="34" charset="0"/>
+                <a:ea typeface="Aptos" pitchFamily="34" charset="-122"/>
+                <a:cs typeface="Aptos" pitchFamily="34" charset="-120"/>
+              </a:rPr>
+              <a:t>Agentic AI transparency may explain what actions are automated, what approvals are required, and how.</a:t>
+            </a:r>
+            <a:endParaRPr lang="en-US" sz="2100" dirty="0"/>
+          </a:p>
+        </p:txBody>
+      </p:sp>
+      <p:sp>
+        <p:nvSpPr>
+          <p:cNvPr id="10" name="Shape 8"/>
+          <p:cNvSpPr/>
+          <p:nvPr/>
+        </p:nvSpPr>
+        <p:spPr>
+          <a:xfrm>
+            <a:off x="7635240" y="1325880"/>
+            <a:ext cx="3474720" cy="1325880"/>
+          </a:xfrm>
+          <a:prstGeom prst="roundRect">
+            <a:avLst>
+              <a:gd name="adj" fmla="val 8276"/>
+            </a:avLst>
+          </a:prstGeom>
+          <a:solidFill>
+            <a:srgbClr val="EEF8ED"/>
+          </a:solidFill>
+          <a:ln w="12700">
+            <a:solidFill>
+              <a:srgbClr val="B9D7E6"/>
+            </a:solidFill>
+            <a:prstDash val="solid"/>
+          </a:ln>
+        </p:spPr>
+      </p:sp>
+      <p:sp>
+        <p:nvSpPr>
+          <p:cNvPr id="11" name="Text 9"/>
+          <p:cNvSpPr/>
+          <p:nvPr/>
+        </p:nvSpPr>
+        <p:spPr>
+          <a:xfrm>
+            <a:off x="7799832" y="1472184"/>
+            <a:ext cx="3145536" cy="256032"/>
+          </a:xfrm>
+          <a:prstGeom prst="rect">
+            <a:avLst/>
+          </a:prstGeom>
+          <a:noFill/>
+          <a:ln/>
+        </p:spPr>
+        <p:txBody>
+          <a:bodyPr wrap="square" lIns="0" tIns="0" rIns="0" bIns="0" rtlCol="0" anchor="ctr"/>
+          <a:lstStyle/>
+          <a:p>
+            <a:pPr indent="0" marL="0">
+              <a:buNone/>
+            </a:pPr>
+            <a:r>
+              <a:rPr lang="en-US" sz="1300" b="1" dirty="0">
+                <a:solidFill>
+                  <a:srgbClr val="0068B7"/>
+                </a:solidFill>
+                <a:latin typeface="Aptos" pitchFamily="34" charset="0"/>
+                <a:ea typeface="Aptos" pitchFamily="34" charset="-122"/>
+                <a:cs typeface="Aptos" pitchFamily="34" charset="-120"/>
+              </a:rPr>
+              <a:t>Governance lens</a:t>
+            </a:r>
+            <a:endParaRPr lang="en-US" sz="1300" dirty="0"/>
+          </a:p>
+        </p:txBody>
+      </p:sp>
+      <p:sp>
+        <p:nvSpPr>
+          <p:cNvPr id="12" name="Text 10"/>
+          <p:cNvSpPr/>
+          <p:nvPr/>
+        </p:nvSpPr>
+        <p:spPr>
+          <a:xfrm>
+            <a:off x="7799832" y="1828800"/>
+            <a:ext cx="3145536" cy="685800"/>
+          </a:xfrm>
+          <a:prstGeom prst="rect">
+            <a:avLst/>
+          </a:prstGeom>
+          <a:noFill/>
+          <a:ln/>
+        </p:spPr>
+        <p:txBody>
+          <a:bodyPr wrap="square" lIns="0" tIns="0" rIns="0" bIns="0" rtlCol="0" anchor="t">
+            <a:normAutofit/>
+          </a:bodyPr>
+          <a:lstStyle/>
+          <a:p>
+            <a:pPr indent="0" marL="0">
+              <a:buNone/>
+            </a:pPr>
+            <a:r>
+              <a:rPr lang="en-US" sz="1550" dirty="0">
+                <a:solidFill>
+                  <a:srgbClr val="17364A"/>
+                </a:solidFill>
+                <a:latin typeface="Aptos" pitchFamily="34" charset="0"/>
+                <a:ea typeface="Aptos" pitchFamily="34" charset="-122"/>
+                <a:cs typeface="Aptos" pitchFamily="34" charset="-120"/>
+              </a:rPr>
+              <a:t>Generative AI transparency may explain when AI assists drafting and how human review occurs.</a:t>
+            </a:r>
+            <a:endParaRPr lang="en-US" sz="1550" dirty="0"/>
+          </a:p>
+        </p:txBody>
+      </p:sp>
+      <p:sp>
+        <p:nvSpPr>
+          <p:cNvPr id="13" name="Shape 11"/>
+          <p:cNvSpPr/>
+          <p:nvPr/>
+        </p:nvSpPr>
+        <p:spPr>
+          <a:xfrm>
+            <a:off x="7635240" y="2788920"/>
+            <a:ext cx="3474720" cy="1536192"/>
+          </a:xfrm>
+          <a:prstGeom prst="roundRect">
+            <a:avLst>
+              <a:gd name="adj" fmla="val 7143"/>
+            </a:avLst>
+          </a:prstGeom>
+          <a:solidFill>
+            <a:srgbClr val="FFFFFF">
+              <a:alpha val="88000"/>
+            </a:srgbClr>
+          </a:solidFill>
+          <a:ln w="12700">
+            <a:solidFill>
+              <a:srgbClr val="D6E8F2"/>
+            </a:solidFill>
+            <a:prstDash val="solid"/>
+          </a:ln>
+        </p:spPr>
+      </p:sp>
+      <p:sp>
+        <p:nvSpPr>
+          <p:cNvPr id="14" name="Shape 12"/>
+          <p:cNvSpPr/>
+          <p:nvPr/>
+        </p:nvSpPr>
+        <p:spPr>
+          <a:xfrm>
+            <a:off x="7927848" y="3319272"/>
+            <a:ext cx="792480" cy="749808"/>
+          </a:xfrm>
+          <a:prstGeom prst="roundRect">
+            <a:avLst>
+              <a:gd name="adj" fmla="val 14634"/>
+            </a:avLst>
           </a:prstGeom>
           <a:solidFill>
             <a:srgbClr val="0068B7"/>
@@ -4450,53 +4949,14 @@
       </p:sp>
       <p:sp>
         <p:nvSpPr>
-          <p:cNvPr id="9" name="Text 7"/>
-          <p:cNvSpPr/>
-          <p:nvPr/>
-        </p:nvSpPr>
-        <p:spPr>
-          <a:xfrm>
-            <a:off x="640080" y="731520"/>
-            <a:ext cx="420624" cy="164592"/>
-          </a:xfrm>
-          <a:prstGeom prst="rect">
-            <a:avLst/>
-          </a:prstGeom>
-          <a:noFill/>
-          <a:ln/>
-        </p:spPr>
-        <p:txBody>
-          <a:bodyPr wrap="square" lIns="0" tIns="0" rIns="0" bIns="0" rtlCol="0" anchor="ctr"/>
-          <a:lstStyle/>
-          <a:p>
-            <a:pPr algn="ctr" indent="0" marL="0">
-              <a:buNone/>
-            </a:pPr>
-            <a:r>
-              <a:rPr lang="en-US" sz="1100" b="1" dirty="0">
-                <a:solidFill>
-                  <a:srgbClr val="FFFFFF"/>
-                </a:solidFill>
-                <a:latin typeface="Aptos" pitchFamily="34" charset="0"/>
-                <a:ea typeface="Aptos" pitchFamily="34" charset="-122"/>
-                <a:cs typeface="Aptos" pitchFamily="34" charset="-120"/>
-              </a:rPr>
-              <a:t>8</a:t>
-            </a:r>
-            <a:endParaRPr lang="en-US" sz="1100" dirty="0"/>
-          </a:p>
-        </p:txBody>
-      </p:sp>
-      <p:sp>
-        <p:nvSpPr>
-          <p:cNvPr id="10" name="Text 8"/>
-          <p:cNvSpPr/>
-          <p:nvPr/>
-        </p:nvSpPr>
-        <p:spPr>
-          <a:xfrm>
-            <a:off x="640080" y="621792"/>
-            <a:ext cx="10881360" cy="713232"/>
+          <p:cNvPr id="15" name="Text 13"/>
+          <p:cNvSpPr/>
+          <p:nvPr/>
+        </p:nvSpPr>
+        <p:spPr>
+          <a:xfrm>
+            <a:off x="8001000" y="3511296"/>
+            <a:ext cx="646176" cy="310896"/>
           </a:xfrm>
           <a:prstGeom prst="rect">
             <a:avLst/>
@@ -4510,112 +4970,46 @@
           </a:bodyPr>
           <a:lstStyle/>
           <a:p>
-            <a:pPr indent="0" marL="0">
-              <a:buNone/>
-            </a:pPr>
-            <a:r>
-              <a:rPr lang="en-US" sz="3400" b="1" dirty="0">
-                <a:solidFill>
-                  <a:srgbClr val="003A63"/>
-                </a:solidFill>
-                <a:latin typeface="Aptos Display" pitchFamily="34" charset="0"/>
-                <a:ea typeface="Aptos Display" pitchFamily="34" charset="-122"/>
-                <a:cs typeface="Aptos Display" pitchFamily="34" charset="-120"/>
-              </a:rPr>
-              <a:t>Application to AI-Supported Workflows</a:t>
-            </a:r>
-            <a:endParaRPr lang="en-US" sz="3400" dirty="0"/>
-          </a:p>
-        </p:txBody>
-      </p:sp>
-      <p:sp>
-        <p:nvSpPr>
-          <p:cNvPr id="11" name="Text 9"/>
-          <p:cNvSpPr/>
-          <p:nvPr/>
-        </p:nvSpPr>
-        <p:spPr>
-          <a:xfrm>
-            <a:off x="868680" y="1508760"/>
-            <a:ext cx="6537960" cy="4160520"/>
-          </a:xfrm>
-          <a:prstGeom prst="rect">
-            <a:avLst/>
-          </a:prstGeom>
-          <a:noFill/>
-          <a:ln/>
-        </p:spPr>
-        <p:txBody>
-          <a:bodyPr wrap="square" lIns="635" tIns="635" rIns="635" bIns="635" rtlCol="0" anchor="t">
-            <a:normAutofit/>
-          </a:bodyPr>
-          <a:lstStyle/>
-          <a:p>
-            <a:r>
-              <a:rPr lang="en-US" sz="2100" dirty="0">
-                <a:solidFill>
-                  <a:srgbClr val="17364A"/>
-                </a:solidFill>
-                <a:latin typeface="Aptos" pitchFamily="34" charset="0"/>
-                <a:ea typeface="Aptos" pitchFamily="34" charset="-122"/>
-                <a:cs typeface="Aptos" pitchFamily="34" charset="-120"/>
-              </a:rPr>
-              <a:t>Generative AI transparency may explain when AI assists drafting and how human review occurs.</a:t>
-            </a:r>
-            <a:endParaRPr lang="en-US" sz="2100" dirty="0"/>
-          </a:p>
-          <a:p>
-            <a:r>
-              <a:rPr lang="en-US" sz="2100" dirty="0">
-                <a:solidFill>
-                  <a:srgbClr val="17364A"/>
-                </a:solidFill>
-                <a:latin typeface="Aptos" pitchFamily="34" charset="0"/>
-                <a:ea typeface="Aptos" pitchFamily="34" charset="-122"/>
-                <a:cs typeface="Aptos" pitchFamily="34" charset="-120"/>
-              </a:rPr>
-              <a:t>Predictive analytics transparency may explain what the model supports, what decisions remain human, and.</a:t>
-            </a:r>
-            <a:endParaRPr lang="en-US" sz="2100" dirty="0"/>
-          </a:p>
-          <a:p>
-            <a:r>
-              <a:rPr lang="en-US" sz="2100" dirty="0">
-                <a:solidFill>
-                  <a:srgbClr val="17364A"/>
-                </a:solidFill>
-                <a:latin typeface="Aptos" pitchFamily="34" charset="0"/>
-                <a:ea typeface="Aptos" pitchFamily="34" charset="-122"/>
-                <a:cs typeface="Aptos" pitchFamily="34" charset="-120"/>
-              </a:rPr>
-              <a:t>Agentic AI transparency may explain what actions are automated, what approvals are required, and how.</a:t>
-            </a:r>
-            <a:endParaRPr lang="en-US" sz="2100" dirty="0"/>
-          </a:p>
-        </p:txBody>
-      </p:sp>
-      <p:sp>
-        <p:nvSpPr>
-          <p:cNvPr id="12" name="Shape 10"/>
-          <p:cNvSpPr/>
-          <p:nvPr/>
-        </p:nvSpPr>
-        <p:spPr>
-          <a:xfrm>
-            <a:off x="7909560" y="1417320"/>
-            <a:ext cx="3154680" cy="1828800"/>
+            <a:pPr algn="ctr" indent="0" marL="0">
+              <a:buNone/>
+            </a:pPr>
+            <a:r>
+              <a:rPr lang="en-US" sz="1500" b="1" dirty="0">
+                <a:solidFill>
+                  <a:srgbClr val="FFFFFF"/>
+                </a:solidFill>
+                <a:latin typeface="Aptos" pitchFamily="34" charset="0"/>
+                <a:ea typeface="Aptos" pitchFamily="34" charset="-122"/>
+                <a:cs typeface="Aptos" pitchFamily="34" charset="-120"/>
+              </a:rPr>
+              <a:t>Plan</a:t>
+            </a:r>
+            <a:endParaRPr lang="en-US" sz="1500" dirty="0"/>
+          </a:p>
+        </p:txBody>
+      </p:sp>
+      <p:sp>
+        <p:nvSpPr>
+          <p:cNvPr id="16" name="Shape 14"/>
+          <p:cNvSpPr/>
+          <p:nvPr/>
+        </p:nvSpPr>
+        <p:spPr>
+          <a:xfrm>
+            <a:off x="8976360" y="3319272"/>
+            <a:ext cx="792480" cy="749808"/>
           </a:xfrm>
           <a:prstGeom prst="roundRect">
             <a:avLst>
-              <a:gd name="adj" fmla="val 6000"/>
+              <a:gd name="adj" fmla="val 14634"/>
             </a:avLst>
           </a:prstGeom>
           <a:solidFill>
-            <a:srgbClr val="EEF8ED"/>
+            <a:srgbClr val="2F8A28"/>
           </a:solidFill>
           <a:ln w="12700">
             <a:solidFill>
-              <a:srgbClr val="B9D7E6"/>
+              <a:srgbClr val="2F8A28"/>
             </a:solidFill>
             <a:prstDash val="solid"/>
           </a:ln>
@@ -4623,98 +5017,189 @@
       </p:sp>
       <p:sp>
         <p:nvSpPr>
-          <p:cNvPr id="13" name="Text 11"/>
-          <p:cNvSpPr/>
-          <p:nvPr/>
-        </p:nvSpPr>
-        <p:spPr>
-          <a:xfrm>
-            <a:off x="8074152" y="1563624"/>
-            <a:ext cx="2825496" cy="256032"/>
-          </a:xfrm>
-          <a:prstGeom prst="rect">
-            <a:avLst/>
-          </a:prstGeom>
-          <a:noFill/>
-          <a:ln/>
-        </p:spPr>
-        <p:txBody>
-          <a:bodyPr wrap="square" lIns="0" tIns="0" rIns="0" bIns="0" rtlCol="0" anchor="ctr"/>
-          <a:lstStyle/>
-          <a:p>
-            <a:pPr indent="0" marL="0">
-              <a:buNone/>
-            </a:pPr>
-            <a:r>
-              <a:rPr lang="en-US" sz="1300" b="1" dirty="0">
-                <a:solidFill>
-                  <a:srgbClr val="0068B7"/>
-                </a:solidFill>
-                <a:latin typeface="Aptos" pitchFamily="34" charset="0"/>
-                <a:ea typeface="Aptos" pitchFamily="34" charset="-122"/>
-                <a:cs typeface="Aptos" pitchFamily="34" charset="-120"/>
-              </a:rPr>
-              <a:t>Key idea</a:t>
-            </a:r>
-            <a:endParaRPr lang="en-US" sz="1300" dirty="0"/>
-          </a:p>
-        </p:txBody>
-      </p:sp>
-      <p:sp>
-        <p:nvSpPr>
-          <p:cNvPr id="14" name="Text 12"/>
-          <p:cNvSpPr/>
-          <p:nvPr/>
-        </p:nvSpPr>
-        <p:spPr>
-          <a:xfrm>
-            <a:off x="8074152" y="1920240"/>
-            <a:ext cx="2825496" cy="1188720"/>
-          </a:xfrm>
-          <a:prstGeom prst="rect">
-            <a:avLst/>
-          </a:prstGeom>
-          <a:noFill/>
-          <a:ln/>
-        </p:spPr>
-        <p:txBody>
-          <a:bodyPr wrap="square" lIns="0" tIns="0" rIns="0" bIns="0" rtlCol="0" anchor="t">
+          <p:cNvPr id="17" name="Text 15"/>
+          <p:cNvSpPr/>
+          <p:nvPr/>
+        </p:nvSpPr>
+        <p:spPr>
+          <a:xfrm>
+            <a:off x="9049512" y="3511296"/>
+            <a:ext cx="646176" cy="310896"/>
+          </a:xfrm>
+          <a:prstGeom prst="rect">
+            <a:avLst/>
+          </a:prstGeom>
+          <a:noFill/>
+          <a:ln/>
+        </p:spPr>
+        <p:txBody>
+          <a:bodyPr wrap="square" lIns="0" tIns="0" rIns="0" bIns="0" rtlCol="0" anchor="ctr">
             <a:normAutofit/>
           </a:bodyPr>
           <a:lstStyle/>
           <a:p>
-            <a:pPr indent="0" marL="0">
-              <a:buNone/>
-            </a:pPr>
-            <a:r>
-              <a:rPr lang="en-US" sz="1550" dirty="0">
-                <a:solidFill>
-                  <a:srgbClr val="17364A"/>
-                </a:solidFill>
-                <a:latin typeface="Aptos" pitchFamily="34" charset="0"/>
-                <a:ea typeface="Aptos" pitchFamily="34" charset="-122"/>
-                <a:cs typeface="Aptos" pitchFamily="34" charset="-120"/>
-              </a:rPr>
-              <a:t>Generative AI transparency may explain when AI assists drafting and how human review occurs.</a:t>
-            </a:r>
-            <a:endParaRPr lang="en-US" sz="1550" dirty="0"/>
-          </a:p>
-        </p:txBody>
-      </p:sp>
-      <p:sp>
-        <p:nvSpPr>
-          <p:cNvPr id="15" name="Shape 13"/>
-          <p:cNvSpPr/>
-          <p:nvPr/>
-        </p:nvSpPr>
-        <p:spPr>
-          <a:xfrm>
-            <a:off x="7909560" y="3520440"/>
-            <a:ext cx="3154680" cy="1737360"/>
+            <a:pPr algn="ctr" indent="0" marL="0">
+              <a:buNone/>
+            </a:pPr>
+            <a:r>
+              <a:rPr lang="en-US" sz="1500" b="1" dirty="0">
+                <a:solidFill>
+                  <a:srgbClr val="FFFFFF"/>
+                </a:solidFill>
+                <a:latin typeface="Aptos" pitchFamily="34" charset="0"/>
+                <a:ea typeface="Aptos" pitchFamily="34" charset="-122"/>
+                <a:cs typeface="Aptos" pitchFamily="34" charset="-120"/>
+              </a:rPr>
+              <a:t>Do</a:t>
+            </a:r>
+            <a:endParaRPr lang="en-US" sz="1500" dirty="0"/>
+          </a:p>
+        </p:txBody>
+      </p:sp>
+      <p:sp>
+        <p:nvSpPr>
+          <p:cNvPr id="18" name="Shape 16"/>
+          <p:cNvSpPr/>
+          <p:nvPr/>
+        </p:nvSpPr>
+        <p:spPr>
+          <a:xfrm>
+            <a:off x="10024872" y="3319272"/>
+            <a:ext cx="792480" cy="749808"/>
           </a:xfrm>
           <a:prstGeom prst="roundRect">
             <a:avLst>
-              <a:gd name="adj" fmla="val 6316"/>
+              <a:gd name="adj" fmla="val 14634"/>
+            </a:avLst>
+          </a:prstGeom>
+          <a:solidFill>
+            <a:srgbClr val="D69A2D"/>
+          </a:solidFill>
+          <a:ln w="12700">
+            <a:solidFill>
+              <a:srgbClr val="D69A2D"/>
+            </a:solidFill>
+            <a:prstDash val="solid"/>
+          </a:ln>
+        </p:spPr>
+      </p:sp>
+      <p:sp>
+        <p:nvSpPr>
+          <p:cNvPr id="19" name="Text 17"/>
+          <p:cNvSpPr/>
+          <p:nvPr/>
+        </p:nvSpPr>
+        <p:spPr>
+          <a:xfrm>
+            <a:off x="10098024" y="3511296"/>
+            <a:ext cx="646176" cy="310896"/>
+          </a:xfrm>
+          <a:prstGeom prst="rect">
+            <a:avLst/>
+          </a:prstGeom>
+          <a:noFill/>
+          <a:ln/>
+        </p:spPr>
+        <p:txBody>
+          <a:bodyPr wrap="square" lIns="0" tIns="0" rIns="0" bIns="0" rtlCol="0" anchor="ctr">
+            <a:normAutofit/>
+          </a:bodyPr>
+          <a:lstStyle/>
+          <a:p>
+            <a:pPr algn="ctr" indent="0" marL="0">
+              <a:buNone/>
+            </a:pPr>
+            <a:r>
+              <a:rPr lang="en-US" sz="1500" b="1" dirty="0">
+                <a:solidFill>
+                  <a:srgbClr val="FFFFFF"/>
+                </a:solidFill>
+                <a:latin typeface="Aptos" pitchFamily="34" charset="0"/>
+                <a:ea typeface="Aptos" pitchFamily="34" charset="-122"/>
+                <a:cs typeface="Aptos" pitchFamily="34" charset="-120"/>
+              </a:rPr>
+              <a:t>Review</a:t>
+            </a:r>
+            <a:endParaRPr lang="en-US" sz="1500" dirty="0"/>
+          </a:p>
+        </p:txBody>
+      </p:sp>
+      <p:sp>
+        <p:nvSpPr>
+          <p:cNvPr id="20" name="Shape 18"/>
+          <p:cNvSpPr/>
+          <p:nvPr/>
+        </p:nvSpPr>
+        <p:spPr>
+          <a:xfrm>
+            <a:off x="8293608" y="4389120"/>
+            <a:ext cx="2157984" cy="0"/>
+          </a:xfrm>
+          <a:prstGeom prst="line">
+            <a:avLst/>
+          </a:prstGeom>
+          <a:noFill/>
+          <a:ln w="25400">
+            <a:solidFill>
+              <a:srgbClr val="8ABBD8"/>
+            </a:solidFill>
+            <a:prstDash val="solid"/>
+          </a:ln>
+        </p:spPr>
+      </p:sp>
+      <p:sp>
+        <p:nvSpPr>
+          <p:cNvPr id="21" name="Text 19"/>
+          <p:cNvSpPr/>
+          <p:nvPr/>
+        </p:nvSpPr>
+        <p:spPr>
+          <a:xfrm>
+            <a:off x="7909560" y="3977640"/>
+            <a:ext cx="2926080" cy="182880"/>
+          </a:xfrm>
+          <a:prstGeom prst="rect">
+            <a:avLst/>
+          </a:prstGeom>
+          <a:noFill/>
+          <a:ln/>
+        </p:spPr>
+        <p:txBody>
+          <a:bodyPr wrap="square" lIns="0" tIns="0" rIns="0" bIns="0" rtlCol="0" anchor="ctr"/>
+          <a:lstStyle/>
+          <a:p>
+            <a:pPr algn="ctr" indent="0" marL="0">
+              <a:buNone/>
+            </a:pPr>
+            <a:r>
+              <a:rPr lang="en-US" sz="1000" dirty="0">
+                <a:solidFill>
+                  <a:srgbClr val="003A63"/>
+                </a:solidFill>
+                <a:latin typeface="Aptos" pitchFamily="34" charset="0"/>
+                <a:ea typeface="Aptos" pitchFamily="34" charset="-122"/>
+                <a:cs typeface="Aptos" pitchFamily="34" charset="-120"/>
+              </a:rPr>
+              <a:t>Dependencies visible</a:t>
+            </a:r>
+            <a:endParaRPr lang="en-US" sz="1000" dirty="0"/>
+          </a:p>
+        </p:txBody>
+      </p:sp>
+      <p:sp>
+        <p:nvSpPr>
+          <p:cNvPr id="22" name="Shape 20"/>
+          <p:cNvSpPr/>
+          <p:nvPr/>
+        </p:nvSpPr>
+        <p:spPr>
+          <a:xfrm>
+            <a:off x="7635240" y="4498848"/>
+            <a:ext cx="3474720" cy="1143000"/>
+          </a:xfrm>
+          <a:prstGeom prst="roundRect">
+            <a:avLst>
+              <a:gd name="adj" fmla="val 9600"/>
             </a:avLst>
           </a:prstGeom>
           <a:solidFill>
@@ -4730,14 +5215,14 @@
       </p:sp>
       <p:sp>
         <p:nvSpPr>
-          <p:cNvPr id="16" name="Text 14"/>
-          <p:cNvSpPr/>
-          <p:nvPr/>
-        </p:nvSpPr>
-        <p:spPr>
-          <a:xfrm>
-            <a:off x="8074152" y="3666744"/>
-            <a:ext cx="2825496" cy="256032"/>
+          <p:cNvPr id="23" name="Text 21"/>
+          <p:cNvSpPr/>
+          <p:nvPr/>
+        </p:nvSpPr>
+        <p:spPr>
+          <a:xfrm>
+            <a:off x="7799832" y="4645152"/>
+            <a:ext cx="3145536" cy="256032"/>
           </a:xfrm>
           <a:prstGeom prst="rect">
             <a:avLst/>
@@ -4761,7 +5246,7 @@
                 <a:ea typeface="Aptos" pitchFamily="34" charset="-122"/>
                 <a:cs typeface="Aptos" pitchFamily="34" charset="-120"/>
               </a:rPr>
-              <a:t>Use this for</a:t>
+              <a:t>What to document</a:t>
             </a:r>
             <a:endParaRPr lang="en-US" sz="1300" dirty="0"/>
           </a:p>
@@ -4769,14 +5254,14 @@
       </p:sp>
       <p:sp>
         <p:nvSpPr>
-          <p:cNvPr id="17" name="Text 15"/>
-          <p:cNvSpPr/>
-          <p:nvPr/>
-        </p:nvSpPr>
-        <p:spPr>
-          <a:xfrm>
-            <a:off x="8074152" y="4023360"/>
-            <a:ext cx="2825496" cy="1097280"/>
+          <p:cNvPr id="24" name="Text 22"/>
+          <p:cNvSpPr/>
+          <p:nvPr/>
+        </p:nvSpPr>
+        <p:spPr>
+          <a:xfrm>
+            <a:off x="7799832" y="5001768"/>
+            <a:ext cx="3145536" cy="502920"/>
           </a:xfrm>
           <a:prstGeom prst="rect">
             <a:avLst/>
@@ -4802,7 +5287,7 @@
                 <a:ea typeface="Aptos" pitchFamily="34" charset="-122"/>
                 <a:cs typeface="Aptos" pitchFamily="34" charset="-120"/>
               </a:rPr>
-              <a:t>Connect the concept to public health decisions, safeguards, documentation, or implementation work.</a:t>
+              <a:t>Use the concept to clarify workflow changes, dependencies, staffing, procurement requirements, training needs, and implementation checkpoints.</a:t>
             </a:r>
             <a:endParaRPr lang="en-US" sz="1550" dirty="0"/>
           </a:p>
@@ -4976,8 +5461,8 @@
         </p:nvSpPr>
         <p:spPr>
           <a:xfrm>
-            <a:off x="9966960" y="6537960"/>
-            <a:ext cx="1645920" cy="201168"/>
+            <a:off x="9646920" y="6537960"/>
+            <a:ext cx="1965960" cy="201168"/>
           </a:xfrm>
           <a:prstGeom prst="rect">
             <a:avLst/>
@@ -5001,7 +5486,7 @@
                 <a:ea typeface="Aptos" pitchFamily="34" charset="-122"/>
                 <a:cs typeface="Aptos" pitchFamily="34" charset="-120"/>
               </a:rPr>
-              <a:t>Â© Paula Soper</a:t>
+              <a:t>Copyright Paula Soper</a:t>
             </a:r>
             <a:endParaRPr lang="en-US" sz="800" dirty="0"/>
           </a:p>
@@ -5048,77 +5533,13 @@
       </p:sp>
       <p:sp>
         <p:nvSpPr>
-          <p:cNvPr id="8" name="Shape 6"/>
+          <p:cNvPr id="8" name="Text 6"/>
           <p:cNvSpPr/>
           <p:nvPr/>
         </p:nvSpPr>
         <p:spPr>
           <a:xfrm>
             <a:off x="640080" y="658368"/>
-            <a:ext cx="420624" cy="420624"/>
-          </a:xfrm>
-          <a:prstGeom prst="ellipse">
-            <a:avLst/>
-          </a:prstGeom>
-          <a:solidFill>
-            <a:srgbClr val="0068B7"/>
-          </a:solidFill>
-          <a:ln w="12700">
-            <a:solidFill>
-              <a:srgbClr val="0068B7"/>
-            </a:solidFill>
-            <a:prstDash val="solid"/>
-          </a:ln>
-        </p:spPr>
-      </p:sp>
-      <p:sp>
-        <p:nvSpPr>
-          <p:cNvPr id="9" name="Text 7"/>
-          <p:cNvSpPr/>
-          <p:nvPr/>
-        </p:nvSpPr>
-        <p:spPr>
-          <a:xfrm>
-            <a:off x="640080" y="731520"/>
-            <a:ext cx="420624" cy="164592"/>
-          </a:xfrm>
-          <a:prstGeom prst="rect">
-            <a:avLst/>
-          </a:prstGeom>
-          <a:noFill/>
-          <a:ln/>
-        </p:spPr>
-        <p:txBody>
-          <a:bodyPr wrap="square" lIns="0" tIns="0" rIns="0" bIns="0" rtlCol="0" anchor="ctr"/>
-          <a:lstStyle/>
-          <a:p>
-            <a:pPr algn="ctr" indent="0" marL="0">
-              <a:buNone/>
-            </a:pPr>
-            <a:r>
-              <a:rPr lang="en-US" sz="1100" b="1" dirty="0">
-                <a:solidFill>
-                  <a:srgbClr val="FFFFFF"/>
-                </a:solidFill>
-                <a:latin typeface="Aptos" pitchFamily="34" charset="0"/>
-                <a:ea typeface="Aptos" pitchFamily="34" charset="-122"/>
-                <a:cs typeface="Aptos" pitchFamily="34" charset="-120"/>
-              </a:rPr>
-              <a:t>9</a:t>
-            </a:r>
-            <a:endParaRPr lang="en-US" sz="1100" dirty="0"/>
-          </a:p>
-        </p:txBody>
-      </p:sp>
-      <p:sp>
-        <p:nvSpPr>
-          <p:cNvPr id="10" name="Text 8"/>
-          <p:cNvSpPr/>
-          <p:nvPr/>
-        </p:nvSpPr>
-        <p:spPr>
-          <a:xfrm>
-            <a:off x="640080" y="621792"/>
             <a:ext cx="10881360" cy="713232"/>
           </a:xfrm>
           <a:prstGeom prst="rect">
@@ -5153,14 +5574,14 @@
       </p:sp>
       <p:sp>
         <p:nvSpPr>
-          <p:cNvPr id="11" name="Text 9"/>
+          <p:cNvPr id="9" name="Text 7"/>
           <p:cNvSpPr/>
           <p:nvPr/>
         </p:nvSpPr>
         <p:spPr>
           <a:xfrm>
             <a:off x="868680" y="1508760"/>
-            <a:ext cx="6537960" cy="4160520"/>
+            <a:ext cx="6309360" cy="4160520"/>
           </a:xfrm>
           <a:prstGeom prst="rect">
             <a:avLst/>
@@ -5219,18 +5640,18 @@
       </p:sp>
       <p:sp>
         <p:nvSpPr>
-          <p:cNvPr id="12" name="Shape 10"/>
-          <p:cNvSpPr/>
-          <p:nvPr/>
-        </p:nvSpPr>
-        <p:spPr>
-          <a:xfrm>
-            <a:off x="7909560" y="1417320"/>
-            <a:ext cx="3154680" cy="1828800"/>
+          <p:cNvPr id="10" name="Shape 8"/>
+          <p:cNvSpPr/>
+          <p:nvPr/>
+        </p:nvSpPr>
+        <p:spPr>
+          <a:xfrm>
+            <a:off x="7635240" y="1325880"/>
+            <a:ext cx="3474720" cy="1325880"/>
           </a:xfrm>
           <a:prstGeom prst="roundRect">
             <a:avLst>
-              <a:gd name="adj" fmla="val 6000"/>
+              <a:gd name="adj" fmla="val 8276"/>
             </a:avLst>
           </a:prstGeom>
           <a:solidFill>
@@ -5246,14 +5667,14 @@
       </p:sp>
       <p:sp>
         <p:nvSpPr>
-          <p:cNvPr id="13" name="Text 11"/>
-          <p:cNvSpPr/>
-          <p:nvPr/>
-        </p:nvSpPr>
-        <p:spPr>
-          <a:xfrm>
-            <a:off x="8074152" y="1563624"/>
-            <a:ext cx="2825496" cy="256032"/>
+          <p:cNvPr id="11" name="Text 9"/>
+          <p:cNvSpPr/>
+          <p:nvPr/>
+        </p:nvSpPr>
+        <p:spPr>
+          <a:xfrm>
+            <a:off x="7799832" y="1472184"/>
+            <a:ext cx="3145536" cy="256032"/>
           </a:xfrm>
           <a:prstGeom prst="rect">
             <a:avLst/>
@@ -5277,7 +5698,7 @@
                 <a:ea typeface="Aptos" pitchFamily="34" charset="-122"/>
                 <a:cs typeface="Aptos" pitchFamily="34" charset="-120"/>
               </a:rPr>
-              <a:t>Key idea</a:t>
+              <a:t>Governance lens</a:t>
             </a:r>
             <a:endParaRPr lang="en-US" sz="1300" dirty="0"/>
           </a:p>
@@ -5285,14 +5706,14 @@
       </p:sp>
       <p:sp>
         <p:nvSpPr>
-          <p:cNvPr id="14" name="Text 12"/>
-          <p:cNvSpPr/>
-          <p:nvPr/>
-        </p:nvSpPr>
-        <p:spPr>
-          <a:xfrm>
-            <a:off x="8074152" y="1920240"/>
-            <a:ext cx="2825496" cy="1188720"/>
+          <p:cNvPr id="12" name="Text 10"/>
+          <p:cNvSpPr/>
+          <p:nvPr/>
+        </p:nvSpPr>
+        <p:spPr>
+          <a:xfrm>
+            <a:off x="7799832" y="1828800"/>
+            <a:ext cx="3145536" cy="685800"/>
           </a:xfrm>
           <a:prstGeom prst="rect">
             <a:avLst/>
@@ -5326,18 +5747,159 @@
       </p:sp>
       <p:sp>
         <p:nvSpPr>
-          <p:cNvPr id="15" name="Shape 13"/>
-          <p:cNvSpPr/>
-          <p:nvPr/>
-        </p:nvSpPr>
-        <p:spPr>
-          <a:xfrm>
-            <a:off x="7909560" y="3520440"/>
-            <a:ext cx="3154680" cy="1737360"/>
+          <p:cNvPr id="13" name="Shape 11"/>
+          <p:cNvSpPr/>
+          <p:nvPr/>
+        </p:nvSpPr>
+        <p:spPr>
+          <a:xfrm>
+            <a:off x="7635240" y="2788920"/>
+            <a:ext cx="3474720" cy="1536192"/>
           </a:xfrm>
           <a:prstGeom prst="roundRect">
             <a:avLst>
-              <a:gd name="adj" fmla="val 6316"/>
+              <a:gd name="adj" fmla="val 7143"/>
+            </a:avLst>
+          </a:prstGeom>
+          <a:solidFill>
+            <a:srgbClr val="FFFFFF">
+              <a:alpha val="88000"/>
+            </a:srgbClr>
+          </a:solidFill>
+          <a:ln w="12700">
+            <a:solidFill>
+              <a:srgbClr val="D6E8F2"/>
+            </a:solidFill>
+            <a:prstDash val="solid"/>
+          </a:ln>
+        </p:spPr>
+      </p:sp>
+      <p:sp>
+        <p:nvSpPr>
+          <p:cNvPr id="14" name="Shape 12"/>
+          <p:cNvSpPr/>
+          <p:nvPr/>
+        </p:nvSpPr>
+        <p:spPr>
+          <a:xfrm>
+            <a:off x="8074152" y="3291840"/>
+            <a:ext cx="2596896" cy="749808"/>
+          </a:xfrm>
+          <a:prstGeom prst="rect">
+            <a:avLst/>
+          </a:prstGeom>
+          <a:solidFill>
+            <a:srgbClr val="EAF6F8"/>
+          </a:solidFill>
+          <a:ln w="12700">
+            <a:solidFill>
+              <a:srgbClr val="8ABBD8"/>
+            </a:solidFill>
+            <a:prstDash val="solid"/>
+          </a:ln>
+        </p:spPr>
+      </p:sp>
+      <p:sp>
+        <p:nvSpPr>
+          <p:cNvPr id="15" name="Shape 13"/>
+          <p:cNvSpPr/>
+          <p:nvPr/>
+        </p:nvSpPr>
+        <p:spPr>
+          <a:xfrm>
+            <a:off x="8202168" y="3721608"/>
+            <a:ext cx="2340864" cy="0"/>
+          </a:xfrm>
+          <a:prstGeom prst="line">
+            <a:avLst/>
+          </a:prstGeom>
+          <a:noFill/>
+          <a:ln w="19050">
+            <a:solidFill>
+              <a:srgbClr val="0068B7"/>
+            </a:solidFill>
+            <a:prstDash val="solid"/>
+          </a:ln>
+        </p:spPr>
+      </p:sp>
+      <p:sp>
+        <p:nvSpPr>
+          <p:cNvPr id="16" name="Shape 14"/>
+          <p:cNvSpPr/>
+          <p:nvPr/>
+        </p:nvSpPr>
+        <p:spPr>
+          <a:xfrm>
+            <a:off x="9198864" y="4206240"/>
+            <a:ext cx="347472" cy="347472"/>
+          </a:xfrm>
+          <a:prstGeom prst="ellipse">
+            <a:avLst/>
+          </a:prstGeom>
+          <a:solidFill>
+            <a:srgbClr val="2F8A28"/>
+          </a:solidFill>
+          <a:ln w="12700">
+            <a:solidFill>
+              <a:srgbClr val="2F8A28"/>
+            </a:solidFill>
+            <a:prstDash val="solid"/>
+          </a:ln>
+        </p:spPr>
+      </p:sp>
+      <p:sp>
+        <p:nvSpPr>
+          <p:cNvPr id="17" name="Text 15"/>
+          <p:cNvSpPr/>
+          <p:nvPr/>
+        </p:nvSpPr>
+        <p:spPr>
+          <a:xfrm>
+            <a:off x="7909560" y="3977640"/>
+            <a:ext cx="2926080" cy="182880"/>
+          </a:xfrm>
+          <a:prstGeom prst="rect">
+            <a:avLst/>
+          </a:prstGeom>
+          <a:noFill/>
+          <a:ln/>
+        </p:spPr>
+        <p:txBody>
+          <a:bodyPr wrap="square" lIns="0" tIns="0" rIns="0" bIns="0" rtlCol="0" anchor="ctr"/>
+          <a:lstStyle/>
+          <a:p>
+            <a:pPr algn="ctr" indent="0" marL="0">
+              <a:buNone/>
+            </a:pPr>
+            <a:r>
+              <a:rPr lang="en-US" sz="1000" dirty="0">
+                <a:solidFill>
+                  <a:srgbClr val="003A63"/>
+                </a:solidFill>
+                <a:latin typeface="Aptos" pitchFamily="34" charset="0"/>
+                <a:ea typeface="Aptos" pitchFamily="34" charset="-122"/>
+                <a:cs typeface="Aptos" pitchFamily="34" charset="-120"/>
+              </a:rPr>
+              <a:t>Concept to action</a:t>
+            </a:r>
+            <a:endParaRPr lang="en-US" sz="1000" dirty="0"/>
+          </a:p>
+        </p:txBody>
+      </p:sp>
+      <p:sp>
+        <p:nvSpPr>
+          <p:cNvPr id="18" name="Shape 16"/>
+          <p:cNvSpPr/>
+          <p:nvPr/>
+        </p:nvSpPr>
+        <p:spPr>
+          <a:xfrm>
+            <a:off x="7635240" y="4498848"/>
+            <a:ext cx="3474720" cy="1143000"/>
+          </a:xfrm>
+          <a:prstGeom prst="roundRect">
+            <a:avLst>
+              <a:gd name="adj" fmla="val 9600"/>
             </a:avLst>
           </a:prstGeom>
           <a:solidFill>
@@ -5353,14 +5915,14 @@
       </p:sp>
       <p:sp>
         <p:nvSpPr>
-          <p:cNvPr id="16" name="Text 14"/>
-          <p:cNvSpPr/>
-          <p:nvPr/>
-        </p:nvSpPr>
-        <p:spPr>
-          <a:xfrm>
-            <a:off x="8074152" y="3666744"/>
-            <a:ext cx="2825496" cy="256032"/>
+          <p:cNvPr id="19" name="Text 17"/>
+          <p:cNvSpPr/>
+          <p:nvPr/>
+        </p:nvSpPr>
+        <p:spPr>
+          <a:xfrm>
+            <a:off x="7799832" y="4645152"/>
+            <a:ext cx="3145536" cy="256032"/>
           </a:xfrm>
           <a:prstGeom prst="rect">
             <a:avLst/>
@@ -5384,7 +5946,7 @@
                 <a:ea typeface="Aptos" pitchFamily="34" charset="-122"/>
                 <a:cs typeface="Aptos" pitchFamily="34" charset="-120"/>
               </a:rPr>
-              <a:t>Use this for</a:t>
+              <a:t>What to document</a:t>
             </a:r>
             <a:endParaRPr lang="en-US" sz="1300" dirty="0"/>
           </a:p>
@@ -5392,14 +5954,14 @@
       </p:sp>
       <p:sp>
         <p:nvSpPr>
-          <p:cNvPr id="17" name="Text 15"/>
-          <p:cNvSpPr/>
-          <p:nvPr/>
-        </p:nvSpPr>
-        <p:spPr>
-          <a:xfrm>
-            <a:off x="8074152" y="4023360"/>
-            <a:ext cx="2825496" cy="1097280"/>
+          <p:cNvPr id="20" name="Text 18"/>
+          <p:cNvSpPr/>
+          <p:nvPr/>
+        </p:nvSpPr>
+        <p:spPr>
+          <a:xfrm>
+            <a:off x="7799832" y="5001768"/>
+            <a:ext cx="3145536" cy="502920"/>
           </a:xfrm>
           <a:prstGeom prst="rect">
             <a:avLst/>
@@ -5425,7 +5987,7 @@
                 <a:ea typeface="Aptos" pitchFamily="34" charset="-122"/>
                 <a:cs typeface="Aptos" pitchFamily="34" charset="-120"/>
               </a:rPr>
-              <a:t>Connect the concept to public health decisions, safeguards, documentation, or implementation work.</a:t>
+              <a:t>Connect the concept to public health purpose, responsible use, required safeguards, documentation, and the next action a department should take.</a:t>
             </a:r>
             <a:endParaRPr lang="en-US" sz="1550" dirty="0"/>
           </a:p>
@@ -5599,8 +6161,8 @@
         </p:nvSpPr>
         <p:spPr>
           <a:xfrm>
-            <a:off x="9966960" y="6537960"/>
-            <a:ext cx="1645920" cy="201168"/>
+            <a:off x="9646920" y="6537960"/>
+            <a:ext cx="1965960" cy="201168"/>
           </a:xfrm>
           <a:prstGeom prst="rect">
             <a:avLst/>
@@ -5624,7 +6186,7 @@
                 <a:ea typeface="Aptos" pitchFamily="34" charset="-122"/>
                 <a:cs typeface="Aptos" pitchFamily="34" charset="-120"/>
               </a:rPr>
-              <a:t>Â© Paula Soper</a:t>
+              <a:t>Copyright Paula Soper</a:t>
             </a:r>
             <a:endParaRPr lang="en-US" sz="800" dirty="0"/>
           </a:p>
@@ -5719,7 +6281,7 @@
         <p:spPr>
           <a:xfrm>
             <a:off x="868680" y="1508760"/>
-            <a:ext cx="6537960" cy="4160520"/>
+            <a:ext cx="6309360" cy="4160520"/>
           </a:xfrm>
           <a:prstGeom prst="rect">
             <a:avLst/>
@@ -5770,12 +6332,12 @@
         </p:nvSpPr>
         <p:spPr>
           <a:xfrm>
-            <a:off x="7909560" y="1417320"/>
-            <a:ext cx="3154680" cy="1828800"/>
+            <a:off x="7635240" y="1325880"/>
+            <a:ext cx="3474720" cy="1325880"/>
           </a:xfrm>
           <a:prstGeom prst="roundRect">
             <a:avLst>
-              <a:gd name="adj" fmla="val 6000"/>
+              <a:gd name="adj" fmla="val 8276"/>
             </a:avLst>
           </a:prstGeom>
           <a:solidFill>
@@ -5797,8 +6359,8 @@
         </p:nvSpPr>
         <p:spPr>
           <a:xfrm>
-            <a:off x="8074152" y="1563624"/>
-            <a:ext cx="2825496" cy="256032"/>
+            <a:off x="7799832" y="1472184"/>
+            <a:ext cx="3145536" cy="256032"/>
           </a:xfrm>
           <a:prstGeom prst="rect">
             <a:avLst/>
@@ -5822,7 +6384,7 @@
                 <a:ea typeface="Aptos" pitchFamily="34" charset="-122"/>
                 <a:cs typeface="Aptos" pitchFamily="34" charset="-120"/>
               </a:rPr>
-              <a:t>Key idea</a:t>
+              <a:t>Governance lens</a:t>
             </a:r>
             <a:endParaRPr lang="en-US" sz="1300" dirty="0"/>
           </a:p>
@@ -5836,8 +6398,8 @@
         </p:nvSpPr>
         <p:spPr>
           <a:xfrm>
-            <a:off x="8074152" y="1920240"/>
-            <a:ext cx="2825496" cy="1188720"/>
+            <a:off x="7799832" y="1828800"/>
+            <a:ext cx="3145536" cy="685800"/>
           </a:xfrm>
           <a:prstGeom prst="rect">
             <a:avLst/>
@@ -5877,12 +6439,153 @@
         </p:nvSpPr>
         <p:spPr>
           <a:xfrm>
-            <a:off x="7909560" y="3520440"/>
-            <a:ext cx="3154680" cy="1737360"/>
+            <a:off x="7635240" y="2788920"/>
+            <a:ext cx="3474720" cy="1536192"/>
           </a:xfrm>
           <a:prstGeom prst="roundRect">
             <a:avLst>
-              <a:gd name="adj" fmla="val 6316"/>
+              <a:gd name="adj" fmla="val 7143"/>
+            </a:avLst>
+          </a:prstGeom>
+          <a:solidFill>
+            <a:srgbClr val="FFFFFF">
+              <a:alpha val="88000"/>
+            </a:srgbClr>
+          </a:solidFill>
+          <a:ln w="12700">
+            <a:solidFill>
+              <a:srgbClr val="D6E8F2"/>
+            </a:solidFill>
+            <a:prstDash val="solid"/>
+          </a:ln>
+        </p:spPr>
+      </p:sp>
+      <p:sp>
+        <p:nvSpPr>
+          <p:cNvPr id="14" name="Shape 12"/>
+          <p:cNvSpPr/>
+          <p:nvPr/>
+        </p:nvSpPr>
+        <p:spPr>
+          <a:xfrm>
+            <a:off x="8074152" y="3291840"/>
+            <a:ext cx="2596896" cy="749808"/>
+          </a:xfrm>
+          <a:prstGeom prst="rect">
+            <a:avLst/>
+          </a:prstGeom>
+          <a:solidFill>
+            <a:srgbClr val="EAF6F8"/>
+          </a:solidFill>
+          <a:ln w="12700">
+            <a:solidFill>
+              <a:srgbClr val="8ABBD8"/>
+            </a:solidFill>
+            <a:prstDash val="solid"/>
+          </a:ln>
+        </p:spPr>
+      </p:sp>
+      <p:sp>
+        <p:nvSpPr>
+          <p:cNvPr id="15" name="Shape 13"/>
+          <p:cNvSpPr/>
+          <p:nvPr/>
+        </p:nvSpPr>
+        <p:spPr>
+          <a:xfrm>
+            <a:off x="8202168" y="3721608"/>
+            <a:ext cx="2340864" cy="0"/>
+          </a:xfrm>
+          <a:prstGeom prst="line">
+            <a:avLst/>
+          </a:prstGeom>
+          <a:noFill/>
+          <a:ln w="19050">
+            <a:solidFill>
+              <a:srgbClr val="0068B7"/>
+            </a:solidFill>
+            <a:prstDash val="solid"/>
+          </a:ln>
+        </p:spPr>
+      </p:sp>
+      <p:sp>
+        <p:nvSpPr>
+          <p:cNvPr id="16" name="Shape 14"/>
+          <p:cNvSpPr/>
+          <p:nvPr/>
+        </p:nvSpPr>
+        <p:spPr>
+          <a:xfrm>
+            <a:off x="9198864" y="4206240"/>
+            <a:ext cx="347472" cy="347472"/>
+          </a:xfrm>
+          <a:prstGeom prst="ellipse">
+            <a:avLst/>
+          </a:prstGeom>
+          <a:solidFill>
+            <a:srgbClr val="2F8A28"/>
+          </a:solidFill>
+          <a:ln w="12700">
+            <a:solidFill>
+              <a:srgbClr val="2F8A28"/>
+            </a:solidFill>
+            <a:prstDash val="solid"/>
+          </a:ln>
+        </p:spPr>
+      </p:sp>
+      <p:sp>
+        <p:nvSpPr>
+          <p:cNvPr id="17" name="Text 15"/>
+          <p:cNvSpPr/>
+          <p:nvPr/>
+        </p:nvSpPr>
+        <p:spPr>
+          <a:xfrm>
+            <a:off x="7909560" y="3977640"/>
+            <a:ext cx="2926080" cy="182880"/>
+          </a:xfrm>
+          <a:prstGeom prst="rect">
+            <a:avLst/>
+          </a:prstGeom>
+          <a:noFill/>
+          <a:ln/>
+        </p:spPr>
+        <p:txBody>
+          <a:bodyPr wrap="square" lIns="0" tIns="0" rIns="0" bIns="0" rtlCol="0" anchor="ctr"/>
+          <a:lstStyle/>
+          <a:p>
+            <a:pPr algn="ctr" indent="0" marL="0">
+              <a:buNone/>
+            </a:pPr>
+            <a:r>
+              <a:rPr lang="en-US" sz="1000" dirty="0">
+                <a:solidFill>
+                  <a:srgbClr val="003A63"/>
+                </a:solidFill>
+                <a:latin typeface="Aptos" pitchFamily="34" charset="0"/>
+                <a:ea typeface="Aptos" pitchFamily="34" charset="-122"/>
+                <a:cs typeface="Aptos" pitchFamily="34" charset="-120"/>
+              </a:rPr>
+              <a:t>Concept to action</a:t>
+            </a:r>
+            <a:endParaRPr lang="en-US" sz="1000" dirty="0"/>
+          </a:p>
+        </p:txBody>
+      </p:sp>
+      <p:sp>
+        <p:nvSpPr>
+          <p:cNvPr id="18" name="Shape 16"/>
+          <p:cNvSpPr/>
+          <p:nvPr/>
+        </p:nvSpPr>
+        <p:spPr>
+          <a:xfrm>
+            <a:off x="7635240" y="4498848"/>
+            <a:ext cx="3474720" cy="1143000"/>
+          </a:xfrm>
+          <a:prstGeom prst="roundRect">
+            <a:avLst>
+              <a:gd name="adj" fmla="val 9600"/>
             </a:avLst>
           </a:prstGeom>
           <a:solidFill>
@@ -5898,14 +6601,14 @@
       </p:sp>
       <p:sp>
         <p:nvSpPr>
-          <p:cNvPr id="14" name="Text 12"/>
-          <p:cNvSpPr/>
-          <p:nvPr/>
-        </p:nvSpPr>
-        <p:spPr>
-          <a:xfrm>
-            <a:off x="8074152" y="3666744"/>
-            <a:ext cx="2825496" cy="256032"/>
+          <p:cNvPr id="19" name="Text 17"/>
+          <p:cNvSpPr/>
+          <p:nvPr/>
+        </p:nvSpPr>
+        <p:spPr>
+          <a:xfrm>
+            <a:off x="7799832" y="4645152"/>
+            <a:ext cx="3145536" cy="256032"/>
           </a:xfrm>
           <a:prstGeom prst="rect">
             <a:avLst/>
@@ -5929,7 +6632,7 @@
                 <a:ea typeface="Aptos" pitchFamily="34" charset="-122"/>
                 <a:cs typeface="Aptos" pitchFamily="34" charset="-120"/>
               </a:rPr>
-              <a:t>Use this for</a:t>
+              <a:t>What to document</a:t>
             </a:r>
             <a:endParaRPr lang="en-US" sz="1300" dirty="0"/>
           </a:p>
@@ -5937,14 +6640,14 @@
       </p:sp>
       <p:sp>
         <p:nvSpPr>
-          <p:cNvPr id="15" name="Text 13"/>
-          <p:cNvSpPr/>
-          <p:nvPr/>
-        </p:nvSpPr>
-        <p:spPr>
-          <a:xfrm>
-            <a:off x="8074152" y="4023360"/>
-            <a:ext cx="2825496" cy="1097280"/>
+          <p:cNvPr id="20" name="Text 18"/>
+          <p:cNvSpPr/>
+          <p:nvPr/>
+        </p:nvSpPr>
+        <p:spPr>
+          <a:xfrm>
+            <a:off x="7799832" y="5001768"/>
+            <a:ext cx="3145536" cy="502920"/>
           </a:xfrm>
           <a:prstGeom prst="rect">
             <a:avLst/>
@@ -5970,7 +6673,7 @@
                 <a:ea typeface="Aptos" pitchFamily="34" charset="-122"/>
                 <a:cs typeface="Aptos" pitchFamily="34" charset="-120"/>
               </a:rPr>
-              <a:t>Connect the concept to public health decisions, safeguards, documentation, or implementation work.</a:t>
+              <a:t>Connect the concept to public health purpose, responsible use, required safeguards, documentation, and the next action a department should take.</a:t>
             </a:r>
             <a:endParaRPr lang="en-US" sz="1550" dirty="0"/>
           </a:p>
@@ -6144,8 +6847,8 @@
         </p:nvSpPr>
         <p:spPr>
           <a:xfrm>
-            <a:off x="9966960" y="6537960"/>
-            <a:ext cx="1645920" cy="201168"/>
+            <a:off x="9646920" y="6537960"/>
+            <a:ext cx="1965960" cy="201168"/>
           </a:xfrm>
           <a:prstGeom prst="rect">
             <a:avLst/>
@@ -6169,7 +6872,7 @@
                 <a:ea typeface="Aptos" pitchFamily="34" charset="-122"/>
                 <a:cs typeface="Aptos" pitchFamily="34" charset="-120"/>
               </a:rPr>
-              <a:t>Â© Paula Soper</a:t>
+              <a:t>Copyright Paula Soper</a:t>
             </a:r>
             <a:endParaRPr lang="en-US" sz="800" dirty="0"/>
           </a:p>
@@ -6216,77 +6919,13 @@
       </p:sp>
       <p:sp>
         <p:nvSpPr>
-          <p:cNvPr id="8" name="Shape 6"/>
+          <p:cNvPr id="8" name="Text 6"/>
           <p:cNvSpPr/>
           <p:nvPr/>
         </p:nvSpPr>
         <p:spPr>
           <a:xfrm>
             <a:off x="640080" y="658368"/>
-            <a:ext cx="420624" cy="420624"/>
-          </a:xfrm>
-          <a:prstGeom prst="ellipse">
-            <a:avLst/>
-          </a:prstGeom>
-          <a:solidFill>
-            <a:srgbClr val="0068B7"/>
-          </a:solidFill>
-          <a:ln w="12700">
-            <a:solidFill>
-              <a:srgbClr val="0068B7"/>
-            </a:solidFill>
-            <a:prstDash val="solid"/>
-          </a:ln>
-        </p:spPr>
-      </p:sp>
-      <p:sp>
-        <p:nvSpPr>
-          <p:cNvPr id="9" name="Text 7"/>
-          <p:cNvSpPr/>
-          <p:nvPr/>
-        </p:nvSpPr>
-        <p:spPr>
-          <a:xfrm>
-            <a:off x="640080" y="731520"/>
-            <a:ext cx="420624" cy="164592"/>
-          </a:xfrm>
-          <a:prstGeom prst="rect">
-            <a:avLst/>
-          </a:prstGeom>
-          <a:noFill/>
-          <a:ln/>
-        </p:spPr>
-        <p:txBody>
-          <a:bodyPr wrap="square" lIns="0" tIns="0" rIns="0" bIns="0" rtlCol="0" anchor="ctr"/>
-          <a:lstStyle/>
-          <a:p>
-            <a:pPr algn="ctr" indent="0" marL="0">
-              <a:buNone/>
-            </a:pPr>
-            <a:r>
-              <a:rPr lang="en-US" sz="1100" b="1" dirty="0">
-                <a:solidFill>
-                  <a:srgbClr val="FFFFFF"/>
-                </a:solidFill>
-                <a:latin typeface="Aptos" pitchFamily="34" charset="0"/>
-                <a:ea typeface="Aptos" pitchFamily="34" charset="-122"/>
-                <a:cs typeface="Aptos" pitchFamily="34" charset="-120"/>
-              </a:rPr>
-              <a:t>10</a:t>
-            </a:r>
-            <a:endParaRPr lang="en-US" sz="1100" dirty="0"/>
-          </a:p>
-        </p:txBody>
-      </p:sp>
-      <p:sp>
-        <p:nvSpPr>
-          <p:cNvPr id="10" name="Text 8"/>
-          <p:cNvSpPr/>
-          <p:nvPr/>
-        </p:nvSpPr>
-        <p:spPr>
-          <a:xfrm>
-            <a:off x="640080" y="621792"/>
             <a:ext cx="10881360" cy="713232"/>
           </a:xfrm>
           <a:prstGeom prst="rect">
@@ -6321,14 +6960,14 @@
       </p:sp>
       <p:sp>
         <p:nvSpPr>
-          <p:cNvPr id="11" name="Text 9"/>
+          <p:cNvPr id="9" name="Text 7"/>
           <p:cNvSpPr/>
           <p:nvPr/>
         </p:nvSpPr>
         <p:spPr>
           <a:xfrm>
             <a:off x="868680" y="1508760"/>
-            <a:ext cx="6537960" cy="4160520"/>
+            <a:ext cx="6309360" cy="4160520"/>
           </a:xfrm>
           <a:prstGeom prst="rect">
             <a:avLst/>
@@ -6373,18 +7012,18 @@
       </p:sp>
       <p:sp>
         <p:nvSpPr>
-          <p:cNvPr id="12" name="Shape 10"/>
-          <p:cNvSpPr/>
-          <p:nvPr/>
-        </p:nvSpPr>
-        <p:spPr>
-          <a:xfrm>
-            <a:off x="7909560" y="1417320"/>
-            <a:ext cx="3154680" cy="1828800"/>
+          <p:cNvPr id="10" name="Shape 8"/>
+          <p:cNvSpPr/>
+          <p:nvPr/>
+        </p:nvSpPr>
+        <p:spPr>
+          <a:xfrm>
+            <a:off x="7635240" y="1325880"/>
+            <a:ext cx="3474720" cy="1325880"/>
           </a:xfrm>
           <a:prstGeom prst="roundRect">
             <a:avLst>
-              <a:gd name="adj" fmla="val 6000"/>
+              <a:gd name="adj" fmla="val 8276"/>
             </a:avLst>
           </a:prstGeom>
           <a:solidFill>
@@ -6400,14 +7039,14 @@
       </p:sp>
       <p:sp>
         <p:nvSpPr>
-          <p:cNvPr id="13" name="Text 11"/>
-          <p:cNvSpPr/>
-          <p:nvPr/>
-        </p:nvSpPr>
-        <p:spPr>
-          <a:xfrm>
-            <a:off x="8074152" y="1563624"/>
-            <a:ext cx="2825496" cy="256032"/>
+          <p:cNvPr id="11" name="Text 9"/>
+          <p:cNvSpPr/>
+          <p:nvPr/>
+        </p:nvSpPr>
+        <p:spPr>
+          <a:xfrm>
+            <a:off x="7799832" y="1472184"/>
+            <a:ext cx="3145536" cy="256032"/>
           </a:xfrm>
           <a:prstGeom prst="rect">
             <a:avLst/>
@@ -6431,7 +7070,7 @@
                 <a:ea typeface="Aptos" pitchFamily="34" charset="-122"/>
                 <a:cs typeface="Aptos" pitchFamily="34" charset="-120"/>
               </a:rPr>
-              <a:t>Key idea</a:t>
+              <a:t>Governance lens</a:t>
             </a:r>
             <a:endParaRPr lang="en-US" sz="1300" dirty="0"/>
           </a:p>
@@ -6439,14 +7078,14 @@
       </p:sp>
       <p:sp>
         <p:nvSpPr>
-          <p:cNvPr id="14" name="Text 12"/>
-          <p:cNvSpPr/>
-          <p:nvPr/>
-        </p:nvSpPr>
-        <p:spPr>
-          <a:xfrm>
-            <a:off x="8074152" y="1920240"/>
-            <a:ext cx="2825496" cy="1188720"/>
+          <p:cNvPr id="12" name="Text 10"/>
+          <p:cNvSpPr/>
+          <p:nvPr/>
+        </p:nvSpPr>
+        <p:spPr>
+          <a:xfrm>
+            <a:off x="7799832" y="1828800"/>
+            <a:ext cx="3145536" cy="685800"/>
           </a:xfrm>
           <a:prstGeom prst="rect">
             <a:avLst/>
@@ -6480,18 +7119,159 @@
       </p:sp>
       <p:sp>
         <p:nvSpPr>
-          <p:cNvPr id="15" name="Shape 13"/>
-          <p:cNvSpPr/>
-          <p:nvPr/>
-        </p:nvSpPr>
-        <p:spPr>
-          <a:xfrm>
-            <a:off x="7909560" y="3520440"/>
-            <a:ext cx="3154680" cy="1737360"/>
+          <p:cNvPr id="13" name="Shape 11"/>
+          <p:cNvSpPr/>
+          <p:nvPr/>
+        </p:nvSpPr>
+        <p:spPr>
+          <a:xfrm>
+            <a:off x="7635240" y="2788920"/>
+            <a:ext cx="3474720" cy="1536192"/>
           </a:xfrm>
           <a:prstGeom prst="roundRect">
             <a:avLst>
-              <a:gd name="adj" fmla="val 6316"/>
+              <a:gd name="adj" fmla="val 7143"/>
+            </a:avLst>
+          </a:prstGeom>
+          <a:solidFill>
+            <a:srgbClr val="FFFFFF">
+              <a:alpha val="88000"/>
+            </a:srgbClr>
+          </a:solidFill>
+          <a:ln w="12700">
+            <a:solidFill>
+              <a:srgbClr val="D6E8F2"/>
+            </a:solidFill>
+            <a:prstDash val="solid"/>
+          </a:ln>
+        </p:spPr>
+      </p:sp>
+      <p:sp>
+        <p:nvSpPr>
+          <p:cNvPr id="14" name="Shape 12"/>
+          <p:cNvSpPr/>
+          <p:nvPr/>
+        </p:nvSpPr>
+        <p:spPr>
+          <a:xfrm>
+            <a:off x="8074152" y="3291840"/>
+            <a:ext cx="2596896" cy="749808"/>
+          </a:xfrm>
+          <a:prstGeom prst="rect">
+            <a:avLst/>
+          </a:prstGeom>
+          <a:solidFill>
+            <a:srgbClr val="EAF6F8"/>
+          </a:solidFill>
+          <a:ln w="12700">
+            <a:solidFill>
+              <a:srgbClr val="8ABBD8"/>
+            </a:solidFill>
+            <a:prstDash val="solid"/>
+          </a:ln>
+        </p:spPr>
+      </p:sp>
+      <p:sp>
+        <p:nvSpPr>
+          <p:cNvPr id="15" name="Shape 13"/>
+          <p:cNvSpPr/>
+          <p:nvPr/>
+        </p:nvSpPr>
+        <p:spPr>
+          <a:xfrm>
+            <a:off x="8202168" y="3721608"/>
+            <a:ext cx="2340864" cy="0"/>
+          </a:xfrm>
+          <a:prstGeom prst="line">
+            <a:avLst/>
+          </a:prstGeom>
+          <a:noFill/>
+          <a:ln w="19050">
+            <a:solidFill>
+              <a:srgbClr val="0068B7"/>
+            </a:solidFill>
+            <a:prstDash val="solid"/>
+          </a:ln>
+        </p:spPr>
+      </p:sp>
+      <p:sp>
+        <p:nvSpPr>
+          <p:cNvPr id="16" name="Shape 14"/>
+          <p:cNvSpPr/>
+          <p:nvPr/>
+        </p:nvSpPr>
+        <p:spPr>
+          <a:xfrm>
+            <a:off x="9198864" y="4206240"/>
+            <a:ext cx="347472" cy="347472"/>
+          </a:xfrm>
+          <a:prstGeom prst="ellipse">
+            <a:avLst/>
+          </a:prstGeom>
+          <a:solidFill>
+            <a:srgbClr val="2F8A28"/>
+          </a:solidFill>
+          <a:ln w="12700">
+            <a:solidFill>
+              <a:srgbClr val="2F8A28"/>
+            </a:solidFill>
+            <a:prstDash val="solid"/>
+          </a:ln>
+        </p:spPr>
+      </p:sp>
+      <p:sp>
+        <p:nvSpPr>
+          <p:cNvPr id="17" name="Text 15"/>
+          <p:cNvSpPr/>
+          <p:nvPr/>
+        </p:nvSpPr>
+        <p:spPr>
+          <a:xfrm>
+            <a:off x="7909560" y="3977640"/>
+            <a:ext cx="2926080" cy="182880"/>
+          </a:xfrm>
+          <a:prstGeom prst="rect">
+            <a:avLst/>
+          </a:prstGeom>
+          <a:noFill/>
+          <a:ln/>
+        </p:spPr>
+        <p:txBody>
+          <a:bodyPr wrap="square" lIns="0" tIns="0" rIns="0" bIns="0" rtlCol="0" anchor="ctr"/>
+          <a:lstStyle/>
+          <a:p>
+            <a:pPr algn="ctr" indent="0" marL="0">
+              <a:buNone/>
+            </a:pPr>
+            <a:r>
+              <a:rPr lang="en-US" sz="1000" dirty="0">
+                <a:solidFill>
+                  <a:srgbClr val="003A63"/>
+                </a:solidFill>
+                <a:latin typeface="Aptos" pitchFamily="34" charset="0"/>
+                <a:ea typeface="Aptos" pitchFamily="34" charset="-122"/>
+                <a:cs typeface="Aptos" pitchFamily="34" charset="-120"/>
+              </a:rPr>
+              <a:t>Concept to action</a:t>
+            </a:r>
+            <a:endParaRPr lang="en-US" sz="1000" dirty="0"/>
+          </a:p>
+        </p:txBody>
+      </p:sp>
+      <p:sp>
+        <p:nvSpPr>
+          <p:cNvPr id="18" name="Shape 16"/>
+          <p:cNvSpPr/>
+          <p:nvPr/>
+        </p:nvSpPr>
+        <p:spPr>
+          <a:xfrm>
+            <a:off x="7635240" y="4498848"/>
+            <a:ext cx="3474720" cy="1143000"/>
+          </a:xfrm>
+          <a:prstGeom prst="roundRect">
+            <a:avLst>
+              <a:gd name="adj" fmla="val 9600"/>
             </a:avLst>
           </a:prstGeom>
           <a:solidFill>
@@ -6507,14 +7287,14 @@
       </p:sp>
       <p:sp>
         <p:nvSpPr>
-          <p:cNvPr id="16" name="Text 14"/>
-          <p:cNvSpPr/>
-          <p:nvPr/>
-        </p:nvSpPr>
-        <p:spPr>
-          <a:xfrm>
-            <a:off x="8074152" y="3666744"/>
-            <a:ext cx="2825496" cy="256032"/>
+          <p:cNvPr id="19" name="Text 17"/>
+          <p:cNvSpPr/>
+          <p:nvPr/>
+        </p:nvSpPr>
+        <p:spPr>
+          <a:xfrm>
+            <a:off x="7799832" y="4645152"/>
+            <a:ext cx="3145536" cy="256032"/>
           </a:xfrm>
           <a:prstGeom prst="rect">
             <a:avLst/>
@@ -6538,7 +7318,7 @@
                 <a:ea typeface="Aptos" pitchFamily="34" charset="-122"/>
                 <a:cs typeface="Aptos" pitchFamily="34" charset="-120"/>
               </a:rPr>
-              <a:t>Use this for</a:t>
+              <a:t>What to document</a:t>
             </a:r>
             <a:endParaRPr lang="en-US" sz="1300" dirty="0"/>
           </a:p>
@@ -6546,14 +7326,14 @@
       </p:sp>
       <p:sp>
         <p:nvSpPr>
-          <p:cNvPr id="17" name="Text 15"/>
-          <p:cNvSpPr/>
-          <p:nvPr/>
-        </p:nvSpPr>
-        <p:spPr>
-          <a:xfrm>
-            <a:off x="8074152" y="4023360"/>
-            <a:ext cx="2825496" cy="1097280"/>
+          <p:cNvPr id="20" name="Text 18"/>
+          <p:cNvSpPr/>
+          <p:nvPr/>
+        </p:nvSpPr>
+        <p:spPr>
+          <a:xfrm>
+            <a:off x="7799832" y="5001768"/>
+            <a:ext cx="3145536" cy="502920"/>
           </a:xfrm>
           <a:prstGeom prst="rect">
             <a:avLst/>
@@ -6579,7 +7359,7 @@
                 <a:ea typeface="Aptos" pitchFamily="34" charset="-122"/>
                 <a:cs typeface="Aptos" pitchFamily="34" charset="-120"/>
               </a:rPr>
-              <a:t>Connect the concept to public health decisions, safeguards, documentation, or implementation work.</a:t>
+              <a:t>Use the assignment to test whether you can explain the concept, apply it to a realistic public health situation, and identify what would need review before the work moves forward.</a:t>
             </a:r>
             <a:endParaRPr lang="en-US" sz="1550" dirty="0"/>
           </a:p>
@@ -6753,8 +7533,8 @@
         </p:nvSpPr>
         <p:spPr>
           <a:xfrm>
-            <a:off x="9966960" y="6537960"/>
-            <a:ext cx="1645920" cy="201168"/>
+            <a:off x="9646920" y="6537960"/>
+            <a:ext cx="1965960" cy="201168"/>
           </a:xfrm>
           <a:prstGeom prst="rect">
             <a:avLst/>
@@ -6778,7 +7558,7 @@
                 <a:ea typeface="Aptos" pitchFamily="34" charset="-122"/>
                 <a:cs typeface="Aptos" pitchFamily="34" charset="-120"/>
               </a:rPr>
-              <a:t>Â© Paula Soper</a:t>
+              <a:t>Copyright Paula Soper</a:t>
             </a:r>
             <a:endParaRPr lang="en-US" sz="800" dirty="0"/>
           </a:p>
@@ -6825,77 +7605,13 @@
       </p:sp>
       <p:sp>
         <p:nvSpPr>
-          <p:cNvPr id="8" name="Shape 6"/>
+          <p:cNvPr id="8" name="Text 6"/>
           <p:cNvSpPr/>
           <p:nvPr/>
         </p:nvSpPr>
         <p:spPr>
           <a:xfrm>
             <a:off x="640080" y="658368"/>
-            <a:ext cx="420624" cy="420624"/>
-          </a:xfrm>
-          <a:prstGeom prst="ellipse">
-            <a:avLst/>
-          </a:prstGeom>
-          <a:solidFill>
-            <a:srgbClr val="0068B7"/>
-          </a:solidFill>
-          <a:ln w="12700">
-            <a:solidFill>
-              <a:srgbClr val="0068B7"/>
-            </a:solidFill>
-            <a:prstDash val="solid"/>
-          </a:ln>
-        </p:spPr>
-      </p:sp>
-      <p:sp>
-        <p:nvSpPr>
-          <p:cNvPr id="9" name="Text 7"/>
-          <p:cNvSpPr/>
-          <p:nvPr/>
-        </p:nvSpPr>
-        <p:spPr>
-          <a:xfrm>
-            <a:off x="640080" y="731520"/>
-            <a:ext cx="420624" cy="164592"/>
-          </a:xfrm>
-          <a:prstGeom prst="rect">
-            <a:avLst/>
-          </a:prstGeom>
-          <a:noFill/>
-          <a:ln/>
-        </p:spPr>
-        <p:txBody>
-          <a:bodyPr wrap="square" lIns="0" tIns="0" rIns="0" bIns="0" rtlCol="0" anchor="ctr"/>
-          <a:lstStyle/>
-          <a:p>
-            <a:pPr algn="ctr" indent="0" marL="0">
-              <a:buNone/>
-            </a:pPr>
-            <a:r>
-              <a:rPr lang="en-US" sz="1100" b="1" dirty="0">
-                <a:solidFill>
-                  <a:srgbClr val="FFFFFF"/>
-                </a:solidFill>
-                <a:latin typeface="Aptos" pitchFamily="34" charset="0"/>
-                <a:ea typeface="Aptos" pitchFamily="34" charset="-122"/>
-                <a:cs typeface="Aptos" pitchFamily="34" charset="-120"/>
-              </a:rPr>
-              <a:t>11</a:t>
-            </a:r>
-            <a:endParaRPr lang="en-US" sz="1100" dirty="0"/>
-          </a:p>
-        </p:txBody>
-      </p:sp>
-      <p:sp>
-        <p:nvSpPr>
-          <p:cNvPr id="10" name="Text 8"/>
-          <p:cNvSpPr/>
-          <p:nvPr/>
-        </p:nvSpPr>
-        <p:spPr>
-          <a:xfrm>
-            <a:off x="640080" y="621792"/>
             <a:ext cx="10881360" cy="713232"/>
           </a:xfrm>
           <a:prstGeom prst="rect">
@@ -6930,14 +7646,14 @@
       </p:sp>
       <p:sp>
         <p:nvSpPr>
-          <p:cNvPr id="11" name="Text 9"/>
+          <p:cNvPr id="9" name="Text 7"/>
           <p:cNvSpPr/>
           <p:nvPr/>
         </p:nvSpPr>
         <p:spPr>
           <a:xfrm>
             <a:off x="868680" y="1508760"/>
-            <a:ext cx="6537960" cy="4160520"/>
+            <a:ext cx="6309360" cy="4160520"/>
           </a:xfrm>
           <a:prstGeom prst="rect">
             <a:avLst/>
@@ -6996,18 +7712,18 @@
       </p:sp>
       <p:sp>
         <p:nvSpPr>
-          <p:cNvPr id="12" name="Shape 10"/>
-          <p:cNvSpPr/>
-          <p:nvPr/>
-        </p:nvSpPr>
-        <p:spPr>
-          <a:xfrm>
-            <a:off x="7909560" y="1417320"/>
-            <a:ext cx="3154680" cy="1828800"/>
+          <p:cNvPr id="10" name="Shape 8"/>
+          <p:cNvSpPr/>
+          <p:nvPr/>
+        </p:nvSpPr>
+        <p:spPr>
+          <a:xfrm>
+            <a:off x="7635240" y="1325880"/>
+            <a:ext cx="3474720" cy="1325880"/>
           </a:xfrm>
           <a:prstGeom prst="roundRect">
             <a:avLst>
-              <a:gd name="adj" fmla="val 6000"/>
+              <a:gd name="adj" fmla="val 8276"/>
             </a:avLst>
           </a:prstGeom>
           <a:solidFill>
@@ -7023,14 +7739,14 @@
       </p:sp>
       <p:sp>
         <p:nvSpPr>
-          <p:cNvPr id="13" name="Text 11"/>
-          <p:cNvSpPr/>
-          <p:nvPr/>
-        </p:nvSpPr>
-        <p:spPr>
-          <a:xfrm>
-            <a:off x="8074152" y="1563624"/>
-            <a:ext cx="2825496" cy="256032"/>
+          <p:cNvPr id="11" name="Text 9"/>
+          <p:cNvSpPr/>
+          <p:nvPr/>
+        </p:nvSpPr>
+        <p:spPr>
+          <a:xfrm>
+            <a:off x="7799832" y="1472184"/>
+            <a:ext cx="3145536" cy="256032"/>
           </a:xfrm>
           <a:prstGeom prst="rect">
             <a:avLst/>
@@ -7054,7 +7770,7 @@
                 <a:ea typeface="Aptos" pitchFamily="34" charset="-122"/>
                 <a:cs typeface="Aptos" pitchFamily="34" charset="-120"/>
               </a:rPr>
-              <a:t>Key idea</a:t>
+              <a:t>Governance lens</a:t>
             </a:r>
             <a:endParaRPr lang="en-US" sz="1300" dirty="0"/>
           </a:p>
@@ -7062,14 +7778,14 @@
       </p:sp>
       <p:sp>
         <p:nvSpPr>
-          <p:cNvPr id="14" name="Text 12"/>
-          <p:cNvSpPr/>
-          <p:nvPr/>
-        </p:nvSpPr>
-        <p:spPr>
-          <a:xfrm>
-            <a:off x="8074152" y="1920240"/>
-            <a:ext cx="2825496" cy="1188720"/>
+          <p:cNvPr id="12" name="Text 10"/>
+          <p:cNvSpPr/>
+          <p:nvPr/>
+        </p:nvSpPr>
+        <p:spPr>
+          <a:xfrm>
+            <a:off x="7799832" y="1828800"/>
+            <a:ext cx="3145536" cy="685800"/>
           </a:xfrm>
           <a:prstGeom prst="rect">
             <a:avLst/>
@@ -7103,18 +7819,159 @@
       </p:sp>
       <p:sp>
         <p:nvSpPr>
-          <p:cNvPr id="15" name="Shape 13"/>
-          <p:cNvSpPr/>
-          <p:nvPr/>
-        </p:nvSpPr>
-        <p:spPr>
-          <a:xfrm>
-            <a:off x="7909560" y="3520440"/>
-            <a:ext cx="3154680" cy="1737360"/>
+          <p:cNvPr id="13" name="Shape 11"/>
+          <p:cNvSpPr/>
+          <p:nvPr/>
+        </p:nvSpPr>
+        <p:spPr>
+          <a:xfrm>
+            <a:off x="7635240" y="2788920"/>
+            <a:ext cx="3474720" cy="1536192"/>
           </a:xfrm>
           <a:prstGeom prst="roundRect">
             <a:avLst>
-              <a:gd name="adj" fmla="val 6316"/>
+              <a:gd name="adj" fmla="val 7143"/>
+            </a:avLst>
+          </a:prstGeom>
+          <a:solidFill>
+            <a:srgbClr val="FFFFFF">
+              <a:alpha val="88000"/>
+            </a:srgbClr>
+          </a:solidFill>
+          <a:ln w="12700">
+            <a:solidFill>
+              <a:srgbClr val="D6E8F2"/>
+            </a:solidFill>
+            <a:prstDash val="solid"/>
+          </a:ln>
+        </p:spPr>
+      </p:sp>
+      <p:sp>
+        <p:nvSpPr>
+          <p:cNvPr id="14" name="Shape 12"/>
+          <p:cNvSpPr/>
+          <p:nvPr/>
+        </p:nvSpPr>
+        <p:spPr>
+          <a:xfrm>
+            <a:off x="8074152" y="3291840"/>
+            <a:ext cx="2596896" cy="749808"/>
+          </a:xfrm>
+          <a:prstGeom prst="rect">
+            <a:avLst/>
+          </a:prstGeom>
+          <a:solidFill>
+            <a:srgbClr val="EAF6F8"/>
+          </a:solidFill>
+          <a:ln w="12700">
+            <a:solidFill>
+              <a:srgbClr val="8ABBD8"/>
+            </a:solidFill>
+            <a:prstDash val="solid"/>
+          </a:ln>
+        </p:spPr>
+      </p:sp>
+      <p:sp>
+        <p:nvSpPr>
+          <p:cNvPr id="15" name="Shape 13"/>
+          <p:cNvSpPr/>
+          <p:nvPr/>
+        </p:nvSpPr>
+        <p:spPr>
+          <a:xfrm>
+            <a:off x="8202168" y="3721608"/>
+            <a:ext cx="2340864" cy="0"/>
+          </a:xfrm>
+          <a:prstGeom prst="line">
+            <a:avLst/>
+          </a:prstGeom>
+          <a:noFill/>
+          <a:ln w="19050">
+            <a:solidFill>
+              <a:srgbClr val="0068B7"/>
+            </a:solidFill>
+            <a:prstDash val="solid"/>
+          </a:ln>
+        </p:spPr>
+      </p:sp>
+      <p:sp>
+        <p:nvSpPr>
+          <p:cNvPr id="16" name="Shape 14"/>
+          <p:cNvSpPr/>
+          <p:nvPr/>
+        </p:nvSpPr>
+        <p:spPr>
+          <a:xfrm>
+            <a:off x="9198864" y="4206240"/>
+            <a:ext cx="347472" cy="347472"/>
+          </a:xfrm>
+          <a:prstGeom prst="ellipse">
+            <a:avLst/>
+          </a:prstGeom>
+          <a:solidFill>
+            <a:srgbClr val="2F8A28"/>
+          </a:solidFill>
+          <a:ln w="12700">
+            <a:solidFill>
+              <a:srgbClr val="2F8A28"/>
+            </a:solidFill>
+            <a:prstDash val="solid"/>
+          </a:ln>
+        </p:spPr>
+      </p:sp>
+      <p:sp>
+        <p:nvSpPr>
+          <p:cNvPr id="17" name="Text 15"/>
+          <p:cNvSpPr/>
+          <p:nvPr/>
+        </p:nvSpPr>
+        <p:spPr>
+          <a:xfrm>
+            <a:off x="7909560" y="3977640"/>
+            <a:ext cx="2926080" cy="182880"/>
+          </a:xfrm>
+          <a:prstGeom prst="rect">
+            <a:avLst/>
+          </a:prstGeom>
+          <a:noFill/>
+          <a:ln/>
+        </p:spPr>
+        <p:txBody>
+          <a:bodyPr wrap="square" lIns="0" tIns="0" rIns="0" bIns="0" rtlCol="0" anchor="ctr"/>
+          <a:lstStyle/>
+          <a:p>
+            <a:pPr algn="ctr" indent="0" marL="0">
+              <a:buNone/>
+            </a:pPr>
+            <a:r>
+              <a:rPr lang="en-US" sz="1000" dirty="0">
+                <a:solidFill>
+                  <a:srgbClr val="003A63"/>
+                </a:solidFill>
+                <a:latin typeface="Aptos" pitchFamily="34" charset="0"/>
+                <a:ea typeface="Aptos" pitchFamily="34" charset="-122"/>
+                <a:cs typeface="Aptos" pitchFamily="34" charset="-120"/>
+              </a:rPr>
+              <a:t>Concept to action</a:t>
+            </a:r>
+            <a:endParaRPr lang="en-US" sz="1000" dirty="0"/>
+          </a:p>
+        </p:txBody>
+      </p:sp>
+      <p:sp>
+        <p:nvSpPr>
+          <p:cNvPr id="18" name="Shape 16"/>
+          <p:cNvSpPr/>
+          <p:nvPr/>
+        </p:nvSpPr>
+        <p:spPr>
+          <a:xfrm>
+            <a:off x="7635240" y="4498848"/>
+            <a:ext cx="3474720" cy="1143000"/>
+          </a:xfrm>
+          <a:prstGeom prst="roundRect">
+            <a:avLst>
+              <a:gd name="adj" fmla="val 9600"/>
             </a:avLst>
           </a:prstGeom>
           <a:solidFill>
@@ -7130,14 +7987,14 @@
       </p:sp>
       <p:sp>
         <p:nvSpPr>
-          <p:cNvPr id="16" name="Text 14"/>
-          <p:cNvSpPr/>
-          <p:nvPr/>
-        </p:nvSpPr>
-        <p:spPr>
-          <a:xfrm>
-            <a:off x="8074152" y="3666744"/>
-            <a:ext cx="2825496" cy="256032"/>
+          <p:cNvPr id="19" name="Text 17"/>
+          <p:cNvSpPr/>
+          <p:nvPr/>
+        </p:nvSpPr>
+        <p:spPr>
+          <a:xfrm>
+            <a:off x="7799832" y="4645152"/>
+            <a:ext cx="3145536" cy="256032"/>
           </a:xfrm>
           <a:prstGeom prst="rect">
             <a:avLst/>
@@ -7161,7 +8018,7 @@
                 <a:ea typeface="Aptos" pitchFamily="34" charset="-122"/>
                 <a:cs typeface="Aptos" pitchFamily="34" charset="-120"/>
               </a:rPr>
-              <a:t>Use this for</a:t>
+              <a:t>What to document</a:t>
             </a:r>
             <a:endParaRPr lang="en-US" sz="1300" dirty="0"/>
           </a:p>
@@ -7169,14 +8026,14 @@
       </p:sp>
       <p:sp>
         <p:nvSpPr>
-          <p:cNvPr id="17" name="Text 15"/>
-          <p:cNvSpPr/>
-          <p:nvPr/>
-        </p:nvSpPr>
-        <p:spPr>
-          <a:xfrm>
-            <a:off x="8074152" y="4023360"/>
-            <a:ext cx="2825496" cy="1097280"/>
+          <p:cNvPr id="20" name="Text 18"/>
+          <p:cNvSpPr/>
+          <p:nvPr/>
+        </p:nvSpPr>
+        <p:spPr>
+          <a:xfrm>
+            <a:off x="7799832" y="5001768"/>
+            <a:ext cx="3145536" cy="502920"/>
           </a:xfrm>
           <a:prstGeom prst="rect">
             <a:avLst/>
@@ -7202,7 +8059,7 @@
                 <a:ea typeface="Aptos" pitchFamily="34" charset="-122"/>
                 <a:cs typeface="Aptos" pitchFamily="34" charset="-120"/>
               </a:rPr>
-              <a:t>Connect the concept to public health decisions, safeguards, documentation, or implementation work.</a:t>
+              <a:t>Connect the concept to public health purpose, responsible use, required safeguards, documentation, and the next action a department should take.</a:t>
             </a:r>
             <a:endParaRPr lang="en-US" sz="1550" dirty="0"/>
           </a:p>
@@ -7376,8 +8233,8 @@
         </p:nvSpPr>
         <p:spPr>
           <a:xfrm>
-            <a:off x="9966960" y="6537960"/>
-            <a:ext cx="1645920" cy="201168"/>
+            <a:off x="9646920" y="6537960"/>
+            <a:ext cx="1965960" cy="201168"/>
           </a:xfrm>
           <a:prstGeom prst="rect">
             <a:avLst/>
@@ -7401,7 +8258,7 @@
                 <a:ea typeface="Aptos" pitchFamily="34" charset="-122"/>
                 <a:cs typeface="Aptos" pitchFamily="34" charset="-120"/>
               </a:rPr>
-              <a:t>Â© Paula Soper</a:t>
+              <a:t>Copyright Paula Soper</a:t>
             </a:r>
             <a:endParaRPr lang="en-US" sz="800" dirty="0"/>
           </a:p>
@@ -7448,77 +8305,13 @@
       </p:sp>
       <p:sp>
         <p:nvSpPr>
-          <p:cNvPr id="8" name="Shape 6"/>
+          <p:cNvPr id="8" name="Text 6"/>
           <p:cNvSpPr/>
           <p:nvPr/>
         </p:nvSpPr>
         <p:spPr>
           <a:xfrm>
             <a:off x="640080" y="658368"/>
-            <a:ext cx="420624" cy="420624"/>
-          </a:xfrm>
-          <a:prstGeom prst="ellipse">
-            <a:avLst/>
-          </a:prstGeom>
-          <a:solidFill>
-            <a:srgbClr val="0068B7"/>
-          </a:solidFill>
-          <a:ln w="12700">
-            <a:solidFill>
-              <a:srgbClr val="0068B7"/>
-            </a:solidFill>
-            <a:prstDash val="solid"/>
-          </a:ln>
-        </p:spPr>
-      </p:sp>
-      <p:sp>
-        <p:nvSpPr>
-          <p:cNvPr id="9" name="Text 7"/>
-          <p:cNvSpPr/>
-          <p:nvPr/>
-        </p:nvSpPr>
-        <p:spPr>
-          <a:xfrm>
-            <a:off x="640080" y="731520"/>
-            <a:ext cx="420624" cy="164592"/>
-          </a:xfrm>
-          <a:prstGeom prst="rect">
-            <a:avLst/>
-          </a:prstGeom>
-          <a:noFill/>
-          <a:ln/>
-        </p:spPr>
-        <p:txBody>
-          <a:bodyPr wrap="square" lIns="0" tIns="0" rIns="0" bIns="0" rtlCol="0" anchor="ctr"/>
-          <a:lstStyle/>
-          <a:p>
-            <a:pPr algn="ctr" indent="0" marL="0">
-              <a:buNone/>
-            </a:pPr>
-            <a:r>
-              <a:rPr lang="en-US" sz="1100" b="1" dirty="0">
-                <a:solidFill>
-                  <a:srgbClr val="FFFFFF"/>
-                </a:solidFill>
-                <a:latin typeface="Aptos" pitchFamily="34" charset="0"/>
-                <a:ea typeface="Aptos" pitchFamily="34" charset="-122"/>
-                <a:cs typeface="Aptos" pitchFamily="34" charset="-120"/>
-              </a:rPr>
-              <a:t>12</a:t>
-            </a:r>
-            <a:endParaRPr lang="en-US" sz="1100" dirty="0"/>
-          </a:p>
-        </p:txBody>
-      </p:sp>
-      <p:sp>
-        <p:nvSpPr>
-          <p:cNvPr id="10" name="Text 8"/>
-          <p:cNvSpPr/>
-          <p:nvPr/>
-        </p:nvSpPr>
-        <p:spPr>
-          <a:xfrm>
-            <a:off x="640080" y="621792"/>
             <a:ext cx="10881360" cy="713232"/>
           </a:xfrm>
           <a:prstGeom prst="rect">
@@ -7553,14 +8346,14 @@
       </p:sp>
       <p:sp>
         <p:nvSpPr>
-          <p:cNvPr id="11" name="Text 9"/>
+          <p:cNvPr id="9" name="Text 7"/>
           <p:cNvSpPr/>
           <p:nvPr/>
         </p:nvSpPr>
         <p:spPr>
           <a:xfrm>
             <a:off x="868680" y="1508760"/>
-            <a:ext cx="6537960" cy="4160520"/>
+            <a:ext cx="6309360" cy="4160520"/>
           </a:xfrm>
           <a:prstGeom prst="rect">
             <a:avLst/>
@@ -7591,18 +8384,18 @@
       </p:sp>
       <p:sp>
         <p:nvSpPr>
-          <p:cNvPr id="12" name="Shape 10"/>
-          <p:cNvSpPr/>
-          <p:nvPr/>
-        </p:nvSpPr>
-        <p:spPr>
-          <a:xfrm>
-            <a:off x="7909560" y="1417320"/>
-            <a:ext cx="3154680" cy="1828800"/>
+          <p:cNvPr id="10" name="Shape 8"/>
+          <p:cNvSpPr/>
+          <p:nvPr/>
+        </p:nvSpPr>
+        <p:spPr>
+          <a:xfrm>
+            <a:off x="7635240" y="1325880"/>
+            <a:ext cx="3474720" cy="1325880"/>
           </a:xfrm>
           <a:prstGeom prst="roundRect">
             <a:avLst>
-              <a:gd name="adj" fmla="val 6000"/>
+              <a:gd name="adj" fmla="val 8276"/>
             </a:avLst>
           </a:prstGeom>
           <a:solidFill>
@@ -7618,14 +8411,14 @@
       </p:sp>
       <p:sp>
         <p:nvSpPr>
-          <p:cNvPr id="13" name="Text 11"/>
-          <p:cNvSpPr/>
-          <p:nvPr/>
-        </p:nvSpPr>
-        <p:spPr>
-          <a:xfrm>
-            <a:off x="8074152" y="1563624"/>
-            <a:ext cx="2825496" cy="256032"/>
+          <p:cNvPr id="11" name="Text 9"/>
+          <p:cNvSpPr/>
+          <p:nvPr/>
+        </p:nvSpPr>
+        <p:spPr>
+          <a:xfrm>
+            <a:off x="7799832" y="1472184"/>
+            <a:ext cx="3145536" cy="256032"/>
           </a:xfrm>
           <a:prstGeom prst="rect">
             <a:avLst/>
@@ -7649,7 +8442,7 @@
                 <a:ea typeface="Aptos" pitchFamily="34" charset="-122"/>
                 <a:cs typeface="Aptos" pitchFamily="34" charset="-120"/>
               </a:rPr>
-              <a:t>Key idea</a:t>
+              <a:t>Governance lens</a:t>
             </a:r>
             <a:endParaRPr lang="en-US" sz="1300" dirty="0"/>
           </a:p>
@@ -7657,14 +8450,14 @@
       </p:sp>
       <p:sp>
         <p:nvSpPr>
-          <p:cNvPr id="14" name="Text 12"/>
-          <p:cNvSpPr/>
-          <p:nvPr/>
-        </p:nvSpPr>
-        <p:spPr>
-          <a:xfrm>
-            <a:off x="8074152" y="1920240"/>
-            <a:ext cx="2825496" cy="1188720"/>
+          <p:cNvPr id="12" name="Text 10"/>
+          <p:cNvSpPr/>
+          <p:nvPr/>
+        </p:nvSpPr>
+        <p:spPr>
+          <a:xfrm>
+            <a:off x="7799832" y="1828800"/>
+            <a:ext cx="3145536" cy="685800"/>
           </a:xfrm>
           <a:prstGeom prst="rect">
             <a:avLst/>
@@ -7698,18 +8491,159 @@
       </p:sp>
       <p:sp>
         <p:nvSpPr>
-          <p:cNvPr id="15" name="Shape 13"/>
-          <p:cNvSpPr/>
-          <p:nvPr/>
-        </p:nvSpPr>
-        <p:spPr>
-          <a:xfrm>
-            <a:off x="7909560" y="3520440"/>
-            <a:ext cx="3154680" cy="1737360"/>
+          <p:cNvPr id="13" name="Shape 11"/>
+          <p:cNvSpPr/>
+          <p:nvPr/>
+        </p:nvSpPr>
+        <p:spPr>
+          <a:xfrm>
+            <a:off x="7635240" y="2788920"/>
+            <a:ext cx="3474720" cy="1536192"/>
           </a:xfrm>
           <a:prstGeom prst="roundRect">
             <a:avLst>
-              <a:gd name="adj" fmla="val 6316"/>
+              <a:gd name="adj" fmla="val 7143"/>
+            </a:avLst>
+          </a:prstGeom>
+          <a:solidFill>
+            <a:srgbClr val="FFFFFF">
+              <a:alpha val="88000"/>
+            </a:srgbClr>
+          </a:solidFill>
+          <a:ln w="12700">
+            <a:solidFill>
+              <a:srgbClr val="D6E8F2"/>
+            </a:solidFill>
+            <a:prstDash val="solid"/>
+          </a:ln>
+        </p:spPr>
+      </p:sp>
+      <p:sp>
+        <p:nvSpPr>
+          <p:cNvPr id="14" name="Shape 12"/>
+          <p:cNvSpPr/>
+          <p:nvPr/>
+        </p:nvSpPr>
+        <p:spPr>
+          <a:xfrm>
+            <a:off x="8074152" y="3291840"/>
+            <a:ext cx="2596896" cy="749808"/>
+          </a:xfrm>
+          <a:prstGeom prst="rect">
+            <a:avLst/>
+          </a:prstGeom>
+          <a:solidFill>
+            <a:srgbClr val="EAF6F8"/>
+          </a:solidFill>
+          <a:ln w="12700">
+            <a:solidFill>
+              <a:srgbClr val="8ABBD8"/>
+            </a:solidFill>
+            <a:prstDash val="solid"/>
+          </a:ln>
+        </p:spPr>
+      </p:sp>
+      <p:sp>
+        <p:nvSpPr>
+          <p:cNvPr id="15" name="Shape 13"/>
+          <p:cNvSpPr/>
+          <p:nvPr/>
+        </p:nvSpPr>
+        <p:spPr>
+          <a:xfrm>
+            <a:off x="8202168" y="3721608"/>
+            <a:ext cx="2340864" cy="0"/>
+          </a:xfrm>
+          <a:prstGeom prst="line">
+            <a:avLst/>
+          </a:prstGeom>
+          <a:noFill/>
+          <a:ln w="19050">
+            <a:solidFill>
+              <a:srgbClr val="0068B7"/>
+            </a:solidFill>
+            <a:prstDash val="solid"/>
+          </a:ln>
+        </p:spPr>
+      </p:sp>
+      <p:sp>
+        <p:nvSpPr>
+          <p:cNvPr id="16" name="Shape 14"/>
+          <p:cNvSpPr/>
+          <p:nvPr/>
+        </p:nvSpPr>
+        <p:spPr>
+          <a:xfrm>
+            <a:off x="9198864" y="4206240"/>
+            <a:ext cx="347472" cy="347472"/>
+          </a:xfrm>
+          <a:prstGeom prst="ellipse">
+            <a:avLst/>
+          </a:prstGeom>
+          <a:solidFill>
+            <a:srgbClr val="2F8A28"/>
+          </a:solidFill>
+          <a:ln w="12700">
+            <a:solidFill>
+              <a:srgbClr val="2F8A28"/>
+            </a:solidFill>
+            <a:prstDash val="solid"/>
+          </a:ln>
+        </p:spPr>
+      </p:sp>
+      <p:sp>
+        <p:nvSpPr>
+          <p:cNvPr id="17" name="Text 15"/>
+          <p:cNvSpPr/>
+          <p:nvPr/>
+        </p:nvSpPr>
+        <p:spPr>
+          <a:xfrm>
+            <a:off x="7909560" y="3977640"/>
+            <a:ext cx="2926080" cy="182880"/>
+          </a:xfrm>
+          <a:prstGeom prst="rect">
+            <a:avLst/>
+          </a:prstGeom>
+          <a:noFill/>
+          <a:ln/>
+        </p:spPr>
+        <p:txBody>
+          <a:bodyPr wrap="square" lIns="0" tIns="0" rIns="0" bIns="0" rtlCol="0" anchor="ctr"/>
+          <a:lstStyle/>
+          <a:p>
+            <a:pPr algn="ctr" indent="0" marL="0">
+              <a:buNone/>
+            </a:pPr>
+            <a:r>
+              <a:rPr lang="en-US" sz="1000" dirty="0">
+                <a:solidFill>
+                  <a:srgbClr val="003A63"/>
+                </a:solidFill>
+                <a:latin typeface="Aptos" pitchFamily="34" charset="0"/>
+                <a:ea typeface="Aptos" pitchFamily="34" charset="-122"/>
+                <a:cs typeface="Aptos" pitchFamily="34" charset="-120"/>
+              </a:rPr>
+              <a:t>Concept to action</a:t>
+            </a:r>
+            <a:endParaRPr lang="en-US" sz="1000" dirty="0"/>
+          </a:p>
+        </p:txBody>
+      </p:sp>
+      <p:sp>
+        <p:nvSpPr>
+          <p:cNvPr id="18" name="Shape 16"/>
+          <p:cNvSpPr/>
+          <p:nvPr/>
+        </p:nvSpPr>
+        <p:spPr>
+          <a:xfrm>
+            <a:off x="7635240" y="4498848"/>
+            <a:ext cx="3474720" cy="1143000"/>
+          </a:xfrm>
+          <a:prstGeom prst="roundRect">
+            <a:avLst>
+              <a:gd name="adj" fmla="val 9600"/>
             </a:avLst>
           </a:prstGeom>
           <a:solidFill>
@@ -7725,14 +8659,14 @@
       </p:sp>
       <p:sp>
         <p:nvSpPr>
-          <p:cNvPr id="16" name="Text 14"/>
-          <p:cNvSpPr/>
-          <p:nvPr/>
-        </p:nvSpPr>
-        <p:spPr>
-          <a:xfrm>
-            <a:off x="8074152" y="3666744"/>
-            <a:ext cx="2825496" cy="256032"/>
+          <p:cNvPr id="19" name="Text 17"/>
+          <p:cNvSpPr/>
+          <p:nvPr/>
+        </p:nvSpPr>
+        <p:spPr>
+          <a:xfrm>
+            <a:off x="7799832" y="4645152"/>
+            <a:ext cx="3145536" cy="256032"/>
           </a:xfrm>
           <a:prstGeom prst="rect">
             <a:avLst/>
@@ -7756,7 +8690,7 @@
                 <a:ea typeface="Aptos" pitchFamily="34" charset="-122"/>
                 <a:cs typeface="Aptos" pitchFamily="34" charset="-120"/>
               </a:rPr>
-              <a:t>Use this for</a:t>
+              <a:t>What to document</a:t>
             </a:r>
             <a:endParaRPr lang="en-US" sz="1300" dirty="0"/>
           </a:p>
@@ -7764,14 +8698,14 @@
       </p:sp>
       <p:sp>
         <p:nvSpPr>
-          <p:cNvPr id="17" name="Text 15"/>
-          <p:cNvSpPr/>
-          <p:nvPr/>
-        </p:nvSpPr>
-        <p:spPr>
-          <a:xfrm>
-            <a:off x="8074152" y="4023360"/>
-            <a:ext cx="2825496" cy="1097280"/>
+          <p:cNvPr id="20" name="Text 18"/>
+          <p:cNvSpPr/>
+          <p:nvPr/>
+        </p:nvSpPr>
+        <p:spPr>
+          <a:xfrm>
+            <a:off x="7799832" y="5001768"/>
+            <a:ext cx="3145536" cy="502920"/>
           </a:xfrm>
           <a:prstGeom prst="rect">
             <a:avLst/>
@@ -7797,7 +8731,7 @@
                 <a:ea typeface="Aptos" pitchFamily="34" charset="-122"/>
                 <a:cs typeface="Aptos" pitchFamily="34" charset="-120"/>
               </a:rPr>
-              <a:t>Connect the concept to public health decisions, safeguards, documentation, or implementation work.</a:t>
+              <a:t>Connect the concept to public health purpose, responsible use, required safeguards, documentation, and the next action a department should take.</a:t>
             </a:r>
             <a:endParaRPr lang="en-US" sz="1550" dirty="0"/>
           </a:p>
@@ -7971,8 +8905,8 @@
         </p:nvSpPr>
         <p:spPr>
           <a:xfrm>
-            <a:off x="9966960" y="6537960"/>
-            <a:ext cx="1645920" cy="201168"/>
+            <a:off x="9646920" y="6537960"/>
+            <a:ext cx="1965960" cy="201168"/>
           </a:xfrm>
           <a:prstGeom prst="rect">
             <a:avLst/>
@@ -7996,7 +8930,7 @@
                 <a:ea typeface="Aptos" pitchFamily="34" charset="-122"/>
                 <a:cs typeface="Aptos" pitchFamily="34" charset="-120"/>
               </a:rPr>
-              <a:t>Â© Paula Soper</a:t>
+              <a:t>Copyright Paula Soper</a:t>
             </a:r>
             <a:endParaRPr lang="en-US" sz="800" dirty="0"/>
           </a:p>
@@ -8043,77 +8977,13 @@
       </p:sp>
       <p:sp>
         <p:nvSpPr>
-          <p:cNvPr id="8" name="Shape 6"/>
+          <p:cNvPr id="8" name="Text 6"/>
           <p:cNvSpPr/>
           <p:nvPr/>
         </p:nvSpPr>
         <p:spPr>
           <a:xfrm>
             <a:off x="640080" y="658368"/>
-            <a:ext cx="420624" cy="420624"/>
-          </a:xfrm>
-          <a:prstGeom prst="ellipse">
-            <a:avLst/>
-          </a:prstGeom>
-          <a:solidFill>
-            <a:srgbClr val="0068B7"/>
-          </a:solidFill>
-          <a:ln w="12700">
-            <a:solidFill>
-              <a:srgbClr val="0068B7"/>
-            </a:solidFill>
-            <a:prstDash val="solid"/>
-          </a:ln>
-        </p:spPr>
-      </p:sp>
-      <p:sp>
-        <p:nvSpPr>
-          <p:cNvPr id="9" name="Text 7"/>
-          <p:cNvSpPr/>
-          <p:nvPr/>
-        </p:nvSpPr>
-        <p:spPr>
-          <a:xfrm>
-            <a:off x="640080" y="731520"/>
-            <a:ext cx="420624" cy="164592"/>
-          </a:xfrm>
-          <a:prstGeom prst="rect">
-            <a:avLst/>
-          </a:prstGeom>
-          <a:noFill/>
-          <a:ln/>
-        </p:spPr>
-        <p:txBody>
-          <a:bodyPr wrap="square" lIns="0" tIns="0" rIns="0" bIns="0" rtlCol="0" anchor="ctr"/>
-          <a:lstStyle/>
-          <a:p>
-            <a:pPr algn="ctr" indent="0" marL="0">
-              <a:buNone/>
-            </a:pPr>
-            <a:r>
-              <a:rPr lang="en-US" sz="1100" b="1" dirty="0">
-                <a:solidFill>
-                  <a:srgbClr val="FFFFFF"/>
-                </a:solidFill>
-                <a:latin typeface="Aptos" pitchFamily="34" charset="0"/>
-                <a:ea typeface="Aptos" pitchFamily="34" charset="-122"/>
-                <a:cs typeface="Aptos" pitchFamily="34" charset="-120"/>
-              </a:rPr>
-              <a:t>13</a:t>
-            </a:r>
-            <a:endParaRPr lang="en-US" sz="1100" dirty="0"/>
-          </a:p>
-        </p:txBody>
-      </p:sp>
-      <p:sp>
-        <p:nvSpPr>
-          <p:cNvPr id="10" name="Text 8"/>
-          <p:cNvSpPr/>
-          <p:nvPr/>
-        </p:nvSpPr>
-        <p:spPr>
-          <a:xfrm>
-            <a:off x="640080" y="621792"/>
             <a:ext cx="10881360" cy="713232"/>
           </a:xfrm>
           <a:prstGeom prst="rect">
@@ -8148,14 +9018,14 @@
       </p:sp>
       <p:sp>
         <p:nvSpPr>
-          <p:cNvPr id="11" name="Text 9"/>
+          <p:cNvPr id="9" name="Text 7"/>
           <p:cNvSpPr/>
           <p:nvPr/>
         </p:nvSpPr>
         <p:spPr>
           <a:xfrm>
             <a:off x="868680" y="1508760"/>
-            <a:ext cx="6537960" cy="4160520"/>
+            <a:ext cx="6309360" cy="4160520"/>
           </a:xfrm>
           <a:prstGeom prst="rect">
             <a:avLst/>
@@ -8186,18 +9056,18 @@
       </p:sp>
       <p:sp>
         <p:nvSpPr>
-          <p:cNvPr id="12" name="Shape 10"/>
-          <p:cNvSpPr/>
-          <p:nvPr/>
-        </p:nvSpPr>
-        <p:spPr>
-          <a:xfrm>
-            <a:off x="7909560" y="1417320"/>
-            <a:ext cx="3154680" cy="1828800"/>
+          <p:cNvPr id="10" name="Shape 8"/>
+          <p:cNvSpPr/>
+          <p:nvPr/>
+        </p:nvSpPr>
+        <p:spPr>
+          <a:xfrm>
+            <a:off x="7635240" y="1325880"/>
+            <a:ext cx="3474720" cy="1325880"/>
           </a:xfrm>
           <a:prstGeom prst="roundRect">
             <a:avLst>
-              <a:gd name="adj" fmla="val 6000"/>
+              <a:gd name="adj" fmla="val 8276"/>
             </a:avLst>
           </a:prstGeom>
           <a:solidFill>
@@ -8213,14 +9083,14 @@
       </p:sp>
       <p:sp>
         <p:nvSpPr>
-          <p:cNvPr id="13" name="Text 11"/>
-          <p:cNvSpPr/>
-          <p:nvPr/>
-        </p:nvSpPr>
-        <p:spPr>
-          <a:xfrm>
-            <a:off x="8074152" y="1563624"/>
-            <a:ext cx="2825496" cy="256032"/>
+          <p:cNvPr id="11" name="Text 9"/>
+          <p:cNvSpPr/>
+          <p:nvPr/>
+        </p:nvSpPr>
+        <p:spPr>
+          <a:xfrm>
+            <a:off x="7799832" y="1472184"/>
+            <a:ext cx="3145536" cy="256032"/>
           </a:xfrm>
           <a:prstGeom prst="rect">
             <a:avLst/>
@@ -8244,7 +9114,7 @@
                 <a:ea typeface="Aptos" pitchFamily="34" charset="-122"/>
                 <a:cs typeface="Aptos" pitchFamily="34" charset="-120"/>
               </a:rPr>
-              <a:t>Key idea</a:t>
+              <a:t>Governance lens</a:t>
             </a:r>
             <a:endParaRPr lang="en-US" sz="1300" dirty="0"/>
           </a:p>
@@ -8252,14 +9122,14 @@
       </p:sp>
       <p:sp>
         <p:nvSpPr>
-          <p:cNvPr id="14" name="Text 12"/>
-          <p:cNvSpPr/>
-          <p:nvPr/>
-        </p:nvSpPr>
-        <p:spPr>
-          <a:xfrm>
-            <a:off x="8074152" y="1920240"/>
-            <a:ext cx="2825496" cy="1188720"/>
+          <p:cNvPr id="12" name="Text 10"/>
+          <p:cNvSpPr/>
+          <p:nvPr/>
+        </p:nvSpPr>
+        <p:spPr>
+          <a:xfrm>
+            <a:off x="7799832" y="1828800"/>
+            <a:ext cx="3145536" cy="685800"/>
           </a:xfrm>
           <a:prstGeom prst="rect">
             <a:avLst/>
@@ -8293,18 +9163,159 @@
       </p:sp>
       <p:sp>
         <p:nvSpPr>
-          <p:cNvPr id="15" name="Shape 13"/>
-          <p:cNvSpPr/>
-          <p:nvPr/>
-        </p:nvSpPr>
-        <p:spPr>
-          <a:xfrm>
-            <a:off x="7909560" y="3520440"/>
-            <a:ext cx="3154680" cy="1737360"/>
+          <p:cNvPr id="13" name="Shape 11"/>
+          <p:cNvSpPr/>
+          <p:nvPr/>
+        </p:nvSpPr>
+        <p:spPr>
+          <a:xfrm>
+            <a:off x="7635240" y="2788920"/>
+            <a:ext cx="3474720" cy="1536192"/>
           </a:xfrm>
           <a:prstGeom prst="roundRect">
             <a:avLst>
-              <a:gd name="adj" fmla="val 6316"/>
+              <a:gd name="adj" fmla="val 7143"/>
+            </a:avLst>
+          </a:prstGeom>
+          <a:solidFill>
+            <a:srgbClr val="FFFFFF">
+              <a:alpha val="88000"/>
+            </a:srgbClr>
+          </a:solidFill>
+          <a:ln w="12700">
+            <a:solidFill>
+              <a:srgbClr val="D6E8F2"/>
+            </a:solidFill>
+            <a:prstDash val="solid"/>
+          </a:ln>
+        </p:spPr>
+      </p:sp>
+      <p:sp>
+        <p:nvSpPr>
+          <p:cNvPr id="14" name="Shape 12"/>
+          <p:cNvSpPr/>
+          <p:nvPr/>
+        </p:nvSpPr>
+        <p:spPr>
+          <a:xfrm>
+            <a:off x="8074152" y="3291840"/>
+            <a:ext cx="2596896" cy="749808"/>
+          </a:xfrm>
+          <a:prstGeom prst="rect">
+            <a:avLst/>
+          </a:prstGeom>
+          <a:solidFill>
+            <a:srgbClr val="EAF6F8"/>
+          </a:solidFill>
+          <a:ln w="12700">
+            <a:solidFill>
+              <a:srgbClr val="8ABBD8"/>
+            </a:solidFill>
+            <a:prstDash val="solid"/>
+          </a:ln>
+        </p:spPr>
+      </p:sp>
+      <p:sp>
+        <p:nvSpPr>
+          <p:cNvPr id="15" name="Shape 13"/>
+          <p:cNvSpPr/>
+          <p:nvPr/>
+        </p:nvSpPr>
+        <p:spPr>
+          <a:xfrm>
+            <a:off x="8202168" y="3721608"/>
+            <a:ext cx="2340864" cy="0"/>
+          </a:xfrm>
+          <a:prstGeom prst="line">
+            <a:avLst/>
+          </a:prstGeom>
+          <a:noFill/>
+          <a:ln w="19050">
+            <a:solidFill>
+              <a:srgbClr val="0068B7"/>
+            </a:solidFill>
+            <a:prstDash val="solid"/>
+          </a:ln>
+        </p:spPr>
+      </p:sp>
+      <p:sp>
+        <p:nvSpPr>
+          <p:cNvPr id="16" name="Shape 14"/>
+          <p:cNvSpPr/>
+          <p:nvPr/>
+        </p:nvSpPr>
+        <p:spPr>
+          <a:xfrm>
+            <a:off x="9198864" y="4206240"/>
+            <a:ext cx="347472" cy="347472"/>
+          </a:xfrm>
+          <a:prstGeom prst="ellipse">
+            <a:avLst/>
+          </a:prstGeom>
+          <a:solidFill>
+            <a:srgbClr val="2F8A28"/>
+          </a:solidFill>
+          <a:ln w="12700">
+            <a:solidFill>
+              <a:srgbClr val="2F8A28"/>
+            </a:solidFill>
+            <a:prstDash val="solid"/>
+          </a:ln>
+        </p:spPr>
+      </p:sp>
+      <p:sp>
+        <p:nvSpPr>
+          <p:cNvPr id="17" name="Text 15"/>
+          <p:cNvSpPr/>
+          <p:nvPr/>
+        </p:nvSpPr>
+        <p:spPr>
+          <a:xfrm>
+            <a:off x="7909560" y="3977640"/>
+            <a:ext cx="2926080" cy="182880"/>
+          </a:xfrm>
+          <a:prstGeom prst="rect">
+            <a:avLst/>
+          </a:prstGeom>
+          <a:noFill/>
+          <a:ln/>
+        </p:spPr>
+        <p:txBody>
+          <a:bodyPr wrap="square" lIns="0" tIns="0" rIns="0" bIns="0" rtlCol="0" anchor="ctr"/>
+          <a:lstStyle/>
+          <a:p>
+            <a:pPr algn="ctr" indent="0" marL="0">
+              <a:buNone/>
+            </a:pPr>
+            <a:r>
+              <a:rPr lang="en-US" sz="1000" dirty="0">
+                <a:solidFill>
+                  <a:srgbClr val="003A63"/>
+                </a:solidFill>
+                <a:latin typeface="Aptos" pitchFamily="34" charset="0"/>
+                <a:ea typeface="Aptos" pitchFamily="34" charset="-122"/>
+                <a:cs typeface="Aptos" pitchFamily="34" charset="-120"/>
+              </a:rPr>
+              <a:t>Concept to action</a:t>
+            </a:r>
+            <a:endParaRPr lang="en-US" sz="1000" dirty="0"/>
+          </a:p>
+        </p:txBody>
+      </p:sp>
+      <p:sp>
+        <p:nvSpPr>
+          <p:cNvPr id="18" name="Shape 16"/>
+          <p:cNvSpPr/>
+          <p:nvPr/>
+        </p:nvSpPr>
+        <p:spPr>
+          <a:xfrm>
+            <a:off x="7635240" y="4498848"/>
+            <a:ext cx="3474720" cy="1143000"/>
+          </a:xfrm>
+          <a:prstGeom prst="roundRect">
+            <a:avLst>
+              <a:gd name="adj" fmla="val 9600"/>
             </a:avLst>
           </a:prstGeom>
           <a:solidFill>
@@ -8320,14 +9331,14 @@
       </p:sp>
       <p:sp>
         <p:nvSpPr>
-          <p:cNvPr id="16" name="Text 14"/>
-          <p:cNvSpPr/>
-          <p:nvPr/>
-        </p:nvSpPr>
-        <p:spPr>
-          <a:xfrm>
-            <a:off x="8074152" y="3666744"/>
-            <a:ext cx="2825496" cy="256032"/>
+          <p:cNvPr id="19" name="Text 17"/>
+          <p:cNvSpPr/>
+          <p:nvPr/>
+        </p:nvSpPr>
+        <p:spPr>
+          <a:xfrm>
+            <a:off x="7799832" y="4645152"/>
+            <a:ext cx="3145536" cy="256032"/>
           </a:xfrm>
           <a:prstGeom prst="rect">
             <a:avLst/>
@@ -8351,7 +9362,7 @@
                 <a:ea typeface="Aptos" pitchFamily="34" charset="-122"/>
                 <a:cs typeface="Aptos" pitchFamily="34" charset="-120"/>
               </a:rPr>
-              <a:t>Use this for</a:t>
+              <a:t>What to document</a:t>
             </a:r>
             <a:endParaRPr lang="en-US" sz="1300" dirty="0"/>
           </a:p>
@@ -8359,14 +9370,14 @@
       </p:sp>
       <p:sp>
         <p:nvSpPr>
-          <p:cNvPr id="17" name="Text 15"/>
-          <p:cNvSpPr/>
-          <p:nvPr/>
-        </p:nvSpPr>
-        <p:spPr>
-          <a:xfrm>
-            <a:off x="8074152" y="4023360"/>
-            <a:ext cx="2825496" cy="1097280"/>
+          <p:cNvPr id="20" name="Text 18"/>
+          <p:cNvSpPr/>
+          <p:nvPr/>
+        </p:nvSpPr>
+        <p:spPr>
+          <a:xfrm>
+            <a:off x="7799832" y="5001768"/>
+            <a:ext cx="3145536" cy="502920"/>
           </a:xfrm>
           <a:prstGeom prst="rect">
             <a:avLst/>
@@ -8392,7 +9403,7 @@
                 <a:ea typeface="Aptos" pitchFamily="34" charset="-122"/>
                 <a:cs typeface="Aptos" pitchFamily="34" charset="-120"/>
               </a:rPr>
-              <a:t>Connect the concept to public health decisions, safeguards, documentation, or implementation work.</a:t>
+              <a:t>Use the assignment to test whether you can explain the concept, apply it to a realistic public health situation, and identify what would need review before the work moves forward.</a:t>
             </a:r>
             <a:endParaRPr lang="en-US" sz="1550" dirty="0"/>
           </a:p>
@@ -8566,8 +9577,8 @@
         </p:nvSpPr>
         <p:spPr>
           <a:xfrm>
-            <a:off x="9966960" y="6537960"/>
-            <a:ext cx="1645920" cy="201168"/>
+            <a:off x="9646920" y="6537960"/>
+            <a:ext cx="1965960" cy="201168"/>
           </a:xfrm>
           <a:prstGeom prst="rect">
             <a:avLst/>
@@ -8591,7 +9602,7 @@
                 <a:ea typeface="Aptos" pitchFamily="34" charset="-122"/>
                 <a:cs typeface="Aptos" pitchFamily="34" charset="-120"/>
               </a:rPr>
-              <a:t>Â© Paula Soper</a:t>
+              <a:t>Copyright Paula Soper</a:t>
             </a:r>
             <a:endParaRPr lang="en-US" sz="800" dirty="0"/>
           </a:p>
@@ -8638,77 +9649,13 @@
       </p:sp>
       <p:sp>
         <p:nvSpPr>
-          <p:cNvPr id="8" name="Shape 6"/>
+          <p:cNvPr id="8" name="Text 6"/>
           <p:cNvSpPr/>
           <p:nvPr/>
         </p:nvSpPr>
         <p:spPr>
           <a:xfrm>
             <a:off x="640080" y="658368"/>
-            <a:ext cx="420624" cy="420624"/>
-          </a:xfrm>
-          <a:prstGeom prst="ellipse">
-            <a:avLst/>
-          </a:prstGeom>
-          <a:solidFill>
-            <a:srgbClr val="0068B7"/>
-          </a:solidFill>
-          <a:ln w="12700">
-            <a:solidFill>
-              <a:srgbClr val="0068B7"/>
-            </a:solidFill>
-            <a:prstDash val="solid"/>
-          </a:ln>
-        </p:spPr>
-      </p:sp>
-      <p:sp>
-        <p:nvSpPr>
-          <p:cNvPr id="9" name="Text 7"/>
-          <p:cNvSpPr/>
-          <p:nvPr/>
-        </p:nvSpPr>
-        <p:spPr>
-          <a:xfrm>
-            <a:off x="640080" y="731520"/>
-            <a:ext cx="420624" cy="164592"/>
-          </a:xfrm>
-          <a:prstGeom prst="rect">
-            <a:avLst/>
-          </a:prstGeom>
-          <a:noFill/>
-          <a:ln/>
-        </p:spPr>
-        <p:txBody>
-          <a:bodyPr wrap="square" lIns="0" tIns="0" rIns="0" bIns="0" rtlCol="0" anchor="ctr"/>
-          <a:lstStyle/>
-          <a:p>
-            <a:pPr algn="ctr" indent="0" marL="0">
-              <a:buNone/>
-            </a:pPr>
-            <a:r>
-              <a:rPr lang="en-US" sz="1100" b="1" dirty="0">
-                <a:solidFill>
-                  <a:srgbClr val="FFFFFF"/>
-                </a:solidFill>
-                <a:latin typeface="Aptos" pitchFamily="34" charset="0"/>
-                <a:ea typeface="Aptos" pitchFamily="34" charset="-122"/>
-                <a:cs typeface="Aptos" pitchFamily="34" charset="-120"/>
-              </a:rPr>
-              <a:t>14</a:t>
-            </a:r>
-            <a:endParaRPr lang="en-US" sz="1100" dirty="0"/>
-          </a:p>
-        </p:txBody>
-      </p:sp>
-      <p:sp>
-        <p:nvSpPr>
-          <p:cNvPr id="10" name="Text 8"/>
-          <p:cNvSpPr/>
-          <p:nvPr/>
-        </p:nvSpPr>
-        <p:spPr>
-          <a:xfrm>
-            <a:off x="640080" y="621792"/>
             <a:ext cx="10881360" cy="713232"/>
           </a:xfrm>
           <a:prstGeom prst="rect">
@@ -8743,14 +9690,14 @@
       </p:sp>
       <p:sp>
         <p:nvSpPr>
-          <p:cNvPr id="11" name="Text 9"/>
+          <p:cNvPr id="9" name="Text 7"/>
           <p:cNvSpPr/>
           <p:nvPr/>
         </p:nvSpPr>
         <p:spPr>
           <a:xfrm>
             <a:off x="868680" y="1508760"/>
-            <a:ext cx="6537960" cy="4160520"/>
+            <a:ext cx="6309360" cy="4160520"/>
           </a:xfrm>
           <a:prstGeom prst="rect">
             <a:avLst/>
@@ -8809,18 +9756,18 @@
       </p:sp>
       <p:sp>
         <p:nvSpPr>
-          <p:cNvPr id="12" name="Shape 10"/>
-          <p:cNvSpPr/>
-          <p:nvPr/>
-        </p:nvSpPr>
-        <p:spPr>
-          <a:xfrm>
-            <a:off x="7909560" y="1417320"/>
-            <a:ext cx="3154680" cy="1828800"/>
+          <p:cNvPr id="10" name="Shape 8"/>
+          <p:cNvSpPr/>
+          <p:nvPr/>
+        </p:nvSpPr>
+        <p:spPr>
+          <a:xfrm>
+            <a:off x="7635240" y="1325880"/>
+            <a:ext cx="3474720" cy="1325880"/>
           </a:xfrm>
           <a:prstGeom prst="roundRect">
             <a:avLst>
-              <a:gd name="adj" fmla="val 6000"/>
+              <a:gd name="adj" fmla="val 8276"/>
             </a:avLst>
           </a:prstGeom>
           <a:solidFill>
@@ -8836,14 +9783,14 @@
       </p:sp>
       <p:sp>
         <p:nvSpPr>
-          <p:cNvPr id="13" name="Text 11"/>
-          <p:cNvSpPr/>
-          <p:nvPr/>
-        </p:nvSpPr>
-        <p:spPr>
-          <a:xfrm>
-            <a:off x="8074152" y="1563624"/>
-            <a:ext cx="2825496" cy="256032"/>
+          <p:cNvPr id="11" name="Text 9"/>
+          <p:cNvSpPr/>
+          <p:nvPr/>
+        </p:nvSpPr>
+        <p:spPr>
+          <a:xfrm>
+            <a:off x="7799832" y="1472184"/>
+            <a:ext cx="3145536" cy="256032"/>
           </a:xfrm>
           <a:prstGeom prst="rect">
             <a:avLst/>
@@ -8867,7 +9814,7 @@
                 <a:ea typeface="Aptos" pitchFamily="34" charset="-122"/>
                 <a:cs typeface="Aptos" pitchFamily="34" charset="-120"/>
               </a:rPr>
-              <a:t>Key idea</a:t>
+              <a:t>Governance lens</a:t>
             </a:r>
             <a:endParaRPr lang="en-US" sz="1300" dirty="0"/>
           </a:p>
@@ -8875,14 +9822,14 @@
       </p:sp>
       <p:sp>
         <p:nvSpPr>
-          <p:cNvPr id="14" name="Text 12"/>
-          <p:cNvSpPr/>
-          <p:nvPr/>
-        </p:nvSpPr>
-        <p:spPr>
-          <a:xfrm>
-            <a:off x="8074152" y="1920240"/>
-            <a:ext cx="2825496" cy="1188720"/>
+          <p:cNvPr id="12" name="Text 10"/>
+          <p:cNvSpPr/>
+          <p:nvPr/>
+        </p:nvSpPr>
+        <p:spPr>
+          <a:xfrm>
+            <a:off x="7799832" y="1828800"/>
+            <a:ext cx="3145536" cy="685800"/>
           </a:xfrm>
           <a:prstGeom prst="rect">
             <a:avLst/>
@@ -8916,18 +9863,159 @@
       </p:sp>
       <p:sp>
         <p:nvSpPr>
-          <p:cNvPr id="15" name="Shape 13"/>
-          <p:cNvSpPr/>
-          <p:nvPr/>
-        </p:nvSpPr>
-        <p:spPr>
-          <a:xfrm>
-            <a:off x="7909560" y="3520440"/>
-            <a:ext cx="3154680" cy="1737360"/>
+          <p:cNvPr id="13" name="Shape 11"/>
+          <p:cNvSpPr/>
+          <p:nvPr/>
+        </p:nvSpPr>
+        <p:spPr>
+          <a:xfrm>
+            <a:off x="7635240" y="2788920"/>
+            <a:ext cx="3474720" cy="1536192"/>
           </a:xfrm>
           <a:prstGeom prst="roundRect">
             <a:avLst>
-              <a:gd name="adj" fmla="val 6316"/>
+              <a:gd name="adj" fmla="val 7143"/>
+            </a:avLst>
+          </a:prstGeom>
+          <a:solidFill>
+            <a:srgbClr val="FFFFFF">
+              <a:alpha val="88000"/>
+            </a:srgbClr>
+          </a:solidFill>
+          <a:ln w="12700">
+            <a:solidFill>
+              <a:srgbClr val="D6E8F2"/>
+            </a:solidFill>
+            <a:prstDash val="solid"/>
+          </a:ln>
+        </p:spPr>
+      </p:sp>
+      <p:sp>
+        <p:nvSpPr>
+          <p:cNvPr id="14" name="Shape 12"/>
+          <p:cNvSpPr/>
+          <p:nvPr/>
+        </p:nvSpPr>
+        <p:spPr>
+          <a:xfrm>
+            <a:off x="8074152" y="3291840"/>
+            <a:ext cx="2596896" cy="749808"/>
+          </a:xfrm>
+          <a:prstGeom prst="rect">
+            <a:avLst/>
+          </a:prstGeom>
+          <a:solidFill>
+            <a:srgbClr val="EAF6F8"/>
+          </a:solidFill>
+          <a:ln w="12700">
+            <a:solidFill>
+              <a:srgbClr val="8ABBD8"/>
+            </a:solidFill>
+            <a:prstDash val="solid"/>
+          </a:ln>
+        </p:spPr>
+      </p:sp>
+      <p:sp>
+        <p:nvSpPr>
+          <p:cNvPr id="15" name="Shape 13"/>
+          <p:cNvSpPr/>
+          <p:nvPr/>
+        </p:nvSpPr>
+        <p:spPr>
+          <a:xfrm>
+            <a:off x="8202168" y="3721608"/>
+            <a:ext cx="2340864" cy="0"/>
+          </a:xfrm>
+          <a:prstGeom prst="line">
+            <a:avLst/>
+          </a:prstGeom>
+          <a:noFill/>
+          <a:ln w="19050">
+            <a:solidFill>
+              <a:srgbClr val="0068B7"/>
+            </a:solidFill>
+            <a:prstDash val="solid"/>
+          </a:ln>
+        </p:spPr>
+      </p:sp>
+      <p:sp>
+        <p:nvSpPr>
+          <p:cNvPr id="16" name="Shape 14"/>
+          <p:cNvSpPr/>
+          <p:nvPr/>
+        </p:nvSpPr>
+        <p:spPr>
+          <a:xfrm>
+            <a:off x="9198864" y="4206240"/>
+            <a:ext cx="347472" cy="347472"/>
+          </a:xfrm>
+          <a:prstGeom prst="ellipse">
+            <a:avLst/>
+          </a:prstGeom>
+          <a:solidFill>
+            <a:srgbClr val="2F8A28"/>
+          </a:solidFill>
+          <a:ln w="12700">
+            <a:solidFill>
+              <a:srgbClr val="2F8A28"/>
+            </a:solidFill>
+            <a:prstDash val="solid"/>
+          </a:ln>
+        </p:spPr>
+      </p:sp>
+      <p:sp>
+        <p:nvSpPr>
+          <p:cNvPr id="17" name="Text 15"/>
+          <p:cNvSpPr/>
+          <p:nvPr/>
+        </p:nvSpPr>
+        <p:spPr>
+          <a:xfrm>
+            <a:off x="7909560" y="3977640"/>
+            <a:ext cx="2926080" cy="182880"/>
+          </a:xfrm>
+          <a:prstGeom prst="rect">
+            <a:avLst/>
+          </a:prstGeom>
+          <a:noFill/>
+          <a:ln/>
+        </p:spPr>
+        <p:txBody>
+          <a:bodyPr wrap="square" lIns="0" tIns="0" rIns="0" bIns="0" rtlCol="0" anchor="ctr"/>
+          <a:lstStyle/>
+          <a:p>
+            <a:pPr algn="ctr" indent="0" marL="0">
+              <a:buNone/>
+            </a:pPr>
+            <a:r>
+              <a:rPr lang="en-US" sz="1000" dirty="0">
+                <a:solidFill>
+                  <a:srgbClr val="003A63"/>
+                </a:solidFill>
+                <a:latin typeface="Aptos" pitchFamily="34" charset="0"/>
+                <a:ea typeface="Aptos" pitchFamily="34" charset="-122"/>
+                <a:cs typeface="Aptos" pitchFamily="34" charset="-120"/>
+              </a:rPr>
+              <a:t>Concept to action</a:t>
+            </a:r>
+            <a:endParaRPr lang="en-US" sz="1000" dirty="0"/>
+          </a:p>
+        </p:txBody>
+      </p:sp>
+      <p:sp>
+        <p:nvSpPr>
+          <p:cNvPr id="18" name="Shape 16"/>
+          <p:cNvSpPr/>
+          <p:nvPr/>
+        </p:nvSpPr>
+        <p:spPr>
+          <a:xfrm>
+            <a:off x="7635240" y="4498848"/>
+            <a:ext cx="3474720" cy="1143000"/>
+          </a:xfrm>
+          <a:prstGeom prst="roundRect">
+            <a:avLst>
+              <a:gd name="adj" fmla="val 9600"/>
             </a:avLst>
           </a:prstGeom>
           <a:solidFill>
@@ -8943,14 +10031,14 @@
       </p:sp>
       <p:sp>
         <p:nvSpPr>
-          <p:cNvPr id="16" name="Text 14"/>
-          <p:cNvSpPr/>
-          <p:nvPr/>
-        </p:nvSpPr>
-        <p:spPr>
-          <a:xfrm>
-            <a:off x="8074152" y="3666744"/>
-            <a:ext cx="2825496" cy="256032"/>
+          <p:cNvPr id="19" name="Text 17"/>
+          <p:cNvSpPr/>
+          <p:nvPr/>
+        </p:nvSpPr>
+        <p:spPr>
+          <a:xfrm>
+            <a:off x="7799832" y="4645152"/>
+            <a:ext cx="3145536" cy="256032"/>
           </a:xfrm>
           <a:prstGeom prst="rect">
             <a:avLst/>
@@ -8974,7 +10062,7 @@
                 <a:ea typeface="Aptos" pitchFamily="34" charset="-122"/>
                 <a:cs typeface="Aptos" pitchFamily="34" charset="-120"/>
               </a:rPr>
-              <a:t>Use this for</a:t>
+              <a:t>What to document</a:t>
             </a:r>
             <a:endParaRPr lang="en-US" sz="1300" dirty="0"/>
           </a:p>
@@ -8982,14 +10070,14 @@
       </p:sp>
       <p:sp>
         <p:nvSpPr>
-          <p:cNvPr id="17" name="Text 15"/>
-          <p:cNvSpPr/>
-          <p:nvPr/>
-        </p:nvSpPr>
-        <p:spPr>
-          <a:xfrm>
-            <a:off x="8074152" y="4023360"/>
-            <a:ext cx="2825496" cy="1097280"/>
+          <p:cNvPr id="20" name="Text 18"/>
+          <p:cNvSpPr/>
+          <p:nvPr/>
+        </p:nvSpPr>
+        <p:spPr>
+          <a:xfrm>
+            <a:off x="7799832" y="5001768"/>
+            <a:ext cx="3145536" cy="502920"/>
           </a:xfrm>
           <a:prstGeom prst="rect">
             <a:avLst/>
@@ -9015,7 +10103,7 @@
                 <a:ea typeface="Aptos" pitchFamily="34" charset="-122"/>
                 <a:cs typeface="Aptos" pitchFamily="34" charset="-120"/>
               </a:rPr>
-              <a:t>Connect the concept to public health decisions, safeguards, documentation, or implementation work.</a:t>
+              <a:t>Use the assignment to test whether you can explain the concept, apply it to a realistic public health situation, and identify what would need review before the work moves forward.</a:t>
             </a:r>
             <a:endParaRPr lang="en-US" sz="1550" dirty="0"/>
           </a:p>
@@ -9189,8 +10277,8 @@
         </p:nvSpPr>
         <p:spPr>
           <a:xfrm>
-            <a:off x="9966960" y="6537960"/>
-            <a:ext cx="1645920" cy="201168"/>
+            <a:off x="9646920" y="6537960"/>
+            <a:ext cx="1965960" cy="201168"/>
           </a:xfrm>
           <a:prstGeom prst="rect">
             <a:avLst/>
@@ -9214,7 +10302,7 @@
                 <a:ea typeface="Aptos" pitchFamily="34" charset="-122"/>
                 <a:cs typeface="Aptos" pitchFamily="34" charset="-120"/>
               </a:rPr>
-              <a:t>Â© Paula Soper</a:t>
+              <a:t>Copyright Paula Soper</a:t>
             </a:r>
             <a:endParaRPr lang="en-US" sz="800" dirty="0"/>
           </a:p>
@@ -9577,46 +10665,7 @@
       </p:sp>
       <p:sp>
         <p:nvSpPr>
-          <p:cNvPr id="15" name="Text 13"/>
-          <p:cNvSpPr/>
-          <p:nvPr/>
-        </p:nvSpPr>
-        <p:spPr>
-          <a:xfrm>
-            <a:off x="8695944" y="3941064"/>
-            <a:ext cx="201168" cy="256032"/>
-          </a:xfrm>
-          <a:prstGeom prst="rect">
-            <a:avLst/>
-          </a:prstGeom>
-          <a:noFill/>
-          <a:ln/>
-        </p:spPr>
-        <p:txBody>
-          <a:bodyPr wrap="square" lIns="0" tIns="0" rIns="0" bIns="0" rtlCol="0" anchor="ctr"/>
-          <a:lstStyle/>
-          <a:p>
-            <a:pPr algn="ctr" indent="0" marL="0">
-              <a:buNone/>
-            </a:pPr>
-            <a:r>
-              <a:rPr lang="en-US" sz="1800" b="1" dirty="0">
-                <a:solidFill>
-                  <a:srgbClr val="0068B7"/>
-                </a:solidFill>
-                <a:latin typeface="Aptos" pitchFamily="34" charset="0"/>
-                <a:ea typeface="Aptos" pitchFamily="34" charset="-122"/>
-                <a:cs typeface="Aptos" pitchFamily="34" charset="-120"/>
-              </a:rPr>
-              <a:t>â†’</a:t>
-            </a:r>
-            <a:endParaRPr lang="en-US" sz="1800" dirty="0"/>
-          </a:p>
-        </p:txBody>
-      </p:sp>
-      <p:sp>
-        <p:nvSpPr>
-          <p:cNvPr id="16" name="Shape 14"/>
+          <p:cNvPr id="15" name="Shape 13"/>
           <p:cNvSpPr/>
           <p:nvPr/>
         </p:nvSpPr>
@@ -9643,7 +10692,7 @@
       </p:sp>
       <p:sp>
         <p:nvSpPr>
-          <p:cNvPr id="17" name="Text 15"/>
+          <p:cNvPr id="16" name="Text 14"/>
           <p:cNvSpPr/>
           <p:nvPr/>
         </p:nvSpPr>
@@ -9684,46 +10733,7 @@
       </p:sp>
       <p:sp>
         <p:nvSpPr>
-          <p:cNvPr id="18" name="Text 16"/>
-          <p:cNvSpPr/>
-          <p:nvPr/>
-        </p:nvSpPr>
-        <p:spPr>
-          <a:xfrm>
-            <a:off x="9985248" y="3941064"/>
-            <a:ext cx="201168" cy="256032"/>
-          </a:xfrm>
-          <a:prstGeom prst="rect">
-            <a:avLst/>
-          </a:prstGeom>
-          <a:noFill/>
-          <a:ln/>
-        </p:spPr>
-        <p:txBody>
-          <a:bodyPr wrap="square" lIns="0" tIns="0" rIns="0" bIns="0" rtlCol="0" anchor="ctr"/>
-          <a:lstStyle/>
-          <a:p>
-            <a:pPr algn="ctr" indent="0" marL="0">
-              <a:buNone/>
-            </a:pPr>
-            <a:r>
-              <a:rPr lang="en-US" sz="1800" b="1" dirty="0">
-                <a:solidFill>
-                  <a:srgbClr val="0068B7"/>
-                </a:solidFill>
-                <a:latin typeface="Aptos" pitchFamily="34" charset="0"/>
-                <a:ea typeface="Aptos" pitchFamily="34" charset="-122"/>
-                <a:cs typeface="Aptos" pitchFamily="34" charset="-120"/>
-              </a:rPr>
-              <a:t>â†’</a:t>
-            </a:r>
-            <a:endParaRPr lang="en-US" sz="1800" dirty="0"/>
-          </a:p>
-        </p:txBody>
-      </p:sp>
-      <p:sp>
-        <p:nvSpPr>
-          <p:cNvPr id="19" name="Shape 17"/>
+          <p:cNvPr id="17" name="Shape 15"/>
           <p:cNvSpPr/>
           <p:nvPr/>
         </p:nvSpPr>
@@ -9750,7 +10760,7 @@
       </p:sp>
       <p:sp>
         <p:nvSpPr>
-          <p:cNvPr id="20" name="Text 18"/>
+          <p:cNvPr id="18" name="Text 16"/>
           <p:cNvSpPr/>
           <p:nvPr/>
         </p:nvSpPr>
@@ -9957,8 +10967,8 @@
         </p:nvSpPr>
         <p:spPr>
           <a:xfrm>
-            <a:off x="9966960" y="6537960"/>
-            <a:ext cx="1645920" cy="201168"/>
+            <a:off x="9646920" y="6537960"/>
+            <a:ext cx="1965960" cy="201168"/>
           </a:xfrm>
           <a:prstGeom prst="rect">
             <a:avLst/>
@@ -9982,7 +10992,7 @@
                 <a:ea typeface="Aptos" pitchFamily="34" charset="-122"/>
                 <a:cs typeface="Aptos" pitchFamily="34" charset="-120"/>
               </a:rPr>
-              <a:t>Â© Paula Soper</a:t>
+              <a:t>Copyright Paula Soper</a:t>
             </a:r>
             <a:endParaRPr lang="en-US" sz="800" dirty="0"/>
           </a:p>
@@ -10029,77 +11039,13 @@
       </p:sp>
       <p:sp>
         <p:nvSpPr>
-          <p:cNvPr id="8" name="Shape 6"/>
+          <p:cNvPr id="8" name="Text 6"/>
           <p:cNvSpPr/>
           <p:nvPr/>
         </p:nvSpPr>
         <p:spPr>
           <a:xfrm>
             <a:off x="640080" y="658368"/>
-            <a:ext cx="420624" cy="420624"/>
-          </a:xfrm>
-          <a:prstGeom prst="ellipse">
-            <a:avLst/>
-          </a:prstGeom>
-          <a:solidFill>
-            <a:srgbClr val="0068B7"/>
-          </a:solidFill>
-          <a:ln w="12700">
-            <a:solidFill>
-              <a:srgbClr val="0068B7"/>
-            </a:solidFill>
-            <a:prstDash val="solid"/>
-          </a:ln>
-        </p:spPr>
-      </p:sp>
-      <p:sp>
-        <p:nvSpPr>
-          <p:cNvPr id="9" name="Text 7"/>
-          <p:cNvSpPr/>
-          <p:nvPr/>
-        </p:nvSpPr>
-        <p:spPr>
-          <a:xfrm>
-            <a:off x="640080" y="731520"/>
-            <a:ext cx="420624" cy="164592"/>
-          </a:xfrm>
-          <a:prstGeom prst="rect">
-            <a:avLst/>
-          </a:prstGeom>
-          <a:noFill/>
-          <a:ln/>
-        </p:spPr>
-        <p:txBody>
-          <a:bodyPr wrap="square" lIns="0" tIns="0" rIns="0" bIns="0" rtlCol="0" anchor="ctr"/>
-          <a:lstStyle/>
-          <a:p>
-            <a:pPr algn="ctr" indent="0" marL="0">
-              <a:buNone/>
-            </a:pPr>
-            <a:r>
-              <a:rPr lang="en-US" sz="1100" b="1" dirty="0">
-                <a:solidFill>
-                  <a:srgbClr val="FFFFFF"/>
-                </a:solidFill>
-                <a:latin typeface="Aptos" pitchFamily="34" charset="0"/>
-                <a:ea typeface="Aptos" pitchFamily="34" charset="-122"/>
-                <a:cs typeface="Aptos" pitchFamily="34" charset="-120"/>
-              </a:rPr>
-              <a:t>15</a:t>
-            </a:r>
-            <a:endParaRPr lang="en-US" sz="1100" dirty="0"/>
-          </a:p>
-        </p:txBody>
-      </p:sp>
-      <p:sp>
-        <p:nvSpPr>
-          <p:cNvPr id="10" name="Text 8"/>
-          <p:cNvSpPr/>
-          <p:nvPr/>
-        </p:nvSpPr>
-        <p:spPr>
-          <a:xfrm>
-            <a:off x="640080" y="621792"/>
             <a:ext cx="10881360" cy="713232"/>
           </a:xfrm>
           <a:prstGeom prst="rect">
@@ -10134,14 +11080,14 @@
       </p:sp>
       <p:sp>
         <p:nvSpPr>
-          <p:cNvPr id="11" name="Text 9"/>
+          <p:cNvPr id="9" name="Text 7"/>
           <p:cNvSpPr/>
           <p:nvPr/>
         </p:nvSpPr>
         <p:spPr>
           <a:xfrm>
             <a:off x="868680" y="1508760"/>
-            <a:ext cx="6537960" cy="4160520"/>
+            <a:ext cx="6309360" cy="4160520"/>
           </a:xfrm>
           <a:prstGeom prst="rect">
             <a:avLst/>
@@ -10200,18 +11146,18 @@
       </p:sp>
       <p:sp>
         <p:nvSpPr>
-          <p:cNvPr id="12" name="Shape 10"/>
-          <p:cNvSpPr/>
-          <p:nvPr/>
-        </p:nvSpPr>
-        <p:spPr>
-          <a:xfrm>
-            <a:off x="7909560" y="1417320"/>
-            <a:ext cx="3154680" cy="1828800"/>
+          <p:cNvPr id="10" name="Shape 8"/>
+          <p:cNvSpPr/>
+          <p:nvPr/>
+        </p:nvSpPr>
+        <p:spPr>
+          <a:xfrm>
+            <a:off x="7635240" y="1325880"/>
+            <a:ext cx="3474720" cy="1325880"/>
           </a:xfrm>
           <a:prstGeom prst="roundRect">
             <a:avLst>
-              <a:gd name="adj" fmla="val 6000"/>
+              <a:gd name="adj" fmla="val 8276"/>
             </a:avLst>
           </a:prstGeom>
           <a:solidFill>
@@ -10227,14 +11173,14 @@
       </p:sp>
       <p:sp>
         <p:nvSpPr>
-          <p:cNvPr id="13" name="Text 11"/>
-          <p:cNvSpPr/>
-          <p:nvPr/>
-        </p:nvSpPr>
-        <p:spPr>
-          <a:xfrm>
-            <a:off x="8074152" y="1563624"/>
-            <a:ext cx="2825496" cy="256032"/>
+          <p:cNvPr id="11" name="Text 9"/>
+          <p:cNvSpPr/>
+          <p:nvPr/>
+        </p:nvSpPr>
+        <p:spPr>
+          <a:xfrm>
+            <a:off x="7799832" y="1472184"/>
+            <a:ext cx="3145536" cy="256032"/>
           </a:xfrm>
           <a:prstGeom prst="rect">
             <a:avLst/>
@@ -10258,7 +11204,7 @@
                 <a:ea typeface="Aptos" pitchFamily="34" charset="-122"/>
                 <a:cs typeface="Aptos" pitchFamily="34" charset="-120"/>
               </a:rPr>
-              <a:t>Key idea</a:t>
+              <a:t>Governance lens</a:t>
             </a:r>
             <a:endParaRPr lang="en-US" sz="1300" dirty="0"/>
           </a:p>
@@ -10266,14 +11212,14 @@
       </p:sp>
       <p:sp>
         <p:nvSpPr>
-          <p:cNvPr id="14" name="Text 12"/>
-          <p:cNvSpPr/>
-          <p:nvPr/>
-        </p:nvSpPr>
-        <p:spPr>
-          <a:xfrm>
-            <a:off x="8074152" y="1920240"/>
-            <a:ext cx="2825496" cy="1188720"/>
+          <p:cNvPr id="12" name="Text 10"/>
+          <p:cNvSpPr/>
+          <p:nvPr/>
+        </p:nvSpPr>
+        <p:spPr>
+          <a:xfrm>
+            <a:off x="7799832" y="1828800"/>
+            <a:ext cx="3145536" cy="685800"/>
           </a:xfrm>
           <a:prstGeom prst="rect">
             <a:avLst/>
@@ -10307,18 +11253,159 @@
       </p:sp>
       <p:sp>
         <p:nvSpPr>
-          <p:cNvPr id="15" name="Shape 13"/>
-          <p:cNvSpPr/>
-          <p:nvPr/>
-        </p:nvSpPr>
-        <p:spPr>
-          <a:xfrm>
-            <a:off x="7909560" y="3520440"/>
-            <a:ext cx="3154680" cy="1737360"/>
+          <p:cNvPr id="13" name="Shape 11"/>
+          <p:cNvSpPr/>
+          <p:nvPr/>
+        </p:nvSpPr>
+        <p:spPr>
+          <a:xfrm>
+            <a:off x="7635240" y="2788920"/>
+            <a:ext cx="3474720" cy="1536192"/>
           </a:xfrm>
           <a:prstGeom prst="roundRect">
             <a:avLst>
-              <a:gd name="adj" fmla="val 6316"/>
+              <a:gd name="adj" fmla="val 7143"/>
+            </a:avLst>
+          </a:prstGeom>
+          <a:solidFill>
+            <a:srgbClr val="FFFFFF">
+              <a:alpha val="88000"/>
+            </a:srgbClr>
+          </a:solidFill>
+          <a:ln w="12700">
+            <a:solidFill>
+              <a:srgbClr val="D6E8F2"/>
+            </a:solidFill>
+            <a:prstDash val="solid"/>
+          </a:ln>
+        </p:spPr>
+      </p:sp>
+      <p:sp>
+        <p:nvSpPr>
+          <p:cNvPr id="14" name="Shape 12"/>
+          <p:cNvSpPr/>
+          <p:nvPr/>
+        </p:nvSpPr>
+        <p:spPr>
+          <a:xfrm>
+            <a:off x="8074152" y="3291840"/>
+            <a:ext cx="2596896" cy="749808"/>
+          </a:xfrm>
+          <a:prstGeom prst="rect">
+            <a:avLst/>
+          </a:prstGeom>
+          <a:solidFill>
+            <a:srgbClr val="EAF6F8"/>
+          </a:solidFill>
+          <a:ln w="12700">
+            <a:solidFill>
+              <a:srgbClr val="8ABBD8"/>
+            </a:solidFill>
+            <a:prstDash val="solid"/>
+          </a:ln>
+        </p:spPr>
+      </p:sp>
+      <p:sp>
+        <p:nvSpPr>
+          <p:cNvPr id="15" name="Shape 13"/>
+          <p:cNvSpPr/>
+          <p:nvPr/>
+        </p:nvSpPr>
+        <p:spPr>
+          <a:xfrm>
+            <a:off x="8202168" y="3721608"/>
+            <a:ext cx="2340864" cy="0"/>
+          </a:xfrm>
+          <a:prstGeom prst="line">
+            <a:avLst/>
+          </a:prstGeom>
+          <a:noFill/>
+          <a:ln w="19050">
+            <a:solidFill>
+              <a:srgbClr val="0068B7"/>
+            </a:solidFill>
+            <a:prstDash val="solid"/>
+          </a:ln>
+        </p:spPr>
+      </p:sp>
+      <p:sp>
+        <p:nvSpPr>
+          <p:cNvPr id="16" name="Shape 14"/>
+          <p:cNvSpPr/>
+          <p:nvPr/>
+        </p:nvSpPr>
+        <p:spPr>
+          <a:xfrm>
+            <a:off x="9198864" y="4206240"/>
+            <a:ext cx="347472" cy="347472"/>
+          </a:xfrm>
+          <a:prstGeom prst="ellipse">
+            <a:avLst/>
+          </a:prstGeom>
+          <a:solidFill>
+            <a:srgbClr val="2F8A28"/>
+          </a:solidFill>
+          <a:ln w="12700">
+            <a:solidFill>
+              <a:srgbClr val="2F8A28"/>
+            </a:solidFill>
+            <a:prstDash val="solid"/>
+          </a:ln>
+        </p:spPr>
+      </p:sp>
+      <p:sp>
+        <p:nvSpPr>
+          <p:cNvPr id="17" name="Text 15"/>
+          <p:cNvSpPr/>
+          <p:nvPr/>
+        </p:nvSpPr>
+        <p:spPr>
+          <a:xfrm>
+            <a:off x="7909560" y="3977640"/>
+            <a:ext cx="2926080" cy="182880"/>
+          </a:xfrm>
+          <a:prstGeom prst="rect">
+            <a:avLst/>
+          </a:prstGeom>
+          <a:noFill/>
+          <a:ln/>
+        </p:spPr>
+        <p:txBody>
+          <a:bodyPr wrap="square" lIns="0" tIns="0" rIns="0" bIns="0" rtlCol="0" anchor="ctr"/>
+          <a:lstStyle/>
+          <a:p>
+            <a:pPr algn="ctr" indent="0" marL="0">
+              <a:buNone/>
+            </a:pPr>
+            <a:r>
+              <a:rPr lang="en-US" sz="1000" dirty="0">
+                <a:solidFill>
+                  <a:srgbClr val="003A63"/>
+                </a:solidFill>
+                <a:latin typeface="Aptos" pitchFamily="34" charset="0"/>
+                <a:ea typeface="Aptos" pitchFamily="34" charset="-122"/>
+                <a:cs typeface="Aptos" pitchFamily="34" charset="-120"/>
+              </a:rPr>
+              <a:t>Concept to action</a:t>
+            </a:r>
+            <a:endParaRPr lang="en-US" sz="1000" dirty="0"/>
+          </a:p>
+        </p:txBody>
+      </p:sp>
+      <p:sp>
+        <p:nvSpPr>
+          <p:cNvPr id="18" name="Shape 16"/>
+          <p:cNvSpPr/>
+          <p:nvPr/>
+        </p:nvSpPr>
+        <p:spPr>
+          <a:xfrm>
+            <a:off x="7635240" y="4498848"/>
+            <a:ext cx="3474720" cy="1143000"/>
+          </a:xfrm>
+          <a:prstGeom prst="roundRect">
+            <a:avLst>
+              <a:gd name="adj" fmla="val 9600"/>
             </a:avLst>
           </a:prstGeom>
           <a:solidFill>
@@ -10334,14 +11421,14 @@
       </p:sp>
       <p:sp>
         <p:nvSpPr>
-          <p:cNvPr id="16" name="Text 14"/>
-          <p:cNvSpPr/>
-          <p:nvPr/>
-        </p:nvSpPr>
-        <p:spPr>
-          <a:xfrm>
-            <a:off x="8074152" y="3666744"/>
-            <a:ext cx="2825496" cy="256032"/>
+          <p:cNvPr id="19" name="Text 17"/>
+          <p:cNvSpPr/>
+          <p:nvPr/>
+        </p:nvSpPr>
+        <p:spPr>
+          <a:xfrm>
+            <a:off x="7799832" y="4645152"/>
+            <a:ext cx="3145536" cy="256032"/>
           </a:xfrm>
           <a:prstGeom prst="rect">
             <a:avLst/>
@@ -10365,7 +11452,7 @@
                 <a:ea typeface="Aptos" pitchFamily="34" charset="-122"/>
                 <a:cs typeface="Aptos" pitchFamily="34" charset="-120"/>
               </a:rPr>
-              <a:t>Use this for</a:t>
+              <a:t>What to document</a:t>
             </a:r>
             <a:endParaRPr lang="en-US" sz="1300" dirty="0"/>
           </a:p>
@@ -10373,14 +11460,14 @@
       </p:sp>
       <p:sp>
         <p:nvSpPr>
-          <p:cNvPr id="17" name="Text 15"/>
-          <p:cNvSpPr/>
-          <p:nvPr/>
-        </p:nvSpPr>
-        <p:spPr>
-          <a:xfrm>
-            <a:off x="8074152" y="4023360"/>
-            <a:ext cx="2825496" cy="1097280"/>
+          <p:cNvPr id="20" name="Text 18"/>
+          <p:cNvSpPr/>
+          <p:nvPr/>
+        </p:nvSpPr>
+        <p:spPr>
+          <a:xfrm>
+            <a:off x="7799832" y="5001768"/>
+            <a:ext cx="3145536" cy="502920"/>
           </a:xfrm>
           <a:prstGeom prst="rect">
             <a:avLst/>
@@ -10406,7 +11493,7 @@
                 <a:ea typeface="Aptos" pitchFamily="34" charset="-122"/>
                 <a:cs typeface="Aptos" pitchFamily="34" charset="-120"/>
               </a:rPr>
-              <a:t>Connect the concept to public health decisions, safeguards, documentation, or implementation work.</a:t>
+              <a:t>Connect the concept to public health purpose, responsible use, required safeguards, documentation, and the next action a department should take.</a:t>
             </a:r>
             <a:endParaRPr lang="en-US" sz="1550" dirty="0"/>
           </a:p>
@@ -10580,8 +11667,8 @@
         </p:nvSpPr>
         <p:spPr>
           <a:xfrm>
-            <a:off x="9966960" y="6537960"/>
-            <a:ext cx="1645920" cy="201168"/>
+            <a:off x="9646920" y="6537960"/>
+            <a:ext cx="1965960" cy="201168"/>
           </a:xfrm>
           <a:prstGeom prst="rect">
             <a:avLst/>
@@ -10605,7 +11692,7 @@
                 <a:ea typeface="Aptos" pitchFamily="34" charset="-122"/>
                 <a:cs typeface="Aptos" pitchFamily="34" charset="-120"/>
               </a:rPr>
-              <a:t>Â© Paula Soper</a:t>
+              <a:t>Copyright Paula Soper</a:t>
             </a:r>
             <a:endParaRPr lang="en-US" sz="800" dirty="0"/>
           </a:p>
@@ -10700,7 +11787,7 @@
         <p:spPr>
           <a:xfrm>
             <a:off x="868680" y="1508760"/>
-            <a:ext cx="6537960" cy="4160520"/>
+            <a:ext cx="6309360" cy="4160520"/>
           </a:xfrm>
           <a:prstGeom prst="rect">
             <a:avLst/>
@@ -10751,12 +11838,12 @@
         </p:nvSpPr>
         <p:spPr>
           <a:xfrm>
-            <a:off x="7909560" y="1417320"/>
-            <a:ext cx="3154680" cy="1828800"/>
+            <a:off x="7635240" y="1325880"/>
+            <a:ext cx="3474720" cy="1325880"/>
           </a:xfrm>
           <a:prstGeom prst="roundRect">
             <a:avLst>
-              <a:gd name="adj" fmla="val 6000"/>
+              <a:gd name="adj" fmla="val 8276"/>
             </a:avLst>
           </a:prstGeom>
           <a:solidFill>
@@ -10778,8 +11865,8 @@
         </p:nvSpPr>
         <p:spPr>
           <a:xfrm>
-            <a:off x="8074152" y="1563624"/>
-            <a:ext cx="2825496" cy="256032"/>
+            <a:off x="7799832" y="1472184"/>
+            <a:ext cx="3145536" cy="256032"/>
           </a:xfrm>
           <a:prstGeom prst="rect">
             <a:avLst/>
@@ -10803,7 +11890,7 @@
                 <a:ea typeface="Aptos" pitchFamily="34" charset="-122"/>
                 <a:cs typeface="Aptos" pitchFamily="34" charset="-120"/>
               </a:rPr>
-              <a:t>Key idea</a:t>
+              <a:t>Governance lens</a:t>
             </a:r>
             <a:endParaRPr lang="en-US" sz="1300" dirty="0"/>
           </a:p>
@@ -10817,8 +11904,8 @@
         </p:nvSpPr>
         <p:spPr>
           <a:xfrm>
-            <a:off x="8074152" y="1920240"/>
-            <a:ext cx="2825496" cy="1188720"/>
+            <a:off x="7799832" y="1828800"/>
+            <a:ext cx="3145536" cy="685800"/>
           </a:xfrm>
           <a:prstGeom prst="rect">
             <a:avLst/>
@@ -10858,12 +11945,153 @@
         </p:nvSpPr>
         <p:spPr>
           <a:xfrm>
-            <a:off x="7909560" y="3520440"/>
-            <a:ext cx="3154680" cy="1737360"/>
+            <a:off x="7635240" y="2788920"/>
+            <a:ext cx="3474720" cy="1536192"/>
           </a:xfrm>
           <a:prstGeom prst="roundRect">
             <a:avLst>
-              <a:gd name="adj" fmla="val 6316"/>
+              <a:gd name="adj" fmla="val 7143"/>
+            </a:avLst>
+          </a:prstGeom>
+          <a:solidFill>
+            <a:srgbClr val="FFFFFF">
+              <a:alpha val="88000"/>
+            </a:srgbClr>
+          </a:solidFill>
+          <a:ln w="12700">
+            <a:solidFill>
+              <a:srgbClr val="D6E8F2"/>
+            </a:solidFill>
+            <a:prstDash val="solid"/>
+          </a:ln>
+        </p:spPr>
+      </p:sp>
+      <p:sp>
+        <p:nvSpPr>
+          <p:cNvPr id="14" name="Shape 12"/>
+          <p:cNvSpPr/>
+          <p:nvPr/>
+        </p:nvSpPr>
+        <p:spPr>
+          <a:xfrm>
+            <a:off x="8074152" y="3291840"/>
+            <a:ext cx="2596896" cy="749808"/>
+          </a:xfrm>
+          <a:prstGeom prst="rect">
+            <a:avLst/>
+          </a:prstGeom>
+          <a:solidFill>
+            <a:srgbClr val="EAF6F8"/>
+          </a:solidFill>
+          <a:ln w="12700">
+            <a:solidFill>
+              <a:srgbClr val="8ABBD8"/>
+            </a:solidFill>
+            <a:prstDash val="solid"/>
+          </a:ln>
+        </p:spPr>
+      </p:sp>
+      <p:sp>
+        <p:nvSpPr>
+          <p:cNvPr id="15" name="Shape 13"/>
+          <p:cNvSpPr/>
+          <p:nvPr/>
+        </p:nvSpPr>
+        <p:spPr>
+          <a:xfrm>
+            <a:off x="8202168" y="3721608"/>
+            <a:ext cx="2340864" cy="0"/>
+          </a:xfrm>
+          <a:prstGeom prst="line">
+            <a:avLst/>
+          </a:prstGeom>
+          <a:noFill/>
+          <a:ln w="19050">
+            <a:solidFill>
+              <a:srgbClr val="0068B7"/>
+            </a:solidFill>
+            <a:prstDash val="solid"/>
+          </a:ln>
+        </p:spPr>
+      </p:sp>
+      <p:sp>
+        <p:nvSpPr>
+          <p:cNvPr id="16" name="Shape 14"/>
+          <p:cNvSpPr/>
+          <p:nvPr/>
+        </p:nvSpPr>
+        <p:spPr>
+          <a:xfrm>
+            <a:off x="9198864" y="4206240"/>
+            <a:ext cx="347472" cy="347472"/>
+          </a:xfrm>
+          <a:prstGeom prst="ellipse">
+            <a:avLst/>
+          </a:prstGeom>
+          <a:solidFill>
+            <a:srgbClr val="2F8A28"/>
+          </a:solidFill>
+          <a:ln w="12700">
+            <a:solidFill>
+              <a:srgbClr val="2F8A28"/>
+            </a:solidFill>
+            <a:prstDash val="solid"/>
+          </a:ln>
+        </p:spPr>
+      </p:sp>
+      <p:sp>
+        <p:nvSpPr>
+          <p:cNvPr id="17" name="Text 15"/>
+          <p:cNvSpPr/>
+          <p:nvPr/>
+        </p:nvSpPr>
+        <p:spPr>
+          <a:xfrm>
+            <a:off x="7909560" y="3977640"/>
+            <a:ext cx="2926080" cy="182880"/>
+          </a:xfrm>
+          <a:prstGeom prst="rect">
+            <a:avLst/>
+          </a:prstGeom>
+          <a:noFill/>
+          <a:ln/>
+        </p:spPr>
+        <p:txBody>
+          <a:bodyPr wrap="square" lIns="0" tIns="0" rIns="0" bIns="0" rtlCol="0" anchor="ctr"/>
+          <a:lstStyle/>
+          <a:p>
+            <a:pPr algn="ctr" indent="0" marL="0">
+              <a:buNone/>
+            </a:pPr>
+            <a:r>
+              <a:rPr lang="en-US" sz="1000" dirty="0">
+                <a:solidFill>
+                  <a:srgbClr val="003A63"/>
+                </a:solidFill>
+                <a:latin typeface="Aptos" pitchFamily="34" charset="0"/>
+                <a:ea typeface="Aptos" pitchFamily="34" charset="-122"/>
+                <a:cs typeface="Aptos" pitchFamily="34" charset="-120"/>
+              </a:rPr>
+              <a:t>Concept to action</a:t>
+            </a:r>
+            <a:endParaRPr lang="en-US" sz="1000" dirty="0"/>
+          </a:p>
+        </p:txBody>
+      </p:sp>
+      <p:sp>
+        <p:nvSpPr>
+          <p:cNvPr id="18" name="Shape 16"/>
+          <p:cNvSpPr/>
+          <p:nvPr/>
+        </p:nvSpPr>
+        <p:spPr>
+          <a:xfrm>
+            <a:off x="7635240" y="4498848"/>
+            <a:ext cx="3474720" cy="1143000"/>
+          </a:xfrm>
+          <a:prstGeom prst="roundRect">
+            <a:avLst>
+              <a:gd name="adj" fmla="val 9600"/>
             </a:avLst>
           </a:prstGeom>
           <a:solidFill>
@@ -10879,14 +12107,14 @@
       </p:sp>
       <p:sp>
         <p:nvSpPr>
-          <p:cNvPr id="14" name="Text 12"/>
-          <p:cNvSpPr/>
-          <p:nvPr/>
-        </p:nvSpPr>
-        <p:spPr>
-          <a:xfrm>
-            <a:off x="8074152" y="3666744"/>
-            <a:ext cx="2825496" cy="256032"/>
+          <p:cNvPr id="19" name="Text 17"/>
+          <p:cNvSpPr/>
+          <p:nvPr/>
+        </p:nvSpPr>
+        <p:spPr>
+          <a:xfrm>
+            <a:off x="7799832" y="4645152"/>
+            <a:ext cx="3145536" cy="256032"/>
           </a:xfrm>
           <a:prstGeom prst="rect">
             <a:avLst/>
@@ -10910,7 +12138,7 @@
                 <a:ea typeface="Aptos" pitchFamily="34" charset="-122"/>
                 <a:cs typeface="Aptos" pitchFamily="34" charset="-120"/>
               </a:rPr>
-              <a:t>Use this for</a:t>
+              <a:t>What to document</a:t>
             </a:r>
             <a:endParaRPr lang="en-US" sz="1300" dirty="0"/>
           </a:p>
@@ -10918,14 +12146,14 @@
       </p:sp>
       <p:sp>
         <p:nvSpPr>
-          <p:cNvPr id="15" name="Text 13"/>
-          <p:cNvSpPr/>
-          <p:nvPr/>
-        </p:nvSpPr>
-        <p:spPr>
-          <a:xfrm>
-            <a:off x="8074152" y="4023360"/>
-            <a:ext cx="2825496" cy="1097280"/>
+          <p:cNvPr id="20" name="Text 18"/>
+          <p:cNvSpPr/>
+          <p:nvPr/>
+        </p:nvSpPr>
+        <p:spPr>
+          <a:xfrm>
+            <a:off x="7799832" y="5001768"/>
+            <a:ext cx="3145536" cy="502920"/>
           </a:xfrm>
           <a:prstGeom prst="rect">
             <a:avLst/>
@@ -10951,7 +12179,7 @@
                 <a:ea typeface="Aptos" pitchFamily="34" charset="-122"/>
                 <a:cs typeface="Aptos" pitchFamily="34" charset="-120"/>
               </a:rPr>
-              <a:t>Connect the concept to public health decisions, safeguards, documentation, or implementation work.</a:t>
+              <a:t>Connect the concept to public health purpose, responsible use, required safeguards, documentation, and the next action a department should take.</a:t>
             </a:r>
             <a:endParaRPr lang="en-US" sz="1550" dirty="0"/>
           </a:p>
@@ -11125,8 +12353,8 @@
         </p:nvSpPr>
         <p:spPr>
           <a:xfrm>
-            <a:off x="9966960" y="6537960"/>
-            <a:ext cx="1645920" cy="201168"/>
+            <a:off x="9646920" y="6537960"/>
+            <a:ext cx="1965960" cy="201168"/>
           </a:xfrm>
           <a:prstGeom prst="rect">
             <a:avLst/>
@@ -11150,7 +12378,7 @@
                 <a:ea typeface="Aptos" pitchFamily="34" charset="-122"/>
                 <a:cs typeface="Aptos" pitchFamily="34" charset="-120"/>
               </a:rPr>
-              <a:t>Â© Paula Soper</a:t>
+              <a:t>Copyright Paula Soper</a:t>
             </a:r>
             <a:endParaRPr lang="en-US" sz="800" dirty="0"/>
           </a:p>
@@ -11493,46 +12721,7 @@
       </p:sp>
       <p:sp>
         <p:nvSpPr>
-          <p:cNvPr id="15" name="Text 13"/>
-          <p:cNvSpPr/>
-          <p:nvPr/>
-        </p:nvSpPr>
-        <p:spPr>
-          <a:xfrm>
-            <a:off x="8817864" y="4187952"/>
-            <a:ext cx="201168" cy="256032"/>
-          </a:xfrm>
-          <a:prstGeom prst="rect">
-            <a:avLst/>
-          </a:prstGeom>
-          <a:noFill/>
-          <a:ln/>
-        </p:spPr>
-        <p:txBody>
-          <a:bodyPr wrap="square" lIns="0" tIns="0" rIns="0" bIns="0" rtlCol="0" anchor="ctr"/>
-          <a:lstStyle/>
-          <a:p>
-            <a:pPr algn="ctr" indent="0" marL="0">
-              <a:buNone/>
-            </a:pPr>
-            <a:r>
-              <a:rPr lang="en-US" sz="1800" b="1" dirty="0">
-                <a:solidFill>
-                  <a:srgbClr val="0068B7"/>
-                </a:solidFill>
-                <a:latin typeface="Aptos" pitchFamily="34" charset="0"/>
-                <a:ea typeface="Aptos" pitchFamily="34" charset="-122"/>
-                <a:cs typeface="Aptos" pitchFamily="34" charset="-120"/>
-              </a:rPr>
-              <a:t>â†’</a:t>
-            </a:r>
-            <a:endParaRPr lang="en-US" sz="1800" dirty="0"/>
-          </a:p>
-        </p:txBody>
-      </p:sp>
-      <p:sp>
-        <p:nvSpPr>
-          <p:cNvPr id="16" name="Shape 14"/>
+          <p:cNvPr id="15" name="Shape 13"/>
           <p:cNvSpPr/>
           <p:nvPr/>
         </p:nvSpPr>
@@ -11559,7 +12748,7 @@
       </p:sp>
       <p:sp>
         <p:nvSpPr>
-          <p:cNvPr id="17" name="Text 15"/>
+          <p:cNvPr id="16" name="Text 14"/>
           <p:cNvSpPr/>
           <p:nvPr/>
         </p:nvSpPr>
@@ -11600,46 +12789,7 @@
       </p:sp>
       <p:sp>
         <p:nvSpPr>
-          <p:cNvPr id="18" name="Text 16"/>
-          <p:cNvSpPr/>
-          <p:nvPr/>
-        </p:nvSpPr>
-        <p:spPr>
-          <a:xfrm>
-            <a:off x="10046208" y="4187952"/>
-            <a:ext cx="201168" cy="256032"/>
-          </a:xfrm>
-          <a:prstGeom prst="rect">
-            <a:avLst/>
-          </a:prstGeom>
-          <a:noFill/>
-          <a:ln/>
-        </p:spPr>
-        <p:txBody>
-          <a:bodyPr wrap="square" lIns="0" tIns="0" rIns="0" bIns="0" rtlCol="0" anchor="ctr"/>
-          <a:lstStyle/>
-          <a:p>
-            <a:pPr algn="ctr" indent="0" marL="0">
-              <a:buNone/>
-            </a:pPr>
-            <a:r>
-              <a:rPr lang="en-US" sz="1800" b="1" dirty="0">
-                <a:solidFill>
-                  <a:srgbClr val="0068B7"/>
-                </a:solidFill>
-                <a:latin typeface="Aptos" pitchFamily="34" charset="0"/>
-                <a:ea typeface="Aptos" pitchFamily="34" charset="-122"/>
-                <a:cs typeface="Aptos" pitchFamily="34" charset="-120"/>
-              </a:rPr>
-              <a:t>â†’</a:t>
-            </a:r>
-            <a:endParaRPr lang="en-US" sz="1800" dirty="0"/>
-          </a:p>
-        </p:txBody>
-      </p:sp>
-      <p:sp>
-        <p:nvSpPr>
-          <p:cNvPr id="19" name="Shape 17"/>
+          <p:cNvPr id="17" name="Shape 15"/>
           <p:cNvSpPr/>
           <p:nvPr/>
         </p:nvSpPr>
@@ -11666,7 +12816,7 @@
       </p:sp>
       <p:sp>
         <p:nvSpPr>
-          <p:cNvPr id="20" name="Text 18"/>
+          <p:cNvPr id="18" name="Text 16"/>
           <p:cNvSpPr/>
           <p:nvPr/>
         </p:nvSpPr>
@@ -11873,8 +13023,8 @@
         </p:nvSpPr>
         <p:spPr>
           <a:xfrm>
-            <a:off x="9966960" y="6537960"/>
-            <a:ext cx="1645920" cy="201168"/>
+            <a:off x="9646920" y="6537960"/>
+            <a:ext cx="1965960" cy="201168"/>
           </a:xfrm>
           <a:prstGeom prst="rect">
             <a:avLst/>
@@ -11898,7 +13048,7 @@
                 <a:ea typeface="Aptos" pitchFamily="34" charset="-122"/>
                 <a:cs typeface="Aptos" pitchFamily="34" charset="-120"/>
               </a:rPr>
-              <a:t>Â© Paula Soper</a:t>
+              <a:t>Copyright Paula Soper</a:t>
             </a:r>
             <a:endParaRPr lang="en-US" sz="800" dirty="0"/>
           </a:p>
@@ -12241,46 +13391,7 @@
       </p:sp>
       <p:sp>
         <p:nvSpPr>
-          <p:cNvPr id="15" name="Text 13"/>
-          <p:cNvSpPr/>
-          <p:nvPr/>
-        </p:nvSpPr>
-        <p:spPr>
-          <a:xfrm>
-            <a:off x="8817864" y="4187952"/>
-            <a:ext cx="201168" cy="256032"/>
-          </a:xfrm>
-          <a:prstGeom prst="rect">
-            <a:avLst/>
-          </a:prstGeom>
-          <a:noFill/>
-          <a:ln/>
-        </p:spPr>
-        <p:txBody>
-          <a:bodyPr wrap="square" lIns="0" tIns="0" rIns="0" bIns="0" rtlCol="0" anchor="ctr"/>
-          <a:lstStyle/>
-          <a:p>
-            <a:pPr algn="ctr" indent="0" marL="0">
-              <a:buNone/>
-            </a:pPr>
-            <a:r>
-              <a:rPr lang="en-US" sz="1800" b="1" dirty="0">
-                <a:solidFill>
-                  <a:srgbClr val="0068B7"/>
-                </a:solidFill>
-                <a:latin typeface="Aptos" pitchFamily="34" charset="0"/>
-                <a:ea typeface="Aptos" pitchFamily="34" charset="-122"/>
-                <a:cs typeface="Aptos" pitchFamily="34" charset="-120"/>
-              </a:rPr>
-              <a:t>â†’</a:t>
-            </a:r>
-            <a:endParaRPr lang="en-US" sz="1800" dirty="0"/>
-          </a:p>
-        </p:txBody>
-      </p:sp>
-      <p:sp>
-        <p:nvSpPr>
-          <p:cNvPr id="16" name="Shape 14"/>
+          <p:cNvPr id="15" name="Shape 13"/>
           <p:cNvSpPr/>
           <p:nvPr/>
         </p:nvSpPr>
@@ -12307,7 +13418,7 @@
       </p:sp>
       <p:sp>
         <p:nvSpPr>
-          <p:cNvPr id="17" name="Text 15"/>
+          <p:cNvPr id="16" name="Text 14"/>
           <p:cNvSpPr/>
           <p:nvPr/>
         </p:nvSpPr>
@@ -12348,46 +13459,7 @@
       </p:sp>
       <p:sp>
         <p:nvSpPr>
-          <p:cNvPr id="18" name="Text 16"/>
-          <p:cNvSpPr/>
-          <p:nvPr/>
-        </p:nvSpPr>
-        <p:spPr>
-          <a:xfrm>
-            <a:off x="10046208" y="4187952"/>
-            <a:ext cx="201168" cy="256032"/>
-          </a:xfrm>
-          <a:prstGeom prst="rect">
-            <a:avLst/>
-          </a:prstGeom>
-          <a:noFill/>
-          <a:ln/>
-        </p:spPr>
-        <p:txBody>
-          <a:bodyPr wrap="square" lIns="0" tIns="0" rIns="0" bIns="0" rtlCol="0" anchor="ctr"/>
-          <a:lstStyle/>
-          <a:p>
-            <a:pPr algn="ctr" indent="0" marL="0">
-              <a:buNone/>
-            </a:pPr>
-            <a:r>
-              <a:rPr lang="en-US" sz="1800" b="1" dirty="0">
-                <a:solidFill>
-                  <a:srgbClr val="0068B7"/>
-                </a:solidFill>
-                <a:latin typeface="Aptos" pitchFamily="34" charset="0"/>
-                <a:ea typeface="Aptos" pitchFamily="34" charset="-122"/>
-                <a:cs typeface="Aptos" pitchFamily="34" charset="-120"/>
-              </a:rPr>
-              <a:t>â†’</a:t>
-            </a:r>
-            <a:endParaRPr lang="en-US" sz="1800" dirty="0"/>
-          </a:p>
-        </p:txBody>
-      </p:sp>
-      <p:sp>
-        <p:nvSpPr>
-          <p:cNvPr id="19" name="Shape 17"/>
+          <p:cNvPr id="17" name="Shape 15"/>
           <p:cNvSpPr/>
           <p:nvPr/>
         </p:nvSpPr>
@@ -12414,7 +13486,7 @@
       </p:sp>
       <p:sp>
         <p:nvSpPr>
-          <p:cNvPr id="20" name="Text 18"/>
+          <p:cNvPr id="18" name="Text 16"/>
           <p:cNvSpPr/>
           <p:nvPr/>
         </p:nvSpPr>
@@ -12621,8 +13693,8 @@
         </p:nvSpPr>
         <p:spPr>
           <a:xfrm>
-            <a:off x="9966960" y="6537960"/>
-            <a:ext cx="1645920" cy="201168"/>
+            <a:off x="9646920" y="6537960"/>
+            <a:ext cx="1965960" cy="201168"/>
           </a:xfrm>
           <a:prstGeom prst="rect">
             <a:avLst/>
@@ -12646,7 +13718,7 @@
                 <a:ea typeface="Aptos" pitchFamily="34" charset="-122"/>
                 <a:cs typeface="Aptos" pitchFamily="34" charset="-120"/>
               </a:rPr>
-              <a:t>Â© Paula Soper</a:t>
+              <a:t>Copyright Paula Soper</a:t>
             </a:r>
             <a:endParaRPr lang="en-US" sz="800" dirty="0"/>
           </a:p>
@@ -12693,77 +13765,13 @@
       </p:sp>
       <p:sp>
         <p:nvSpPr>
-          <p:cNvPr id="8" name="Shape 6"/>
+          <p:cNvPr id="8" name="Text 6"/>
           <p:cNvSpPr/>
           <p:nvPr/>
         </p:nvSpPr>
         <p:spPr>
           <a:xfrm>
             <a:off x="640080" y="658368"/>
-            <a:ext cx="420624" cy="420624"/>
-          </a:xfrm>
-          <a:prstGeom prst="ellipse">
-            <a:avLst/>
-          </a:prstGeom>
-          <a:solidFill>
-            <a:srgbClr val="0068B7"/>
-          </a:solidFill>
-          <a:ln w="12700">
-            <a:solidFill>
-              <a:srgbClr val="0068B7"/>
-            </a:solidFill>
-            <a:prstDash val="solid"/>
-          </a:ln>
-        </p:spPr>
-      </p:sp>
-      <p:sp>
-        <p:nvSpPr>
-          <p:cNvPr id="9" name="Text 7"/>
-          <p:cNvSpPr/>
-          <p:nvPr/>
-        </p:nvSpPr>
-        <p:spPr>
-          <a:xfrm>
-            <a:off x="640080" y="731520"/>
-            <a:ext cx="420624" cy="164592"/>
-          </a:xfrm>
-          <a:prstGeom prst="rect">
-            <a:avLst/>
-          </a:prstGeom>
-          <a:noFill/>
-          <a:ln/>
-        </p:spPr>
-        <p:txBody>
-          <a:bodyPr wrap="square" lIns="0" tIns="0" rIns="0" bIns="0" rtlCol="0" anchor="ctr"/>
-          <a:lstStyle/>
-          <a:p>
-            <a:pPr algn="ctr" indent="0" marL="0">
-              <a:buNone/>
-            </a:pPr>
-            <a:r>
-              <a:rPr lang="en-US" sz="1100" b="1" dirty="0">
-                <a:solidFill>
-                  <a:srgbClr val="FFFFFF"/>
-                </a:solidFill>
-                <a:latin typeface="Aptos" pitchFamily="34" charset="0"/>
-                <a:ea typeface="Aptos" pitchFamily="34" charset="-122"/>
-                <a:cs typeface="Aptos" pitchFamily="34" charset="-120"/>
-              </a:rPr>
-              <a:t>1</a:t>
-            </a:r>
-            <a:endParaRPr lang="en-US" sz="1100" dirty="0"/>
-          </a:p>
-        </p:txBody>
-      </p:sp>
-      <p:sp>
-        <p:nvSpPr>
-          <p:cNvPr id="10" name="Text 8"/>
-          <p:cNvSpPr/>
-          <p:nvPr/>
-        </p:nvSpPr>
-        <p:spPr>
-          <a:xfrm>
-            <a:off x="640080" y="621792"/>
             <a:ext cx="10881360" cy="713232"/>
           </a:xfrm>
           <a:prstGeom prst="rect">
@@ -12798,14 +13806,14 @@
       </p:sp>
       <p:sp>
         <p:nvSpPr>
-          <p:cNvPr id="11" name="Text 9"/>
+          <p:cNvPr id="9" name="Text 7"/>
           <p:cNvSpPr/>
           <p:nvPr/>
         </p:nvSpPr>
         <p:spPr>
           <a:xfrm>
             <a:off x="868680" y="1508760"/>
-            <a:ext cx="6537960" cy="4160520"/>
+            <a:ext cx="6309360" cy="4160520"/>
           </a:xfrm>
           <a:prstGeom prst="rect">
             <a:avLst/>
@@ -12864,18 +13872,18 @@
       </p:sp>
       <p:sp>
         <p:nvSpPr>
-          <p:cNvPr id="12" name="Shape 10"/>
-          <p:cNvSpPr/>
-          <p:nvPr/>
-        </p:nvSpPr>
-        <p:spPr>
-          <a:xfrm>
-            <a:off x="7909560" y="1417320"/>
-            <a:ext cx="3154680" cy="1828800"/>
+          <p:cNvPr id="10" name="Shape 8"/>
+          <p:cNvSpPr/>
+          <p:nvPr/>
+        </p:nvSpPr>
+        <p:spPr>
+          <a:xfrm>
+            <a:off x="7635240" y="1325880"/>
+            <a:ext cx="3474720" cy="1325880"/>
           </a:xfrm>
           <a:prstGeom prst="roundRect">
             <a:avLst>
-              <a:gd name="adj" fmla="val 6000"/>
+              <a:gd name="adj" fmla="val 8276"/>
             </a:avLst>
           </a:prstGeom>
           <a:solidFill>
@@ -12891,14 +13899,14 @@
       </p:sp>
       <p:sp>
         <p:nvSpPr>
-          <p:cNvPr id="13" name="Text 11"/>
-          <p:cNvSpPr/>
-          <p:nvPr/>
-        </p:nvSpPr>
-        <p:spPr>
-          <a:xfrm>
-            <a:off x="8074152" y="1563624"/>
-            <a:ext cx="2825496" cy="256032"/>
+          <p:cNvPr id="11" name="Text 9"/>
+          <p:cNvSpPr/>
+          <p:nvPr/>
+        </p:nvSpPr>
+        <p:spPr>
+          <a:xfrm>
+            <a:off x="7799832" y="1472184"/>
+            <a:ext cx="3145536" cy="256032"/>
           </a:xfrm>
           <a:prstGeom prst="rect">
             <a:avLst/>
@@ -12922,7 +13930,7 @@
                 <a:ea typeface="Aptos" pitchFamily="34" charset="-122"/>
                 <a:cs typeface="Aptos" pitchFamily="34" charset="-120"/>
               </a:rPr>
-              <a:t>Key idea</a:t>
+              <a:t>Governance lens</a:t>
             </a:r>
             <a:endParaRPr lang="en-US" sz="1300" dirty="0"/>
           </a:p>
@@ -12930,14 +13938,14 @@
       </p:sp>
       <p:sp>
         <p:nvSpPr>
-          <p:cNvPr id="14" name="Text 12"/>
-          <p:cNvSpPr/>
-          <p:nvPr/>
-        </p:nvSpPr>
-        <p:spPr>
-          <a:xfrm>
-            <a:off x="8074152" y="1920240"/>
-            <a:ext cx="2825496" cy="1188720"/>
+          <p:cNvPr id="12" name="Text 10"/>
+          <p:cNvSpPr/>
+          <p:nvPr/>
+        </p:nvSpPr>
+        <p:spPr>
+          <a:xfrm>
+            <a:off x="7799832" y="1828800"/>
+            <a:ext cx="3145536" cy="685800"/>
           </a:xfrm>
           <a:prstGeom prst="rect">
             <a:avLst/>
@@ -12971,18 +13979,159 @@
       </p:sp>
       <p:sp>
         <p:nvSpPr>
-          <p:cNvPr id="15" name="Shape 13"/>
-          <p:cNvSpPr/>
-          <p:nvPr/>
-        </p:nvSpPr>
-        <p:spPr>
-          <a:xfrm>
-            <a:off x="7909560" y="3520440"/>
-            <a:ext cx="3154680" cy="1737360"/>
+          <p:cNvPr id="13" name="Shape 11"/>
+          <p:cNvSpPr/>
+          <p:nvPr/>
+        </p:nvSpPr>
+        <p:spPr>
+          <a:xfrm>
+            <a:off x="7635240" y="2788920"/>
+            <a:ext cx="3474720" cy="1536192"/>
           </a:xfrm>
           <a:prstGeom prst="roundRect">
             <a:avLst>
-              <a:gd name="adj" fmla="val 6316"/>
+              <a:gd name="adj" fmla="val 7143"/>
+            </a:avLst>
+          </a:prstGeom>
+          <a:solidFill>
+            <a:srgbClr val="FFFFFF">
+              <a:alpha val="88000"/>
+            </a:srgbClr>
+          </a:solidFill>
+          <a:ln w="12700">
+            <a:solidFill>
+              <a:srgbClr val="D6E8F2"/>
+            </a:solidFill>
+            <a:prstDash val="solid"/>
+          </a:ln>
+        </p:spPr>
+      </p:sp>
+      <p:sp>
+        <p:nvSpPr>
+          <p:cNvPr id="14" name="Shape 12"/>
+          <p:cNvSpPr/>
+          <p:nvPr/>
+        </p:nvSpPr>
+        <p:spPr>
+          <a:xfrm>
+            <a:off x="8074152" y="3291840"/>
+            <a:ext cx="2596896" cy="749808"/>
+          </a:xfrm>
+          <a:prstGeom prst="rect">
+            <a:avLst/>
+          </a:prstGeom>
+          <a:solidFill>
+            <a:srgbClr val="EAF6F8"/>
+          </a:solidFill>
+          <a:ln w="12700">
+            <a:solidFill>
+              <a:srgbClr val="8ABBD8"/>
+            </a:solidFill>
+            <a:prstDash val="solid"/>
+          </a:ln>
+        </p:spPr>
+      </p:sp>
+      <p:sp>
+        <p:nvSpPr>
+          <p:cNvPr id="15" name="Shape 13"/>
+          <p:cNvSpPr/>
+          <p:nvPr/>
+        </p:nvSpPr>
+        <p:spPr>
+          <a:xfrm>
+            <a:off x="8202168" y="3721608"/>
+            <a:ext cx="2340864" cy="0"/>
+          </a:xfrm>
+          <a:prstGeom prst="line">
+            <a:avLst/>
+          </a:prstGeom>
+          <a:noFill/>
+          <a:ln w="19050">
+            <a:solidFill>
+              <a:srgbClr val="0068B7"/>
+            </a:solidFill>
+            <a:prstDash val="solid"/>
+          </a:ln>
+        </p:spPr>
+      </p:sp>
+      <p:sp>
+        <p:nvSpPr>
+          <p:cNvPr id="16" name="Shape 14"/>
+          <p:cNvSpPr/>
+          <p:nvPr/>
+        </p:nvSpPr>
+        <p:spPr>
+          <a:xfrm>
+            <a:off x="9198864" y="4206240"/>
+            <a:ext cx="347472" cy="347472"/>
+          </a:xfrm>
+          <a:prstGeom prst="ellipse">
+            <a:avLst/>
+          </a:prstGeom>
+          <a:solidFill>
+            <a:srgbClr val="2F8A28"/>
+          </a:solidFill>
+          <a:ln w="12700">
+            <a:solidFill>
+              <a:srgbClr val="2F8A28"/>
+            </a:solidFill>
+            <a:prstDash val="solid"/>
+          </a:ln>
+        </p:spPr>
+      </p:sp>
+      <p:sp>
+        <p:nvSpPr>
+          <p:cNvPr id="17" name="Text 15"/>
+          <p:cNvSpPr/>
+          <p:nvPr/>
+        </p:nvSpPr>
+        <p:spPr>
+          <a:xfrm>
+            <a:off x="7909560" y="3977640"/>
+            <a:ext cx="2926080" cy="182880"/>
+          </a:xfrm>
+          <a:prstGeom prst="rect">
+            <a:avLst/>
+          </a:prstGeom>
+          <a:noFill/>
+          <a:ln/>
+        </p:spPr>
+        <p:txBody>
+          <a:bodyPr wrap="square" lIns="0" tIns="0" rIns="0" bIns="0" rtlCol="0" anchor="ctr"/>
+          <a:lstStyle/>
+          <a:p>
+            <a:pPr algn="ctr" indent="0" marL="0">
+              <a:buNone/>
+            </a:pPr>
+            <a:r>
+              <a:rPr lang="en-US" sz="1000" dirty="0">
+                <a:solidFill>
+                  <a:srgbClr val="003A63"/>
+                </a:solidFill>
+                <a:latin typeface="Aptos" pitchFamily="34" charset="0"/>
+                <a:ea typeface="Aptos" pitchFamily="34" charset="-122"/>
+                <a:cs typeface="Aptos" pitchFamily="34" charset="-120"/>
+              </a:rPr>
+              <a:t>Concept to action</a:t>
+            </a:r>
+            <a:endParaRPr lang="en-US" sz="1000" dirty="0"/>
+          </a:p>
+        </p:txBody>
+      </p:sp>
+      <p:sp>
+        <p:nvSpPr>
+          <p:cNvPr id="18" name="Shape 16"/>
+          <p:cNvSpPr/>
+          <p:nvPr/>
+        </p:nvSpPr>
+        <p:spPr>
+          <a:xfrm>
+            <a:off x="7635240" y="4498848"/>
+            <a:ext cx="3474720" cy="1143000"/>
+          </a:xfrm>
+          <a:prstGeom prst="roundRect">
+            <a:avLst>
+              <a:gd name="adj" fmla="val 9600"/>
             </a:avLst>
           </a:prstGeom>
           <a:solidFill>
@@ -12998,14 +14147,14 @@
       </p:sp>
       <p:sp>
         <p:nvSpPr>
-          <p:cNvPr id="16" name="Text 14"/>
-          <p:cNvSpPr/>
-          <p:nvPr/>
-        </p:nvSpPr>
-        <p:spPr>
-          <a:xfrm>
-            <a:off x="8074152" y="3666744"/>
-            <a:ext cx="2825496" cy="256032"/>
+          <p:cNvPr id="19" name="Text 17"/>
+          <p:cNvSpPr/>
+          <p:nvPr/>
+        </p:nvSpPr>
+        <p:spPr>
+          <a:xfrm>
+            <a:off x="7799832" y="4645152"/>
+            <a:ext cx="3145536" cy="256032"/>
           </a:xfrm>
           <a:prstGeom prst="rect">
             <a:avLst/>
@@ -13029,7 +14178,7 @@
                 <a:ea typeface="Aptos" pitchFamily="34" charset="-122"/>
                 <a:cs typeface="Aptos" pitchFamily="34" charset="-120"/>
               </a:rPr>
-              <a:t>Use this for</a:t>
+              <a:t>What to document</a:t>
             </a:r>
             <a:endParaRPr lang="en-US" sz="1300" dirty="0"/>
           </a:p>
@@ -13037,14 +14186,14 @@
       </p:sp>
       <p:sp>
         <p:nvSpPr>
-          <p:cNvPr id="17" name="Text 15"/>
-          <p:cNvSpPr/>
-          <p:nvPr/>
-        </p:nvSpPr>
-        <p:spPr>
-          <a:xfrm>
-            <a:off x="8074152" y="4023360"/>
-            <a:ext cx="2825496" cy="1097280"/>
+          <p:cNvPr id="20" name="Text 18"/>
+          <p:cNvSpPr/>
+          <p:nvPr/>
+        </p:nvSpPr>
+        <p:spPr>
+          <a:xfrm>
+            <a:off x="7799832" y="5001768"/>
+            <a:ext cx="3145536" cy="502920"/>
           </a:xfrm>
           <a:prstGeom prst="rect">
             <a:avLst/>
@@ -13070,7 +14219,7 @@
                 <a:ea typeface="Aptos" pitchFamily="34" charset="-122"/>
                 <a:cs typeface="Aptos" pitchFamily="34" charset="-120"/>
               </a:rPr>
-              <a:t>Connect the concept to public health decisions, safeguards, documentation, or implementation work.</a:t>
+              <a:t>Use the assignment to test whether you can explain the concept, apply it to a realistic public health situation, and identify what would need review before the work moves forward.</a:t>
             </a:r>
             <a:endParaRPr lang="en-US" sz="1550" dirty="0"/>
           </a:p>
@@ -13244,8 +14393,8 @@
         </p:nvSpPr>
         <p:spPr>
           <a:xfrm>
-            <a:off x="9966960" y="6537960"/>
-            <a:ext cx="1645920" cy="201168"/>
+            <a:off x="9646920" y="6537960"/>
+            <a:ext cx="1965960" cy="201168"/>
           </a:xfrm>
           <a:prstGeom prst="rect">
             <a:avLst/>
@@ -13269,7 +14418,7 @@
                 <a:ea typeface="Aptos" pitchFamily="34" charset="-122"/>
                 <a:cs typeface="Aptos" pitchFamily="34" charset="-120"/>
               </a:rPr>
-              <a:t>Â© Paula Soper</a:t>
+              <a:t>Copyright Paula Soper</a:t>
             </a:r>
             <a:endParaRPr lang="en-US" sz="800" dirty="0"/>
           </a:p>
@@ -13316,77 +14465,13 @@
       </p:sp>
       <p:sp>
         <p:nvSpPr>
-          <p:cNvPr id="8" name="Shape 6"/>
+          <p:cNvPr id="8" name="Text 6"/>
           <p:cNvSpPr/>
           <p:nvPr/>
         </p:nvSpPr>
         <p:spPr>
           <a:xfrm>
             <a:off x="640080" y="658368"/>
-            <a:ext cx="420624" cy="420624"/>
-          </a:xfrm>
-          <a:prstGeom prst="ellipse">
-            <a:avLst/>
-          </a:prstGeom>
-          <a:solidFill>
-            <a:srgbClr val="0068B7"/>
-          </a:solidFill>
-          <a:ln w="12700">
-            <a:solidFill>
-              <a:srgbClr val="0068B7"/>
-            </a:solidFill>
-            <a:prstDash val="solid"/>
-          </a:ln>
-        </p:spPr>
-      </p:sp>
-      <p:sp>
-        <p:nvSpPr>
-          <p:cNvPr id="9" name="Text 7"/>
-          <p:cNvSpPr/>
-          <p:nvPr/>
-        </p:nvSpPr>
-        <p:spPr>
-          <a:xfrm>
-            <a:off x="640080" y="731520"/>
-            <a:ext cx="420624" cy="164592"/>
-          </a:xfrm>
-          <a:prstGeom prst="rect">
-            <a:avLst/>
-          </a:prstGeom>
-          <a:noFill/>
-          <a:ln/>
-        </p:spPr>
-        <p:txBody>
-          <a:bodyPr wrap="square" lIns="0" tIns="0" rIns="0" bIns="0" rtlCol="0" anchor="ctr"/>
-          <a:lstStyle/>
-          <a:p>
-            <a:pPr algn="ctr" indent="0" marL="0">
-              <a:buNone/>
-            </a:pPr>
-            <a:r>
-              <a:rPr lang="en-US" sz="1100" b="1" dirty="0">
-                <a:solidFill>
-                  <a:srgbClr val="FFFFFF"/>
-                </a:solidFill>
-                <a:latin typeface="Aptos" pitchFamily="34" charset="0"/>
-                <a:ea typeface="Aptos" pitchFamily="34" charset="-122"/>
-                <a:cs typeface="Aptos" pitchFamily="34" charset="-120"/>
-              </a:rPr>
-              <a:t>2</a:t>
-            </a:r>
-            <a:endParaRPr lang="en-US" sz="1100" dirty="0"/>
-          </a:p>
-        </p:txBody>
-      </p:sp>
-      <p:sp>
-        <p:nvSpPr>
-          <p:cNvPr id="10" name="Text 8"/>
-          <p:cNvSpPr/>
-          <p:nvPr/>
-        </p:nvSpPr>
-        <p:spPr>
-          <a:xfrm>
-            <a:off x="640080" y="621792"/>
             <a:ext cx="10881360" cy="713232"/>
           </a:xfrm>
           <a:prstGeom prst="rect">
@@ -13421,14 +14506,14 @@
       </p:sp>
       <p:sp>
         <p:nvSpPr>
-          <p:cNvPr id="11" name="Text 9"/>
+          <p:cNvPr id="9" name="Text 7"/>
           <p:cNvSpPr/>
           <p:nvPr/>
         </p:nvSpPr>
         <p:spPr>
           <a:xfrm>
             <a:off x="868680" y="1508760"/>
-            <a:ext cx="6537960" cy="4160520"/>
+            <a:ext cx="6309360" cy="4160520"/>
           </a:xfrm>
           <a:prstGeom prst="rect">
             <a:avLst/>
@@ -13487,18 +14572,18 @@
       </p:sp>
       <p:sp>
         <p:nvSpPr>
-          <p:cNvPr id="12" name="Shape 10"/>
-          <p:cNvSpPr/>
-          <p:nvPr/>
-        </p:nvSpPr>
-        <p:spPr>
-          <a:xfrm>
-            <a:off x="7909560" y="1417320"/>
-            <a:ext cx="3154680" cy="1828800"/>
+          <p:cNvPr id="10" name="Shape 8"/>
+          <p:cNvSpPr/>
+          <p:nvPr/>
+        </p:nvSpPr>
+        <p:spPr>
+          <a:xfrm>
+            <a:off x="7635240" y="1325880"/>
+            <a:ext cx="3474720" cy="1325880"/>
           </a:xfrm>
           <a:prstGeom prst="roundRect">
             <a:avLst>
-              <a:gd name="adj" fmla="val 6000"/>
+              <a:gd name="adj" fmla="val 8276"/>
             </a:avLst>
           </a:prstGeom>
           <a:solidFill>
@@ -13514,14 +14599,14 @@
       </p:sp>
       <p:sp>
         <p:nvSpPr>
-          <p:cNvPr id="13" name="Text 11"/>
-          <p:cNvSpPr/>
-          <p:nvPr/>
-        </p:nvSpPr>
-        <p:spPr>
-          <a:xfrm>
-            <a:off x="8074152" y="1563624"/>
-            <a:ext cx="2825496" cy="256032"/>
+          <p:cNvPr id="11" name="Text 9"/>
+          <p:cNvSpPr/>
+          <p:nvPr/>
+        </p:nvSpPr>
+        <p:spPr>
+          <a:xfrm>
+            <a:off x="7799832" y="1472184"/>
+            <a:ext cx="3145536" cy="256032"/>
           </a:xfrm>
           <a:prstGeom prst="rect">
             <a:avLst/>
@@ -13545,7 +14630,7 @@
                 <a:ea typeface="Aptos" pitchFamily="34" charset="-122"/>
                 <a:cs typeface="Aptos" pitchFamily="34" charset="-120"/>
               </a:rPr>
-              <a:t>Key idea</a:t>
+              <a:t>Governance lens</a:t>
             </a:r>
             <a:endParaRPr lang="en-US" sz="1300" dirty="0"/>
           </a:p>
@@ -13553,14 +14638,14 @@
       </p:sp>
       <p:sp>
         <p:nvSpPr>
-          <p:cNvPr id="14" name="Text 12"/>
-          <p:cNvSpPr/>
-          <p:nvPr/>
-        </p:nvSpPr>
-        <p:spPr>
-          <a:xfrm>
-            <a:off x="8074152" y="1920240"/>
-            <a:ext cx="2825496" cy="1188720"/>
+          <p:cNvPr id="12" name="Text 10"/>
+          <p:cNvSpPr/>
+          <p:nvPr/>
+        </p:nvSpPr>
+        <p:spPr>
+          <a:xfrm>
+            <a:off x="7799832" y="1828800"/>
+            <a:ext cx="3145536" cy="685800"/>
           </a:xfrm>
           <a:prstGeom prst="rect">
             <a:avLst/>
@@ -13594,18 +14679,159 @@
       </p:sp>
       <p:sp>
         <p:nvSpPr>
-          <p:cNvPr id="15" name="Shape 13"/>
-          <p:cNvSpPr/>
-          <p:nvPr/>
-        </p:nvSpPr>
-        <p:spPr>
-          <a:xfrm>
-            <a:off x="7909560" y="3520440"/>
-            <a:ext cx="3154680" cy="1737360"/>
+          <p:cNvPr id="13" name="Shape 11"/>
+          <p:cNvSpPr/>
+          <p:nvPr/>
+        </p:nvSpPr>
+        <p:spPr>
+          <a:xfrm>
+            <a:off x="7635240" y="2788920"/>
+            <a:ext cx="3474720" cy="1536192"/>
           </a:xfrm>
           <a:prstGeom prst="roundRect">
             <a:avLst>
-              <a:gd name="adj" fmla="val 6316"/>
+              <a:gd name="adj" fmla="val 7143"/>
+            </a:avLst>
+          </a:prstGeom>
+          <a:solidFill>
+            <a:srgbClr val="FFFFFF">
+              <a:alpha val="88000"/>
+            </a:srgbClr>
+          </a:solidFill>
+          <a:ln w="12700">
+            <a:solidFill>
+              <a:srgbClr val="D6E8F2"/>
+            </a:solidFill>
+            <a:prstDash val="solid"/>
+          </a:ln>
+        </p:spPr>
+      </p:sp>
+      <p:sp>
+        <p:nvSpPr>
+          <p:cNvPr id="14" name="Shape 12"/>
+          <p:cNvSpPr/>
+          <p:nvPr/>
+        </p:nvSpPr>
+        <p:spPr>
+          <a:xfrm>
+            <a:off x="8074152" y="3291840"/>
+            <a:ext cx="2596896" cy="749808"/>
+          </a:xfrm>
+          <a:prstGeom prst="rect">
+            <a:avLst/>
+          </a:prstGeom>
+          <a:solidFill>
+            <a:srgbClr val="EAF6F8"/>
+          </a:solidFill>
+          <a:ln w="12700">
+            <a:solidFill>
+              <a:srgbClr val="8ABBD8"/>
+            </a:solidFill>
+            <a:prstDash val="solid"/>
+          </a:ln>
+        </p:spPr>
+      </p:sp>
+      <p:sp>
+        <p:nvSpPr>
+          <p:cNvPr id="15" name="Shape 13"/>
+          <p:cNvSpPr/>
+          <p:nvPr/>
+        </p:nvSpPr>
+        <p:spPr>
+          <a:xfrm>
+            <a:off x="8202168" y="3721608"/>
+            <a:ext cx="2340864" cy="0"/>
+          </a:xfrm>
+          <a:prstGeom prst="line">
+            <a:avLst/>
+          </a:prstGeom>
+          <a:noFill/>
+          <a:ln w="19050">
+            <a:solidFill>
+              <a:srgbClr val="0068B7"/>
+            </a:solidFill>
+            <a:prstDash val="solid"/>
+          </a:ln>
+        </p:spPr>
+      </p:sp>
+      <p:sp>
+        <p:nvSpPr>
+          <p:cNvPr id="16" name="Shape 14"/>
+          <p:cNvSpPr/>
+          <p:nvPr/>
+        </p:nvSpPr>
+        <p:spPr>
+          <a:xfrm>
+            <a:off x="9198864" y="4206240"/>
+            <a:ext cx="347472" cy="347472"/>
+          </a:xfrm>
+          <a:prstGeom prst="ellipse">
+            <a:avLst/>
+          </a:prstGeom>
+          <a:solidFill>
+            <a:srgbClr val="2F8A28"/>
+          </a:solidFill>
+          <a:ln w="12700">
+            <a:solidFill>
+              <a:srgbClr val="2F8A28"/>
+            </a:solidFill>
+            <a:prstDash val="solid"/>
+          </a:ln>
+        </p:spPr>
+      </p:sp>
+      <p:sp>
+        <p:nvSpPr>
+          <p:cNvPr id="17" name="Text 15"/>
+          <p:cNvSpPr/>
+          <p:nvPr/>
+        </p:nvSpPr>
+        <p:spPr>
+          <a:xfrm>
+            <a:off x="7909560" y="3977640"/>
+            <a:ext cx="2926080" cy="182880"/>
+          </a:xfrm>
+          <a:prstGeom prst="rect">
+            <a:avLst/>
+          </a:prstGeom>
+          <a:noFill/>
+          <a:ln/>
+        </p:spPr>
+        <p:txBody>
+          <a:bodyPr wrap="square" lIns="0" tIns="0" rIns="0" bIns="0" rtlCol="0" anchor="ctr"/>
+          <a:lstStyle/>
+          <a:p>
+            <a:pPr algn="ctr" indent="0" marL="0">
+              <a:buNone/>
+            </a:pPr>
+            <a:r>
+              <a:rPr lang="en-US" sz="1000" dirty="0">
+                <a:solidFill>
+                  <a:srgbClr val="003A63"/>
+                </a:solidFill>
+                <a:latin typeface="Aptos" pitchFamily="34" charset="0"/>
+                <a:ea typeface="Aptos" pitchFamily="34" charset="-122"/>
+                <a:cs typeface="Aptos" pitchFamily="34" charset="-120"/>
+              </a:rPr>
+              <a:t>Concept to action</a:t>
+            </a:r>
+            <a:endParaRPr lang="en-US" sz="1000" dirty="0"/>
+          </a:p>
+        </p:txBody>
+      </p:sp>
+      <p:sp>
+        <p:nvSpPr>
+          <p:cNvPr id="18" name="Shape 16"/>
+          <p:cNvSpPr/>
+          <p:nvPr/>
+        </p:nvSpPr>
+        <p:spPr>
+          <a:xfrm>
+            <a:off x="7635240" y="4498848"/>
+            <a:ext cx="3474720" cy="1143000"/>
+          </a:xfrm>
+          <a:prstGeom prst="roundRect">
+            <a:avLst>
+              <a:gd name="adj" fmla="val 9600"/>
             </a:avLst>
           </a:prstGeom>
           <a:solidFill>
@@ -13621,14 +14847,14 @@
       </p:sp>
       <p:sp>
         <p:nvSpPr>
-          <p:cNvPr id="16" name="Text 14"/>
-          <p:cNvSpPr/>
-          <p:nvPr/>
-        </p:nvSpPr>
-        <p:spPr>
-          <a:xfrm>
-            <a:off x="8074152" y="3666744"/>
-            <a:ext cx="2825496" cy="256032"/>
+          <p:cNvPr id="19" name="Text 17"/>
+          <p:cNvSpPr/>
+          <p:nvPr/>
+        </p:nvSpPr>
+        <p:spPr>
+          <a:xfrm>
+            <a:off x="7799832" y="4645152"/>
+            <a:ext cx="3145536" cy="256032"/>
           </a:xfrm>
           <a:prstGeom prst="rect">
             <a:avLst/>
@@ -13652,7 +14878,7 @@
                 <a:ea typeface="Aptos" pitchFamily="34" charset="-122"/>
                 <a:cs typeface="Aptos" pitchFamily="34" charset="-120"/>
               </a:rPr>
-              <a:t>Use this for</a:t>
+              <a:t>What to document</a:t>
             </a:r>
             <a:endParaRPr lang="en-US" sz="1300" dirty="0"/>
           </a:p>
@@ -13660,14 +14886,14 @@
       </p:sp>
       <p:sp>
         <p:nvSpPr>
-          <p:cNvPr id="17" name="Text 15"/>
-          <p:cNvSpPr/>
-          <p:nvPr/>
-        </p:nvSpPr>
-        <p:spPr>
-          <a:xfrm>
-            <a:off x="8074152" y="4023360"/>
-            <a:ext cx="2825496" cy="1097280"/>
+          <p:cNvPr id="20" name="Text 18"/>
+          <p:cNvSpPr/>
+          <p:nvPr/>
+        </p:nvSpPr>
+        <p:spPr>
+          <a:xfrm>
+            <a:off x="7799832" y="5001768"/>
+            <a:ext cx="3145536" cy="502920"/>
           </a:xfrm>
           <a:prstGeom prst="rect">
             <a:avLst/>
@@ -13693,7 +14919,7 @@
                 <a:ea typeface="Aptos" pitchFamily="34" charset="-122"/>
                 <a:cs typeface="Aptos" pitchFamily="34" charset="-120"/>
               </a:rPr>
-              <a:t>Connect the concept to public health decisions, safeguards, documentation, or implementation work.</a:t>
+              <a:t>Connect the concept to public health purpose, responsible use, required safeguards, documentation, and the next action a department should take.</a:t>
             </a:r>
             <a:endParaRPr lang="en-US" sz="1550" dirty="0"/>
           </a:p>
@@ -13867,8 +15093,8 @@
         </p:nvSpPr>
         <p:spPr>
           <a:xfrm>
-            <a:off x="9966960" y="6537960"/>
-            <a:ext cx="1645920" cy="201168"/>
+            <a:off x="9646920" y="6537960"/>
+            <a:ext cx="1965960" cy="201168"/>
           </a:xfrm>
           <a:prstGeom prst="rect">
             <a:avLst/>
@@ -13892,7 +15118,7 @@
                 <a:ea typeface="Aptos" pitchFamily="34" charset="-122"/>
                 <a:cs typeface="Aptos" pitchFamily="34" charset="-120"/>
               </a:rPr>
-              <a:t>Â© Paula Soper</a:t>
+              <a:t>Copyright Paula Soper</a:t>
             </a:r>
             <a:endParaRPr lang="en-US" sz="800" dirty="0"/>
           </a:p>
@@ -13939,14 +15165,257 @@
       </p:sp>
       <p:sp>
         <p:nvSpPr>
-          <p:cNvPr id="8" name="Shape 6"/>
+          <p:cNvPr id="8" name="Text 6"/>
           <p:cNvSpPr/>
           <p:nvPr/>
         </p:nvSpPr>
         <p:spPr>
           <a:xfrm>
             <a:off x="640080" y="658368"/>
-            <a:ext cx="420624" cy="420624"/>
+            <a:ext cx="10881360" cy="713232"/>
+          </a:xfrm>
+          <a:prstGeom prst="rect">
+            <a:avLst/>
+          </a:prstGeom>
+          <a:noFill/>
+          <a:ln/>
+        </p:spPr>
+        <p:txBody>
+          <a:bodyPr wrap="square" lIns="0" tIns="0" rIns="0" bIns="0" rtlCol="0" anchor="ctr">
+            <a:normAutofit/>
+          </a:bodyPr>
+          <a:lstStyle/>
+          <a:p>
+            <a:pPr indent="0" marL="0">
+              <a:buNone/>
+            </a:pPr>
+            <a:r>
+              <a:rPr lang="en-US" sz="3400" b="1" dirty="0">
+                <a:solidFill>
+                  <a:srgbClr val="003A63"/>
+                </a:solidFill>
+                <a:latin typeface="Aptos Display" pitchFamily="34" charset="0"/>
+                <a:ea typeface="Aptos Display" pitchFamily="34" charset="-122"/>
+                <a:cs typeface="Aptos Display" pitchFamily="34" charset="-120"/>
+              </a:rPr>
+              <a:t>Jurisdiction and Agency Policy Note</a:t>
+            </a:r>
+            <a:endParaRPr lang="en-US" sz="3400" dirty="0"/>
+          </a:p>
+        </p:txBody>
+      </p:sp>
+      <p:sp>
+        <p:nvSpPr>
+          <p:cNvPr id="9" name="Text 7"/>
+          <p:cNvSpPr/>
+          <p:nvPr/>
+        </p:nvSpPr>
+        <p:spPr>
+          <a:xfrm>
+            <a:off x="868680" y="1508760"/>
+            <a:ext cx="6309360" cy="4160520"/>
+          </a:xfrm>
+          <a:prstGeom prst="rect">
+            <a:avLst/>
+          </a:prstGeom>
+          <a:noFill/>
+          <a:ln/>
+        </p:spPr>
+        <p:txBody>
+          <a:bodyPr wrap="square" lIns="635" tIns="635" rIns="635" bIns="635" rtlCol="0" anchor="t">
+            <a:normAutofit/>
+          </a:bodyPr>
+          <a:lstStyle/>
+          <a:p>
+            <a:r>
+              <a:rPr lang="en-US" sz="2100" dirty="0">
+                <a:solidFill>
+                  <a:srgbClr val="17364A"/>
+                </a:solidFill>
+                <a:latin typeface="Aptos" pitchFamily="34" charset="0"/>
+                <a:ea typeface="Aptos" pitchFamily="34" charset="-122"/>
+                <a:cs typeface="Aptos" pitchFamily="34" charset="-120"/>
+              </a:rPr>
+              <a:t>This module provides national-level training guidance for public health agencies and partners.</a:t>
+            </a:r>
+            <a:endParaRPr lang="en-US" sz="2100" dirty="0"/>
+          </a:p>
+          <a:p>
+            <a:r>
+              <a:rPr lang="en-US" sz="2100" dirty="0">
+                <a:solidFill>
+                  <a:srgbClr val="17364A"/>
+                </a:solidFill>
+                <a:latin typeface="Aptos" pitchFamily="34" charset="0"/>
+                <a:ea typeface="Aptos" pitchFamily="34" charset="-122"/>
+                <a:cs typeface="Aptos" pitchFamily="34" charset="-120"/>
+              </a:rPr>
+              <a:t>It is not legal advice and does not replace review by agency legal counsel, privacy officers,.</a:t>
+            </a:r>
+            <a:endParaRPr lang="en-US" sz="2100" dirty="0"/>
+          </a:p>
+          <a:p>
+            <a:r>
+              <a:rPr lang="en-US" sz="2100" dirty="0">
+                <a:solidFill>
+                  <a:srgbClr val="17364A"/>
+                </a:solidFill>
+                <a:latin typeface="Aptos" pitchFamily="34" charset="0"/>
+                <a:ea typeface="Aptos" pitchFamily="34" charset="-122"/>
+                <a:cs typeface="Aptos" pitchFamily="34" charset="-120"/>
+              </a:rPr>
+              <a:t>Requirements may vary by state, locality, territory, Tribe, agency, funding source, data-sharing.</a:t>
+            </a:r>
+            <a:endParaRPr lang="en-US" sz="2100" dirty="0"/>
+          </a:p>
+        </p:txBody>
+      </p:sp>
+      <p:sp>
+        <p:nvSpPr>
+          <p:cNvPr id="10" name="Shape 8"/>
+          <p:cNvSpPr/>
+          <p:nvPr/>
+        </p:nvSpPr>
+        <p:spPr>
+          <a:xfrm>
+            <a:off x="7635240" y="1325880"/>
+            <a:ext cx="3474720" cy="1325880"/>
+          </a:xfrm>
+          <a:prstGeom prst="roundRect">
+            <a:avLst>
+              <a:gd name="adj" fmla="val 8276"/>
+            </a:avLst>
+          </a:prstGeom>
+          <a:solidFill>
+            <a:srgbClr val="EEF8ED"/>
+          </a:solidFill>
+          <a:ln w="12700">
+            <a:solidFill>
+              <a:srgbClr val="B9D7E6"/>
+            </a:solidFill>
+            <a:prstDash val="solid"/>
+          </a:ln>
+        </p:spPr>
+      </p:sp>
+      <p:sp>
+        <p:nvSpPr>
+          <p:cNvPr id="11" name="Text 9"/>
+          <p:cNvSpPr/>
+          <p:nvPr/>
+        </p:nvSpPr>
+        <p:spPr>
+          <a:xfrm>
+            <a:off x="7799832" y="1472184"/>
+            <a:ext cx="3145536" cy="256032"/>
+          </a:xfrm>
+          <a:prstGeom prst="rect">
+            <a:avLst/>
+          </a:prstGeom>
+          <a:noFill/>
+          <a:ln/>
+        </p:spPr>
+        <p:txBody>
+          <a:bodyPr wrap="square" lIns="0" tIns="0" rIns="0" bIns="0" rtlCol="0" anchor="ctr"/>
+          <a:lstStyle/>
+          <a:p>
+            <a:pPr indent="0" marL="0">
+              <a:buNone/>
+            </a:pPr>
+            <a:r>
+              <a:rPr lang="en-US" sz="1300" b="1" dirty="0">
+                <a:solidFill>
+                  <a:srgbClr val="0068B7"/>
+                </a:solidFill>
+                <a:latin typeface="Aptos" pitchFamily="34" charset="0"/>
+                <a:ea typeface="Aptos" pitchFamily="34" charset="-122"/>
+                <a:cs typeface="Aptos" pitchFamily="34" charset="-120"/>
+              </a:rPr>
+              <a:t>Governance lens</a:t>
+            </a:r>
+            <a:endParaRPr lang="en-US" sz="1300" dirty="0"/>
+          </a:p>
+        </p:txBody>
+      </p:sp>
+      <p:sp>
+        <p:nvSpPr>
+          <p:cNvPr id="12" name="Text 10"/>
+          <p:cNvSpPr/>
+          <p:nvPr/>
+        </p:nvSpPr>
+        <p:spPr>
+          <a:xfrm>
+            <a:off x="7799832" y="1828800"/>
+            <a:ext cx="3145536" cy="685800"/>
+          </a:xfrm>
+          <a:prstGeom prst="rect">
+            <a:avLst/>
+          </a:prstGeom>
+          <a:noFill/>
+          <a:ln/>
+        </p:spPr>
+        <p:txBody>
+          <a:bodyPr wrap="square" lIns="0" tIns="0" rIns="0" bIns="0" rtlCol="0" anchor="t">
+            <a:normAutofit/>
+          </a:bodyPr>
+          <a:lstStyle/>
+          <a:p>
+            <a:pPr indent="0" marL="0">
+              <a:buNone/>
+            </a:pPr>
+            <a:r>
+              <a:rPr lang="en-US" sz="1550" dirty="0">
+                <a:solidFill>
+                  <a:srgbClr val="17364A"/>
+                </a:solidFill>
+                <a:latin typeface="Aptos" pitchFamily="34" charset="0"/>
+                <a:ea typeface="Aptos" pitchFamily="34" charset="-122"/>
+                <a:cs typeface="Aptos" pitchFamily="34" charset="-120"/>
+              </a:rPr>
+              <a:t>This module provides national-level training guidance for public health agencies and partners.</a:t>
+            </a:r>
+            <a:endParaRPr lang="en-US" sz="1550" dirty="0"/>
+          </a:p>
+        </p:txBody>
+      </p:sp>
+      <p:sp>
+        <p:nvSpPr>
+          <p:cNvPr id="13" name="Shape 11"/>
+          <p:cNvSpPr/>
+          <p:nvPr/>
+        </p:nvSpPr>
+        <p:spPr>
+          <a:xfrm>
+            <a:off x="7635240" y="2788920"/>
+            <a:ext cx="3474720" cy="1536192"/>
+          </a:xfrm>
+          <a:prstGeom prst="roundRect">
+            <a:avLst>
+              <a:gd name="adj" fmla="val 7143"/>
+            </a:avLst>
+          </a:prstGeom>
+          <a:solidFill>
+            <a:srgbClr val="FFFFFF">
+              <a:alpha val="88000"/>
+            </a:srgbClr>
+          </a:solidFill>
+          <a:ln w="12700">
+            <a:solidFill>
+              <a:srgbClr val="D6E8F2"/>
+            </a:solidFill>
+            <a:prstDash val="solid"/>
+          </a:ln>
+        </p:spPr>
+      </p:sp>
+      <p:sp>
+        <p:nvSpPr>
+          <p:cNvPr id="14" name="Shape 12"/>
+          <p:cNvSpPr/>
+          <p:nvPr/>
+        </p:nvSpPr>
+        <p:spPr>
+          <a:xfrm>
+            <a:off x="7891272" y="3108960"/>
+            <a:ext cx="566928" cy="566928"/>
           </a:xfrm>
           <a:prstGeom prst="ellipse">
             <a:avLst/>
@@ -13964,172 +15433,24 @@
       </p:sp>
       <p:sp>
         <p:nvSpPr>
-          <p:cNvPr id="9" name="Text 7"/>
-          <p:cNvSpPr/>
-          <p:nvPr/>
-        </p:nvSpPr>
-        <p:spPr>
-          <a:xfrm>
-            <a:off x="640080" y="731520"/>
-            <a:ext cx="420624" cy="164592"/>
-          </a:xfrm>
-          <a:prstGeom prst="rect">
-            <a:avLst/>
-          </a:prstGeom>
-          <a:noFill/>
-          <a:ln/>
-        </p:spPr>
-        <p:txBody>
-          <a:bodyPr wrap="square" lIns="0" tIns="0" rIns="0" bIns="0" rtlCol="0" anchor="ctr"/>
-          <a:lstStyle/>
-          <a:p>
-            <a:pPr algn="ctr" indent="0" marL="0">
-              <a:buNone/>
-            </a:pPr>
-            <a:r>
-              <a:rPr lang="en-US" sz="1100" b="1" dirty="0">
-                <a:solidFill>
-                  <a:srgbClr val="FFFFFF"/>
-                </a:solidFill>
-                <a:latin typeface="Aptos" pitchFamily="34" charset="0"/>
-                <a:ea typeface="Aptos" pitchFamily="34" charset="-122"/>
-                <a:cs typeface="Aptos" pitchFamily="34" charset="-120"/>
-              </a:rPr>
-              <a:t>3</a:t>
-            </a:r>
-            <a:endParaRPr lang="en-US" sz="1100" dirty="0"/>
-          </a:p>
-        </p:txBody>
-      </p:sp>
-      <p:sp>
-        <p:nvSpPr>
-          <p:cNvPr id="10" name="Text 8"/>
-          <p:cNvSpPr/>
-          <p:nvPr/>
-        </p:nvSpPr>
-        <p:spPr>
-          <a:xfrm>
-            <a:off x="640080" y="621792"/>
-            <a:ext cx="10881360" cy="713232"/>
-          </a:xfrm>
-          <a:prstGeom prst="rect">
-            <a:avLst/>
-          </a:prstGeom>
-          <a:noFill/>
-          <a:ln/>
-        </p:spPr>
-        <p:txBody>
-          <a:bodyPr wrap="square" lIns="0" tIns="0" rIns="0" bIns="0" rtlCol="0" anchor="ctr">
-            <a:normAutofit/>
-          </a:bodyPr>
-          <a:lstStyle/>
-          <a:p>
-            <a:pPr indent="0" marL="0">
-              <a:buNone/>
-            </a:pPr>
-            <a:r>
-              <a:rPr lang="en-US" sz="3400" b="1" dirty="0">
-                <a:solidFill>
-                  <a:srgbClr val="003A63"/>
-                </a:solidFill>
-                <a:latin typeface="Aptos Display" pitchFamily="34" charset="0"/>
-                <a:ea typeface="Aptos Display" pitchFamily="34" charset="-122"/>
-                <a:cs typeface="Aptos Display" pitchFamily="34" charset="-120"/>
-              </a:rPr>
-              <a:t>Jurisdiction and Agency Policy Note</a:t>
-            </a:r>
-            <a:endParaRPr lang="en-US" sz="3400" dirty="0"/>
-          </a:p>
-        </p:txBody>
-      </p:sp>
-      <p:sp>
-        <p:nvSpPr>
-          <p:cNvPr id="11" name="Text 9"/>
-          <p:cNvSpPr/>
-          <p:nvPr/>
-        </p:nvSpPr>
-        <p:spPr>
-          <a:xfrm>
-            <a:off x="868680" y="1508760"/>
-            <a:ext cx="6537960" cy="4160520"/>
-          </a:xfrm>
-          <a:prstGeom prst="rect">
-            <a:avLst/>
-          </a:prstGeom>
-          <a:noFill/>
-          <a:ln/>
-        </p:spPr>
-        <p:txBody>
-          <a:bodyPr wrap="square" lIns="635" tIns="635" rIns="635" bIns="635" rtlCol="0" anchor="t">
-            <a:normAutofit/>
-          </a:bodyPr>
-          <a:lstStyle/>
-          <a:p>
-            <a:r>
-              <a:rPr lang="en-US" sz="2100" dirty="0">
-                <a:solidFill>
-                  <a:srgbClr val="17364A"/>
-                </a:solidFill>
-                <a:latin typeface="Aptos" pitchFamily="34" charset="0"/>
-                <a:ea typeface="Aptos" pitchFamily="34" charset="-122"/>
-                <a:cs typeface="Aptos" pitchFamily="34" charset="-120"/>
-              </a:rPr>
-              <a:t>This module provides national-level training guidance for public health agencies and partners.</a:t>
-            </a:r>
-            <a:endParaRPr lang="en-US" sz="2100" dirty="0"/>
-          </a:p>
-          <a:p>
-            <a:r>
-              <a:rPr lang="en-US" sz="2100" dirty="0">
-                <a:solidFill>
-                  <a:srgbClr val="17364A"/>
-                </a:solidFill>
-                <a:latin typeface="Aptos" pitchFamily="34" charset="0"/>
-                <a:ea typeface="Aptos" pitchFamily="34" charset="-122"/>
-                <a:cs typeface="Aptos" pitchFamily="34" charset="-120"/>
-              </a:rPr>
-              <a:t>It is not legal advice and does not replace review by agency legal counsel, privacy officers,.</a:t>
-            </a:r>
-            <a:endParaRPr lang="en-US" sz="2100" dirty="0"/>
-          </a:p>
-          <a:p>
-            <a:r>
-              <a:rPr lang="en-US" sz="2100" dirty="0">
-                <a:solidFill>
-                  <a:srgbClr val="17364A"/>
-                </a:solidFill>
-                <a:latin typeface="Aptos" pitchFamily="34" charset="0"/>
-                <a:ea typeface="Aptos" pitchFamily="34" charset="-122"/>
-                <a:cs typeface="Aptos" pitchFamily="34" charset="-120"/>
-              </a:rPr>
-              <a:t>Requirements may vary by state, locality, territory, Tribe, agency, funding source, data-sharing.</a:t>
-            </a:r>
-            <a:endParaRPr lang="en-US" sz="2100" dirty="0"/>
-          </a:p>
-        </p:txBody>
-      </p:sp>
-      <p:sp>
-        <p:nvSpPr>
-          <p:cNvPr id="12" name="Shape 10"/>
-          <p:cNvSpPr/>
-          <p:nvPr/>
-        </p:nvSpPr>
-        <p:spPr>
-          <a:xfrm>
-            <a:off x="7909560" y="1417320"/>
-            <a:ext cx="3154680" cy="1828800"/>
-          </a:xfrm>
-          <a:prstGeom prst="roundRect">
-            <a:avLst>
-              <a:gd name="adj" fmla="val 6000"/>
-            </a:avLst>
+          <p:cNvPr id="15" name="Shape 13"/>
+          <p:cNvSpPr/>
+          <p:nvPr/>
+        </p:nvSpPr>
+        <p:spPr>
+          <a:xfrm>
+            <a:off x="10287000" y="3108960"/>
+            <a:ext cx="566928" cy="566928"/>
+          </a:xfrm>
+          <a:prstGeom prst="ellipse">
+            <a:avLst/>
           </a:prstGeom>
           <a:solidFill>
-            <a:srgbClr val="EEF8ED"/>
+            <a:srgbClr val="2F8A28"/>
           </a:solidFill>
           <a:ln w="12700">
             <a:solidFill>
-              <a:srgbClr val="B9D7E6"/>
+              <a:srgbClr val="2F8A28"/>
             </a:solidFill>
             <a:prstDash val="solid"/>
           </a:ln>
@@ -14137,14 +15458,108 @@
       </p:sp>
       <p:sp>
         <p:nvSpPr>
-          <p:cNvPr id="13" name="Text 11"/>
-          <p:cNvSpPr/>
-          <p:nvPr/>
-        </p:nvSpPr>
-        <p:spPr>
-          <a:xfrm>
-            <a:off x="8074152" y="1563624"/>
-            <a:ext cx="2825496" cy="256032"/>
+          <p:cNvPr id="16" name="Shape 14"/>
+          <p:cNvSpPr/>
+          <p:nvPr/>
+        </p:nvSpPr>
+        <p:spPr>
+          <a:xfrm>
+            <a:off x="9089136" y="3456432"/>
+            <a:ext cx="566928" cy="566928"/>
+          </a:xfrm>
+          <a:prstGeom prst="ellipse">
+            <a:avLst/>
+          </a:prstGeom>
+          <a:solidFill>
+            <a:srgbClr val="6A4CA3"/>
+          </a:solidFill>
+          <a:ln w="12700">
+            <a:solidFill>
+              <a:srgbClr val="6A4CA3"/>
+            </a:solidFill>
+            <a:prstDash val="solid"/>
+          </a:ln>
+        </p:spPr>
+      </p:sp>
+      <p:sp>
+        <p:nvSpPr>
+          <p:cNvPr id="17" name="Shape 15"/>
+          <p:cNvSpPr/>
+          <p:nvPr/>
+        </p:nvSpPr>
+        <p:spPr>
+          <a:xfrm>
+            <a:off x="8385048" y="3419856"/>
+            <a:ext cx="1975104" cy="0"/>
+          </a:xfrm>
+          <a:prstGeom prst="line">
+            <a:avLst/>
+          </a:prstGeom>
+          <a:noFill/>
+          <a:ln w="25400">
+            <a:solidFill>
+              <a:srgbClr val="8ABBD8"/>
+            </a:solidFill>
+            <a:prstDash val="solid"/>
+          </a:ln>
+        </p:spPr>
+      </p:sp>
+      <p:sp>
+        <p:nvSpPr>
+          <p:cNvPr id="18" name="Shape 16"/>
+          <p:cNvSpPr/>
+          <p:nvPr/>
+        </p:nvSpPr>
+        <p:spPr>
+          <a:xfrm>
+            <a:off x="8202168" y="3630168"/>
+            <a:ext cx="1170432" cy="118872"/>
+          </a:xfrm>
+          <a:prstGeom prst="line">
+            <a:avLst/>
+          </a:prstGeom>
+          <a:noFill/>
+          <a:ln w="25400">
+            <a:solidFill>
+              <a:srgbClr val="8ABBD8"/>
+            </a:solidFill>
+            <a:prstDash val="solid"/>
+          </a:ln>
+        </p:spPr>
+      </p:sp>
+      <p:sp>
+        <p:nvSpPr>
+          <p:cNvPr id="19" name="Shape 17"/>
+          <p:cNvSpPr/>
+          <p:nvPr/>
+        </p:nvSpPr>
+        <p:spPr>
+          <a:xfrm>
+            <a:off x="10543032" y="3630168"/>
+            <a:ext cx="-1170432" cy="118872"/>
+          </a:xfrm>
+          <a:prstGeom prst="line">
+            <a:avLst/>
+          </a:prstGeom>
+          <a:noFill/>
+          <a:ln w="25400">
+            <a:solidFill>
+              <a:srgbClr val="8ABBD8"/>
+            </a:solidFill>
+            <a:prstDash val="solid"/>
+          </a:ln>
+        </p:spPr>
+      </p:sp>
+      <p:sp>
+        <p:nvSpPr>
+          <p:cNvPr id="20" name="Text 18"/>
+          <p:cNvSpPr/>
+          <p:nvPr/>
+        </p:nvSpPr>
+        <p:spPr>
+          <a:xfrm>
+            <a:off x="7863840" y="4069080"/>
+            <a:ext cx="3017520" cy="164592"/>
           </a:xfrm>
           <a:prstGeom prst="rect">
             <a:avLst/>
@@ -14156,79 +15571,38 @@
           <a:bodyPr wrap="square" lIns="0" tIns="0" rIns="0" bIns="0" rtlCol="0" anchor="ctr"/>
           <a:lstStyle/>
           <a:p>
-            <a:pPr indent="0" marL="0">
-              <a:buNone/>
-            </a:pPr>
-            <a:r>
-              <a:rPr lang="en-US" sz="1300" b="1" dirty="0">
-                <a:solidFill>
-                  <a:srgbClr val="0068B7"/>
-                </a:solidFill>
-                <a:latin typeface="Aptos" pitchFamily="34" charset="0"/>
-                <a:ea typeface="Aptos" pitchFamily="34" charset="-122"/>
-                <a:cs typeface="Aptos" pitchFamily="34" charset="-120"/>
-              </a:rPr>
-              <a:t>Key idea</a:t>
-            </a:r>
-            <a:endParaRPr lang="en-US" sz="1300" dirty="0"/>
-          </a:p>
-        </p:txBody>
-      </p:sp>
-      <p:sp>
-        <p:nvSpPr>
-          <p:cNvPr id="14" name="Text 12"/>
-          <p:cNvSpPr/>
-          <p:nvPr/>
-        </p:nvSpPr>
-        <p:spPr>
-          <a:xfrm>
-            <a:off x="8074152" y="1920240"/>
-            <a:ext cx="2825496" cy="1188720"/>
-          </a:xfrm>
-          <a:prstGeom prst="rect">
-            <a:avLst/>
-          </a:prstGeom>
-          <a:noFill/>
-          <a:ln/>
-        </p:spPr>
-        <p:txBody>
-          <a:bodyPr wrap="square" lIns="0" tIns="0" rIns="0" bIns="0" rtlCol="0" anchor="t">
-            <a:normAutofit/>
-          </a:bodyPr>
-          <a:lstStyle/>
-          <a:p>
-            <a:pPr indent="0" marL="0">
-              <a:buNone/>
-            </a:pPr>
-            <a:r>
-              <a:rPr lang="en-US" sz="1550" dirty="0">
-                <a:solidFill>
-                  <a:srgbClr val="17364A"/>
-                </a:solidFill>
-                <a:latin typeface="Aptos" pitchFamily="34" charset="0"/>
-                <a:ea typeface="Aptos" pitchFamily="34" charset="-122"/>
-                <a:cs typeface="Aptos" pitchFamily="34" charset="-120"/>
-              </a:rPr>
-              <a:t>This module provides national-level training guidance for public health agencies and partners.</a:t>
-            </a:r>
-            <a:endParaRPr lang="en-US" sz="1550" dirty="0"/>
-          </a:p>
-        </p:txBody>
-      </p:sp>
-      <p:sp>
-        <p:nvSpPr>
-          <p:cNvPr id="15" name="Shape 13"/>
-          <p:cNvSpPr/>
-          <p:nvPr/>
-        </p:nvSpPr>
-        <p:spPr>
-          <a:xfrm>
-            <a:off x="7909560" y="3520440"/>
-            <a:ext cx="3154680" cy="1737360"/>
+            <a:pPr algn="ctr" indent="0" marL="0">
+              <a:buNone/>
+            </a:pPr>
+            <a:r>
+              <a:rPr lang="en-US" sz="900" b="1" dirty="0">
+                <a:solidFill>
+                  <a:srgbClr val="003A63"/>
+                </a:solidFill>
+                <a:latin typeface="Aptos" pitchFamily="34" charset="0"/>
+                <a:ea typeface="Aptos" pitchFamily="34" charset="-122"/>
+                <a:cs typeface="Aptos" pitchFamily="34" charset="-120"/>
+              </a:rPr>
+              <a:t>Decision rights</a:t>
+            </a:r>
+            <a:endParaRPr lang="en-US" sz="900" dirty="0"/>
+          </a:p>
+        </p:txBody>
+      </p:sp>
+      <p:sp>
+        <p:nvSpPr>
+          <p:cNvPr id="21" name="Shape 19"/>
+          <p:cNvSpPr/>
+          <p:nvPr/>
+        </p:nvSpPr>
+        <p:spPr>
+          <a:xfrm>
+            <a:off x="7635240" y="4498848"/>
+            <a:ext cx="3474720" cy="1143000"/>
           </a:xfrm>
           <a:prstGeom prst="roundRect">
             <a:avLst>
-              <a:gd name="adj" fmla="val 6316"/>
+              <a:gd name="adj" fmla="val 9600"/>
             </a:avLst>
           </a:prstGeom>
           <a:solidFill>
@@ -14244,14 +15618,14 @@
       </p:sp>
       <p:sp>
         <p:nvSpPr>
-          <p:cNvPr id="16" name="Text 14"/>
-          <p:cNvSpPr/>
-          <p:nvPr/>
-        </p:nvSpPr>
-        <p:spPr>
-          <a:xfrm>
-            <a:off x="8074152" y="3666744"/>
-            <a:ext cx="2825496" cy="256032"/>
+          <p:cNvPr id="22" name="Text 20"/>
+          <p:cNvSpPr/>
+          <p:nvPr/>
+        </p:nvSpPr>
+        <p:spPr>
+          <a:xfrm>
+            <a:off x="7799832" y="4645152"/>
+            <a:ext cx="3145536" cy="256032"/>
           </a:xfrm>
           <a:prstGeom prst="rect">
             <a:avLst/>
@@ -14275,7 +15649,7 @@
                 <a:ea typeface="Aptos" pitchFamily="34" charset="-122"/>
                 <a:cs typeface="Aptos" pitchFamily="34" charset="-120"/>
               </a:rPr>
-              <a:t>Use this for</a:t>
+              <a:t>What to document</a:t>
             </a:r>
             <a:endParaRPr lang="en-US" sz="1300" dirty="0"/>
           </a:p>
@@ -14283,14 +15657,14 @@
       </p:sp>
       <p:sp>
         <p:nvSpPr>
-          <p:cNvPr id="17" name="Text 15"/>
-          <p:cNvSpPr/>
-          <p:nvPr/>
-        </p:nvSpPr>
-        <p:spPr>
-          <a:xfrm>
-            <a:off x="8074152" y="4023360"/>
-            <a:ext cx="2825496" cy="1097280"/>
+          <p:cNvPr id="23" name="Text 21"/>
+          <p:cNvSpPr/>
+          <p:nvPr/>
+        </p:nvSpPr>
+        <p:spPr>
+          <a:xfrm>
+            <a:off x="7799832" y="5001768"/>
+            <a:ext cx="3145536" cy="502920"/>
           </a:xfrm>
           <a:prstGeom prst="rect">
             <a:avLst/>
@@ -14316,7 +15690,7 @@
                 <a:ea typeface="Aptos" pitchFamily="34" charset="-122"/>
                 <a:cs typeface="Aptos" pitchFamily="34" charset="-120"/>
               </a:rPr>
-              <a:t>Connect the concept to public health decisions, safeguards, documentation, or implementation work.</a:t>
+              <a:t>Translate this concept into clear decision rights, review steps, documentation expectations, and escalation paths before an AI-supported workflow is approved.</a:t>
             </a:r>
             <a:endParaRPr lang="en-US" sz="1550" dirty="0"/>
           </a:p>
@@ -14490,8 +15864,8 @@
         </p:nvSpPr>
         <p:spPr>
           <a:xfrm>
-            <a:off x="9966960" y="6537960"/>
-            <a:ext cx="1645920" cy="201168"/>
+            <a:off x="9646920" y="6537960"/>
+            <a:ext cx="1965960" cy="201168"/>
           </a:xfrm>
           <a:prstGeom prst="rect">
             <a:avLst/>
@@ -14515,7 +15889,7 @@
                 <a:ea typeface="Aptos" pitchFamily="34" charset="-122"/>
                 <a:cs typeface="Aptos" pitchFamily="34" charset="-120"/>
               </a:rPr>
-              <a:t>Â© Paula Soper</a:t>
+              <a:t>Copyright Paula Soper</a:t>
             </a:r>
             <a:endParaRPr lang="en-US" sz="800" dirty="0"/>
           </a:p>
@@ -14562,77 +15936,13 @@
       </p:sp>
       <p:sp>
         <p:nvSpPr>
-          <p:cNvPr id="8" name="Shape 6"/>
+          <p:cNvPr id="8" name="Text 6"/>
           <p:cNvSpPr/>
           <p:nvPr/>
         </p:nvSpPr>
         <p:spPr>
           <a:xfrm>
             <a:off x="640080" y="658368"/>
-            <a:ext cx="420624" cy="420624"/>
-          </a:xfrm>
-          <a:prstGeom prst="ellipse">
-            <a:avLst/>
-          </a:prstGeom>
-          <a:solidFill>
-            <a:srgbClr val="0068B7"/>
-          </a:solidFill>
-          <a:ln w="12700">
-            <a:solidFill>
-              <a:srgbClr val="0068B7"/>
-            </a:solidFill>
-            <a:prstDash val="solid"/>
-          </a:ln>
-        </p:spPr>
-      </p:sp>
-      <p:sp>
-        <p:nvSpPr>
-          <p:cNvPr id="9" name="Text 7"/>
-          <p:cNvSpPr/>
-          <p:nvPr/>
-        </p:nvSpPr>
-        <p:spPr>
-          <a:xfrm>
-            <a:off x="640080" y="731520"/>
-            <a:ext cx="420624" cy="164592"/>
-          </a:xfrm>
-          <a:prstGeom prst="rect">
-            <a:avLst/>
-          </a:prstGeom>
-          <a:noFill/>
-          <a:ln/>
-        </p:spPr>
-        <p:txBody>
-          <a:bodyPr wrap="square" lIns="0" tIns="0" rIns="0" bIns="0" rtlCol="0" anchor="ctr"/>
-          <a:lstStyle/>
-          <a:p>
-            <a:pPr algn="ctr" indent="0" marL="0">
-              <a:buNone/>
-            </a:pPr>
-            <a:r>
-              <a:rPr lang="en-US" sz="1100" b="1" dirty="0">
-                <a:solidFill>
-                  <a:srgbClr val="FFFFFF"/>
-                </a:solidFill>
-                <a:latin typeface="Aptos" pitchFamily="34" charset="0"/>
-                <a:ea typeface="Aptos" pitchFamily="34" charset="-122"/>
-                <a:cs typeface="Aptos" pitchFamily="34" charset="-120"/>
-              </a:rPr>
-              <a:t>4</a:t>
-            </a:r>
-            <a:endParaRPr lang="en-US" sz="1100" dirty="0"/>
-          </a:p>
-        </p:txBody>
-      </p:sp>
-      <p:sp>
-        <p:nvSpPr>
-          <p:cNvPr id="10" name="Text 8"/>
-          <p:cNvSpPr/>
-          <p:nvPr/>
-        </p:nvSpPr>
-        <p:spPr>
-          <a:xfrm>
-            <a:off x="640080" y="621792"/>
             <a:ext cx="10881360" cy="713232"/>
           </a:xfrm>
           <a:prstGeom prst="rect">
@@ -14667,14 +15977,14 @@
       </p:sp>
       <p:sp>
         <p:nvSpPr>
-          <p:cNvPr id="11" name="Text 9"/>
+          <p:cNvPr id="9" name="Text 7"/>
           <p:cNvSpPr/>
           <p:nvPr/>
         </p:nvSpPr>
         <p:spPr>
           <a:xfrm>
             <a:off x="868680" y="1508760"/>
-            <a:ext cx="6537960" cy="4160520"/>
+            <a:ext cx="6309360" cy="4160520"/>
           </a:xfrm>
           <a:prstGeom prst="rect">
             <a:avLst/>
@@ -14733,18 +16043,18 @@
       </p:sp>
       <p:sp>
         <p:nvSpPr>
-          <p:cNvPr id="12" name="Shape 10"/>
-          <p:cNvSpPr/>
-          <p:nvPr/>
-        </p:nvSpPr>
-        <p:spPr>
-          <a:xfrm>
-            <a:off x="7909560" y="1417320"/>
-            <a:ext cx="3154680" cy="1828800"/>
+          <p:cNvPr id="10" name="Shape 8"/>
+          <p:cNvSpPr/>
+          <p:nvPr/>
+        </p:nvSpPr>
+        <p:spPr>
+          <a:xfrm>
+            <a:off x="7635240" y="1325880"/>
+            <a:ext cx="3474720" cy="1325880"/>
           </a:xfrm>
           <a:prstGeom prst="roundRect">
             <a:avLst>
-              <a:gd name="adj" fmla="val 6000"/>
+              <a:gd name="adj" fmla="val 8276"/>
             </a:avLst>
           </a:prstGeom>
           <a:solidFill>
@@ -14760,14 +16070,14 @@
       </p:sp>
       <p:sp>
         <p:nvSpPr>
-          <p:cNvPr id="13" name="Text 11"/>
-          <p:cNvSpPr/>
-          <p:nvPr/>
-        </p:nvSpPr>
-        <p:spPr>
-          <a:xfrm>
-            <a:off x="8074152" y="1563624"/>
-            <a:ext cx="2825496" cy="256032"/>
+          <p:cNvPr id="11" name="Text 9"/>
+          <p:cNvSpPr/>
+          <p:nvPr/>
+        </p:nvSpPr>
+        <p:spPr>
+          <a:xfrm>
+            <a:off x="7799832" y="1472184"/>
+            <a:ext cx="3145536" cy="256032"/>
           </a:xfrm>
           <a:prstGeom prst="rect">
             <a:avLst/>
@@ -14791,7 +16101,7 @@
                 <a:ea typeface="Aptos" pitchFamily="34" charset="-122"/>
                 <a:cs typeface="Aptos" pitchFamily="34" charset="-120"/>
               </a:rPr>
-              <a:t>Key idea</a:t>
+              <a:t>Governance lens</a:t>
             </a:r>
             <a:endParaRPr lang="en-US" sz="1300" dirty="0"/>
           </a:p>
@@ -14799,14 +16109,14 @@
       </p:sp>
       <p:sp>
         <p:nvSpPr>
-          <p:cNvPr id="14" name="Text 12"/>
-          <p:cNvSpPr/>
-          <p:nvPr/>
-        </p:nvSpPr>
-        <p:spPr>
-          <a:xfrm>
-            <a:off x="8074152" y="1920240"/>
-            <a:ext cx="2825496" cy="1188720"/>
+          <p:cNvPr id="12" name="Text 10"/>
+          <p:cNvSpPr/>
+          <p:nvPr/>
+        </p:nvSpPr>
+        <p:spPr>
+          <a:xfrm>
+            <a:off x="7799832" y="1828800"/>
+            <a:ext cx="3145536" cy="685800"/>
           </a:xfrm>
           <a:prstGeom prst="rect">
             <a:avLst/>
@@ -14840,18 +16150,159 @@
       </p:sp>
       <p:sp>
         <p:nvSpPr>
-          <p:cNvPr id="15" name="Shape 13"/>
-          <p:cNvSpPr/>
-          <p:nvPr/>
-        </p:nvSpPr>
-        <p:spPr>
-          <a:xfrm>
-            <a:off x="7909560" y="3520440"/>
-            <a:ext cx="3154680" cy="1737360"/>
+          <p:cNvPr id="13" name="Shape 11"/>
+          <p:cNvSpPr/>
+          <p:nvPr/>
+        </p:nvSpPr>
+        <p:spPr>
+          <a:xfrm>
+            <a:off x="7635240" y="2788920"/>
+            <a:ext cx="3474720" cy="1536192"/>
           </a:xfrm>
           <a:prstGeom prst="roundRect">
             <a:avLst>
-              <a:gd name="adj" fmla="val 6316"/>
+              <a:gd name="adj" fmla="val 7143"/>
+            </a:avLst>
+          </a:prstGeom>
+          <a:solidFill>
+            <a:srgbClr val="FFFFFF">
+              <a:alpha val="88000"/>
+            </a:srgbClr>
+          </a:solidFill>
+          <a:ln w="12700">
+            <a:solidFill>
+              <a:srgbClr val="D6E8F2"/>
+            </a:solidFill>
+            <a:prstDash val="solid"/>
+          </a:ln>
+        </p:spPr>
+      </p:sp>
+      <p:sp>
+        <p:nvSpPr>
+          <p:cNvPr id="14" name="Shape 12"/>
+          <p:cNvSpPr/>
+          <p:nvPr/>
+        </p:nvSpPr>
+        <p:spPr>
+          <a:xfrm>
+            <a:off x="8074152" y="3291840"/>
+            <a:ext cx="2596896" cy="749808"/>
+          </a:xfrm>
+          <a:prstGeom prst="rect">
+            <a:avLst/>
+          </a:prstGeom>
+          <a:solidFill>
+            <a:srgbClr val="EAF6F8"/>
+          </a:solidFill>
+          <a:ln w="12700">
+            <a:solidFill>
+              <a:srgbClr val="8ABBD8"/>
+            </a:solidFill>
+            <a:prstDash val="solid"/>
+          </a:ln>
+        </p:spPr>
+      </p:sp>
+      <p:sp>
+        <p:nvSpPr>
+          <p:cNvPr id="15" name="Shape 13"/>
+          <p:cNvSpPr/>
+          <p:nvPr/>
+        </p:nvSpPr>
+        <p:spPr>
+          <a:xfrm>
+            <a:off x="8202168" y="3721608"/>
+            <a:ext cx="2340864" cy="0"/>
+          </a:xfrm>
+          <a:prstGeom prst="line">
+            <a:avLst/>
+          </a:prstGeom>
+          <a:noFill/>
+          <a:ln w="19050">
+            <a:solidFill>
+              <a:srgbClr val="0068B7"/>
+            </a:solidFill>
+            <a:prstDash val="solid"/>
+          </a:ln>
+        </p:spPr>
+      </p:sp>
+      <p:sp>
+        <p:nvSpPr>
+          <p:cNvPr id="16" name="Shape 14"/>
+          <p:cNvSpPr/>
+          <p:nvPr/>
+        </p:nvSpPr>
+        <p:spPr>
+          <a:xfrm>
+            <a:off x="9198864" y="4206240"/>
+            <a:ext cx="347472" cy="347472"/>
+          </a:xfrm>
+          <a:prstGeom prst="ellipse">
+            <a:avLst/>
+          </a:prstGeom>
+          <a:solidFill>
+            <a:srgbClr val="2F8A28"/>
+          </a:solidFill>
+          <a:ln w="12700">
+            <a:solidFill>
+              <a:srgbClr val="2F8A28"/>
+            </a:solidFill>
+            <a:prstDash val="solid"/>
+          </a:ln>
+        </p:spPr>
+      </p:sp>
+      <p:sp>
+        <p:nvSpPr>
+          <p:cNvPr id="17" name="Text 15"/>
+          <p:cNvSpPr/>
+          <p:nvPr/>
+        </p:nvSpPr>
+        <p:spPr>
+          <a:xfrm>
+            <a:off x="7909560" y="3977640"/>
+            <a:ext cx="2926080" cy="182880"/>
+          </a:xfrm>
+          <a:prstGeom prst="rect">
+            <a:avLst/>
+          </a:prstGeom>
+          <a:noFill/>
+          <a:ln/>
+        </p:spPr>
+        <p:txBody>
+          <a:bodyPr wrap="square" lIns="0" tIns="0" rIns="0" bIns="0" rtlCol="0" anchor="ctr"/>
+          <a:lstStyle/>
+          <a:p>
+            <a:pPr algn="ctr" indent="0" marL="0">
+              <a:buNone/>
+            </a:pPr>
+            <a:r>
+              <a:rPr lang="en-US" sz="1000" dirty="0">
+                <a:solidFill>
+                  <a:srgbClr val="003A63"/>
+                </a:solidFill>
+                <a:latin typeface="Aptos" pitchFamily="34" charset="0"/>
+                <a:ea typeface="Aptos" pitchFamily="34" charset="-122"/>
+                <a:cs typeface="Aptos" pitchFamily="34" charset="-120"/>
+              </a:rPr>
+              <a:t>Concept to action</a:t>
+            </a:r>
+            <a:endParaRPr lang="en-US" sz="1000" dirty="0"/>
+          </a:p>
+        </p:txBody>
+      </p:sp>
+      <p:sp>
+        <p:nvSpPr>
+          <p:cNvPr id="18" name="Shape 16"/>
+          <p:cNvSpPr/>
+          <p:nvPr/>
+        </p:nvSpPr>
+        <p:spPr>
+          <a:xfrm>
+            <a:off x="7635240" y="4498848"/>
+            <a:ext cx="3474720" cy="1143000"/>
+          </a:xfrm>
+          <a:prstGeom prst="roundRect">
+            <a:avLst>
+              <a:gd name="adj" fmla="val 9600"/>
             </a:avLst>
           </a:prstGeom>
           <a:solidFill>
@@ -14867,14 +16318,14 @@
       </p:sp>
       <p:sp>
         <p:nvSpPr>
-          <p:cNvPr id="16" name="Text 14"/>
-          <p:cNvSpPr/>
-          <p:nvPr/>
-        </p:nvSpPr>
-        <p:spPr>
-          <a:xfrm>
-            <a:off x="8074152" y="3666744"/>
-            <a:ext cx="2825496" cy="256032"/>
+          <p:cNvPr id="19" name="Text 17"/>
+          <p:cNvSpPr/>
+          <p:nvPr/>
+        </p:nvSpPr>
+        <p:spPr>
+          <a:xfrm>
+            <a:off x="7799832" y="4645152"/>
+            <a:ext cx="3145536" cy="256032"/>
           </a:xfrm>
           <a:prstGeom prst="rect">
             <a:avLst/>
@@ -14898,7 +16349,7 @@
                 <a:ea typeface="Aptos" pitchFamily="34" charset="-122"/>
                 <a:cs typeface="Aptos" pitchFamily="34" charset="-120"/>
               </a:rPr>
-              <a:t>Use this for</a:t>
+              <a:t>What to document</a:t>
             </a:r>
             <a:endParaRPr lang="en-US" sz="1300" dirty="0"/>
           </a:p>
@@ -14906,14 +16357,14 @@
       </p:sp>
       <p:sp>
         <p:nvSpPr>
-          <p:cNvPr id="17" name="Text 15"/>
-          <p:cNvSpPr/>
-          <p:nvPr/>
-        </p:nvSpPr>
-        <p:spPr>
-          <a:xfrm>
-            <a:off x="8074152" y="4023360"/>
-            <a:ext cx="2825496" cy="1097280"/>
+          <p:cNvPr id="20" name="Text 18"/>
+          <p:cNvSpPr/>
+          <p:nvPr/>
+        </p:nvSpPr>
+        <p:spPr>
+          <a:xfrm>
+            <a:off x="7799832" y="5001768"/>
+            <a:ext cx="3145536" cy="502920"/>
           </a:xfrm>
           <a:prstGeom prst="rect">
             <a:avLst/>
@@ -14939,7 +16390,7 @@
                 <a:ea typeface="Aptos" pitchFamily="34" charset="-122"/>
                 <a:cs typeface="Aptos" pitchFamily="34" charset="-120"/>
               </a:rPr>
-              <a:t>Connect the concept to public health decisions, safeguards, documentation, or implementation work.</a:t>
+              <a:t>Connect the concept to public health purpose, responsible use, required safeguards, documentation, and the next action a department should take.</a:t>
             </a:r>
             <a:endParaRPr lang="en-US" sz="1550" dirty="0"/>
           </a:p>
@@ -15113,8 +16564,8 @@
         </p:nvSpPr>
         <p:spPr>
           <a:xfrm>
-            <a:off x="9966960" y="6537960"/>
-            <a:ext cx="1645920" cy="201168"/>
+            <a:off x="9646920" y="6537960"/>
+            <a:ext cx="1965960" cy="201168"/>
           </a:xfrm>
           <a:prstGeom prst="rect">
             <a:avLst/>
@@ -15138,7 +16589,7 @@
                 <a:ea typeface="Aptos" pitchFamily="34" charset="-122"/>
                 <a:cs typeface="Aptos" pitchFamily="34" charset="-120"/>
               </a:rPr>
-              <a:t>Â© Paula Soper</a:t>
+              <a:t>Copyright Paula Soper</a:t>
             </a:r>
             <a:endParaRPr lang="en-US" sz="800" dirty="0"/>
           </a:p>
@@ -15185,77 +16636,13 @@
       </p:sp>
       <p:sp>
         <p:nvSpPr>
-          <p:cNvPr id="8" name="Shape 6"/>
+          <p:cNvPr id="8" name="Text 6"/>
           <p:cNvSpPr/>
           <p:nvPr/>
         </p:nvSpPr>
         <p:spPr>
           <a:xfrm>
             <a:off x="640080" y="658368"/>
-            <a:ext cx="420624" cy="420624"/>
-          </a:xfrm>
-          <a:prstGeom prst="ellipse">
-            <a:avLst/>
-          </a:prstGeom>
-          <a:solidFill>
-            <a:srgbClr val="0068B7"/>
-          </a:solidFill>
-          <a:ln w="12700">
-            <a:solidFill>
-              <a:srgbClr val="0068B7"/>
-            </a:solidFill>
-            <a:prstDash val="solid"/>
-          </a:ln>
-        </p:spPr>
-      </p:sp>
-      <p:sp>
-        <p:nvSpPr>
-          <p:cNvPr id="9" name="Text 7"/>
-          <p:cNvSpPr/>
-          <p:nvPr/>
-        </p:nvSpPr>
-        <p:spPr>
-          <a:xfrm>
-            <a:off x="640080" y="731520"/>
-            <a:ext cx="420624" cy="164592"/>
-          </a:xfrm>
-          <a:prstGeom prst="rect">
-            <a:avLst/>
-          </a:prstGeom>
-          <a:noFill/>
-          <a:ln/>
-        </p:spPr>
-        <p:txBody>
-          <a:bodyPr wrap="square" lIns="0" tIns="0" rIns="0" bIns="0" rtlCol="0" anchor="ctr"/>
-          <a:lstStyle/>
-          <a:p>
-            <a:pPr algn="ctr" indent="0" marL="0">
-              <a:buNone/>
-            </a:pPr>
-            <a:r>
-              <a:rPr lang="en-US" sz="1100" b="1" dirty="0">
-                <a:solidFill>
-                  <a:srgbClr val="FFFFFF"/>
-                </a:solidFill>
-                <a:latin typeface="Aptos" pitchFamily="34" charset="0"/>
-                <a:ea typeface="Aptos" pitchFamily="34" charset="-122"/>
-                <a:cs typeface="Aptos" pitchFamily="34" charset="-120"/>
-              </a:rPr>
-              <a:t>5</a:t>
-            </a:r>
-            <a:endParaRPr lang="en-US" sz="1100" dirty="0"/>
-          </a:p>
-        </p:txBody>
-      </p:sp>
-      <p:sp>
-        <p:nvSpPr>
-          <p:cNvPr id="10" name="Text 8"/>
-          <p:cNvSpPr/>
-          <p:nvPr/>
-        </p:nvSpPr>
-        <p:spPr>
-          <a:xfrm>
-            <a:off x="640080" y="621792"/>
             <a:ext cx="10881360" cy="713232"/>
           </a:xfrm>
           <a:prstGeom prst="rect">
@@ -15290,14 +16677,14 @@
       </p:sp>
       <p:sp>
         <p:nvSpPr>
-          <p:cNvPr id="11" name="Text 9"/>
+          <p:cNvPr id="9" name="Text 7"/>
           <p:cNvSpPr/>
           <p:nvPr/>
         </p:nvSpPr>
         <p:spPr>
           <a:xfrm>
             <a:off x="868680" y="1508760"/>
-            <a:ext cx="6537960" cy="4160520"/>
+            <a:ext cx="6309360" cy="4160520"/>
           </a:xfrm>
           <a:prstGeom prst="rect">
             <a:avLst/>
@@ -15356,18 +16743,18 @@
       </p:sp>
       <p:sp>
         <p:nvSpPr>
-          <p:cNvPr id="12" name="Shape 10"/>
-          <p:cNvSpPr/>
-          <p:nvPr/>
-        </p:nvSpPr>
-        <p:spPr>
-          <a:xfrm>
-            <a:off x="7909560" y="1417320"/>
-            <a:ext cx="3154680" cy="1828800"/>
+          <p:cNvPr id="10" name="Shape 8"/>
+          <p:cNvSpPr/>
+          <p:nvPr/>
+        </p:nvSpPr>
+        <p:spPr>
+          <a:xfrm>
+            <a:off x="7635240" y="1325880"/>
+            <a:ext cx="3474720" cy="1325880"/>
           </a:xfrm>
           <a:prstGeom prst="roundRect">
             <a:avLst>
-              <a:gd name="adj" fmla="val 6000"/>
+              <a:gd name="adj" fmla="val 8276"/>
             </a:avLst>
           </a:prstGeom>
           <a:solidFill>
@@ -15383,14 +16770,14 @@
       </p:sp>
       <p:sp>
         <p:nvSpPr>
-          <p:cNvPr id="13" name="Text 11"/>
-          <p:cNvSpPr/>
-          <p:nvPr/>
-        </p:nvSpPr>
-        <p:spPr>
-          <a:xfrm>
-            <a:off x="8074152" y="1563624"/>
-            <a:ext cx="2825496" cy="256032"/>
+          <p:cNvPr id="11" name="Text 9"/>
+          <p:cNvSpPr/>
+          <p:nvPr/>
+        </p:nvSpPr>
+        <p:spPr>
+          <a:xfrm>
+            <a:off x="7799832" y="1472184"/>
+            <a:ext cx="3145536" cy="256032"/>
           </a:xfrm>
           <a:prstGeom prst="rect">
             <a:avLst/>
@@ -15414,7 +16801,7 @@
                 <a:ea typeface="Aptos" pitchFamily="34" charset="-122"/>
                 <a:cs typeface="Aptos" pitchFamily="34" charset="-120"/>
               </a:rPr>
-              <a:t>Key idea</a:t>
+              <a:t>Governance lens</a:t>
             </a:r>
             <a:endParaRPr lang="en-US" sz="1300" dirty="0"/>
           </a:p>
@@ -15422,14 +16809,14 @@
       </p:sp>
       <p:sp>
         <p:nvSpPr>
-          <p:cNvPr id="14" name="Text 12"/>
-          <p:cNvSpPr/>
-          <p:nvPr/>
-        </p:nvSpPr>
-        <p:spPr>
-          <a:xfrm>
-            <a:off x="8074152" y="1920240"/>
-            <a:ext cx="2825496" cy="1188720"/>
+          <p:cNvPr id="12" name="Text 10"/>
+          <p:cNvSpPr/>
+          <p:nvPr/>
+        </p:nvSpPr>
+        <p:spPr>
+          <a:xfrm>
+            <a:off x="7799832" y="1828800"/>
+            <a:ext cx="3145536" cy="685800"/>
           </a:xfrm>
           <a:prstGeom prst="rect">
             <a:avLst/>
@@ -15463,18 +16850,159 @@
       </p:sp>
       <p:sp>
         <p:nvSpPr>
-          <p:cNvPr id="15" name="Shape 13"/>
-          <p:cNvSpPr/>
-          <p:nvPr/>
-        </p:nvSpPr>
-        <p:spPr>
-          <a:xfrm>
-            <a:off x="7909560" y="3520440"/>
-            <a:ext cx="3154680" cy="1737360"/>
+          <p:cNvPr id="13" name="Shape 11"/>
+          <p:cNvSpPr/>
+          <p:nvPr/>
+        </p:nvSpPr>
+        <p:spPr>
+          <a:xfrm>
+            <a:off x="7635240" y="2788920"/>
+            <a:ext cx="3474720" cy="1536192"/>
           </a:xfrm>
           <a:prstGeom prst="roundRect">
             <a:avLst>
-              <a:gd name="adj" fmla="val 6316"/>
+              <a:gd name="adj" fmla="val 7143"/>
+            </a:avLst>
+          </a:prstGeom>
+          <a:solidFill>
+            <a:srgbClr val="FFFFFF">
+              <a:alpha val="88000"/>
+            </a:srgbClr>
+          </a:solidFill>
+          <a:ln w="12700">
+            <a:solidFill>
+              <a:srgbClr val="D6E8F2"/>
+            </a:solidFill>
+            <a:prstDash val="solid"/>
+          </a:ln>
+        </p:spPr>
+      </p:sp>
+      <p:sp>
+        <p:nvSpPr>
+          <p:cNvPr id="14" name="Shape 12"/>
+          <p:cNvSpPr/>
+          <p:nvPr/>
+        </p:nvSpPr>
+        <p:spPr>
+          <a:xfrm>
+            <a:off x="8074152" y="3291840"/>
+            <a:ext cx="2596896" cy="749808"/>
+          </a:xfrm>
+          <a:prstGeom prst="rect">
+            <a:avLst/>
+          </a:prstGeom>
+          <a:solidFill>
+            <a:srgbClr val="EAF6F8"/>
+          </a:solidFill>
+          <a:ln w="12700">
+            <a:solidFill>
+              <a:srgbClr val="8ABBD8"/>
+            </a:solidFill>
+            <a:prstDash val="solid"/>
+          </a:ln>
+        </p:spPr>
+      </p:sp>
+      <p:sp>
+        <p:nvSpPr>
+          <p:cNvPr id="15" name="Shape 13"/>
+          <p:cNvSpPr/>
+          <p:nvPr/>
+        </p:nvSpPr>
+        <p:spPr>
+          <a:xfrm>
+            <a:off x="8202168" y="3721608"/>
+            <a:ext cx="2340864" cy="0"/>
+          </a:xfrm>
+          <a:prstGeom prst="line">
+            <a:avLst/>
+          </a:prstGeom>
+          <a:noFill/>
+          <a:ln w="19050">
+            <a:solidFill>
+              <a:srgbClr val="0068B7"/>
+            </a:solidFill>
+            <a:prstDash val="solid"/>
+          </a:ln>
+        </p:spPr>
+      </p:sp>
+      <p:sp>
+        <p:nvSpPr>
+          <p:cNvPr id="16" name="Shape 14"/>
+          <p:cNvSpPr/>
+          <p:nvPr/>
+        </p:nvSpPr>
+        <p:spPr>
+          <a:xfrm>
+            <a:off x="9198864" y="4206240"/>
+            <a:ext cx="347472" cy="347472"/>
+          </a:xfrm>
+          <a:prstGeom prst="ellipse">
+            <a:avLst/>
+          </a:prstGeom>
+          <a:solidFill>
+            <a:srgbClr val="2F8A28"/>
+          </a:solidFill>
+          <a:ln w="12700">
+            <a:solidFill>
+              <a:srgbClr val="2F8A28"/>
+            </a:solidFill>
+            <a:prstDash val="solid"/>
+          </a:ln>
+        </p:spPr>
+      </p:sp>
+      <p:sp>
+        <p:nvSpPr>
+          <p:cNvPr id="17" name="Text 15"/>
+          <p:cNvSpPr/>
+          <p:nvPr/>
+        </p:nvSpPr>
+        <p:spPr>
+          <a:xfrm>
+            <a:off x="7909560" y="3977640"/>
+            <a:ext cx="2926080" cy="182880"/>
+          </a:xfrm>
+          <a:prstGeom prst="rect">
+            <a:avLst/>
+          </a:prstGeom>
+          <a:noFill/>
+          <a:ln/>
+        </p:spPr>
+        <p:txBody>
+          <a:bodyPr wrap="square" lIns="0" tIns="0" rIns="0" bIns="0" rtlCol="0" anchor="ctr"/>
+          <a:lstStyle/>
+          <a:p>
+            <a:pPr algn="ctr" indent="0" marL="0">
+              <a:buNone/>
+            </a:pPr>
+            <a:r>
+              <a:rPr lang="en-US" sz="1000" dirty="0">
+                <a:solidFill>
+                  <a:srgbClr val="003A63"/>
+                </a:solidFill>
+                <a:latin typeface="Aptos" pitchFamily="34" charset="0"/>
+                <a:ea typeface="Aptos" pitchFamily="34" charset="-122"/>
+                <a:cs typeface="Aptos" pitchFamily="34" charset="-120"/>
+              </a:rPr>
+              <a:t>Concept to action</a:t>
+            </a:r>
+            <a:endParaRPr lang="en-US" sz="1000" dirty="0"/>
+          </a:p>
+        </p:txBody>
+      </p:sp>
+      <p:sp>
+        <p:nvSpPr>
+          <p:cNvPr id="18" name="Shape 16"/>
+          <p:cNvSpPr/>
+          <p:nvPr/>
+        </p:nvSpPr>
+        <p:spPr>
+          <a:xfrm>
+            <a:off x="7635240" y="4498848"/>
+            <a:ext cx="3474720" cy="1143000"/>
+          </a:xfrm>
+          <a:prstGeom prst="roundRect">
+            <a:avLst>
+              <a:gd name="adj" fmla="val 9600"/>
             </a:avLst>
           </a:prstGeom>
           <a:solidFill>
@@ -15490,14 +17018,14 @@
       </p:sp>
       <p:sp>
         <p:nvSpPr>
-          <p:cNvPr id="16" name="Text 14"/>
-          <p:cNvSpPr/>
-          <p:nvPr/>
-        </p:nvSpPr>
-        <p:spPr>
-          <a:xfrm>
-            <a:off x="8074152" y="3666744"/>
-            <a:ext cx="2825496" cy="256032"/>
+          <p:cNvPr id="19" name="Text 17"/>
+          <p:cNvSpPr/>
+          <p:nvPr/>
+        </p:nvSpPr>
+        <p:spPr>
+          <a:xfrm>
+            <a:off x="7799832" y="4645152"/>
+            <a:ext cx="3145536" cy="256032"/>
           </a:xfrm>
           <a:prstGeom prst="rect">
             <a:avLst/>
@@ -15521,7 +17049,7 @@
                 <a:ea typeface="Aptos" pitchFamily="34" charset="-122"/>
                 <a:cs typeface="Aptos" pitchFamily="34" charset="-120"/>
               </a:rPr>
-              <a:t>Use this for</a:t>
+              <a:t>What to document</a:t>
             </a:r>
             <a:endParaRPr lang="en-US" sz="1300" dirty="0"/>
           </a:p>
@@ -15529,14 +17057,14 @@
       </p:sp>
       <p:sp>
         <p:nvSpPr>
-          <p:cNvPr id="17" name="Text 15"/>
-          <p:cNvSpPr/>
-          <p:nvPr/>
-        </p:nvSpPr>
-        <p:spPr>
-          <a:xfrm>
-            <a:off x="8074152" y="4023360"/>
-            <a:ext cx="2825496" cy="1097280"/>
+          <p:cNvPr id="20" name="Text 18"/>
+          <p:cNvSpPr/>
+          <p:nvPr/>
+        </p:nvSpPr>
+        <p:spPr>
+          <a:xfrm>
+            <a:off x="7799832" y="5001768"/>
+            <a:ext cx="3145536" cy="502920"/>
           </a:xfrm>
           <a:prstGeom prst="rect">
             <a:avLst/>
@@ -15562,7 +17090,7 @@
                 <a:ea typeface="Aptos" pitchFamily="34" charset="-122"/>
                 <a:cs typeface="Aptos" pitchFamily="34" charset="-120"/>
               </a:rPr>
-              <a:t>Connect the concept to public health decisions, safeguards, documentation, or implementation work.</a:t>
+              <a:t>Connect the concept to public health purpose, responsible use, required safeguards, documentation, and the next action a department should take.</a:t>
             </a:r>
             <a:endParaRPr lang="en-US" sz="1550" dirty="0"/>
           </a:p>

--- a/downloads/presentations/modules/gov-420.pptx
+++ b/downloads/presentations/modules/gov-420.pptx
@@ -3425,13 +3425,11 @@
             </a:avLst>
           </a:prstGeom>
           <a:solidFill>
-            <a:srgbClr val="FFFFFF">
-              <a:alpha val="88000"/>
-            </a:srgbClr>
+            <a:srgbClr val="FFFFFF"/>
           </a:solidFill>
           <a:ln w="12700">
             <a:solidFill>
-              <a:srgbClr val="D6E8F2"/>
+              <a:srgbClr val="B9D7E6"/>
             </a:solidFill>
             <a:prstDash val="solid"/>
           </a:ln>
@@ -3439,190 +3437,112 @@
       </p:sp>
       <p:sp>
         <p:nvSpPr>
-          <p:cNvPr id="14" name="Shape 12"/>
-          <p:cNvSpPr/>
-          <p:nvPr/>
-        </p:nvSpPr>
-        <p:spPr>
-          <a:xfrm>
-            <a:off x="7891272" y="3108960"/>
-            <a:ext cx="566928" cy="566928"/>
-          </a:xfrm>
-          <a:prstGeom prst="ellipse">
-            <a:avLst/>
-          </a:prstGeom>
-          <a:solidFill>
-            <a:srgbClr val="0068B7"/>
-          </a:solidFill>
-          <a:ln w="12700">
-            <a:solidFill>
-              <a:srgbClr val="0068B7"/>
-            </a:solidFill>
-            <a:prstDash val="solid"/>
-          </a:ln>
-        </p:spPr>
-      </p:sp>
-      <p:sp>
-        <p:nvSpPr>
-          <p:cNvPr id="15" name="Shape 13"/>
-          <p:cNvSpPr/>
-          <p:nvPr/>
-        </p:nvSpPr>
-        <p:spPr>
-          <a:xfrm>
-            <a:off x="10287000" y="3108960"/>
-            <a:ext cx="566928" cy="566928"/>
-          </a:xfrm>
-          <a:prstGeom prst="ellipse">
-            <a:avLst/>
-          </a:prstGeom>
-          <a:solidFill>
-            <a:srgbClr val="2F8A28"/>
-          </a:solidFill>
-          <a:ln w="12700">
-            <a:solidFill>
-              <a:srgbClr val="2F8A28"/>
-            </a:solidFill>
-            <a:prstDash val="solid"/>
-          </a:ln>
-        </p:spPr>
+          <p:cNvPr id="14" name="Text 12"/>
+          <p:cNvSpPr/>
+          <p:nvPr/>
+        </p:nvSpPr>
+        <p:spPr>
+          <a:xfrm>
+            <a:off x="7799832" y="2935224"/>
+            <a:ext cx="3145536" cy="256032"/>
+          </a:xfrm>
+          <a:prstGeom prst="rect">
+            <a:avLst/>
+          </a:prstGeom>
+          <a:noFill/>
+          <a:ln/>
+        </p:spPr>
+        <p:txBody>
+          <a:bodyPr wrap="square" lIns="0" tIns="0" rIns="0" bIns="0" rtlCol="0" anchor="ctr"/>
+          <a:lstStyle/>
+          <a:p>
+            <a:pPr indent="0" marL="0">
+              <a:buNone/>
+            </a:pPr>
+            <a:r>
+              <a:rPr lang="en-US" sz="1300" b="1" dirty="0">
+                <a:solidFill>
+                  <a:srgbClr val="0068B7"/>
+                </a:solidFill>
+                <a:latin typeface="Aptos" pitchFamily="34" charset="0"/>
+                <a:ea typeface="Aptos" pitchFamily="34" charset="-122"/>
+                <a:cs typeface="Aptos" pitchFamily="34" charset="-120"/>
+              </a:rPr>
+              <a:t>Concept checkpoints</a:t>
+            </a:r>
+            <a:endParaRPr lang="en-US" sz="1300" dirty="0"/>
+          </a:p>
+        </p:txBody>
+      </p:sp>
+      <p:sp>
+        <p:nvSpPr>
+          <p:cNvPr id="15" name="Text 13"/>
+          <p:cNvSpPr/>
+          <p:nvPr/>
+        </p:nvSpPr>
+        <p:spPr>
+          <a:xfrm>
+            <a:off x="7818120" y="3300984"/>
+            <a:ext cx="3090672" cy="877824"/>
+          </a:xfrm>
+          <a:prstGeom prst="rect">
+            <a:avLst/>
+          </a:prstGeom>
+          <a:noFill/>
+          <a:ln/>
+        </p:spPr>
+        <p:txBody>
+          <a:bodyPr wrap="square" lIns="254" tIns="254" rIns="254" bIns="254" rtlCol="0" anchor="t">
+            <a:normAutofit/>
+          </a:bodyPr>
+          <a:lstStyle/>
+          <a:p>
+            <a:r>
+              <a:rPr lang="en-US" sz="1380" dirty="0">
+                <a:solidFill>
+                  <a:srgbClr val="17364A"/>
+                </a:solidFill>
+                <a:latin typeface="Aptos" pitchFamily="34" charset="0"/>
+                <a:ea typeface="Aptos" pitchFamily="34" charset="-122"/>
+                <a:cs typeface="Aptos" pitchFamily="34" charset="-120"/>
+              </a:rPr>
+              <a:t>Tools that influence public communication, prioritization, access, enforcement, or.</a:t>
+            </a:r>
+            <a:endParaRPr lang="en-US" sz="1380" dirty="0"/>
+          </a:p>
+          <a:p>
+            <a:r>
+              <a:rPr lang="en-US" sz="1380" dirty="0">
+                <a:solidFill>
+                  <a:srgbClr val="17364A"/>
+                </a:solidFill>
+                <a:latin typeface="Aptos" pitchFamily="34" charset="0"/>
+                <a:ea typeface="Aptos" pitchFamily="34" charset="-122"/>
+                <a:cs typeface="Aptos" pitchFamily="34" charset="-120"/>
+              </a:rPr>
+              <a:t>High-impact tools may require more detailed documentation, such as intended use, data.</a:t>
+            </a:r>
+            <a:endParaRPr lang="en-US" sz="1380" dirty="0"/>
+          </a:p>
+          <a:p>
+            <a:r>
+              <a:rPr lang="en-US" sz="1380" dirty="0">
+                <a:solidFill>
+                  <a:srgbClr val="17364A"/>
+                </a:solidFill>
+                <a:latin typeface="Aptos" pitchFamily="34" charset="0"/>
+                <a:ea typeface="Aptos" pitchFamily="34" charset="-122"/>
+                <a:cs typeface="Aptos" pitchFamily="34" charset="-120"/>
+              </a:rPr>
+              <a:t>The reporting process should be accessible.</a:t>
+            </a:r>
+            <a:endParaRPr lang="en-US" sz="1380" dirty="0"/>
+          </a:p>
+        </p:txBody>
       </p:sp>
       <p:sp>
         <p:nvSpPr>
           <p:cNvPr id="16" name="Shape 14"/>
-          <p:cNvSpPr/>
-          <p:nvPr/>
-        </p:nvSpPr>
-        <p:spPr>
-          <a:xfrm>
-            <a:off x="9089136" y="3456432"/>
-            <a:ext cx="566928" cy="566928"/>
-          </a:xfrm>
-          <a:prstGeom prst="ellipse">
-            <a:avLst/>
-          </a:prstGeom>
-          <a:solidFill>
-            <a:srgbClr val="6A4CA3"/>
-          </a:solidFill>
-          <a:ln w="12700">
-            <a:solidFill>
-              <a:srgbClr val="6A4CA3"/>
-            </a:solidFill>
-            <a:prstDash val="solid"/>
-          </a:ln>
-        </p:spPr>
-      </p:sp>
-      <p:sp>
-        <p:nvSpPr>
-          <p:cNvPr id="17" name="Shape 15"/>
-          <p:cNvSpPr/>
-          <p:nvPr/>
-        </p:nvSpPr>
-        <p:spPr>
-          <a:xfrm>
-            <a:off x="8385048" y="3419856"/>
-            <a:ext cx="1975104" cy="0"/>
-          </a:xfrm>
-          <a:prstGeom prst="line">
-            <a:avLst/>
-          </a:prstGeom>
-          <a:noFill/>
-          <a:ln w="25400">
-            <a:solidFill>
-              <a:srgbClr val="8ABBD8"/>
-            </a:solidFill>
-            <a:prstDash val="solid"/>
-          </a:ln>
-        </p:spPr>
-      </p:sp>
-      <p:sp>
-        <p:nvSpPr>
-          <p:cNvPr id="18" name="Shape 16"/>
-          <p:cNvSpPr/>
-          <p:nvPr/>
-        </p:nvSpPr>
-        <p:spPr>
-          <a:xfrm>
-            <a:off x="8202168" y="3630168"/>
-            <a:ext cx="1170432" cy="118872"/>
-          </a:xfrm>
-          <a:prstGeom prst="line">
-            <a:avLst/>
-          </a:prstGeom>
-          <a:noFill/>
-          <a:ln w="25400">
-            <a:solidFill>
-              <a:srgbClr val="8ABBD8"/>
-            </a:solidFill>
-            <a:prstDash val="solid"/>
-          </a:ln>
-        </p:spPr>
-      </p:sp>
-      <p:sp>
-        <p:nvSpPr>
-          <p:cNvPr id="19" name="Shape 17"/>
-          <p:cNvSpPr/>
-          <p:nvPr/>
-        </p:nvSpPr>
-        <p:spPr>
-          <a:xfrm>
-            <a:off x="10543032" y="3630168"/>
-            <a:ext cx="-1170432" cy="118872"/>
-          </a:xfrm>
-          <a:prstGeom prst="line">
-            <a:avLst/>
-          </a:prstGeom>
-          <a:noFill/>
-          <a:ln w="25400">
-            <a:solidFill>
-              <a:srgbClr val="8ABBD8"/>
-            </a:solidFill>
-            <a:prstDash val="solid"/>
-          </a:ln>
-        </p:spPr>
-      </p:sp>
-      <p:sp>
-        <p:nvSpPr>
-          <p:cNvPr id="20" name="Text 18"/>
-          <p:cNvSpPr/>
-          <p:nvPr/>
-        </p:nvSpPr>
-        <p:spPr>
-          <a:xfrm>
-            <a:off x="7863840" y="4069080"/>
-            <a:ext cx="3017520" cy="164592"/>
-          </a:xfrm>
-          <a:prstGeom prst="rect">
-            <a:avLst/>
-          </a:prstGeom>
-          <a:noFill/>
-          <a:ln/>
-        </p:spPr>
-        <p:txBody>
-          <a:bodyPr wrap="square" lIns="0" tIns="0" rIns="0" bIns="0" rtlCol="0" anchor="ctr"/>
-          <a:lstStyle/>
-          <a:p>
-            <a:pPr algn="ctr" indent="0" marL="0">
-              <a:buNone/>
-            </a:pPr>
-            <a:r>
-              <a:rPr lang="en-US" sz="900" b="1" dirty="0">
-                <a:solidFill>
-                  <a:srgbClr val="003A63"/>
-                </a:solidFill>
-                <a:latin typeface="Aptos" pitchFamily="34" charset="0"/>
-                <a:ea typeface="Aptos" pitchFamily="34" charset="-122"/>
-                <a:cs typeface="Aptos" pitchFamily="34" charset="-120"/>
-              </a:rPr>
-              <a:t>Decision rights</a:t>
-            </a:r>
-            <a:endParaRPr lang="en-US" sz="900" dirty="0"/>
-          </a:p>
-        </p:txBody>
-      </p:sp>
-      <p:sp>
-        <p:nvSpPr>
-          <p:cNvPr id="21" name="Shape 19"/>
           <p:cNvSpPr/>
           <p:nvPr/>
         </p:nvSpPr>
@@ -3649,7 +3569,7 @@
       </p:sp>
       <p:sp>
         <p:nvSpPr>
-          <p:cNvPr id="22" name="Text 20"/>
+          <p:cNvPr id="17" name="Text 15"/>
           <p:cNvSpPr/>
           <p:nvPr/>
         </p:nvSpPr>
@@ -3688,7 +3608,7 @@
       </p:sp>
       <p:sp>
         <p:nvSpPr>
-          <p:cNvPr id="23" name="Text 21"/>
+          <p:cNvPr id="18" name="Text 16"/>
           <p:cNvSpPr/>
           <p:nvPr/>
         </p:nvSpPr>
@@ -4196,13 +4116,11 @@
             </a:avLst>
           </a:prstGeom>
           <a:solidFill>
-            <a:srgbClr val="FFFFFF">
-              <a:alpha val="88000"/>
-            </a:srgbClr>
+            <a:srgbClr val="FFFFFF"/>
           </a:solidFill>
           <a:ln w="12700">
             <a:solidFill>
-              <a:srgbClr val="D6E8F2"/>
+              <a:srgbClr val="B9D7E6"/>
             </a:solidFill>
             <a:prstDash val="solid"/>
           </a:ln>
@@ -4210,26 +4128,42 @@
       </p:sp>
       <p:sp>
         <p:nvSpPr>
-          <p:cNvPr id="14" name="Shape 12"/>
-          <p:cNvSpPr/>
-          <p:nvPr/>
-        </p:nvSpPr>
-        <p:spPr>
-          <a:xfrm>
-            <a:off x="8046720" y="3108960"/>
-            <a:ext cx="2651760" cy="896112"/>
-          </a:xfrm>
-          <a:prstGeom prst="arc">
-            <a:avLst/>
-          </a:prstGeom>
-          <a:noFill/>
-          <a:ln w="25400">
-            <a:solidFill>
-              <a:srgbClr val="0068B7"/>
-            </a:solidFill>
-            <a:prstDash val="solid"/>
-          </a:ln>
-        </p:spPr>
+          <p:cNvPr id="14" name="Text 12"/>
+          <p:cNvSpPr/>
+          <p:nvPr/>
+        </p:nvSpPr>
+        <p:spPr>
+          <a:xfrm>
+            <a:off x="7799832" y="2935224"/>
+            <a:ext cx="3145536" cy="256032"/>
+          </a:xfrm>
+          <a:prstGeom prst="rect">
+            <a:avLst/>
+          </a:prstGeom>
+          <a:noFill/>
+          <a:ln/>
+        </p:spPr>
+        <p:txBody>
+          <a:bodyPr wrap="square" lIns="0" tIns="0" rIns="0" bIns="0" rtlCol="0" anchor="ctr"/>
+          <a:lstStyle/>
+          <a:p>
+            <a:pPr indent="0" marL="0">
+              <a:buNone/>
+            </a:pPr>
+            <a:r>
+              <a:rPr lang="en-US" sz="1300" b="1" dirty="0">
+                <a:solidFill>
+                  <a:srgbClr val="0068B7"/>
+                </a:solidFill>
+                <a:latin typeface="Aptos" pitchFamily="34" charset="0"/>
+                <a:ea typeface="Aptos" pitchFamily="34" charset="-122"/>
+                <a:cs typeface="Aptos" pitchFamily="34" charset="-120"/>
+              </a:rPr>
+              <a:t>Concept checkpoints</a:t>
+            </a:r>
+            <a:endParaRPr lang="en-US" sz="1300" dirty="0"/>
+          </a:p>
+        </p:txBody>
       </p:sp>
       <p:sp>
         <p:nvSpPr>
@@ -4239,102 +4173,67 @@
         </p:nvSpPr>
         <p:spPr>
           <a:xfrm>
-            <a:off x="7909560" y="3099816"/>
-            <a:ext cx="2926080" cy="256032"/>
-          </a:xfrm>
-          <a:prstGeom prst="rect">
-            <a:avLst/>
-          </a:prstGeom>
-          <a:noFill/>
-          <a:ln/>
-        </p:spPr>
-        <p:txBody>
-          <a:bodyPr wrap="square" lIns="0" tIns="0" rIns="0" bIns="0" rtlCol="0" anchor="ctr"/>
-          <a:lstStyle/>
-          <a:p>
-            <a:pPr algn="ctr" indent="0" marL="0">
-              <a:buNone/>
-            </a:pPr>
-            <a:r>
-              <a:rPr lang="en-US" sz="1500" b="1" dirty="0">
-                <a:solidFill>
-                  <a:srgbClr val="003A63"/>
-                </a:solidFill>
-                <a:latin typeface="Aptos" pitchFamily="34" charset="0"/>
-                <a:ea typeface="Aptos" pitchFamily="34" charset="-122"/>
-                <a:cs typeface="Aptos" pitchFamily="34" charset="-120"/>
-              </a:rPr>
-              <a:t>Risk</a:t>
-            </a:r>
-            <a:endParaRPr lang="en-US" sz="1500" dirty="0"/>
+            <a:off x="7818120" y="3300984"/>
+            <a:ext cx="3090672" cy="877824"/>
+          </a:xfrm>
+          <a:prstGeom prst="rect">
+            <a:avLst/>
+          </a:prstGeom>
+          <a:noFill/>
+          <a:ln/>
+        </p:spPr>
+        <p:txBody>
+          <a:bodyPr wrap="square" lIns="254" tIns="254" rIns="254" bIns="254" rtlCol="0" anchor="t">
+            <a:normAutofit/>
+          </a:bodyPr>
+          <a:lstStyle/>
+          <a:p>
+            <a:r>
+              <a:rPr lang="en-US" sz="1380" dirty="0">
+                <a:solidFill>
+                  <a:srgbClr val="17364A"/>
+                </a:solidFill>
+                <a:latin typeface="Aptos" pitchFamily="34" charset="0"/>
+                <a:ea typeface="Aptos" pitchFamily="34" charset="-122"/>
+                <a:cs typeface="Aptos" pitchFamily="34" charset="-120"/>
+              </a:rPr>
+              <a:t>Agencies may publish broad statements about responsible AI without disclosing actual uses,.</a:t>
+            </a:r>
+            <a:endParaRPr lang="en-US" sz="1380" dirty="0"/>
+          </a:p>
+          <a:p>
+            <a:r>
+              <a:rPr lang="en-US" sz="1380" dirty="0">
+                <a:solidFill>
+                  <a:srgbClr val="17364A"/>
+                </a:solidFill>
+                <a:latin typeface="Aptos" pitchFamily="34" charset="0"/>
+                <a:ea typeface="Aptos" pitchFamily="34" charset="-122"/>
+                <a:cs typeface="Aptos" pitchFamily="34" charset="-120"/>
+              </a:rPr>
+              <a:t>A guardrail is to maintain an AI use registry with concrete information about approved and.</a:t>
+            </a:r>
+            <a:endParaRPr lang="en-US" sz="1380" dirty="0"/>
+          </a:p>
+          <a:p>
+            <a:r>
+              <a:rPr lang="en-US" sz="1380" dirty="0">
+                <a:solidFill>
+                  <a:srgbClr val="17364A"/>
+                </a:solidFill>
+                <a:latin typeface="Aptos" pitchFamily="34" charset="0"/>
+                <a:ea typeface="Aptos" pitchFamily="34" charset="-122"/>
+                <a:cs typeface="Aptos" pitchFamily="34" charset="-120"/>
+              </a:rPr>
+              <a:t>Another risk is over-disclosure of sensitive details.</a:t>
+            </a:r>
+            <a:endParaRPr lang="en-US" sz="1380" dirty="0"/>
           </a:p>
         </p:txBody>
       </p:sp>
       <p:sp>
         <p:nvSpPr>
           <p:cNvPr id="16" name="Shape 14"/>
-          <p:cNvSpPr/>
-          <p:nvPr/>
-        </p:nvSpPr>
-        <p:spPr>
-          <a:xfrm>
-            <a:off x="8366760" y="3639312"/>
-            <a:ext cx="2011680" cy="0"/>
-          </a:xfrm>
-          <a:prstGeom prst="line">
-            <a:avLst/>
-          </a:prstGeom>
-          <a:noFill/>
-          <a:ln w="63500">
-            <a:solidFill>
-              <a:srgbClr val="2F8A28"/>
-            </a:solidFill>
-            <a:prstDash val="solid"/>
-          </a:ln>
-        </p:spPr>
-      </p:sp>
-      <p:sp>
-        <p:nvSpPr>
-          <p:cNvPr id="17" name="Text 15"/>
-          <p:cNvSpPr/>
-          <p:nvPr/>
-        </p:nvSpPr>
-        <p:spPr>
-          <a:xfrm>
-            <a:off x="7909560" y="3849624"/>
-            <a:ext cx="2926080" cy="164592"/>
-          </a:xfrm>
-          <a:prstGeom prst="rect">
-            <a:avLst/>
-          </a:prstGeom>
-          <a:noFill/>
-          <a:ln/>
-        </p:spPr>
-        <p:txBody>
-          <a:bodyPr wrap="square" lIns="0" tIns="0" rIns="0" bIns="0" rtlCol="0" anchor="ctr"/>
-          <a:lstStyle/>
-          <a:p>
-            <a:pPr algn="ctr" indent="0" marL="0">
-              <a:buNone/>
-            </a:pPr>
-            <a:r>
-              <a:rPr lang="en-US" sz="900" dirty="0">
-                <a:solidFill>
-                  <a:srgbClr val="003A63"/>
-                </a:solidFill>
-                <a:latin typeface="Aptos" pitchFamily="34" charset="0"/>
-                <a:ea typeface="Aptos" pitchFamily="34" charset="-122"/>
-                <a:cs typeface="Aptos" pitchFamily="34" charset="-120"/>
-              </a:rPr>
-              <a:t>Human review</a:t>
-            </a:r>
-            <a:endParaRPr lang="en-US" sz="900" dirty="0"/>
-          </a:p>
-        </p:txBody>
-      </p:sp>
-      <p:sp>
-        <p:nvSpPr>
-          <p:cNvPr id="18" name="Shape 16"/>
           <p:cNvSpPr/>
           <p:nvPr/>
         </p:nvSpPr>
@@ -4361,7 +4260,7 @@
       </p:sp>
       <p:sp>
         <p:nvSpPr>
-          <p:cNvPr id="19" name="Text 17"/>
+          <p:cNvPr id="17" name="Text 15"/>
           <p:cNvSpPr/>
           <p:nvPr/>
         </p:nvSpPr>
@@ -4400,7 +4299,7 @@
       </p:sp>
       <p:sp>
         <p:nvSpPr>
-          <p:cNvPr id="20" name="Text 18"/>
+          <p:cNvPr id="18" name="Text 16"/>
           <p:cNvSpPr/>
           <p:nvPr/>
         </p:nvSpPr>
@@ -4908,13 +4807,11 @@
             </a:avLst>
           </a:prstGeom>
           <a:solidFill>
-            <a:srgbClr val="FFFFFF">
-              <a:alpha val="88000"/>
-            </a:srgbClr>
+            <a:srgbClr val="FFFFFF"/>
           </a:solidFill>
           <a:ln w="12700">
             <a:solidFill>
-              <a:srgbClr val="D6E8F2"/>
+              <a:srgbClr val="B9D7E6"/>
             </a:solidFill>
             <a:prstDash val="solid"/>
           </a:ln>
@@ -4922,30 +4819,42 @@
       </p:sp>
       <p:sp>
         <p:nvSpPr>
-          <p:cNvPr id="14" name="Shape 12"/>
-          <p:cNvSpPr/>
-          <p:nvPr/>
-        </p:nvSpPr>
-        <p:spPr>
-          <a:xfrm>
-            <a:off x="7927848" y="3319272"/>
-            <a:ext cx="792480" cy="749808"/>
-          </a:xfrm>
-          <a:prstGeom prst="roundRect">
-            <a:avLst>
-              <a:gd name="adj" fmla="val 14634"/>
-            </a:avLst>
-          </a:prstGeom>
-          <a:solidFill>
-            <a:srgbClr val="0068B7"/>
-          </a:solidFill>
-          <a:ln w="12700">
-            <a:solidFill>
-              <a:srgbClr val="0068B7"/>
-            </a:solidFill>
-            <a:prstDash val="solid"/>
-          </a:ln>
-        </p:spPr>
+          <p:cNvPr id="14" name="Text 12"/>
+          <p:cNvSpPr/>
+          <p:nvPr/>
+        </p:nvSpPr>
+        <p:spPr>
+          <a:xfrm>
+            <a:off x="7799832" y="2935224"/>
+            <a:ext cx="3145536" cy="256032"/>
+          </a:xfrm>
+          <a:prstGeom prst="rect">
+            <a:avLst/>
+          </a:prstGeom>
+          <a:noFill/>
+          <a:ln/>
+        </p:spPr>
+        <p:txBody>
+          <a:bodyPr wrap="square" lIns="0" tIns="0" rIns="0" bIns="0" rtlCol="0" anchor="ctr"/>
+          <a:lstStyle/>
+          <a:p>
+            <a:pPr indent="0" marL="0">
+              <a:buNone/>
+            </a:pPr>
+            <a:r>
+              <a:rPr lang="en-US" sz="1300" b="1" dirty="0">
+                <a:solidFill>
+                  <a:srgbClr val="0068B7"/>
+                </a:solidFill>
+                <a:latin typeface="Aptos" pitchFamily="34" charset="0"/>
+                <a:ea typeface="Aptos" pitchFamily="34" charset="-122"/>
+                <a:cs typeface="Aptos" pitchFamily="34" charset="-120"/>
+              </a:rPr>
+              <a:t>Concept checkpoints</a:t>
+            </a:r>
+            <a:endParaRPr lang="en-US" sz="1300" dirty="0"/>
+          </a:p>
+        </p:txBody>
       </p:sp>
       <p:sp>
         <p:nvSpPr>
@@ -4955,240 +4864,53 @@
         </p:nvSpPr>
         <p:spPr>
           <a:xfrm>
-            <a:off x="8001000" y="3511296"/>
-            <a:ext cx="646176" cy="310896"/>
-          </a:xfrm>
-          <a:prstGeom prst="rect">
-            <a:avLst/>
-          </a:prstGeom>
-          <a:noFill/>
-          <a:ln/>
-        </p:spPr>
-        <p:txBody>
-          <a:bodyPr wrap="square" lIns="0" tIns="0" rIns="0" bIns="0" rtlCol="0" anchor="ctr">
+            <a:off x="7818120" y="3300984"/>
+            <a:ext cx="3090672" cy="877824"/>
+          </a:xfrm>
+          <a:prstGeom prst="rect">
+            <a:avLst/>
+          </a:prstGeom>
+          <a:noFill/>
+          <a:ln/>
+        </p:spPr>
+        <p:txBody>
+          <a:bodyPr wrap="square" lIns="254" tIns="254" rIns="254" bIns="254" rtlCol="0" anchor="t">
             <a:normAutofit/>
           </a:bodyPr>
           <a:lstStyle/>
           <a:p>
-            <a:pPr algn="ctr" indent="0" marL="0">
-              <a:buNone/>
-            </a:pPr>
-            <a:r>
-              <a:rPr lang="en-US" sz="1500" b="1" dirty="0">
-                <a:solidFill>
-                  <a:srgbClr val="FFFFFF"/>
-                </a:solidFill>
-                <a:latin typeface="Aptos" pitchFamily="34" charset="0"/>
-                <a:ea typeface="Aptos" pitchFamily="34" charset="-122"/>
-                <a:cs typeface="Aptos" pitchFamily="34" charset="-120"/>
-              </a:rPr>
-              <a:t>Plan</a:t>
-            </a:r>
-            <a:endParaRPr lang="en-US" sz="1500" dirty="0"/>
+            <a:r>
+              <a:rPr lang="en-US" sz="1380" dirty="0">
+                <a:solidFill>
+                  <a:srgbClr val="17364A"/>
+                </a:solidFill>
+                <a:latin typeface="Aptos" pitchFamily="34" charset="0"/>
+                <a:ea typeface="Aptos" pitchFamily="34" charset="-122"/>
+                <a:cs typeface="Aptos" pitchFamily="34" charset="-120"/>
+              </a:rPr>
+              <a:t>Predictive analytics transparency may explain what the model supports, what decisions.</a:t>
+            </a:r>
+            <a:endParaRPr lang="en-US" sz="1380" dirty="0"/>
+          </a:p>
+          <a:p>
+            <a:r>
+              <a:rPr lang="en-US" sz="1380" dirty="0">
+                <a:solidFill>
+                  <a:srgbClr val="17364A"/>
+                </a:solidFill>
+                <a:latin typeface="Aptos" pitchFamily="34" charset="0"/>
+                <a:ea typeface="Aptos" pitchFamily="34" charset="-122"/>
+                <a:cs typeface="Aptos" pitchFamily="34" charset="-120"/>
+              </a:rPr>
+              <a:t>Agentic AI transparency may explain what actions are automated, what approvals are.</a:t>
+            </a:r>
+            <a:endParaRPr lang="en-US" sz="1380" dirty="0"/>
           </a:p>
         </p:txBody>
       </p:sp>
       <p:sp>
         <p:nvSpPr>
           <p:cNvPr id="16" name="Shape 14"/>
-          <p:cNvSpPr/>
-          <p:nvPr/>
-        </p:nvSpPr>
-        <p:spPr>
-          <a:xfrm>
-            <a:off x="8976360" y="3319272"/>
-            <a:ext cx="792480" cy="749808"/>
-          </a:xfrm>
-          <a:prstGeom prst="roundRect">
-            <a:avLst>
-              <a:gd name="adj" fmla="val 14634"/>
-            </a:avLst>
-          </a:prstGeom>
-          <a:solidFill>
-            <a:srgbClr val="2F8A28"/>
-          </a:solidFill>
-          <a:ln w="12700">
-            <a:solidFill>
-              <a:srgbClr val="2F8A28"/>
-            </a:solidFill>
-            <a:prstDash val="solid"/>
-          </a:ln>
-        </p:spPr>
-      </p:sp>
-      <p:sp>
-        <p:nvSpPr>
-          <p:cNvPr id="17" name="Text 15"/>
-          <p:cNvSpPr/>
-          <p:nvPr/>
-        </p:nvSpPr>
-        <p:spPr>
-          <a:xfrm>
-            <a:off x="9049512" y="3511296"/>
-            <a:ext cx="646176" cy="310896"/>
-          </a:xfrm>
-          <a:prstGeom prst="rect">
-            <a:avLst/>
-          </a:prstGeom>
-          <a:noFill/>
-          <a:ln/>
-        </p:spPr>
-        <p:txBody>
-          <a:bodyPr wrap="square" lIns="0" tIns="0" rIns="0" bIns="0" rtlCol="0" anchor="ctr">
-            <a:normAutofit/>
-          </a:bodyPr>
-          <a:lstStyle/>
-          <a:p>
-            <a:pPr algn="ctr" indent="0" marL="0">
-              <a:buNone/>
-            </a:pPr>
-            <a:r>
-              <a:rPr lang="en-US" sz="1500" b="1" dirty="0">
-                <a:solidFill>
-                  <a:srgbClr val="FFFFFF"/>
-                </a:solidFill>
-                <a:latin typeface="Aptos" pitchFamily="34" charset="0"/>
-                <a:ea typeface="Aptos" pitchFamily="34" charset="-122"/>
-                <a:cs typeface="Aptos" pitchFamily="34" charset="-120"/>
-              </a:rPr>
-              <a:t>Do</a:t>
-            </a:r>
-            <a:endParaRPr lang="en-US" sz="1500" dirty="0"/>
-          </a:p>
-        </p:txBody>
-      </p:sp>
-      <p:sp>
-        <p:nvSpPr>
-          <p:cNvPr id="18" name="Shape 16"/>
-          <p:cNvSpPr/>
-          <p:nvPr/>
-        </p:nvSpPr>
-        <p:spPr>
-          <a:xfrm>
-            <a:off x="10024872" y="3319272"/>
-            <a:ext cx="792480" cy="749808"/>
-          </a:xfrm>
-          <a:prstGeom prst="roundRect">
-            <a:avLst>
-              <a:gd name="adj" fmla="val 14634"/>
-            </a:avLst>
-          </a:prstGeom>
-          <a:solidFill>
-            <a:srgbClr val="D69A2D"/>
-          </a:solidFill>
-          <a:ln w="12700">
-            <a:solidFill>
-              <a:srgbClr val="D69A2D"/>
-            </a:solidFill>
-            <a:prstDash val="solid"/>
-          </a:ln>
-        </p:spPr>
-      </p:sp>
-      <p:sp>
-        <p:nvSpPr>
-          <p:cNvPr id="19" name="Text 17"/>
-          <p:cNvSpPr/>
-          <p:nvPr/>
-        </p:nvSpPr>
-        <p:spPr>
-          <a:xfrm>
-            <a:off x="10098024" y="3511296"/>
-            <a:ext cx="646176" cy="310896"/>
-          </a:xfrm>
-          <a:prstGeom prst="rect">
-            <a:avLst/>
-          </a:prstGeom>
-          <a:noFill/>
-          <a:ln/>
-        </p:spPr>
-        <p:txBody>
-          <a:bodyPr wrap="square" lIns="0" tIns="0" rIns="0" bIns="0" rtlCol="0" anchor="ctr">
-            <a:normAutofit/>
-          </a:bodyPr>
-          <a:lstStyle/>
-          <a:p>
-            <a:pPr algn="ctr" indent="0" marL="0">
-              <a:buNone/>
-            </a:pPr>
-            <a:r>
-              <a:rPr lang="en-US" sz="1500" b="1" dirty="0">
-                <a:solidFill>
-                  <a:srgbClr val="FFFFFF"/>
-                </a:solidFill>
-                <a:latin typeface="Aptos" pitchFamily="34" charset="0"/>
-                <a:ea typeface="Aptos" pitchFamily="34" charset="-122"/>
-                <a:cs typeface="Aptos" pitchFamily="34" charset="-120"/>
-              </a:rPr>
-              <a:t>Review</a:t>
-            </a:r>
-            <a:endParaRPr lang="en-US" sz="1500" dirty="0"/>
-          </a:p>
-        </p:txBody>
-      </p:sp>
-      <p:sp>
-        <p:nvSpPr>
-          <p:cNvPr id="20" name="Shape 18"/>
-          <p:cNvSpPr/>
-          <p:nvPr/>
-        </p:nvSpPr>
-        <p:spPr>
-          <a:xfrm>
-            <a:off x="8293608" y="4389120"/>
-            <a:ext cx="2157984" cy="0"/>
-          </a:xfrm>
-          <a:prstGeom prst="line">
-            <a:avLst/>
-          </a:prstGeom>
-          <a:noFill/>
-          <a:ln w="25400">
-            <a:solidFill>
-              <a:srgbClr val="8ABBD8"/>
-            </a:solidFill>
-            <a:prstDash val="solid"/>
-          </a:ln>
-        </p:spPr>
-      </p:sp>
-      <p:sp>
-        <p:nvSpPr>
-          <p:cNvPr id="21" name="Text 19"/>
-          <p:cNvSpPr/>
-          <p:nvPr/>
-        </p:nvSpPr>
-        <p:spPr>
-          <a:xfrm>
-            <a:off x="7909560" y="3977640"/>
-            <a:ext cx="2926080" cy="182880"/>
-          </a:xfrm>
-          <a:prstGeom prst="rect">
-            <a:avLst/>
-          </a:prstGeom>
-          <a:noFill/>
-          <a:ln/>
-        </p:spPr>
-        <p:txBody>
-          <a:bodyPr wrap="square" lIns="0" tIns="0" rIns="0" bIns="0" rtlCol="0" anchor="ctr"/>
-          <a:lstStyle/>
-          <a:p>
-            <a:pPr algn="ctr" indent="0" marL="0">
-              <a:buNone/>
-            </a:pPr>
-            <a:r>
-              <a:rPr lang="en-US" sz="1000" dirty="0">
-                <a:solidFill>
-                  <a:srgbClr val="003A63"/>
-                </a:solidFill>
-                <a:latin typeface="Aptos" pitchFamily="34" charset="0"/>
-                <a:ea typeface="Aptos" pitchFamily="34" charset="-122"/>
-                <a:cs typeface="Aptos" pitchFamily="34" charset="-120"/>
-              </a:rPr>
-              <a:t>Dependencies visible</a:t>
-            </a:r>
-            <a:endParaRPr lang="en-US" sz="1000" dirty="0"/>
-          </a:p>
-        </p:txBody>
-      </p:sp>
-      <p:sp>
-        <p:nvSpPr>
-          <p:cNvPr id="22" name="Shape 20"/>
           <p:cNvSpPr/>
           <p:nvPr/>
         </p:nvSpPr>
@@ -5215,7 +4937,7 @@
       </p:sp>
       <p:sp>
         <p:nvSpPr>
-          <p:cNvPr id="23" name="Text 21"/>
+          <p:cNvPr id="17" name="Text 15"/>
           <p:cNvSpPr/>
           <p:nvPr/>
         </p:nvSpPr>
@@ -5254,7 +4976,7 @@
       </p:sp>
       <p:sp>
         <p:nvSpPr>
-          <p:cNvPr id="24" name="Text 22"/>
+          <p:cNvPr id="18" name="Text 16"/>
           <p:cNvSpPr/>
           <p:nvPr/>
         </p:nvSpPr>
@@ -5762,13 +5484,11 @@
             </a:avLst>
           </a:prstGeom>
           <a:solidFill>
-            <a:srgbClr val="FFFFFF">
-              <a:alpha val="88000"/>
-            </a:srgbClr>
+            <a:srgbClr val="FFFFFF"/>
           </a:solidFill>
           <a:ln w="12700">
             <a:solidFill>
-              <a:srgbClr val="D6E8F2"/>
+              <a:srgbClr val="B9D7E6"/>
             </a:solidFill>
             <a:prstDash val="solid"/>
           </a:ln>
@@ -5776,119 +5496,112 @@
       </p:sp>
       <p:sp>
         <p:nvSpPr>
-          <p:cNvPr id="14" name="Shape 12"/>
-          <p:cNvSpPr/>
-          <p:nvPr/>
-        </p:nvSpPr>
-        <p:spPr>
-          <a:xfrm>
-            <a:off x="8074152" y="3291840"/>
-            <a:ext cx="2596896" cy="749808"/>
-          </a:xfrm>
-          <a:prstGeom prst="rect">
-            <a:avLst/>
-          </a:prstGeom>
-          <a:solidFill>
-            <a:srgbClr val="EAF6F8"/>
-          </a:solidFill>
-          <a:ln w="12700">
-            <a:solidFill>
-              <a:srgbClr val="8ABBD8"/>
-            </a:solidFill>
-            <a:prstDash val="solid"/>
-          </a:ln>
-        </p:spPr>
-      </p:sp>
-      <p:sp>
-        <p:nvSpPr>
-          <p:cNvPr id="15" name="Shape 13"/>
-          <p:cNvSpPr/>
-          <p:nvPr/>
-        </p:nvSpPr>
-        <p:spPr>
-          <a:xfrm>
-            <a:off x="8202168" y="3721608"/>
-            <a:ext cx="2340864" cy="0"/>
-          </a:xfrm>
-          <a:prstGeom prst="line">
-            <a:avLst/>
-          </a:prstGeom>
-          <a:noFill/>
-          <a:ln w="19050">
-            <a:solidFill>
-              <a:srgbClr val="0068B7"/>
-            </a:solidFill>
-            <a:prstDash val="solid"/>
-          </a:ln>
-        </p:spPr>
+          <p:cNvPr id="14" name="Text 12"/>
+          <p:cNvSpPr/>
+          <p:nvPr/>
+        </p:nvSpPr>
+        <p:spPr>
+          <a:xfrm>
+            <a:off x="7799832" y="2935224"/>
+            <a:ext cx="3145536" cy="256032"/>
+          </a:xfrm>
+          <a:prstGeom prst="rect">
+            <a:avLst/>
+          </a:prstGeom>
+          <a:noFill/>
+          <a:ln/>
+        </p:spPr>
+        <p:txBody>
+          <a:bodyPr wrap="square" lIns="0" tIns="0" rIns="0" bIns="0" rtlCol="0" anchor="ctr"/>
+          <a:lstStyle/>
+          <a:p>
+            <a:pPr indent="0" marL="0">
+              <a:buNone/>
+            </a:pPr>
+            <a:r>
+              <a:rPr lang="en-US" sz="1300" b="1" dirty="0">
+                <a:solidFill>
+                  <a:srgbClr val="0068B7"/>
+                </a:solidFill>
+                <a:latin typeface="Aptos" pitchFamily="34" charset="0"/>
+                <a:ea typeface="Aptos" pitchFamily="34" charset="-122"/>
+                <a:cs typeface="Aptos" pitchFamily="34" charset="-120"/>
+              </a:rPr>
+              <a:t>Concept checkpoints</a:t>
+            </a:r>
+            <a:endParaRPr lang="en-US" sz="1300" dirty="0"/>
+          </a:p>
+        </p:txBody>
+      </p:sp>
+      <p:sp>
+        <p:nvSpPr>
+          <p:cNvPr id="15" name="Text 13"/>
+          <p:cNvSpPr/>
+          <p:nvPr/>
+        </p:nvSpPr>
+        <p:spPr>
+          <a:xfrm>
+            <a:off x="7818120" y="3300984"/>
+            <a:ext cx="3090672" cy="877824"/>
+          </a:xfrm>
+          <a:prstGeom prst="rect">
+            <a:avLst/>
+          </a:prstGeom>
+          <a:noFill/>
+          <a:ln/>
+        </p:spPr>
+        <p:txBody>
+          <a:bodyPr wrap="square" lIns="254" tIns="254" rIns="254" bIns="254" rtlCol="0" anchor="t">
+            <a:normAutofit/>
+          </a:bodyPr>
+          <a:lstStyle/>
+          <a:p>
+            <a:r>
+              <a:rPr lang="en-US" sz="1380" dirty="0">
+                <a:solidFill>
+                  <a:srgbClr val="17364A"/>
+                </a:solidFill>
+                <a:latin typeface="Aptos" pitchFamily="34" charset="0"/>
+                <a:ea typeface="Aptos" pitchFamily="34" charset="-122"/>
+                <a:cs typeface="Aptos" pitchFamily="34" charset="-120"/>
+              </a:rPr>
+              <a:t>Which current or proposed AI use case in your agency raises this leadership or governance.</a:t>
+            </a:r>
+            <a:endParaRPr lang="en-US" sz="1380" dirty="0"/>
+          </a:p>
+          <a:p>
+            <a:r>
+              <a:rPr lang="en-US" sz="1380" dirty="0">
+                <a:solidFill>
+                  <a:srgbClr val="17364A"/>
+                </a:solidFill>
+                <a:latin typeface="Aptos" pitchFamily="34" charset="0"/>
+                <a:ea typeface="Aptos" pitchFamily="34" charset="-122"/>
+                <a:cs typeface="Aptos" pitchFamily="34" charset="-120"/>
+              </a:rPr>
+              <a:t>Who currently has authority to make decisions about this issue, and is that authority.</a:t>
+            </a:r>
+            <a:endParaRPr lang="en-US" sz="1380" dirty="0"/>
+          </a:p>
+          <a:p>
+            <a:r>
+              <a:rPr lang="en-US" sz="1380" dirty="0">
+                <a:solidFill>
+                  <a:srgbClr val="17364A"/>
+                </a:solidFill>
+                <a:latin typeface="Aptos" pitchFamily="34" charset="0"/>
+                <a:ea typeface="Aptos" pitchFamily="34" charset="-122"/>
+                <a:cs typeface="Aptos" pitchFamily="34" charset="-120"/>
+              </a:rPr>
+              <a:t>What evidence would governance or leadership need before approving the use case?</a:t>
+            </a:r>
+            <a:endParaRPr lang="en-US" sz="1380" dirty="0"/>
+          </a:p>
+        </p:txBody>
       </p:sp>
       <p:sp>
         <p:nvSpPr>
           <p:cNvPr id="16" name="Shape 14"/>
-          <p:cNvSpPr/>
-          <p:nvPr/>
-        </p:nvSpPr>
-        <p:spPr>
-          <a:xfrm>
-            <a:off x="9198864" y="4206240"/>
-            <a:ext cx="347472" cy="347472"/>
-          </a:xfrm>
-          <a:prstGeom prst="ellipse">
-            <a:avLst/>
-          </a:prstGeom>
-          <a:solidFill>
-            <a:srgbClr val="2F8A28"/>
-          </a:solidFill>
-          <a:ln w="12700">
-            <a:solidFill>
-              <a:srgbClr val="2F8A28"/>
-            </a:solidFill>
-            <a:prstDash val="solid"/>
-          </a:ln>
-        </p:spPr>
-      </p:sp>
-      <p:sp>
-        <p:nvSpPr>
-          <p:cNvPr id="17" name="Text 15"/>
-          <p:cNvSpPr/>
-          <p:nvPr/>
-        </p:nvSpPr>
-        <p:spPr>
-          <a:xfrm>
-            <a:off x="7909560" y="3977640"/>
-            <a:ext cx="2926080" cy="182880"/>
-          </a:xfrm>
-          <a:prstGeom prst="rect">
-            <a:avLst/>
-          </a:prstGeom>
-          <a:noFill/>
-          <a:ln/>
-        </p:spPr>
-        <p:txBody>
-          <a:bodyPr wrap="square" lIns="0" tIns="0" rIns="0" bIns="0" rtlCol="0" anchor="ctr"/>
-          <a:lstStyle/>
-          <a:p>
-            <a:pPr algn="ctr" indent="0" marL="0">
-              <a:buNone/>
-            </a:pPr>
-            <a:r>
-              <a:rPr lang="en-US" sz="1000" dirty="0">
-                <a:solidFill>
-                  <a:srgbClr val="003A63"/>
-                </a:solidFill>
-                <a:latin typeface="Aptos" pitchFamily="34" charset="0"/>
-                <a:ea typeface="Aptos" pitchFamily="34" charset="-122"/>
-                <a:cs typeface="Aptos" pitchFamily="34" charset="-120"/>
-              </a:rPr>
-              <a:t>Concept to action</a:t>
-            </a:r>
-            <a:endParaRPr lang="en-US" sz="1000" dirty="0"/>
-          </a:p>
-        </p:txBody>
-      </p:sp>
-      <p:sp>
-        <p:nvSpPr>
-          <p:cNvPr id="18" name="Shape 16"/>
           <p:cNvSpPr/>
           <p:nvPr/>
         </p:nvSpPr>
@@ -5915,7 +5628,7 @@
       </p:sp>
       <p:sp>
         <p:nvSpPr>
-          <p:cNvPr id="19" name="Text 17"/>
+          <p:cNvPr id="17" name="Text 15"/>
           <p:cNvSpPr/>
           <p:nvPr/>
         </p:nvSpPr>
@@ -5954,7 +5667,7 @@
       </p:sp>
       <p:sp>
         <p:nvSpPr>
-          <p:cNvPr id="20" name="Text 18"/>
+          <p:cNvPr id="18" name="Text 16"/>
           <p:cNvSpPr/>
           <p:nvPr/>
         </p:nvSpPr>
@@ -6448,13 +6161,11 @@
             </a:avLst>
           </a:prstGeom>
           <a:solidFill>
-            <a:srgbClr val="FFFFFF">
-              <a:alpha val="88000"/>
-            </a:srgbClr>
+            <a:srgbClr val="FFFFFF"/>
           </a:solidFill>
           <a:ln w="12700">
             <a:solidFill>
-              <a:srgbClr val="D6E8F2"/>
+              <a:srgbClr val="B9D7E6"/>
             </a:solidFill>
             <a:prstDash val="solid"/>
           </a:ln>
@@ -6462,119 +6173,98 @@
       </p:sp>
       <p:sp>
         <p:nvSpPr>
-          <p:cNvPr id="14" name="Shape 12"/>
-          <p:cNvSpPr/>
-          <p:nvPr/>
-        </p:nvSpPr>
-        <p:spPr>
-          <a:xfrm>
-            <a:off x="8074152" y="3291840"/>
-            <a:ext cx="2596896" cy="749808"/>
-          </a:xfrm>
-          <a:prstGeom prst="rect">
-            <a:avLst/>
-          </a:prstGeom>
-          <a:solidFill>
-            <a:srgbClr val="EAF6F8"/>
-          </a:solidFill>
-          <a:ln w="12700">
-            <a:solidFill>
-              <a:srgbClr val="8ABBD8"/>
-            </a:solidFill>
-            <a:prstDash val="solid"/>
-          </a:ln>
-        </p:spPr>
-      </p:sp>
-      <p:sp>
-        <p:nvSpPr>
-          <p:cNvPr id="15" name="Shape 13"/>
-          <p:cNvSpPr/>
-          <p:nvPr/>
-        </p:nvSpPr>
-        <p:spPr>
-          <a:xfrm>
-            <a:off x="8202168" y="3721608"/>
-            <a:ext cx="2340864" cy="0"/>
-          </a:xfrm>
-          <a:prstGeom prst="line">
-            <a:avLst/>
-          </a:prstGeom>
-          <a:noFill/>
-          <a:ln w="19050">
-            <a:solidFill>
-              <a:srgbClr val="0068B7"/>
-            </a:solidFill>
-            <a:prstDash val="solid"/>
-          </a:ln>
-        </p:spPr>
+          <p:cNvPr id="14" name="Text 12"/>
+          <p:cNvSpPr/>
+          <p:nvPr/>
+        </p:nvSpPr>
+        <p:spPr>
+          <a:xfrm>
+            <a:off x="7799832" y="2935224"/>
+            <a:ext cx="3145536" cy="256032"/>
+          </a:xfrm>
+          <a:prstGeom prst="rect">
+            <a:avLst/>
+          </a:prstGeom>
+          <a:noFill/>
+          <a:ln/>
+        </p:spPr>
+        <p:txBody>
+          <a:bodyPr wrap="square" lIns="0" tIns="0" rIns="0" bIns="0" rtlCol="0" anchor="ctr"/>
+          <a:lstStyle/>
+          <a:p>
+            <a:pPr indent="0" marL="0">
+              <a:buNone/>
+            </a:pPr>
+            <a:r>
+              <a:rPr lang="en-US" sz="1300" b="1" dirty="0">
+                <a:solidFill>
+                  <a:srgbClr val="0068B7"/>
+                </a:solidFill>
+                <a:latin typeface="Aptos" pitchFamily="34" charset="0"/>
+                <a:ea typeface="Aptos" pitchFamily="34" charset="-122"/>
+                <a:cs typeface="Aptos" pitchFamily="34" charset="-120"/>
+              </a:rPr>
+              <a:t>Concept checkpoints</a:t>
+            </a:r>
+            <a:endParaRPr lang="en-US" sz="1300" dirty="0"/>
+          </a:p>
+        </p:txBody>
+      </p:sp>
+      <p:sp>
+        <p:nvSpPr>
+          <p:cNvPr id="15" name="Text 13"/>
+          <p:cNvSpPr/>
+          <p:nvPr/>
+        </p:nvSpPr>
+        <p:spPr>
+          <a:xfrm>
+            <a:off x="7818120" y="3300984"/>
+            <a:ext cx="3090672" cy="877824"/>
+          </a:xfrm>
+          <a:prstGeom prst="rect">
+            <a:avLst/>
+          </a:prstGeom>
+          <a:noFill/>
+          <a:ln/>
+        </p:spPr>
+        <p:txBody>
+          <a:bodyPr wrap="square" lIns="254" tIns="254" rIns="254" bIns="254" rtlCol="0" anchor="t">
+            <a:normAutofit/>
+          </a:bodyPr>
+          <a:lstStyle/>
+          <a:p>
+            <a:r>
+              <a:rPr lang="en-US" sz="1380" dirty="0">
+                <a:solidFill>
+                  <a:srgbClr val="17364A"/>
+                </a:solidFill>
+                <a:latin typeface="Aptos" pitchFamily="34" charset="0"/>
+                <a:ea typeface="Aptos" pitchFamily="34" charset="-122"/>
+                <a:cs typeface="Aptos" pitchFamily="34" charset="-120"/>
+              </a:rPr>
+              <a:t>Which staff, partners, or communities would be affected if this issue were handled poorly?</a:t>
+            </a:r>
+            <a:endParaRPr lang="en-US" sz="1380" dirty="0"/>
+          </a:p>
+          <a:p>
+            <a:r>
+              <a:rPr lang="en-US" sz="1380" dirty="0">
+                <a:solidFill>
+                  <a:srgbClr val="17364A"/>
+                </a:solidFill>
+                <a:latin typeface="Aptos" pitchFamily="34" charset="0"/>
+                <a:ea typeface="Aptos" pitchFamily="34" charset="-122"/>
+                <a:cs typeface="Aptos" pitchFamily="34" charset="-120"/>
+              </a:rPr>
+              <a:t>What policy, process, or artifact should be created or updated after this module?</a:t>
+            </a:r>
+            <a:endParaRPr lang="en-US" sz="1380" dirty="0"/>
+          </a:p>
+        </p:txBody>
       </p:sp>
       <p:sp>
         <p:nvSpPr>
           <p:cNvPr id="16" name="Shape 14"/>
-          <p:cNvSpPr/>
-          <p:nvPr/>
-        </p:nvSpPr>
-        <p:spPr>
-          <a:xfrm>
-            <a:off x="9198864" y="4206240"/>
-            <a:ext cx="347472" cy="347472"/>
-          </a:xfrm>
-          <a:prstGeom prst="ellipse">
-            <a:avLst/>
-          </a:prstGeom>
-          <a:solidFill>
-            <a:srgbClr val="2F8A28"/>
-          </a:solidFill>
-          <a:ln w="12700">
-            <a:solidFill>
-              <a:srgbClr val="2F8A28"/>
-            </a:solidFill>
-            <a:prstDash val="solid"/>
-          </a:ln>
-        </p:spPr>
-      </p:sp>
-      <p:sp>
-        <p:nvSpPr>
-          <p:cNvPr id="17" name="Text 15"/>
-          <p:cNvSpPr/>
-          <p:nvPr/>
-        </p:nvSpPr>
-        <p:spPr>
-          <a:xfrm>
-            <a:off x="7909560" y="3977640"/>
-            <a:ext cx="2926080" cy="182880"/>
-          </a:xfrm>
-          <a:prstGeom prst="rect">
-            <a:avLst/>
-          </a:prstGeom>
-          <a:noFill/>
-          <a:ln/>
-        </p:spPr>
-        <p:txBody>
-          <a:bodyPr wrap="square" lIns="0" tIns="0" rIns="0" bIns="0" rtlCol="0" anchor="ctr"/>
-          <a:lstStyle/>
-          <a:p>
-            <a:pPr algn="ctr" indent="0" marL="0">
-              <a:buNone/>
-            </a:pPr>
-            <a:r>
-              <a:rPr lang="en-US" sz="1000" dirty="0">
-                <a:solidFill>
-                  <a:srgbClr val="003A63"/>
-                </a:solidFill>
-                <a:latin typeface="Aptos" pitchFamily="34" charset="0"/>
-                <a:ea typeface="Aptos" pitchFamily="34" charset="-122"/>
-                <a:cs typeface="Aptos" pitchFamily="34" charset="-120"/>
-              </a:rPr>
-              <a:t>Concept to action</a:t>
-            </a:r>
-            <a:endParaRPr lang="en-US" sz="1000" dirty="0"/>
-          </a:p>
-        </p:txBody>
-      </p:sp>
-      <p:sp>
-        <p:nvSpPr>
-          <p:cNvPr id="18" name="Shape 16"/>
           <p:cNvSpPr/>
           <p:nvPr/>
         </p:nvSpPr>
@@ -6601,7 +6291,7 @@
       </p:sp>
       <p:sp>
         <p:nvSpPr>
-          <p:cNvPr id="19" name="Text 17"/>
+          <p:cNvPr id="17" name="Text 15"/>
           <p:cNvSpPr/>
           <p:nvPr/>
         </p:nvSpPr>
@@ -6640,7 +6330,7 @@
       </p:sp>
       <p:sp>
         <p:nvSpPr>
-          <p:cNvPr id="20" name="Text 18"/>
+          <p:cNvPr id="18" name="Text 16"/>
           <p:cNvSpPr/>
           <p:nvPr/>
         </p:nvSpPr>
@@ -7134,13 +6824,11 @@
             </a:avLst>
           </a:prstGeom>
           <a:solidFill>
-            <a:srgbClr val="FFFFFF">
-              <a:alpha val="88000"/>
-            </a:srgbClr>
+            <a:srgbClr val="FFFFFF"/>
           </a:solidFill>
           <a:ln w="12700">
             <a:solidFill>
-              <a:srgbClr val="D6E8F2"/>
+              <a:srgbClr val="B9D7E6"/>
             </a:solidFill>
             <a:prstDash val="solid"/>
           </a:ln>
@@ -7148,119 +6836,98 @@
       </p:sp>
       <p:sp>
         <p:nvSpPr>
-          <p:cNvPr id="14" name="Shape 12"/>
-          <p:cNvSpPr/>
-          <p:nvPr/>
-        </p:nvSpPr>
-        <p:spPr>
-          <a:xfrm>
-            <a:off x="8074152" y="3291840"/>
-            <a:ext cx="2596896" cy="749808"/>
-          </a:xfrm>
-          <a:prstGeom prst="rect">
-            <a:avLst/>
-          </a:prstGeom>
-          <a:solidFill>
-            <a:srgbClr val="EAF6F8"/>
-          </a:solidFill>
-          <a:ln w="12700">
-            <a:solidFill>
-              <a:srgbClr val="8ABBD8"/>
-            </a:solidFill>
-            <a:prstDash val="solid"/>
-          </a:ln>
-        </p:spPr>
-      </p:sp>
-      <p:sp>
-        <p:nvSpPr>
-          <p:cNvPr id="15" name="Shape 13"/>
-          <p:cNvSpPr/>
-          <p:nvPr/>
-        </p:nvSpPr>
-        <p:spPr>
-          <a:xfrm>
-            <a:off x="8202168" y="3721608"/>
-            <a:ext cx="2340864" cy="0"/>
-          </a:xfrm>
-          <a:prstGeom prst="line">
-            <a:avLst/>
-          </a:prstGeom>
-          <a:noFill/>
-          <a:ln w="19050">
-            <a:solidFill>
-              <a:srgbClr val="0068B7"/>
-            </a:solidFill>
-            <a:prstDash val="solid"/>
-          </a:ln>
-        </p:spPr>
+          <p:cNvPr id="14" name="Text 12"/>
+          <p:cNvSpPr/>
+          <p:nvPr/>
+        </p:nvSpPr>
+        <p:spPr>
+          <a:xfrm>
+            <a:off x="7799832" y="2935224"/>
+            <a:ext cx="3145536" cy="256032"/>
+          </a:xfrm>
+          <a:prstGeom prst="rect">
+            <a:avLst/>
+          </a:prstGeom>
+          <a:noFill/>
+          <a:ln/>
+        </p:spPr>
+        <p:txBody>
+          <a:bodyPr wrap="square" lIns="0" tIns="0" rIns="0" bIns="0" rtlCol="0" anchor="ctr"/>
+          <a:lstStyle/>
+          <a:p>
+            <a:pPr indent="0" marL="0">
+              <a:buNone/>
+            </a:pPr>
+            <a:r>
+              <a:rPr lang="en-US" sz="1300" b="1" dirty="0">
+                <a:solidFill>
+                  <a:srgbClr val="0068B7"/>
+                </a:solidFill>
+                <a:latin typeface="Aptos" pitchFamily="34" charset="0"/>
+                <a:ea typeface="Aptos" pitchFamily="34" charset="-122"/>
+                <a:cs typeface="Aptos" pitchFamily="34" charset="-120"/>
+              </a:rPr>
+              <a:t>Concept checkpoints</a:t>
+            </a:r>
+            <a:endParaRPr lang="en-US" sz="1300" dirty="0"/>
+          </a:p>
+        </p:txBody>
+      </p:sp>
+      <p:sp>
+        <p:nvSpPr>
+          <p:cNvPr id="15" name="Text 13"/>
+          <p:cNvSpPr/>
+          <p:nvPr/>
+        </p:nvSpPr>
+        <p:spPr>
+          <a:xfrm>
+            <a:off x="7818120" y="3300984"/>
+            <a:ext cx="3090672" cy="877824"/>
+          </a:xfrm>
+          <a:prstGeom prst="rect">
+            <a:avLst/>
+          </a:prstGeom>
+          <a:noFill/>
+          <a:ln/>
+        </p:spPr>
+        <p:txBody>
+          <a:bodyPr wrap="square" lIns="254" tIns="254" rIns="254" bIns="254" rtlCol="0" anchor="t">
+            <a:normAutofit/>
+          </a:bodyPr>
+          <a:lstStyle/>
+          <a:p>
+            <a:r>
+              <a:rPr lang="en-US" sz="1380" dirty="0">
+                <a:solidFill>
+                  <a:srgbClr val="17364A"/>
+                </a:solidFill>
+                <a:latin typeface="Aptos" pitchFamily="34" charset="0"/>
+                <a:ea typeface="Aptos" pitchFamily="34" charset="-122"/>
+                <a:cs typeface="Aptos" pitchFamily="34" charset="-120"/>
+              </a:rPr>
+              <a:t>Create a transparency reporting template and apply it to one AI use case.</a:t>
+            </a:r>
+            <a:endParaRPr lang="en-US" sz="1380" dirty="0"/>
+          </a:p>
+          <a:p>
+            <a:r>
+              <a:rPr lang="en-US" sz="1380" dirty="0">
+                <a:solidFill>
+                  <a:srgbClr val="17364A"/>
+                </a:solidFill>
+                <a:latin typeface="Aptos" pitchFamily="34" charset="0"/>
+                <a:ea typeface="Aptos" pitchFamily="34" charset="-122"/>
+                <a:cs typeface="Aptos" pitchFamily="34" charset="-120"/>
+              </a:rPr>
+              <a:t>Include purpose, owner, users, data categories, risk level, safeguards, human review,.</a:t>
+            </a:r>
+            <a:endParaRPr lang="en-US" sz="1380" dirty="0"/>
+          </a:p>
+        </p:txBody>
       </p:sp>
       <p:sp>
         <p:nvSpPr>
           <p:cNvPr id="16" name="Shape 14"/>
-          <p:cNvSpPr/>
-          <p:nvPr/>
-        </p:nvSpPr>
-        <p:spPr>
-          <a:xfrm>
-            <a:off x="9198864" y="4206240"/>
-            <a:ext cx="347472" cy="347472"/>
-          </a:xfrm>
-          <a:prstGeom prst="ellipse">
-            <a:avLst/>
-          </a:prstGeom>
-          <a:solidFill>
-            <a:srgbClr val="2F8A28"/>
-          </a:solidFill>
-          <a:ln w="12700">
-            <a:solidFill>
-              <a:srgbClr val="2F8A28"/>
-            </a:solidFill>
-            <a:prstDash val="solid"/>
-          </a:ln>
-        </p:spPr>
-      </p:sp>
-      <p:sp>
-        <p:nvSpPr>
-          <p:cNvPr id="17" name="Text 15"/>
-          <p:cNvSpPr/>
-          <p:nvPr/>
-        </p:nvSpPr>
-        <p:spPr>
-          <a:xfrm>
-            <a:off x="7909560" y="3977640"/>
-            <a:ext cx="2926080" cy="182880"/>
-          </a:xfrm>
-          <a:prstGeom prst="rect">
-            <a:avLst/>
-          </a:prstGeom>
-          <a:noFill/>
-          <a:ln/>
-        </p:spPr>
-        <p:txBody>
-          <a:bodyPr wrap="square" lIns="0" tIns="0" rIns="0" bIns="0" rtlCol="0" anchor="ctr"/>
-          <a:lstStyle/>
-          <a:p>
-            <a:pPr algn="ctr" indent="0" marL="0">
-              <a:buNone/>
-            </a:pPr>
-            <a:r>
-              <a:rPr lang="en-US" sz="1000" dirty="0">
-                <a:solidFill>
-                  <a:srgbClr val="003A63"/>
-                </a:solidFill>
-                <a:latin typeface="Aptos" pitchFamily="34" charset="0"/>
-                <a:ea typeface="Aptos" pitchFamily="34" charset="-122"/>
-                <a:cs typeface="Aptos" pitchFamily="34" charset="-120"/>
-              </a:rPr>
-              <a:t>Concept to action</a:t>
-            </a:r>
-            <a:endParaRPr lang="en-US" sz="1000" dirty="0"/>
-          </a:p>
-        </p:txBody>
-      </p:sp>
-      <p:sp>
-        <p:nvSpPr>
-          <p:cNvPr id="18" name="Shape 16"/>
           <p:cNvSpPr/>
           <p:nvPr/>
         </p:nvSpPr>
@@ -7287,7 +6954,7 @@
       </p:sp>
       <p:sp>
         <p:nvSpPr>
-          <p:cNvPr id="19" name="Text 17"/>
+          <p:cNvPr id="17" name="Text 15"/>
           <p:cNvSpPr/>
           <p:nvPr/>
         </p:nvSpPr>
@@ -7326,7 +6993,7 @@
       </p:sp>
       <p:sp>
         <p:nvSpPr>
-          <p:cNvPr id="20" name="Text 18"/>
+          <p:cNvPr id="18" name="Text 16"/>
           <p:cNvSpPr/>
           <p:nvPr/>
         </p:nvSpPr>
@@ -7834,13 +7501,11 @@
             </a:avLst>
           </a:prstGeom>
           <a:solidFill>
-            <a:srgbClr val="FFFFFF">
-              <a:alpha val="88000"/>
-            </a:srgbClr>
+            <a:srgbClr val="FFFFFF"/>
           </a:solidFill>
           <a:ln w="12700">
             <a:solidFill>
-              <a:srgbClr val="D6E8F2"/>
+              <a:srgbClr val="B9D7E6"/>
             </a:solidFill>
             <a:prstDash val="solid"/>
           </a:ln>
@@ -7848,119 +7513,98 @@
       </p:sp>
       <p:sp>
         <p:nvSpPr>
-          <p:cNvPr id="14" name="Shape 12"/>
-          <p:cNvSpPr/>
-          <p:nvPr/>
-        </p:nvSpPr>
-        <p:spPr>
-          <a:xfrm>
-            <a:off x="8074152" y="3291840"/>
-            <a:ext cx="2596896" cy="749808"/>
-          </a:xfrm>
-          <a:prstGeom prst="rect">
-            <a:avLst/>
-          </a:prstGeom>
-          <a:solidFill>
-            <a:srgbClr val="EAF6F8"/>
-          </a:solidFill>
-          <a:ln w="12700">
-            <a:solidFill>
-              <a:srgbClr val="8ABBD8"/>
-            </a:solidFill>
-            <a:prstDash val="solid"/>
-          </a:ln>
-        </p:spPr>
-      </p:sp>
-      <p:sp>
-        <p:nvSpPr>
-          <p:cNvPr id="15" name="Shape 13"/>
-          <p:cNvSpPr/>
-          <p:nvPr/>
-        </p:nvSpPr>
-        <p:spPr>
-          <a:xfrm>
-            <a:off x="8202168" y="3721608"/>
-            <a:ext cx="2340864" cy="0"/>
-          </a:xfrm>
-          <a:prstGeom prst="line">
-            <a:avLst/>
-          </a:prstGeom>
-          <a:noFill/>
-          <a:ln w="19050">
-            <a:solidFill>
-              <a:srgbClr val="0068B7"/>
-            </a:solidFill>
-            <a:prstDash val="solid"/>
-          </a:ln>
-        </p:spPr>
+          <p:cNvPr id="14" name="Text 12"/>
+          <p:cNvSpPr/>
+          <p:nvPr/>
+        </p:nvSpPr>
+        <p:spPr>
+          <a:xfrm>
+            <a:off x="7799832" y="2935224"/>
+            <a:ext cx="3145536" cy="256032"/>
+          </a:xfrm>
+          <a:prstGeom prst="rect">
+            <a:avLst/>
+          </a:prstGeom>
+          <a:noFill/>
+          <a:ln/>
+        </p:spPr>
+        <p:txBody>
+          <a:bodyPr wrap="square" lIns="0" tIns="0" rIns="0" bIns="0" rtlCol="0" anchor="ctr"/>
+          <a:lstStyle/>
+          <a:p>
+            <a:pPr indent="0" marL="0">
+              <a:buNone/>
+            </a:pPr>
+            <a:r>
+              <a:rPr lang="en-US" sz="1300" b="1" dirty="0">
+                <a:solidFill>
+                  <a:srgbClr val="0068B7"/>
+                </a:solidFill>
+                <a:latin typeface="Aptos" pitchFamily="34" charset="0"/>
+                <a:ea typeface="Aptos" pitchFamily="34" charset="-122"/>
+                <a:cs typeface="Aptos" pitchFamily="34" charset="-120"/>
+              </a:rPr>
+              <a:t>Concept checkpoints</a:t>
+            </a:r>
+            <a:endParaRPr lang="en-US" sz="1300" dirty="0"/>
+          </a:p>
+        </p:txBody>
+      </p:sp>
+      <p:sp>
+        <p:nvSpPr>
+          <p:cNvPr id="15" name="Text 13"/>
+          <p:cNvSpPr/>
+          <p:nvPr/>
+        </p:nvSpPr>
+        <p:spPr>
+          <a:xfrm>
+            <a:off x="7818120" y="3300984"/>
+            <a:ext cx="3090672" cy="877824"/>
+          </a:xfrm>
+          <a:prstGeom prst="rect">
+            <a:avLst/>
+          </a:prstGeom>
+          <a:noFill/>
+          <a:ln/>
+        </p:spPr>
+        <p:txBody>
+          <a:bodyPr wrap="square" lIns="254" tIns="254" rIns="254" bIns="254" rtlCol="0" anchor="t">
+            <a:normAutofit/>
+          </a:bodyPr>
+          <a:lstStyle/>
+          <a:p>
+            <a:r>
+              <a:rPr lang="en-US" sz="1380" dirty="0">
+                <a:solidFill>
+                  <a:srgbClr val="17364A"/>
+                </a:solidFill>
+                <a:latin typeface="Aptos" pitchFamily="34" charset="0"/>
+                <a:ea typeface="Aptos" pitchFamily="34" charset="-122"/>
+                <a:cs typeface="Aptos" pitchFamily="34" charset="-120"/>
+              </a:rPr>
+              <a:t>Document assumptions, unresolved questions, and which agency roles would need to review.</a:t>
+            </a:r>
+            <a:endParaRPr lang="en-US" sz="1380" dirty="0"/>
+          </a:p>
+          <a:p>
+            <a:r>
+              <a:rPr lang="en-US" sz="1380" dirty="0">
+                <a:solidFill>
+                  <a:srgbClr val="17364A"/>
+                </a:solidFill>
+                <a:latin typeface="Aptos" pitchFamily="34" charset="0"/>
+                <a:ea typeface="Aptos" pitchFamily="34" charset="-122"/>
+                <a:cs typeface="Aptos" pitchFamily="34" charset="-120"/>
+              </a:rPr>
+              <a:t>The exercise should produce a work product that could support governance review,.</a:t>
+            </a:r>
+            <a:endParaRPr lang="en-US" sz="1380" dirty="0"/>
+          </a:p>
+        </p:txBody>
       </p:sp>
       <p:sp>
         <p:nvSpPr>
           <p:cNvPr id="16" name="Shape 14"/>
-          <p:cNvSpPr/>
-          <p:nvPr/>
-        </p:nvSpPr>
-        <p:spPr>
-          <a:xfrm>
-            <a:off x="9198864" y="4206240"/>
-            <a:ext cx="347472" cy="347472"/>
-          </a:xfrm>
-          <a:prstGeom prst="ellipse">
-            <a:avLst/>
-          </a:prstGeom>
-          <a:solidFill>
-            <a:srgbClr val="2F8A28"/>
-          </a:solidFill>
-          <a:ln w="12700">
-            <a:solidFill>
-              <a:srgbClr val="2F8A28"/>
-            </a:solidFill>
-            <a:prstDash val="solid"/>
-          </a:ln>
-        </p:spPr>
-      </p:sp>
-      <p:sp>
-        <p:nvSpPr>
-          <p:cNvPr id="17" name="Text 15"/>
-          <p:cNvSpPr/>
-          <p:nvPr/>
-        </p:nvSpPr>
-        <p:spPr>
-          <a:xfrm>
-            <a:off x="7909560" y="3977640"/>
-            <a:ext cx="2926080" cy="182880"/>
-          </a:xfrm>
-          <a:prstGeom prst="rect">
-            <a:avLst/>
-          </a:prstGeom>
-          <a:noFill/>
-          <a:ln/>
-        </p:spPr>
-        <p:txBody>
-          <a:bodyPr wrap="square" lIns="0" tIns="0" rIns="0" bIns="0" rtlCol="0" anchor="ctr"/>
-          <a:lstStyle/>
-          <a:p>
-            <a:pPr algn="ctr" indent="0" marL="0">
-              <a:buNone/>
-            </a:pPr>
-            <a:r>
-              <a:rPr lang="en-US" sz="1000" dirty="0">
-                <a:solidFill>
-                  <a:srgbClr val="003A63"/>
-                </a:solidFill>
-                <a:latin typeface="Aptos" pitchFamily="34" charset="0"/>
-                <a:ea typeface="Aptos" pitchFamily="34" charset="-122"/>
-                <a:cs typeface="Aptos" pitchFamily="34" charset="-120"/>
-              </a:rPr>
-              <a:t>Concept to action</a:t>
-            </a:r>
-            <a:endParaRPr lang="en-US" sz="1000" dirty="0"/>
-          </a:p>
-        </p:txBody>
-      </p:sp>
-      <p:sp>
-        <p:nvSpPr>
-          <p:cNvPr id="18" name="Shape 16"/>
           <p:cNvSpPr/>
           <p:nvPr/>
         </p:nvSpPr>
@@ -7987,7 +7631,7 @@
       </p:sp>
       <p:sp>
         <p:nvSpPr>
-          <p:cNvPr id="19" name="Text 17"/>
+          <p:cNvPr id="17" name="Text 15"/>
           <p:cNvSpPr/>
           <p:nvPr/>
         </p:nvSpPr>
@@ -8026,7 +7670,7 @@
       </p:sp>
       <p:sp>
         <p:nvSpPr>
-          <p:cNvPr id="20" name="Text 18"/>
+          <p:cNvPr id="18" name="Text 16"/>
           <p:cNvSpPr/>
           <p:nvPr/>
         </p:nvSpPr>
@@ -8506,13 +8150,11 @@
             </a:avLst>
           </a:prstGeom>
           <a:solidFill>
-            <a:srgbClr val="FFFFFF">
-              <a:alpha val="88000"/>
-            </a:srgbClr>
+            <a:srgbClr val="FFFFFF"/>
           </a:solidFill>
           <a:ln w="12700">
             <a:solidFill>
-              <a:srgbClr val="D6E8F2"/>
+              <a:srgbClr val="B9D7E6"/>
             </a:solidFill>
             <a:prstDash val="solid"/>
           </a:ln>
@@ -8520,119 +8162,84 @@
       </p:sp>
       <p:sp>
         <p:nvSpPr>
-          <p:cNvPr id="14" name="Shape 12"/>
-          <p:cNvSpPr/>
-          <p:nvPr/>
-        </p:nvSpPr>
-        <p:spPr>
-          <a:xfrm>
-            <a:off x="8074152" y="3291840"/>
-            <a:ext cx="2596896" cy="749808"/>
-          </a:xfrm>
-          <a:prstGeom prst="rect">
-            <a:avLst/>
-          </a:prstGeom>
-          <a:solidFill>
-            <a:srgbClr val="EAF6F8"/>
-          </a:solidFill>
-          <a:ln w="12700">
-            <a:solidFill>
-              <a:srgbClr val="8ABBD8"/>
-            </a:solidFill>
-            <a:prstDash val="solid"/>
-          </a:ln>
-        </p:spPr>
-      </p:sp>
-      <p:sp>
-        <p:nvSpPr>
-          <p:cNvPr id="15" name="Shape 13"/>
-          <p:cNvSpPr/>
-          <p:nvPr/>
-        </p:nvSpPr>
-        <p:spPr>
-          <a:xfrm>
-            <a:off x="8202168" y="3721608"/>
-            <a:ext cx="2340864" cy="0"/>
-          </a:xfrm>
-          <a:prstGeom prst="line">
-            <a:avLst/>
-          </a:prstGeom>
-          <a:noFill/>
-          <a:ln w="19050">
-            <a:solidFill>
-              <a:srgbClr val="0068B7"/>
-            </a:solidFill>
-            <a:prstDash val="solid"/>
-          </a:ln>
-        </p:spPr>
+          <p:cNvPr id="14" name="Text 12"/>
+          <p:cNvSpPr/>
+          <p:nvPr/>
+        </p:nvSpPr>
+        <p:spPr>
+          <a:xfrm>
+            <a:off x="7799832" y="2935224"/>
+            <a:ext cx="3145536" cy="256032"/>
+          </a:xfrm>
+          <a:prstGeom prst="rect">
+            <a:avLst/>
+          </a:prstGeom>
+          <a:noFill/>
+          <a:ln/>
+        </p:spPr>
+        <p:txBody>
+          <a:bodyPr wrap="square" lIns="0" tIns="0" rIns="0" bIns="0" rtlCol="0" anchor="ctr"/>
+          <a:lstStyle/>
+          <a:p>
+            <a:pPr indent="0" marL="0">
+              <a:buNone/>
+            </a:pPr>
+            <a:r>
+              <a:rPr lang="en-US" sz="1300" b="1" dirty="0">
+                <a:solidFill>
+                  <a:srgbClr val="0068B7"/>
+                </a:solidFill>
+                <a:latin typeface="Aptos" pitchFamily="34" charset="0"/>
+                <a:ea typeface="Aptos" pitchFamily="34" charset="-122"/>
+                <a:cs typeface="Aptos" pitchFamily="34" charset="-120"/>
+              </a:rPr>
+              <a:t>Concept checkpoints</a:t>
+            </a:r>
+            <a:endParaRPr lang="en-US" sz="1300" dirty="0"/>
+          </a:p>
+        </p:txBody>
+      </p:sp>
+      <p:sp>
+        <p:nvSpPr>
+          <p:cNvPr id="15" name="Text 13"/>
+          <p:cNvSpPr/>
+          <p:nvPr/>
+        </p:nvSpPr>
+        <p:spPr>
+          <a:xfrm>
+            <a:off x="7818120" y="3300984"/>
+            <a:ext cx="3090672" cy="877824"/>
+          </a:xfrm>
+          <a:prstGeom prst="rect">
+            <a:avLst/>
+          </a:prstGeom>
+          <a:noFill/>
+          <a:ln/>
+        </p:spPr>
+        <p:txBody>
+          <a:bodyPr wrap="square" lIns="254" tIns="254" rIns="254" bIns="254" rtlCol="0" anchor="t">
+            <a:normAutofit/>
+          </a:bodyPr>
+          <a:lstStyle/>
+          <a:p>
+            <a:r>
+              <a:rPr lang="en-US" sz="1380" dirty="0">
+                <a:solidFill>
+                  <a:srgbClr val="17364A"/>
+                </a:solidFill>
+                <a:latin typeface="Aptos" pitchFamily="34" charset="0"/>
+                <a:ea typeface="Aptos" pitchFamily="34" charset="-122"/>
+                <a:cs typeface="Aptos" pitchFamily="34" charset="-120"/>
+              </a:rPr>
+              <a:t>AI transparency template; sample AI use registry entry; public notice draft; internal.</a:t>
+            </a:r>
+            <a:endParaRPr lang="en-US" sz="1380" dirty="0"/>
+          </a:p>
+        </p:txBody>
       </p:sp>
       <p:sp>
         <p:nvSpPr>
           <p:cNvPr id="16" name="Shape 14"/>
-          <p:cNvSpPr/>
-          <p:nvPr/>
-        </p:nvSpPr>
-        <p:spPr>
-          <a:xfrm>
-            <a:off x="9198864" y="4206240"/>
-            <a:ext cx="347472" cy="347472"/>
-          </a:xfrm>
-          <a:prstGeom prst="ellipse">
-            <a:avLst/>
-          </a:prstGeom>
-          <a:solidFill>
-            <a:srgbClr val="2F8A28"/>
-          </a:solidFill>
-          <a:ln w="12700">
-            <a:solidFill>
-              <a:srgbClr val="2F8A28"/>
-            </a:solidFill>
-            <a:prstDash val="solid"/>
-          </a:ln>
-        </p:spPr>
-      </p:sp>
-      <p:sp>
-        <p:nvSpPr>
-          <p:cNvPr id="17" name="Text 15"/>
-          <p:cNvSpPr/>
-          <p:nvPr/>
-        </p:nvSpPr>
-        <p:spPr>
-          <a:xfrm>
-            <a:off x="7909560" y="3977640"/>
-            <a:ext cx="2926080" cy="182880"/>
-          </a:xfrm>
-          <a:prstGeom prst="rect">
-            <a:avLst/>
-          </a:prstGeom>
-          <a:noFill/>
-          <a:ln/>
-        </p:spPr>
-        <p:txBody>
-          <a:bodyPr wrap="square" lIns="0" tIns="0" rIns="0" bIns="0" rtlCol="0" anchor="ctr"/>
-          <a:lstStyle/>
-          <a:p>
-            <a:pPr algn="ctr" indent="0" marL="0">
-              <a:buNone/>
-            </a:pPr>
-            <a:r>
-              <a:rPr lang="en-US" sz="1000" dirty="0">
-                <a:solidFill>
-                  <a:srgbClr val="003A63"/>
-                </a:solidFill>
-                <a:latin typeface="Aptos" pitchFamily="34" charset="0"/>
-                <a:ea typeface="Aptos" pitchFamily="34" charset="-122"/>
-                <a:cs typeface="Aptos" pitchFamily="34" charset="-120"/>
-              </a:rPr>
-              <a:t>Concept to action</a:t>
-            </a:r>
-            <a:endParaRPr lang="en-US" sz="1000" dirty="0"/>
-          </a:p>
-        </p:txBody>
-      </p:sp>
-      <p:sp>
-        <p:nvSpPr>
-          <p:cNvPr id="18" name="Shape 16"/>
           <p:cNvSpPr/>
           <p:nvPr/>
         </p:nvSpPr>
@@ -8659,7 +8266,7 @@
       </p:sp>
       <p:sp>
         <p:nvSpPr>
-          <p:cNvPr id="19" name="Text 17"/>
+          <p:cNvPr id="17" name="Text 15"/>
           <p:cNvSpPr/>
           <p:nvPr/>
         </p:nvSpPr>
@@ -8698,7 +8305,7 @@
       </p:sp>
       <p:sp>
         <p:nvSpPr>
-          <p:cNvPr id="20" name="Text 18"/>
+          <p:cNvPr id="18" name="Text 16"/>
           <p:cNvSpPr/>
           <p:nvPr/>
         </p:nvSpPr>
@@ -9178,13 +8785,11 @@
             </a:avLst>
           </a:prstGeom>
           <a:solidFill>
-            <a:srgbClr val="FFFFFF">
-              <a:alpha val="88000"/>
-            </a:srgbClr>
+            <a:srgbClr val="FFFFFF"/>
           </a:solidFill>
           <a:ln w="12700">
             <a:solidFill>
-              <a:srgbClr val="D6E8F2"/>
+              <a:srgbClr val="B9D7E6"/>
             </a:solidFill>
             <a:prstDash val="solid"/>
           </a:ln>
@@ -9192,119 +8797,84 @@
       </p:sp>
       <p:sp>
         <p:nvSpPr>
-          <p:cNvPr id="14" name="Shape 12"/>
-          <p:cNvSpPr/>
-          <p:nvPr/>
-        </p:nvSpPr>
-        <p:spPr>
-          <a:xfrm>
-            <a:off x="8074152" y="3291840"/>
-            <a:ext cx="2596896" cy="749808"/>
-          </a:xfrm>
-          <a:prstGeom prst="rect">
-            <a:avLst/>
-          </a:prstGeom>
-          <a:solidFill>
-            <a:srgbClr val="EAF6F8"/>
-          </a:solidFill>
-          <a:ln w="12700">
-            <a:solidFill>
-              <a:srgbClr val="8ABBD8"/>
-            </a:solidFill>
-            <a:prstDash val="solid"/>
-          </a:ln>
-        </p:spPr>
-      </p:sp>
-      <p:sp>
-        <p:nvSpPr>
-          <p:cNvPr id="15" name="Shape 13"/>
-          <p:cNvSpPr/>
-          <p:nvPr/>
-        </p:nvSpPr>
-        <p:spPr>
-          <a:xfrm>
-            <a:off x="8202168" y="3721608"/>
-            <a:ext cx="2340864" cy="0"/>
-          </a:xfrm>
-          <a:prstGeom prst="line">
-            <a:avLst/>
-          </a:prstGeom>
-          <a:noFill/>
-          <a:ln w="19050">
-            <a:solidFill>
-              <a:srgbClr val="0068B7"/>
-            </a:solidFill>
-            <a:prstDash val="solid"/>
-          </a:ln>
-        </p:spPr>
+          <p:cNvPr id="14" name="Text 12"/>
+          <p:cNvSpPr/>
+          <p:nvPr/>
+        </p:nvSpPr>
+        <p:spPr>
+          <a:xfrm>
+            <a:off x="7799832" y="2935224"/>
+            <a:ext cx="3145536" cy="256032"/>
+          </a:xfrm>
+          <a:prstGeom prst="rect">
+            <a:avLst/>
+          </a:prstGeom>
+          <a:noFill/>
+          <a:ln/>
+        </p:spPr>
+        <p:txBody>
+          <a:bodyPr wrap="square" lIns="0" tIns="0" rIns="0" bIns="0" rtlCol="0" anchor="ctr"/>
+          <a:lstStyle/>
+          <a:p>
+            <a:pPr indent="0" marL="0">
+              <a:buNone/>
+            </a:pPr>
+            <a:r>
+              <a:rPr lang="en-US" sz="1300" b="1" dirty="0">
+                <a:solidFill>
+                  <a:srgbClr val="0068B7"/>
+                </a:solidFill>
+                <a:latin typeface="Aptos" pitchFamily="34" charset="0"/>
+                <a:ea typeface="Aptos" pitchFamily="34" charset="-122"/>
+                <a:cs typeface="Aptos" pitchFamily="34" charset="-120"/>
+              </a:rPr>
+              <a:t>Concept checkpoints</a:t>
+            </a:r>
+            <a:endParaRPr lang="en-US" sz="1300" dirty="0"/>
+          </a:p>
+        </p:txBody>
+      </p:sp>
+      <p:sp>
+        <p:nvSpPr>
+          <p:cNvPr id="15" name="Text 13"/>
+          <p:cNvSpPr/>
+          <p:nvPr/>
+        </p:nvSpPr>
+        <p:spPr>
+          <a:xfrm>
+            <a:off x="7818120" y="3300984"/>
+            <a:ext cx="3090672" cy="877824"/>
+          </a:xfrm>
+          <a:prstGeom prst="rect">
+            <a:avLst/>
+          </a:prstGeom>
+          <a:noFill/>
+          <a:ln/>
+        </p:spPr>
+        <p:txBody>
+          <a:bodyPr wrap="square" lIns="254" tIns="254" rIns="254" bIns="254" rtlCol="0" anchor="t">
+            <a:normAutofit/>
+          </a:bodyPr>
+          <a:lstStyle/>
+          <a:p>
+            <a:r>
+              <a:rPr lang="en-US" sz="1380" dirty="0">
+                <a:solidFill>
+                  <a:srgbClr val="17364A"/>
+                </a:solidFill>
+                <a:latin typeface="Aptos" pitchFamily="34" charset="0"/>
+                <a:ea typeface="Aptos" pitchFamily="34" charset="-122"/>
+                <a:cs typeface="Aptos" pitchFamily="34" charset="-120"/>
+              </a:rPr>
+              <a:t>AI transparency template; sample AI use registry entry; public notice draft; internal.</a:t>
+            </a:r>
+            <a:endParaRPr lang="en-US" sz="1380" dirty="0"/>
+          </a:p>
+        </p:txBody>
       </p:sp>
       <p:sp>
         <p:nvSpPr>
           <p:cNvPr id="16" name="Shape 14"/>
-          <p:cNvSpPr/>
-          <p:nvPr/>
-        </p:nvSpPr>
-        <p:spPr>
-          <a:xfrm>
-            <a:off x="9198864" y="4206240"/>
-            <a:ext cx="347472" cy="347472"/>
-          </a:xfrm>
-          <a:prstGeom prst="ellipse">
-            <a:avLst/>
-          </a:prstGeom>
-          <a:solidFill>
-            <a:srgbClr val="2F8A28"/>
-          </a:solidFill>
-          <a:ln w="12700">
-            <a:solidFill>
-              <a:srgbClr val="2F8A28"/>
-            </a:solidFill>
-            <a:prstDash val="solid"/>
-          </a:ln>
-        </p:spPr>
-      </p:sp>
-      <p:sp>
-        <p:nvSpPr>
-          <p:cNvPr id="17" name="Text 15"/>
-          <p:cNvSpPr/>
-          <p:nvPr/>
-        </p:nvSpPr>
-        <p:spPr>
-          <a:xfrm>
-            <a:off x="7909560" y="3977640"/>
-            <a:ext cx="2926080" cy="182880"/>
-          </a:xfrm>
-          <a:prstGeom prst="rect">
-            <a:avLst/>
-          </a:prstGeom>
-          <a:noFill/>
-          <a:ln/>
-        </p:spPr>
-        <p:txBody>
-          <a:bodyPr wrap="square" lIns="0" tIns="0" rIns="0" bIns="0" rtlCol="0" anchor="ctr"/>
-          <a:lstStyle/>
-          <a:p>
-            <a:pPr algn="ctr" indent="0" marL="0">
-              <a:buNone/>
-            </a:pPr>
-            <a:r>
-              <a:rPr lang="en-US" sz="1000" dirty="0">
-                <a:solidFill>
-                  <a:srgbClr val="003A63"/>
-                </a:solidFill>
-                <a:latin typeface="Aptos" pitchFamily="34" charset="0"/>
-                <a:ea typeface="Aptos" pitchFamily="34" charset="-122"/>
-                <a:cs typeface="Aptos" pitchFamily="34" charset="-120"/>
-              </a:rPr>
-              <a:t>Concept to action</a:t>
-            </a:r>
-            <a:endParaRPr lang="en-US" sz="1000" dirty="0"/>
-          </a:p>
-        </p:txBody>
-      </p:sp>
-      <p:sp>
-        <p:nvSpPr>
-          <p:cNvPr id="18" name="Shape 16"/>
           <p:cNvSpPr/>
           <p:nvPr/>
         </p:nvSpPr>
@@ -9331,7 +8901,7 @@
       </p:sp>
       <p:sp>
         <p:nvSpPr>
-          <p:cNvPr id="19" name="Text 17"/>
+          <p:cNvPr id="17" name="Text 15"/>
           <p:cNvSpPr/>
           <p:nvPr/>
         </p:nvSpPr>
@@ -9370,7 +8940,7 @@
       </p:sp>
       <p:sp>
         <p:nvSpPr>
-          <p:cNvPr id="20" name="Text 18"/>
+          <p:cNvPr id="18" name="Text 16"/>
           <p:cNvSpPr/>
           <p:nvPr/>
         </p:nvSpPr>
@@ -9878,13 +9448,11 @@
             </a:avLst>
           </a:prstGeom>
           <a:solidFill>
-            <a:srgbClr val="FFFFFF">
-              <a:alpha val="88000"/>
-            </a:srgbClr>
+            <a:srgbClr val="FFFFFF"/>
           </a:solidFill>
           <a:ln w="12700">
             <a:solidFill>
-              <a:srgbClr val="D6E8F2"/>
+              <a:srgbClr val="B9D7E6"/>
             </a:solidFill>
             <a:prstDash val="solid"/>
           </a:ln>
@@ -9892,119 +9460,112 @@
       </p:sp>
       <p:sp>
         <p:nvSpPr>
-          <p:cNvPr id="14" name="Shape 12"/>
-          <p:cNvSpPr/>
-          <p:nvPr/>
-        </p:nvSpPr>
-        <p:spPr>
-          <a:xfrm>
-            <a:off x="8074152" y="3291840"/>
-            <a:ext cx="2596896" cy="749808"/>
-          </a:xfrm>
-          <a:prstGeom prst="rect">
-            <a:avLst/>
-          </a:prstGeom>
-          <a:solidFill>
-            <a:srgbClr val="EAF6F8"/>
-          </a:solidFill>
-          <a:ln w="12700">
-            <a:solidFill>
-              <a:srgbClr val="8ABBD8"/>
-            </a:solidFill>
-            <a:prstDash val="solid"/>
-          </a:ln>
-        </p:spPr>
-      </p:sp>
-      <p:sp>
-        <p:nvSpPr>
-          <p:cNvPr id="15" name="Shape 13"/>
-          <p:cNvSpPr/>
-          <p:nvPr/>
-        </p:nvSpPr>
-        <p:spPr>
-          <a:xfrm>
-            <a:off x="8202168" y="3721608"/>
-            <a:ext cx="2340864" cy="0"/>
-          </a:xfrm>
-          <a:prstGeom prst="line">
-            <a:avLst/>
-          </a:prstGeom>
-          <a:noFill/>
-          <a:ln w="19050">
-            <a:solidFill>
-              <a:srgbClr val="0068B7"/>
-            </a:solidFill>
-            <a:prstDash val="solid"/>
-          </a:ln>
-        </p:spPr>
+          <p:cNvPr id="14" name="Text 12"/>
+          <p:cNvSpPr/>
+          <p:nvPr/>
+        </p:nvSpPr>
+        <p:spPr>
+          <a:xfrm>
+            <a:off x="7799832" y="2935224"/>
+            <a:ext cx="3145536" cy="256032"/>
+          </a:xfrm>
+          <a:prstGeom prst="rect">
+            <a:avLst/>
+          </a:prstGeom>
+          <a:noFill/>
+          <a:ln/>
+        </p:spPr>
+        <p:txBody>
+          <a:bodyPr wrap="square" lIns="0" tIns="0" rIns="0" bIns="0" rtlCol="0" anchor="ctr"/>
+          <a:lstStyle/>
+          <a:p>
+            <a:pPr indent="0" marL="0">
+              <a:buNone/>
+            </a:pPr>
+            <a:r>
+              <a:rPr lang="en-US" sz="1300" b="1" dirty="0">
+                <a:solidFill>
+                  <a:srgbClr val="0068B7"/>
+                </a:solidFill>
+                <a:latin typeface="Aptos" pitchFamily="34" charset="0"/>
+                <a:ea typeface="Aptos" pitchFamily="34" charset="-122"/>
+                <a:cs typeface="Aptos" pitchFamily="34" charset="-120"/>
+              </a:rPr>
+              <a:t>Concept checkpoints</a:t>
+            </a:r>
+            <a:endParaRPr lang="en-US" sz="1300" dirty="0"/>
+          </a:p>
+        </p:txBody>
+      </p:sp>
+      <p:sp>
+        <p:nvSpPr>
+          <p:cNvPr id="15" name="Text 13"/>
+          <p:cNvSpPr/>
+          <p:nvPr/>
+        </p:nvSpPr>
+        <p:spPr>
+          <a:xfrm>
+            <a:off x="7818120" y="3300984"/>
+            <a:ext cx="3090672" cy="877824"/>
+          </a:xfrm>
+          <a:prstGeom prst="rect">
+            <a:avLst/>
+          </a:prstGeom>
+          <a:noFill/>
+          <a:ln/>
+        </p:spPr>
+        <p:txBody>
+          <a:bodyPr wrap="square" lIns="254" tIns="254" rIns="254" bIns="254" rtlCol="0" anchor="t">
+            <a:normAutofit/>
+          </a:bodyPr>
+          <a:lstStyle/>
+          <a:p>
+            <a:r>
+              <a:rPr lang="en-US" sz="1380" dirty="0">
+                <a:solidFill>
+                  <a:srgbClr val="17364A"/>
+                </a:solidFill>
+                <a:latin typeface="Aptos" pitchFamily="34" charset="0"/>
+                <a:ea typeface="Aptos" pitchFamily="34" charset="-122"/>
+                <a:cs typeface="Aptos" pitchFamily="34" charset="-120"/>
+              </a:rPr>
+              <a:t>1.</a:t>
+            </a:r>
+            <a:endParaRPr lang="en-US" sz="1380" dirty="0"/>
+          </a:p>
+          <a:p>
+            <a:r>
+              <a:rPr lang="en-US" sz="1380" dirty="0">
+                <a:solidFill>
+                  <a:srgbClr val="17364A"/>
+                </a:solidFill>
+                <a:latin typeface="Aptos" pitchFamily="34" charset="0"/>
+                <a:ea typeface="Aptos" pitchFamily="34" charset="-122"/>
+                <a:cs typeface="Aptos" pitchFamily="34" charset="-120"/>
+              </a:rPr>
+              <a:t>What is the strongest reason this module topic belongs in AI leadership and governance.</a:t>
+            </a:r>
+            <a:endParaRPr lang="en-US" sz="1380" dirty="0"/>
+          </a:p>
+          <a:p>
+            <a:r>
+              <a:rPr lang="en-US" sz="1380" dirty="0">
+                <a:solidFill>
+                  <a:srgbClr val="17364A"/>
+                </a:solidFill>
+                <a:latin typeface="Aptos" pitchFamily="34" charset="0"/>
+                <a:ea typeface="Aptos" pitchFamily="34" charset="-122"/>
+                <a:cs typeface="Aptos" pitchFamily="34" charset="-120"/>
+              </a:rPr>
+              <a:t>2.</a:t>
+            </a:r>
+            <a:endParaRPr lang="en-US" sz="1380" dirty="0"/>
+          </a:p>
+        </p:txBody>
       </p:sp>
       <p:sp>
         <p:nvSpPr>
           <p:cNvPr id="16" name="Shape 14"/>
-          <p:cNvSpPr/>
-          <p:nvPr/>
-        </p:nvSpPr>
-        <p:spPr>
-          <a:xfrm>
-            <a:off x="9198864" y="4206240"/>
-            <a:ext cx="347472" cy="347472"/>
-          </a:xfrm>
-          <a:prstGeom prst="ellipse">
-            <a:avLst/>
-          </a:prstGeom>
-          <a:solidFill>
-            <a:srgbClr val="2F8A28"/>
-          </a:solidFill>
-          <a:ln w="12700">
-            <a:solidFill>
-              <a:srgbClr val="2F8A28"/>
-            </a:solidFill>
-            <a:prstDash val="solid"/>
-          </a:ln>
-        </p:spPr>
-      </p:sp>
-      <p:sp>
-        <p:nvSpPr>
-          <p:cNvPr id="17" name="Text 15"/>
-          <p:cNvSpPr/>
-          <p:nvPr/>
-        </p:nvSpPr>
-        <p:spPr>
-          <a:xfrm>
-            <a:off x="7909560" y="3977640"/>
-            <a:ext cx="2926080" cy="182880"/>
-          </a:xfrm>
-          <a:prstGeom prst="rect">
-            <a:avLst/>
-          </a:prstGeom>
-          <a:noFill/>
-          <a:ln/>
-        </p:spPr>
-        <p:txBody>
-          <a:bodyPr wrap="square" lIns="0" tIns="0" rIns="0" bIns="0" rtlCol="0" anchor="ctr"/>
-          <a:lstStyle/>
-          <a:p>
-            <a:pPr algn="ctr" indent="0" marL="0">
-              <a:buNone/>
-            </a:pPr>
-            <a:r>
-              <a:rPr lang="en-US" sz="1000" dirty="0">
-                <a:solidFill>
-                  <a:srgbClr val="003A63"/>
-                </a:solidFill>
-                <a:latin typeface="Aptos" pitchFamily="34" charset="0"/>
-                <a:ea typeface="Aptos" pitchFamily="34" charset="-122"/>
-                <a:cs typeface="Aptos" pitchFamily="34" charset="-120"/>
-              </a:rPr>
-              <a:t>Concept to action</a:t>
-            </a:r>
-            <a:endParaRPr lang="en-US" sz="1000" dirty="0"/>
-          </a:p>
-        </p:txBody>
-      </p:sp>
-      <p:sp>
-        <p:nvSpPr>
-          <p:cNvPr id="18" name="Shape 16"/>
           <p:cNvSpPr/>
           <p:nvPr/>
         </p:nvSpPr>
@@ -10031,7 +9592,7 @@
       </p:sp>
       <p:sp>
         <p:nvSpPr>
-          <p:cNvPr id="19" name="Text 17"/>
+          <p:cNvPr id="17" name="Text 15"/>
           <p:cNvSpPr/>
           <p:nvPr/>
         </p:nvSpPr>
@@ -10070,7 +9631,7 @@
       </p:sp>
       <p:sp>
         <p:nvSpPr>
-          <p:cNvPr id="20" name="Text 18"/>
+          <p:cNvPr id="18" name="Text 16"/>
           <p:cNvSpPr/>
           <p:nvPr/>
         </p:nvSpPr>
@@ -10603,20 +10164,20 @@
         </p:nvSpPr>
         <p:spPr>
           <a:xfrm>
-            <a:off x="7635240" y="3730752"/>
-            <a:ext cx="1033272" cy="749808"/>
+            <a:off x="7909560" y="3675888"/>
+            <a:ext cx="3154680" cy="1691640"/>
           </a:xfrm>
           <a:prstGeom prst="roundRect">
             <a:avLst>
-              <a:gd name="adj" fmla="val 14634"/>
+              <a:gd name="adj" fmla="val 6486"/>
             </a:avLst>
           </a:prstGeom>
           <a:solidFill>
-            <a:srgbClr val="0068B7"/>
+            <a:srgbClr val="FFFFFF"/>
           </a:solidFill>
           <a:ln w="12700">
             <a:solidFill>
-              <a:srgbClr val="0068B7"/>
+              <a:srgbClr val="B9D7E6"/>
             </a:solidFill>
             <a:prstDash val="solid"/>
           </a:ln>
@@ -10630,172 +10191,100 @@
         </p:nvSpPr>
         <p:spPr>
           <a:xfrm>
-            <a:off x="7708392" y="3922776"/>
-            <a:ext cx="886968" cy="310896"/>
-          </a:xfrm>
-          <a:prstGeom prst="rect">
-            <a:avLst/>
-          </a:prstGeom>
-          <a:noFill/>
-          <a:ln/>
-        </p:spPr>
-        <p:txBody>
-          <a:bodyPr wrap="square" lIns="0" tIns="0" rIns="0" bIns="0" rtlCol="0" anchor="ctr">
+            <a:off x="8074152" y="3822192"/>
+            <a:ext cx="2825496" cy="256032"/>
+          </a:xfrm>
+          <a:prstGeom prst="rect">
+            <a:avLst/>
+          </a:prstGeom>
+          <a:noFill/>
+          <a:ln/>
+        </p:spPr>
+        <p:txBody>
+          <a:bodyPr wrap="square" lIns="0" tIns="0" rIns="0" bIns="0" rtlCol="0" anchor="ctr"/>
+          <a:lstStyle/>
+          <a:p>
+            <a:pPr indent="0" marL="0">
+              <a:buNone/>
+            </a:pPr>
+            <a:r>
+              <a:rPr lang="en-US" sz="1300" b="1" dirty="0">
+                <a:solidFill>
+                  <a:srgbClr val="0068B7"/>
+                </a:solidFill>
+                <a:latin typeface="Aptos" pitchFamily="34" charset="0"/>
+                <a:ea typeface="Aptos" pitchFamily="34" charset="-122"/>
+                <a:cs typeface="Aptos" pitchFamily="34" charset="-120"/>
+              </a:rPr>
+              <a:t>Learning sequence</a:t>
+            </a:r>
+            <a:endParaRPr lang="en-US" sz="1300" dirty="0"/>
+          </a:p>
+        </p:txBody>
+      </p:sp>
+      <p:sp>
+        <p:nvSpPr>
+          <p:cNvPr id="15" name="Text 13"/>
+          <p:cNvSpPr/>
+          <p:nvPr/>
+        </p:nvSpPr>
+        <p:spPr>
+          <a:xfrm>
+            <a:off x="8092440" y="4187952"/>
+            <a:ext cx="2770632" cy="1033272"/>
+          </a:xfrm>
+          <a:prstGeom prst="rect">
+            <a:avLst/>
+          </a:prstGeom>
+          <a:noFill/>
+          <a:ln/>
+        </p:spPr>
+        <p:txBody>
+          <a:bodyPr wrap="square" lIns="254" tIns="254" rIns="254" bIns="254" rtlCol="0" anchor="t">
             <a:normAutofit/>
           </a:bodyPr>
           <a:lstStyle/>
           <a:p>
-            <a:pPr algn="ctr" indent="0" marL="0">
-              <a:buNone/>
-            </a:pPr>
-            <a:r>
-              <a:rPr lang="en-US" sz="1500" b="1" dirty="0">
-                <a:solidFill>
-                  <a:srgbClr val="FFFFFF"/>
-                </a:solidFill>
-                <a:latin typeface="Aptos" pitchFamily="34" charset="0"/>
-                <a:ea typeface="Aptos" pitchFamily="34" charset="-122"/>
-                <a:cs typeface="Aptos" pitchFamily="34" charset="-120"/>
-              </a:rPr>
-              <a:t>Learn</a:t>
-            </a:r>
-            <a:endParaRPr lang="en-US" sz="1500" dirty="0"/>
-          </a:p>
-        </p:txBody>
-      </p:sp>
-      <p:sp>
-        <p:nvSpPr>
-          <p:cNvPr id="15" name="Shape 13"/>
-          <p:cNvSpPr/>
-          <p:nvPr/>
-        </p:nvSpPr>
-        <p:spPr>
-          <a:xfrm>
-            <a:off x="8924544" y="3730752"/>
-            <a:ext cx="1033272" cy="749808"/>
-          </a:xfrm>
-          <a:prstGeom prst="roundRect">
-            <a:avLst>
-              <a:gd name="adj" fmla="val 14634"/>
-            </a:avLst>
-          </a:prstGeom>
-          <a:solidFill>
-            <a:srgbClr val="2F8A28"/>
-          </a:solidFill>
-          <a:ln w="12700">
-            <a:solidFill>
-              <a:srgbClr val="2F8A28"/>
-            </a:solidFill>
-            <a:prstDash val="solid"/>
-          </a:ln>
-        </p:spPr>
-      </p:sp>
-      <p:sp>
-        <p:nvSpPr>
-          <p:cNvPr id="16" name="Text 14"/>
-          <p:cNvSpPr/>
-          <p:nvPr/>
-        </p:nvSpPr>
-        <p:spPr>
-          <a:xfrm>
-            <a:off x="8997696" y="3922776"/>
-            <a:ext cx="886968" cy="310896"/>
-          </a:xfrm>
-          <a:prstGeom prst="rect">
-            <a:avLst/>
-          </a:prstGeom>
-          <a:noFill/>
-          <a:ln/>
-        </p:spPr>
-        <p:txBody>
-          <a:bodyPr wrap="square" lIns="0" tIns="0" rIns="0" bIns="0" rtlCol="0" anchor="ctr">
-            <a:normAutofit/>
-          </a:bodyPr>
-          <a:lstStyle/>
-          <a:p>
-            <a:pPr algn="ctr" indent="0" marL="0">
-              <a:buNone/>
-            </a:pPr>
-            <a:r>
-              <a:rPr lang="en-US" sz="1500" b="1" dirty="0">
-                <a:solidFill>
-                  <a:srgbClr val="FFFFFF"/>
-                </a:solidFill>
-                <a:latin typeface="Aptos" pitchFamily="34" charset="0"/>
-                <a:ea typeface="Aptos" pitchFamily="34" charset="-122"/>
-                <a:cs typeface="Aptos" pitchFamily="34" charset="-120"/>
-              </a:rPr>
-              <a:t>Apply</a:t>
-            </a:r>
-            <a:endParaRPr lang="en-US" sz="1500" dirty="0"/>
-          </a:p>
-        </p:txBody>
-      </p:sp>
-      <p:sp>
-        <p:nvSpPr>
-          <p:cNvPr id="17" name="Shape 15"/>
-          <p:cNvSpPr/>
-          <p:nvPr/>
-        </p:nvSpPr>
-        <p:spPr>
-          <a:xfrm>
-            <a:off x="10213848" y="3730752"/>
-            <a:ext cx="1033272" cy="749808"/>
-          </a:xfrm>
-          <a:prstGeom prst="roundRect">
-            <a:avLst>
-              <a:gd name="adj" fmla="val 14634"/>
-            </a:avLst>
-          </a:prstGeom>
-          <a:solidFill>
-            <a:srgbClr val="6A4CA3"/>
-          </a:solidFill>
-          <a:ln w="12700">
-            <a:solidFill>
-              <a:srgbClr val="6A4CA3"/>
-            </a:solidFill>
-            <a:prstDash val="solid"/>
-          </a:ln>
-        </p:spPr>
-      </p:sp>
-      <p:sp>
-        <p:nvSpPr>
-          <p:cNvPr id="18" name="Text 16"/>
-          <p:cNvSpPr/>
-          <p:nvPr/>
-        </p:nvSpPr>
-        <p:spPr>
-          <a:xfrm>
-            <a:off x="10287000" y="3922776"/>
-            <a:ext cx="886968" cy="310896"/>
-          </a:xfrm>
-          <a:prstGeom prst="rect">
-            <a:avLst/>
-          </a:prstGeom>
-          <a:noFill/>
-          <a:ln/>
-        </p:spPr>
-        <p:txBody>
-          <a:bodyPr wrap="square" lIns="0" tIns="0" rIns="0" bIns="0" rtlCol="0" anchor="ctr">
-            <a:normAutofit/>
-          </a:bodyPr>
-          <a:lstStyle/>
-          <a:p>
-            <a:pPr algn="ctr" indent="0" marL="0">
-              <a:buNone/>
-            </a:pPr>
-            <a:r>
-              <a:rPr lang="en-US" sz="1500" b="1" dirty="0">
-                <a:solidFill>
-                  <a:srgbClr val="FFFFFF"/>
-                </a:solidFill>
-                <a:latin typeface="Aptos" pitchFamily="34" charset="0"/>
-                <a:ea typeface="Aptos" pitchFamily="34" charset="-122"/>
-                <a:cs typeface="Aptos" pitchFamily="34" charset="-120"/>
-              </a:rPr>
-              <a:t>Document</a:t>
-            </a:r>
-            <a:endParaRPr lang="en-US" sz="1500" dirty="0"/>
+            <a:r>
+              <a:rPr lang="en-US" sz="1380" dirty="0">
+                <a:solidFill>
+                  <a:srgbClr val="17364A"/>
+                </a:solidFill>
+                <a:latin typeface="Aptos" pitchFamily="34" charset="0"/>
+                <a:ea typeface="Aptos" pitchFamily="34" charset="-122"/>
+                <a:cs typeface="Aptos" pitchFamily="34" charset="-120"/>
+              </a:rPr>
+              <a:t>Read the module for shared vocabulary and context.</a:t>
+            </a:r>
+            <a:endParaRPr lang="en-US" sz="1380" dirty="0"/>
+          </a:p>
+          <a:p>
+            <a:r>
+              <a:rPr lang="en-US" sz="1380" dirty="0">
+                <a:solidFill>
+                  <a:srgbClr val="17364A"/>
+                </a:solidFill>
+                <a:latin typeface="Aptos" pitchFamily="34" charset="0"/>
+                <a:ea typeface="Aptos" pitchFamily="34" charset="-122"/>
+                <a:cs typeface="Aptos" pitchFamily="34" charset="-120"/>
+              </a:rPr>
+              <a:t>Complete the practical exercise to apply the concept.</a:t>
+            </a:r>
+            <a:endParaRPr lang="en-US" sz="1380" dirty="0"/>
+          </a:p>
+          <a:p>
+            <a:r>
+              <a:rPr lang="en-US" sz="1380" dirty="0">
+                <a:solidFill>
+                  <a:srgbClr val="17364A"/>
+                </a:solidFill>
+                <a:latin typeface="Aptos" pitchFamily="34" charset="0"/>
+                <a:ea typeface="Aptos" pitchFamily="34" charset="-122"/>
+                <a:cs typeface="Aptos" pitchFamily="34" charset="-120"/>
+              </a:rPr>
+              <a:t>Use the notes and references for deeper review.</a:t>
+            </a:r>
+            <a:endParaRPr lang="en-US" sz="1380" dirty="0"/>
           </a:p>
         </p:txBody>
       </p:sp>
@@ -11268,13 +10757,11 @@
             </a:avLst>
           </a:prstGeom>
           <a:solidFill>
-            <a:srgbClr val="FFFFFF">
-              <a:alpha val="88000"/>
-            </a:srgbClr>
+            <a:srgbClr val="FFFFFF"/>
           </a:solidFill>
           <a:ln w="12700">
             <a:solidFill>
-              <a:srgbClr val="D6E8F2"/>
+              <a:srgbClr val="B9D7E6"/>
             </a:solidFill>
             <a:prstDash val="solid"/>
           </a:ln>
@@ -11282,119 +10769,112 @@
       </p:sp>
       <p:sp>
         <p:nvSpPr>
-          <p:cNvPr id="14" name="Shape 12"/>
-          <p:cNvSpPr/>
-          <p:nvPr/>
-        </p:nvSpPr>
-        <p:spPr>
-          <a:xfrm>
-            <a:off x="8074152" y="3291840"/>
-            <a:ext cx="2596896" cy="749808"/>
-          </a:xfrm>
-          <a:prstGeom prst="rect">
-            <a:avLst/>
-          </a:prstGeom>
-          <a:solidFill>
-            <a:srgbClr val="EAF6F8"/>
-          </a:solidFill>
-          <a:ln w="12700">
-            <a:solidFill>
-              <a:srgbClr val="8ABBD8"/>
-            </a:solidFill>
-            <a:prstDash val="solid"/>
-          </a:ln>
-        </p:spPr>
-      </p:sp>
-      <p:sp>
-        <p:nvSpPr>
-          <p:cNvPr id="15" name="Shape 13"/>
-          <p:cNvSpPr/>
-          <p:nvPr/>
-        </p:nvSpPr>
-        <p:spPr>
-          <a:xfrm>
-            <a:off x="8202168" y="3721608"/>
-            <a:ext cx="2340864" cy="0"/>
-          </a:xfrm>
-          <a:prstGeom prst="line">
-            <a:avLst/>
-          </a:prstGeom>
-          <a:noFill/>
-          <a:ln w="19050">
-            <a:solidFill>
-              <a:srgbClr val="0068B7"/>
-            </a:solidFill>
-            <a:prstDash val="solid"/>
-          </a:ln>
-        </p:spPr>
+          <p:cNvPr id="14" name="Text 12"/>
+          <p:cNvSpPr/>
+          <p:nvPr/>
+        </p:nvSpPr>
+        <p:spPr>
+          <a:xfrm>
+            <a:off x="7799832" y="2935224"/>
+            <a:ext cx="3145536" cy="256032"/>
+          </a:xfrm>
+          <a:prstGeom prst="rect">
+            <a:avLst/>
+          </a:prstGeom>
+          <a:noFill/>
+          <a:ln/>
+        </p:spPr>
+        <p:txBody>
+          <a:bodyPr wrap="square" lIns="0" tIns="0" rIns="0" bIns="0" rtlCol="0" anchor="ctr"/>
+          <a:lstStyle/>
+          <a:p>
+            <a:pPr indent="0" marL="0">
+              <a:buNone/>
+            </a:pPr>
+            <a:r>
+              <a:rPr lang="en-US" sz="1300" b="1" dirty="0">
+                <a:solidFill>
+                  <a:srgbClr val="0068B7"/>
+                </a:solidFill>
+                <a:latin typeface="Aptos" pitchFamily="34" charset="0"/>
+                <a:ea typeface="Aptos" pitchFamily="34" charset="-122"/>
+                <a:cs typeface="Aptos" pitchFamily="34" charset="-120"/>
+              </a:rPr>
+              <a:t>Concept checkpoints</a:t>
+            </a:r>
+            <a:endParaRPr lang="en-US" sz="1300" dirty="0"/>
+          </a:p>
+        </p:txBody>
+      </p:sp>
+      <p:sp>
+        <p:nvSpPr>
+          <p:cNvPr id="15" name="Text 13"/>
+          <p:cNvSpPr/>
+          <p:nvPr/>
+        </p:nvSpPr>
+        <p:spPr>
+          <a:xfrm>
+            <a:off x="7818120" y="3300984"/>
+            <a:ext cx="3090672" cy="877824"/>
+          </a:xfrm>
+          <a:prstGeom prst="rect">
+            <a:avLst/>
+          </a:prstGeom>
+          <a:noFill/>
+          <a:ln/>
+        </p:spPr>
+        <p:txBody>
+          <a:bodyPr wrap="square" lIns="254" tIns="254" rIns="254" bIns="254" rtlCol="0" anchor="t">
+            <a:normAutofit/>
+          </a:bodyPr>
+          <a:lstStyle/>
+          <a:p>
+            <a:r>
+              <a:rPr lang="en-US" sz="1380" dirty="0">
+                <a:solidFill>
+                  <a:srgbClr val="17364A"/>
+                </a:solidFill>
+                <a:latin typeface="Aptos" pitchFamily="34" charset="0"/>
+                <a:ea typeface="Aptos" pitchFamily="34" charset="-122"/>
+                <a:cs typeface="Aptos" pitchFamily="34" charset="-120"/>
+              </a:rPr>
+              <a:t>NIST Artificial Intelligence Risk Management Framework (AI RMF 1.0):.</a:t>
+            </a:r>
+            <a:endParaRPr lang="en-US" sz="1380" dirty="0"/>
+          </a:p>
+          <a:p>
+            <a:r>
+              <a:rPr lang="en-US" sz="1380" dirty="0">
+                <a:solidFill>
+                  <a:srgbClr val="17364A"/>
+                </a:solidFill>
+                <a:latin typeface="Aptos" pitchFamily="34" charset="0"/>
+                <a:ea typeface="Aptos" pitchFamily="34" charset="-122"/>
+                <a:cs typeface="Aptos" pitchFamily="34" charset="-120"/>
+              </a:rPr>
+              <a:t>CDC Public Health Data Strategy and Data Modernization resources:.</a:t>
+            </a:r>
+            <a:endParaRPr lang="en-US" sz="1380" dirty="0"/>
+          </a:p>
+          <a:p>
+            <a:r>
+              <a:rPr lang="en-US" sz="1380" dirty="0">
+                <a:solidFill>
+                  <a:srgbClr val="17364A"/>
+                </a:solidFill>
+                <a:latin typeface="Aptos" pitchFamily="34" charset="0"/>
+                <a:ea typeface="Aptos" pitchFamily="34" charset="-122"/>
+                <a:cs typeface="Aptos" pitchFamily="34" charset="-120"/>
+              </a:rPr>
+              <a:t>WHO Ethics and Governance of Artificial Intelligence for Health:.</a:t>
+            </a:r>
+            <a:endParaRPr lang="en-US" sz="1380" dirty="0"/>
+          </a:p>
+        </p:txBody>
       </p:sp>
       <p:sp>
         <p:nvSpPr>
           <p:cNvPr id="16" name="Shape 14"/>
-          <p:cNvSpPr/>
-          <p:nvPr/>
-        </p:nvSpPr>
-        <p:spPr>
-          <a:xfrm>
-            <a:off x="9198864" y="4206240"/>
-            <a:ext cx="347472" cy="347472"/>
-          </a:xfrm>
-          <a:prstGeom prst="ellipse">
-            <a:avLst/>
-          </a:prstGeom>
-          <a:solidFill>
-            <a:srgbClr val="2F8A28"/>
-          </a:solidFill>
-          <a:ln w="12700">
-            <a:solidFill>
-              <a:srgbClr val="2F8A28"/>
-            </a:solidFill>
-            <a:prstDash val="solid"/>
-          </a:ln>
-        </p:spPr>
-      </p:sp>
-      <p:sp>
-        <p:nvSpPr>
-          <p:cNvPr id="17" name="Text 15"/>
-          <p:cNvSpPr/>
-          <p:nvPr/>
-        </p:nvSpPr>
-        <p:spPr>
-          <a:xfrm>
-            <a:off x="7909560" y="3977640"/>
-            <a:ext cx="2926080" cy="182880"/>
-          </a:xfrm>
-          <a:prstGeom prst="rect">
-            <a:avLst/>
-          </a:prstGeom>
-          <a:noFill/>
-          <a:ln/>
-        </p:spPr>
-        <p:txBody>
-          <a:bodyPr wrap="square" lIns="0" tIns="0" rIns="0" bIns="0" rtlCol="0" anchor="ctr"/>
-          <a:lstStyle/>
-          <a:p>
-            <a:pPr algn="ctr" indent="0" marL="0">
-              <a:buNone/>
-            </a:pPr>
-            <a:r>
-              <a:rPr lang="en-US" sz="1000" dirty="0">
-                <a:solidFill>
-                  <a:srgbClr val="003A63"/>
-                </a:solidFill>
-                <a:latin typeface="Aptos" pitchFamily="34" charset="0"/>
-                <a:ea typeface="Aptos" pitchFamily="34" charset="-122"/>
-                <a:cs typeface="Aptos" pitchFamily="34" charset="-120"/>
-              </a:rPr>
-              <a:t>Concept to action</a:t>
-            </a:r>
-            <a:endParaRPr lang="en-US" sz="1000" dirty="0"/>
-          </a:p>
-        </p:txBody>
-      </p:sp>
-      <p:sp>
-        <p:nvSpPr>
-          <p:cNvPr id="18" name="Shape 16"/>
           <p:cNvSpPr/>
           <p:nvPr/>
         </p:nvSpPr>
@@ -11421,7 +10901,7 @@
       </p:sp>
       <p:sp>
         <p:nvSpPr>
-          <p:cNvPr id="19" name="Text 17"/>
+          <p:cNvPr id="17" name="Text 15"/>
           <p:cNvSpPr/>
           <p:nvPr/>
         </p:nvSpPr>
@@ -11460,7 +10940,7 @@
       </p:sp>
       <p:sp>
         <p:nvSpPr>
-          <p:cNvPr id="20" name="Text 18"/>
+          <p:cNvPr id="18" name="Text 16"/>
           <p:cNvSpPr/>
           <p:nvPr/>
         </p:nvSpPr>
@@ -11954,13 +11434,11 @@
             </a:avLst>
           </a:prstGeom>
           <a:solidFill>
-            <a:srgbClr val="FFFFFF">
-              <a:alpha val="88000"/>
-            </a:srgbClr>
+            <a:srgbClr val="FFFFFF"/>
           </a:solidFill>
           <a:ln w="12700">
             <a:solidFill>
-              <a:srgbClr val="D6E8F2"/>
+              <a:srgbClr val="B9D7E6"/>
             </a:solidFill>
             <a:prstDash val="solid"/>
           </a:ln>
@@ -11968,119 +11446,98 @@
       </p:sp>
       <p:sp>
         <p:nvSpPr>
-          <p:cNvPr id="14" name="Shape 12"/>
-          <p:cNvSpPr/>
-          <p:nvPr/>
-        </p:nvSpPr>
-        <p:spPr>
-          <a:xfrm>
-            <a:off x="8074152" y="3291840"/>
-            <a:ext cx="2596896" cy="749808"/>
-          </a:xfrm>
-          <a:prstGeom prst="rect">
-            <a:avLst/>
-          </a:prstGeom>
-          <a:solidFill>
-            <a:srgbClr val="EAF6F8"/>
-          </a:solidFill>
-          <a:ln w="12700">
-            <a:solidFill>
-              <a:srgbClr val="8ABBD8"/>
-            </a:solidFill>
-            <a:prstDash val="solid"/>
-          </a:ln>
-        </p:spPr>
-      </p:sp>
-      <p:sp>
-        <p:nvSpPr>
-          <p:cNvPr id="15" name="Shape 13"/>
-          <p:cNvSpPr/>
-          <p:nvPr/>
-        </p:nvSpPr>
-        <p:spPr>
-          <a:xfrm>
-            <a:off x="8202168" y="3721608"/>
-            <a:ext cx="2340864" cy="0"/>
-          </a:xfrm>
-          <a:prstGeom prst="line">
-            <a:avLst/>
-          </a:prstGeom>
-          <a:noFill/>
-          <a:ln w="19050">
-            <a:solidFill>
-              <a:srgbClr val="0068B7"/>
-            </a:solidFill>
-            <a:prstDash val="solid"/>
-          </a:ln>
-        </p:spPr>
+          <p:cNvPr id="14" name="Text 12"/>
+          <p:cNvSpPr/>
+          <p:nvPr/>
+        </p:nvSpPr>
+        <p:spPr>
+          <a:xfrm>
+            <a:off x="7799832" y="2935224"/>
+            <a:ext cx="3145536" cy="256032"/>
+          </a:xfrm>
+          <a:prstGeom prst="rect">
+            <a:avLst/>
+          </a:prstGeom>
+          <a:noFill/>
+          <a:ln/>
+        </p:spPr>
+        <p:txBody>
+          <a:bodyPr wrap="square" lIns="0" tIns="0" rIns="0" bIns="0" rtlCol="0" anchor="ctr"/>
+          <a:lstStyle/>
+          <a:p>
+            <a:pPr indent="0" marL="0">
+              <a:buNone/>
+            </a:pPr>
+            <a:r>
+              <a:rPr lang="en-US" sz="1300" b="1" dirty="0">
+                <a:solidFill>
+                  <a:srgbClr val="0068B7"/>
+                </a:solidFill>
+                <a:latin typeface="Aptos" pitchFamily="34" charset="0"/>
+                <a:ea typeface="Aptos" pitchFamily="34" charset="-122"/>
+                <a:cs typeface="Aptos" pitchFamily="34" charset="-120"/>
+              </a:rPr>
+              <a:t>Concept checkpoints</a:t>
+            </a:r>
+            <a:endParaRPr lang="en-US" sz="1300" dirty="0"/>
+          </a:p>
+        </p:txBody>
+      </p:sp>
+      <p:sp>
+        <p:nvSpPr>
+          <p:cNvPr id="15" name="Text 13"/>
+          <p:cNvSpPr/>
+          <p:nvPr/>
+        </p:nvSpPr>
+        <p:spPr>
+          <a:xfrm>
+            <a:off x="7818120" y="3300984"/>
+            <a:ext cx="3090672" cy="877824"/>
+          </a:xfrm>
+          <a:prstGeom prst="rect">
+            <a:avLst/>
+          </a:prstGeom>
+          <a:noFill/>
+          <a:ln/>
+        </p:spPr>
+        <p:txBody>
+          <a:bodyPr wrap="square" lIns="254" tIns="254" rIns="254" bIns="254" rtlCol="0" anchor="t">
+            <a:normAutofit/>
+          </a:bodyPr>
+          <a:lstStyle/>
+          <a:p>
+            <a:r>
+              <a:rPr lang="en-US" sz="1380" dirty="0">
+                <a:solidFill>
+                  <a:srgbClr val="17364A"/>
+                </a:solidFill>
+                <a:latin typeface="Aptos" pitchFamily="34" charset="0"/>
+                <a:ea typeface="Aptos" pitchFamily="34" charset="-122"/>
+                <a:cs typeface="Aptos" pitchFamily="34" charset="-120"/>
+              </a:rPr>
+              <a:t>OMB Memorandum M-24-10 on federal AI governance, risk management, and innovation, where.</a:t>
+            </a:r>
+            <a:endParaRPr lang="en-US" sz="1380" dirty="0"/>
+          </a:p>
+          <a:p>
+            <a:r>
+              <a:rPr lang="en-US" sz="1380" dirty="0">
+                <a:solidFill>
+                  <a:srgbClr val="17364A"/>
+                </a:solidFill>
+                <a:latin typeface="Aptos" pitchFamily="34" charset="0"/>
+                <a:ea typeface="Aptos" pitchFamily="34" charset="-122"/>
+                <a:cs typeface="Aptos" pitchFamily="34" charset="-120"/>
+              </a:rPr>
+              <a:t>Agency strategic plans, procurement policies, privacy policies, cybersecurity policies,.</a:t>
+            </a:r>
+            <a:endParaRPr lang="en-US" sz="1380" dirty="0"/>
+          </a:p>
+        </p:txBody>
       </p:sp>
       <p:sp>
         <p:nvSpPr>
           <p:cNvPr id="16" name="Shape 14"/>
-          <p:cNvSpPr/>
-          <p:nvPr/>
-        </p:nvSpPr>
-        <p:spPr>
-          <a:xfrm>
-            <a:off x="9198864" y="4206240"/>
-            <a:ext cx="347472" cy="347472"/>
-          </a:xfrm>
-          <a:prstGeom prst="ellipse">
-            <a:avLst/>
-          </a:prstGeom>
-          <a:solidFill>
-            <a:srgbClr val="2F8A28"/>
-          </a:solidFill>
-          <a:ln w="12700">
-            <a:solidFill>
-              <a:srgbClr val="2F8A28"/>
-            </a:solidFill>
-            <a:prstDash val="solid"/>
-          </a:ln>
-        </p:spPr>
-      </p:sp>
-      <p:sp>
-        <p:nvSpPr>
-          <p:cNvPr id="17" name="Text 15"/>
-          <p:cNvSpPr/>
-          <p:nvPr/>
-        </p:nvSpPr>
-        <p:spPr>
-          <a:xfrm>
-            <a:off x="7909560" y="3977640"/>
-            <a:ext cx="2926080" cy="182880"/>
-          </a:xfrm>
-          <a:prstGeom prst="rect">
-            <a:avLst/>
-          </a:prstGeom>
-          <a:noFill/>
-          <a:ln/>
-        </p:spPr>
-        <p:txBody>
-          <a:bodyPr wrap="square" lIns="0" tIns="0" rIns="0" bIns="0" rtlCol="0" anchor="ctr"/>
-          <a:lstStyle/>
-          <a:p>
-            <a:pPr algn="ctr" indent="0" marL="0">
-              <a:buNone/>
-            </a:pPr>
-            <a:r>
-              <a:rPr lang="en-US" sz="1000" dirty="0">
-                <a:solidFill>
-                  <a:srgbClr val="003A63"/>
-                </a:solidFill>
-                <a:latin typeface="Aptos" pitchFamily="34" charset="0"/>
-                <a:ea typeface="Aptos" pitchFamily="34" charset="-122"/>
-                <a:cs typeface="Aptos" pitchFamily="34" charset="-120"/>
-              </a:rPr>
-              <a:t>Concept to action</a:t>
-            </a:r>
-            <a:endParaRPr lang="en-US" sz="1000" dirty="0"/>
-          </a:p>
-        </p:txBody>
-      </p:sp>
-      <p:sp>
-        <p:nvSpPr>
-          <p:cNvPr id="18" name="Shape 16"/>
           <p:cNvSpPr/>
           <p:nvPr/>
         </p:nvSpPr>
@@ -12107,7 +11564,7 @@
       </p:sp>
       <p:sp>
         <p:nvSpPr>
-          <p:cNvPr id="19" name="Text 17"/>
+          <p:cNvPr id="17" name="Text 15"/>
           <p:cNvSpPr/>
           <p:nvPr/>
         </p:nvSpPr>
@@ -12146,7 +11603,7 @@
       </p:sp>
       <p:sp>
         <p:nvSpPr>
-          <p:cNvPr id="20" name="Text 18"/>
+          <p:cNvPr id="18" name="Text 16"/>
           <p:cNvSpPr/>
           <p:nvPr/>
         </p:nvSpPr>
@@ -12659,20 +12116,20 @@
         </p:nvSpPr>
         <p:spPr>
           <a:xfrm>
-            <a:off x="7818120" y="3977640"/>
-            <a:ext cx="972312" cy="749808"/>
+            <a:off x="8046720" y="3794760"/>
+            <a:ext cx="3063240" cy="1600200"/>
           </a:xfrm>
           <a:prstGeom prst="roundRect">
             <a:avLst>
-              <a:gd name="adj" fmla="val 14634"/>
+              <a:gd name="adj" fmla="val 6857"/>
             </a:avLst>
           </a:prstGeom>
           <a:solidFill>
-            <a:srgbClr val="0068B7"/>
+            <a:srgbClr val="FFFFFF"/>
           </a:solidFill>
           <a:ln w="12700">
             <a:solidFill>
-              <a:srgbClr val="0068B7"/>
+              <a:srgbClr val="B9D7E6"/>
             </a:solidFill>
             <a:prstDash val="solid"/>
           </a:ln>
@@ -12686,172 +12143,100 @@
         </p:nvSpPr>
         <p:spPr>
           <a:xfrm>
-            <a:off x="7891272" y="4169664"/>
-            <a:ext cx="826008" cy="310896"/>
-          </a:xfrm>
-          <a:prstGeom prst="rect">
-            <a:avLst/>
-          </a:prstGeom>
-          <a:noFill/>
-          <a:ln/>
-        </p:spPr>
-        <p:txBody>
-          <a:bodyPr wrap="square" lIns="0" tIns="0" rIns="0" bIns="0" rtlCol="0" anchor="ctr">
+            <a:off x="8211312" y="3941064"/>
+            <a:ext cx="2734056" cy="256032"/>
+          </a:xfrm>
+          <a:prstGeom prst="rect">
+            <a:avLst/>
+          </a:prstGeom>
+          <a:noFill/>
+          <a:ln/>
+        </p:spPr>
+        <p:txBody>
+          <a:bodyPr wrap="square" lIns="0" tIns="0" rIns="0" bIns="0" rtlCol="0" anchor="ctr"/>
+          <a:lstStyle/>
+          <a:p>
+            <a:pPr indent="0" marL="0">
+              <a:buNone/>
+            </a:pPr>
+            <a:r>
+              <a:rPr lang="en-US" sz="1300" b="1" dirty="0">
+                <a:solidFill>
+                  <a:srgbClr val="0068B7"/>
+                </a:solidFill>
+                <a:latin typeface="Aptos" pitchFamily="34" charset="0"/>
+                <a:ea typeface="Aptos" pitchFamily="34" charset="-122"/>
+                <a:cs typeface="Aptos" pitchFamily="34" charset="-120"/>
+              </a:rPr>
+              <a:t>Use the play links to</a:t>
+            </a:r>
+            <a:endParaRPr lang="en-US" sz="1300" dirty="0"/>
+          </a:p>
+        </p:txBody>
+      </p:sp>
+      <p:sp>
+        <p:nvSpPr>
+          <p:cNvPr id="15" name="Text 13"/>
+          <p:cNvSpPr/>
+          <p:nvPr/>
+        </p:nvSpPr>
+        <p:spPr>
+          <a:xfrm>
+            <a:off x="8229600" y="4306824"/>
+            <a:ext cx="2679192" cy="941832"/>
+          </a:xfrm>
+          <a:prstGeom prst="rect">
+            <a:avLst/>
+          </a:prstGeom>
+          <a:noFill/>
+          <a:ln/>
+        </p:spPr>
+        <p:txBody>
+          <a:bodyPr wrap="square" lIns="254" tIns="254" rIns="254" bIns="254" rtlCol="0" anchor="t">
             <a:normAutofit/>
           </a:bodyPr>
           <a:lstStyle/>
           <a:p>
-            <a:pPr algn="ctr" indent="0" marL="0">
-              <a:buNone/>
-            </a:pPr>
-            <a:r>
-              <a:rPr lang="en-US" sz="1500" b="1" dirty="0">
-                <a:solidFill>
-                  <a:srgbClr val="FFFFFF"/>
-                </a:solidFill>
-                <a:latin typeface="Aptos" pitchFamily="34" charset="0"/>
-                <a:ea typeface="Aptos" pitchFamily="34" charset="-122"/>
-                <a:cs typeface="Aptos" pitchFamily="34" charset="-120"/>
-              </a:rPr>
-              <a:t>Lesson</a:t>
-            </a:r>
-            <a:endParaRPr lang="en-US" sz="1500" dirty="0"/>
-          </a:p>
-        </p:txBody>
-      </p:sp>
-      <p:sp>
-        <p:nvSpPr>
-          <p:cNvPr id="15" name="Shape 13"/>
-          <p:cNvSpPr/>
-          <p:nvPr/>
-        </p:nvSpPr>
-        <p:spPr>
-          <a:xfrm>
-            <a:off x="9046464" y="3977640"/>
-            <a:ext cx="972312" cy="749808"/>
-          </a:xfrm>
-          <a:prstGeom prst="roundRect">
-            <a:avLst>
-              <a:gd name="adj" fmla="val 14634"/>
-            </a:avLst>
-          </a:prstGeom>
-          <a:solidFill>
-            <a:srgbClr val="2F8A28"/>
-          </a:solidFill>
-          <a:ln w="12700">
-            <a:solidFill>
-              <a:srgbClr val="2F8A28"/>
-            </a:solidFill>
-            <a:prstDash val="solid"/>
-          </a:ln>
-        </p:spPr>
-      </p:sp>
-      <p:sp>
-        <p:nvSpPr>
-          <p:cNvPr id="16" name="Text 14"/>
-          <p:cNvSpPr/>
-          <p:nvPr/>
-        </p:nvSpPr>
-        <p:spPr>
-          <a:xfrm>
-            <a:off x="9119616" y="4169664"/>
-            <a:ext cx="826008" cy="310896"/>
-          </a:xfrm>
-          <a:prstGeom prst="rect">
-            <a:avLst/>
-          </a:prstGeom>
-          <a:noFill/>
-          <a:ln/>
-        </p:spPr>
-        <p:txBody>
-          <a:bodyPr wrap="square" lIns="0" tIns="0" rIns="0" bIns="0" rtlCol="0" anchor="ctr">
-            <a:normAutofit/>
-          </a:bodyPr>
-          <a:lstStyle/>
-          <a:p>
-            <a:pPr algn="ctr" indent="0" marL="0">
-              <a:buNone/>
-            </a:pPr>
-            <a:r>
-              <a:rPr lang="en-US" sz="1500" b="1" dirty="0">
-                <a:solidFill>
-                  <a:srgbClr val="FFFFFF"/>
-                </a:solidFill>
-                <a:latin typeface="Aptos" pitchFamily="34" charset="0"/>
-                <a:ea typeface="Aptos" pitchFamily="34" charset="-122"/>
-                <a:cs typeface="Aptos" pitchFamily="34" charset="-120"/>
-              </a:rPr>
-              <a:t>Plays</a:t>
-            </a:r>
-            <a:endParaRPr lang="en-US" sz="1500" dirty="0"/>
-          </a:p>
-        </p:txBody>
-      </p:sp>
-      <p:sp>
-        <p:nvSpPr>
-          <p:cNvPr id="17" name="Shape 15"/>
-          <p:cNvSpPr/>
-          <p:nvPr/>
-        </p:nvSpPr>
-        <p:spPr>
-          <a:xfrm>
-            <a:off x="10274808" y="3977640"/>
-            <a:ext cx="972312" cy="749808"/>
-          </a:xfrm>
-          <a:prstGeom prst="roundRect">
-            <a:avLst>
-              <a:gd name="adj" fmla="val 14634"/>
-            </a:avLst>
-          </a:prstGeom>
-          <a:solidFill>
-            <a:srgbClr val="6A4CA3"/>
-          </a:solidFill>
-          <a:ln w="12700">
-            <a:solidFill>
-              <a:srgbClr val="6A4CA3"/>
-            </a:solidFill>
-            <a:prstDash val="solid"/>
-          </a:ln>
-        </p:spPr>
-      </p:sp>
-      <p:sp>
-        <p:nvSpPr>
-          <p:cNvPr id="18" name="Text 16"/>
-          <p:cNvSpPr/>
-          <p:nvPr/>
-        </p:nvSpPr>
-        <p:spPr>
-          <a:xfrm>
-            <a:off x="10347960" y="4169664"/>
-            <a:ext cx="826008" cy="310896"/>
-          </a:xfrm>
-          <a:prstGeom prst="rect">
-            <a:avLst/>
-          </a:prstGeom>
-          <a:noFill/>
-          <a:ln/>
-        </p:spPr>
-        <p:txBody>
-          <a:bodyPr wrap="square" lIns="0" tIns="0" rIns="0" bIns="0" rtlCol="0" anchor="ctr">
-            <a:normAutofit/>
-          </a:bodyPr>
-          <a:lstStyle/>
-          <a:p>
-            <a:pPr algn="ctr" indent="0" marL="0">
-              <a:buNone/>
-            </a:pPr>
-            <a:r>
-              <a:rPr lang="en-US" sz="1500" b="1" dirty="0">
-                <a:solidFill>
-                  <a:srgbClr val="FFFFFF"/>
-                </a:solidFill>
-                <a:latin typeface="Aptos" pitchFamily="34" charset="0"/>
-                <a:ea typeface="Aptos" pitchFamily="34" charset="-122"/>
-                <a:cs typeface="Aptos" pitchFamily="34" charset="-120"/>
-              </a:rPr>
-              <a:t>Action</a:t>
-            </a:r>
-            <a:endParaRPr lang="en-US" sz="1500" dirty="0"/>
+            <a:r>
+              <a:rPr lang="en-US" sz="1380" dirty="0">
+                <a:solidFill>
+                  <a:srgbClr val="17364A"/>
+                </a:solidFill>
+                <a:latin typeface="Aptos" pitchFamily="34" charset="0"/>
+                <a:ea typeface="Aptos" pitchFamily="34" charset="-122"/>
+                <a:cs typeface="Aptos" pitchFamily="34" charset="-120"/>
+              </a:rPr>
+              <a:t>Locate the decision point in the playbook sequence.</a:t>
+            </a:r>
+            <a:endParaRPr lang="en-US" sz="1380" dirty="0"/>
+          </a:p>
+          <a:p>
+            <a:r>
+              <a:rPr lang="en-US" sz="1380" dirty="0">
+                <a:solidFill>
+                  <a:srgbClr val="17364A"/>
+                </a:solidFill>
+                <a:latin typeface="Aptos" pitchFamily="34" charset="0"/>
+                <a:ea typeface="Aptos" pitchFamily="34" charset="-122"/>
+                <a:cs typeface="Aptos" pitchFamily="34" charset="-120"/>
+              </a:rPr>
+              <a:t>Identify who should participate in the work.</a:t>
+            </a:r>
+            <a:endParaRPr lang="en-US" sz="1380" dirty="0"/>
+          </a:p>
+          <a:p>
+            <a:r>
+              <a:rPr lang="en-US" sz="1380" dirty="0">
+                <a:solidFill>
+                  <a:srgbClr val="17364A"/>
+                </a:solidFill>
+                <a:latin typeface="Aptos" pitchFamily="34" charset="0"/>
+                <a:ea typeface="Aptos" pitchFamily="34" charset="-122"/>
+                <a:cs typeface="Aptos" pitchFamily="34" charset="-120"/>
+              </a:rPr>
+              <a:t>Document the review, approval, or implementation step.</a:t>
+            </a:r>
+            <a:endParaRPr lang="en-US" sz="1380" dirty="0"/>
           </a:p>
         </p:txBody>
       </p:sp>
@@ -13329,20 +12714,20 @@
         </p:nvSpPr>
         <p:spPr>
           <a:xfrm>
-            <a:off x="7818120" y="3977640"/>
-            <a:ext cx="972312" cy="749808"/>
+            <a:off x="8046720" y="3794760"/>
+            <a:ext cx="3063240" cy="1600200"/>
           </a:xfrm>
           <a:prstGeom prst="roundRect">
             <a:avLst>
-              <a:gd name="adj" fmla="val 14634"/>
+              <a:gd name="adj" fmla="val 6857"/>
             </a:avLst>
           </a:prstGeom>
           <a:solidFill>
-            <a:srgbClr val="0068B7"/>
+            <a:srgbClr val="FFFFFF"/>
           </a:solidFill>
           <a:ln w="12700">
             <a:solidFill>
-              <a:srgbClr val="0068B7"/>
+              <a:srgbClr val="B9D7E6"/>
             </a:solidFill>
             <a:prstDash val="solid"/>
           </a:ln>
@@ -13356,172 +12741,100 @@
         </p:nvSpPr>
         <p:spPr>
           <a:xfrm>
-            <a:off x="7891272" y="4169664"/>
-            <a:ext cx="826008" cy="310896"/>
-          </a:xfrm>
-          <a:prstGeom prst="rect">
-            <a:avLst/>
-          </a:prstGeom>
-          <a:noFill/>
-          <a:ln/>
-        </p:spPr>
-        <p:txBody>
-          <a:bodyPr wrap="square" lIns="0" tIns="0" rIns="0" bIns="0" rtlCol="0" anchor="ctr">
+            <a:off x="8211312" y="3941064"/>
+            <a:ext cx="2734056" cy="256032"/>
+          </a:xfrm>
+          <a:prstGeom prst="rect">
+            <a:avLst/>
+          </a:prstGeom>
+          <a:noFill/>
+          <a:ln/>
+        </p:spPr>
+        <p:txBody>
+          <a:bodyPr wrap="square" lIns="0" tIns="0" rIns="0" bIns="0" rtlCol="0" anchor="ctr"/>
+          <a:lstStyle/>
+          <a:p>
+            <a:pPr indent="0" marL="0">
+              <a:buNone/>
+            </a:pPr>
+            <a:r>
+              <a:rPr lang="en-US" sz="1300" b="1" dirty="0">
+                <a:solidFill>
+                  <a:srgbClr val="0068B7"/>
+                </a:solidFill>
+                <a:latin typeface="Aptos" pitchFamily="34" charset="0"/>
+                <a:ea typeface="Aptos" pitchFamily="34" charset="-122"/>
+                <a:cs typeface="Aptos" pitchFamily="34" charset="-120"/>
+              </a:rPr>
+              <a:t>Tool selection cues</a:t>
+            </a:r>
+            <a:endParaRPr lang="en-US" sz="1300" dirty="0"/>
+          </a:p>
+        </p:txBody>
+      </p:sp>
+      <p:sp>
+        <p:nvSpPr>
+          <p:cNvPr id="15" name="Text 13"/>
+          <p:cNvSpPr/>
+          <p:nvPr/>
+        </p:nvSpPr>
+        <p:spPr>
+          <a:xfrm>
+            <a:off x="8229600" y="4306824"/>
+            <a:ext cx="2679192" cy="941832"/>
+          </a:xfrm>
+          <a:prstGeom prst="rect">
+            <a:avLst/>
+          </a:prstGeom>
+          <a:noFill/>
+          <a:ln/>
+        </p:spPr>
+        <p:txBody>
+          <a:bodyPr wrap="square" lIns="254" tIns="254" rIns="254" bIns="254" rtlCol="0" anchor="t">
             <a:normAutofit/>
           </a:bodyPr>
           <a:lstStyle/>
           <a:p>
-            <a:pPr algn="ctr" indent="0" marL="0">
-              <a:buNone/>
-            </a:pPr>
-            <a:r>
-              <a:rPr lang="en-US" sz="1500" b="1" dirty="0">
-                <a:solidFill>
-                  <a:srgbClr val="FFFFFF"/>
-                </a:solidFill>
-                <a:latin typeface="Aptos" pitchFamily="34" charset="0"/>
-                <a:ea typeface="Aptos" pitchFamily="34" charset="-122"/>
-                <a:cs typeface="Aptos" pitchFamily="34" charset="-120"/>
-              </a:rPr>
-              <a:t>Concept</a:t>
-            </a:r>
-            <a:endParaRPr lang="en-US" sz="1500" dirty="0"/>
-          </a:p>
-        </p:txBody>
-      </p:sp>
-      <p:sp>
-        <p:nvSpPr>
-          <p:cNvPr id="15" name="Shape 13"/>
-          <p:cNvSpPr/>
-          <p:nvPr/>
-        </p:nvSpPr>
-        <p:spPr>
-          <a:xfrm>
-            <a:off x="9046464" y="3977640"/>
-            <a:ext cx="972312" cy="749808"/>
-          </a:xfrm>
-          <a:prstGeom prst="roundRect">
-            <a:avLst>
-              <a:gd name="adj" fmla="val 14634"/>
-            </a:avLst>
-          </a:prstGeom>
-          <a:solidFill>
-            <a:srgbClr val="2F8A28"/>
-          </a:solidFill>
-          <a:ln w="12700">
-            <a:solidFill>
-              <a:srgbClr val="2F8A28"/>
-            </a:solidFill>
-            <a:prstDash val="solid"/>
-          </a:ln>
-        </p:spPr>
-      </p:sp>
-      <p:sp>
-        <p:nvSpPr>
-          <p:cNvPr id="16" name="Text 14"/>
-          <p:cNvSpPr/>
-          <p:nvPr/>
-        </p:nvSpPr>
-        <p:spPr>
-          <a:xfrm>
-            <a:off x="9119616" y="4169664"/>
-            <a:ext cx="826008" cy="310896"/>
-          </a:xfrm>
-          <a:prstGeom prst="rect">
-            <a:avLst/>
-          </a:prstGeom>
-          <a:noFill/>
-          <a:ln/>
-        </p:spPr>
-        <p:txBody>
-          <a:bodyPr wrap="square" lIns="0" tIns="0" rIns="0" bIns="0" rtlCol="0" anchor="ctr">
-            <a:normAutofit/>
-          </a:bodyPr>
-          <a:lstStyle/>
-          <a:p>
-            <a:pPr algn="ctr" indent="0" marL="0">
-              <a:buNone/>
-            </a:pPr>
-            <a:r>
-              <a:rPr lang="en-US" sz="1500" b="1" dirty="0">
-                <a:solidFill>
-                  <a:srgbClr val="FFFFFF"/>
-                </a:solidFill>
-                <a:latin typeface="Aptos" pitchFamily="34" charset="0"/>
-                <a:ea typeface="Aptos" pitchFamily="34" charset="-122"/>
-                <a:cs typeface="Aptos" pitchFamily="34" charset="-120"/>
-              </a:rPr>
-              <a:t>Tool</a:t>
-            </a:r>
-            <a:endParaRPr lang="en-US" sz="1500" dirty="0"/>
-          </a:p>
-        </p:txBody>
-      </p:sp>
-      <p:sp>
-        <p:nvSpPr>
-          <p:cNvPr id="17" name="Shape 15"/>
-          <p:cNvSpPr/>
-          <p:nvPr/>
-        </p:nvSpPr>
-        <p:spPr>
-          <a:xfrm>
-            <a:off x="10274808" y="3977640"/>
-            <a:ext cx="972312" cy="749808"/>
-          </a:xfrm>
-          <a:prstGeom prst="roundRect">
-            <a:avLst>
-              <a:gd name="adj" fmla="val 14634"/>
-            </a:avLst>
-          </a:prstGeom>
-          <a:solidFill>
-            <a:srgbClr val="D69A2D"/>
-          </a:solidFill>
-          <a:ln w="12700">
-            <a:solidFill>
-              <a:srgbClr val="D69A2D"/>
-            </a:solidFill>
-            <a:prstDash val="solid"/>
-          </a:ln>
-        </p:spPr>
-      </p:sp>
-      <p:sp>
-        <p:nvSpPr>
-          <p:cNvPr id="18" name="Text 16"/>
-          <p:cNvSpPr/>
-          <p:nvPr/>
-        </p:nvSpPr>
-        <p:spPr>
-          <a:xfrm>
-            <a:off x="10347960" y="4169664"/>
-            <a:ext cx="826008" cy="310896"/>
-          </a:xfrm>
-          <a:prstGeom prst="rect">
-            <a:avLst/>
-          </a:prstGeom>
-          <a:noFill/>
-          <a:ln/>
-        </p:spPr>
-        <p:txBody>
-          <a:bodyPr wrap="square" lIns="0" tIns="0" rIns="0" bIns="0" rtlCol="0" anchor="ctr">
-            <a:normAutofit/>
-          </a:bodyPr>
-          <a:lstStyle/>
-          <a:p>
-            <a:pPr algn="ctr" indent="0" marL="0">
-              <a:buNone/>
-            </a:pPr>
-            <a:r>
-              <a:rPr lang="en-US" sz="1500" b="1" dirty="0">
-                <a:solidFill>
-                  <a:srgbClr val="FFFFFF"/>
-                </a:solidFill>
-                <a:latin typeface="Aptos" pitchFamily="34" charset="0"/>
-                <a:ea typeface="Aptos" pitchFamily="34" charset="-122"/>
-                <a:cs typeface="Aptos" pitchFamily="34" charset="-120"/>
-              </a:rPr>
-              <a:t>Artifact</a:t>
-            </a:r>
-            <a:endParaRPr lang="en-US" sz="1500" dirty="0"/>
+            <a:r>
+              <a:rPr lang="en-US" sz="1380" dirty="0">
+                <a:solidFill>
+                  <a:srgbClr val="17364A"/>
+                </a:solidFill>
+                <a:latin typeface="Aptos" pitchFamily="34" charset="0"/>
+                <a:ea typeface="Aptos" pitchFamily="34" charset="-122"/>
+                <a:cs typeface="Aptos" pitchFamily="34" charset="-120"/>
+              </a:rPr>
+              <a:t>Use a tool when no comparable local process exists.</a:t>
+            </a:r>
+            <a:endParaRPr lang="en-US" sz="1380" dirty="0"/>
+          </a:p>
+          <a:p>
+            <a:r>
+              <a:rPr lang="en-US" sz="1380" dirty="0">
+                <a:solidFill>
+                  <a:srgbClr val="17364A"/>
+                </a:solidFill>
+                <a:latin typeface="Aptos" pitchFamily="34" charset="0"/>
+                <a:ea typeface="Aptos" pitchFamily="34" charset="-122"/>
+                <a:cs typeface="Aptos" pitchFamily="34" charset="-120"/>
+              </a:rPr>
+              <a:t>Adapt existing department templates when they already fit the purpose.</a:t>
+            </a:r>
+            <a:endParaRPr lang="en-US" sz="1380" dirty="0"/>
+          </a:p>
+          <a:p>
+            <a:r>
+              <a:rPr lang="en-US" sz="1380" dirty="0">
+                <a:solidFill>
+                  <a:srgbClr val="17364A"/>
+                </a:solidFill>
+                <a:latin typeface="Aptos" pitchFamily="34" charset="0"/>
+                <a:ea typeface="Aptos" pitchFamily="34" charset="-122"/>
+                <a:cs typeface="Aptos" pitchFamily="34" charset="-120"/>
+              </a:rPr>
+              <a:t>Save the completed artifact as evidence of the decision.</a:t>
+            </a:r>
+            <a:endParaRPr lang="en-US" sz="1380" dirty="0"/>
           </a:p>
         </p:txBody>
       </p:sp>
@@ -13994,13 +13307,11 @@
             </a:avLst>
           </a:prstGeom>
           <a:solidFill>
-            <a:srgbClr val="FFFFFF">
-              <a:alpha val="88000"/>
-            </a:srgbClr>
+            <a:srgbClr val="FFFFFF"/>
           </a:solidFill>
           <a:ln w="12700">
             <a:solidFill>
-              <a:srgbClr val="D6E8F2"/>
+              <a:srgbClr val="B9D7E6"/>
             </a:solidFill>
             <a:prstDash val="solid"/>
           </a:ln>
@@ -14008,119 +13319,98 @@
       </p:sp>
       <p:sp>
         <p:nvSpPr>
-          <p:cNvPr id="14" name="Shape 12"/>
-          <p:cNvSpPr/>
-          <p:nvPr/>
-        </p:nvSpPr>
-        <p:spPr>
-          <a:xfrm>
-            <a:off x="8074152" y="3291840"/>
-            <a:ext cx="2596896" cy="749808"/>
-          </a:xfrm>
-          <a:prstGeom prst="rect">
-            <a:avLst/>
-          </a:prstGeom>
-          <a:solidFill>
-            <a:srgbClr val="EAF6F8"/>
-          </a:solidFill>
-          <a:ln w="12700">
-            <a:solidFill>
-              <a:srgbClr val="8ABBD8"/>
-            </a:solidFill>
-            <a:prstDash val="solid"/>
-          </a:ln>
-        </p:spPr>
-      </p:sp>
-      <p:sp>
-        <p:nvSpPr>
-          <p:cNvPr id="15" name="Shape 13"/>
-          <p:cNvSpPr/>
-          <p:nvPr/>
-        </p:nvSpPr>
-        <p:spPr>
-          <a:xfrm>
-            <a:off x="8202168" y="3721608"/>
-            <a:ext cx="2340864" cy="0"/>
-          </a:xfrm>
-          <a:prstGeom prst="line">
-            <a:avLst/>
-          </a:prstGeom>
-          <a:noFill/>
-          <a:ln w="19050">
-            <a:solidFill>
-              <a:srgbClr val="0068B7"/>
-            </a:solidFill>
-            <a:prstDash val="solid"/>
-          </a:ln>
-        </p:spPr>
+          <p:cNvPr id="14" name="Text 12"/>
+          <p:cNvSpPr/>
+          <p:nvPr/>
+        </p:nvSpPr>
+        <p:spPr>
+          <a:xfrm>
+            <a:off x="7799832" y="2935224"/>
+            <a:ext cx="3145536" cy="256032"/>
+          </a:xfrm>
+          <a:prstGeom prst="rect">
+            <a:avLst/>
+          </a:prstGeom>
+          <a:noFill/>
+          <a:ln/>
+        </p:spPr>
+        <p:txBody>
+          <a:bodyPr wrap="square" lIns="0" tIns="0" rIns="0" bIns="0" rtlCol="0" anchor="ctr"/>
+          <a:lstStyle/>
+          <a:p>
+            <a:pPr indent="0" marL="0">
+              <a:buNone/>
+            </a:pPr>
+            <a:r>
+              <a:rPr lang="en-US" sz="1300" b="1" dirty="0">
+                <a:solidFill>
+                  <a:srgbClr val="0068B7"/>
+                </a:solidFill>
+                <a:latin typeface="Aptos" pitchFamily="34" charset="0"/>
+                <a:ea typeface="Aptos" pitchFamily="34" charset="-122"/>
+                <a:cs typeface="Aptos" pitchFamily="34" charset="-120"/>
+              </a:rPr>
+              <a:t>Concept checkpoints</a:t>
+            </a:r>
+            <a:endParaRPr lang="en-US" sz="1300" dirty="0"/>
+          </a:p>
+        </p:txBody>
+      </p:sp>
+      <p:sp>
+        <p:nvSpPr>
+          <p:cNvPr id="15" name="Text 13"/>
+          <p:cNvSpPr/>
+          <p:nvPr/>
+        </p:nvSpPr>
+        <p:spPr>
+          <a:xfrm>
+            <a:off x="7818120" y="3300984"/>
+            <a:ext cx="3090672" cy="877824"/>
+          </a:xfrm>
+          <a:prstGeom prst="rect">
+            <a:avLst/>
+          </a:prstGeom>
+          <a:noFill/>
+          <a:ln/>
+        </p:spPr>
+        <p:txBody>
+          <a:bodyPr wrap="square" lIns="254" tIns="254" rIns="254" bIns="254" rtlCol="0" anchor="t">
+            <a:normAutofit/>
+          </a:bodyPr>
+          <a:lstStyle/>
+          <a:p>
+            <a:r>
+              <a:rPr lang="en-US" sz="1380" dirty="0">
+                <a:solidFill>
+                  <a:srgbClr val="17364A"/>
+                </a:solidFill>
+                <a:latin typeface="Aptos" pitchFamily="34" charset="0"/>
+                <a:ea typeface="Aptos" pitchFamily="34" charset="-122"/>
+                <a:cs typeface="Aptos" pitchFamily="34" charset="-120"/>
+              </a:rPr>
+              <a:t>Balance transparency with privacy, security, confidentiality, and operational sensitivity.</a:t>
+            </a:r>
+            <a:endParaRPr lang="en-US" sz="1380" dirty="0"/>
+          </a:p>
+          <a:p>
+            <a:r>
+              <a:rPr lang="en-US" sz="1380" dirty="0">
+                <a:solidFill>
+                  <a:srgbClr val="17364A"/>
+                </a:solidFill>
+                <a:latin typeface="Aptos" pitchFamily="34" charset="0"/>
+                <a:ea typeface="Aptos" pitchFamily="34" charset="-122"/>
+                <a:cs typeface="Aptos" pitchFamily="34" charset="-120"/>
+              </a:rPr>
+              <a:t>Produce a draft AI transparency reporting template.</a:t>
+            </a:r>
+            <a:endParaRPr lang="en-US" sz="1380" dirty="0"/>
+          </a:p>
+        </p:txBody>
       </p:sp>
       <p:sp>
         <p:nvSpPr>
           <p:cNvPr id="16" name="Shape 14"/>
-          <p:cNvSpPr/>
-          <p:nvPr/>
-        </p:nvSpPr>
-        <p:spPr>
-          <a:xfrm>
-            <a:off x="9198864" y="4206240"/>
-            <a:ext cx="347472" cy="347472"/>
-          </a:xfrm>
-          <a:prstGeom prst="ellipse">
-            <a:avLst/>
-          </a:prstGeom>
-          <a:solidFill>
-            <a:srgbClr val="2F8A28"/>
-          </a:solidFill>
-          <a:ln w="12700">
-            <a:solidFill>
-              <a:srgbClr val="2F8A28"/>
-            </a:solidFill>
-            <a:prstDash val="solid"/>
-          </a:ln>
-        </p:spPr>
-      </p:sp>
-      <p:sp>
-        <p:nvSpPr>
-          <p:cNvPr id="17" name="Text 15"/>
-          <p:cNvSpPr/>
-          <p:nvPr/>
-        </p:nvSpPr>
-        <p:spPr>
-          <a:xfrm>
-            <a:off x="7909560" y="3977640"/>
-            <a:ext cx="2926080" cy="182880"/>
-          </a:xfrm>
-          <a:prstGeom prst="rect">
-            <a:avLst/>
-          </a:prstGeom>
-          <a:noFill/>
-          <a:ln/>
-        </p:spPr>
-        <p:txBody>
-          <a:bodyPr wrap="square" lIns="0" tIns="0" rIns="0" bIns="0" rtlCol="0" anchor="ctr"/>
-          <a:lstStyle/>
-          <a:p>
-            <a:pPr algn="ctr" indent="0" marL="0">
-              <a:buNone/>
-            </a:pPr>
-            <a:r>
-              <a:rPr lang="en-US" sz="1000" dirty="0">
-                <a:solidFill>
-                  <a:srgbClr val="003A63"/>
-                </a:solidFill>
-                <a:latin typeface="Aptos" pitchFamily="34" charset="0"/>
-                <a:ea typeface="Aptos" pitchFamily="34" charset="-122"/>
-                <a:cs typeface="Aptos" pitchFamily="34" charset="-120"/>
-              </a:rPr>
-              <a:t>Concept to action</a:t>
-            </a:r>
-            <a:endParaRPr lang="en-US" sz="1000" dirty="0"/>
-          </a:p>
-        </p:txBody>
-      </p:sp>
-      <p:sp>
-        <p:nvSpPr>
-          <p:cNvPr id="18" name="Shape 16"/>
           <p:cNvSpPr/>
           <p:nvPr/>
         </p:nvSpPr>
@@ -14147,7 +13437,7 @@
       </p:sp>
       <p:sp>
         <p:nvSpPr>
-          <p:cNvPr id="19" name="Text 17"/>
+          <p:cNvPr id="17" name="Text 15"/>
           <p:cNvSpPr/>
           <p:nvPr/>
         </p:nvSpPr>
@@ -14186,7 +13476,7 @@
       </p:sp>
       <p:sp>
         <p:nvSpPr>
-          <p:cNvPr id="20" name="Text 18"/>
+          <p:cNvPr id="18" name="Text 16"/>
           <p:cNvSpPr/>
           <p:nvPr/>
         </p:nvSpPr>
@@ -14694,13 +13984,11 @@
             </a:avLst>
           </a:prstGeom>
           <a:solidFill>
-            <a:srgbClr val="FFFFFF">
-              <a:alpha val="88000"/>
-            </a:srgbClr>
+            <a:srgbClr val="FFFFFF"/>
           </a:solidFill>
           <a:ln w="12700">
             <a:solidFill>
-              <a:srgbClr val="D6E8F2"/>
+              <a:srgbClr val="B9D7E6"/>
             </a:solidFill>
             <a:prstDash val="solid"/>
           </a:ln>
@@ -14708,119 +13996,112 @@
       </p:sp>
       <p:sp>
         <p:nvSpPr>
-          <p:cNvPr id="14" name="Shape 12"/>
-          <p:cNvSpPr/>
-          <p:nvPr/>
-        </p:nvSpPr>
-        <p:spPr>
-          <a:xfrm>
-            <a:off x="8074152" y="3291840"/>
-            <a:ext cx="2596896" cy="749808"/>
-          </a:xfrm>
-          <a:prstGeom prst="rect">
-            <a:avLst/>
-          </a:prstGeom>
-          <a:solidFill>
-            <a:srgbClr val="EAF6F8"/>
-          </a:solidFill>
-          <a:ln w="12700">
-            <a:solidFill>
-              <a:srgbClr val="8ABBD8"/>
-            </a:solidFill>
-            <a:prstDash val="solid"/>
-          </a:ln>
-        </p:spPr>
-      </p:sp>
-      <p:sp>
-        <p:nvSpPr>
-          <p:cNvPr id="15" name="Shape 13"/>
-          <p:cNvSpPr/>
-          <p:nvPr/>
-        </p:nvSpPr>
-        <p:spPr>
-          <a:xfrm>
-            <a:off x="8202168" y="3721608"/>
-            <a:ext cx="2340864" cy="0"/>
-          </a:xfrm>
-          <a:prstGeom prst="line">
-            <a:avLst/>
-          </a:prstGeom>
-          <a:noFill/>
-          <a:ln w="19050">
-            <a:solidFill>
-              <a:srgbClr val="0068B7"/>
-            </a:solidFill>
-            <a:prstDash val="solid"/>
-          </a:ln>
-        </p:spPr>
+          <p:cNvPr id="14" name="Text 12"/>
+          <p:cNvSpPr/>
+          <p:nvPr/>
+        </p:nvSpPr>
+        <p:spPr>
+          <a:xfrm>
+            <a:off x="7799832" y="2935224"/>
+            <a:ext cx="3145536" cy="256032"/>
+          </a:xfrm>
+          <a:prstGeom prst="rect">
+            <a:avLst/>
+          </a:prstGeom>
+          <a:noFill/>
+          <a:ln/>
+        </p:spPr>
+        <p:txBody>
+          <a:bodyPr wrap="square" lIns="0" tIns="0" rIns="0" bIns="0" rtlCol="0" anchor="ctr"/>
+          <a:lstStyle/>
+          <a:p>
+            <a:pPr indent="0" marL="0">
+              <a:buNone/>
+            </a:pPr>
+            <a:r>
+              <a:rPr lang="en-US" sz="1300" b="1" dirty="0">
+                <a:solidFill>
+                  <a:srgbClr val="0068B7"/>
+                </a:solidFill>
+                <a:latin typeface="Aptos" pitchFamily="34" charset="0"/>
+                <a:ea typeface="Aptos" pitchFamily="34" charset="-122"/>
+                <a:cs typeface="Aptos" pitchFamily="34" charset="-120"/>
+              </a:rPr>
+              <a:t>Concept checkpoints</a:t>
+            </a:r>
+            <a:endParaRPr lang="en-US" sz="1300" dirty="0"/>
+          </a:p>
+        </p:txBody>
+      </p:sp>
+      <p:sp>
+        <p:nvSpPr>
+          <p:cNvPr id="15" name="Text 13"/>
+          <p:cNvSpPr/>
+          <p:nvPr/>
+        </p:nvSpPr>
+        <p:spPr>
+          <a:xfrm>
+            <a:off x="7818120" y="3300984"/>
+            <a:ext cx="3090672" cy="877824"/>
+          </a:xfrm>
+          <a:prstGeom prst="rect">
+            <a:avLst/>
+          </a:prstGeom>
+          <a:noFill/>
+          <a:ln/>
+        </p:spPr>
+        <p:txBody>
+          <a:bodyPr wrap="square" lIns="254" tIns="254" rIns="254" bIns="254" rtlCol="0" anchor="t">
+            <a:normAutofit/>
+          </a:bodyPr>
+          <a:lstStyle/>
+          <a:p>
+            <a:r>
+              <a:rPr lang="en-US" sz="1380" dirty="0">
+                <a:solidFill>
+                  <a:srgbClr val="17364A"/>
+                </a:solidFill>
+                <a:latin typeface="Aptos" pitchFamily="34" charset="0"/>
+                <a:ea typeface="Aptos" pitchFamily="34" charset="-122"/>
+                <a:cs typeface="Aptos" pitchFamily="34" charset="-120"/>
+              </a:rPr>
+              <a:t>Public health agencies have a responsibility to explain how AI is used in ways that affect.</a:t>
+            </a:r>
+            <a:endParaRPr lang="en-US" sz="1380" dirty="0"/>
+          </a:p>
+          <a:p>
+            <a:r>
+              <a:rPr lang="en-US" sz="1380" dirty="0">
+                <a:solidFill>
+                  <a:srgbClr val="17364A"/>
+                </a:solidFill>
+                <a:latin typeface="Aptos" pitchFamily="34" charset="0"/>
+                <a:ea typeface="Aptos" pitchFamily="34" charset="-122"/>
+                <a:cs typeface="Aptos" pitchFamily="34" charset="-120"/>
+              </a:rPr>
+              <a:t>Transparency reporting helps agencies communicate what AI tools are in use, why they are.</a:t>
+            </a:r>
+            <a:endParaRPr lang="en-US" sz="1380" dirty="0"/>
+          </a:p>
+          <a:p>
+            <a:r>
+              <a:rPr lang="en-US" sz="1380" dirty="0">
+                <a:solidFill>
+                  <a:srgbClr val="17364A"/>
+                </a:solidFill>
+                <a:latin typeface="Aptos" pitchFamily="34" charset="0"/>
+                <a:ea typeface="Aptos" pitchFamily="34" charset="-122"/>
+                <a:cs typeface="Aptos" pitchFamily="34" charset="-120"/>
+              </a:rPr>
+              <a:t>Transparency should be understandable, accessible, and proportionate to risk.</a:t>
+            </a:r>
+            <a:endParaRPr lang="en-US" sz="1380" dirty="0"/>
+          </a:p>
+        </p:txBody>
       </p:sp>
       <p:sp>
         <p:nvSpPr>
           <p:cNvPr id="16" name="Shape 14"/>
-          <p:cNvSpPr/>
-          <p:nvPr/>
-        </p:nvSpPr>
-        <p:spPr>
-          <a:xfrm>
-            <a:off x="9198864" y="4206240"/>
-            <a:ext cx="347472" cy="347472"/>
-          </a:xfrm>
-          <a:prstGeom prst="ellipse">
-            <a:avLst/>
-          </a:prstGeom>
-          <a:solidFill>
-            <a:srgbClr val="2F8A28"/>
-          </a:solidFill>
-          <a:ln w="12700">
-            <a:solidFill>
-              <a:srgbClr val="2F8A28"/>
-            </a:solidFill>
-            <a:prstDash val="solid"/>
-          </a:ln>
-        </p:spPr>
-      </p:sp>
-      <p:sp>
-        <p:nvSpPr>
-          <p:cNvPr id="17" name="Text 15"/>
-          <p:cNvSpPr/>
-          <p:nvPr/>
-        </p:nvSpPr>
-        <p:spPr>
-          <a:xfrm>
-            <a:off x="7909560" y="3977640"/>
-            <a:ext cx="2926080" cy="182880"/>
-          </a:xfrm>
-          <a:prstGeom prst="rect">
-            <a:avLst/>
-          </a:prstGeom>
-          <a:noFill/>
-          <a:ln/>
-        </p:spPr>
-        <p:txBody>
-          <a:bodyPr wrap="square" lIns="0" tIns="0" rIns="0" bIns="0" rtlCol="0" anchor="ctr"/>
-          <a:lstStyle/>
-          <a:p>
-            <a:pPr algn="ctr" indent="0" marL="0">
-              <a:buNone/>
-            </a:pPr>
-            <a:r>
-              <a:rPr lang="en-US" sz="1000" dirty="0">
-                <a:solidFill>
-                  <a:srgbClr val="003A63"/>
-                </a:solidFill>
-                <a:latin typeface="Aptos" pitchFamily="34" charset="0"/>
-                <a:ea typeface="Aptos" pitchFamily="34" charset="-122"/>
-                <a:cs typeface="Aptos" pitchFamily="34" charset="-120"/>
-              </a:rPr>
-              <a:t>Concept to action</a:t>
-            </a:r>
-            <a:endParaRPr lang="en-US" sz="1000" dirty="0"/>
-          </a:p>
-        </p:txBody>
-      </p:sp>
-      <p:sp>
-        <p:nvSpPr>
-          <p:cNvPr id="18" name="Shape 16"/>
           <p:cNvSpPr/>
           <p:nvPr/>
         </p:nvSpPr>
@@ -14847,7 +14128,7 @@
       </p:sp>
       <p:sp>
         <p:nvSpPr>
-          <p:cNvPr id="19" name="Text 17"/>
+          <p:cNvPr id="17" name="Text 15"/>
           <p:cNvSpPr/>
           <p:nvPr/>
         </p:nvSpPr>
@@ -14886,7 +14167,7 @@
       </p:sp>
       <p:sp>
         <p:nvSpPr>
-          <p:cNvPr id="20" name="Text 18"/>
+          <p:cNvPr id="18" name="Text 16"/>
           <p:cNvSpPr/>
           <p:nvPr/>
         </p:nvSpPr>
@@ -15394,13 +14675,11 @@
             </a:avLst>
           </a:prstGeom>
           <a:solidFill>
-            <a:srgbClr val="FFFFFF">
-              <a:alpha val="88000"/>
-            </a:srgbClr>
+            <a:srgbClr val="FFFFFF"/>
           </a:solidFill>
           <a:ln w="12700">
             <a:solidFill>
-              <a:srgbClr val="D6E8F2"/>
+              <a:srgbClr val="B9D7E6"/>
             </a:solidFill>
             <a:prstDash val="solid"/>
           </a:ln>
@@ -15408,190 +14687,112 @@
       </p:sp>
       <p:sp>
         <p:nvSpPr>
-          <p:cNvPr id="14" name="Shape 12"/>
-          <p:cNvSpPr/>
-          <p:nvPr/>
-        </p:nvSpPr>
-        <p:spPr>
-          <a:xfrm>
-            <a:off x="7891272" y="3108960"/>
-            <a:ext cx="566928" cy="566928"/>
-          </a:xfrm>
-          <a:prstGeom prst="ellipse">
-            <a:avLst/>
-          </a:prstGeom>
-          <a:solidFill>
-            <a:srgbClr val="0068B7"/>
-          </a:solidFill>
-          <a:ln w="12700">
-            <a:solidFill>
-              <a:srgbClr val="0068B7"/>
-            </a:solidFill>
-            <a:prstDash val="solid"/>
-          </a:ln>
-        </p:spPr>
-      </p:sp>
-      <p:sp>
-        <p:nvSpPr>
-          <p:cNvPr id="15" name="Shape 13"/>
-          <p:cNvSpPr/>
-          <p:nvPr/>
-        </p:nvSpPr>
-        <p:spPr>
-          <a:xfrm>
-            <a:off x="10287000" y="3108960"/>
-            <a:ext cx="566928" cy="566928"/>
-          </a:xfrm>
-          <a:prstGeom prst="ellipse">
-            <a:avLst/>
-          </a:prstGeom>
-          <a:solidFill>
-            <a:srgbClr val="2F8A28"/>
-          </a:solidFill>
-          <a:ln w="12700">
-            <a:solidFill>
-              <a:srgbClr val="2F8A28"/>
-            </a:solidFill>
-            <a:prstDash val="solid"/>
-          </a:ln>
-        </p:spPr>
+          <p:cNvPr id="14" name="Text 12"/>
+          <p:cNvSpPr/>
+          <p:nvPr/>
+        </p:nvSpPr>
+        <p:spPr>
+          <a:xfrm>
+            <a:off x="7799832" y="2935224"/>
+            <a:ext cx="3145536" cy="256032"/>
+          </a:xfrm>
+          <a:prstGeom prst="rect">
+            <a:avLst/>
+          </a:prstGeom>
+          <a:noFill/>
+          <a:ln/>
+        </p:spPr>
+        <p:txBody>
+          <a:bodyPr wrap="square" lIns="0" tIns="0" rIns="0" bIns="0" rtlCol="0" anchor="ctr"/>
+          <a:lstStyle/>
+          <a:p>
+            <a:pPr indent="0" marL="0">
+              <a:buNone/>
+            </a:pPr>
+            <a:r>
+              <a:rPr lang="en-US" sz="1300" b="1" dirty="0">
+                <a:solidFill>
+                  <a:srgbClr val="0068B7"/>
+                </a:solidFill>
+                <a:latin typeface="Aptos" pitchFamily="34" charset="0"/>
+                <a:ea typeface="Aptos" pitchFamily="34" charset="-122"/>
+                <a:cs typeface="Aptos" pitchFamily="34" charset="-120"/>
+              </a:rPr>
+              <a:t>Concept checkpoints</a:t>
+            </a:r>
+            <a:endParaRPr lang="en-US" sz="1300" dirty="0"/>
+          </a:p>
+        </p:txBody>
+      </p:sp>
+      <p:sp>
+        <p:nvSpPr>
+          <p:cNvPr id="15" name="Text 13"/>
+          <p:cNvSpPr/>
+          <p:nvPr/>
+        </p:nvSpPr>
+        <p:spPr>
+          <a:xfrm>
+            <a:off x="7818120" y="3300984"/>
+            <a:ext cx="3090672" cy="877824"/>
+          </a:xfrm>
+          <a:prstGeom prst="rect">
+            <a:avLst/>
+          </a:prstGeom>
+          <a:noFill/>
+          <a:ln/>
+        </p:spPr>
+        <p:txBody>
+          <a:bodyPr wrap="square" lIns="254" tIns="254" rIns="254" bIns="254" rtlCol="0" anchor="t">
+            <a:normAutofit/>
+          </a:bodyPr>
+          <a:lstStyle/>
+          <a:p>
+            <a:r>
+              <a:rPr lang="en-US" sz="1380" dirty="0">
+                <a:solidFill>
+                  <a:srgbClr val="17364A"/>
+                </a:solidFill>
+                <a:latin typeface="Aptos" pitchFamily="34" charset="0"/>
+                <a:ea typeface="Aptos" pitchFamily="34" charset="-122"/>
+                <a:cs typeface="Aptos" pitchFamily="34" charset="-120"/>
+              </a:rPr>
+              <a:t>It is not legal advice and does not replace review by agency legal counsel, privacy.</a:t>
+            </a:r>
+            <a:endParaRPr lang="en-US" sz="1380" dirty="0"/>
+          </a:p>
+          <a:p>
+            <a:r>
+              <a:rPr lang="en-US" sz="1380" dirty="0">
+                <a:solidFill>
+                  <a:srgbClr val="17364A"/>
+                </a:solidFill>
+                <a:latin typeface="Aptos" pitchFamily="34" charset="0"/>
+                <a:ea typeface="Aptos" pitchFamily="34" charset="-122"/>
+                <a:cs typeface="Aptos" pitchFamily="34" charset="-120"/>
+              </a:rPr>
+              <a:t>Requirements may vary by state, locality, territory, Tribe, agency, funding source,.</a:t>
+            </a:r>
+            <a:endParaRPr lang="en-US" sz="1380" dirty="0"/>
+          </a:p>
+          <a:p>
+            <a:r>
+              <a:rPr lang="en-US" sz="1380" dirty="0">
+                <a:solidFill>
+                  <a:srgbClr val="17364A"/>
+                </a:solidFill>
+                <a:latin typeface="Aptos" pitchFamily="34" charset="0"/>
+                <a:ea typeface="Aptos" pitchFamily="34" charset="-122"/>
+                <a:cs typeface="Aptos" pitchFamily="34" charset="-120"/>
+              </a:rPr>
+              <a:t>Learners should use this module to identify the issues that require review and should.</a:t>
+            </a:r>
+            <a:endParaRPr lang="en-US" sz="1380" dirty="0"/>
+          </a:p>
+        </p:txBody>
       </p:sp>
       <p:sp>
         <p:nvSpPr>
           <p:cNvPr id="16" name="Shape 14"/>
-          <p:cNvSpPr/>
-          <p:nvPr/>
-        </p:nvSpPr>
-        <p:spPr>
-          <a:xfrm>
-            <a:off x="9089136" y="3456432"/>
-            <a:ext cx="566928" cy="566928"/>
-          </a:xfrm>
-          <a:prstGeom prst="ellipse">
-            <a:avLst/>
-          </a:prstGeom>
-          <a:solidFill>
-            <a:srgbClr val="6A4CA3"/>
-          </a:solidFill>
-          <a:ln w="12700">
-            <a:solidFill>
-              <a:srgbClr val="6A4CA3"/>
-            </a:solidFill>
-            <a:prstDash val="solid"/>
-          </a:ln>
-        </p:spPr>
-      </p:sp>
-      <p:sp>
-        <p:nvSpPr>
-          <p:cNvPr id="17" name="Shape 15"/>
-          <p:cNvSpPr/>
-          <p:nvPr/>
-        </p:nvSpPr>
-        <p:spPr>
-          <a:xfrm>
-            <a:off x="8385048" y="3419856"/>
-            <a:ext cx="1975104" cy="0"/>
-          </a:xfrm>
-          <a:prstGeom prst="line">
-            <a:avLst/>
-          </a:prstGeom>
-          <a:noFill/>
-          <a:ln w="25400">
-            <a:solidFill>
-              <a:srgbClr val="8ABBD8"/>
-            </a:solidFill>
-            <a:prstDash val="solid"/>
-          </a:ln>
-        </p:spPr>
-      </p:sp>
-      <p:sp>
-        <p:nvSpPr>
-          <p:cNvPr id="18" name="Shape 16"/>
-          <p:cNvSpPr/>
-          <p:nvPr/>
-        </p:nvSpPr>
-        <p:spPr>
-          <a:xfrm>
-            <a:off x="8202168" y="3630168"/>
-            <a:ext cx="1170432" cy="118872"/>
-          </a:xfrm>
-          <a:prstGeom prst="line">
-            <a:avLst/>
-          </a:prstGeom>
-          <a:noFill/>
-          <a:ln w="25400">
-            <a:solidFill>
-              <a:srgbClr val="8ABBD8"/>
-            </a:solidFill>
-            <a:prstDash val="solid"/>
-          </a:ln>
-        </p:spPr>
-      </p:sp>
-      <p:sp>
-        <p:nvSpPr>
-          <p:cNvPr id="19" name="Shape 17"/>
-          <p:cNvSpPr/>
-          <p:nvPr/>
-        </p:nvSpPr>
-        <p:spPr>
-          <a:xfrm>
-            <a:off x="10543032" y="3630168"/>
-            <a:ext cx="-1170432" cy="118872"/>
-          </a:xfrm>
-          <a:prstGeom prst="line">
-            <a:avLst/>
-          </a:prstGeom>
-          <a:noFill/>
-          <a:ln w="25400">
-            <a:solidFill>
-              <a:srgbClr val="8ABBD8"/>
-            </a:solidFill>
-            <a:prstDash val="solid"/>
-          </a:ln>
-        </p:spPr>
-      </p:sp>
-      <p:sp>
-        <p:nvSpPr>
-          <p:cNvPr id="20" name="Text 18"/>
-          <p:cNvSpPr/>
-          <p:nvPr/>
-        </p:nvSpPr>
-        <p:spPr>
-          <a:xfrm>
-            <a:off x="7863840" y="4069080"/>
-            <a:ext cx="3017520" cy="164592"/>
-          </a:xfrm>
-          <a:prstGeom prst="rect">
-            <a:avLst/>
-          </a:prstGeom>
-          <a:noFill/>
-          <a:ln/>
-        </p:spPr>
-        <p:txBody>
-          <a:bodyPr wrap="square" lIns="0" tIns="0" rIns="0" bIns="0" rtlCol="0" anchor="ctr"/>
-          <a:lstStyle/>
-          <a:p>
-            <a:pPr algn="ctr" indent="0" marL="0">
-              <a:buNone/>
-            </a:pPr>
-            <a:r>
-              <a:rPr lang="en-US" sz="900" b="1" dirty="0">
-                <a:solidFill>
-                  <a:srgbClr val="003A63"/>
-                </a:solidFill>
-                <a:latin typeface="Aptos" pitchFamily="34" charset="0"/>
-                <a:ea typeface="Aptos" pitchFamily="34" charset="-122"/>
-                <a:cs typeface="Aptos" pitchFamily="34" charset="-120"/>
-              </a:rPr>
-              <a:t>Decision rights</a:t>
-            </a:r>
-            <a:endParaRPr lang="en-US" sz="900" dirty="0"/>
-          </a:p>
-        </p:txBody>
-      </p:sp>
-      <p:sp>
-        <p:nvSpPr>
-          <p:cNvPr id="21" name="Shape 19"/>
           <p:cNvSpPr/>
           <p:nvPr/>
         </p:nvSpPr>
@@ -15618,7 +14819,7 @@
       </p:sp>
       <p:sp>
         <p:nvSpPr>
-          <p:cNvPr id="22" name="Text 20"/>
+          <p:cNvPr id="17" name="Text 15"/>
           <p:cNvSpPr/>
           <p:nvPr/>
         </p:nvSpPr>
@@ -15657,7 +14858,7 @@
       </p:sp>
       <p:sp>
         <p:nvSpPr>
-          <p:cNvPr id="23" name="Text 21"/>
+          <p:cNvPr id="18" name="Text 16"/>
           <p:cNvSpPr/>
           <p:nvPr/>
         </p:nvSpPr>
@@ -16165,13 +15366,11 @@
             </a:avLst>
           </a:prstGeom>
           <a:solidFill>
-            <a:srgbClr val="FFFFFF">
-              <a:alpha val="88000"/>
-            </a:srgbClr>
+            <a:srgbClr val="FFFFFF"/>
           </a:solidFill>
           <a:ln w="12700">
             <a:solidFill>
-              <a:srgbClr val="D6E8F2"/>
+              <a:srgbClr val="B9D7E6"/>
             </a:solidFill>
             <a:prstDash val="solid"/>
           </a:ln>
@@ -16179,119 +15378,112 @@
       </p:sp>
       <p:sp>
         <p:nvSpPr>
-          <p:cNvPr id="14" name="Shape 12"/>
-          <p:cNvSpPr/>
-          <p:nvPr/>
-        </p:nvSpPr>
-        <p:spPr>
-          <a:xfrm>
-            <a:off x="8074152" y="3291840"/>
-            <a:ext cx="2596896" cy="749808"/>
-          </a:xfrm>
-          <a:prstGeom prst="rect">
-            <a:avLst/>
-          </a:prstGeom>
-          <a:solidFill>
-            <a:srgbClr val="EAF6F8"/>
-          </a:solidFill>
-          <a:ln w="12700">
-            <a:solidFill>
-              <a:srgbClr val="8ABBD8"/>
-            </a:solidFill>
-            <a:prstDash val="solid"/>
-          </a:ln>
-        </p:spPr>
-      </p:sp>
-      <p:sp>
-        <p:nvSpPr>
-          <p:cNvPr id="15" name="Shape 13"/>
-          <p:cNvSpPr/>
-          <p:nvPr/>
-        </p:nvSpPr>
-        <p:spPr>
-          <a:xfrm>
-            <a:off x="8202168" y="3721608"/>
-            <a:ext cx="2340864" cy="0"/>
-          </a:xfrm>
-          <a:prstGeom prst="line">
-            <a:avLst/>
-          </a:prstGeom>
-          <a:noFill/>
-          <a:ln w="19050">
-            <a:solidFill>
-              <a:srgbClr val="0068B7"/>
-            </a:solidFill>
-            <a:prstDash val="solid"/>
-          </a:ln>
-        </p:spPr>
+          <p:cNvPr id="14" name="Text 12"/>
+          <p:cNvSpPr/>
+          <p:nvPr/>
+        </p:nvSpPr>
+        <p:spPr>
+          <a:xfrm>
+            <a:off x="7799832" y="2935224"/>
+            <a:ext cx="3145536" cy="256032"/>
+          </a:xfrm>
+          <a:prstGeom prst="rect">
+            <a:avLst/>
+          </a:prstGeom>
+          <a:noFill/>
+          <a:ln/>
+        </p:spPr>
+        <p:txBody>
+          <a:bodyPr wrap="square" lIns="0" tIns="0" rIns="0" bIns="0" rtlCol="0" anchor="ctr"/>
+          <a:lstStyle/>
+          <a:p>
+            <a:pPr indent="0" marL="0">
+              <a:buNone/>
+            </a:pPr>
+            <a:r>
+              <a:rPr lang="en-US" sz="1300" b="1" dirty="0">
+                <a:solidFill>
+                  <a:srgbClr val="0068B7"/>
+                </a:solidFill>
+                <a:latin typeface="Aptos" pitchFamily="34" charset="0"/>
+                <a:ea typeface="Aptos" pitchFamily="34" charset="-122"/>
+                <a:cs typeface="Aptos" pitchFamily="34" charset="-120"/>
+              </a:rPr>
+              <a:t>Concept checkpoints</a:t>
+            </a:r>
+            <a:endParaRPr lang="en-US" sz="1300" dirty="0"/>
+          </a:p>
+        </p:txBody>
+      </p:sp>
+      <p:sp>
+        <p:nvSpPr>
+          <p:cNvPr id="15" name="Text 13"/>
+          <p:cNvSpPr/>
+          <p:nvPr/>
+        </p:nvSpPr>
+        <p:spPr>
+          <a:xfrm>
+            <a:off x="7818120" y="3300984"/>
+            <a:ext cx="3090672" cy="877824"/>
+          </a:xfrm>
+          <a:prstGeom prst="rect">
+            <a:avLst/>
+          </a:prstGeom>
+          <a:noFill/>
+          <a:ln/>
+        </p:spPr>
+        <p:txBody>
+          <a:bodyPr wrap="square" lIns="254" tIns="254" rIns="254" bIns="254" rtlCol="0" anchor="t">
+            <a:normAutofit/>
+          </a:bodyPr>
+          <a:lstStyle/>
+          <a:p>
+            <a:r>
+              <a:rPr lang="en-US" sz="1380" dirty="0">
+                <a:solidFill>
+                  <a:srgbClr val="17364A"/>
+                </a:solidFill>
+                <a:latin typeface="Aptos" pitchFamily="34" charset="0"/>
+                <a:ea typeface="Aptos" pitchFamily="34" charset="-122"/>
+                <a:cs typeface="Aptos" pitchFamily="34" charset="-120"/>
+              </a:rPr>
+              <a:t>If communities discover that AI is being used in surveillance, communication, service.</a:t>
+            </a:r>
+            <a:endParaRPr lang="en-US" sz="1380" dirty="0"/>
+          </a:p>
+          <a:p>
+            <a:r>
+              <a:rPr lang="en-US" sz="1380" dirty="0">
+                <a:solidFill>
+                  <a:srgbClr val="17364A"/>
+                </a:solidFill>
+                <a:latin typeface="Aptos" pitchFamily="34" charset="0"/>
+                <a:ea typeface="Aptos" pitchFamily="34" charset="-122"/>
+                <a:cs typeface="Aptos" pitchFamily="34" charset="-120"/>
+              </a:rPr>
+              <a:t>Transparency does not require agencies to disclose every technical detail, but it does.</a:t>
+            </a:r>
+            <a:endParaRPr lang="en-US" sz="1380" dirty="0"/>
+          </a:p>
+          <a:p>
+            <a:r>
+              <a:rPr lang="en-US" sz="1380" dirty="0">
+                <a:solidFill>
+                  <a:srgbClr val="17364A"/>
+                </a:solidFill>
+                <a:latin typeface="Aptos" pitchFamily="34" charset="0"/>
+                <a:ea typeface="Aptos" pitchFamily="34" charset="-122"/>
+                <a:cs typeface="Aptos" pitchFamily="34" charset="-120"/>
+              </a:rPr>
+              <a:t>Transparency also improves internal accountability.</a:t>
+            </a:r>
+            <a:endParaRPr lang="en-US" sz="1380" dirty="0"/>
+          </a:p>
+        </p:txBody>
       </p:sp>
       <p:sp>
         <p:nvSpPr>
           <p:cNvPr id="16" name="Shape 14"/>
-          <p:cNvSpPr/>
-          <p:nvPr/>
-        </p:nvSpPr>
-        <p:spPr>
-          <a:xfrm>
-            <a:off x="9198864" y="4206240"/>
-            <a:ext cx="347472" cy="347472"/>
-          </a:xfrm>
-          <a:prstGeom prst="ellipse">
-            <a:avLst/>
-          </a:prstGeom>
-          <a:solidFill>
-            <a:srgbClr val="2F8A28"/>
-          </a:solidFill>
-          <a:ln w="12700">
-            <a:solidFill>
-              <a:srgbClr val="2F8A28"/>
-            </a:solidFill>
-            <a:prstDash val="solid"/>
-          </a:ln>
-        </p:spPr>
-      </p:sp>
-      <p:sp>
-        <p:nvSpPr>
-          <p:cNvPr id="17" name="Text 15"/>
-          <p:cNvSpPr/>
-          <p:nvPr/>
-        </p:nvSpPr>
-        <p:spPr>
-          <a:xfrm>
-            <a:off x="7909560" y="3977640"/>
-            <a:ext cx="2926080" cy="182880"/>
-          </a:xfrm>
-          <a:prstGeom prst="rect">
-            <a:avLst/>
-          </a:prstGeom>
-          <a:noFill/>
-          <a:ln/>
-        </p:spPr>
-        <p:txBody>
-          <a:bodyPr wrap="square" lIns="0" tIns="0" rIns="0" bIns="0" rtlCol="0" anchor="ctr"/>
-          <a:lstStyle/>
-          <a:p>
-            <a:pPr algn="ctr" indent="0" marL="0">
-              <a:buNone/>
-            </a:pPr>
-            <a:r>
-              <a:rPr lang="en-US" sz="1000" dirty="0">
-                <a:solidFill>
-                  <a:srgbClr val="003A63"/>
-                </a:solidFill>
-                <a:latin typeface="Aptos" pitchFamily="34" charset="0"/>
-                <a:ea typeface="Aptos" pitchFamily="34" charset="-122"/>
-                <a:cs typeface="Aptos" pitchFamily="34" charset="-120"/>
-              </a:rPr>
-              <a:t>Concept to action</a:t>
-            </a:r>
-            <a:endParaRPr lang="en-US" sz="1000" dirty="0"/>
-          </a:p>
-        </p:txBody>
-      </p:sp>
-      <p:sp>
-        <p:nvSpPr>
-          <p:cNvPr id="18" name="Shape 16"/>
           <p:cNvSpPr/>
           <p:nvPr/>
         </p:nvSpPr>
@@ -16318,7 +15510,7 @@
       </p:sp>
       <p:sp>
         <p:nvSpPr>
-          <p:cNvPr id="19" name="Text 17"/>
+          <p:cNvPr id="17" name="Text 15"/>
           <p:cNvSpPr/>
           <p:nvPr/>
         </p:nvSpPr>
@@ -16357,7 +15549,7 @@
       </p:sp>
       <p:sp>
         <p:nvSpPr>
-          <p:cNvPr id="20" name="Text 18"/>
+          <p:cNvPr id="18" name="Text 16"/>
           <p:cNvSpPr/>
           <p:nvPr/>
         </p:nvSpPr>
@@ -16865,13 +16057,11 @@
             </a:avLst>
           </a:prstGeom>
           <a:solidFill>
-            <a:srgbClr val="FFFFFF">
-              <a:alpha val="88000"/>
-            </a:srgbClr>
+            <a:srgbClr val="FFFFFF"/>
           </a:solidFill>
           <a:ln w="12700">
             <a:solidFill>
-              <a:srgbClr val="D6E8F2"/>
+              <a:srgbClr val="B9D7E6"/>
             </a:solidFill>
             <a:prstDash val="solid"/>
           </a:ln>
@@ -16879,119 +16069,112 @@
       </p:sp>
       <p:sp>
         <p:nvSpPr>
-          <p:cNvPr id="14" name="Shape 12"/>
-          <p:cNvSpPr/>
-          <p:nvPr/>
-        </p:nvSpPr>
-        <p:spPr>
-          <a:xfrm>
-            <a:off x="8074152" y="3291840"/>
-            <a:ext cx="2596896" cy="749808"/>
-          </a:xfrm>
-          <a:prstGeom prst="rect">
-            <a:avLst/>
-          </a:prstGeom>
-          <a:solidFill>
-            <a:srgbClr val="EAF6F8"/>
-          </a:solidFill>
-          <a:ln w="12700">
-            <a:solidFill>
-              <a:srgbClr val="8ABBD8"/>
-            </a:solidFill>
-            <a:prstDash val="solid"/>
-          </a:ln>
-        </p:spPr>
-      </p:sp>
-      <p:sp>
-        <p:nvSpPr>
-          <p:cNvPr id="15" name="Shape 13"/>
-          <p:cNvSpPr/>
-          <p:nvPr/>
-        </p:nvSpPr>
-        <p:spPr>
-          <a:xfrm>
-            <a:off x="8202168" y="3721608"/>
-            <a:ext cx="2340864" cy="0"/>
-          </a:xfrm>
-          <a:prstGeom prst="line">
-            <a:avLst/>
-          </a:prstGeom>
-          <a:noFill/>
-          <a:ln w="19050">
-            <a:solidFill>
-              <a:srgbClr val="0068B7"/>
-            </a:solidFill>
-            <a:prstDash val="solid"/>
-          </a:ln>
-        </p:spPr>
+          <p:cNvPr id="14" name="Text 12"/>
+          <p:cNvSpPr/>
+          <p:nvPr/>
+        </p:nvSpPr>
+        <p:spPr>
+          <a:xfrm>
+            <a:off x="7799832" y="2935224"/>
+            <a:ext cx="3145536" cy="256032"/>
+          </a:xfrm>
+          <a:prstGeom prst="rect">
+            <a:avLst/>
+          </a:prstGeom>
+          <a:noFill/>
+          <a:ln/>
+        </p:spPr>
+        <p:txBody>
+          <a:bodyPr wrap="square" lIns="0" tIns="0" rIns="0" bIns="0" rtlCol="0" anchor="ctr"/>
+          <a:lstStyle/>
+          <a:p>
+            <a:pPr indent="0" marL="0">
+              <a:buNone/>
+            </a:pPr>
+            <a:r>
+              <a:rPr lang="en-US" sz="1300" b="1" dirty="0">
+                <a:solidFill>
+                  <a:srgbClr val="0068B7"/>
+                </a:solidFill>
+                <a:latin typeface="Aptos" pitchFamily="34" charset="0"/>
+                <a:ea typeface="Aptos" pitchFamily="34" charset="-122"/>
+                <a:cs typeface="Aptos" pitchFamily="34" charset="-120"/>
+              </a:rPr>
+              <a:t>Concept checkpoints</a:t>
+            </a:r>
+            <a:endParaRPr lang="en-US" sz="1300" dirty="0"/>
+          </a:p>
+        </p:txBody>
+      </p:sp>
+      <p:sp>
+        <p:nvSpPr>
+          <p:cNvPr id="15" name="Text 13"/>
+          <p:cNvSpPr/>
+          <p:nvPr/>
+        </p:nvSpPr>
+        <p:spPr>
+          <a:xfrm>
+            <a:off x="7818120" y="3300984"/>
+            <a:ext cx="3090672" cy="877824"/>
+          </a:xfrm>
+          <a:prstGeom prst="rect">
+            <a:avLst/>
+          </a:prstGeom>
+          <a:noFill/>
+          <a:ln/>
+        </p:spPr>
+        <p:txBody>
+          <a:bodyPr wrap="square" lIns="254" tIns="254" rIns="254" bIns="254" rtlCol="0" anchor="t">
+            <a:normAutofit/>
+          </a:bodyPr>
+          <a:lstStyle/>
+          <a:p>
+            <a:r>
+              <a:rPr lang="en-US" sz="1380" dirty="0">
+                <a:solidFill>
+                  <a:srgbClr val="17364A"/>
+                </a:solidFill>
+                <a:latin typeface="Aptos" pitchFamily="34" charset="0"/>
+                <a:ea typeface="Aptos" pitchFamily="34" charset="-122"/>
+                <a:cs typeface="Aptos" pitchFamily="34" charset="-120"/>
+              </a:rPr>
+              <a:t>A health department uses AI to draft public health messages, summarize internal reports,.</a:t>
+            </a:r>
+            <a:endParaRPr lang="en-US" sz="1380" dirty="0"/>
+          </a:p>
+          <a:p>
+            <a:r>
+              <a:rPr lang="en-US" sz="1380" dirty="0">
+                <a:solidFill>
+                  <a:srgbClr val="17364A"/>
+                </a:solidFill>
+                <a:latin typeface="Aptos" pitchFamily="34" charset="0"/>
+                <a:ea typeface="Aptos" pitchFamily="34" charset="-122"/>
+                <a:cs typeface="Aptos" pitchFamily="34" charset="-120"/>
+              </a:rPr>
+              <a:t>Some uses may not require broad public disclosure, while others may affect public services.</a:t>
+            </a:r>
+            <a:endParaRPr lang="en-US" sz="1380" dirty="0"/>
+          </a:p>
+          <a:p>
+            <a:r>
+              <a:rPr lang="en-US" sz="1380" dirty="0">
+                <a:solidFill>
+                  <a:srgbClr val="17364A"/>
+                </a:solidFill>
+                <a:latin typeface="Aptos" pitchFamily="34" charset="0"/>
+                <a:ea typeface="Aptos" pitchFamily="34" charset="-122"/>
+                <a:cs typeface="Aptos" pitchFamily="34" charset="-120"/>
+              </a:rPr>
+              <a:t>The registry does not need to reveal sensitive security details, but it should identify.</a:t>
+            </a:r>
+            <a:endParaRPr lang="en-US" sz="1380" dirty="0"/>
+          </a:p>
+        </p:txBody>
       </p:sp>
       <p:sp>
         <p:nvSpPr>
           <p:cNvPr id="16" name="Shape 14"/>
-          <p:cNvSpPr/>
-          <p:nvPr/>
-        </p:nvSpPr>
-        <p:spPr>
-          <a:xfrm>
-            <a:off x="9198864" y="4206240"/>
-            <a:ext cx="347472" cy="347472"/>
-          </a:xfrm>
-          <a:prstGeom prst="ellipse">
-            <a:avLst/>
-          </a:prstGeom>
-          <a:solidFill>
-            <a:srgbClr val="2F8A28"/>
-          </a:solidFill>
-          <a:ln w="12700">
-            <a:solidFill>
-              <a:srgbClr val="2F8A28"/>
-            </a:solidFill>
-            <a:prstDash val="solid"/>
-          </a:ln>
-        </p:spPr>
-      </p:sp>
-      <p:sp>
-        <p:nvSpPr>
-          <p:cNvPr id="17" name="Text 15"/>
-          <p:cNvSpPr/>
-          <p:nvPr/>
-        </p:nvSpPr>
-        <p:spPr>
-          <a:xfrm>
-            <a:off x="7909560" y="3977640"/>
-            <a:ext cx="2926080" cy="182880"/>
-          </a:xfrm>
-          <a:prstGeom prst="rect">
-            <a:avLst/>
-          </a:prstGeom>
-          <a:noFill/>
-          <a:ln/>
-        </p:spPr>
-        <p:txBody>
-          <a:bodyPr wrap="square" lIns="0" tIns="0" rIns="0" bIns="0" rtlCol="0" anchor="ctr"/>
-          <a:lstStyle/>
-          <a:p>
-            <a:pPr algn="ctr" indent="0" marL="0">
-              <a:buNone/>
-            </a:pPr>
-            <a:r>
-              <a:rPr lang="en-US" sz="1000" dirty="0">
-                <a:solidFill>
-                  <a:srgbClr val="003A63"/>
-                </a:solidFill>
-                <a:latin typeface="Aptos" pitchFamily="34" charset="0"/>
-                <a:ea typeface="Aptos" pitchFamily="34" charset="-122"/>
-                <a:cs typeface="Aptos" pitchFamily="34" charset="-120"/>
-              </a:rPr>
-              <a:t>Concept to action</a:t>
-            </a:r>
-            <a:endParaRPr lang="en-US" sz="1000" dirty="0"/>
-          </a:p>
-        </p:txBody>
-      </p:sp>
-      <p:sp>
-        <p:nvSpPr>
-          <p:cNvPr id="18" name="Shape 16"/>
           <p:cNvSpPr/>
           <p:nvPr/>
         </p:nvSpPr>
@@ -17018,7 +16201,7 @@
       </p:sp>
       <p:sp>
         <p:nvSpPr>
-          <p:cNvPr id="19" name="Text 17"/>
+          <p:cNvPr id="17" name="Text 15"/>
           <p:cNvSpPr/>
           <p:nvPr/>
         </p:nvSpPr>
@@ -17057,7 +16240,7 @@
       </p:sp>
       <p:sp>
         <p:nvSpPr>
-          <p:cNvPr id="20" name="Text 18"/>
+          <p:cNvPr id="18" name="Text 16"/>
           <p:cNvSpPr/>
           <p:nvPr/>
         </p:nvSpPr>

--- a/downloads/presentations/modules/gov-420.pptx
+++ b/downloads/presentations/modules/gov-420.pptx
@@ -3253,49 +3253,58 @@
           <a:ln/>
         </p:spPr>
         <p:txBody>
-          <a:bodyPr wrap="square" lIns="635" tIns="635" rIns="635" bIns="635" rtlCol="0" anchor="t">
+          <a:bodyPr wrap="square" lIns="1016" tIns="1016" rIns="1016" bIns="1016" rtlCol="0" anchor="t">
             <a:normAutofit/>
           </a:bodyPr>
           <a:lstStyle/>
           <a:p>
+            <a:pPr indent="0" marL="0">
+              <a:buNone/>
+            </a:pPr>
             <a:r>
               <a:rPr lang="en-US" sz="2100" dirty="0">
                 <a:solidFill>
-                  <a:srgbClr val="17364A"/>
-                </a:solidFill>
-                <a:latin typeface="Aptos" pitchFamily="34" charset="0"/>
-                <a:ea typeface="Aptos" pitchFamily="34" charset="-122"/>
-                <a:cs typeface="Aptos" pitchFamily="34" charset="-120"/>
-              </a:rPr>
-              <a:t>Transparency reporting should be risk-based.</a:t>
+                  <a:srgbClr val="003A63"/>
+                </a:solidFill>
+                <a:latin typeface="Aptos" pitchFamily="34" charset="0"/>
+                <a:ea typeface="Aptos" pitchFamily="34" charset="-122"/>
+                <a:cs typeface="Aptos" pitchFamily="34" charset="-120"/>
+              </a:rPr>
+              <a:t>• Transparency reporting should be risk-based.</a:t>
             </a:r>
             <a:endParaRPr lang="en-US" sz="2100" dirty="0"/>
           </a:p>
           <a:p>
+            <a:pPr indent="0" marL="0">
+              <a:buNone/>
+            </a:pPr>
             <a:r>
               <a:rPr lang="en-US" sz="2100" dirty="0">
                 <a:solidFill>
-                  <a:srgbClr val="17364A"/>
-                </a:solidFill>
-                <a:latin typeface="Aptos" pitchFamily="34" charset="0"/>
-                <a:ea typeface="Aptos" pitchFamily="34" charset="-122"/>
-                <a:cs typeface="Aptos" pitchFamily="34" charset="-120"/>
-              </a:rPr>
-              <a:t>Low-risk internal tools may be documented in an internal registry.</a:t>
+                  <a:srgbClr val="003A63"/>
+                </a:solidFill>
+                <a:latin typeface="Aptos" pitchFamily="34" charset="0"/>
+                <a:ea typeface="Aptos" pitchFamily="34" charset="-122"/>
+                <a:cs typeface="Aptos" pitchFamily="34" charset="-120"/>
+              </a:rPr>
+              <a:t>• Low-risk internal tools may be documented in an internal registry.</a:t>
             </a:r>
             <a:endParaRPr lang="en-US" sz="2100" dirty="0"/>
           </a:p>
           <a:p>
+            <a:pPr indent="0" marL="0">
+              <a:buNone/>
+            </a:pPr>
             <a:r>
               <a:rPr lang="en-US" sz="2100" dirty="0">
                 <a:solidFill>
-                  <a:srgbClr val="17364A"/>
-                </a:solidFill>
-                <a:latin typeface="Aptos" pitchFamily="34" charset="0"/>
-                <a:ea typeface="Aptos" pitchFamily="34" charset="-122"/>
-                <a:cs typeface="Aptos" pitchFamily="34" charset="-120"/>
-              </a:rPr>
-              <a:t>Tools that influence public communication, prioritization, access, enforcement, or public-facing.</a:t>
+                  <a:srgbClr val="003A63"/>
+                </a:solidFill>
+                <a:latin typeface="Aptos" pitchFamily="34" charset="0"/>
+                <a:ea typeface="Aptos" pitchFamily="34" charset="-122"/>
+                <a:cs typeface="Aptos" pitchFamily="34" charset="-120"/>
+              </a:rPr>
+              <a:t>• Tools that influence public communication, prioritization, access, enforcement, or.</a:t>
             </a:r>
             <a:endParaRPr lang="en-US" sz="2100" dirty="0"/>
           </a:p>
@@ -3375,17 +3384,17 @@
         </p:nvSpPr>
         <p:spPr>
           <a:xfrm>
-            <a:off x="7799832" y="1828800"/>
-            <a:ext cx="3145536" cy="685800"/>
-          </a:xfrm>
-          <a:prstGeom prst="rect">
-            <a:avLst/>
-          </a:prstGeom>
-          <a:noFill/>
-          <a:ln/>
-        </p:spPr>
-        <p:txBody>
-          <a:bodyPr wrap="square" lIns="0" tIns="0" rIns="0" bIns="0" rtlCol="0" anchor="t">
+            <a:off x="7799832" y="1801368"/>
+            <a:ext cx="3145536" cy="758952"/>
+          </a:xfrm>
+          <a:prstGeom prst="rect">
+            <a:avLst/>
+          </a:prstGeom>
+          <a:noFill/>
+          <a:ln/>
+        </p:spPr>
+        <p:txBody>
+          <a:bodyPr wrap="square" lIns="254" tIns="254" rIns="254" bIns="254" rtlCol="0" anchor="t">
             <a:normAutofit/>
           </a:bodyPr>
           <a:lstStyle/>
@@ -3394,7 +3403,7 @@
               <a:buNone/>
             </a:pPr>
             <a:r>
-              <a:rPr lang="en-US" sz="1550" dirty="0">
+              <a:rPr lang="en-US" sz="1320" dirty="0">
                 <a:solidFill>
                   <a:srgbClr val="17364A"/>
                 </a:solidFill>
@@ -3404,7 +3413,7 @@
               </a:rPr>
               <a:t>Transparency reporting should be risk-based.</a:t>
             </a:r>
-            <a:endParaRPr lang="en-US" sz="1550" dirty="0"/>
+            <a:endParaRPr lang="en-US" sz="1320" dirty="0"/>
           </a:p>
         </p:txBody>
       </p:sp>
@@ -3492,13 +3501,16 @@
           <a:ln/>
         </p:spPr>
         <p:txBody>
-          <a:bodyPr wrap="square" lIns="254" tIns="254" rIns="254" bIns="254" rtlCol="0" anchor="t">
+          <a:bodyPr wrap="square" lIns="508" tIns="508" rIns="508" bIns="508" rtlCol="0" anchor="t">
             <a:normAutofit/>
           </a:bodyPr>
           <a:lstStyle/>
           <a:p>
-            <a:r>
-              <a:rPr lang="en-US" sz="1380" dirty="0">
+            <a:pPr indent="0" marL="0">
+              <a:buNone/>
+            </a:pPr>
+            <a:r>
+              <a:rPr lang="en-US" sz="1220" dirty="0">
                 <a:solidFill>
                   <a:srgbClr val="17364A"/>
                 </a:solidFill>
@@ -3506,13 +3518,16 @@
                 <a:ea typeface="Aptos" pitchFamily="34" charset="-122"/>
                 <a:cs typeface="Aptos" pitchFamily="34" charset="-120"/>
               </a:rPr>
-              <a:t>Tools that influence public communication, prioritization, access, enforcement, or.</a:t>
-            </a:r>
-            <a:endParaRPr lang="en-US" sz="1380" dirty="0"/>
-          </a:p>
-          <a:p>
-            <a:r>
-              <a:rPr lang="en-US" sz="1380" dirty="0">
+              <a:t>Tools that influence public communication, prioritization, access,.</a:t>
+            </a:r>
+            <a:endParaRPr lang="en-US" sz="1220" dirty="0"/>
+          </a:p>
+          <a:p>
+            <a:pPr indent="0" marL="0">
+              <a:buNone/>
+            </a:pPr>
+            <a:r>
+              <a:rPr lang="en-US" sz="1220" dirty="0">
                 <a:solidFill>
                   <a:srgbClr val="17364A"/>
                 </a:solidFill>
@@ -3520,13 +3535,16 @@
                 <a:ea typeface="Aptos" pitchFamily="34" charset="-122"/>
                 <a:cs typeface="Aptos" pitchFamily="34" charset="-120"/>
               </a:rPr>
-              <a:t>High-impact tools may require more detailed documentation, such as intended use, data.</a:t>
-            </a:r>
-            <a:endParaRPr lang="en-US" sz="1380" dirty="0"/>
-          </a:p>
-          <a:p>
-            <a:r>
-              <a:rPr lang="en-US" sz="1380" dirty="0">
+              <a:t>High-impact tools may require more detailed documentation, such as.</a:t>
+            </a:r>
+            <a:endParaRPr lang="en-US" sz="1220" dirty="0"/>
+          </a:p>
+          <a:p>
+            <a:pPr indent="0" marL="0">
+              <a:buNone/>
+            </a:pPr>
+            <a:r>
+              <a:rPr lang="en-US" sz="1220" dirty="0">
                 <a:solidFill>
                   <a:srgbClr val="17364A"/>
                 </a:solidFill>
@@ -3536,7 +3554,7 @@
               </a:rPr>
               <a:t>The reporting process should be accessible.</a:t>
             </a:r>
-            <a:endParaRPr lang="en-US" sz="1380" dirty="0"/>
+            <a:endParaRPr lang="en-US" sz="1220" dirty="0"/>
           </a:p>
         </p:txBody>
       </p:sp>
@@ -3614,17 +3632,17 @@
         </p:nvSpPr>
         <p:spPr>
           <a:xfrm>
-            <a:off x="7799832" y="5001768"/>
-            <a:ext cx="3145536" cy="502920"/>
-          </a:xfrm>
-          <a:prstGeom prst="rect">
-            <a:avLst/>
-          </a:prstGeom>
-          <a:noFill/>
-          <a:ln/>
-        </p:spPr>
-        <p:txBody>
-          <a:bodyPr wrap="square" lIns="0" tIns="0" rIns="0" bIns="0" rtlCol="0" anchor="t">
+            <a:off x="7799832" y="4974336"/>
+            <a:ext cx="3145536" cy="576072"/>
+          </a:xfrm>
+          <a:prstGeom prst="rect">
+            <a:avLst/>
+          </a:prstGeom>
+          <a:noFill/>
+          <a:ln/>
+        </p:spPr>
+        <p:txBody>
+          <a:bodyPr wrap="square" lIns="254" tIns="254" rIns="254" bIns="254" rtlCol="0" anchor="t">
             <a:normAutofit/>
           </a:bodyPr>
           <a:lstStyle/>
@@ -3633,7 +3651,7 @@
               <a:buNone/>
             </a:pPr>
             <a:r>
-              <a:rPr lang="en-US" sz="1550" dirty="0">
+              <a:rPr lang="en-US" sz="1320" dirty="0">
                 <a:solidFill>
                   <a:srgbClr val="17364A"/>
                 </a:solidFill>
@@ -3641,9 +3659,9 @@
                 <a:ea typeface="Aptos" pitchFamily="34" charset="-122"/>
                 <a:cs typeface="Aptos" pitchFamily="34" charset="-120"/>
               </a:rPr>
-              <a:t>Translate this concept into clear decision rights, review steps, documentation expectations, and escalation paths before an AI-supported workflow is approved.</a:t>
-            </a:r>
-            <a:endParaRPr lang="en-US" sz="1550" dirty="0"/>
+              <a:t>Translate this concept into clear decision rights, review steps, documentation expectations, and escalation paths before.</a:t>
+            </a:r>
+            <a:endParaRPr lang="en-US" sz="1320" dirty="0"/>
           </a:p>
         </p:txBody>
       </p:sp>
@@ -3944,49 +3962,58 @@
           <a:ln/>
         </p:spPr>
         <p:txBody>
-          <a:bodyPr wrap="square" lIns="635" tIns="635" rIns="635" bIns="635" rtlCol="0" anchor="t">
+          <a:bodyPr wrap="square" lIns="1016" tIns="1016" rIns="1016" bIns="1016" rtlCol="0" anchor="t">
             <a:normAutofit/>
           </a:bodyPr>
           <a:lstStyle/>
           <a:p>
+            <a:pPr indent="0" marL="0">
+              <a:buNone/>
+            </a:pPr>
             <a:r>
               <a:rPr lang="en-US" sz="2100" dirty="0">
                 <a:solidFill>
-                  <a:srgbClr val="17364A"/>
-                </a:solidFill>
-                <a:latin typeface="Aptos" pitchFamily="34" charset="0"/>
-                <a:ea typeface="Aptos" pitchFamily="34" charset="-122"/>
-                <a:cs typeface="Aptos" pitchFamily="34" charset="-120"/>
-              </a:rPr>
-              <a:t>One risk is transparency theater.</a:t>
+                  <a:srgbClr val="003A63"/>
+                </a:solidFill>
+                <a:latin typeface="Aptos" pitchFamily="34" charset="0"/>
+                <a:ea typeface="Aptos" pitchFamily="34" charset="-122"/>
+                <a:cs typeface="Aptos" pitchFamily="34" charset="-120"/>
+              </a:rPr>
+              <a:t>• One risk is transparency theater.</a:t>
             </a:r>
             <a:endParaRPr lang="en-US" sz="2100" dirty="0"/>
           </a:p>
           <a:p>
+            <a:pPr indent="0" marL="0">
+              <a:buNone/>
+            </a:pPr>
             <a:r>
               <a:rPr lang="en-US" sz="2100" dirty="0">
                 <a:solidFill>
-                  <a:srgbClr val="17364A"/>
-                </a:solidFill>
-                <a:latin typeface="Aptos" pitchFamily="34" charset="0"/>
-                <a:ea typeface="Aptos" pitchFamily="34" charset="-122"/>
-                <a:cs typeface="Aptos" pitchFamily="34" charset="-120"/>
-              </a:rPr>
-              <a:t>Agencies may publish broad statements about responsible AI without disclosing actual uses, owners, or.</a:t>
+                  <a:srgbClr val="003A63"/>
+                </a:solidFill>
+                <a:latin typeface="Aptos" pitchFamily="34" charset="0"/>
+                <a:ea typeface="Aptos" pitchFamily="34" charset="-122"/>
+                <a:cs typeface="Aptos" pitchFamily="34" charset="-120"/>
+              </a:rPr>
+              <a:t>• Agencies may publish broad statements about responsible AI without disclosing actual uses,.</a:t>
             </a:r>
             <a:endParaRPr lang="en-US" sz="2100" dirty="0"/>
           </a:p>
           <a:p>
+            <a:pPr indent="0" marL="0">
+              <a:buNone/>
+            </a:pPr>
             <a:r>
               <a:rPr lang="en-US" sz="2100" dirty="0">
                 <a:solidFill>
-                  <a:srgbClr val="17364A"/>
-                </a:solidFill>
-                <a:latin typeface="Aptos" pitchFamily="34" charset="0"/>
-                <a:ea typeface="Aptos" pitchFamily="34" charset="-122"/>
-                <a:cs typeface="Aptos" pitchFamily="34" charset="-120"/>
-              </a:rPr>
-              <a:t>A guardrail is to maintain an AI use registry with concrete information about approved and operational.</a:t>
+                  <a:srgbClr val="003A63"/>
+                </a:solidFill>
+                <a:latin typeface="Aptos" pitchFamily="34" charset="0"/>
+                <a:ea typeface="Aptos" pitchFamily="34" charset="-122"/>
+                <a:cs typeface="Aptos" pitchFamily="34" charset="-120"/>
+              </a:rPr>
+              <a:t>• A guardrail is to maintain an AI use registry with concrete information about approved and.</a:t>
             </a:r>
             <a:endParaRPr lang="en-US" sz="2100" dirty="0"/>
           </a:p>
@@ -4066,17 +4093,17 @@
         </p:nvSpPr>
         <p:spPr>
           <a:xfrm>
-            <a:off x="7799832" y="1828800"/>
-            <a:ext cx="3145536" cy="685800"/>
-          </a:xfrm>
-          <a:prstGeom prst="rect">
-            <a:avLst/>
-          </a:prstGeom>
-          <a:noFill/>
-          <a:ln/>
-        </p:spPr>
-        <p:txBody>
-          <a:bodyPr wrap="square" lIns="0" tIns="0" rIns="0" bIns="0" rtlCol="0" anchor="t">
+            <a:off x="7799832" y="1801368"/>
+            <a:ext cx="3145536" cy="758952"/>
+          </a:xfrm>
+          <a:prstGeom prst="rect">
+            <a:avLst/>
+          </a:prstGeom>
+          <a:noFill/>
+          <a:ln/>
+        </p:spPr>
+        <p:txBody>
+          <a:bodyPr wrap="square" lIns="254" tIns="254" rIns="254" bIns="254" rtlCol="0" anchor="t">
             <a:normAutofit/>
           </a:bodyPr>
           <a:lstStyle/>
@@ -4085,7 +4112,7 @@
               <a:buNone/>
             </a:pPr>
             <a:r>
-              <a:rPr lang="en-US" sz="1550" dirty="0">
+              <a:rPr lang="en-US" sz="1320" dirty="0">
                 <a:solidFill>
                   <a:srgbClr val="17364A"/>
                 </a:solidFill>
@@ -4095,7 +4122,7 @@
               </a:rPr>
               <a:t>One risk is transparency theater.</a:t>
             </a:r>
-            <a:endParaRPr lang="en-US" sz="1550" dirty="0"/>
+            <a:endParaRPr lang="en-US" sz="1320" dirty="0"/>
           </a:p>
         </p:txBody>
       </p:sp>
@@ -4183,13 +4210,16 @@
           <a:ln/>
         </p:spPr>
         <p:txBody>
-          <a:bodyPr wrap="square" lIns="254" tIns="254" rIns="254" bIns="254" rtlCol="0" anchor="t">
+          <a:bodyPr wrap="square" lIns="508" tIns="508" rIns="508" bIns="508" rtlCol="0" anchor="t">
             <a:normAutofit/>
           </a:bodyPr>
           <a:lstStyle/>
           <a:p>
-            <a:r>
-              <a:rPr lang="en-US" sz="1380" dirty="0">
+            <a:pPr indent="0" marL="0">
+              <a:buNone/>
+            </a:pPr>
+            <a:r>
+              <a:rPr lang="en-US" sz="1220" dirty="0">
                 <a:solidFill>
                   <a:srgbClr val="17364A"/>
                 </a:solidFill>
@@ -4197,13 +4227,16 @@
                 <a:ea typeface="Aptos" pitchFamily="34" charset="-122"/>
                 <a:cs typeface="Aptos" pitchFamily="34" charset="-120"/>
               </a:rPr>
-              <a:t>Agencies may publish broad statements about responsible AI without disclosing actual uses,.</a:t>
-            </a:r>
-            <a:endParaRPr lang="en-US" sz="1380" dirty="0"/>
-          </a:p>
-          <a:p>
-            <a:r>
-              <a:rPr lang="en-US" sz="1380" dirty="0">
+              <a:t>Agencies may publish broad statements about responsible AI without.</a:t>
+            </a:r>
+            <a:endParaRPr lang="en-US" sz="1220" dirty="0"/>
+          </a:p>
+          <a:p>
+            <a:pPr indent="0" marL="0">
+              <a:buNone/>
+            </a:pPr>
+            <a:r>
+              <a:rPr lang="en-US" sz="1220" dirty="0">
                 <a:solidFill>
                   <a:srgbClr val="17364A"/>
                 </a:solidFill>
@@ -4211,13 +4244,16 @@
                 <a:ea typeface="Aptos" pitchFamily="34" charset="-122"/>
                 <a:cs typeface="Aptos" pitchFamily="34" charset="-120"/>
               </a:rPr>
-              <a:t>A guardrail is to maintain an AI use registry with concrete information about approved and.</a:t>
-            </a:r>
-            <a:endParaRPr lang="en-US" sz="1380" dirty="0"/>
-          </a:p>
-          <a:p>
-            <a:r>
-              <a:rPr lang="en-US" sz="1380" dirty="0">
+              <a:t>A guardrail is to maintain an AI use registry with concrete.</a:t>
+            </a:r>
+            <a:endParaRPr lang="en-US" sz="1220" dirty="0"/>
+          </a:p>
+          <a:p>
+            <a:pPr indent="0" marL="0">
+              <a:buNone/>
+            </a:pPr>
+            <a:r>
+              <a:rPr lang="en-US" sz="1220" dirty="0">
                 <a:solidFill>
                   <a:srgbClr val="17364A"/>
                 </a:solidFill>
@@ -4227,7 +4263,7 @@
               </a:rPr>
               <a:t>Another risk is over-disclosure of sensitive details.</a:t>
             </a:r>
-            <a:endParaRPr lang="en-US" sz="1380" dirty="0"/>
+            <a:endParaRPr lang="en-US" sz="1220" dirty="0"/>
           </a:p>
         </p:txBody>
       </p:sp>
@@ -4305,17 +4341,17 @@
         </p:nvSpPr>
         <p:spPr>
           <a:xfrm>
-            <a:off x="7799832" y="5001768"/>
-            <a:ext cx="3145536" cy="502920"/>
-          </a:xfrm>
-          <a:prstGeom prst="rect">
-            <a:avLst/>
-          </a:prstGeom>
-          <a:noFill/>
-          <a:ln/>
-        </p:spPr>
-        <p:txBody>
-          <a:bodyPr wrap="square" lIns="0" tIns="0" rIns="0" bIns="0" rtlCol="0" anchor="t">
+            <a:off x="7799832" y="4974336"/>
+            <a:ext cx="3145536" cy="576072"/>
+          </a:xfrm>
+          <a:prstGeom prst="rect">
+            <a:avLst/>
+          </a:prstGeom>
+          <a:noFill/>
+          <a:ln/>
+        </p:spPr>
+        <p:txBody>
+          <a:bodyPr wrap="square" lIns="254" tIns="254" rIns="254" bIns="254" rtlCol="0" anchor="t">
             <a:normAutofit/>
           </a:bodyPr>
           <a:lstStyle/>
@@ -4324,7 +4360,7 @@
               <a:buNone/>
             </a:pPr>
             <a:r>
-              <a:rPr lang="en-US" sz="1550" dirty="0">
+              <a:rPr lang="en-US" sz="1320" dirty="0">
                 <a:solidFill>
                   <a:srgbClr val="17364A"/>
                 </a:solidFill>
@@ -4332,9 +4368,9 @@
                 <a:ea typeface="Aptos" pitchFamily="34" charset="-122"/>
                 <a:cs typeface="Aptos" pitchFamily="34" charset="-120"/>
               </a:rPr>
-              <a:t>Identify what could go wrong, who could be affected, what safeguards are needed, and what evidence should be reviewed before use expands.</a:t>
-            </a:r>
-            <a:endParaRPr lang="en-US" sz="1550" dirty="0"/>
+              <a:t>Identify what could go wrong, who could be affected, what safeguards are needed, and what evidence should be reviewed.</a:t>
+            </a:r>
+            <a:endParaRPr lang="en-US" sz="1320" dirty="0"/>
           </a:p>
         </p:txBody>
       </p:sp>
@@ -4635,49 +4671,58 @@
           <a:ln/>
         </p:spPr>
         <p:txBody>
-          <a:bodyPr wrap="square" lIns="635" tIns="635" rIns="635" bIns="635" rtlCol="0" anchor="t">
+          <a:bodyPr wrap="square" lIns="1016" tIns="1016" rIns="1016" bIns="1016" rtlCol="0" anchor="t">
             <a:normAutofit/>
           </a:bodyPr>
           <a:lstStyle/>
           <a:p>
+            <a:pPr indent="0" marL="0">
+              <a:buNone/>
+            </a:pPr>
             <a:r>
               <a:rPr lang="en-US" sz="2100" dirty="0">
                 <a:solidFill>
-                  <a:srgbClr val="17364A"/>
-                </a:solidFill>
-                <a:latin typeface="Aptos" pitchFamily="34" charset="0"/>
-                <a:ea typeface="Aptos" pitchFamily="34" charset="-122"/>
-                <a:cs typeface="Aptos" pitchFamily="34" charset="-120"/>
-              </a:rPr>
-              <a:t>Generative AI transparency may explain when AI assists drafting and how human review occurs.</a:t>
+                  <a:srgbClr val="003A63"/>
+                </a:solidFill>
+                <a:latin typeface="Aptos" pitchFamily="34" charset="0"/>
+                <a:ea typeface="Aptos" pitchFamily="34" charset="-122"/>
+                <a:cs typeface="Aptos" pitchFamily="34" charset="-120"/>
+              </a:rPr>
+              <a:t>• Generative AI transparency may explain when AI assists drafting and how human review occurs.</a:t>
             </a:r>
             <a:endParaRPr lang="en-US" sz="2100" dirty="0"/>
           </a:p>
           <a:p>
+            <a:pPr indent="0" marL="0">
+              <a:buNone/>
+            </a:pPr>
             <a:r>
               <a:rPr lang="en-US" sz="2100" dirty="0">
                 <a:solidFill>
-                  <a:srgbClr val="17364A"/>
-                </a:solidFill>
-                <a:latin typeface="Aptos" pitchFamily="34" charset="0"/>
-                <a:ea typeface="Aptos" pitchFamily="34" charset="-122"/>
-                <a:cs typeface="Aptos" pitchFamily="34" charset="-120"/>
-              </a:rPr>
-              <a:t>Predictive analytics transparency may explain what the model supports, what decisions remain human, and.</a:t>
+                  <a:srgbClr val="003A63"/>
+                </a:solidFill>
+                <a:latin typeface="Aptos" pitchFamily="34" charset="0"/>
+                <a:ea typeface="Aptos" pitchFamily="34" charset="-122"/>
+                <a:cs typeface="Aptos" pitchFamily="34" charset="-120"/>
+              </a:rPr>
+              <a:t>• Predictive analytics transparency may explain what the model supports, what decisions remain.</a:t>
             </a:r>
             <a:endParaRPr lang="en-US" sz="2100" dirty="0"/>
           </a:p>
           <a:p>
+            <a:pPr indent="0" marL="0">
+              <a:buNone/>
+            </a:pPr>
             <a:r>
               <a:rPr lang="en-US" sz="2100" dirty="0">
                 <a:solidFill>
-                  <a:srgbClr val="17364A"/>
-                </a:solidFill>
-                <a:latin typeface="Aptos" pitchFamily="34" charset="0"/>
-                <a:ea typeface="Aptos" pitchFamily="34" charset="-122"/>
-                <a:cs typeface="Aptos" pitchFamily="34" charset="-120"/>
-              </a:rPr>
-              <a:t>Agentic AI transparency may explain what actions are automated, what approvals are required, and how.</a:t>
+                  <a:srgbClr val="003A63"/>
+                </a:solidFill>
+                <a:latin typeface="Aptos" pitchFamily="34" charset="0"/>
+                <a:ea typeface="Aptos" pitchFamily="34" charset="-122"/>
+                <a:cs typeface="Aptos" pitchFamily="34" charset="-120"/>
+              </a:rPr>
+              <a:t>• Agentic AI transparency may explain what actions are automated, what approvals are required,.</a:t>
             </a:r>
             <a:endParaRPr lang="en-US" sz="2100" dirty="0"/>
           </a:p>
@@ -4757,17 +4802,17 @@
         </p:nvSpPr>
         <p:spPr>
           <a:xfrm>
-            <a:off x="7799832" y="1828800"/>
-            <a:ext cx="3145536" cy="685800"/>
-          </a:xfrm>
-          <a:prstGeom prst="rect">
-            <a:avLst/>
-          </a:prstGeom>
-          <a:noFill/>
-          <a:ln/>
-        </p:spPr>
-        <p:txBody>
-          <a:bodyPr wrap="square" lIns="0" tIns="0" rIns="0" bIns="0" rtlCol="0" anchor="t">
+            <a:off x="7799832" y="1801368"/>
+            <a:ext cx="3145536" cy="758952"/>
+          </a:xfrm>
+          <a:prstGeom prst="rect">
+            <a:avLst/>
+          </a:prstGeom>
+          <a:noFill/>
+          <a:ln/>
+        </p:spPr>
+        <p:txBody>
+          <a:bodyPr wrap="square" lIns="254" tIns="254" rIns="254" bIns="254" rtlCol="0" anchor="t">
             <a:normAutofit/>
           </a:bodyPr>
           <a:lstStyle/>
@@ -4776,7 +4821,7 @@
               <a:buNone/>
             </a:pPr>
             <a:r>
-              <a:rPr lang="en-US" sz="1550" dirty="0">
+              <a:rPr lang="en-US" sz="1320" dirty="0">
                 <a:solidFill>
                   <a:srgbClr val="17364A"/>
                 </a:solidFill>
@@ -4786,7 +4831,7 @@
               </a:rPr>
               <a:t>Generative AI transparency may explain when AI assists drafting and how human review occurs.</a:t>
             </a:r>
-            <a:endParaRPr lang="en-US" sz="1550" dirty="0"/>
+            <a:endParaRPr lang="en-US" sz="1320" dirty="0"/>
           </a:p>
         </p:txBody>
       </p:sp>
@@ -4874,13 +4919,16 @@
           <a:ln/>
         </p:spPr>
         <p:txBody>
-          <a:bodyPr wrap="square" lIns="254" tIns="254" rIns="254" bIns="254" rtlCol="0" anchor="t">
+          <a:bodyPr wrap="square" lIns="508" tIns="508" rIns="508" bIns="508" rtlCol="0" anchor="t">
             <a:normAutofit/>
           </a:bodyPr>
           <a:lstStyle/>
           <a:p>
-            <a:r>
-              <a:rPr lang="en-US" sz="1380" dirty="0">
+            <a:pPr indent="0" marL="0">
+              <a:buNone/>
+            </a:pPr>
+            <a:r>
+              <a:rPr lang="en-US" sz="1220" dirty="0">
                 <a:solidFill>
                   <a:srgbClr val="17364A"/>
                 </a:solidFill>
@@ -4888,13 +4936,16 @@
                 <a:ea typeface="Aptos" pitchFamily="34" charset="-122"/>
                 <a:cs typeface="Aptos" pitchFamily="34" charset="-120"/>
               </a:rPr>
-              <a:t>Predictive analytics transparency may explain what the model supports, what decisions.</a:t>
-            </a:r>
-            <a:endParaRPr lang="en-US" sz="1380" dirty="0"/>
-          </a:p>
-          <a:p>
-            <a:r>
-              <a:rPr lang="en-US" sz="1380" dirty="0">
+              <a:t>Predictive analytics transparency may explain what the model.</a:t>
+            </a:r>
+            <a:endParaRPr lang="en-US" sz="1220" dirty="0"/>
+          </a:p>
+          <a:p>
+            <a:pPr indent="0" marL="0">
+              <a:buNone/>
+            </a:pPr>
+            <a:r>
+              <a:rPr lang="en-US" sz="1220" dirty="0">
                 <a:solidFill>
                   <a:srgbClr val="17364A"/>
                 </a:solidFill>
@@ -4902,9 +4953,9 @@
                 <a:ea typeface="Aptos" pitchFamily="34" charset="-122"/>
                 <a:cs typeface="Aptos" pitchFamily="34" charset="-120"/>
               </a:rPr>
-              <a:t>Agentic AI transparency may explain what actions are automated, what approvals are.</a:t>
-            </a:r>
-            <a:endParaRPr lang="en-US" sz="1380" dirty="0"/>
+              <a:t>Agentic AI transparency may explain what actions are automated,.</a:t>
+            </a:r>
+            <a:endParaRPr lang="en-US" sz="1220" dirty="0"/>
           </a:p>
         </p:txBody>
       </p:sp>
@@ -4982,17 +5033,17 @@
         </p:nvSpPr>
         <p:spPr>
           <a:xfrm>
-            <a:off x="7799832" y="5001768"/>
-            <a:ext cx="3145536" cy="502920"/>
-          </a:xfrm>
-          <a:prstGeom prst="rect">
-            <a:avLst/>
-          </a:prstGeom>
-          <a:noFill/>
-          <a:ln/>
-        </p:spPr>
-        <p:txBody>
-          <a:bodyPr wrap="square" lIns="0" tIns="0" rIns="0" bIns="0" rtlCol="0" anchor="t">
+            <a:off x="7799832" y="4974336"/>
+            <a:ext cx="3145536" cy="576072"/>
+          </a:xfrm>
+          <a:prstGeom prst="rect">
+            <a:avLst/>
+          </a:prstGeom>
+          <a:noFill/>
+          <a:ln/>
+        </p:spPr>
+        <p:txBody>
+          <a:bodyPr wrap="square" lIns="254" tIns="254" rIns="254" bIns="254" rtlCol="0" anchor="t">
             <a:normAutofit/>
           </a:bodyPr>
           <a:lstStyle/>
@@ -5001,7 +5052,7 @@
               <a:buNone/>
             </a:pPr>
             <a:r>
-              <a:rPr lang="en-US" sz="1550" dirty="0">
+              <a:rPr lang="en-US" sz="1320" dirty="0">
                 <a:solidFill>
                   <a:srgbClr val="17364A"/>
                 </a:solidFill>
@@ -5009,9 +5060,9 @@
                 <a:ea typeface="Aptos" pitchFamily="34" charset="-122"/>
                 <a:cs typeface="Aptos" pitchFamily="34" charset="-120"/>
               </a:rPr>
-              <a:t>Use the concept to clarify workflow changes, dependencies, staffing, procurement requirements, training needs, and implementation checkpoints.</a:t>
-            </a:r>
-            <a:endParaRPr lang="en-US" sz="1550" dirty="0"/>
+              <a:t>Use the concept to clarify workflow changes, dependencies, staffing, procurement requirements, training needs, and.</a:t>
+            </a:r>
+            <a:endParaRPr lang="en-US" sz="1320" dirty="0"/>
           </a:p>
         </p:txBody>
       </p:sp>
@@ -5312,49 +5363,58 @@
           <a:ln/>
         </p:spPr>
         <p:txBody>
-          <a:bodyPr wrap="square" lIns="635" tIns="635" rIns="635" bIns="635" rtlCol="0" anchor="t">
+          <a:bodyPr wrap="square" lIns="1016" tIns="1016" rIns="1016" bIns="1016" rtlCol="0" anchor="t">
             <a:normAutofit/>
           </a:bodyPr>
           <a:lstStyle/>
           <a:p>
+            <a:pPr indent="0" marL="0">
+              <a:buNone/>
+            </a:pPr>
             <a:r>
               <a:rPr lang="en-US" sz="2100" dirty="0">
                 <a:solidFill>
-                  <a:srgbClr val="17364A"/>
-                </a:solidFill>
-                <a:latin typeface="Aptos" pitchFamily="34" charset="0"/>
-                <a:ea typeface="Aptos" pitchFamily="34" charset="-122"/>
-                <a:cs typeface="Aptos" pitchFamily="34" charset="-120"/>
-              </a:rPr>
-              <a:t>Which current or proposed AI use case in your agency raises this leadership or governance issue most.</a:t>
+                  <a:srgbClr val="003A63"/>
+                </a:solidFill>
+                <a:latin typeface="Aptos" pitchFamily="34" charset="0"/>
+                <a:ea typeface="Aptos" pitchFamily="34" charset="-122"/>
+                <a:cs typeface="Aptos" pitchFamily="34" charset="-120"/>
+              </a:rPr>
+              <a:t>• Which current or proposed AI use case in your agency raises this leadership or governance.</a:t>
             </a:r>
             <a:endParaRPr lang="en-US" sz="2100" dirty="0"/>
           </a:p>
           <a:p>
+            <a:pPr indent="0" marL="0">
+              <a:buNone/>
+            </a:pPr>
             <a:r>
               <a:rPr lang="en-US" sz="2100" dirty="0">
                 <a:solidFill>
-                  <a:srgbClr val="17364A"/>
-                </a:solidFill>
-                <a:latin typeface="Aptos" pitchFamily="34" charset="0"/>
-                <a:ea typeface="Aptos" pitchFamily="34" charset="-122"/>
-                <a:cs typeface="Aptos" pitchFamily="34" charset="-120"/>
-              </a:rPr>
-              <a:t>Who currently has authority to make decisions about this issue, and is that authority documented?</a:t>
+                  <a:srgbClr val="003A63"/>
+                </a:solidFill>
+                <a:latin typeface="Aptos" pitchFamily="34" charset="0"/>
+                <a:ea typeface="Aptos" pitchFamily="34" charset="-122"/>
+                <a:cs typeface="Aptos" pitchFamily="34" charset="-120"/>
+              </a:rPr>
+              <a:t>• Who currently has authority to make decisions about this issue, and is that authority.</a:t>
             </a:r>
             <a:endParaRPr lang="en-US" sz="2100" dirty="0"/>
           </a:p>
           <a:p>
+            <a:pPr indent="0" marL="0">
+              <a:buNone/>
+            </a:pPr>
             <a:r>
               <a:rPr lang="en-US" sz="2100" dirty="0">
                 <a:solidFill>
-                  <a:srgbClr val="17364A"/>
-                </a:solidFill>
-                <a:latin typeface="Aptos" pitchFamily="34" charset="0"/>
-                <a:ea typeface="Aptos" pitchFamily="34" charset="-122"/>
-                <a:cs typeface="Aptos" pitchFamily="34" charset="-120"/>
-              </a:rPr>
-              <a:t>What evidence would governance or leadership need before approving the use case?</a:t>
+                  <a:srgbClr val="003A63"/>
+                </a:solidFill>
+                <a:latin typeface="Aptos" pitchFamily="34" charset="0"/>
+                <a:ea typeface="Aptos" pitchFamily="34" charset="-122"/>
+                <a:cs typeface="Aptos" pitchFamily="34" charset="-120"/>
+              </a:rPr>
+              <a:t>• What evidence would governance or leadership need before approving the use case?</a:t>
             </a:r>
             <a:endParaRPr lang="en-US" sz="2100" dirty="0"/>
           </a:p>
@@ -5434,17 +5494,17 @@
         </p:nvSpPr>
         <p:spPr>
           <a:xfrm>
-            <a:off x="7799832" y="1828800"/>
-            <a:ext cx="3145536" cy="685800"/>
-          </a:xfrm>
-          <a:prstGeom prst="rect">
-            <a:avLst/>
-          </a:prstGeom>
-          <a:noFill/>
-          <a:ln/>
-        </p:spPr>
-        <p:txBody>
-          <a:bodyPr wrap="square" lIns="0" tIns="0" rIns="0" bIns="0" rtlCol="0" anchor="t">
+            <a:off x="7799832" y="1801368"/>
+            <a:ext cx="3145536" cy="758952"/>
+          </a:xfrm>
+          <a:prstGeom prst="rect">
+            <a:avLst/>
+          </a:prstGeom>
+          <a:noFill/>
+          <a:ln/>
+        </p:spPr>
+        <p:txBody>
+          <a:bodyPr wrap="square" lIns="254" tIns="254" rIns="254" bIns="254" rtlCol="0" anchor="t">
             <a:normAutofit/>
           </a:bodyPr>
           <a:lstStyle/>
@@ -5453,7 +5513,7 @@
               <a:buNone/>
             </a:pPr>
             <a:r>
-              <a:rPr lang="en-US" sz="1550" dirty="0">
+              <a:rPr lang="en-US" sz="1320" dirty="0">
                 <a:solidFill>
                   <a:srgbClr val="17364A"/>
                 </a:solidFill>
@@ -5463,7 +5523,7 @@
               </a:rPr>
               <a:t>Which current or proposed AI use case in your agency raises this leadership or governance issue most.</a:t>
             </a:r>
-            <a:endParaRPr lang="en-US" sz="1550" dirty="0"/>
+            <a:endParaRPr lang="en-US" sz="1320" dirty="0"/>
           </a:p>
         </p:txBody>
       </p:sp>
@@ -5551,13 +5611,16 @@
           <a:ln/>
         </p:spPr>
         <p:txBody>
-          <a:bodyPr wrap="square" lIns="254" tIns="254" rIns="254" bIns="254" rtlCol="0" anchor="t">
+          <a:bodyPr wrap="square" lIns="508" tIns="508" rIns="508" bIns="508" rtlCol="0" anchor="t">
             <a:normAutofit/>
           </a:bodyPr>
           <a:lstStyle/>
           <a:p>
-            <a:r>
-              <a:rPr lang="en-US" sz="1380" dirty="0">
+            <a:pPr indent="0" marL="0">
+              <a:buNone/>
+            </a:pPr>
+            <a:r>
+              <a:rPr lang="en-US" sz="1220" dirty="0">
                 <a:solidFill>
                   <a:srgbClr val="17364A"/>
                 </a:solidFill>
@@ -5565,13 +5628,16 @@
                 <a:ea typeface="Aptos" pitchFamily="34" charset="-122"/>
                 <a:cs typeface="Aptos" pitchFamily="34" charset="-120"/>
               </a:rPr>
-              <a:t>Which current or proposed AI use case in your agency raises this leadership or governance.</a:t>
-            </a:r>
-            <a:endParaRPr lang="en-US" sz="1380" dirty="0"/>
-          </a:p>
-          <a:p>
-            <a:r>
-              <a:rPr lang="en-US" sz="1380" dirty="0">
+              <a:t>Which current or proposed AI use case in your agency raises this.</a:t>
+            </a:r>
+            <a:endParaRPr lang="en-US" sz="1220" dirty="0"/>
+          </a:p>
+          <a:p>
+            <a:pPr indent="0" marL="0">
+              <a:buNone/>
+            </a:pPr>
+            <a:r>
+              <a:rPr lang="en-US" sz="1220" dirty="0">
                 <a:solidFill>
                   <a:srgbClr val="17364A"/>
                 </a:solidFill>
@@ -5579,13 +5645,16 @@
                 <a:ea typeface="Aptos" pitchFamily="34" charset="-122"/>
                 <a:cs typeface="Aptos" pitchFamily="34" charset="-120"/>
               </a:rPr>
-              <a:t>Who currently has authority to make decisions about this issue, and is that authority.</a:t>
-            </a:r>
-            <a:endParaRPr lang="en-US" sz="1380" dirty="0"/>
-          </a:p>
-          <a:p>
-            <a:r>
-              <a:rPr lang="en-US" sz="1380" dirty="0">
+              <a:t>Who currently has authority to make decisions about this issue,.</a:t>
+            </a:r>
+            <a:endParaRPr lang="en-US" sz="1220" dirty="0"/>
+          </a:p>
+          <a:p>
+            <a:pPr indent="0" marL="0">
+              <a:buNone/>
+            </a:pPr>
+            <a:r>
+              <a:rPr lang="en-US" sz="1220" dirty="0">
                 <a:solidFill>
                   <a:srgbClr val="17364A"/>
                 </a:solidFill>
@@ -5593,9 +5662,9 @@
                 <a:ea typeface="Aptos" pitchFamily="34" charset="-122"/>
                 <a:cs typeface="Aptos" pitchFamily="34" charset="-120"/>
               </a:rPr>
-              <a:t>What evidence would governance or leadership need before approving the use case?</a:t>
-            </a:r>
-            <a:endParaRPr lang="en-US" sz="1380" dirty="0"/>
+              <a:t>What evidence would governance or leadership need before approving.</a:t>
+            </a:r>
+            <a:endParaRPr lang="en-US" sz="1220" dirty="0"/>
           </a:p>
         </p:txBody>
       </p:sp>
@@ -5673,17 +5742,17 @@
         </p:nvSpPr>
         <p:spPr>
           <a:xfrm>
-            <a:off x="7799832" y="5001768"/>
-            <a:ext cx="3145536" cy="502920"/>
-          </a:xfrm>
-          <a:prstGeom prst="rect">
-            <a:avLst/>
-          </a:prstGeom>
-          <a:noFill/>
-          <a:ln/>
-        </p:spPr>
-        <p:txBody>
-          <a:bodyPr wrap="square" lIns="0" tIns="0" rIns="0" bIns="0" rtlCol="0" anchor="t">
+            <a:off x="7799832" y="4974336"/>
+            <a:ext cx="3145536" cy="576072"/>
+          </a:xfrm>
+          <a:prstGeom prst="rect">
+            <a:avLst/>
+          </a:prstGeom>
+          <a:noFill/>
+          <a:ln/>
+        </p:spPr>
+        <p:txBody>
+          <a:bodyPr wrap="square" lIns="254" tIns="254" rIns="254" bIns="254" rtlCol="0" anchor="t">
             <a:normAutofit/>
           </a:bodyPr>
           <a:lstStyle/>
@@ -5692,7 +5761,7 @@
               <a:buNone/>
             </a:pPr>
             <a:r>
-              <a:rPr lang="en-US" sz="1550" dirty="0">
+              <a:rPr lang="en-US" sz="1320" dirty="0">
                 <a:solidFill>
                   <a:srgbClr val="17364A"/>
                 </a:solidFill>
@@ -5700,9 +5769,9 @@
                 <a:ea typeface="Aptos" pitchFamily="34" charset="-122"/>
                 <a:cs typeface="Aptos" pitchFamily="34" charset="-120"/>
               </a:rPr>
-              <a:t>Connect the concept to public health purpose, responsible use, required safeguards, documentation, and the next action a department should take.</a:t>
-            </a:r>
-            <a:endParaRPr lang="en-US" sz="1550" dirty="0"/>
+              <a:t>Connect the concept to public health purpose, responsible use, required safeguards, documentation, and the next action a.</a:t>
+            </a:r>
+            <a:endParaRPr lang="en-US" sz="1320" dirty="0"/>
           </a:p>
         </p:txBody>
       </p:sp>
@@ -6003,35 +6072,41 @@
           <a:ln/>
         </p:spPr>
         <p:txBody>
-          <a:bodyPr wrap="square" lIns="635" tIns="635" rIns="635" bIns="635" rtlCol="0" anchor="t">
+          <a:bodyPr wrap="square" lIns="1016" tIns="1016" rIns="1016" bIns="1016" rtlCol="0" anchor="t">
             <a:normAutofit/>
           </a:bodyPr>
           <a:lstStyle/>
           <a:p>
+            <a:pPr indent="0" marL="0">
+              <a:buNone/>
+            </a:pPr>
             <a:r>
               <a:rPr lang="en-US" sz="2100" dirty="0">
                 <a:solidFill>
-                  <a:srgbClr val="17364A"/>
-                </a:solidFill>
-                <a:latin typeface="Aptos" pitchFamily="34" charset="0"/>
-                <a:ea typeface="Aptos" pitchFamily="34" charset="-122"/>
-                <a:cs typeface="Aptos" pitchFamily="34" charset="-120"/>
-              </a:rPr>
-              <a:t>Which staff, partners, or communities would be affected if this issue were handled poorly?</a:t>
+                  <a:srgbClr val="003A63"/>
+                </a:solidFill>
+                <a:latin typeface="Aptos" pitchFamily="34" charset="0"/>
+                <a:ea typeface="Aptos" pitchFamily="34" charset="-122"/>
+                <a:cs typeface="Aptos" pitchFamily="34" charset="-120"/>
+              </a:rPr>
+              <a:t>• Which staff, partners, or communities would be affected if this issue were handled poorly?</a:t>
             </a:r>
             <a:endParaRPr lang="en-US" sz="2100" dirty="0"/>
           </a:p>
           <a:p>
+            <a:pPr indent="0" marL="0">
+              <a:buNone/>
+            </a:pPr>
             <a:r>
               <a:rPr lang="en-US" sz="2100" dirty="0">
                 <a:solidFill>
-                  <a:srgbClr val="17364A"/>
-                </a:solidFill>
-                <a:latin typeface="Aptos" pitchFamily="34" charset="0"/>
-                <a:ea typeface="Aptos" pitchFamily="34" charset="-122"/>
-                <a:cs typeface="Aptos" pitchFamily="34" charset="-120"/>
-              </a:rPr>
-              <a:t>What policy, process, or artifact should be created or updated after this module?</a:t>
+                  <a:srgbClr val="003A63"/>
+                </a:solidFill>
+                <a:latin typeface="Aptos" pitchFamily="34" charset="0"/>
+                <a:ea typeface="Aptos" pitchFamily="34" charset="-122"/>
+                <a:cs typeface="Aptos" pitchFamily="34" charset="-120"/>
+              </a:rPr>
+              <a:t>• What policy, process, or artifact should be created or updated after this module?</a:t>
             </a:r>
             <a:endParaRPr lang="en-US" sz="2100" dirty="0"/>
           </a:p>
@@ -6111,17 +6186,17 @@
         </p:nvSpPr>
         <p:spPr>
           <a:xfrm>
-            <a:off x="7799832" y="1828800"/>
-            <a:ext cx="3145536" cy="685800"/>
-          </a:xfrm>
-          <a:prstGeom prst="rect">
-            <a:avLst/>
-          </a:prstGeom>
-          <a:noFill/>
-          <a:ln/>
-        </p:spPr>
-        <p:txBody>
-          <a:bodyPr wrap="square" lIns="0" tIns="0" rIns="0" bIns="0" rtlCol="0" anchor="t">
+            <a:off x="7799832" y="1801368"/>
+            <a:ext cx="3145536" cy="758952"/>
+          </a:xfrm>
+          <a:prstGeom prst="rect">
+            <a:avLst/>
+          </a:prstGeom>
+          <a:noFill/>
+          <a:ln/>
+        </p:spPr>
+        <p:txBody>
+          <a:bodyPr wrap="square" lIns="254" tIns="254" rIns="254" bIns="254" rtlCol="0" anchor="t">
             <a:normAutofit/>
           </a:bodyPr>
           <a:lstStyle/>
@@ -6130,7 +6205,7 @@
               <a:buNone/>
             </a:pPr>
             <a:r>
-              <a:rPr lang="en-US" sz="1550" dirty="0">
+              <a:rPr lang="en-US" sz="1320" dirty="0">
                 <a:solidFill>
                   <a:srgbClr val="17364A"/>
                 </a:solidFill>
@@ -6140,7 +6215,7 @@
               </a:rPr>
               <a:t>Which staff, partners, or communities would be affected if this issue were handled poorly?</a:t>
             </a:r>
-            <a:endParaRPr lang="en-US" sz="1550" dirty="0"/>
+            <a:endParaRPr lang="en-US" sz="1320" dirty="0"/>
           </a:p>
         </p:txBody>
       </p:sp>
@@ -6228,13 +6303,16 @@
           <a:ln/>
         </p:spPr>
         <p:txBody>
-          <a:bodyPr wrap="square" lIns="254" tIns="254" rIns="254" bIns="254" rtlCol="0" anchor="t">
+          <a:bodyPr wrap="square" lIns="508" tIns="508" rIns="508" bIns="508" rtlCol="0" anchor="t">
             <a:normAutofit/>
           </a:bodyPr>
           <a:lstStyle/>
           <a:p>
-            <a:r>
-              <a:rPr lang="en-US" sz="1380" dirty="0">
+            <a:pPr indent="0" marL="0">
+              <a:buNone/>
+            </a:pPr>
+            <a:r>
+              <a:rPr lang="en-US" sz="1220" dirty="0">
                 <a:solidFill>
                   <a:srgbClr val="17364A"/>
                 </a:solidFill>
@@ -6242,13 +6320,16 @@
                 <a:ea typeface="Aptos" pitchFamily="34" charset="-122"/>
                 <a:cs typeface="Aptos" pitchFamily="34" charset="-120"/>
               </a:rPr>
-              <a:t>Which staff, partners, or communities would be affected if this issue were handled poorly?</a:t>
-            </a:r>
-            <a:endParaRPr lang="en-US" sz="1380" dirty="0"/>
-          </a:p>
-          <a:p>
-            <a:r>
-              <a:rPr lang="en-US" sz="1380" dirty="0">
+              <a:t>Which staff, partners, or communities would be affected if this.</a:t>
+            </a:r>
+            <a:endParaRPr lang="en-US" sz="1220" dirty="0"/>
+          </a:p>
+          <a:p>
+            <a:pPr indent="0" marL="0">
+              <a:buNone/>
+            </a:pPr>
+            <a:r>
+              <a:rPr lang="en-US" sz="1220" dirty="0">
                 <a:solidFill>
                   <a:srgbClr val="17364A"/>
                 </a:solidFill>
@@ -6256,9 +6337,9 @@
                 <a:ea typeface="Aptos" pitchFamily="34" charset="-122"/>
                 <a:cs typeface="Aptos" pitchFamily="34" charset="-120"/>
               </a:rPr>
-              <a:t>What policy, process, or artifact should be created or updated after this module?</a:t>
-            </a:r>
-            <a:endParaRPr lang="en-US" sz="1380" dirty="0"/>
+              <a:t>What policy, process, or artifact should be created or updated.</a:t>
+            </a:r>
+            <a:endParaRPr lang="en-US" sz="1220" dirty="0"/>
           </a:p>
         </p:txBody>
       </p:sp>
@@ -6336,17 +6417,17 @@
         </p:nvSpPr>
         <p:spPr>
           <a:xfrm>
-            <a:off x="7799832" y="5001768"/>
-            <a:ext cx="3145536" cy="502920"/>
-          </a:xfrm>
-          <a:prstGeom prst="rect">
-            <a:avLst/>
-          </a:prstGeom>
-          <a:noFill/>
-          <a:ln/>
-        </p:spPr>
-        <p:txBody>
-          <a:bodyPr wrap="square" lIns="0" tIns="0" rIns="0" bIns="0" rtlCol="0" anchor="t">
+            <a:off x="7799832" y="4974336"/>
+            <a:ext cx="3145536" cy="576072"/>
+          </a:xfrm>
+          <a:prstGeom prst="rect">
+            <a:avLst/>
+          </a:prstGeom>
+          <a:noFill/>
+          <a:ln/>
+        </p:spPr>
+        <p:txBody>
+          <a:bodyPr wrap="square" lIns="254" tIns="254" rIns="254" bIns="254" rtlCol="0" anchor="t">
             <a:normAutofit/>
           </a:bodyPr>
           <a:lstStyle/>
@@ -6355,7 +6436,7 @@
               <a:buNone/>
             </a:pPr>
             <a:r>
-              <a:rPr lang="en-US" sz="1550" dirty="0">
+              <a:rPr lang="en-US" sz="1320" dirty="0">
                 <a:solidFill>
                   <a:srgbClr val="17364A"/>
                 </a:solidFill>
@@ -6363,9 +6444,9 @@
                 <a:ea typeface="Aptos" pitchFamily="34" charset="-122"/>
                 <a:cs typeface="Aptos" pitchFamily="34" charset="-120"/>
               </a:rPr>
-              <a:t>Connect the concept to public health purpose, responsible use, required safeguards, documentation, and the next action a department should take.</a:t>
-            </a:r>
-            <a:endParaRPr lang="en-US" sz="1550" dirty="0"/>
+              <a:t>Connect the concept to public health purpose, responsible use, required safeguards, documentation, and the next action a.</a:t>
+            </a:r>
+            <a:endParaRPr lang="en-US" sz="1320" dirty="0"/>
           </a:p>
         </p:txBody>
       </p:sp>
@@ -6666,35 +6747,41 @@
           <a:ln/>
         </p:spPr>
         <p:txBody>
-          <a:bodyPr wrap="square" lIns="635" tIns="635" rIns="635" bIns="635" rtlCol="0" anchor="t">
+          <a:bodyPr wrap="square" lIns="1016" tIns="1016" rIns="1016" bIns="1016" rtlCol="0" anchor="t">
             <a:normAutofit/>
           </a:bodyPr>
           <a:lstStyle/>
           <a:p>
+            <a:pPr indent="0" marL="0">
+              <a:buNone/>
+            </a:pPr>
             <a:r>
               <a:rPr lang="en-US" sz="2100" dirty="0">
                 <a:solidFill>
-                  <a:srgbClr val="17364A"/>
-                </a:solidFill>
-                <a:latin typeface="Aptos" pitchFamily="34" charset="0"/>
-                <a:ea typeface="Aptos" pitchFamily="34" charset="-122"/>
-                <a:cs typeface="Aptos" pitchFamily="34" charset="-120"/>
-              </a:rPr>
-              <a:t>Create a transparency reporting template and apply it to one AI use case.</a:t>
+                  <a:srgbClr val="003A63"/>
+                </a:solidFill>
+                <a:latin typeface="Aptos" pitchFamily="34" charset="0"/>
+                <a:ea typeface="Aptos" pitchFamily="34" charset="-122"/>
+                <a:cs typeface="Aptos" pitchFamily="34" charset="-120"/>
+              </a:rPr>
+              <a:t>• Create a transparency reporting template and apply it to one AI use case.</a:t>
             </a:r>
             <a:endParaRPr lang="en-US" sz="2100" dirty="0"/>
           </a:p>
           <a:p>
+            <a:pPr indent="0" marL="0">
+              <a:buNone/>
+            </a:pPr>
             <a:r>
               <a:rPr lang="en-US" sz="2100" dirty="0">
                 <a:solidFill>
-                  <a:srgbClr val="17364A"/>
-                </a:solidFill>
-                <a:latin typeface="Aptos" pitchFamily="34" charset="0"/>
-                <a:ea typeface="Aptos" pitchFamily="34" charset="-122"/>
-                <a:cs typeface="Aptos" pitchFamily="34" charset="-120"/>
-              </a:rPr>
-              <a:t>Include purpose, owner, users, data categories, risk level, safeguards, human review, limitations,.</a:t>
+                  <a:srgbClr val="003A63"/>
+                </a:solidFill>
+                <a:latin typeface="Aptos" pitchFamily="34" charset="0"/>
+                <a:ea typeface="Aptos" pitchFamily="34" charset="-122"/>
+                <a:cs typeface="Aptos" pitchFamily="34" charset="-120"/>
+              </a:rPr>
+              <a:t>• Include purpose, owner, users, data categories, risk level, safeguards, human review,.</a:t>
             </a:r>
             <a:endParaRPr lang="en-US" sz="2100" dirty="0"/>
           </a:p>
@@ -6774,17 +6861,17 @@
         </p:nvSpPr>
         <p:spPr>
           <a:xfrm>
-            <a:off x="7799832" y="1828800"/>
-            <a:ext cx="3145536" cy="685800"/>
-          </a:xfrm>
-          <a:prstGeom prst="rect">
-            <a:avLst/>
-          </a:prstGeom>
-          <a:noFill/>
-          <a:ln/>
-        </p:spPr>
-        <p:txBody>
-          <a:bodyPr wrap="square" lIns="0" tIns="0" rIns="0" bIns="0" rtlCol="0" anchor="t">
+            <a:off x="7799832" y="1801368"/>
+            <a:ext cx="3145536" cy="758952"/>
+          </a:xfrm>
+          <a:prstGeom prst="rect">
+            <a:avLst/>
+          </a:prstGeom>
+          <a:noFill/>
+          <a:ln/>
+        </p:spPr>
+        <p:txBody>
+          <a:bodyPr wrap="square" lIns="254" tIns="254" rIns="254" bIns="254" rtlCol="0" anchor="t">
             <a:normAutofit/>
           </a:bodyPr>
           <a:lstStyle/>
@@ -6793,7 +6880,7 @@
               <a:buNone/>
             </a:pPr>
             <a:r>
-              <a:rPr lang="en-US" sz="1550" dirty="0">
+              <a:rPr lang="en-US" sz="1320" dirty="0">
                 <a:solidFill>
                   <a:srgbClr val="17364A"/>
                 </a:solidFill>
@@ -6803,7 +6890,7 @@
               </a:rPr>
               <a:t>Create a transparency reporting template and apply it to one AI use case.</a:t>
             </a:r>
-            <a:endParaRPr lang="en-US" sz="1550" dirty="0"/>
+            <a:endParaRPr lang="en-US" sz="1320" dirty="0"/>
           </a:p>
         </p:txBody>
       </p:sp>
@@ -6891,13 +6978,16 @@
           <a:ln/>
         </p:spPr>
         <p:txBody>
-          <a:bodyPr wrap="square" lIns="254" tIns="254" rIns="254" bIns="254" rtlCol="0" anchor="t">
+          <a:bodyPr wrap="square" lIns="508" tIns="508" rIns="508" bIns="508" rtlCol="0" anchor="t">
             <a:normAutofit/>
           </a:bodyPr>
           <a:lstStyle/>
           <a:p>
-            <a:r>
-              <a:rPr lang="en-US" sz="1380" dirty="0">
+            <a:pPr indent="0" marL="0">
+              <a:buNone/>
+            </a:pPr>
+            <a:r>
+              <a:rPr lang="en-US" sz="1220" dirty="0">
                 <a:solidFill>
                   <a:srgbClr val="17364A"/>
                 </a:solidFill>
@@ -6905,13 +6995,16 @@
                 <a:ea typeface="Aptos" pitchFamily="34" charset="-122"/>
                 <a:cs typeface="Aptos" pitchFamily="34" charset="-120"/>
               </a:rPr>
-              <a:t>Create a transparency reporting template and apply it to one AI use case.</a:t>
-            </a:r>
-            <a:endParaRPr lang="en-US" sz="1380" dirty="0"/>
-          </a:p>
-          <a:p>
-            <a:r>
-              <a:rPr lang="en-US" sz="1380" dirty="0">
+              <a:t>Create a transparency reporting template and apply it to one AI.</a:t>
+            </a:r>
+            <a:endParaRPr lang="en-US" sz="1220" dirty="0"/>
+          </a:p>
+          <a:p>
+            <a:pPr indent="0" marL="0">
+              <a:buNone/>
+            </a:pPr>
+            <a:r>
+              <a:rPr lang="en-US" sz="1220" dirty="0">
                 <a:solidFill>
                   <a:srgbClr val="17364A"/>
                 </a:solidFill>
@@ -6919,9 +7012,9 @@
                 <a:ea typeface="Aptos" pitchFamily="34" charset="-122"/>
                 <a:cs typeface="Aptos" pitchFamily="34" charset="-120"/>
               </a:rPr>
-              <a:t>Include purpose, owner, users, data categories, risk level, safeguards, human review,.</a:t>
-            </a:r>
-            <a:endParaRPr lang="en-US" sz="1380" dirty="0"/>
+              <a:t>Include purpose, owner, users, data categories, risk level,.</a:t>
+            </a:r>
+            <a:endParaRPr lang="en-US" sz="1220" dirty="0"/>
           </a:p>
         </p:txBody>
       </p:sp>
@@ -6999,17 +7092,17 @@
         </p:nvSpPr>
         <p:spPr>
           <a:xfrm>
-            <a:off x="7799832" y="5001768"/>
-            <a:ext cx="3145536" cy="502920"/>
-          </a:xfrm>
-          <a:prstGeom prst="rect">
-            <a:avLst/>
-          </a:prstGeom>
-          <a:noFill/>
-          <a:ln/>
-        </p:spPr>
-        <p:txBody>
-          <a:bodyPr wrap="square" lIns="0" tIns="0" rIns="0" bIns="0" rtlCol="0" anchor="t">
+            <a:off x="7799832" y="4974336"/>
+            <a:ext cx="3145536" cy="576072"/>
+          </a:xfrm>
+          <a:prstGeom prst="rect">
+            <a:avLst/>
+          </a:prstGeom>
+          <a:noFill/>
+          <a:ln/>
+        </p:spPr>
+        <p:txBody>
+          <a:bodyPr wrap="square" lIns="254" tIns="254" rIns="254" bIns="254" rtlCol="0" anchor="t">
             <a:normAutofit/>
           </a:bodyPr>
           <a:lstStyle/>
@@ -7018,7 +7111,7 @@
               <a:buNone/>
             </a:pPr>
             <a:r>
-              <a:rPr lang="en-US" sz="1550" dirty="0">
+              <a:rPr lang="en-US" sz="1320" dirty="0">
                 <a:solidFill>
                   <a:srgbClr val="17364A"/>
                 </a:solidFill>
@@ -7026,9 +7119,9 @@
                 <a:ea typeface="Aptos" pitchFamily="34" charset="-122"/>
                 <a:cs typeface="Aptos" pitchFamily="34" charset="-120"/>
               </a:rPr>
-              <a:t>Use the assignment to test whether you can explain the concept, apply it to a realistic public health situation, and identify what would need review before the work moves forward.</a:t>
-            </a:r>
-            <a:endParaRPr lang="en-US" sz="1550" dirty="0"/>
+              <a:t>Use the assignment to test whether you can explain the concept, apply it to a realistic public health situation, and.</a:t>
+            </a:r>
+            <a:endParaRPr lang="en-US" sz="1320" dirty="0"/>
           </a:p>
         </p:txBody>
       </p:sp>
@@ -7329,49 +7422,58 @@
           <a:ln/>
         </p:spPr>
         <p:txBody>
-          <a:bodyPr wrap="square" lIns="635" tIns="635" rIns="635" bIns="635" rtlCol="0" anchor="t">
+          <a:bodyPr wrap="square" lIns="1016" tIns="1016" rIns="1016" bIns="1016" rtlCol="0" anchor="t">
             <a:normAutofit/>
           </a:bodyPr>
           <a:lstStyle/>
           <a:p>
+            <a:pPr indent="0" marL="0">
+              <a:buNone/>
+            </a:pPr>
             <a:r>
               <a:rPr lang="en-US" sz="2100" dirty="0">
                 <a:solidFill>
-                  <a:srgbClr val="17364A"/>
-                </a:solidFill>
-                <a:latin typeface="Aptos" pitchFamily="34" charset="0"/>
-                <a:ea typeface="Aptos" pitchFamily="34" charset="-122"/>
-                <a:cs typeface="Aptos" pitchFamily="34" charset="-120"/>
-              </a:rPr>
-              <a:t>Choose a real or realistic public health AI use case.</a:t>
+                  <a:srgbClr val="003A63"/>
+                </a:solidFill>
+                <a:latin typeface="Aptos" pitchFamily="34" charset="0"/>
+                <a:ea typeface="Aptos" pitchFamily="34" charset="-122"/>
+                <a:cs typeface="Aptos" pitchFamily="34" charset="-120"/>
+              </a:rPr>
+              <a:t>• Choose a real or realistic public health AI use case.</a:t>
             </a:r>
             <a:endParaRPr lang="en-US" sz="2100" dirty="0"/>
           </a:p>
           <a:p>
+            <a:pPr indent="0" marL="0">
+              <a:buNone/>
+            </a:pPr>
             <a:r>
               <a:rPr lang="en-US" sz="2100" dirty="0">
                 <a:solidFill>
-                  <a:srgbClr val="17364A"/>
-                </a:solidFill>
-                <a:latin typeface="Aptos" pitchFamily="34" charset="0"/>
-                <a:ea typeface="Aptos" pitchFamily="34" charset="-122"/>
-                <a:cs typeface="Aptos" pitchFamily="34" charset="-120"/>
-              </a:rPr>
-              <a:t>Document assumptions, unresolved questions, and which agency roles would need to review the artifact.</a:t>
+                  <a:srgbClr val="003A63"/>
+                </a:solidFill>
+                <a:latin typeface="Aptos" pitchFamily="34" charset="0"/>
+                <a:ea typeface="Aptos" pitchFamily="34" charset="-122"/>
+                <a:cs typeface="Aptos" pitchFamily="34" charset="-120"/>
+              </a:rPr>
+              <a:t>• Document assumptions, unresolved questions, and which agency roles would need to review the.</a:t>
             </a:r>
             <a:endParaRPr lang="en-US" sz="2100" dirty="0"/>
           </a:p>
           <a:p>
+            <a:pPr indent="0" marL="0">
+              <a:buNone/>
+            </a:pPr>
             <a:r>
               <a:rPr lang="en-US" sz="2100" dirty="0">
                 <a:solidFill>
-                  <a:srgbClr val="17364A"/>
-                </a:solidFill>
-                <a:latin typeface="Aptos" pitchFamily="34" charset="0"/>
-                <a:ea typeface="Aptos" pitchFamily="34" charset="-122"/>
-                <a:cs typeface="Aptos" pitchFamily="34" charset="-120"/>
-              </a:rPr>
-              <a:t>The exercise should produce a work product that could support governance review, leadership discussion,.</a:t>
+                  <a:srgbClr val="003A63"/>
+                </a:solidFill>
+                <a:latin typeface="Aptos" pitchFamily="34" charset="0"/>
+                <a:ea typeface="Aptos" pitchFamily="34" charset="-122"/>
+                <a:cs typeface="Aptos" pitchFamily="34" charset="-120"/>
+              </a:rPr>
+              <a:t>• The exercise should produce a work product that could support governance review, leadership.</a:t>
             </a:r>
             <a:endParaRPr lang="en-US" sz="2100" dirty="0"/>
           </a:p>
@@ -7451,17 +7553,17 @@
         </p:nvSpPr>
         <p:spPr>
           <a:xfrm>
-            <a:off x="7799832" y="1828800"/>
-            <a:ext cx="3145536" cy="685800"/>
-          </a:xfrm>
-          <a:prstGeom prst="rect">
-            <a:avLst/>
-          </a:prstGeom>
-          <a:noFill/>
-          <a:ln/>
-        </p:spPr>
-        <p:txBody>
-          <a:bodyPr wrap="square" lIns="0" tIns="0" rIns="0" bIns="0" rtlCol="0" anchor="t">
+            <a:off x="7799832" y="1801368"/>
+            <a:ext cx="3145536" cy="758952"/>
+          </a:xfrm>
+          <a:prstGeom prst="rect">
+            <a:avLst/>
+          </a:prstGeom>
+          <a:noFill/>
+          <a:ln/>
+        </p:spPr>
+        <p:txBody>
+          <a:bodyPr wrap="square" lIns="254" tIns="254" rIns="254" bIns="254" rtlCol="0" anchor="t">
             <a:normAutofit/>
           </a:bodyPr>
           <a:lstStyle/>
@@ -7470,7 +7572,7 @@
               <a:buNone/>
             </a:pPr>
             <a:r>
-              <a:rPr lang="en-US" sz="1550" dirty="0">
+              <a:rPr lang="en-US" sz="1320" dirty="0">
                 <a:solidFill>
                   <a:srgbClr val="17364A"/>
                 </a:solidFill>
@@ -7480,7 +7582,7 @@
               </a:rPr>
               <a:t>Choose a real or realistic public health AI use case.</a:t>
             </a:r>
-            <a:endParaRPr lang="en-US" sz="1550" dirty="0"/>
+            <a:endParaRPr lang="en-US" sz="1320" dirty="0"/>
           </a:p>
         </p:txBody>
       </p:sp>
@@ -7568,13 +7670,16 @@
           <a:ln/>
         </p:spPr>
         <p:txBody>
-          <a:bodyPr wrap="square" lIns="254" tIns="254" rIns="254" bIns="254" rtlCol="0" anchor="t">
+          <a:bodyPr wrap="square" lIns="508" tIns="508" rIns="508" bIns="508" rtlCol="0" anchor="t">
             <a:normAutofit/>
           </a:bodyPr>
           <a:lstStyle/>
           <a:p>
-            <a:r>
-              <a:rPr lang="en-US" sz="1380" dirty="0">
+            <a:pPr indent="0" marL="0">
+              <a:buNone/>
+            </a:pPr>
+            <a:r>
+              <a:rPr lang="en-US" sz="1220" dirty="0">
                 <a:solidFill>
                   <a:srgbClr val="17364A"/>
                 </a:solidFill>
@@ -7582,13 +7687,16 @@
                 <a:ea typeface="Aptos" pitchFamily="34" charset="-122"/>
                 <a:cs typeface="Aptos" pitchFamily="34" charset="-120"/>
               </a:rPr>
-              <a:t>Document assumptions, unresolved questions, and which agency roles would need to review.</a:t>
-            </a:r>
-            <a:endParaRPr lang="en-US" sz="1380" dirty="0"/>
-          </a:p>
-          <a:p>
-            <a:r>
-              <a:rPr lang="en-US" sz="1380" dirty="0">
+              <a:t>Document assumptions, unresolved questions, and which agency roles.</a:t>
+            </a:r>
+            <a:endParaRPr lang="en-US" sz="1220" dirty="0"/>
+          </a:p>
+          <a:p>
+            <a:pPr indent="0" marL="0">
+              <a:buNone/>
+            </a:pPr>
+            <a:r>
+              <a:rPr lang="en-US" sz="1220" dirty="0">
                 <a:solidFill>
                   <a:srgbClr val="17364A"/>
                 </a:solidFill>
@@ -7596,9 +7704,9 @@
                 <a:ea typeface="Aptos" pitchFamily="34" charset="-122"/>
                 <a:cs typeface="Aptos" pitchFamily="34" charset="-120"/>
               </a:rPr>
-              <a:t>The exercise should produce a work product that could support governance review,.</a:t>
-            </a:r>
-            <a:endParaRPr lang="en-US" sz="1380" dirty="0"/>
+              <a:t>The exercise should produce a work product that could support.</a:t>
+            </a:r>
+            <a:endParaRPr lang="en-US" sz="1220" dirty="0"/>
           </a:p>
         </p:txBody>
       </p:sp>
@@ -7676,17 +7784,17 @@
         </p:nvSpPr>
         <p:spPr>
           <a:xfrm>
-            <a:off x="7799832" y="5001768"/>
-            <a:ext cx="3145536" cy="502920"/>
-          </a:xfrm>
-          <a:prstGeom prst="rect">
-            <a:avLst/>
-          </a:prstGeom>
-          <a:noFill/>
-          <a:ln/>
-        </p:spPr>
-        <p:txBody>
-          <a:bodyPr wrap="square" lIns="0" tIns="0" rIns="0" bIns="0" rtlCol="0" anchor="t">
+            <a:off x="7799832" y="4974336"/>
+            <a:ext cx="3145536" cy="576072"/>
+          </a:xfrm>
+          <a:prstGeom prst="rect">
+            <a:avLst/>
+          </a:prstGeom>
+          <a:noFill/>
+          <a:ln/>
+        </p:spPr>
+        <p:txBody>
+          <a:bodyPr wrap="square" lIns="254" tIns="254" rIns="254" bIns="254" rtlCol="0" anchor="t">
             <a:normAutofit/>
           </a:bodyPr>
           <a:lstStyle/>
@@ -7695,7 +7803,7 @@
               <a:buNone/>
             </a:pPr>
             <a:r>
-              <a:rPr lang="en-US" sz="1550" dirty="0">
+              <a:rPr lang="en-US" sz="1320" dirty="0">
                 <a:solidFill>
                   <a:srgbClr val="17364A"/>
                 </a:solidFill>
@@ -7703,9 +7811,9 @@
                 <a:ea typeface="Aptos" pitchFamily="34" charset="-122"/>
                 <a:cs typeface="Aptos" pitchFamily="34" charset="-120"/>
               </a:rPr>
-              <a:t>Connect the concept to public health purpose, responsible use, required safeguards, documentation, and the next action a department should take.</a:t>
-            </a:r>
-            <a:endParaRPr lang="en-US" sz="1550" dirty="0"/>
+              <a:t>Connect the concept to public health purpose, responsible use, required safeguards, documentation, and the next action a.</a:t>
+            </a:r>
+            <a:endParaRPr lang="en-US" sz="1320" dirty="0"/>
           </a:p>
         </p:txBody>
       </p:sp>
@@ -8006,21 +8114,24 @@
           <a:ln/>
         </p:spPr>
         <p:txBody>
-          <a:bodyPr wrap="square" lIns="635" tIns="635" rIns="635" bIns="635" rtlCol="0" anchor="t">
+          <a:bodyPr wrap="square" lIns="1016" tIns="1016" rIns="1016" bIns="1016" rtlCol="0" anchor="t">
             <a:normAutofit/>
           </a:bodyPr>
           <a:lstStyle/>
           <a:p>
+            <a:pPr indent="0" marL="0">
+              <a:buNone/>
+            </a:pPr>
             <a:r>
               <a:rPr lang="en-US" sz="2100" dirty="0">
                 <a:solidFill>
-                  <a:srgbClr val="17364A"/>
-                </a:solidFill>
-                <a:latin typeface="Aptos" pitchFamily="34" charset="0"/>
-                <a:ea typeface="Aptos" pitchFamily="34" charset="-122"/>
-                <a:cs typeface="Aptos" pitchFamily="34" charset="-120"/>
-              </a:rPr>
-              <a:t>AI transparency template; sample AI use registry entry; public notice draft; internal review checklist.</a:t>
+                  <a:srgbClr val="003A63"/>
+                </a:solidFill>
+                <a:latin typeface="Aptos" pitchFamily="34" charset="0"/>
+                <a:ea typeface="Aptos" pitchFamily="34" charset="-122"/>
+                <a:cs typeface="Aptos" pitchFamily="34" charset="-120"/>
+              </a:rPr>
+              <a:t>• AI transparency template; sample AI use registry entry; public notice draft; internal review.</a:t>
             </a:r>
             <a:endParaRPr lang="en-US" sz="2100" dirty="0"/>
           </a:p>
@@ -8100,17 +8211,17 @@
         </p:nvSpPr>
         <p:spPr>
           <a:xfrm>
-            <a:off x="7799832" y="1828800"/>
-            <a:ext cx="3145536" cy="685800"/>
-          </a:xfrm>
-          <a:prstGeom prst="rect">
-            <a:avLst/>
-          </a:prstGeom>
-          <a:noFill/>
-          <a:ln/>
-        </p:spPr>
-        <p:txBody>
-          <a:bodyPr wrap="square" lIns="0" tIns="0" rIns="0" bIns="0" rtlCol="0" anchor="t">
+            <a:off x="7799832" y="1801368"/>
+            <a:ext cx="3145536" cy="758952"/>
+          </a:xfrm>
+          <a:prstGeom prst="rect">
+            <a:avLst/>
+          </a:prstGeom>
+          <a:noFill/>
+          <a:ln/>
+        </p:spPr>
+        <p:txBody>
+          <a:bodyPr wrap="square" lIns="254" tIns="254" rIns="254" bIns="254" rtlCol="0" anchor="t">
             <a:normAutofit/>
           </a:bodyPr>
           <a:lstStyle/>
@@ -8119,7 +8230,7 @@
               <a:buNone/>
             </a:pPr>
             <a:r>
-              <a:rPr lang="en-US" sz="1550" dirty="0">
+              <a:rPr lang="en-US" sz="1320" dirty="0">
                 <a:solidFill>
                   <a:srgbClr val="17364A"/>
                 </a:solidFill>
@@ -8129,7 +8240,7 @@
               </a:rPr>
               <a:t>AI transparency template; sample AI use registry entry; public notice draft; internal review checklist.</a:t>
             </a:r>
-            <a:endParaRPr lang="en-US" sz="1550" dirty="0"/>
+            <a:endParaRPr lang="en-US" sz="1320" dirty="0"/>
           </a:p>
         </p:txBody>
       </p:sp>
@@ -8217,13 +8328,16 @@
           <a:ln/>
         </p:spPr>
         <p:txBody>
-          <a:bodyPr wrap="square" lIns="254" tIns="254" rIns="254" bIns="254" rtlCol="0" anchor="t">
+          <a:bodyPr wrap="square" lIns="508" tIns="508" rIns="508" bIns="508" rtlCol="0" anchor="t">
             <a:normAutofit/>
           </a:bodyPr>
           <a:lstStyle/>
           <a:p>
-            <a:r>
-              <a:rPr lang="en-US" sz="1380" dirty="0">
+            <a:pPr indent="0" marL="0">
+              <a:buNone/>
+            </a:pPr>
+            <a:r>
+              <a:rPr lang="en-US" sz="1220" dirty="0">
                 <a:solidFill>
                   <a:srgbClr val="17364A"/>
                 </a:solidFill>
@@ -8231,9 +8345,9 @@
                 <a:ea typeface="Aptos" pitchFamily="34" charset="-122"/>
                 <a:cs typeface="Aptos" pitchFamily="34" charset="-120"/>
               </a:rPr>
-              <a:t>AI transparency template; sample AI use registry entry; public notice draft; internal.</a:t>
-            </a:r>
-            <a:endParaRPr lang="en-US" sz="1380" dirty="0"/>
+              <a:t>AI transparency template; sample AI use registry entry; public.</a:t>
+            </a:r>
+            <a:endParaRPr lang="en-US" sz="1220" dirty="0"/>
           </a:p>
         </p:txBody>
       </p:sp>
@@ -8311,17 +8425,17 @@
         </p:nvSpPr>
         <p:spPr>
           <a:xfrm>
-            <a:off x="7799832" y="5001768"/>
-            <a:ext cx="3145536" cy="502920"/>
-          </a:xfrm>
-          <a:prstGeom prst="rect">
-            <a:avLst/>
-          </a:prstGeom>
-          <a:noFill/>
-          <a:ln/>
-        </p:spPr>
-        <p:txBody>
-          <a:bodyPr wrap="square" lIns="0" tIns="0" rIns="0" bIns="0" rtlCol="0" anchor="t">
+            <a:off x="7799832" y="4974336"/>
+            <a:ext cx="3145536" cy="576072"/>
+          </a:xfrm>
+          <a:prstGeom prst="rect">
+            <a:avLst/>
+          </a:prstGeom>
+          <a:noFill/>
+          <a:ln/>
+        </p:spPr>
+        <p:txBody>
+          <a:bodyPr wrap="square" lIns="254" tIns="254" rIns="254" bIns="254" rtlCol="0" anchor="t">
             <a:normAutofit/>
           </a:bodyPr>
           <a:lstStyle/>
@@ -8330,7 +8444,7 @@
               <a:buNone/>
             </a:pPr>
             <a:r>
-              <a:rPr lang="en-US" sz="1550" dirty="0">
+              <a:rPr lang="en-US" sz="1320" dirty="0">
                 <a:solidFill>
                   <a:srgbClr val="17364A"/>
                 </a:solidFill>
@@ -8338,9 +8452,9 @@
                 <a:ea typeface="Aptos" pitchFamily="34" charset="-122"/>
                 <a:cs typeface="Aptos" pitchFamily="34" charset="-120"/>
               </a:rPr>
-              <a:t>Connect the concept to public health purpose, responsible use, required safeguards, documentation, and the next action a department should take.</a:t>
-            </a:r>
-            <a:endParaRPr lang="en-US" sz="1550" dirty="0"/>
+              <a:t>Connect the concept to public health purpose, responsible use, required safeguards, documentation, and the next action a.</a:t>
+            </a:r>
+            <a:endParaRPr lang="en-US" sz="1320" dirty="0"/>
           </a:p>
         </p:txBody>
       </p:sp>
@@ -8641,21 +8755,24 @@
           <a:ln/>
         </p:spPr>
         <p:txBody>
-          <a:bodyPr wrap="square" lIns="635" tIns="635" rIns="635" bIns="635" rtlCol="0" anchor="t">
+          <a:bodyPr wrap="square" lIns="1016" tIns="1016" rIns="1016" bIns="1016" rtlCol="0" anchor="t">
             <a:normAutofit/>
           </a:bodyPr>
           <a:lstStyle/>
           <a:p>
+            <a:pPr indent="0" marL="0">
+              <a:buNone/>
+            </a:pPr>
             <a:r>
               <a:rPr lang="en-US" sz="2100" dirty="0">
                 <a:solidFill>
-                  <a:srgbClr val="17364A"/>
-                </a:solidFill>
-                <a:latin typeface="Aptos" pitchFamily="34" charset="0"/>
-                <a:ea typeface="Aptos" pitchFamily="34" charset="-122"/>
-                <a:cs typeface="Aptos" pitchFamily="34" charset="-120"/>
-              </a:rPr>
-              <a:t>AI transparency template; sample AI use registry entry; public notice draft; internal review checklist.</a:t>
+                  <a:srgbClr val="003A63"/>
+                </a:solidFill>
+                <a:latin typeface="Aptos" pitchFamily="34" charset="0"/>
+                <a:ea typeface="Aptos" pitchFamily="34" charset="-122"/>
+                <a:cs typeface="Aptos" pitchFamily="34" charset="-120"/>
+              </a:rPr>
+              <a:t>• AI transparency template; sample AI use registry entry; public notice draft; internal review.</a:t>
             </a:r>
             <a:endParaRPr lang="en-US" sz="2100" dirty="0"/>
           </a:p>
@@ -8735,17 +8852,17 @@
         </p:nvSpPr>
         <p:spPr>
           <a:xfrm>
-            <a:off x="7799832" y="1828800"/>
-            <a:ext cx="3145536" cy="685800"/>
-          </a:xfrm>
-          <a:prstGeom prst="rect">
-            <a:avLst/>
-          </a:prstGeom>
-          <a:noFill/>
-          <a:ln/>
-        </p:spPr>
-        <p:txBody>
-          <a:bodyPr wrap="square" lIns="0" tIns="0" rIns="0" bIns="0" rtlCol="0" anchor="t">
+            <a:off x="7799832" y="1801368"/>
+            <a:ext cx="3145536" cy="758952"/>
+          </a:xfrm>
+          <a:prstGeom prst="rect">
+            <a:avLst/>
+          </a:prstGeom>
+          <a:noFill/>
+          <a:ln/>
+        </p:spPr>
+        <p:txBody>
+          <a:bodyPr wrap="square" lIns="254" tIns="254" rIns="254" bIns="254" rtlCol="0" anchor="t">
             <a:normAutofit/>
           </a:bodyPr>
           <a:lstStyle/>
@@ -8754,7 +8871,7 @@
               <a:buNone/>
             </a:pPr>
             <a:r>
-              <a:rPr lang="en-US" sz="1550" dirty="0">
+              <a:rPr lang="en-US" sz="1320" dirty="0">
                 <a:solidFill>
                   <a:srgbClr val="17364A"/>
                 </a:solidFill>
@@ -8764,7 +8881,7 @@
               </a:rPr>
               <a:t>AI transparency template; sample AI use registry entry; public notice draft; internal review checklist.</a:t>
             </a:r>
-            <a:endParaRPr lang="en-US" sz="1550" dirty="0"/>
+            <a:endParaRPr lang="en-US" sz="1320" dirty="0"/>
           </a:p>
         </p:txBody>
       </p:sp>
@@ -8852,13 +8969,16 @@
           <a:ln/>
         </p:spPr>
         <p:txBody>
-          <a:bodyPr wrap="square" lIns="254" tIns="254" rIns="254" bIns="254" rtlCol="0" anchor="t">
+          <a:bodyPr wrap="square" lIns="508" tIns="508" rIns="508" bIns="508" rtlCol="0" anchor="t">
             <a:normAutofit/>
           </a:bodyPr>
           <a:lstStyle/>
           <a:p>
-            <a:r>
-              <a:rPr lang="en-US" sz="1380" dirty="0">
+            <a:pPr indent="0" marL="0">
+              <a:buNone/>
+            </a:pPr>
+            <a:r>
+              <a:rPr lang="en-US" sz="1220" dirty="0">
                 <a:solidFill>
                   <a:srgbClr val="17364A"/>
                 </a:solidFill>
@@ -8866,9 +8986,9 @@
                 <a:ea typeface="Aptos" pitchFamily="34" charset="-122"/>
                 <a:cs typeface="Aptos" pitchFamily="34" charset="-120"/>
               </a:rPr>
-              <a:t>AI transparency template; sample AI use registry entry; public notice draft; internal.</a:t>
-            </a:r>
-            <a:endParaRPr lang="en-US" sz="1380" dirty="0"/>
+              <a:t>AI transparency template; sample AI use registry entry; public.</a:t>
+            </a:r>
+            <a:endParaRPr lang="en-US" sz="1220" dirty="0"/>
           </a:p>
         </p:txBody>
       </p:sp>
@@ -8946,17 +9066,17 @@
         </p:nvSpPr>
         <p:spPr>
           <a:xfrm>
-            <a:off x="7799832" y="5001768"/>
-            <a:ext cx="3145536" cy="502920"/>
-          </a:xfrm>
-          <a:prstGeom prst="rect">
-            <a:avLst/>
-          </a:prstGeom>
-          <a:noFill/>
-          <a:ln/>
-        </p:spPr>
-        <p:txBody>
-          <a:bodyPr wrap="square" lIns="0" tIns="0" rIns="0" bIns="0" rtlCol="0" anchor="t">
+            <a:off x="7799832" y="4974336"/>
+            <a:ext cx="3145536" cy="576072"/>
+          </a:xfrm>
+          <a:prstGeom prst="rect">
+            <a:avLst/>
+          </a:prstGeom>
+          <a:noFill/>
+          <a:ln/>
+        </p:spPr>
+        <p:txBody>
+          <a:bodyPr wrap="square" lIns="254" tIns="254" rIns="254" bIns="254" rtlCol="0" anchor="t">
             <a:normAutofit/>
           </a:bodyPr>
           <a:lstStyle/>
@@ -8965,7 +9085,7 @@
               <a:buNone/>
             </a:pPr>
             <a:r>
-              <a:rPr lang="en-US" sz="1550" dirty="0">
+              <a:rPr lang="en-US" sz="1320" dirty="0">
                 <a:solidFill>
                   <a:srgbClr val="17364A"/>
                 </a:solidFill>
@@ -8973,9 +9093,9 @@
                 <a:ea typeface="Aptos" pitchFamily="34" charset="-122"/>
                 <a:cs typeface="Aptos" pitchFamily="34" charset="-120"/>
               </a:rPr>
-              <a:t>Use the assignment to test whether you can explain the concept, apply it to a realistic public health situation, and identify what would need review before the work moves forward.</a:t>
-            </a:r>
-            <a:endParaRPr lang="en-US" sz="1550" dirty="0"/>
+              <a:t>Use the assignment to test whether you can explain the concept, apply it to a realistic public health situation, and.</a:t>
+            </a:r>
+            <a:endParaRPr lang="en-US" sz="1320" dirty="0"/>
           </a:p>
         </p:txBody>
       </p:sp>
@@ -9276,49 +9396,58 @@
           <a:ln/>
         </p:spPr>
         <p:txBody>
-          <a:bodyPr wrap="square" lIns="635" tIns="635" rIns="635" bIns="635" rtlCol="0" anchor="t">
+          <a:bodyPr wrap="square" lIns="1016" tIns="1016" rIns="1016" bIns="1016" rtlCol="0" anchor="t">
             <a:normAutofit/>
           </a:bodyPr>
           <a:lstStyle/>
           <a:p>
+            <a:pPr indent="0" marL="0">
+              <a:buNone/>
+            </a:pPr>
             <a:r>
               <a:rPr lang="en-US" sz="2100" dirty="0">
                 <a:solidFill>
-                  <a:srgbClr val="17364A"/>
-                </a:solidFill>
-                <a:latin typeface="Aptos" pitchFamily="34" charset="0"/>
-                <a:ea typeface="Aptos" pitchFamily="34" charset="-122"/>
-                <a:cs typeface="Aptos" pitchFamily="34" charset="-120"/>
-              </a:rPr>
-              <a:t>1. What is the strongest reason this module topic belongs in AI leadership and governance training?</a:t>
+                  <a:srgbClr val="003A63"/>
+                </a:solidFill>
+                <a:latin typeface="Aptos" pitchFamily="34" charset="0"/>
+                <a:ea typeface="Aptos" pitchFamily="34" charset="-122"/>
+                <a:cs typeface="Aptos" pitchFamily="34" charset="-120"/>
+              </a:rPr>
+              <a:t>• 1. What is the strongest reason this module topic belongs in AI leadership and governance.</a:t>
             </a:r>
             <a:endParaRPr lang="en-US" sz="2100" dirty="0"/>
           </a:p>
           <a:p>
+            <a:pPr indent="0" marL="0">
+              <a:buNone/>
+            </a:pPr>
             <a:r>
               <a:rPr lang="en-US" sz="2100" dirty="0">
                 <a:solidFill>
-                  <a:srgbClr val="17364A"/>
-                </a:solidFill>
-                <a:latin typeface="Aptos" pitchFamily="34" charset="0"/>
-                <a:ea typeface="Aptos" pitchFamily="34" charset="-122"/>
-                <a:cs typeface="Aptos" pitchFamily="34" charset="-120"/>
-              </a:rPr>
-              <a:t>2. Which practice best supports accountable public health AI governance?</a:t>
+                  <a:srgbClr val="003A63"/>
+                </a:solidFill>
+                <a:latin typeface="Aptos" pitchFamily="34" charset="0"/>
+                <a:ea typeface="Aptos" pitchFamily="34" charset="-122"/>
+                <a:cs typeface="Aptos" pitchFamily="34" charset="-120"/>
+              </a:rPr>
+              <a:t>• 2. Which practice best supports accountable public health AI governance?</a:t>
             </a:r>
             <a:endParaRPr lang="en-US" sz="2100" dirty="0"/>
           </a:p>
           <a:p>
+            <a:pPr indent="0" marL="0">
+              <a:buNone/>
+            </a:pPr>
             <a:r>
               <a:rPr lang="en-US" sz="2100" dirty="0">
                 <a:solidFill>
-                  <a:srgbClr val="17364A"/>
-                </a:solidFill>
-                <a:latin typeface="Aptos" pitchFamily="34" charset="0"/>
-                <a:ea typeface="Aptos" pitchFamily="34" charset="-122"/>
-                <a:cs typeface="Aptos" pitchFamily="34" charset="-120"/>
-              </a:rPr>
-              <a:t>3. When should an AI use case be escalated for leadership or governance review?</a:t>
+                  <a:srgbClr val="003A63"/>
+                </a:solidFill>
+                <a:latin typeface="Aptos" pitchFamily="34" charset="0"/>
+                <a:ea typeface="Aptos" pitchFamily="34" charset="-122"/>
+                <a:cs typeface="Aptos" pitchFamily="34" charset="-120"/>
+              </a:rPr>
+              <a:t>• 3. When should an AI use case be escalated for leadership or governance review?</a:t>
             </a:r>
             <a:endParaRPr lang="en-US" sz="2100" dirty="0"/>
           </a:p>
@@ -9398,17 +9527,17 @@
         </p:nvSpPr>
         <p:spPr>
           <a:xfrm>
-            <a:off x="7799832" y="1828800"/>
-            <a:ext cx="3145536" cy="685800"/>
-          </a:xfrm>
-          <a:prstGeom prst="rect">
-            <a:avLst/>
-          </a:prstGeom>
-          <a:noFill/>
-          <a:ln/>
-        </p:spPr>
-        <p:txBody>
-          <a:bodyPr wrap="square" lIns="0" tIns="0" rIns="0" bIns="0" rtlCol="0" anchor="t">
+            <a:off x="7799832" y="1801368"/>
+            <a:ext cx="3145536" cy="758952"/>
+          </a:xfrm>
+          <a:prstGeom prst="rect">
+            <a:avLst/>
+          </a:prstGeom>
+          <a:noFill/>
+          <a:ln/>
+        </p:spPr>
+        <p:txBody>
+          <a:bodyPr wrap="square" lIns="254" tIns="254" rIns="254" bIns="254" rtlCol="0" anchor="t">
             <a:normAutofit/>
           </a:bodyPr>
           <a:lstStyle/>
@@ -9417,7 +9546,7 @@
               <a:buNone/>
             </a:pPr>
             <a:r>
-              <a:rPr lang="en-US" sz="1550" dirty="0">
+              <a:rPr lang="en-US" sz="1320" dirty="0">
                 <a:solidFill>
                   <a:srgbClr val="17364A"/>
                 </a:solidFill>
@@ -9427,7 +9556,7 @@
               </a:rPr>
               <a:t>1. What is the strongest reason this module topic belongs in AI leadership and governance training?</a:t>
             </a:r>
-            <a:endParaRPr lang="en-US" sz="1550" dirty="0"/>
+            <a:endParaRPr lang="en-US" sz="1320" dirty="0"/>
           </a:p>
         </p:txBody>
       </p:sp>
@@ -9515,13 +9644,16 @@
           <a:ln/>
         </p:spPr>
         <p:txBody>
-          <a:bodyPr wrap="square" lIns="254" tIns="254" rIns="254" bIns="254" rtlCol="0" anchor="t">
+          <a:bodyPr wrap="square" lIns="508" tIns="508" rIns="508" bIns="508" rtlCol="0" anchor="t">
             <a:normAutofit/>
           </a:bodyPr>
           <a:lstStyle/>
           <a:p>
-            <a:r>
-              <a:rPr lang="en-US" sz="1380" dirty="0">
+            <a:pPr indent="0" marL="0">
+              <a:buNone/>
+            </a:pPr>
+            <a:r>
+              <a:rPr lang="en-US" sz="1220" dirty="0">
                 <a:solidFill>
                   <a:srgbClr val="17364A"/>
                 </a:solidFill>
@@ -9531,11 +9663,14 @@
               </a:rPr>
               <a:t>1.</a:t>
             </a:r>
-            <a:endParaRPr lang="en-US" sz="1380" dirty="0"/>
-          </a:p>
-          <a:p>
-            <a:r>
-              <a:rPr lang="en-US" sz="1380" dirty="0">
+            <a:endParaRPr lang="en-US" sz="1220" dirty="0"/>
+          </a:p>
+          <a:p>
+            <a:pPr indent="0" marL="0">
+              <a:buNone/>
+            </a:pPr>
+            <a:r>
+              <a:rPr lang="en-US" sz="1220" dirty="0">
                 <a:solidFill>
                   <a:srgbClr val="17364A"/>
                 </a:solidFill>
@@ -9543,13 +9678,16 @@
                 <a:ea typeface="Aptos" pitchFamily="34" charset="-122"/>
                 <a:cs typeface="Aptos" pitchFamily="34" charset="-120"/>
               </a:rPr>
-              <a:t>What is the strongest reason this module topic belongs in AI leadership and governance.</a:t>
-            </a:r>
-            <a:endParaRPr lang="en-US" sz="1380" dirty="0"/>
-          </a:p>
-          <a:p>
-            <a:r>
-              <a:rPr lang="en-US" sz="1380" dirty="0">
+              <a:t>What is the strongest reason this module topic belongs in AI.</a:t>
+            </a:r>
+            <a:endParaRPr lang="en-US" sz="1220" dirty="0"/>
+          </a:p>
+          <a:p>
+            <a:pPr indent="0" marL="0">
+              <a:buNone/>
+            </a:pPr>
+            <a:r>
+              <a:rPr lang="en-US" sz="1220" dirty="0">
                 <a:solidFill>
                   <a:srgbClr val="17364A"/>
                 </a:solidFill>
@@ -9559,7 +9697,7 @@
               </a:rPr>
               <a:t>2.</a:t>
             </a:r>
-            <a:endParaRPr lang="en-US" sz="1380" dirty="0"/>
+            <a:endParaRPr lang="en-US" sz="1220" dirty="0"/>
           </a:p>
         </p:txBody>
       </p:sp>
@@ -9637,17 +9775,17 @@
         </p:nvSpPr>
         <p:spPr>
           <a:xfrm>
-            <a:off x="7799832" y="5001768"/>
-            <a:ext cx="3145536" cy="502920"/>
-          </a:xfrm>
-          <a:prstGeom prst="rect">
-            <a:avLst/>
-          </a:prstGeom>
-          <a:noFill/>
-          <a:ln/>
-        </p:spPr>
-        <p:txBody>
-          <a:bodyPr wrap="square" lIns="0" tIns="0" rIns="0" bIns="0" rtlCol="0" anchor="t">
+            <a:off x="7799832" y="4974336"/>
+            <a:ext cx="3145536" cy="576072"/>
+          </a:xfrm>
+          <a:prstGeom prst="rect">
+            <a:avLst/>
+          </a:prstGeom>
+          <a:noFill/>
+          <a:ln/>
+        </p:spPr>
+        <p:txBody>
+          <a:bodyPr wrap="square" lIns="254" tIns="254" rIns="254" bIns="254" rtlCol="0" anchor="t">
             <a:normAutofit/>
           </a:bodyPr>
           <a:lstStyle/>
@@ -9656,7 +9794,7 @@
               <a:buNone/>
             </a:pPr>
             <a:r>
-              <a:rPr lang="en-US" sz="1550" dirty="0">
+              <a:rPr lang="en-US" sz="1320" dirty="0">
                 <a:solidFill>
                   <a:srgbClr val="17364A"/>
                 </a:solidFill>
@@ -9664,9 +9802,9 @@
                 <a:ea typeface="Aptos" pitchFamily="34" charset="-122"/>
                 <a:cs typeface="Aptos" pitchFamily="34" charset="-120"/>
               </a:rPr>
-              <a:t>Use the assignment to test whether you can explain the concept, apply it to a realistic public health situation, and identify what would need review before the work moves forward.</a:t>
-            </a:r>
-            <a:endParaRPr lang="en-US" sz="1550" dirty="0"/>
+              <a:t>Use the assignment to test whether you can explain the concept, apply it to a realistic public health situation, and.</a:t>
+            </a:r>
+            <a:endParaRPr lang="en-US" sz="1320" dirty="0"/>
           </a:p>
         </p:txBody>
       </p:sp>
@@ -9967,49 +10105,58 @@
           <a:ln/>
         </p:spPr>
         <p:txBody>
-          <a:bodyPr wrap="square" lIns="635" tIns="635" rIns="635" bIns="635" rtlCol="0" anchor="t">
+          <a:bodyPr wrap="square" lIns="1016" tIns="1016" rIns="1016" bIns="1016" rtlCol="0" anchor="t">
             <a:normAutofit/>
           </a:bodyPr>
           <a:lstStyle/>
           <a:p>
+            <a:pPr indent="0" marL="0">
+              <a:buNone/>
+            </a:pPr>
             <a:r>
               <a:rPr lang="en-US" sz="2100" dirty="0">
                 <a:solidFill>
-                  <a:srgbClr val="17364A"/>
-                </a:solidFill>
-                <a:latin typeface="Aptos" pitchFamily="34" charset="0"/>
-                <a:ea typeface="Aptos" pitchFamily="34" charset="-122"/>
-                <a:cs typeface="Aptos" pitchFamily="34" charset="-120"/>
-              </a:rPr>
-              <a:t>Public health agencies have a responsibility to explain how AI is used in ways that affect public services,.</a:t>
+                  <a:srgbClr val="003A63"/>
+                </a:solidFill>
+                <a:latin typeface="Aptos" pitchFamily="34" charset="0"/>
+                <a:ea typeface="Aptos" pitchFamily="34" charset="-122"/>
+                <a:cs typeface="Aptos" pitchFamily="34" charset="-120"/>
+              </a:rPr>
+              <a:t>• Public health agencies have a responsibility to explain how AI is used in ways that affect.</a:t>
             </a:r>
             <a:endParaRPr lang="en-US" sz="2100" dirty="0"/>
           </a:p>
           <a:p>
+            <a:pPr indent="0" marL="0">
+              <a:buNone/>
+            </a:pPr>
             <a:r>
               <a:rPr lang="en-US" sz="2100" dirty="0">
                 <a:solidFill>
-                  <a:srgbClr val="17364A"/>
-                </a:solidFill>
-                <a:latin typeface="Aptos" pitchFamily="34" charset="0"/>
-                <a:ea typeface="Aptos" pitchFamily="34" charset="-122"/>
-                <a:cs typeface="Aptos" pitchFamily="34" charset="-120"/>
-              </a:rPr>
-              <a:t>Transparency reporting helps agencies communicate what AI tools are in use, why they are used, what safeguards.</a:t>
+                  <a:srgbClr val="003A63"/>
+                </a:solidFill>
+                <a:latin typeface="Aptos" pitchFamily="34" charset="0"/>
+                <a:ea typeface="Aptos" pitchFamily="34" charset="-122"/>
+                <a:cs typeface="Aptos" pitchFamily="34" charset="-120"/>
+              </a:rPr>
+              <a:t>• Transparency reporting helps agencies communicate what AI tools are in use, why they are used,.</a:t>
             </a:r>
             <a:endParaRPr lang="en-US" sz="2100" dirty="0"/>
           </a:p>
           <a:p>
+            <a:pPr indent="0" marL="0">
+              <a:buNone/>
+            </a:pPr>
             <a:r>
               <a:rPr lang="en-US" sz="2100" dirty="0">
                 <a:solidFill>
-                  <a:srgbClr val="17364A"/>
-                </a:solidFill>
-                <a:latin typeface="Aptos" pitchFamily="34" charset="0"/>
-                <a:ea typeface="Aptos" pitchFamily="34" charset="-122"/>
-                <a:cs typeface="Aptos" pitchFamily="34" charset="-120"/>
-              </a:rPr>
-              <a:t>This module helps leaders design AI transparency practices that are meaningful, not performative.</a:t>
+                  <a:srgbClr val="003A63"/>
+                </a:solidFill>
+                <a:latin typeface="Aptos" pitchFamily="34" charset="0"/>
+                <a:ea typeface="Aptos" pitchFamily="34" charset="-122"/>
+                <a:cs typeface="Aptos" pitchFamily="34" charset="-120"/>
+              </a:rPr>
+              <a:t>• This module helps leaders design AI transparency practices that are meaningful, not.</a:t>
             </a:r>
             <a:endParaRPr lang="en-US" sz="2100" dirty="0"/>
           </a:p>
@@ -10089,17 +10236,17 @@
         </p:nvSpPr>
         <p:spPr>
           <a:xfrm>
-            <a:off x="8074152" y="1920240"/>
-            <a:ext cx="2825496" cy="1280160"/>
-          </a:xfrm>
-          <a:prstGeom prst="rect">
-            <a:avLst/>
-          </a:prstGeom>
-          <a:noFill/>
-          <a:ln/>
-        </p:spPr>
-        <p:txBody>
-          <a:bodyPr wrap="square" lIns="0" tIns="0" rIns="0" bIns="0" rtlCol="0" anchor="t">
+            <a:off x="8074152" y="1892808"/>
+            <a:ext cx="2825496" cy="1353312"/>
+          </a:xfrm>
+          <a:prstGeom prst="rect">
+            <a:avLst/>
+          </a:prstGeom>
+          <a:noFill/>
+          <a:ln/>
+        </p:spPr>
+        <p:txBody>
+          <a:bodyPr wrap="square" lIns="254" tIns="254" rIns="254" bIns="254" rtlCol="0" anchor="t">
             <a:normAutofit/>
           </a:bodyPr>
           <a:lstStyle/>
@@ -10108,7 +10255,7 @@
               <a:buNone/>
             </a:pPr>
             <a:r>
-              <a:rPr lang="en-US" sz="1550" dirty="0">
+              <a:rPr lang="en-US" sz="1320" dirty="0">
                 <a:solidFill>
                   <a:srgbClr val="17364A"/>
                 </a:solidFill>
@@ -10116,43 +10263,9 @@
                 <a:ea typeface="Aptos" pitchFamily="34" charset="-122"/>
                 <a:cs typeface="Aptos" pitchFamily="34" charset="-120"/>
               </a:rPr>
-              <a:t>Level: advanced/leadership</a:t>
-            </a:r>
-            <a:endParaRPr lang="en-US" sz="1550" dirty="0"/>
-          </a:p>
-          <a:p>
-            <a:pPr indent="0" marL="0">
-              <a:buNone/>
-            </a:pPr>
-            <a:r>
-              <a:rPr lang="en-US" sz="1550" dirty="0">
-                <a:solidFill>
-                  <a:srgbClr val="17364A"/>
-                </a:solidFill>
-                <a:latin typeface="Aptos" pitchFamily="34" charset="0"/>
-                <a:ea typeface="Aptos" pitchFamily="34" charset="-122"/>
-                <a:cs typeface="Aptos" pitchFamily="34" charset="-120"/>
-              </a:rPr>
-              <a:t>Primary track: Governance and Security Track</a:t>
-            </a:r>
-            <a:endParaRPr lang="en-US" sz="1550" dirty="0"/>
-          </a:p>
-          <a:p>
-            <a:pPr indent="0" marL="0">
-              <a:buNone/>
-            </a:pPr>
-            <a:r>
-              <a:rPr lang="en-US" sz="1550" dirty="0">
-                <a:solidFill>
-                  <a:srgbClr val="17364A"/>
-                </a:solidFill>
-                <a:latin typeface="Aptos" pitchFamily="34" charset="0"/>
-                <a:ea typeface="Aptos" pitchFamily="34" charset="-122"/>
-                <a:cs typeface="Aptos" pitchFamily="34" charset="-120"/>
-              </a:rPr>
-              <a:t>Appears in tracks: governance-security</a:t>
-            </a:r>
-            <a:endParaRPr lang="en-US" sz="1550" dirty="0"/>
+              <a:t>Level: advanced/leadership Primary track: Governance and Security Track Appears in tracks: governance-security</a:t>
+            </a:r>
+            <a:endParaRPr lang="en-US" sz="1320" dirty="0"/>
           </a:p>
         </p:txBody>
       </p:sp>
@@ -10240,13 +10353,16 @@
           <a:ln/>
         </p:spPr>
         <p:txBody>
-          <a:bodyPr wrap="square" lIns="254" tIns="254" rIns="254" bIns="254" rtlCol="0" anchor="t">
+          <a:bodyPr wrap="square" lIns="508" tIns="508" rIns="508" bIns="508" rtlCol="0" anchor="t">
             <a:normAutofit/>
           </a:bodyPr>
           <a:lstStyle/>
           <a:p>
-            <a:r>
-              <a:rPr lang="en-US" sz="1380" dirty="0">
+            <a:pPr indent="0" marL="0">
+              <a:buNone/>
+            </a:pPr>
+            <a:r>
+              <a:rPr lang="en-US" sz="1220" dirty="0">
                 <a:solidFill>
                   <a:srgbClr val="17364A"/>
                 </a:solidFill>
@@ -10256,11 +10372,14 @@
               </a:rPr>
               <a:t>Read the module for shared vocabulary and context.</a:t>
             </a:r>
-            <a:endParaRPr lang="en-US" sz="1380" dirty="0"/>
-          </a:p>
-          <a:p>
-            <a:r>
-              <a:rPr lang="en-US" sz="1380" dirty="0">
+            <a:endParaRPr lang="en-US" sz="1220" dirty="0"/>
+          </a:p>
+          <a:p>
+            <a:pPr indent="0" marL="0">
+              <a:buNone/>
+            </a:pPr>
+            <a:r>
+              <a:rPr lang="en-US" sz="1220" dirty="0">
                 <a:solidFill>
                   <a:srgbClr val="17364A"/>
                 </a:solidFill>
@@ -10270,11 +10389,14 @@
               </a:rPr>
               <a:t>Complete the practical exercise to apply the concept.</a:t>
             </a:r>
-            <a:endParaRPr lang="en-US" sz="1380" dirty="0"/>
-          </a:p>
-          <a:p>
-            <a:r>
-              <a:rPr lang="en-US" sz="1380" dirty="0">
+            <a:endParaRPr lang="en-US" sz="1220" dirty="0"/>
+          </a:p>
+          <a:p>
+            <a:pPr indent="0" marL="0">
+              <a:buNone/>
+            </a:pPr>
+            <a:r>
+              <a:rPr lang="en-US" sz="1220" dirty="0">
                 <a:solidFill>
                   <a:srgbClr val="17364A"/>
                 </a:solidFill>
@@ -10284,7 +10406,7 @@
               </a:rPr>
               <a:t>Use the notes and references for deeper review.</a:t>
             </a:r>
-            <a:endParaRPr lang="en-US" sz="1380" dirty="0"/>
+            <a:endParaRPr lang="en-US" sz="1220" dirty="0"/>
           </a:p>
         </p:txBody>
       </p:sp>
@@ -10585,49 +10707,58 @@
           <a:ln/>
         </p:spPr>
         <p:txBody>
-          <a:bodyPr wrap="square" lIns="635" tIns="635" rIns="635" bIns="635" rtlCol="0" anchor="t">
+          <a:bodyPr wrap="square" lIns="1016" tIns="1016" rIns="1016" bIns="1016" rtlCol="0" anchor="t">
             <a:normAutofit/>
           </a:bodyPr>
           <a:lstStyle/>
           <a:p>
+            <a:pPr indent="0" marL="0">
+              <a:buNone/>
+            </a:pPr>
             <a:r>
               <a:rPr lang="en-US" sz="2100" dirty="0">
                 <a:solidFill>
-                  <a:srgbClr val="17364A"/>
-                </a:solidFill>
-                <a:latin typeface="Aptos" pitchFamily="34" charset="0"/>
-                <a:ea typeface="Aptos" pitchFamily="34" charset="-122"/>
-                <a:cs typeface="Aptos" pitchFamily="34" charset="-120"/>
-              </a:rPr>
-              <a:t>NIST Artificial Intelligence Risk Management Framework (AI RMF 1.0):.</a:t>
+                  <a:srgbClr val="003A63"/>
+                </a:solidFill>
+                <a:latin typeface="Aptos" pitchFamily="34" charset="0"/>
+                <a:ea typeface="Aptos" pitchFamily="34" charset="-122"/>
+                <a:cs typeface="Aptos" pitchFamily="34" charset="-120"/>
+              </a:rPr>
+              <a:t>• NIST Artificial Intelligence Risk Management Framework (AI RMF 1.0):.</a:t>
             </a:r>
             <a:endParaRPr lang="en-US" sz="2100" dirty="0"/>
           </a:p>
           <a:p>
+            <a:pPr indent="0" marL="0">
+              <a:buNone/>
+            </a:pPr>
             <a:r>
               <a:rPr lang="en-US" sz="2100" dirty="0">
                 <a:solidFill>
-                  <a:srgbClr val="17364A"/>
-                </a:solidFill>
-                <a:latin typeface="Aptos" pitchFamily="34" charset="0"/>
-                <a:ea typeface="Aptos" pitchFamily="34" charset="-122"/>
-                <a:cs typeface="Aptos" pitchFamily="34" charset="-120"/>
-              </a:rPr>
-              <a:t>NIST Generative AI Profile:.</a:t>
+                  <a:srgbClr val="003A63"/>
+                </a:solidFill>
+                <a:latin typeface="Aptos" pitchFamily="34" charset="0"/>
+                <a:ea typeface="Aptos" pitchFamily="34" charset="-122"/>
+                <a:cs typeface="Aptos" pitchFamily="34" charset="-120"/>
+              </a:rPr>
+              <a:t>• NIST Generative AI Profile:.</a:t>
             </a:r>
             <a:endParaRPr lang="en-US" sz="2100" dirty="0"/>
           </a:p>
           <a:p>
+            <a:pPr indent="0" marL="0">
+              <a:buNone/>
+            </a:pPr>
             <a:r>
               <a:rPr lang="en-US" sz="2100" dirty="0">
                 <a:solidFill>
-                  <a:srgbClr val="17364A"/>
-                </a:solidFill>
-                <a:latin typeface="Aptos" pitchFamily="34" charset="0"/>
-                <a:ea typeface="Aptos" pitchFamily="34" charset="-122"/>
-                <a:cs typeface="Aptos" pitchFamily="34" charset="-120"/>
-              </a:rPr>
-              <a:t>NIST Privacy Framework</a:t>
+                  <a:srgbClr val="003A63"/>
+                </a:solidFill>
+                <a:latin typeface="Aptos" pitchFamily="34" charset="0"/>
+                <a:ea typeface="Aptos" pitchFamily="34" charset="-122"/>
+                <a:cs typeface="Aptos" pitchFamily="34" charset="-120"/>
+              </a:rPr>
+              <a:t>• NIST Privacy Framework</a:t>
             </a:r>
             <a:endParaRPr lang="en-US" sz="2100" dirty="0"/>
           </a:p>
@@ -10707,17 +10838,17 @@
         </p:nvSpPr>
         <p:spPr>
           <a:xfrm>
-            <a:off x="7799832" y="1828800"/>
-            <a:ext cx="3145536" cy="685800"/>
-          </a:xfrm>
-          <a:prstGeom prst="rect">
-            <a:avLst/>
-          </a:prstGeom>
-          <a:noFill/>
-          <a:ln/>
-        </p:spPr>
-        <p:txBody>
-          <a:bodyPr wrap="square" lIns="0" tIns="0" rIns="0" bIns="0" rtlCol="0" anchor="t">
+            <a:off x="7799832" y="1801368"/>
+            <a:ext cx="3145536" cy="758952"/>
+          </a:xfrm>
+          <a:prstGeom prst="rect">
+            <a:avLst/>
+          </a:prstGeom>
+          <a:noFill/>
+          <a:ln/>
+        </p:spPr>
+        <p:txBody>
+          <a:bodyPr wrap="square" lIns="254" tIns="254" rIns="254" bIns="254" rtlCol="0" anchor="t">
             <a:normAutofit/>
           </a:bodyPr>
           <a:lstStyle/>
@@ -10726,7 +10857,7 @@
               <a:buNone/>
             </a:pPr>
             <a:r>
-              <a:rPr lang="en-US" sz="1550" dirty="0">
+              <a:rPr lang="en-US" sz="1320" dirty="0">
                 <a:solidFill>
                   <a:srgbClr val="17364A"/>
                 </a:solidFill>
@@ -10736,7 +10867,7 @@
               </a:rPr>
               <a:t>NIST Artificial Intelligence Risk Management Framework (AI RMF 1.0):.</a:t>
             </a:r>
-            <a:endParaRPr lang="en-US" sz="1550" dirty="0"/>
+            <a:endParaRPr lang="en-US" sz="1320" dirty="0"/>
           </a:p>
         </p:txBody>
       </p:sp>
@@ -10824,13 +10955,16 @@
           <a:ln/>
         </p:spPr>
         <p:txBody>
-          <a:bodyPr wrap="square" lIns="254" tIns="254" rIns="254" bIns="254" rtlCol="0" anchor="t">
+          <a:bodyPr wrap="square" lIns="508" tIns="508" rIns="508" bIns="508" rtlCol="0" anchor="t">
             <a:normAutofit/>
           </a:bodyPr>
           <a:lstStyle/>
           <a:p>
-            <a:r>
-              <a:rPr lang="en-US" sz="1380" dirty="0">
+            <a:pPr indent="0" marL="0">
+              <a:buNone/>
+            </a:pPr>
+            <a:r>
+              <a:rPr lang="en-US" sz="1220" dirty="0">
                 <a:solidFill>
                   <a:srgbClr val="17364A"/>
                 </a:solidFill>
@@ -10838,13 +10972,16 @@
                 <a:ea typeface="Aptos" pitchFamily="34" charset="-122"/>
                 <a:cs typeface="Aptos" pitchFamily="34" charset="-120"/>
               </a:rPr>
-              <a:t>NIST Artificial Intelligence Risk Management Framework (AI RMF 1.0):.</a:t>
-            </a:r>
-            <a:endParaRPr lang="en-US" sz="1380" dirty="0"/>
-          </a:p>
-          <a:p>
-            <a:r>
-              <a:rPr lang="en-US" sz="1380" dirty="0">
+              <a:t>NIST Artificial Intelligence Risk Management Framework (AI RMF.</a:t>
+            </a:r>
+            <a:endParaRPr lang="en-US" sz="1220" dirty="0"/>
+          </a:p>
+          <a:p>
+            <a:pPr indent="0" marL="0">
+              <a:buNone/>
+            </a:pPr>
+            <a:r>
+              <a:rPr lang="en-US" sz="1220" dirty="0">
                 <a:solidFill>
                   <a:srgbClr val="17364A"/>
                 </a:solidFill>
@@ -10854,11 +10991,14 @@
               </a:rPr>
               <a:t>CDC Public Health Data Strategy and Data Modernization resources:.</a:t>
             </a:r>
-            <a:endParaRPr lang="en-US" sz="1380" dirty="0"/>
-          </a:p>
-          <a:p>
-            <a:r>
-              <a:rPr lang="en-US" sz="1380" dirty="0">
+            <a:endParaRPr lang="en-US" sz="1220" dirty="0"/>
+          </a:p>
+          <a:p>
+            <a:pPr indent="0" marL="0">
+              <a:buNone/>
+            </a:pPr>
+            <a:r>
+              <a:rPr lang="en-US" sz="1220" dirty="0">
                 <a:solidFill>
                   <a:srgbClr val="17364A"/>
                 </a:solidFill>
@@ -10868,7 +11008,7 @@
               </a:rPr>
               <a:t>WHO Ethics and Governance of Artificial Intelligence for Health:.</a:t>
             </a:r>
-            <a:endParaRPr lang="en-US" sz="1380" dirty="0"/>
+            <a:endParaRPr lang="en-US" sz="1220" dirty="0"/>
           </a:p>
         </p:txBody>
       </p:sp>
@@ -10946,17 +11086,17 @@
         </p:nvSpPr>
         <p:spPr>
           <a:xfrm>
-            <a:off x="7799832" y="5001768"/>
-            <a:ext cx="3145536" cy="502920"/>
-          </a:xfrm>
-          <a:prstGeom prst="rect">
-            <a:avLst/>
-          </a:prstGeom>
-          <a:noFill/>
-          <a:ln/>
-        </p:spPr>
-        <p:txBody>
-          <a:bodyPr wrap="square" lIns="0" tIns="0" rIns="0" bIns="0" rtlCol="0" anchor="t">
+            <a:off x="7799832" y="4974336"/>
+            <a:ext cx="3145536" cy="576072"/>
+          </a:xfrm>
+          <a:prstGeom prst="rect">
+            <a:avLst/>
+          </a:prstGeom>
+          <a:noFill/>
+          <a:ln/>
+        </p:spPr>
+        <p:txBody>
+          <a:bodyPr wrap="square" lIns="254" tIns="254" rIns="254" bIns="254" rtlCol="0" anchor="t">
             <a:normAutofit/>
           </a:bodyPr>
           <a:lstStyle/>
@@ -10965,7 +11105,7 @@
               <a:buNone/>
             </a:pPr>
             <a:r>
-              <a:rPr lang="en-US" sz="1550" dirty="0">
+              <a:rPr lang="en-US" sz="1320" dirty="0">
                 <a:solidFill>
                   <a:srgbClr val="17364A"/>
                 </a:solidFill>
@@ -10973,9 +11113,9 @@
                 <a:ea typeface="Aptos" pitchFamily="34" charset="-122"/>
                 <a:cs typeface="Aptos" pitchFamily="34" charset="-120"/>
               </a:rPr>
-              <a:t>Connect the concept to public health purpose, responsible use, required safeguards, documentation, and the next action a department should take.</a:t>
-            </a:r>
-            <a:endParaRPr lang="en-US" sz="1550" dirty="0"/>
+              <a:t>Connect the concept to public health purpose, responsible use, required safeguards, documentation, and the next action a.</a:t>
+            </a:r>
+            <a:endParaRPr lang="en-US" sz="1320" dirty="0"/>
           </a:p>
         </p:txBody>
       </p:sp>
@@ -11276,35 +11416,41 @@
           <a:ln/>
         </p:spPr>
         <p:txBody>
-          <a:bodyPr wrap="square" lIns="635" tIns="635" rIns="635" bIns="635" rtlCol="0" anchor="t">
+          <a:bodyPr wrap="square" lIns="1016" tIns="1016" rIns="1016" bIns="1016" rtlCol="0" anchor="t">
             <a:normAutofit/>
           </a:bodyPr>
           <a:lstStyle/>
           <a:p>
+            <a:pPr indent="0" marL="0">
+              <a:buNone/>
+            </a:pPr>
             <a:r>
               <a:rPr lang="en-US" sz="2100" dirty="0">
                 <a:solidFill>
-                  <a:srgbClr val="17364A"/>
-                </a:solidFill>
-                <a:latin typeface="Aptos" pitchFamily="34" charset="0"/>
-                <a:ea typeface="Aptos" pitchFamily="34" charset="-122"/>
-                <a:cs typeface="Aptos" pitchFamily="34" charset="-120"/>
-              </a:rPr>
-              <a:t>OMB Memorandum M-24-10 on federal AI governance, risk management, and innovation, where relevant to.</a:t>
+                  <a:srgbClr val="003A63"/>
+                </a:solidFill>
+                <a:latin typeface="Aptos" pitchFamily="34" charset="0"/>
+                <a:ea typeface="Aptos" pitchFamily="34" charset="-122"/>
+                <a:cs typeface="Aptos" pitchFamily="34" charset="-120"/>
+              </a:rPr>
+              <a:t>• OMB Memorandum M-24-10 on federal AI governance, risk management, and innovation, where.</a:t>
             </a:r>
             <a:endParaRPr lang="en-US" sz="2100" dirty="0"/>
           </a:p>
           <a:p>
+            <a:pPr indent="0" marL="0">
+              <a:buNone/>
+            </a:pPr>
             <a:r>
               <a:rPr lang="en-US" sz="2100" dirty="0">
                 <a:solidFill>
-                  <a:srgbClr val="17364A"/>
-                </a:solidFill>
-                <a:latin typeface="Aptos" pitchFamily="34" charset="0"/>
-                <a:ea typeface="Aptos" pitchFamily="34" charset="-122"/>
-                <a:cs typeface="Aptos" pitchFamily="34" charset="-120"/>
-              </a:rPr>
-              <a:t>Agency strategic plans, procurement policies, privacy policies, cybersecurity policies, records.</a:t>
+                  <a:srgbClr val="003A63"/>
+                </a:solidFill>
+                <a:latin typeface="Aptos" pitchFamily="34" charset="0"/>
+                <a:ea typeface="Aptos" pitchFamily="34" charset="-122"/>
+                <a:cs typeface="Aptos" pitchFamily="34" charset="-120"/>
+              </a:rPr>
+              <a:t>• Agency strategic plans, procurement policies, privacy policies, cybersecurity policies, records.</a:t>
             </a:r>
             <a:endParaRPr lang="en-US" sz="2100" dirty="0"/>
           </a:p>
@@ -11384,17 +11530,17 @@
         </p:nvSpPr>
         <p:spPr>
           <a:xfrm>
-            <a:off x="7799832" y="1828800"/>
-            <a:ext cx="3145536" cy="685800"/>
-          </a:xfrm>
-          <a:prstGeom prst="rect">
-            <a:avLst/>
-          </a:prstGeom>
-          <a:noFill/>
-          <a:ln/>
-        </p:spPr>
-        <p:txBody>
-          <a:bodyPr wrap="square" lIns="0" tIns="0" rIns="0" bIns="0" rtlCol="0" anchor="t">
+            <a:off x="7799832" y="1801368"/>
+            <a:ext cx="3145536" cy="758952"/>
+          </a:xfrm>
+          <a:prstGeom prst="rect">
+            <a:avLst/>
+          </a:prstGeom>
+          <a:noFill/>
+          <a:ln/>
+        </p:spPr>
+        <p:txBody>
+          <a:bodyPr wrap="square" lIns="254" tIns="254" rIns="254" bIns="254" rtlCol="0" anchor="t">
             <a:normAutofit/>
           </a:bodyPr>
           <a:lstStyle/>
@@ -11403,7 +11549,7 @@
               <a:buNone/>
             </a:pPr>
             <a:r>
-              <a:rPr lang="en-US" sz="1550" dirty="0">
+              <a:rPr lang="en-US" sz="1320" dirty="0">
                 <a:solidFill>
                   <a:srgbClr val="17364A"/>
                 </a:solidFill>
@@ -11413,7 +11559,7 @@
               </a:rPr>
               <a:t>OMB Memorandum M-24-10 on federal AI governance, risk management, and innovation, where relevant to.</a:t>
             </a:r>
-            <a:endParaRPr lang="en-US" sz="1550" dirty="0"/>
+            <a:endParaRPr lang="en-US" sz="1320" dirty="0"/>
           </a:p>
         </p:txBody>
       </p:sp>
@@ -11501,13 +11647,16 @@
           <a:ln/>
         </p:spPr>
         <p:txBody>
-          <a:bodyPr wrap="square" lIns="254" tIns="254" rIns="254" bIns="254" rtlCol="0" anchor="t">
+          <a:bodyPr wrap="square" lIns="508" tIns="508" rIns="508" bIns="508" rtlCol="0" anchor="t">
             <a:normAutofit/>
           </a:bodyPr>
           <a:lstStyle/>
           <a:p>
-            <a:r>
-              <a:rPr lang="en-US" sz="1380" dirty="0">
+            <a:pPr indent="0" marL="0">
+              <a:buNone/>
+            </a:pPr>
+            <a:r>
+              <a:rPr lang="en-US" sz="1220" dirty="0">
                 <a:solidFill>
                   <a:srgbClr val="17364A"/>
                 </a:solidFill>
@@ -11515,13 +11664,16 @@
                 <a:ea typeface="Aptos" pitchFamily="34" charset="-122"/>
                 <a:cs typeface="Aptos" pitchFamily="34" charset="-120"/>
               </a:rPr>
-              <a:t>OMB Memorandum M-24-10 on federal AI governance, risk management, and innovation, where.</a:t>
-            </a:r>
-            <a:endParaRPr lang="en-US" sz="1380" dirty="0"/>
-          </a:p>
-          <a:p>
-            <a:r>
-              <a:rPr lang="en-US" sz="1380" dirty="0">
+              <a:t>OMB Memorandum M-24-10 on federal AI governance, risk management,.</a:t>
+            </a:r>
+            <a:endParaRPr lang="en-US" sz="1220" dirty="0"/>
+          </a:p>
+          <a:p>
+            <a:pPr indent="0" marL="0">
+              <a:buNone/>
+            </a:pPr>
+            <a:r>
+              <a:rPr lang="en-US" sz="1220" dirty="0">
                 <a:solidFill>
                   <a:srgbClr val="17364A"/>
                 </a:solidFill>
@@ -11529,9 +11681,9 @@
                 <a:ea typeface="Aptos" pitchFamily="34" charset="-122"/>
                 <a:cs typeface="Aptos" pitchFamily="34" charset="-120"/>
               </a:rPr>
-              <a:t>Agency strategic plans, procurement policies, privacy policies, cybersecurity policies,.</a:t>
-            </a:r>
-            <a:endParaRPr lang="en-US" sz="1380" dirty="0"/>
+              <a:t>Agency strategic plans, procurement policies, privacy policies,.</a:t>
+            </a:r>
+            <a:endParaRPr lang="en-US" sz="1220" dirty="0"/>
           </a:p>
         </p:txBody>
       </p:sp>
@@ -11609,17 +11761,17 @@
         </p:nvSpPr>
         <p:spPr>
           <a:xfrm>
-            <a:off x="7799832" y="5001768"/>
-            <a:ext cx="3145536" cy="502920"/>
-          </a:xfrm>
-          <a:prstGeom prst="rect">
-            <a:avLst/>
-          </a:prstGeom>
-          <a:noFill/>
-          <a:ln/>
-        </p:spPr>
-        <p:txBody>
-          <a:bodyPr wrap="square" lIns="0" tIns="0" rIns="0" bIns="0" rtlCol="0" anchor="t">
+            <a:off x="7799832" y="4974336"/>
+            <a:ext cx="3145536" cy="576072"/>
+          </a:xfrm>
+          <a:prstGeom prst="rect">
+            <a:avLst/>
+          </a:prstGeom>
+          <a:noFill/>
+          <a:ln/>
+        </p:spPr>
+        <p:txBody>
+          <a:bodyPr wrap="square" lIns="254" tIns="254" rIns="254" bIns="254" rtlCol="0" anchor="t">
             <a:normAutofit/>
           </a:bodyPr>
           <a:lstStyle/>
@@ -11628,7 +11780,7 @@
               <a:buNone/>
             </a:pPr>
             <a:r>
-              <a:rPr lang="en-US" sz="1550" dirty="0">
+              <a:rPr lang="en-US" sz="1320" dirty="0">
                 <a:solidFill>
                   <a:srgbClr val="17364A"/>
                 </a:solidFill>
@@ -11636,9 +11788,9 @@
                 <a:ea typeface="Aptos" pitchFamily="34" charset="-122"/>
                 <a:cs typeface="Aptos" pitchFamily="34" charset="-120"/>
               </a:rPr>
-              <a:t>Connect the concept to public health purpose, responsible use, required safeguards, documentation, and the next action a department should take.</a:t>
-            </a:r>
-            <a:endParaRPr lang="en-US" sz="1550" dirty="0"/>
+              <a:t>Connect the concept to public health purpose, responsible use, required safeguards, documentation, and the next action a.</a:t>
+            </a:r>
+            <a:endParaRPr lang="en-US" sz="1320" dirty="0"/>
           </a:p>
         </p:txBody>
       </p:sp>
@@ -11939,63 +12091,75 @@
           <a:ln/>
         </p:spPr>
         <p:txBody>
-          <a:bodyPr wrap="square" lIns="635" tIns="635" rIns="635" bIns="635" rtlCol="0" anchor="t">
+          <a:bodyPr wrap="square" lIns="1016" tIns="1016" rIns="1016" bIns="1016" rtlCol="0" anchor="t">
             <a:normAutofit/>
           </a:bodyPr>
           <a:lstStyle/>
           <a:p>
+            <a:pPr indent="0" marL="0">
+              <a:buNone/>
+            </a:pPr>
             <a:r>
               <a:rPr lang="en-US" sz="1900" dirty="0">
                 <a:solidFill>
-                  <a:srgbClr val="17364A"/>
-                </a:solidFill>
-                <a:latin typeface="Aptos" pitchFamily="34" charset="0"/>
-                <a:ea typeface="Aptos" pitchFamily="34" charset="-122"/>
-                <a:cs typeface="Aptos" pitchFamily="34" charset="-120"/>
-              </a:rPr>
-              <a:t>Play 11: Build and Deploy AI Solutions - This lesson informs Play 11 by helping learners connect the lesson.</a:t>
+                  <a:srgbClr val="003A63"/>
+                </a:solidFill>
+                <a:latin typeface="Aptos" pitchFamily="34" charset="0"/>
+                <a:ea typeface="Aptos" pitchFamily="34" charset="-122"/>
+                <a:cs typeface="Aptos" pitchFamily="34" charset="-120"/>
+              </a:rPr>
+              <a:t>• Play 11: Build and Deploy AI Solutions - This lesson informs Play 11 by helping learners.</a:t>
             </a:r>
             <a:endParaRPr lang="en-US" sz="1900" dirty="0"/>
           </a:p>
           <a:p>
+            <a:pPr indent="0" marL="0">
+              <a:buNone/>
+            </a:pPr>
             <a:r>
               <a:rPr lang="en-US" sz="1900" dirty="0">
                 <a:solidFill>
-                  <a:srgbClr val="17364A"/>
-                </a:solidFill>
-                <a:latin typeface="Aptos" pitchFamily="34" charset="0"/>
-                <a:ea typeface="Aptos" pitchFamily="34" charset="-122"/>
-                <a:cs typeface="Aptos" pitchFamily="34" charset="-120"/>
-              </a:rPr>
-              <a:t>Play 7: Prioritize Use Cases - This lesson informs Play 7 by helping learners connect the lesson topic to.</a:t>
+                  <a:srgbClr val="003A63"/>
+                </a:solidFill>
+                <a:latin typeface="Aptos" pitchFamily="34" charset="0"/>
+                <a:ea typeface="Aptos" pitchFamily="34" charset="-122"/>
+                <a:cs typeface="Aptos" pitchFamily="34" charset="-120"/>
+              </a:rPr>
+              <a:t>• Play 7: Prioritize Use Cases - This lesson informs Play 7 by helping learners connect the.</a:t>
             </a:r>
             <a:endParaRPr lang="en-US" sz="1900" dirty="0"/>
           </a:p>
           <a:p>
+            <a:pPr indent="0" marL="0">
+              <a:buNone/>
+            </a:pPr>
             <a:r>
               <a:rPr lang="en-US" sz="1900" dirty="0">
                 <a:solidFill>
-                  <a:srgbClr val="17364A"/>
-                </a:solidFill>
-                <a:latin typeface="Aptos" pitchFamily="34" charset="0"/>
-                <a:ea typeface="Aptos" pitchFamily="34" charset="-122"/>
-                <a:cs typeface="Aptos" pitchFamily="34" charset="-120"/>
-              </a:rPr>
-              <a:t>Play 1: Vision &amp; Guardrails - This lesson informs Play 1 by helping learners connect the lesson topic to.</a:t>
+                  <a:srgbClr val="003A63"/>
+                </a:solidFill>
+                <a:latin typeface="Aptos" pitchFamily="34" charset="0"/>
+                <a:ea typeface="Aptos" pitchFamily="34" charset="-122"/>
+                <a:cs typeface="Aptos" pitchFamily="34" charset="-120"/>
+              </a:rPr>
+              <a:t>• Play 1: Vision &amp; Guardrails - This lesson informs Play 1 by helping learners connect the.</a:t>
             </a:r>
             <a:endParaRPr lang="en-US" sz="1900" dirty="0"/>
           </a:p>
           <a:p>
+            <a:pPr indent="0" marL="0">
+              <a:buNone/>
+            </a:pPr>
             <a:r>
               <a:rPr lang="en-US" sz="1900" dirty="0">
                 <a:solidFill>
-                  <a:srgbClr val="17364A"/>
-                </a:solidFill>
-                <a:latin typeface="Aptos" pitchFamily="34" charset="0"/>
-                <a:ea typeface="Aptos" pitchFamily="34" charset="-122"/>
-                <a:cs typeface="Aptos" pitchFamily="34" charset="-120"/>
-              </a:rPr>
-              <a:t>Play 2: Readiness Assessment - This lesson informs Play 2 by helping learners connect the lesson topic to.</a:t>
+                  <a:srgbClr val="003A63"/>
+                </a:solidFill>
+                <a:latin typeface="Aptos" pitchFamily="34" charset="0"/>
+                <a:ea typeface="Aptos" pitchFamily="34" charset="-122"/>
+                <a:cs typeface="Aptos" pitchFamily="34" charset="-120"/>
+              </a:rPr>
+              <a:t>• Play 2: Readiness Assessment - This lesson informs Play 2 by helping learners connect the.</a:t>
             </a:r>
             <a:endParaRPr lang="en-US" sz="1900" dirty="0"/>
           </a:p>
@@ -12075,17 +12239,17 @@
         </p:nvSpPr>
         <p:spPr>
           <a:xfrm>
-            <a:off x="8211312" y="1920240"/>
-            <a:ext cx="2734056" cy="1463040"/>
-          </a:xfrm>
-          <a:prstGeom prst="rect">
-            <a:avLst/>
-          </a:prstGeom>
-          <a:noFill/>
-          <a:ln/>
-        </p:spPr>
-        <p:txBody>
-          <a:bodyPr wrap="square" lIns="0" tIns="0" rIns="0" bIns="0" rtlCol="0" anchor="t">
+            <a:off x="8211312" y="1892808"/>
+            <a:ext cx="2734056" cy="1536192"/>
+          </a:xfrm>
+          <a:prstGeom prst="rect">
+            <a:avLst/>
+          </a:prstGeom>
+          <a:noFill/>
+          <a:ln/>
+        </p:spPr>
+        <p:txBody>
+          <a:bodyPr wrap="square" lIns="254" tIns="254" rIns="254" bIns="254" rtlCol="0" anchor="t">
             <a:normAutofit/>
           </a:bodyPr>
           <a:lstStyle/>
@@ -12094,7 +12258,7 @@
               <a:buNone/>
             </a:pPr>
             <a:r>
-              <a:rPr lang="en-US" sz="1550" dirty="0">
+              <a:rPr lang="en-US" sz="1320" dirty="0">
                 <a:solidFill>
                   <a:srgbClr val="17364A"/>
                 </a:solidFill>
@@ -12102,9 +12266,9 @@
                 <a:ea typeface="Aptos" pitchFamily="34" charset="-122"/>
                 <a:cs typeface="Aptos" pitchFamily="34" charset="-120"/>
               </a:rPr>
-              <a:t>Use the related plays to identify decisions, participants, timing, approvals, and documentation needed for responsible implementation.</a:t>
-            </a:r>
-            <a:endParaRPr lang="en-US" sz="1550" dirty="0"/>
+              <a:t>Use the related plays to identify decisions, participants, timing, approvals, and documentation needed for responsible.</a:t>
+            </a:r>
+            <a:endParaRPr lang="en-US" sz="1320" dirty="0"/>
           </a:p>
         </p:txBody>
       </p:sp>
@@ -12192,13 +12356,16 @@
           <a:ln/>
         </p:spPr>
         <p:txBody>
-          <a:bodyPr wrap="square" lIns="254" tIns="254" rIns="254" bIns="254" rtlCol="0" anchor="t">
+          <a:bodyPr wrap="square" lIns="508" tIns="508" rIns="508" bIns="508" rtlCol="0" anchor="t">
             <a:normAutofit/>
           </a:bodyPr>
           <a:lstStyle/>
           <a:p>
-            <a:r>
-              <a:rPr lang="en-US" sz="1380" dirty="0">
+            <a:pPr indent="0" marL="0">
+              <a:buNone/>
+            </a:pPr>
+            <a:r>
+              <a:rPr lang="en-US" sz="1220" dirty="0">
                 <a:solidFill>
                   <a:srgbClr val="17364A"/>
                 </a:solidFill>
@@ -12208,11 +12375,14 @@
               </a:rPr>
               <a:t>Locate the decision point in the playbook sequence.</a:t>
             </a:r>
-            <a:endParaRPr lang="en-US" sz="1380" dirty="0"/>
-          </a:p>
-          <a:p>
-            <a:r>
-              <a:rPr lang="en-US" sz="1380" dirty="0">
+            <a:endParaRPr lang="en-US" sz="1220" dirty="0"/>
+          </a:p>
+          <a:p>
+            <a:pPr indent="0" marL="0">
+              <a:buNone/>
+            </a:pPr>
+            <a:r>
+              <a:rPr lang="en-US" sz="1220" dirty="0">
                 <a:solidFill>
                   <a:srgbClr val="17364A"/>
                 </a:solidFill>
@@ -12222,11 +12392,14 @@
               </a:rPr>
               <a:t>Identify who should participate in the work.</a:t>
             </a:r>
-            <a:endParaRPr lang="en-US" sz="1380" dirty="0"/>
-          </a:p>
-          <a:p>
-            <a:r>
-              <a:rPr lang="en-US" sz="1380" dirty="0">
+            <a:endParaRPr lang="en-US" sz="1220" dirty="0"/>
+          </a:p>
+          <a:p>
+            <a:pPr indent="0" marL="0">
+              <a:buNone/>
+            </a:pPr>
+            <a:r>
+              <a:rPr lang="en-US" sz="1220" dirty="0">
                 <a:solidFill>
                   <a:srgbClr val="17364A"/>
                 </a:solidFill>
@@ -12236,7 +12409,7 @@
               </a:rPr>
               <a:t>Document the review, approval, or implementation step.</a:t>
             </a:r>
-            <a:endParaRPr lang="en-US" sz="1380" dirty="0"/>
+            <a:endParaRPr lang="en-US" sz="1220" dirty="0"/>
           </a:p>
         </p:txBody>
       </p:sp>
@@ -12537,63 +12710,75 @@
           <a:ln/>
         </p:spPr>
         <p:txBody>
-          <a:bodyPr wrap="square" lIns="635" tIns="635" rIns="635" bIns="635" rtlCol="0" anchor="t">
+          <a:bodyPr wrap="square" lIns="1016" tIns="1016" rIns="1016" bIns="1016" rtlCol="0" anchor="t">
             <a:normAutofit/>
           </a:bodyPr>
           <a:lstStyle/>
           <a:p>
+            <a:pPr indent="0" marL="0">
+              <a:buNone/>
+            </a:pPr>
             <a:r>
               <a:rPr lang="en-US" sz="1850" dirty="0">
                 <a:solidFill>
-                  <a:srgbClr val="17364A"/>
-                </a:solidFill>
-                <a:latin typeface="Aptos" pitchFamily="34" charset="0"/>
-                <a:ea typeface="Aptos" pitchFamily="34" charset="-122"/>
-                <a:cs typeface="Aptos" pitchFamily="34" charset="-120"/>
-              </a:rPr>
-              <a:t>Tool 3: Equity Impact Assessment Checklist (Checklist) - Use this tool to complete or strengthen the.</a:t>
+                  <a:srgbClr val="003A63"/>
+                </a:solidFill>
+                <a:latin typeface="Aptos" pitchFamily="34" charset="0"/>
+                <a:ea typeface="Aptos" pitchFamily="34" charset="-122"/>
+                <a:cs typeface="Aptos" pitchFamily="34" charset="-120"/>
+              </a:rPr>
+              <a:t>• Tool 3: Equity Impact Assessment Checklist (Checklist) - Use this tool to complete or.</a:t>
             </a:r>
             <a:endParaRPr lang="en-US" sz="1850" dirty="0"/>
           </a:p>
           <a:p>
+            <a:pPr indent="0" marL="0">
+              <a:buNone/>
+            </a:pPr>
             <a:r>
               <a:rPr lang="en-US" sz="1850" dirty="0">
                 <a:solidFill>
-                  <a:srgbClr val="17364A"/>
-                </a:solidFill>
-                <a:latin typeface="Aptos" pitchFamily="34" charset="0"/>
-                <a:ea typeface="Aptos" pitchFamily="34" charset="-122"/>
-                <a:cs typeface="Aptos" pitchFamily="34" charset="-120"/>
-              </a:rPr>
-              <a:t>Tool 4: AI Policy Landscape Scan (Worksheet) - Use AI Policy Landscape Scan to translate this lesson into a.</a:t>
+                  <a:srgbClr val="003A63"/>
+                </a:solidFill>
+                <a:latin typeface="Aptos" pitchFamily="34" charset="0"/>
+                <a:ea typeface="Aptos" pitchFamily="34" charset="-122"/>
+                <a:cs typeface="Aptos" pitchFamily="34" charset="-120"/>
+              </a:rPr>
+              <a:t>• Tool 4: AI Policy Landscape Scan (Worksheet) - Use AI Policy Landscape Scan to translate this.</a:t>
             </a:r>
             <a:endParaRPr lang="en-US" sz="1850" dirty="0"/>
           </a:p>
           <a:p>
+            <a:pPr indent="0" marL="0">
+              <a:buNone/>
+            </a:pPr>
             <a:r>
               <a:rPr lang="en-US" sz="1850" dirty="0">
                 <a:solidFill>
-                  <a:srgbClr val="17364A"/>
-                </a:solidFill>
-                <a:latin typeface="Aptos" pitchFamily="34" charset="0"/>
-                <a:ea typeface="Aptos" pitchFamily="34" charset="-122"/>
-                <a:cs typeface="Aptos" pitchFamily="34" charset="-120"/>
-              </a:rPr>
-              <a:t>Tool 5: AI Environmental and Resource Impact Review (Checklist) - Use AI Environmental and Resource Impact.</a:t>
+                  <a:srgbClr val="003A63"/>
+                </a:solidFill>
+                <a:latin typeface="Aptos" pitchFamily="34" charset="0"/>
+                <a:ea typeface="Aptos" pitchFamily="34" charset="-122"/>
+                <a:cs typeface="Aptos" pitchFamily="34" charset="-120"/>
+              </a:rPr>
+              <a:t>• Tool 5: AI Environmental and Resource Impact Review (Checklist) - Use AI Environmental and.</a:t>
             </a:r>
             <a:endParaRPr lang="en-US" sz="1850" dirty="0"/>
           </a:p>
           <a:p>
+            <a:pPr indent="0" marL="0">
+              <a:buNone/>
+            </a:pPr>
             <a:r>
               <a:rPr lang="en-US" sz="1850" dirty="0">
                 <a:solidFill>
-                  <a:srgbClr val="17364A"/>
-                </a:solidFill>
-                <a:latin typeface="Aptos" pitchFamily="34" charset="0"/>
-                <a:ea typeface="Aptos" pitchFamily="34" charset="-122"/>
-                <a:cs typeface="Aptos" pitchFamily="34" charset="-120"/>
-              </a:rPr>
-              <a:t>Tool 6: Human-Centered AI Decision Rule Checklist (Checklist) - Use this tool to complete or strengthen the.</a:t>
+                  <a:srgbClr val="003A63"/>
+                </a:solidFill>
+                <a:latin typeface="Aptos" pitchFamily="34" charset="0"/>
+                <a:ea typeface="Aptos" pitchFamily="34" charset="-122"/>
+                <a:cs typeface="Aptos" pitchFamily="34" charset="-120"/>
+              </a:rPr>
+              <a:t>• Tool 6: Human-Centered AI Decision Rule Checklist (Checklist) - Use this tool to complete or.</a:t>
             </a:r>
             <a:endParaRPr lang="en-US" sz="1850" dirty="0"/>
           </a:p>
@@ -12673,17 +12858,17 @@
         </p:nvSpPr>
         <p:spPr>
           <a:xfrm>
-            <a:off x="8211312" y="1920240"/>
-            <a:ext cx="2734056" cy="1463040"/>
-          </a:xfrm>
-          <a:prstGeom prst="rect">
-            <a:avLst/>
-          </a:prstGeom>
-          <a:noFill/>
-          <a:ln/>
-        </p:spPr>
-        <p:txBody>
-          <a:bodyPr wrap="square" lIns="0" tIns="0" rIns="0" bIns="0" rtlCol="0" anchor="t">
+            <a:off x="8211312" y="1892808"/>
+            <a:ext cx="2734056" cy="1536192"/>
+          </a:xfrm>
+          <a:prstGeom prst="rect">
+            <a:avLst/>
+          </a:prstGeom>
+          <a:noFill/>
+          <a:ln/>
+        </p:spPr>
+        <p:txBody>
+          <a:bodyPr wrap="square" lIns="254" tIns="254" rIns="254" bIns="254" rtlCol="0" anchor="t">
             <a:normAutofit/>
           </a:bodyPr>
           <a:lstStyle/>
@@ -12692,7 +12877,7 @@
               <a:buNone/>
             </a:pPr>
             <a:r>
-              <a:rPr lang="en-US" sz="1550" dirty="0">
+              <a:rPr lang="en-US" sz="1320" dirty="0">
                 <a:solidFill>
                   <a:srgbClr val="17364A"/>
                 </a:solidFill>
@@ -12700,9 +12885,9 @@
                 <a:ea typeface="Aptos" pitchFamily="34" charset="-122"/>
                 <a:cs typeface="Aptos" pitchFamily="34" charset="-120"/>
               </a:rPr>
-              <a:t>Use linked tools when your department needs a structured worksheet, template, checklist, review process, or documentation artifact.</a:t>
-            </a:r>
-            <a:endParaRPr lang="en-US" sz="1550" dirty="0"/>
+              <a:t>Use linked tools when your department needs a structured worksheet, template, checklist, review process, or.</a:t>
+            </a:r>
+            <a:endParaRPr lang="en-US" sz="1320" dirty="0"/>
           </a:p>
         </p:txBody>
       </p:sp>
@@ -12790,13 +12975,16 @@
           <a:ln/>
         </p:spPr>
         <p:txBody>
-          <a:bodyPr wrap="square" lIns="254" tIns="254" rIns="254" bIns="254" rtlCol="0" anchor="t">
+          <a:bodyPr wrap="square" lIns="508" tIns="508" rIns="508" bIns="508" rtlCol="0" anchor="t">
             <a:normAutofit/>
           </a:bodyPr>
           <a:lstStyle/>
           <a:p>
-            <a:r>
-              <a:rPr lang="en-US" sz="1380" dirty="0">
+            <a:pPr indent="0" marL="0">
+              <a:buNone/>
+            </a:pPr>
+            <a:r>
+              <a:rPr lang="en-US" sz="1220" dirty="0">
                 <a:solidFill>
                   <a:srgbClr val="17364A"/>
                 </a:solidFill>
@@ -12806,11 +12994,14 @@
               </a:rPr>
               <a:t>Use a tool when no comparable local process exists.</a:t>
             </a:r>
-            <a:endParaRPr lang="en-US" sz="1380" dirty="0"/>
-          </a:p>
-          <a:p>
-            <a:r>
-              <a:rPr lang="en-US" sz="1380" dirty="0">
+            <a:endParaRPr lang="en-US" sz="1220" dirty="0"/>
+          </a:p>
+          <a:p>
+            <a:pPr indent="0" marL="0">
+              <a:buNone/>
+            </a:pPr>
+            <a:r>
+              <a:rPr lang="en-US" sz="1220" dirty="0">
                 <a:solidFill>
                   <a:srgbClr val="17364A"/>
                 </a:solidFill>
@@ -12818,13 +13009,16 @@
                 <a:ea typeface="Aptos" pitchFamily="34" charset="-122"/>
                 <a:cs typeface="Aptos" pitchFamily="34" charset="-120"/>
               </a:rPr>
-              <a:t>Adapt existing department templates when they already fit the purpose.</a:t>
-            </a:r>
-            <a:endParaRPr lang="en-US" sz="1380" dirty="0"/>
-          </a:p>
-          <a:p>
-            <a:r>
-              <a:rPr lang="en-US" sz="1380" dirty="0">
+              <a:t>Adapt existing department templates when they already fit the.</a:t>
+            </a:r>
+            <a:endParaRPr lang="en-US" sz="1220" dirty="0"/>
+          </a:p>
+          <a:p>
+            <a:pPr indent="0" marL="0">
+              <a:buNone/>
+            </a:pPr>
+            <a:r>
+              <a:rPr lang="en-US" sz="1220" dirty="0">
                 <a:solidFill>
                   <a:srgbClr val="17364A"/>
                 </a:solidFill>
@@ -12834,7 +13028,7 @@
               </a:rPr>
               <a:t>Save the completed artifact as evidence of the decision.</a:t>
             </a:r>
-            <a:endParaRPr lang="en-US" sz="1380" dirty="0"/>
+            <a:endParaRPr lang="en-US" sz="1220" dirty="0"/>
           </a:p>
         </p:txBody>
       </p:sp>
@@ -13135,49 +13329,58 @@
           <a:ln/>
         </p:spPr>
         <p:txBody>
-          <a:bodyPr wrap="square" lIns="635" tIns="635" rIns="635" bIns="635" rtlCol="0" anchor="t">
+          <a:bodyPr wrap="square" lIns="1016" tIns="1016" rIns="1016" bIns="1016" rtlCol="0" anchor="t">
             <a:normAutofit/>
           </a:bodyPr>
           <a:lstStyle/>
           <a:p>
+            <a:pPr indent="0" marL="0">
+              <a:buNone/>
+            </a:pPr>
             <a:r>
               <a:rPr lang="en-US" sz="2100" dirty="0">
                 <a:solidFill>
-                  <a:srgbClr val="17364A"/>
-                </a:solidFill>
-                <a:latin typeface="Aptos" pitchFamily="34" charset="0"/>
-                <a:ea typeface="Aptos" pitchFamily="34" charset="-122"/>
-                <a:cs typeface="Aptos" pitchFamily="34" charset="-120"/>
-              </a:rPr>
-              <a:t>Explain why transparency reporting matters for public health AI.</a:t>
+                  <a:srgbClr val="003A63"/>
+                </a:solidFill>
+                <a:latin typeface="Aptos" pitchFamily="34" charset="0"/>
+                <a:ea typeface="Aptos" pitchFamily="34" charset="-122"/>
+                <a:cs typeface="Aptos" pitchFamily="34" charset="-120"/>
+              </a:rPr>
+              <a:t>• Explain why transparency reporting matters for public health AI.</a:t>
             </a:r>
             <a:endParaRPr lang="en-US" sz="2100" dirty="0"/>
           </a:p>
           <a:p>
+            <a:pPr indent="0" marL="0">
+              <a:buNone/>
+            </a:pPr>
             <a:r>
               <a:rPr lang="en-US" sz="2100" dirty="0">
                 <a:solidFill>
-                  <a:srgbClr val="17364A"/>
-                </a:solidFill>
-                <a:latin typeface="Aptos" pitchFamily="34" charset="0"/>
-                <a:ea typeface="Aptos" pitchFamily="34" charset="-122"/>
-                <a:cs typeface="Aptos" pitchFamily="34" charset="-120"/>
-              </a:rPr>
-              <a:t>Identify which AI uses should be disclosed internally, publicly, or to specific partners.</a:t>
+                  <a:srgbClr val="003A63"/>
+                </a:solidFill>
+                <a:latin typeface="Aptos" pitchFamily="34" charset="0"/>
+                <a:ea typeface="Aptos" pitchFamily="34" charset="-122"/>
+                <a:cs typeface="Aptos" pitchFamily="34" charset="-120"/>
+              </a:rPr>
+              <a:t>• Identify which AI uses should be disclosed internally, publicly, or to specific partners.</a:t>
             </a:r>
             <a:endParaRPr lang="en-US" sz="2100" dirty="0"/>
           </a:p>
           <a:p>
+            <a:pPr indent="0" marL="0">
+              <a:buNone/>
+            </a:pPr>
             <a:r>
               <a:rPr lang="en-US" sz="2100" dirty="0">
                 <a:solidFill>
-                  <a:srgbClr val="17364A"/>
-                </a:solidFill>
-                <a:latin typeface="Aptos" pitchFamily="34" charset="0"/>
-                <a:ea typeface="Aptos" pitchFamily="34" charset="-122"/>
-                <a:cs typeface="Aptos" pitchFamily="34" charset="-120"/>
-              </a:rPr>
-              <a:t>Develop contents for an AI transparency notice or AI use registry.</a:t>
+                  <a:srgbClr val="003A63"/>
+                </a:solidFill>
+                <a:latin typeface="Aptos" pitchFamily="34" charset="0"/>
+                <a:ea typeface="Aptos" pitchFamily="34" charset="-122"/>
+                <a:cs typeface="Aptos" pitchFamily="34" charset="-120"/>
+              </a:rPr>
+              <a:t>• Develop contents for an AI transparency notice or AI use registry.</a:t>
             </a:r>
             <a:endParaRPr lang="en-US" sz="2100" dirty="0"/>
           </a:p>
@@ -13257,17 +13460,17 @@
         </p:nvSpPr>
         <p:spPr>
           <a:xfrm>
-            <a:off x="7799832" y="1828800"/>
-            <a:ext cx="3145536" cy="685800"/>
-          </a:xfrm>
-          <a:prstGeom prst="rect">
-            <a:avLst/>
-          </a:prstGeom>
-          <a:noFill/>
-          <a:ln/>
-        </p:spPr>
-        <p:txBody>
-          <a:bodyPr wrap="square" lIns="0" tIns="0" rIns="0" bIns="0" rtlCol="0" anchor="t">
+            <a:off x="7799832" y="1801368"/>
+            <a:ext cx="3145536" cy="758952"/>
+          </a:xfrm>
+          <a:prstGeom prst="rect">
+            <a:avLst/>
+          </a:prstGeom>
+          <a:noFill/>
+          <a:ln/>
+        </p:spPr>
+        <p:txBody>
+          <a:bodyPr wrap="square" lIns="254" tIns="254" rIns="254" bIns="254" rtlCol="0" anchor="t">
             <a:normAutofit/>
           </a:bodyPr>
           <a:lstStyle/>
@@ -13276,7 +13479,7 @@
               <a:buNone/>
             </a:pPr>
             <a:r>
-              <a:rPr lang="en-US" sz="1550" dirty="0">
+              <a:rPr lang="en-US" sz="1320" dirty="0">
                 <a:solidFill>
                   <a:srgbClr val="17364A"/>
                 </a:solidFill>
@@ -13286,7 +13489,7 @@
               </a:rPr>
               <a:t>Explain why transparency reporting matters for public health AI.</a:t>
             </a:r>
-            <a:endParaRPr lang="en-US" sz="1550" dirty="0"/>
+            <a:endParaRPr lang="en-US" sz="1320" dirty="0"/>
           </a:p>
         </p:txBody>
       </p:sp>
@@ -13374,13 +13577,16 @@
           <a:ln/>
         </p:spPr>
         <p:txBody>
-          <a:bodyPr wrap="square" lIns="254" tIns="254" rIns="254" bIns="254" rtlCol="0" anchor="t">
+          <a:bodyPr wrap="square" lIns="508" tIns="508" rIns="508" bIns="508" rtlCol="0" anchor="t">
             <a:normAutofit/>
           </a:bodyPr>
           <a:lstStyle/>
           <a:p>
-            <a:r>
-              <a:rPr lang="en-US" sz="1380" dirty="0">
+            <a:pPr indent="0" marL="0">
+              <a:buNone/>
+            </a:pPr>
+            <a:r>
+              <a:rPr lang="en-US" sz="1220" dirty="0">
                 <a:solidFill>
                   <a:srgbClr val="17364A"/>
                 </a:solidFill>
@@ -13388,13 +13594,16 @@
                 <a:ea typeface="Aptos" pitchFamily="34" charset="-122"/>
                 <a:cs typeface="Aptos" pitchFamily="34" charset="-120"/>
               </a:rPr>
-              <a:t>Balance transparency with privacy, security, confidentiality, and operational sensitivity.</a:t>
-            </a:r>
-            <a:endParaRPr lang="en-US" sz="1380" dirty="0"/>
-          </a:p>
-          <a:p>
-            <a:r>
-              <a:rPr lang="en-US" sz="1380" dirty="0">
+              <a:t>Balance transparency with privacy, security, confidentiality, and.</a:t>
+            </a:r>
+            <a:endParaRPr lang="en-US" sz="1220" dirty="0"/>
+          </a:p>
+          <a:p>
+            <a:pPr indent="0" marL="0">
+              <a:buNone/>
+            </a:pPr>
+            <a:r>
+              <a:rPr lang="en-US" sz="1220" dirty="0">
                 <a:solidFill>
                   <a:srgbClr val="17364A"/>
                 </a:solidFill>
@@ -13404,7 +13613,7 @@
               </a:rPr>
               <a:t>Produce a draft AI transparency reporting template.</a:t>
             </a:r>
-            <a:endParaRPr lang="en-US" sz="1380" dirty="0"/>
+            <a:endParaRPr lang="en-US" sz="1220" dirty="0"/>
           </a:p>
         </p:txBody>
       </p:sp>
@@ -13482,17 +13691,17 @@
         </p:nvSpPr>
         <p:spPr>
           <a:xfrm>
-            <a:off x="7799832" y="5001768"/>
-            <a:ext cx="3145536" cy="502920"/>
-          </a:xfrm>
-          <a:prstGeom prst="rect">
-            <a:avLst/>
-          </a:prstGeom>
-          <a:noFill/>
-          <a:ln/>
-        </p:spPr>
-        <p:txBody>
-          <a:bodyPr wrap="square" lIns="0" tIns="0" rIns="0" bIns="0" rtlCol="0" anchor="t">
+            <a:off x="7799832" y="4974336"/>
+            <a:ext cx="3145536" cy="576072"/>
+          </a:xfrm>
+          <a:prstGeom prst="rect">
+            <a:avLst/>
+          </a:prstGeom>
+          <a:noFill/>
+          <a:ln/>
+        </p:spPr>
+        <p:txBody>
+          <a:bodyPr wrap="square" lIns="254" tIns="254" rIns="254" bIns="254" rtlCol="0" anchor="t">
             <a:normAutofit/>
           </a:bodyPr>
           <a:lstStyle/>
@@ -13501,7 +13710,7 @@
               <a:buNone/>
             </a:pPr>
             <a:r>
-              <a:rPr lang="en-US" sz="1550" dirty="0">
+              <a:rPr lang="en-US" sz="1320" dirty="0">
                 <a:solidFill>
                   <a:srgbClr val="17364A"/>
                 </a:solidFill>
@@ -13509,9 +13718,9 @@
                 <a:ea typeface="Aptos" pitchFamily="34" charset="-122"/>
                 <a:cs typeface="Aptos" pitchFamily="34" charset="-120"/>
               </a:rPr>
-              <a:t>Use the assignment to test whether you can explain the concept, apply it to a realistic public health situation, and identify what would need review before the work moves forward.</a:t>
-            </a:r>
-            <a:endParaRPr lang="en-US" sz="1550" dirty="0"/>
+              <a:t>Use the assignment to test whether you can explain the concept, apply it to a realistic public health situation, and.</a:t>
+            </a:r>
+            <a:endParaRPr lang="en-US" sz="1320" dirty="0"/>
           </a:p>
         </p:txBody>
       </p:sp>
@@ -13812,49 +14021,58 @@
           <a:ln/>
         </p:spPr>
         <p:txBody>
-          <a:bodyPr wrap="square" lIns="635" tIns="635" rIns="635" bIns="635" rtlCol="0" anchor="t">
+          <a:bodyPr wrap="square" lIns="1016" tIns="1016" rIns="1016" bIns="1016" rtlCol="0" anchor="t">
             <a:normAutofit/>
           </a:bodyPr>
           <a:lstStyle/>
           <a:p>
+            <a:pPr indent="0" marL="0">
+              <a:buNone/>
+            </a:pPr>
             <a:r>
               <a:rPr lang="en-US" sz="2100" dirty="0">
                 <a:solidFill>
-                  <a:srgbClr val="17364A"/>
-                </a:solidFill>
-                <a:latin typeface="Aptos" pitchFamily="34" charset="0"/>
-                <a:ea typeface="Aptos" pitchFamily="34" charset="-122"/>
-                <a:cs typeface="Aptos" pitchFamily="34" charset="-120"/>
-              </a:rPr>
-              <a:t>Public health agencies have a responsibility to explain how AI is used in ways that affect public.</a:t>
+                  <a:srgbClr val="003A63"/>
+                </a:solidFill>
+                <a:latin typeface="Aptos" pitchFamily="34" charset="0"/>
+                <a:ea typeface="Aptos" pitchFamily="34" charset="-122"/>
+                <a:cs typeface="Aptos" pitchFamily="34" charset="-120"/>
+              </a:rPr>
+              <a:t>• Public health agencies have a responsibility to explain how AI is used in ways that affect.</a:t>
             </a:r>
             <a:endParaRPr lang="en-US" sz="2100" dirty="0"/>
           </a:p>
           <a:p>
+            <a:pPr indent="0" marL="0">
+              <a:buNone/>
+            </a:pPr>
             <a:r>
               <a:rPr lang="en-US" sz="2100" dirty="0">
                 <a:solidFill>
-                  <a:srgbClr val="17364A"/>
-                </a:solidFill>
-                <a:latin typeface="Aptos" pitchFamily="34" charset="0"/>
-                <a:ea typeface="Aptos" pitchFamily="34" charset="-122"/>
-                <a:cs typeface="Aptos" pitchFamily="34" charset="-120"/>
-              </a:rPr>
-              <a:t>Transparency reporting helps agencies communicate what AI tools are in use, why they are used, what.</a:t>
+                  <a:srgbClr val="003A63"/>
+                </a:solidFill>
+                <a:latin typeface="Aptos" pitchFamily="34" charset="0"/>
+                <a:ea typeface="Aptos" pitchFamily="34" charset="-122"/>
+                <a:cs typeface="Aptos" pitchFamily="34" charset="-120"/>
+              </a:rPr>
+              <a:t>• Transparency reporting helps agencies communicate what AI tools are in use, why they are used,.</a:t>
             </a:r>
             <a:endParaRPr lang="en-US" sz="2100" dirty="0"/>
           </a:p>
           <a:p>
+            <a:pPr indent="0" marL="0">
+              <a:buNone/>
+            </a:pPr>
             <a:r>
               <a:rPr lang="en-US" sz="2100" dirty="0">
                 <a:solidFill>
-                  <a:srgbClr val="17364A"/>
-                </a:solidFill>
-                <a:latin typeface="Aptos" pitchFamily="34" charset="0"/>
-                <a:ea typeface="Aptos" pitchFamily="34" charset="-122"/>
-                <a:cs typeface="Aptos" pitchFamily="34" charset="-120"/>
-              </a:rPr>
-              <a:t>This module helps leaders design AI transparency practices that are meaningful, not performative.</a:t>
+                  <a:srgbClr val="003A63"/>
+                </a:solidFill>
+                <a:latin typeface="Aptos" pitchFamily="34" charset="0"/>
+                <a:ea typeface="Aptos" pitchFamily="34" charset="-122"/>
+                <a:cs typeface="Aptos" pitchFamily="34" charset="-120"/>
+              </a:rPr>
+              <a:t>• This module helps leaders design AI transparency practices that are meaningful, not.</a:t>
             </a:r>
             <a:endParaRPr lang="en-US" sz="2100" dirty="0"/>
           </a:p>
@@ -13934,17 +14152,17 @@
         </p:nvSpPr>
         <p:spPr>
           <a:xfrm>
-            <a:off x="7799832" y="1828800"/>
-            <a:ext cx="3145536" cy="685800"/>
-          </a:xfrm>
-          <a:prstGeom prst="rect">
-            <a:avLst/>
-          </a:prstGeom>
-          <a:noFill/>
-          <a:ln/>
-        </p:spPr>
-        <p:txBody>
-          <a:bodyPr wrap="square" lIns="0" tIns="0" rIns="0" bIns="0" rtlCol="0" anchor="t">
+            <a:off x="7799832" y="1801368"/>
+            <a:ext cx="3145536" cy="758952"/>
+          </a:xfrm>
+          <a:prstGeom prst="rect">
+            <a:avLst/>
+          </a:prstGeom>
+          <a:noFill/>
+          <a:ln/>
+        </p:spPr>
+        <p:txBody>
+          <a:bodyPr wrap="square" lIns="254" tIns="254" rIns="254" bIns="254" rtlCol="0" anchor="t">
             <a:normAutofit/>
           </a:bodyPr>
           <a:lstStyle/>
@@ -13953,7 +14171,7 @@
               <a:buNone/>
             </a:pPr>
             <a:r>
-              <a:rPr lang="en-US" sz="1550" dirty="0">
+              <a:rPr lang="en-US" sz="1320" dirty="0">
                 <a:solidFill>
                   <a:srgbClr val="17364A"/>
                 </a:solidFill>
@@ -13963,7 +14181,7 @@
               </a:rPr>
               <a:t>Public health agencies have a responsibility to explain how AI is used in ways that affect public.</a:t>
             </a:r>
-            <a:endParaRPr lang="en-US" sz="1550" dirty="0"/>
+            <a:endParaRPr lang="en-US" sz="1320" dirty="0"/>
           </a:p>
         </p:txBody>
       </p:sp>
@@ -14051,13 +14269,16 @@
           <a:ln/>
         </p:spPr>
         <p:txBody>
-          <a:bodyPr wrap="square" lIns="254" tIns="254" rIns="254" bIns="254" rtlCol="0" anchor="t">
+          <a:bodyPr wrap="square" lIns="508" tIns="508" rIns="508" bIns="508" rtlCol="0" anchor="t">
             <a:normAutofit/>
           </a:bodyPr>
           <a:lstStyle/>
           <a:p>
-            <a:r>
-              <a:rPr lang="en-US" sz="1380" dirty="0">
+            <a:pPr indent="0" marL="0">
+              <a:buNone/>
+            </a:pPr>
+            <a:r>
+              <a:rPr lang="en-US" sz="1220" dirty="0">
                 <a:solidFill>
                   <a:srgbClr val="17364A"/>
                 </a:solidFill>
@@ -14065,13 +14286,16 @@
                 <a:ea typeface="Aptos" pitchFamily="34" charset="-122"/>
                 <a:cs typeface="Aptos" pitchFamily="34" charset="-120"/>
               </a:rPr>
-              <a:t>Public health agencies have a responsibility to explain how AI is used in ways that affect.</a:t>
-            </a:r>
-            <a:endParaRPr lang="en-US" sz="1380" dirty="0"/>
-          </a:p>
-          <a:p>
-            <a:r>
-              <a:rPr lang="en-US" sz="1380" dirty="0">
+              <a:t>Public health agencies have a responsibility to explain how AI is.</a:t>
+            </a:r>
+            <a:endParaRPr lang="en-US" sz="1220" dirty="0"/>
+          </a:p>
+          <a:p>
+            <a:pPr indent="0" marL="0">
+              <a:buNone/>
+            </a:pPr>
+            <a:r>
+              <a:rPr lang="en-US" sz="1220" dirty="0">
                 <a:solidFill>
                   <a:srgbClr val="17364A"/>
                 </a:solidFill>
@@ -14079,13 +14303,16 @@
                 <a:ea typeface="Aptos" pitchFamily="34" charset="-122"/>
                 <a:cs typeface="Aptos" pitchFamily="34" charset="-120"/>
               </a:rPr>
-              <a:t>Transparency reporting helps agencies communicate what AI tools are in use, why they are.</a:t>
-            </a:r>
-            <a:endParaRPr lang="en-US" sz="1380" dirty="0"/>
-          </a:p>
-          <a:p>
-            <a:r>
-              <a:rPr lang="en-US" sz="1380" dirty="0">
+              <a:t>Transparency reporting helps agencies communicate what AI tools.</a:t>
+            </a:r>
+            <a:endParaRPr lang="en-US" sz="1220" dirty="0"/>
+          </a:p>
+          <a:p>
+            <a:pPr indent="0" marL="0">
+              <a:buNone/>
+            </a:pPr>
+            <a:r>
+              <a:rPr lang="en-US" sz="1220" dirty="0">
                 <a:solidFill>
                   <a:srgbClr val="17364A"/>
                 </a:solidFill>
@@ -14093,9 +14320,9 @@
                 <a:ea typeface="Aptos" pitchFamily="34" charset="-122"/>
                 <a:cs typeface="Aptos" pitchFamily="34" charset="-120"/>
               </a:rPr>
-              <a:t>Transparency should be understandable, accessible, and proportionate to risk.</a:t>
-            </a:r>
-            <a:endParaRPr lang="en-US" sz="1380" dirty="0"/>
+              <a:t>Transparency should be understandable, accessible, and.</a:t>
+            </a:r>
+            <a:endParaRPr lang="en-US" sz="1220" dirty="0"/>
           </a:p>
         </p:txBody>
       </p:sp>
@@ -14173,17 +14400,17 @@
         </p:nvSpPr>
         <p:spPr>
           <a:xfrm>
-            <a:off x="7799832" y="5001768"/>
-            <a:ext cx="3145536" cy="502920"/>
-          </a:xfrm>
-          <a:prstGeom prst="rect">
-            <a:avLst/>
-          </a:prstGeom>
-          <a:noFill/>
-          <a:ln/>
-        </p:spPr>
-        <p:txBody>
-          <a:bodyPr wrap="square" lIns="0" tIns="0" rIns="0" bIns="0" rtlCol="0" anchor="t">
+            <a:off x="7799832" y="4974336"/>
+            <a:ext cx="3145536" cy="576072"/>
+          </a:xfrm>
+          <a:prstGeom prst="rect">
+            <a:avLst/>
+          </a:prstGeom>
+          <a:noFill/>
+          <a:ln/>
+        </p:spPr>
+        <p:txBody>
+          <a:bodyPr wrap="square" lIns="254" tIns="254" rIns="254" bIns="254" rtlCol="0" anchor="t">
             <a:normAutofit/>
           </a:bodyPr>
           <a:lstStyle/>
@@ -14192,7 +14419,7 @@
               <a:buNone/>
             </a:pPr>
             <a:r>
-              <a:rPr lang="en-US" sz="1550" dirty="0">
+              <a:rPr lang="en-US" sz="1320" dirty="0">
                 <a:solidFill>
                   <a:srgbClr val="17364A"/>
                 </a:solidFill>
@@ -14200,9 +14427,9 @@
                 <a:ea typeface="Aptos" pitchFamily="34" charset="-122"/>
                 <a:cs typeface="Aptos" pitchFamily="34" charset="-120"/>
               </a:rPr>
-              <a:t>Connect the concept to public health purpose, responsible use, required safeguards, documentation, and the next action a department should take.</a:t>
-            </a:r>
-            <a:endParaRPr lang="en-US" sz="1550" dirty="0"/>
+              <a:t>Connect the concept to public health purpose, responsible use, required safeguards, documentation, and the next action a.</a:t>
+            </a:r>
+            <a:endParaRPr lang="en-US" sz="1320" dirty="0"/>
           </a:p>
         </p:txBody>
       </p:sp>
@@ -14503,49 +14730,58 @@
           <a:ln/>
         </p:spPr>
         <p:txBody>
-          <a:bodyPr wrap="square" lIns="635" tIns="635" rIns="635" bIns="635" rtlCol="0" anchor="t">
+          <a:bodyPr wrap="square" lIns="1016" tIns="1016" rIns="1016" bIns="1016" rtlCol="0" anchor="t">
             <a:normAutofit/>
           </a:bodyPr>
           <a:lstStyle/>
           <a:p>
+            <a:pPr indent="0" marL="0">
+              <a:buNone/>
+            </a:pPr>
             <a:r>
               <a:rPr lang="en-US" sz="2100" dirty="0">
                 <a:solidFill>
-                  <a:srgbClr val="17364A"/>
-                </a:solidFill>
-                <a:latin typeface="Aptos" pitchFamily="34" charset="0"/>
-                <a:ea typeface="Aptos" pitchFamily="34" charset="-122"/>
-                <a:cs typeface="Aptos" pitchFamily="34" charset="-120"/>
-              </a:rPr>
-              <a:t>This module provides national-level training guidance for public health agencies and partners.</a:t>
+                  <a:srgbClr val="003A63"/>
+                </a:solidFill>
+                <a:latin typeface="Aptos" pitchFamily="34" charset="0"/>
+                <a:ea typeface="Aptos" pitchFamily="34" charset="-122"/>
+                <a:cs typeface="Aptos" pitchFamily="34" charset="-120"/>
+              </a:rPr>
+              <a:t>• This module provides national-level training guidance for public health agencies and partners.</a:t>
             </a:r>
             <a:endParaRPr lang="en-US" sz="2100" dirty="0"/>
           </a:p>
           <a:p>
+            <a:pPr indent="0" marL="0">
+              <a:buNone/>
+            </a:pPr>
             <a:r>
               <a:rPr lang="en-US" sz="2100" dirty="0">
                 <a:solidFill>
-                  <a:srgbClr val="17364A"/>
-                </a:solidFill>
-                <a:latin typeface="Aptos" pitchFamily="34" charset="0"/>
-                <a:ea typeface="Aptos" pitchFamily="34" charset="-122"/>
-                <a:cs typeface="Aptos" pitchFamily="34" charset="-120"/>
-              </a:rPr>
-              <a:t>It is not legal advice and does not replace review by agency legal counsel, privacy officers,.</a:t>
+                  <a:srgbClr val="003A63"/>
+                </a:solidFill>
+                <a:latin typeface="Aptos" pitchFamily="34" charset="0"/>
+                <a:ea typeface="Aptos" pitchFamily="34" charset="-122"/>
+                <a:cs typeface="Aptos" pitchFamily="34" charset="-120"/>
+              </a:rPr>
+              <a:t>• It is not legal advice and does not replace review by agency legal counsel, privacy officers,.</a:t>
             </a:r>
             <a:endParaRPr lang="en-US" sz="2100" dirty="0"/>
           </a:p>
           <a:p>
+            <a:pPr indent="0" marL="0">
+              <a:buNone/>
+            </a:pPr>
             <a:r>
               <a:rPr lang="en-US" sz="2100" dirty="0">
                 <a:solidFill>
-                  <a:srgbClr val="17364A"/>
-                </a:solidFill>
-                <a:latin typeface="Aptos" pitchFamily="34" charset="0"/>
-                <a:ea typeface="Aptos" pitchFamily="34" charset="-122"/>
-                <a:cs typeface="Aptos" pitchFamily="34" charset="-120"/>
-              </a:rPr>
-              <a:t>Requirements may vary by state, locality, territory, Tribe, agency, funding source, data-sharing.</a:t>
+                  <a:srgbClr val="003A63"/>
+                </a:solidFill>
+                <a:latin typeface="Aptos" pitchFamily="34" charset="0"/>
+                <a:ea typeface="Aptos" pitchFamily="34" charset="-122"/>
+                <a:cs typeface="Aptos" pitchFamily="34" charset="-120"/>
+              </a:rPr>
+              <a:t>• Requirements may vary by state, locality, territory, Tribe, agency, funding source,.</a:t>
             </a:r>
             <a:endParaRPr lang="en-US" sz="2100" dirty="0"/>
           </a:p>
@@ -14625,17 +14861,17 @@
         </p:nvSpPr>
         <p:spPr>
           <a:xfrm>
-            <a:off x="7799832" y="1828800"/>
-            <a:ext cx="3145536" cy="685800"/>
-          </a:xfrm>
-          <a:prstGeom prst="rect">
-            <a:avLst/>
-          </a:prstGeom>
-          <a:noFill/>
-          <a:ln/>
-        </p:spPr>
-        <p:txBody>
-          <a:bodyPr wrap="square" lIns="0" tIns="0" rIns="0" bIns="0" rtlCol="0" anchor="t">
+            <a:off x="7799832" y="1801368"/>
+            <a:ext cx="3145536" cy="758952"/>
+          </a:xfrm>
+          <a:prstGeom prst="rect">
+            <a:avLst/>
+          </a:prstGeom>
+          <a:noFill/>
+          <a:ln/>
+        </p:spPr>
+        <p:txBody>
+          <a:bodyPr wrap="square" lIns="254" tIns="254" rIns="254" bIns="254" rtlCol="0" anchor="t">
             <a:normAutofit/>
           </a:bodyPr>
           <a:lstStyle/>
@@ -14644,7 +14880,7 @@
               <a:buNone/>
             </a:pPr>
             <a:r>
-              <a:rPr lang="en-US" sz="1550" dirty="0">
+              <a:rPr lang="en-US" sz="1320" dirty="0">
                 <a:solidFill>
                   <a:srgbClr val="17364A"/>
                 </a:solidFill>
@@ -14654,7 +14890,7 @@
               </a:rPr>
               <a:t>This module provides national-level training guidance for public health agencies and partners.</a:t>
             </a:r>
-            <a:endParaRPr lang="en-US" sz="1550" dirty="0"/>
+            <a:endParaRPr lang="en-US" sz="1320" dirty="0"/>
           </a:p>
         </p:txBody>
       </p:sp>
@@ -14742,13 +14978,16 @@
           <a:ln/>
         </p:spPr>
         <p:txBody>
-          <a:bodyPr wrap="square" lIns="254" tIns="254" rIns="254" bIns="254" rtlCol="0" anchor="t">
+          <a:bodyPr wrap="square" lIns="508" tIns="508" rIns="508" bIns="508" rtlCol="0" anchor="t">
             <a:normAutofit/>
           </a:bodyPr>
           <a:lstStyle/>
           <a:p>
-            <a:r>
-              <a:rPr lang="en-US" sz="1380" dirty="0">
+            <a:pPr indent="0" marL="0">
+              <a:buNone/>
+            </a:pPr>
+            <a:r>
+              <a:rPr lang="en-US" sz="1220" dirty="0">
                 <a:solidFill>
                   <a:srgbClr val="17364A"/>
                 </a:solidFill>
@@ -14756,13 +14995,16 @@
                 <a:ea typeface="Aptos" pitchFamily="34" charset="-122"/>
                 <a:cs typeface="Aptos" pitchFamily="34" charset="-120"/>
               </a:rPr>
-              <a:t>It is not legal advice and does not replace review by agency legal counsel, privacy.</a:t>
-            </a:r>
-            <a:endParaRPr lang="en-US" sz="1380" dirty="0"/>
-          </a:p>
-          <a:p>
-            <a:r>
-              <a:rPr lang="en-US" sz="1380" dirty="0">
+              <a:t>It is not legal advice and does not replace review by agency legal.</a:t>
+            </a:r>
+            <a:endParaRPr lang="en-US" sz="1220" dirty="0"/>
+          </a:p>
+          <a:p>
+            <a:pPr indent="0" marL="0">
+              <a:buNone/>
+            </a:pPr>
+            <a:r>
+              <a:rPr lang="en-US" sz="1220" dirty="0">
                 <a:solidFill>
                   <a:srgbClr val="17364A"/>
                 </a:solidFill>
@@ -14770,13 +15012,16 @@
                 <a:ea typeface="Aptos" pitchFamily="34" charset="-122"/>
                 <a:cs typeface="Aptos" pitchFamily="34" charset="-120"/>
               </a:rPr>
-              <a:t>Requirements may vary by state, locality, territory, Tribe, agency, funding source,.</a:t>
-            </a:r>
-            <a:endParaRPr lang="en-US" sz="1380" dirty="0"/>
-          </a:p>
-          <a:p>
-            <a:r>
-              <a:rPr lang="en-US" sz="1380" dirty="0">
+              <a:t>Requirements may vary by state, locality, territory, Tribe,.</a:t>
+            </a:r>
+            <a:endParaRPr lang="en-US" sz="1220" dirty="0"/>
+          </a:p>
+          <a:p>
+            <a:pPr indent="0" marL="0">
+              <a:buNone/>
+            </a:pPr>
+            <a:r>
+              <a:rPr lang="en-US" sz="1220" dirty="0">
                 <a:solidFill>
                   <a:srgbClr val="17364A"/>
                 </a:solidFill>
@@ -14784,9 +15029,9 @@
                 <a:ea typeface="Aptos" pitchFamily="34" charset="-122"/>
                 <a:cs typeface="Aptos" pitchFamily="34" charset="-120"/>
               </a:rPr>
-              <a:t>Learners should use this module to identify the issues that require review and should.</a:t>
-            </a:r>
-            <a:endParaRPr lang="en-US" sz="1380" dirty="0"/>
+              <a:t>Learners should use this module to identify the issues that.</a:t>
+            </a:r>
+            <a:endParaRPr lang="en-US" sz="1220" dirty="0"/>
           </a:p>
         </p:txBody>
       </p:sp>
@@ -14864,17 +15109,17 @@
         </p:nvSpPr>
         <p:spPr>
           <a:xfrm>
-            <a:off x="7799832" y="5001768"/>
-            <a:ext cx="3145536" cy="502920"/>
-          </a:xfrm>
-          <a:prstGeom prst="rect">
-            <a:avLst/>
-          </a:prstGeom>
-          <a:noFill/>
-          <a:ln/>
-        </p:spPr>
-        <p:txBody>
-          <a:bodyPr wrap="square" lIns="0" tIns="0" rIns="0" bIns="0" rtlCol="0" anchor="t">
+            <a:off x="7799832" y="4974336"/>
+            <a:ext cx="3145536" cy="576072"/>
+          </a:xfrm>
+          <a:prstGeom prst="rect">
+            <a:avLst/>
+          </a:prstGeom>
+          <a:noFill/>
+          <a:ln/>
+        </p:spPr>
+        <p:txBody>
+          <a:bodyPr wrap="square" lIns="254" tIns="254" rIns="254" bIns="254" rtlCol="0" anchor="t">
             <a:normAutofit/>
           </a:bodyPr>
           <a:lstStyle/>
@@ -14883,7 +15128,7 @@
               <a:buNone/>
             </a:pPr>
             <a:r>
-              <a:rPr lang="en-US" sz="1550" dirty="0">
+              <a:rPr lang="en-US" sz="1320" dirty="0">
                 <a:solidFill>
                   <a:srgbClr val="17364A"/>
                 </a:solidFill>
@@ -14891,9 +15136,9 @@
                 <a:ea typeface="Aptos" pitchFamily="34" charset="-122"/>
                 <a:cs typeface="Aptos" pitchFamily="34" charset="-120"/>
               </a:rPr>
-              <a:t>Translate this concept into clear decision rights, review steps, documentation expectations, and escalation paths before an AI-supported workflow is approved.</a:t>
-            </a:r>
-            <a:endParaRPr lang="en-US" sz="1550" dirty="0"/>
+              <a:t>Translate this concept into clear decision rights, review steps, documentation expectations, and escalation paths before.</a:t>
+            </a:r>
+            <a:endParaRPr lang="en-US" sz="1320" dirty="0"/>
           </a:p>
         </p:txBody>
       </p:sp>
@@ -15194,49 +15439,58 @@
           <a:ln/>
         </p:spPr>
         <p:txBody>
-          <a:bodyPr wrap="square" lIns="635" tIns="635" rIns="635" bIns="635" rtlCol="0" anchor="t">
+          <a:bodyPr wrap="square" lIns="1016" tIns="1016" rIns="1016" bIns="1016" rtlCol="0" anchor="t">
             <a:normAutofit/>
           </a:bodyPr>
           <a:lstStyle/>
           <a:p>
+            <a:pPr indent="0" marL="0">
+              <a:buNone/>
+            </a:pPr>
             <a:r>
               <a:rPr lang="en-US" sz="2100" dirty="0">
                 <a:solidFill>
-                  <a:srgbClr val="17364A"/>
-                </a:solidFill>
-                <a:latin typeface="Aptos" pitchFamily="34" charset="0"/>
-                <a:ea typeface="Aptos" pitchFamily="34" charset="-122"/>
-                <a:cs typeface="Aptos" pitchFamily="34" charset="-120"/>
-              </a:rPr>
-              <a:t>Public health depends on trust.</a:t>
+                  <a:srgbClr val="003A63"/>
+                </a:solidFill>
+                <a:latin typeface="Aptos" pitchFamily="34" charset="0"/>
+                <a:ea typeface="Aptos" pitchFamily="34" charset="-122"/>
+                <a:cs typeface="Aptos" pitchFamily="34" charset="-120"/>
+              </a:rPr>
+              <a:t>• Public health depends on trust.</a:t>
             </a:r>
             <a:endParaRPr lang="en-US" sz="2100" dirty="0"/>
           </a:p>
           <a:p>
+            <a:pPr indent="0" marL="0">
+              <a:buNone/>
+            </a:pPr>
             <a:r>
               <a:rPr lang="en-US" sz="2100" dirty="0">
                 <a:solidFill>
-                  <a:srgbClr val="17364A"/>
-                </a:solidFill>
-                <a:latin typeface="Aptos" pitchFamily="34" charset="0"/>
-                <a:ea typeface="Aptos" pitchFamily="34" charset="-122"/>
-                <a:cs typeface="Aptos" pitchFamily="34" charset="-120"/>
-              </a:rPr>
-              <a:t>If communities discover that AI is being used in surveillance, communication, service routing, or.</a:t>
+                  <a:srgbClr val="003A63"/>
+                </a:solidFill>
+                <a:latin typeface="Aptos" pitchFamily="34" charset="0"/>
+                <a:ea typeface="Aptos" pitchFamily="34" charset="-122"/>
+                <a:cs typeface="Aptos" pitchFamily="34" charset="-120"/>
+              </a:rPr>
+              <a:t>• If communities discover that AI is being used in surveillance, communication, service routing,.</a:t>
             </a:r>
             <a:endParaRPr lang="en-US" sz="2100" dirty="0"/>
           </a:p>
           <a:p>
+            <a:pPr indent="0" marL="0">
+              <a:buNone/>
+            </a:pPr>
             <a:r>
               <a:rPr lang="en-US" sz="2100" dirty="0">
                 <a:solidFill>
-                  <a:srgbClr val="17364A"/>
-                </a:solidFill>
-                <a:latin typeface="Aptos" pitchFamily="34" charset="0"/>
-                <a:ea typeface="Aptos" pitchFamily="34" charset="-122"/>
-                <a:cs typeface="Aptos" pitchFamily="34" charset="-120"/>
-              </a:rPr>
-              <a:t>Transparency does not require agencies to disclose every technical detail, but it does require clear.</a:t>
+                  <a:srgbClr val="003A63"/>
+                </a:solidFill>
+                <a:latin typeface="Aptos" pitchFamily="34" charset="0"/>
+                <a:ea typeface="Aptos" pitchFamily="34" charset="-122"/>
+                <a:cs typeface="Aptos" pitchFamily="34" charset="-120"/>
+              </a:rPr>
+              <a:t>• Transparency does not require agencies to disclose every technical detail, but it does require.</a:t>
             </a:r>
             <a:endParaRPr lang="en-US" sz="2100" dirty="0"/>
           </a:p>
@@ -15316,17 +15570,17 @@
         </p:nvSpPr>
         <p:spPr>
           <a:xfrm>
-            <a:off x="7799832" y="1828800"/>
-            <a:ext cx="3145536" cy="685800"/>
-          </a:xfrm>
-          <a:prstGeom prst="rect">
-            <a:avLst/>
-          </a:prstGeom>
-          <a:noFill/>
-          <a:ln/>
-        </p:spPr>
-        <p:txBody>
-          <a:bodyPr wrap="square" lIns="0" tIns="0" rIns="0" bIns="0" rtlCol="0" anchor="t">
+            <a:off x="7799832" y="1801368"/>
+            <a:ext cx="3145536" cy="758952"/>
+          </a:xfrm>
+          <a:prstGeom prst="rect">
+            <a:avLst/>
+          </a:prstGeom>
+          <a:noFill/>
+          <a:ln/>
+        </p:spPr>
+        <p:txBody>
+          <a:bodyPr wrap="square" lIns="254" tIns="254" rIns="254" bIns="254" rtlCol="0" anchor="t">
             <a:normAutofit/>
           </a:bodyPr>
           <a:lstStyle/>
@@ -15335,7 +15589,7 @@
               <a:buNone/>
             </a:pPr>
             <a:r>
-              <a:rPr lang="en-US" sz="1550" dirty="0">
+              <a:rPr lang="en-US" sz="1320" dirty="0">
                 <a:solidFill>
                   <a:srgbClr val="17364A"/>
                 </a:solidFill>
@@ -15345,7 +15599,7 @@
               </a:rPr>
               <a:t>Public health depends on trust.</a:t>
             </a:r>
-            <a:endParaRPr lang="en-US" sz="1550" dirty="0"/>
+            <a:endParaRPr lang="en-US" sz="1320" dirty="0"/>
           </a:p>
         </p:txBody>
       </p:sp>
@@ -15433,13 +15687,16 @@
           <a:ln/>
         </p:spPr>
         <p:txBody>
-          <a:bodyPr wrap="square" lIns="254" tIns="254" rIns="254" bIns="254" rtlCol="0" anchor="t">
+          <a:bodyPr wrap="square" lIns="508" tIns="508" rIns="508" bIns="508" rtlCol="0" anchor="t">
             <a:normAutofit/>
           </a:bodyPr>
           <a:lstStyle/>
           <a:p>
-            <a:r>
-              <a:rPr lang="en-US" sz="1380" dirty="0">
+            <a:pPr indent="0" marL="0">
+              <a:buNone/>
+            </a:pPr>
+            <a:r>
+              <a:rPr lang="en-US" sz="1220" dirty="0">
                 <a:solidFill>
                   <a:srgbClr val="17364A"/>
                 </a:solidFill>
@@ -15447,13 +15704,16 @@
                 <a:ea typeface="Aptos" pitchFamily="34" charset="-122"/>
                 <a:cs typeface="Aptos" pitchFamily="34" charset="-120"/>
               </a:rPr>
-              <a:t>If communities discover that AI is being used in surveillance, communication, service.</a:t>
-            </a:r>
-            <a:endParaRPr lang="en-US" sz="1380" dirty="0"/>
-          </a:p>
-          <a:p>
-            <a:r>
-              <a:rPr lang="en-US" sz="1380" dirty="0">
+              <a:t>If communities discover that AI is being used in surveillance,.</a:t>
+            </a:r>
+            <a:endParaRPr lang="en-US" sz="1220" dirty="0"/>
+          </a:p>
+          <a:p>
+            <a:pPr indent="0" marL="0">
+              <a:buNone/>
+            </a:pPr>
+            <a:r>
+              <a:rPr lang="en-US" sz="1220" dirty="0">
                 <a:solidFill>
                   <a:srgbClr val="17364A"/>
                 </a:solidFill>
@@ -15461,13 +15721,16 @@
                 <a:ea typeface="Aptos" pitchFamily="34" charset="-122"/>
                 <a:cs typeface="Aptos" pitchFamily="34" charset="-120"/>
               </a:rPr>
-              <a:t>Transparency does not require agencies to disclose every technical detail, but it does.</a:t>
-            </a:r>
-            <a:endParaRPr lang="en-US" sz="1380" dirty="0"/>
-          </a:p>
-          <a:p>
-            <a:r>
-              <a:rPr lang="en-US" sz="1380" dirty="0">
+              <a:t>Transparency does not require agencies to disclose every technical.</a:t>
+            </a:r>
+            <a:endParaRPr lang="en-US" sz="1220" dirty="0"/>
+          </a:p>
+          <a:p>
+            <a:pPr indent="0" marL="0">
+              <a:buNone/>
+            </a:pPr>
+            <a:r>
+              <a:rPr lang="en-US" sz="1220" dirty="0">
                 <a:solidFill>
                   <a:srgbClr val="17364A"/>
                 </a:solidFill>
@@ -15477,7 +15740,7 @@
               </a:rPr>
               <a:t>Transparency also improves internal accountability.</a:t>
             </a:r>
-            <a:endParaRPr lang="en-US" sz="1380" dirty="0"/>
+            <a:endParaRPr lang="en-US" sz="1220" dirty="0"/>
           </a:p>
         </p:txBody>
       </p:sp>
@@ -15555,17 +15818,17 @@
         </p:nvSpPr>
         <p:spPr>
           <a:xfrm>
-            <a:off x="7799832" y="5001768"/>
-            <a:ext cx="3145536" cy="502920"/>
-          </a:xfrm>
-          <a:prstGeom prst="rect">
-            <a:avLst/>
-          </a:prstGeom>
-          <a:noFill/>
-          <a:ln/>
-        </p:spPr>
-        <p:txBody>
-          <a:bodyPr wrap="square" lIns="0" tIns="0" rIns="0" bIns="0" rtlCol="0" anchor="t">
+            <a:off x="7799832" y="4974336"/>
+            <a:ext cx="3145536" cy="576072"/>
+          </a:xfrm>
+          <a:prstGeom prst="rect">
+            <a:avLst/>
+          </a:prstGeom>
+          <a:noFill/>
+          <a:ln/>
+        </p:spPr>
+        <p:txBody>
+          <a:bodyPr wrap="square" lIns="254" tIns="254" rIns="254" bIns="254" rtlCol="0" anchor="t">
             <a:normAutofit/>
           </a:bodyPr>
           <a:lstStyle/>
@@ -15574,7 +15837,7 @@
               <a:buNone/>
             </a:pPr>
             <a:r>
-              <a:rPr lang="en-US" sz="1550" dirty="0">
+              <a:rPr lang="en-US" sz="1320" dirty="0">
                 <a:solidFill>
                   <a:srgbClr val="17364A"/>
                 </a:solidFill>
@@ -15582,9 +15845,9 @@
                 <a:ea typeface="Aptos" pitchFamily="34" charset="-122"/>
                 <a:cs typeface="Aptos" pitchFamily="34" charset="-120"/>
               </a:rPr>
-              <a:t>Connect the concept to public health purpose, responsible use, required safeguards, documentation, and the next action a department should take.</a:t>
-            </a:r>
-            <a:endParaRPr lang="en-US" sz="1550" dirty="0"/>
+              <a:t>Connect the concept to public health purpose, responsible use, required safeguards, documentation, and the next action a.</a:t>
+            </a:r>
+            <a:endParaRPr lang="en-US" sz="1320" dirty="0"/>
           </a:p>
         </p:txBody>
       </p:sp>
@@ -15885,49 +16148,58 @@
           <a:ln/>
         </p:spPr>
         <p:txBody>
-          <a:bodyPr wrap="square" lIns="635" tIns="635" rIns="635" bIns="635" rtlCol="0" anchor="t">
+          <a:bodyPr wrap="square" lIns="1016" tIns="1016" rIns="1016" bIns="1016" rtlCol="0" anchor="t">
             <a:normAutofit/>
           </a:bodyPr>
           <a:lstStyle/>
           <a:p>
+            <a:pPr indent="0" marL="0">
+              <a:buNone/>
+            </a:pPr>
             <a:r>
               <a:rPr lang="en-US" sz="2100" dirty="0">
                 <a:solidFill>
-                  <a:srgbClr val="17364A"/>
-                </a:solidFill>
-                <a:latin typeface="Aptos" pitchFamily="34" charset="0"/>
-                <a:ea typeface="Aptos" pitchFamily="34" charset="-122"/>
-                <a:cs typeface="Aptos" pitchFamily="34" charset="-120"/>
-              </a:rPr>
-              <a:t>A health department uses AI to draft public health messages, summarize internal reports, and prioritize.</a:t>
+                  <a:srgbClr val="003A63"/>
+                </a:solidFill>
+                <a:latin typeface="Aptos" pitchFamily="34" charset="0"/>
+                <a:ea typeface="Aptos" pitchFamily="34" charset="-122"/>
+                <a:cs typeface="Aptos" pitchFamily="34" charset="-120"/>
+              </a:rPr>
+              <a:t>• A health department uses AI to draft public health messages, summarize internal reports, and.</a:t>
             </a:r>
             <a:endParaRPr lang="en-US" sz="2100" dirty="0"/>
           </a:p>
           <a:p>
+            <a:pPr indent="0" marL="0">
+              <a:buNone/>
+            </a:pPr>
             <a:r>
               <a:rPr lang="en-US" sz="2100" dirty="0">
                 <a:solidFill>
-                  <a:srgbClr val="17364A"/>
-                </a:solidFill>
-                <a:latin typeface="Aptos" pitchFamily="34" charset="0"/>
-                <a:ea typeface="Aptos" pitchFamily="34" charset="-122"/>
-                <a:cs typeface="Aptos" pitchFamily="34" charset="-120"/>
-              </a:rPr>
-              <a:t>Some uses may not require broad public disclosure, while others may affect public services and should.</a:t>
+                  <a:srgbClr val="003A63"/>
+                </a:solidFill>
+                <a:latin typeface="Aptos" pitchFamily="34" charset="0"/>
+                <a:ea typeface="Aptos" pitchFamily="34" charset="-122"/>
+                <a:cs typeface="Aptos" pitchFamily="34" charset="-120"/>
+              </a:rPr>
+              <a:t>• Some uses may not require broad public disclosure, while others may affect public services and.</a:t>
             </a:r>
             <a:endParaRPr lang="en-US" sz="2100" dirty="0"/>
           </a:p>
           <a:p>
+            <a:pPr indent="0" marL="0">
+              <a:buNone/>
+            </a:pPr>
             <a:r>
               <a:rPr lang="en-US" sz="2100" dirty="0">
                 <a:solidFill>
-                  <a:srgbClr val="17364A"/>
-                </a:solidFill>
-                <a:latin typeface="Aptos" pitchFamily="34" charset="0"/>
-                <a:ea typeface="Aptos" pitchFamily="34" charset="-122"/>
-                <a:cs typeface="Aptos" pitchFamily="34" charset="-120"/>
-              </a:rPr>
-              <a:t>The registry does not need to reveal sensitive security details, but it should identify the purpose,.</a:t>
+                  <a:srgbClr val="003A63"/>
+                </a:solidFill>
+                <a:latin typeface="Aptos" pitchFamily="34" charset="0"/>
+                <a:ea typeface="Aptos" pitchFamily="34" charset="-122"/>
+                <a:cs typeface="Aptos" pitchFamily="34" charset="-120"/>
+              </a:rPr>
+              <a:t>• The registry does not need to reveal sensitive security details, but it should identify the.</a:t>
             </a:r>
             <a:endParaRPr lang="en-US" sz="2100" dirty="0"/>
           </a:p>
@@ -16007,17 +16279,17 @@
         </p:nvSpPr>
         <p:spPr>
           <a:xfrm>
-            <a:off x="7799832" y="1828800"/>
-            <a:ext cx="3145536" cy="685800"/>
-          </a:xfrm>
-          <a:prstGeom prst="rect">
-            <a:avLst/>
-          </a:prstGeom>
-          <a:noFill/>
-          <a:ln/>
-        </p:spPr>
-        <p:txBody>
-          <a:bodyPr wrap="square" lIns="0" tIns="0" rIns="0" bIns="0" rtlCol="0" anchor="t">
+            <a:off x="7799832" y="1801368"/>
+            <a:ext cx="3145536" cy="758952"/>
+          </a:xfrm>
+          <a:prstGeom prst="rect">
+            <a:avLst/>
+          </a:prstGeom>
+          <a:noFill/>
+          <a:ln/>
+        </p:spPr>
+        <p:txBody>
+          <a:bodyPr wrap="square" lIns="254" tIns="254" rIns="254" bIns="254" rtlCol="0" anchor="t">
             <a:normAutofit/>
           </a:bodyPr>
           <a:lstStyle/>
@@ -16026,7 +16298,7 @@
               <a:buNone/>
             </a:pPr>
             <a:r>
-              <a:rPr lang="en-US" sz="1550" dirty="0">
+              <a:rPr lang="en-US" sz="1320" dirty="0">
                 <a:solidFill>
                   <a:srgbClr val="17364A"/>
                 </a:solidFill>
@@ -16036,7 +16308,7 @@
               </a:rPr>
               <a:t>A health department uses AI to draft public health messages, summarize internal reports, and prioritize.</a:t>
             </a:r>
-            <a:endParaRPr lang="en-US" sz="1550" dirty="0"/>
+            <a:endParaRPr lang="en-US" sz="1320" dirty="0"/>
           </a:p>
         </p:txBody>
       </p:sp>
@@ -16124,13 +16396,16 @@
           <a:ln/>
         </p:spPr>
         <p:txBody>
-          <a:bodyPr wrap="square" lIns="254" tIns="254" rIns="254" bIns="254" rtlCol="0" anchor="t">
+          <a:bodyPr wrap="square" lIns="508" tIns="508" rIns="508" bIns="508" rtlCol="0" anchor="t">
             <a:normAutofit/>
           </a:bodyPr>
           <a:lstStyle/>
           <a:p>
-            <a:r>
-              <a:rPr lang="en-US" sz="1380" dirty="0">
+            <a:pPr indent="0" marL="0">
+              <a:buNone/>
+            </a:pPr>
+            <a:r>
+              <a:rPr lang="en-US" sz="1220" dirty="0">
                 <a:solidFill>
                   <a:srgbClr val="17364A"/>
                 </a:solidFill>
@@ -16138,13 +16413,16 @@
                 <a:ea typeface="Aptos" pitchFamily="34" charset="-122"/>
                 <a:cs typeface="Aptos" pitchFamily="34" charset="-120"/>
               </a:rPr>
-              <a:t>A health department uses AI to draft public health messages, summarize internal reports,.</a:t>
-            </a:r>
-            <a:endParaRPr lang="en-US" sz="1380" dirty="0"/>
-          </a:p>
-          <a:p>
-            <a:r>
-              <a:rPr lang="en-US" sz="1380" dirty="0">
+              <a:t>A health department uses AI to draft public health messages,.</a:t>
+            </a:r>
+            <a:endParaRPr lang="en-US" sz="1220" dirty="0"/>
+          </a:p>
+          <a:p>
+            <a:pPr indent="0" marL="0">
+              <a:buNone/>
+            </a:pPr>
+            <a:r>
+              <a:rPr lang="en-US" sz="1220" dirty="0">
                 <a:solidFill>
                   <a:srgbClr val="17364A"/>
                 </a:solidFill>
@@ -16152,13 +16430,16 @@
                 <a:ea typeface="Aptos" pitchFamily="34" charset="-122"/>
                 <a:cs typeface="Aptos" pitchFamily="34" charset="-120"/>
               </a:rPr>
-              <a:t>Some uses may not require broad public disclosure, while others may affect public services.</a:t>
-            </a:r>
-            <a:endParaRPr lang="en-US" sz="1380" dirty="0"/>
-          </a:p>
-          <a:p>
-            <a:r>
-              <a:rPr lang="en-US" sz="1380" dirty="0">
+              <a:t>Some uses may not require broad public disclosure, while others.</a:t>
+            </a:r>
+            <a:endParaRPr lang="en-US" sz="1220" dirty="0"/>
+          </a:p>
+          <a:p>
+            <a:pPr indent="0" marL="0">
+              <a:buNone/>
+            </a:pPr>
+            <a:r>
+              <a:rPr lang="en-US" sz="1220" dirty="0">
                 <a:solidFill>
                   <a:srgbClr val="17364A"/>
                 </a:solidFill>
@@ -16166,9 +16447,9 @@
                 <a:ea typeface="Aptos" pitchFamily="34" charset="-122"/>
                 <a:cs typeface="Aptos" pitchFamily="34" charset="-120"/>
               </a:rPr>
-              <a:t>The registry does not need to reveal sensitive security details, but it should identify.</a:t>
-            </a:r>
-            <a:endParaRPr lang="en-US" sz="1380" dirty="0"/>
+              <a:t>The registry does not need to reveal sensitive security details,.</a:t>
+            </a:r>
+            <a:endParaRPr lang="en-US" sz="1220" dirty="0"/>
           </a:p>
         </p:txBody>
       </p:sp>
@@ -16246,17 +16527,17 @@
         </p:nvSpPr>
         <p:spPr>
           <a:xfrm>
-            <a:off x="7799832" y="5001768"/>
-            <a:ext cx="3145536" cy="502920"/>
-          </a:xfrm>
-          <a:prstGeom prst="rect">
-            <a:avLst/>
-          </a:prstGeom>
-          <a:noFill/>
-          <a:ln/>
-        </p:spPr>
-        <p:txBody>
-          <a:bodyPr wrap="square" lIns="0" tIns="0" rIns="0" bIns="0" rtlCol="0" anchor="t">
+            <a:off x="7799832" y="4974336"/>
+            <a:ext cx="3145536" cy="576072"/>
+          </a:xfrm>
+          <a:prstGeom prst="rect">
+            <a:avLst/>
+          </a:prstGeom>
+          <a:noFill/>
+          <a:ln/>
+        </p:spPr>
+        <p:txBody>
+          <a:bodyPr wrap="square" lIns="254" tIns="254" rIns="254" bIns="254" rtlCol="0" anchor="t">
             <a:normAutofit/>
           </a:bodyPr>
           <a:lstStyle/>
@@ -16265,7 +16546,7 @@
               <a:buNone/>
             </a:pPr>
             <a:r>
-              <a:rPr lang="en-US" sz="1550" dirty="0">
+              <a:rPr lang="en-US" sz="1320" dirty="0">
                 <a:solidFill>
                   <a:srgbClr val="17364A"/>
                 </a:solidFill>
@@ -16273,9 +16554,9 @@
                 <a:ea typeface="Aptos" pitchFamily="34" charset="-122"/>
                 <a:cs typeface="Aptos" pitchFamily="34" charset="-120"/>
               </a:rPr>
-              <a:t>Connect the concept to public health purpose, responsible use, required safeguards, documentation, and the next action a department should take.</a:t>
-            </a:r>
-            <a:endParaRPr lang="en-US" sz="1550" dirty="0"/>
+              <a:t>Connect the concept to public health purpose, responsible use, required safeguards, documentation, and the next action a.</a:t>
+            </a:r>
+            <a:endParaRPr lang="en-US" sz="1320" dirty="0"/>
           </a:p>
         </p:txBody>
       </p:sp>

--- a/downloads/presentations/modules/gov-420.pptx
+++ b/downloads/presentations/modules/gov-420.pptx
@@ -3319,11 +3319,11 @@
         <p:spPr>
           <a:xfrm>
             <a:off x="7635240" y="1325880"/>
-            <a:ext cx="3474720" cy="1325880"/>
+            <a:ext cx="3474720" cy="1207008"/>
           </a:xfrm>
           <a:prstGeom prst="roundRect">
             <a:avLst>
-              <a:gd name="adj" fmla="val 8276"/>
+              <a:gd name="adj" fmla="val 9091"/>
             </a:avLst>
           </a:prstGeom>
           <a:solidFill>
@@ -3385,7 +3385,7 @@
         <p:spPr>
           <a:xfrm>
             <a:off x="7799832" y="1801368"/>
-            <a:ext cx="3145536" cy="758952"/>
+            <a:ext cx="3145536" cy="640080"/>
           </a:xfrm>
           <a:prstGeom prst="rect">
             <a:avLst/>
@@ -3425,12 +3425,12 @@
         </p:nvSpPr>
         <p:spPr>
           <a:xfrm>
-            <a:off x="7635240" y="2788920"/>
-            <a:ext cx="3474720" cy="1536192"/>
+            <a:off x="7635240" y="2670048"/>
+            <a:ext cx="3474720" cy="1377086"/>
           </a:xfrm>
           <a:prstGeom prst="roundRect">
             <a:avLst>
-              <a:gd name="adj" fmla="val 7143"/>
+              <a:gd name="adj" fmla="val 7968"/>
             </a:avLst>
           </a:prstGeom>
           <a:solidFill>
@@ -3452,7 +3452,7 @@
         </p:nvSpPr>
         <p:spPr>
           <a:xfrm>
-            <a:off x="7799832" y="2935224"/>
+            <a:off x="7799832" y="2816352"/>
             <a:ext cx="3145536" cy="256032"/>
           </a:xfrm>
           <a:prstGeom prst="rect">
@@ -3491,8 +3491,8 @@
         </p:nvSpPr>
         <p:spPr>
           <a:xfrm>
-            <a:off x="7818120" y="3300984"/>
-            <a:ext cx="3090672" cy="877824"/>
+            <a:off x="7818120" y="3182112"/>
+            <a:ext cx="3090672" cy="718718"/>
           </a:xfrm>
           <a:prstGeom prst="rect">
             <a:avLst/>
@@ -3566,12 +3566,12 @@
         </p:nvSpPr>
         <p:spPr>
           <a:xfrm>
-            <a:off x="7635240" y="4498848"/>
-            <a:ext cx="3474720" cy="1143000"/>
+            <a:off x="7635240" y="4184294"/>
+            <a:ext cx="3474720" cy="1466698"/>
           </a:xfrm>
           <a:prstGeom prst="roundRect">
             <a:avLst>
-              <a:gd name="adj" fmla="val 9600"/>
+              <a:gd name="adj" fmla="val 7481"/>
             </a:avLst>
           </a:prstGeom>
           <a:solidFill>
@@ -3593,7 +3593,7 @@
         </p:nvSpPr>
         <p:spPr>
           <a:xfrm>
-            <a:off x="7799832" y="4645152"/>
+            <a:off x="7799832" y="4330598"/>
             <a:ext cx="3145536" cy="256032"/>
           </a:xfrm>
           <a:prstGeom prst="rect">
@@ -3632,8 +3632,8 @@
         </p:nvSpPr>
         <p:spPr>
           <a:xfrm>
-            <a:off x="7799832" y="4974336"/>
-            <a:ext cx="3145536" cy="576072"/>
+            <a:off x="7799832" y="4659782"/>
+            <a:ext cx="3145536" cy="899770"/>
           </a:xfrm>
           <a:prstGeom prst="rect">
             <a:avLst/>
@@ -3659,7 +3659,7 @@
                 <a:ea typeface="Aptos" pitchFamily="34" charset="-122"/>
                 <a:cs typeface="Aptos" pitchFamily="34" charset="-120"/>
               </a:rPr>
-              <a:t>Translate this concept into clear decision rights, review steps, documentation expectations, and escalation paths before.</a:t>
+              <a:t>Translate this concept into clear decision rights, review steps, documentation expectations, and escalation paths before an AI-supported workflow is approved.</a:t>
             </a:r>
             <a:endParaRPr lang="en-US" sz="1320" dirty="0"/>
           </a:p>
@@ -4028,11 +4028,11 @@
         <p:spPr>
           <a:xfrm>
             <a:off x="7635240" y="1325880"/>
-            <a:ext cx="3474720" cy="1325880"/>
+            <a:ext cx="3474720" cy="1207008"/>
           </a:xfrm>
           <a:prstGeom prst="roundRect">
             <a:avLst>
-              <a:gd name="adj" fmla="val 8276"/>
+              <a:gd name="adj" fmla="val 9091"/>
             </a:avLst>
           </a:prstGeom>
           <a:solidFill>
@@ -4094,7 +4094,7 @@
         <p:spPr>
           <a:xfrm>
             <a:off x="7799832" y="1801368"/>
-            <a:ext cx="3145536" cy="758952"/>
+            <a:ext cx="3145536" cy="640080"/>
           </a:xfrm>
           <a:prstGeom prst="rect">
             <a:avLst/>
@@ -4134,7 +4134,7 @@
         </p:nvSpPr>
         <p:spPr>
           <a:xfrm>
-            <a:off x="7635240" y="2788920"/>
+            <a:off x="7635240" y="2670048"/>
             <a:ext cx="3474720" cy="1536192"/>
           </a:xfrm>
           <a:prstGeom prst="roundRect">
@@ -4161,7 +4161,7 @@
         </p:nvSpPr>
         <p:spPr>
           <a:xfrm>
-            <a:off x="7799832" y="2935224"/>
+            <a:off x="7799832" y="2816352"/>
             <a:ext cx="3145536" cy="256032"/>
           </a:xfrm>
           <a:prstGeom prst="rect">
@@ -4200,7 +4200,7 @@
         </p:nvSpPr>
         <p:spPr>
           <a:xfrm>
-            <a:off x="7818120" y="3300984"/>
+            <a:off x="7818120" y="3182112"/>
             <a:ext cx="3090672" cy="877824"/>
           </a:xfrm>
           <a:prstGeom prst="rect">
@@ -4275,12 +4275,12 @@
         </p:nvSpPr>
         <p:spPr>
           <a:xfrm>
-            <a:off x="7635240" y="4498848"/>
-            <a:ext cx="3474720" cy="1143000"/>
+            <a:off x="7635240" y="4343400"/>
+            <a:ext cx="3474720" cy="1255471"/>
           </a:xfrm>
           <a:prstGeom prst="roundRect">
             <a:avLst>
-              <a:gd name="adj" fmla="val 9600"/>
+              <a:gd name="adj" fmla="val 8740"/>
             </a:avLst>
           </a:prstGeom>
           <a:solidFill>
@@ -4302,7 +4302,7 @@
         </p:nvSpPr>
         <p:spPr>
           <a:xfrm>
-            <a:off x="7799832" y="4645152"/>
+            <a:off x="7799832" y="4489704"/>
             <a:ext cx="3145536" cy="256032"/>
           </a:xfrm>
           <a:prstGeom prst="rect">
@@ -4341,8 +4341,8 @@
         </p:nvSpPr>
         <p:spPr>
           <a:xfrm>
-            <a:off x="7799832" y="4974336"/>
-            <a:ext cx="3145536" cy="576072"/>
+            <a:off x="7799832" y="4818888"/>
+            <a:ext cx="3145536" cy="688543"/>
           </a:xfrm>
           <a:prstGeom prst="rect">
             <a:avLst/>
@@ -4368,7 +4368,7 @@
                 <a:ea typeface="Aptos" pitchFamily="34" charset="-122"/>
                 <a:cs typeface="Aptos" pitchFamily="34" charset="-120"/>
               </a:rPr>
-              <a:t>Identify what could go wrong, who could be affected, what safeguards are needed, and what evidence should be reviewed.</a:t>
+              <a:t>Identify what could go wrong, who could be affected, what safeguards are needed, and what evidence should be reviewed before use.</a:t>
             </a:r>
             <a:endParaRPr lang="en-US" sz="1320" dirty="0"/>
           </a:p>
@@ -4737,11 +4737,11 @@
         <p:spPr>
           <a:xfrm>
             <a:off x="7635240" y="1325880"/>
-            <a:ext cx="3474720" cy="1325880"/>
+            <a:ext cx="3474720" cy="1207008"/>
           </a:xfrm>
           <a:prstGeom prst="roundRect">
             <a:avLst>
-              <a:gd name="adj" fmla="val 8276"/>
+              <a:gd name="adj" fmla="val 9091"/>
             </a:avLst>
           </a:prstGeom>
           <a:solidFill>
@@ -4803,7 +4803,7 @@
         <p:spPr>
           <a:xfrm>
             <a:off x="7799832" y="1801368"/>
-            <a:ext cx="3145536" cy="758952"/>
+            <a:ext cx="3145536" cy="640080"/>
           </a:xfrm>
           <a:prstGeom prst="rect">
             <a:avLst/>
@@ -4829,7 +4829,7 @@
                 <a:ea typeface="Aptos" pitchFamily="34" charset="-122"/>
                 <a:cs typeface="Aptos" pitchFamily="34" charset="-120"/>
               </a:rPr>
-              <a:t>Generative AI transparency may explain when AI assists drafting and how human review occurs.</a:t>
+              <a:t>Generative AI transparency may explain when AI assists drafting and how human review.</a:t>
             </a:r>
             <a:endParaRPr lang="en-US" sz="1320" dirty="0"/>
           </a:p>
@@ -4843,12 +4843,12 @@
         </p:nvSpPr>
         <p:spPr>
           <a:xfrm>
-            <a:off x="7635240" y="2788920"/>
-            <a:ext cx="3474720" cy="1536192"/>
+            <a:off x="7635240" y="2670048"/>
+            <a:ext cx="3474720" cy="1377086"/>
           </a:xfrm>
           <a:prstGeom prst="roundRect">
             <a:avLst>
-              <a:gd name="adj" fmla="val 7143"/>
+              <a:gd name="adj" fmla="val 7968"/>
             </a:avLst>
           </a:prstGeom>
           <a:solidFill>
@@ -4870,7 +4870,7 @@
         </p:nvSpPr>
         <p:spPr>
           <a:xfrm>
-            <a:off x="7799832" y="2935224"/>
+            <a:off x="7799832" y="2816352"/>
             <a:ext cx="3145536" cy="256032"/>
           </a:xfrm>
           <a:prstGeom prst="rect">
@@ -4909,8 +4909,8 @@
         </p:nvSpPr>
         <p:spPr>
           <a:xfrm>
-            <a:off x="7818120" y="3300984"/>
-            <a:ext cx="3090672" cy="877824"/>
+            <a:off x="7818120" y="3182112"/>
+            <a:ext cx="3090672" cy="718718"/>
           </a:xfrm>
           <a:prstGeom prst="rect">
             <a:avLst/>
@@ -4967,12 +4967,12 @@
         </p:nvSpPr>
         <p:spPr>
           <a:xfrm>
-            <a:off x="7635240" y="4498848"/>
-            <a:ext cx="3474720" cy="1143000"/>
+            <a:off x="7635240" y="4184294"/>
+            <a:ext cx="3474720" cy="1466698"/>
           </a:xfrm>
           <a:prstGeom prst="roundRect">
             <a:avLst>
-              <a:gd name="adj" fmla="val 9600"/>
+              <a:gd name="adj" fmla="val 7481"/>
             </a:avLst>
           </a:prstGeom>
           <a:solidFill>
@@ -4994,7 +4994,7 @@
         </p:nvSpPr>
         <p:spPr>
           <a:xfrm>
-            <a:off x="7799832" y="4645152"/>
+            <a:off x="7799832" y="4330598"/>
             <a:ext cx="3145536" cy="256032"/>
           </a:xfrm>
           <a:prstGeom prst="rect">
@@ -5033,8 +5033,8 @@
         </p:nvSpPr>
         <p:spPr>
           <a:xfrm>
-            <a:off x="7799832" y="4974336"/>
-            <a:ext cx="3145536" cy="576072"/>
+            <a:off x="7799832" y="4659782"/>
+            <a:ext cx="3145536" cy="899770"/>
           </a:xfrm>
           <a:prstGeom prst="rect">
             <a:avLst/>
@@ -5060,7 +5060,7 @@
                 <a:ea typeface="Aptos" pitchFamily="34" charset="-122"/>
                 <a:cs typeface="Aptos" pitchFamily="34" charset="-120"/>
               </a:rPr>
-              <a:t>Use the concept to clarify workflow changes, dependencies, staffing, procurement requirements, training needs, and.</a:t>
+              <a:t>Use the concept to clarify workflow changes, dependencies, staffing, procurement requirements, training needs, and implementation checkpoints.</a:t>
             </a:r>
             <a:endParaRPr lang="en-US" sz="1320" dirty="0"/>
           </a:p>
@@ -5429,11 +5429,11 @@
         <p:spPr>
           <a:xfrm>
             <a:off x="7635240" y="1325880"/>
-            <a:ext cx="3474720" cy="1325880"/>
+            <a:ext cx="3474720" cy="1255471"/>
           </a:xfrm>
           <a:prstGeom prst="roundRect">
             <a:avLst>
-              <a:gd name="adj" fmla="val 8276"/>
+              <a:gd name="adj" fmla="val 8740"/>
             </a:avLst>
           </a:prstGeom>
           <a:solidFill>
@@ -5495,7 +5495,7 @@
         <p:spPr>
           <a:xfrm>
             <a:off x="7799832" y="1801368"/>
-            <a:ext cx="3145536" cy="758952"/>
+            <a:ext cx="3145536" cy="688543"/>
           </a:xfrm>
           <a:prstGeom prst="rect">
             <a:avLst/>
@@ -5535,12 +5535,12 @@
         </p:nvSpPr>
         <p:spPr>
           <a:xfrm>
-            <a:off x="7635240" y="2788920"/>
-            <a:ext cx="3474720" cy="1536192"/>
+            <a:off x="7635240" y="2718511"/>
+            <a:ext cx="3474720" cy="1328623"/>
           </a:xfrm>
           <a:prstGeom prst="roundRect">
             <a:avLst>
-              <a:gd name="adj" fmla="val 7143"/>
+              <a:gd name="adj" fmla="val 8259"/>
             </a:avLst>
           </a:prstGeom>
           <a:solidFill>
@@ -5562,7 +5562,7 @@
         </p:nvSpPr>
         <p:spPr>
           <a:xfrm>
-            <a:off x="7799832" y="2935224"/>
+            <a:off x="7799832" y="2864815"/>
             <a:ext cx="3145536" cy="256032"/>
           </a:xfrm>
           <a:prstGeom prst="rect">
@@ -5601,8 +5601,8 @@
         </p:nvSpPr>
         <p:spPr>
           <a:xfrm>
-            <a:off x="7818120" y="3300984"/>
-            <a:ext cx="3090672" cy="877824"/>
+            <a:off x="7818120" y="3230575"/>
+            <a:ext cx="3090672" cy="670255"/>
           </a:xfrm>
           <a:prstGeom prst="rect">
             <a:avLst/>
@@ -5676,12 +5676,12 @@
         </p:nvSpPr>
         <p:spPr>
           <a:xfrm>
-            <a:off x="7635240" y="4498848"/>
-            <a:ext cx="3474720" cy="1143000"/>
+            <a:off x="7635240" y="4184294"/>
+            <a:ext cx="3474720" cy="1466698"/>
           </a:xfrm>
           <a:prstGeom prst="roundRect">
             <a:avLst>
-              <a:gd name="adj" fmla="val 9600"/>
+              <a:gd name="adj" fmla="val 7481"/>
             </a:avLst>
           </a:prstGeom>
           <a:solidFill>
@@ -5703,7 +5703,7 @@
         </p:nvSpPr>
         <p:spPr>
           <a:xfrm>
-            <a:off x="7799832" y="4645152"/>
+            <a:off x="7799832" y="4330598"/>
             <a:ext cx="3145536" cy="256032"/>
           </a:xfrm>
           <a:prstGeom prst="rect">
@@ -5742,8 +5742,8 @@
         </p:nvSpPr>
         <p:spPr>
           <a:xfrm>
-            <a:off x="7799832" y="4974336"/>
-            <a:ext cx="3145536" cy="576072"/>
+            <a:off x="7799832" y="4659782"/>
+            <a:ext cx="3145536" cy="899770"/>
           </a:xfrm>
           <a:prstGeom prst="rect">
             <a:avLst/>
@@ -5769,7 +5769,7 @@
                 <a:ea typeface="Aptos" pitchFamily="34" charset="-122"/>
                 <a:cs typeface="Aptos" pitchFamily="34" charset="-120"/>
               </a:rPr>
-              <a:t>Connect the concept to public health purpose, responsible use, required safeguards, documentation, and the next action a.</a:t>
+              <a:t>Connect the concept to public health purpose, responsible use, required safeguards, documentation, and the next action a department should take.</a:t>
             </a:r>
             <a:endParaRPr lang="en-US" sz="1320" dirty="0"/>
           </a:p>
@@ -6121,11 +6121,11 @@
         <p:spPr>
           <a:xfrm>
             <a:off x="7635240" y="1325880"/>
-            <a:ext cx="3474720" cy="1325880"/>
+            <a:ext cx="3474720" cy="1207008"/>
           </a:xfrm>
           <a:prstGeom prst="roundRect">
             <a:avLst>
-              <a:gd name="adj" fmla="val 8276"/>
+              <a:gd name="adj" fmla="val 9091"/>
             </a:avLst>
           </a:prstGeom>
           <a:solidFill>
@@ -6187,7 +6187,7 @@
         <p:spPr>
           <a:xfrm>
             <a:off x="7799832" y="1801368"/>
-            <a:ext cx="3145536" cy="758952"/>
+            <a:ext cx="3145536" cy="640080"/>
           </a:xfrm>
           <a:prstGeom prst="rect">
             <a:avLst/>
@@ -6213,7 +6213,7 @@
                 <a:ea typeface="Aptos" pitchFamily="34" charset="-122"/>
                 <a:cs typeface="Aptos" pitchFamily="34" charset="-120"/>
               </a:rPr>
-              <a:t>Which staff, partners, or communities would be affected if this issue were handled poorly?</a:t>
+              <a:t>Which staff, partners, or communities would be affected if this issue were handled.</a:t>
             </a:r>
             <a:endParaRPr lang="en-US" sz="1320" dirty="0"/>
           </a:p>
@@ -6227,12 +6227,12 @@
         </p:nvSpPr>
         <p:spPr>
           <a:xfrm>
-            <a:off x="7635240" y="2788920"/>
-            <a:ext cx="3474720" cy="1536192"/>
+            <a:off x="7635240" y="2670048"/>
+            <a:ext cx="3474720" cy="1377086"/>
           </a:xfrm>
           <a:prstGeom prst="roundRect">
             <a:avLst>
-              <a:gd name="adj" fmla="val 7143"/>
+              <a:gd name="adj" fmla="val 7968"/>
             </a:avLst>
           </a:prstGeom>
           <a:solidFill>
@@ -6254,7 +6254,7 @@
         </p:nvSpPr>
         <p:spPr>
           <a:xfrm>
-            <a:off x="7799832" y="2935224"/>
+            <a:off x="7799832" y="2816352"/>
             <a:ext cx="3145536" cy="256032"/>
           </a:xfrm>
           <a:prstGeom prst="rect">
@@ -6293,8 +6293,8 @@
         </p:nvSpPr>
         <p:spPr>
           <a:xfrm>
-            <a:off x="7818120" y="3300984"/>
-            <a:ext cx="3090672" cy="877824"/>
+            <a:off x="7818120" y="3182112"/>
+            <a:ext cx="3090672" cy="718718"/>
           </a:xfrm>
           <a:prstGeom prst="rect">
             <a:avLst/>
@@ -6351,12 +6351,12 @@
         </p:nvSpPr>
         <p:spPr>
           <a:xfrm>
-            <a:off x="7635240" y="4498848"/>
-            <a:ext cx="3474720" cy="1143000"/>
+            <a:off x="7635240" y="4184294"/>
+            <a:ext cx="3474720" cy="1466698"/>
           </a:xfrm>
           <a:prstGeom prst="roundRect">
             <a:avLst>
-              <a:gd name="adj" fmla="val 9600"/>
+              <a:gd name="adj" fmla="val 7481"/>
             </a:avLst>
           </a:prstGeom>
           <a:solidFill>
@@ -6378,7 +6378,7 @@
         </p:nvSpPr>
         <p:spPr>
           <a:xfrm>
-            <a:off x="7799832" y="4645152"/>
+            <a:off x="7799832" y="4330598"/>
             <a:ext cx="3145536" cy="256032"/>
           </a:xfrm>
           <a:prstGeom prst="rect">
@@ -6417,8 +6417,8 @@
         </p:nvSpPr>
         <p:spPr>
           <a:xfrm>
-            <a:off x="7799832" y="4974336"/>
-            <a:ext cx="3145536" cy="576072"/>
+            <a:off x="7799832" y="4659782"/>
+            <a:ext cx="3145536" cy="899770"/>
           </a:xfrm>
           <a:prstGeom prst="rect">
             <a:avLst/>
@@ -6444,7 +6444,7 @@
                 <a:ea typeface="Aptos" pitchFamily="34" charset="-122"/>
                 <a:cs typeface="Aptos" pitchFamily="34" charset="-120"/>
               </a:rPr>
-              <a:t>Connect the concept to public health purpose, responsible use, required safeguards, documentation, and the next action a.</a:t>
+              <a:t>Connect the concept to public health purpose, responsible use, required safeguards, documentation, and the next action a department should take.</a:t>
             </a:r>
             <a:endParaRPr lang="en-US" sz="1320" dirty="0"/>
           </a:p>
@@ -6796,11 +6796,11 @@
         <p:spPr>
           <a:xfrm>
             <a:off x="7635240" y="1325880"/>
-            <a:ext cx="3474720" cy="1325880"/>
+            <a:ext cx="3474720" cy="1207008"/>
           </a:xfrm>
           <a:prstGeom prst="roundRect">
             <a:avLst>
-              <a:gd name="adj" fmla="val 8276"/>
+              <a:gd name="adj" fmla="val 9091"/>
             </a:avLst>
           </a:prstGeom>
           <a:solidFill>
@@ -6862,7 +6862,7 @@
         <p:spPr>
           <a:xfrm>
             <a:off x="7799832" y="1801368"/>
-            <a:ext cx="3145536" cy="758952"/>
+            <a:ext cx="3145536" cy="640080"/>
           </a:xfrm>
           <a:prstGeom prst="rect">
             <a:avLst/>
@@ -6902,12 +6902,12 @@
         </p:nvSpPr>
         <p:spPr>
           <a:xfrm>
-            <a:off x="7635240" y="2788920"/>
-            <a:ext cx="3474720" cy="1536192"/>
+            <a:off x="7635240" y="2670048"/>
+            <a:ext cx="3474720" cy="1377086"/>
           </a:xfrm>
           <a:prstGeom prst="roundRect">
             <a:avLst>
-              <a:gd name="adj" fmla="val 7143"/>
+              <a:gd name="adj" fmla="val 7968"/>
             </a:avLst>
           </a:prstGeom>
           <a:solidFill>
@@ -6929,7 +6929,7 @@
         </p:nvSpPr>
         <p:spPr>
           <a:xfrm>
-            <a:off x="7799832" y="2935224"/>
+            <a:off x="7799832" y="2816352"/>
             <a:ext cx="3145536" cy="256032"/>
           </a:xfrm>
           <a:prstGeom prst="rect">
@@ -6968,8 +6968,8 @@
         </p:nvSpPr>
         <p:spPr>
           <a:xfrm>
-            <a:off x="7818120" y="3300984"/>
-            <a:ext cx="3090672" cy="877824"/>
+            <a:off x="7818120" y="3182112"/>
+            <a:ext cx="3090672" cy="718718"/>
           </a:xfrm>
           <a:prstGeom prst="rect">
             <a:avLst/>
@@ -7026,12 +7026,12 @@
         </p:nvSpPr>
         <p:spPr>
           <a:xfrm>
-            <a:off x="7635240" y="4498848"/>
-            <a:ext cx="3474720" cy="1143000"/>
+            <a:off x="7635240" y="4184294"/>
+            <a:ext cx="3474720" cy="1466698"/>
           </a:xfrm>
           <a:prstGeom prst="roundRect">
             <a:avLst>
-              <a:gd name="adj" fmla="val 9600"/>
+              <a:gd name="adj" fmla="val 7481"/>
             </a:avLst>
           </a:prstGeom>
           <a:solidFill>
@@ -7053,7 +7053,7 @@
         </p:nvSpPr>
         <p:spPr>
           <a:xfrm>
-            <a:off x="7799832" y="4645152"/>
+            <a:off x="7799832" y="4330598"/>
             <a:ext cx="3145536" cy="256032"/>
           </a:xfrm>
           <a:prstGeom prst="rect">
@@ -7092,8 +7092,8 @@
         </p:nvSpPr>
         <p:spPr>
           <a:xfrm>
-            <a:off x="7799832" y="4974336"/>
-            <a:ext cx="3145536" cy="576072"/>
+            <a:off x="7799832" y="4659782"/>
+            <a:ext cx="3145536" cy="899770"/>
           </a:xfrm>
           <a:prstGeom prst="rect">
             <a:avLst/>
@@ -7119,7 +7119,7 @@
                 <a:ea typeface="Aptos" pitchFamily="34" charset="-122"/>
                 <a:cs typeface="Aptos" pitchFamily="34" charset="-120"/>
               </a:rPr>
-              <a:t>Use the assignment to test whether you can explain the concept, apply it to a realistic public health situation, and.</a:t>
+              <a:t>Use the assignment to test whether you can explain the concept, apply it to a realistic public health situation, and identify what would need review before the work moves forward.</a:t>
             </a:r>
             <a:endParaRPr lang="en-US" sz="1320" dirty="0"/>
           </a:p>
@@ -7488,11 +7488,11 @@
         <p:spPr>
           <a:xfrm>
             <a:off x="7635240" y="1325880"/>
-            <a:ext cx="3474720" cy="1325880"/>
+            <a:ext cx="3474720" cy="1207008"/>
           </a:xfrm>
           <a:prstGeom prst="roundRect">
             <a:avLst>
-              <a:gd name="adj" fmla="val 8276"/>
+              <a:gd name="adj" fmla="val 9091"/>
             </a:avLst>
           </a:prstGeom>
           <a:solidFill>
@@ -7554,7 +7554,7 @@
         <p:spPr>
           <a:xfrm>
             <a:off x="7799832" y="1801368"/>
-            <a:ext cx="3145536" cy="758952"/>
+            <a:ext cx="3145536" cy="640080"/>
           </a:xfrm>
           <a:prstGeom prst="rect">
             <a:avLst/>
@@ -7594,12 +7594,12 @@
         </p:nvSpPr>
         <p:spPr>
           <a:xfrm>
-            <a:off x="7635240" y="2788920"/>
-            <a:ext cx="3474720" cy="1536192"/>
+            <a:off x="7635240" y="2670048"/>
+            <a:ext cx="3474720" cy="1377086"/>
           </a:xfrm>
           <a:prstGeom prst="roundRect">
             <a:avLst>
-              <a:gd name="adj" fmla="val 7143"/>
+              <a:gd name="adj" fmla="val 7968"/>
             </a:avLst>
           </a:prstGeom>
           <a:solidFill>
@@ -7621,7 +7621,7 @@
         </p:nvSpPr>
         <p:spPr>
           <a:xfrm>
-            <a:off x="7799832" y="2935224"/>
+            <a:off x="7799832" y="2816352"/>
             <a:ext cx="3145536" cy="256032"/>
           </a:xfrm>
           <a:prstGeom prst="rect">
@@ -7660,8 +7660,8 @@
         </p:nvSpPr>
         <p:spPr>
           <a:xfrm>
-            <a:off x="7818120" y="3300984"/>
-            <a:ext cx="3090672" cy="877824"/>
+            <a:off x="7818120" y="3182112"/>
+            <a:ext cx="3090672" cy="718718"/>
           </a:xfrm>
           <a:prstGeom prst="rect">
             <a:avLst/>
@@ -7718,12 +7718,12 @@
         </p:nvSpPr>
         <p:spPr>
           <a:xfrm>
-            <a:off x="7635240" y="4498848"/>
-            <a:ext cx="3474720" cy="1143000"/>
+            <a:off x="7635240" y="4184294"/>
+            <a:ext cx="3474720" cy="1466698"/>
           </a:xfrm>
           <a:prstGeom prst="roundRect">
             <a:avLst>
-              <a:gd name="adj" fmla="val 9600"/>
+              <a:gd name="adj" fmla="val 7481"/>
             </a:avLst>
           </a:prstGeom>
           <a:solidFill>
@@ -7745,7 +7745,7 @@
         </p:nvSpPr>
         <p:spPr>
           <a:xfrm>
-            <a:off x="7799832" y="4645152"/>
+            <a:off x="7799832" y="4330598"/>
             <a:ext cx="3145536" cy="256032"/>
           </a:xfrm>
           <a:prstGeom prst="rect">
@@ -7784,8 +7784,8 @@
         </p:nvSpPr>
         <p:spPr>
           <a:xfrm>
-            <a:off x="7799832" y="4974336"/>
-            <a:ext cx="3145536" cy="576072"/>
+            <a:off x="7799832" y="4659782"/>
+            <a:ext cx="3145536" cy="899770"/>
           </a:xfrm>
           <a:prstGeom prst="rect">
             <a:avLst/>
@@ -7811,7 +7811,7 @@
                 <a:ea typeface="Aptos" pitchFamily="34" charset="-122"/>
                 <a:cs typeface="Aptos" pitchFamily="34" charset="-120"/>
               </a:rPr>
-              <a:t>Connect the concept to public health purpose, responsible use, required safeguards, documentation, and the next action a.</a:t>
+              <a:t>Connect the concept to public health purpose, responsible use, required safeguards, documentation, and the next action a department should take.</a:t>
             </a:r>
             <a:endParaRPr lang="en-US" sz="1320" dirty="0"/>
           </a:p>
@@ -8146,11 +8146,11 @@
         <p:spPr>
           <a:xfrm>
             <a:off x="7635240" y="1325880"/>
-            <a:ext cx="3474720" cy="1325880"/>
+            <a:ext cx="3474720" cy="1255471"/>
           </a:xfrm>
           <a:prstGeom prst="roundRect">
             <a:avLst>
-              <a:gd name="adj" fmla="val 8276"/>
+              <a:gd name="adj" fmla="val 8740"/>
             </a:avLst>
           </a:prstGeom>
           <a:solidFill>
@@ -8212,7 +8212,7 @@
         <p:spPr>
           <a:xfrm>
             <a:off x="7799832" y="1801368"/>
-            <a:ext cx="3145536" cy="758952"/>
+            <a:ext cx="3145536" cy="688543"/>
           </a:xfrm>
           <a:prstGeom prst="rect">
             <a:avLst/>
@@ -8252,12 +8252,12 @@
         </p:nvSpPr>
         <p:spPr>
           <a:xfrm>
-            <a:off x="7635240" y="2788920"/>
-            <a:ext cx="3474720" cy="1536192"/>
+            <a:off x="7635240" y="2718511"/>
+            <a:ext cx="3474720" cy="1328623"/>
           </a:xfrm>
           <a:prstGeom prst="roundRect">
             <a:avLst>
-              <a:gd name="adj" fmla="val 7143"/>
+              <a:gd name="adj" fmla="val 8259"/>
             </a:avLst>
           </a:prstGeom>
           <a:solidFill>
@@ -8279,7 +8279,7 @@
         </p:nvSpPr>
         <p:spPr>
           <a:xfrm>
-            <a:off x="7799832" y="2935224"/>
+            <a:off x="7799832" y="2864815"/>
             <a:ext cx="3145536" cy="256032"/>
           </a:xfrm>
           <a:prstGeom prst="rect">
@@ -8318,8 +8318,8 @@
         </p:nvSpPr>
         <p:spPr>
           <a:xfrm>
-            <a:off x="7818120" y="3300984"/>
-            <a:ext cx="3090672" cy="877824"/>
+            <a:off x="7818120" y="3230575"/>
+            <a:ext cx="3090672" cy="670255"/>
           </a:xfrm>
           <a:prstGeom prst="rect">
             <a:avLst/>
@@ -8359,12 +8359,12 @@
         </p:nvSpPr>
         <p:spPr>
           <a:xfrm>
-            <a:off x="7635240" y="4498848"/>
-            <a:ext cx="3474720" cy="1143000"/>
+            <a:off x="7635240" y="4184294"/>
+            <a:ext cx="3474720" cy="1466698"/>
           </a:xfrm>
           <a:prstGeom prst="roundRect">
             <a:avLst>
-              <a:gd name="adj" fmla="val 9600"/>
+              <a:gd name="adj" fmla="val 7481"/>
             </a:avLst>
           </a:prstGeom>
           <a:solidFill>
@@ -8386,7 +8386,7 @@
         </p:nvSpPr>
         <p:spPr>
           <a:xfrm>
-            <a:off x="7799832" y="4645152"/>
+            <a:off x="7799832" y="4330598"/>
             <a:ext cx="3145536" cy="256032"/>
           </a:xfrm>
           <a:prstGeom prst="rect">
@@ -8425,8 +8425,8 @@
         </p:nvSpPr>
         <p:spPr>
           <a:xfrm>
-            <a:off x="7799832" y="4974336"/>
-            <a:ext cx="3145536" cy="576072"/>
+            <a:off x="7799832" y="4659782"/>
+            <a:ext cx="3145536" cy="899770"/>
           </a:xfrm>
           <a:prstGeom prst="rect">
             <a:avLst/>
@@ -8452,7 +8452,7 @@
                 <a:ea typeface="Aptos" pitchFamily="34" charset="-122"/>
                 <a:cs typeface="Aptos" pitchFamily="34" charset="-120"/>
               </a:rPr>
-              <a:t>Connect the concept to public health purpose, responsible use, required safeguards, documentation, and the next action a.</a:t>
+              <a:t>Connect the concept to public health purpose, responsible use, required safeguards, documentation, and the next action a department should take.</a:t>
             </a:r>
             <a:endParaRPr lang="en-US" sz="1320" dirty="0"/>
           </a:p>
@@ -8787,11 +8787,11 @@
         <p:spPr>
           <a:xfrm>
             <a:off x="7635240" y="1325880"/>
-            <a:ext cx="3474720" cy="1325880"/>
+            <a:ext cx="3474720" cy="1255471"/>
           </a:xfrm>
           <a:prstGeom prst="roundRect">
             <a:avLst>
-              <a:gd name="adj" fmla="val 8276"/>
+              <a:gd name="adj" fmla="val 8740"/>
             </a:avLst>
           </a:prstGeom>
           <a:solidFill>
@@ -8853,7 +8853,7 @@
         <p:spPr>
           <a:xfrm>
             <a:off x="7799832" y="1801368"/>
-            <a:ext cx="3145536" cy="758952"/>
+            <a:ext cx="3145536" cy="688543"/>
           </a:xfrm>
           <a:prstGeom prst="rect">
             <a:avLst/>
@@ -8893,12 +8893,12 @@
         </p:nvSpPr>
         <p:spPr>
           <a:xfrm>
-            <a:off x="7635240" y="2788920"/>
-            <a:ext cx="3474720" cy="1536192"/>
+            <a:off x="7635240" y="2718511"/>
+            <a:ext cx="3474720" cy="1328623"/>
           </a:xfrm>
           <a:prstGeom prst="roundRect">
             <a:avLst>
-              <a:gd name="adj" fmla="val 7143"/>
+              <a:gd name="adj" fmla="val 8259"/>
             </a:avLst>
           </a:prstGeom>
           <a:solidFill>
@@ -8920,7 +8920,7 @@
         </p:nvSpPr>
         <p:spPr>
           <a:xfrm>
-            <a:off x="7799832" y="2935224"/>
+            <a:off x="7799832" y="2864815"/>
             <a:ext cx="3145536" cy="256032"/>
           </a:xfrm>
           <a:prstGeom prst="rect">
@@ -8959,8 +8959,8 @@
         </p:nvSpPr>
         <p:spPr>
           <a:xfrm>
-            <a:off x="7818120" y="3300984"/>
-            <a:ext cx="3090672" cy="877824"/>
+            <a:off x="7818120" y="3230575"/>
+            <a:ext cx="3090672" cy="670255"/>
           </a:xfrm>
           <a:prstGeom prst="rect">
             <a:avLst/>
@@ -9000,12 +9000,12 @@
         </p:nvSpPr>
         <p:spPr>
           <a:xfrm>
-            <a:off x="7635240" y="4498848"/>
-            <a:ext cx="3474720" cy="1143000"/>
+            <a:off x="7635240" y="4184294"/>
+            <a:ext cx="3474720" cy="1466698"/>
           </a:xfrm>
           <a:prstGeom prst="roundRect">
             <a:avLst>
-              <a:gd name="adj" fmla="val 9600"/>
+              <a:gd name="adj" fmla="val 7481"/>
             </a:avLst>
           </a:prstGeom>
           <a:solidFill>
@@ -9027,7 +9027,7 @@
         </p:nvSpPr>
         <p:spPr>
           <a:xfrm>
-            <a:off x="7799832" y="4645152"/>
+            <a:off x="7799832" y="4330598"/>
             <a:ext cx="3145536" cy="256032"/>
           </a:xfrm>
           <a:prstGeom prst="rect">
@@ -9066,8 +9066,8 @@
         </p:nvSpPr>
         <p:spPr>
           <a:xfrm>
-            <a:off x="7799832" y="4974336"/>
-            <a:ext cx="3145536" cy="576072"/>
+            <a:off x="7799832" y="4659782"/>
+            <a:ext cx="3145536" cy="899770"/>
           </a:xfrm>
           <a:prstGeom prst="rect">
             <a:avLst/>
@@ -9093,7 +9093,7 @@
                 <a:ea typeface="Aptos" pitchFamily="34" charset="-122"/>
                 <a:cs typeface="Aptos" pitchFamily="34" charset="-120"/>
               </a:rPr>
-              <a:t>Use the assignment to test whether you can explain the concept, apply it to a realistic public health situation, and.</a:t>
+              <a:t>Use the assignment to test whether you can explain the concept, apply it to a realistic public health situation, and identify what would need review before the work moves forward.</a:t>
             </a:r>
             <a:endParaRPr lang="en-US" sz="1320" dirty="0"/>
           </a:p>
@@ -9462,11 +9462,11 @@
         <p:spPr>
           <a:xfrm>
             <a:off x="7635240" y="1325880"/>
-            <a:ext cx="3474720" cy="1325880"/>
+            <a:ext cx="3474720" cy="1255471"/>
           </a:xfrm>
           <a:prstGeom prst="roundRect">
             <a:avLst>
-              <a:gd name="adj" fmla="val 8276"/>
+              <a:gd name="adj" fmla="val 8740"/>
             </a:avLst>
           </a:prstGeom>
           <a:solidFill>
@@ -9528,7 +9528,7 @@
         <p:spPr>
           <a:xfrm>
             <a:off x="7799832" y="1801368"/>
-            <a:ext cx="3145536" cy="758952"/>
+            <a:ext cx="3145536" cy="688543"/>
           </a:xfrm>
           <a:prstGeom prst="rect">
             <a:avLst/>
@@ -9568,12 +9568,12 @@
         </p:nvSpPr>
         <p:spPr>
           <a:xfrm>
-            <a:off x="7635240" y="2788920"/>
-            <a:ext cx="3474720" cy="1536192"/>
+            <a:off x="7635240" y="2718511"/>
+            <a:ext cx="3474720" cy="1328623"/>
           </a:xfrm>
           <a:prstGeom prst="roundRect">
             <a:avLst>
-              <a:gd name="adj" fmla="val 7143"/>
+              <a:gd name="adj" fmla="val 8259"/>
             </a:avLst>
           </a:prstGeom>
           <a:solidFill>
@@ -9595,7 +9595,7 @@
         </p:nvSpPr>
         <p:spPr>
           <a:xfrm>
-            <a:off x="7799832" y="2935224"/>
+            <a:off x="7799832" y="2864815"/>
             <a:ext cx="3145536" cy="256032"/>
           </a:xfrm>
           <a:prstGeom prst="rect">
@@ -9634,8 +9634,8 @@
         </p:nvSpPr>
         <p:spPr>
           <a:xfrm>
-            <a:off x="7818120" y="3300984"/>
-            <a:ext cx="3090672" cy="877824"/>
+            <a:off x="7818120" y="3230575"/>
+            <a:ext cx="3090672" cy="670255"/>
           </a:xfrm>
           <a:prstGeom prst="rect">
             <a:avLst/>
@@ -9709,12 +9709,12 @@
         </p:nvSpPr>
         <p:spPr>
           <a:xfrm>
-            <a:off x="7635240" y="4498848"/>
-            <a:ext cx="3474720" cy="1143000"/>
+            <a:off x="7635240" y="4184294"/>
+            <a:ext cx="3474720" cy="1466698"/>
           </a:xfrm>
           <a:prstGeom prst="roundRect">
             <a:avLst>
-              <a:gd name="adj" fmla="val 9600"/>
+              <a:gd name="adj" fmla="val 7481"/>
             </a:avLst>
           </a:prstGeom>
           <a:solidFill>
@@ -9736,7 +9736,7 @@
         </p:nvSpPr>
         <p:spPr>
           <a:xfrm>
-            <a:off x="7799832" y="4645152"/>
+            <a:off x="7799832" y="4330598"/>
             <a:ext cx="3145536" cy="256032"/>
           </a:xfrm>
           <a:prstGeom prst="rect">
@@ -9775,8 +9775,8 @@
         </p:nvSpPr>
         <p:spPr>
           <a:xfrm>
-            <a:off x="7799832" y="4974336"/>
-            <a:ext cx="3145536" cy="576072"/>
+            <a:off x="7799832" y="4659782"/>
+            <a:ext cx="3145536" cy="899770"/>
           </a:xfrm>
           <a:prstGeom prst="rect">
             <a:avLst/>
@@ -9802,7 +9802,7 @@
                 <a:ea typeface="Aptos" pitchFamily="34" charset="-122"/>
                 <a:cs typeface="Aptos" pitchFamily="34" charset="-120"/>
               </a:rPr>
-              <a:t>Use the assignment to test whether you can explain the concept, apply it to a realistic public health situation, and.</a:t>
+              <a:t>Use the assignment to test whether you can explain the concept, apply it to a realistic public health situation, and identify what would need review before the work moves forward.</a:t>
             </a:r>
             <a:endParaRPr lang="en-US" sz="1320" dirty="0"/>
           </a:p>
@@ -10773,11 +10773,11 @@
         <p:spPr>
           <a:xfrm>
             <a:off x="7635240" y="1325880"/>
-            <a:ext cx="3474720" cy="1325880"/>
+            <a:ext cx="3474720" cy="1207008"/>
           </a:xfrm>
           <a:prstGeom prst="roundRect">
             <a:avLst>
-              <a:gd name="adj" fmla="val 8276"/>
+              <a:gd name="adj" fmla="val 9091"/>
             </a:avLst>
           </a:prstGeom>
           <a:solidFill>
@@ -10839,7 +10839,7 @@
         <p:spPr>
           <a:xfrm>
             <a:off x="7799832" y="1801368"/>
-            <a:ext cx="3145536" cy="758952"/>
+            <a:ext cx="3145536" cy="640080"/>
           </a:xfrm>
           <a:prstGeom prst="rect">
             <a:avLst/>
@@ -10879,12 +10879,12 @@
         </p:nvSpPr>
         <p:spPr>
           <a:xfrm>
-            <a:off x="7635240" y="2788920"/>
-            <a:ext cx="3474720" cy="1536192"/>
+            <a:off x="7635240" y="2670048"/>
+            <a:ext cx="3474720" cy="1377086"/>
           </a:xfrm>
           <a:prstGeom prst="roundRect">
             <a:avLst>
-              <a:gd name="adj" fmla="val 7143"/>
+              <a:gd name="adj" fmla="val 7968"/>
             </a:avLst>
           </a:prstGeom>
           <a:solidFill>
@@ -10906,7 +10906,7 @@
         </p:nvSpPr>
         <p:spPr>
           <a:xfrm>
-            <a:off x="7799832" y="2935224"/>
+            <a:off x="7799832" y="2816352"/>
             <a:ext cx="3145536" cy="256032"/>
           </a:xfrm>
           <a:prstGeom prst="rect">
@@ -10945,8 +10945,8 @@
         </p:nvSpPr>
         <p:spPr>
           <a:xfrm>
-            <a:off x="7818120" y="3300984"/>
-            <a:ext cx="3090672" cy="877824"/>
+            <a:off x="7818120" y="3182112"/>
+            <a:ext cx="3090672" cy="718718"/>
           </a:xfrm>
           <a:prstGeom prst="rect">
             <a:avLst/>
@@ -11020,12 +11020,12 @@
         </p:nvSpPr>
         <p:spPr>
           <a:xfrm>
-            <a:off x="7635240" y="4498848"/>
-            <a:ext cx="3474720" cy="1143000"/>
+            <a:off x="7635240" y="4184294"/>
+            <a:ext cx="3474720" cy="1466698"/>
           </a:xfrm>
           <a:prstGeom prst="roundRect">
             <a:avLst>
-              <a:gd name="adj" fmla="val 9600"/>
+              <a:gd name="adj" fmla="val 7481"/>
             </a:avLst>
           </a:prstGeom>
           <a:solidFill>
@@ -11047,7 +11047,7 @@
         </p:nvSpPr>
         <p:spPr>
           <a:xfrm>
-            <a:off x="7799832" y="4645152"/>
+            <a:off x="7799832" y="4330598"/>
             <a:ext cx="3145536" cy="256032"/>
           </a:xfrm>
           <a:prstGeom prst="rect">
@@ -11086,8 +11086,8 @@
         </p:nvSpPr>
         <p:spPr>
           <a:xfrm>
-            <a:off x="7799832" y="4974336"/>
-            <a:ext cx="3145536" cy="576072"/>
+            <a:off x="7799832" y="4659782"/>
+            <a:ext cx="3145536" cy="899770"/>
           </a:xfrm>
           <a:prstGeom prst="rect">
             <a:avLst/>
@@ -11113,7 +11113,7 @@
                 <a:ea typeface="Aptos" pitchFamily="34" charset="-122"/>
                 <a:cs typeface="Aptos" pitchFamily="34" charset="-120"/>
               </a:rPr>
-              <a:t>Connect the concept to public health purpose, responsible use, required safeguards, documentation, and the next action a.</a:t>
+              <a:t>Connect the concept to public health purpose, responsible use, required safeguards, documentation, and the next action a department should take.</a:t>
             </a:r>
             <a:endParaRPr lang="en-US" sz="1320" dirty="0"/>
           </a:p>
@@ -11465,11 +11465,11 @@
         <p:spPr>
           <a:xfrm>
             <a:off x="7635240" y="1325880"/>
-            <a:ext cx="3474720" cy="1325880"/>
+            <a:ext cx="3474720" cy="1255471"/>
           </a:xfrm>
           <a:prstGeom prst="roundRect">
             <a:avLst>
-              <a:gd name="adj" fmla="val 8276"/>
+              <a:gd name="adj" fmla="val 8740"/>
             </a:avLst>
           </a:prstGeom>
           <a:solidFill>
@@ -11531,7 +11531,7 @@
         <p:spPr>
           <a:xfrm>
             <a:off x="7799832" y="1801368"/>
-            <a:ext cx="3145536" cy="758952"/>
+            <a:ext cx="3145536" cy="688543"/>
           </a:xfrm>
           <a:prstGeom prst="rect">
             <a:avLst/>
@@ -11571,12 +11571,12 @@
         </p:nvSpPr>
         <p:spPr>
           <a:xfrm>
-            <a:off x="7635240" y="2788920"/>
-            <a:ext cx="3474720" cy="1536192"/>
+            <a:off x="7635240" y="2718511"/>
+            <a:ext cx="3474720" cy="1328623"/>
           </a:xfrm>
           <a:prstGeom prst="roundRect">
             <a:avLst>
-              <a:gd name="adj" fmla="val 7143"/>
+              <a:gd name="adj" fmla="val 8259"/>
             </a:avLst>
           </a:prstGeom>
           <a:solidFill>
@@ -11598,7 +11598,7 @@
         </p:nvSpPr>
         <p:spPr>
           <a:xfrm>
-            <a:off x="7799832" y="2935224"/>
+            <a:off x="7799832" y="2864815"/>
             <a:ext cx="3145536" cy="256032"/>
           </a:xfrm>
           <a:prstGeom prst="rect">
@@ -11637,8 +11637,8 @@
         </p:nvSpPr>
         <p:spPr>
           <a:xfrm>
-            <a:off x="7818120" y="3300984"/>
-            <a:ext cx="3090672" cy="877824"/>
+            <a:off x="7818120" y="3230575"/>
+            <a:ext cx="3090672" cy="670255"/>
           </a:xfrm>
           <a:prstGeom prst="rect">
             <a:avLst/>
@@ -11695,12 +11695,12 @@
         </p:nvSpPr>
         <p:spPr>
           <a:xfrm>
-            <a:off x="7635240" y="4498848"/>
-            <a:ext cx="3474720" cy="1143000"/>
+            <a:off x="7635240" y="4184294"/>
+            <a:ext cx="3474720" cy="1466698"/>
           </a:xfrm>
           <a:prstGeom prst="roundRect">
             <a:avLst>
-              <a:gd name="adj" fmla="val 9600"/>
+              <a:gd name="adj" fmla="val 7481"/>
             </a:avLst>
           </a:prstGeom>
           <a:solidFill>
@@ -11722,7 +11722,7 @@
         </p:nvSpPr>
         <p:spPr>
           <a:xfrm>
-            <a:off x="7799832" y="4645152"/>
+            <a:off x="7799832" y="4330598"/>
             <a:ext cx="3145536" cy="256032"/>
           </a:xfrm>
           <a:prstGeom prst="rect">
@@ -11761,8 +11761,8 @@
         </p:nvSpPr>
         <p:spPr>
           <a:xfrm>
-            <a:off x="7799832" y="4974336"/>
-            <a:ext cx="3145536" cy="576072"/>
+            <a:off x="7799832" y="4659782"/>
+            <a:ext cx="3145536" cy="899770"/>
           </a:xfrm>
           <a:prstGeom prst="rect">
             <a:avLst/>
@@ -11788,7 +11788,7 @@
                 <a:ea typeface="Aptos" pitchFamily="34" charset="-122"/>
                 <a:cs typeface="Aptos" pitchFamily="34" charset="-120"/>
               </a:rPr>
-              <a:t>Connect the concept to public health purpose, responsible use, required safeguards, documentation, and the next action a.</a:t>
+              <a:t>Connect the concept to public health purpose, responsible use, required safeguards, documentation, and the next action a department should take.</a:t>
             </a:r>
             <a:endParaRPr lang="en-US" sz="1320" dirty="0"/>
           </a:p>
@@ -12266,7 +12266,7 @@
                 <a:ea typeface="Aptos" pitchFamily="34" charset="-122"/>
                 <a:cs typeface="Aptos" pitchFamily="34" charset="-120"/>
               </a:rPr>
-              <a:t>Use the related plays to identify decisions, participants, timing, approvals, and documentation needed for responsible.</a:t>
+              <a:t>Use the related plays to identify decisions, participants, timing, approvals, and documentation needed for responsible implementation.</a:t>
             </a:r>
             <a:endParaRPr lang="en-US" sz="1320" dirty="0"/>
           </a:p>
@@ -12885,7 +12885,7 @@
                 <a:ea typeface="Aptos" pitchFamily="34" charset="-122"/>
                 <a:cs typeface="Aptos" pitchFamily="34" charset="-120"/>
               </a:rPr>
-              <a:t>Use linked tools when your department needs a structured worksheet, template, checklist, review process, or.</a:t>
+              <a:t>Use linked tools when your department needs a structured worksheet, template, checklist, review process, or documentation artifact.</a:t>
             </a:r>
             <a:endParaRPr lang="en-US" sz="1320" dirty="0"/>
           </a:p>
@@ -13395,11 +13395,11 @@
         <p:spPr>
           <a:xfrm>
             <a:off x="7635240" y="1325880"/>
-            <a:ext cx="3474720" cy="1325880"/>
+            <a:ext cx="3474720" cy="1207008"/>
           </a:xfrm>
           <a:prstGeom prst="roundRect">
             <a:avLst>
-              <a:gd name="adj" fmla="val 8276"/>
+              <a:gd name="adj" fmla="val 9091"/>
             </a:avLst>
           </a:prstGeom>
           <a:solidFill>
@@ -13461,7 +13461,7 @@
         <p:spPr>
           <a:xfrm>
             <a:off x="7799832" y="1801368"/>
-            <a:ext cx="3145536" cy="758952"/>
+            <a:ext cx="3145536" cy="640080"/>
           </a:xfrm>
           <a:prstGeom prst="rect">
             <a:avLst/>
@@ -13501,12 +13501,12 @@
         </p:nvSpPr>
         <p:spPr>
           <a:xfrm>
-            <a:off x="7635240" y="2788920"/>
-            <a:ext cx="3474720" cy="1536192"/>
+            <a:off x="7635240" y="2670048"/>
+            <a:ext cx="3474720" cy="1377086"/>
           </a:xfrm>
           <a:prstGeom prst="roundRect">
             <a:avLst>
-              <a:gd name="adj" fmla="val 7143"/>
+              <a:gd name="adj" fmla="val 7968"/>
             </a:avLst>
           </a:prstGeom>
           <a:solidFill>
@@ -13528,7 +13528,7 @@
         </p:nvSpPr>
         <p:spPr>
           <a:xfrm>
-            <a:off x="7799832" y="2935224"/>
+            <a:off x="7799832" y="2816352"/>
             <a:ext cx="3145536" cy="256032"/>
           </a:xfrm>
           <a:prstGeom prst="rect">
@@ -13567,8 +13567,8 @@
         </p:nvSpPr>
         <p:spPr>
           <a:xfrm>
-            <a:off x="7818120" y="3300984"/>
-            <a:ext cx="3090672" cy="877824"/>
+            <a:off x="7818120" y="3182112"/>
+            <a:ext cx="3090672" cy="718718"/>
           </a:xfrm>
           <a:prstGeom prst="rect">
             <a:avLst/>
@@ -13625,12 +13625,12 @@
         </p:nvSpPr>
         <p:spPr>
           <a:xfrm>
-            <a:off x="7635240" y="4498848"/>
-            <a:ext cx="3474720" cy="1143000"/>
+            <a:off x="7635240" y="4184294"/>
+            <a:ext cx="3474720" cy="1466698"/>
           </a:xfrm>
           <a:prstGeom prst="roundRect">
             <a:avLst>
-              <a:gd name="adj" fmla="val 9600"/>
+              <a:gd name="adj" fmla="val 7481"/>
             </a:avLst>
           </a:prstGeom>
           <a:solidFill>
@@ -13652,7 +13652,7 @@
         </p:nvSpPr>
         <p:spPr>
           <a:xfrm>
-            <a:off x="7799832" y="4645152"/>
+            <a:off x="7799832" y="4330598"/>
             <a:ext cx="3145536" cy="256032"/>
           </a:xfrm>
           <a:prstGeom prst="rect">
@@ -13691,8 +13691,8 @@
         </p:nvSpPr>
         <p:spPr>
           <a:xfrm>
-            <a:off x="7799832" y="4974336"/>
-            <a:ext cx="3145536" cy="576072"/>
+            <a:off x="7799832" y="4659782"/>
+            <a:ext cx="3145536" cy="899770"/>
           </a:xfrm>
           <a:prstGeom prst="rect">
             <a:avLst/>
@@ -13718,7 +13718,7 @@
                 <a:ea typeface="Aptos" pitchFamily="34" charset="-122"/>
                 <a:cs typeface="Aptos" pitchFamily="34" charset="-120"/>
               </a:rPr>
-              <a:t>Use the assignment to test whether you can explain the concept, apply it to a realistic public health situation, and.</a:t>
+              <a:t>Use the assignment to test whether you can explain the concept, apply it to a realistic public health situation, and identify what would need review before the work moves forward.</a:t>
             </a:r>
             <a:endParaRPr lang="en-US" sz="1320" dirty="0"/>
           </a:p>
@@ -14087,11 +14087,11 @@
         <p:spPr>
           <a:xfrm>
             <a:off x="7635240" y="1325880"/>
-            <a:ext cx="3474720" cy="1325880"/>
+            <a:ext cx="3474720" cy="1255471"/>
           </a:xfrm>
           <a:prstGeom prst="roundRect">
             <a:avLst>
-              <a:gd name="adj" fmla="val 8276"/>
+              <a:gd name="adj" fmla="val 8740"/>
             </a:avLst>
           </a:prstGeom>
           <a:solidFill>
@@ -14153,7 +14153,7 @@
         <p:spPr>
           <a:xfrm>
             <a:off x="7799832" y="1801368"/>
-            <a:ext cx="3145536" cy="758952"/>
+            <a:ext cx="3145536" cy="688543"/>
           </a:xfrm>
           <a:prstGeom prst="rect">
             <a:avLst/>
@@ -14193,12 +14193,12 @@
         </p:nvSpPr>
         <p:spPr>
           <a:xfrm>
-            <a:off x="7635240" y="2788920"/>
-            <a:ext cx="3474720" cy="1536192"/>
+            <a:off x="7635240" y="2718511"/>
+            <a:ext cx="3474720" cy="1328623"/>
           </a:xfrm>
           <a:prstGeom prst="roundRect">
             <a:avLst>
-              <a:gd name="adj" fmla="val 7143"/>
+              <a:gd name="adj" fmla="val 8259"/>
             </a:avLst>
           </a:prstGeom>
           <a:solidFill>
@@ -14220,8 +14220,8 @@
         </p:nvSpPr>
         <p:spPr>
           <a:xfrm>
-            <a:off x="7799832" y="2935224"/>
-            <a:ext cx="3145536" cy="256032"/>
+            <a:off x="7799832" y="2846527"/>
+            <a:ext cx="3145536" cy="237744"/>
           </a:xfrm>
           <a:prstGeom prst="rect">
             <a:avLst/>
@@ -14237,7 +14237,7 @@
               <a:buNone/>
             </a:pPr>
             <a:r>
-              <a:rPr lang="en-US" sz="1300" b="1" dirty="0">
+              <a:rPr lang="en-US" sz="1250" b="1" dirty="0">
                 <a:solidFill>
                   <a:srgbClr val="0068B7"/>
                 </a:solidFill>
@@ -14245,101 +14245,317 @@
                 <a:ea typeface="Aptos" pitchFamily="34" charset="-122"/>
                 <a:cs typeface="Aptos" pitchFamily="34" charset="-120"/>
               </a:rPr>
-              <a:t>Concept checkpoints</a:t>
-            </a:r>
-            <a:endParaRPr lang="en-US" sz="1300" dirty="0"/>
-          </a:p>
-        </p:txBody>
-      </p:sp>
-      <p:sp>
-        <p:nvSpPr>
-          <p:cNvPr id="15" name="Text 13"/>
-          <p:cNvSpPr/>
-          <p:nvPr/>
-        </p:nvSpPr>
-        <p:spPr>
-          <a:xfrm>
-            <a:off x="7818120" y="3300984"/>
-            <a:ext cx="3090672" cy="877824"/>
-          </a:xfrm>
-          <a:prstGeom prst="rect">
-            <a:avLst/>
-          </a:prstGeom>
-          <a:noFill/>
-          <a:ln/>
-        </p:spPr>
-        <p:txBody>
-          <a:bodyPr wrap="square" lIns="508" tIns="508" rIns="508" bIns="508" rtlCol="0" anchor="t">
+              <a:t>Governance pathway</a:t>
+            </a:r>
+            <a:endParaRPr lang="en-US" sz="1250" dirty="0"/>
+          </a:p>
+        </p:txBody>
+      </p:sp>
+      <p:sp>
+        <p:nvSpPr>
+          <p:cNvPr id="15" name="Shape 13"/>
+          <p:cNvSpPr/>
+          <p:nvPr/>
+        </p:nvSpPr>
+        <p:spPr>
+          <a:xfrm>
+            <a:off x="8763000" y="3399739"/>
+            <a:ext cx="164592" cy="0"/>
+          </a:xfrm>
+          <a:prstGeom prst="line">
+            <a:avLst/>
+          </a:prstGeom>
+          <a:noFill/>
+          <a:ln w="15240">
+            <a:solidFill>
+              <a:srgbClr val="8ABBD8"/>
+            </a:solidFill>
+            <a:prstDash val="solid"/>
+          </a:ln>
+        </p:spPr>
+      </p:sp>
+      <p:sp>
+        <p:nvSpPr>
+          <p:cNvPr id="16" name="Shape 14"/>
+          <p:cNvSpPr/>
+          <p:nvPr/>
+        </p:nvSpPr>
+        <p:spPr>
+          <a:xfrm>
+            <a:off x="7872984" y="3248863"/>
+            <a:ext cx="890016" cy="301752"/>
+          </a:xfrm>
+          <a:prstGeom prst="roundRect">
+            <a:avLst>
+              <a:gd name="adj" fmla="val 24242"/>
+            </a:avLst>
+          </a:prstGeom>
+          <a:solidFill>
+            <a:srgbClr val="0068B7"/>
+          </a:solidFill>
+          <a:ln w="12700">
+            <a:solidFill>
+              <a:srgbClr val="0068B7"/>
+            </a:solidFill>
+            <a:prstDash val="solid"/>
+          </a:ln>
+        </p:spPr>
+      </p:sp>
+      <p:sp>
+        <p:nvSpPr>
+          <p:cNvPr id="17" name="Text 15"/>
+          <p:cNvSpPr/>
+          <p:nvPr/>
+        </p:nvSpPr>
+        <p:spPr>
+          <a:xfrm>
+            <a:off x="7909560" y="3322015"/>
+            <a:ext cx="816864" cy="146304"/>
+          </a:xfrm>
+          <a:prstGeom prst="rect">
+            <a:avLst/>
+          </a:prstGeom>
+          <a:noFill/>
+          <a:ln/>
+        </p:spPr>
+        <p:txBody>
+          <a:bodyPr wrap="square" lIns="0" tIns="0" rIns="0" bIns="0" rtlCol="0" anchor="ctr">
             <a:normAutofit/>
           </a:bodyPr>
           <a:lstStyle/>
           <a:p>
-            <a:pPr indent="0" marL="0">
-              <a:buNone/>
-            </a:pPr>
-            <a:r>
-              <a:rPr lang="en-US" sz="1220" dirty="0">
-                <a:solidFill>
-                  <a:srgbClr val="17364A"/>
-                </a:solidFill>
-                <a:latin typeface="Aptos" pitchFamily="34" charset="0"/>
-                <a:ea typeface="Aptos" pitchFamily="34" charset="-122"/>
-                <a:cs typeface="Aptos" pitchFamily="34" charset="-120"/>
-              </a:rPr>
-              <a:t>Public health agencies have a responsibility to explain how AI is.</a:t>
-            </a:r>
-            <a:endParaRPr lang="en-US" sz="1220" dirty="0"/>
-          </a:p>
-          <a:p>
-            <a:pPr indent="0" marL="0">
-              <a:buNone/>
-            </a:pPr>
-            <a:r>
-              <a:rPr lang="en-US" sz="1220" dirty="0">
-                <a:solidFill>
-                  <a:srgbClr val="17364A"/>
-                </a:solidFill>
-                <a:latin typeface="Aptos" pitchFamily="34" charset="0"/>
-                <a:ea typeface="Aptos" pitchFamily="34" charset="-122"/>
-                <a:cs typeface="Aptos" pitchFamily="34" charset="-120"/>
-              </a:rPr>
-              <a:t>Transparency reporting helps agencies communicate what AI tools.</a:t>
-            </a:r>
-            <a:endParaRPr lang="en-US" sz="1220" dirty="0"/>
-          </a:p>
-          <a:p>
-            <a:pPr indent="0" marL="0">
-              <a:buNone/>
-            </a:pPr>
-            <a:r>
-              <a:rPr lang="en-US" sz="1220" dirty="0">
-                <a:solidFill>
-                  <a:srgbClr val="17364A"/>
-                </a:solidFill>
-                <a:latin typeface="Aptos" pitchFamily="34" charset="0"/>
-                <a:ea typeface="Aptos" pitchFamily="34" charset="-122"/>
-                <a:cs typeface="Aptos" pitchFamily="34" charset="-120"/>
-              </a:rPr>
-              <a:t>Transparency should be understandable, accessible, and.</a:t>
-            </a:r>
-            <a:endParaRPr lang="en-US" sz="1220" dirty="0"/>
-          </a:p>
-        </p:txBody>
-      </p:sp>
-      <p:sp>
-        <p:nvSpPr>
-          <p:cNvPr id="16" name="Shape 14"/>
-          <p:cNvSpPr/>
-          <p:nvPr/>
-        </p:nvSpPr>
-        <p:spPr>
-          <a:xfrm>
-            <a:off x="7635240" y="4498848"/>
-            <a:ext cx="3474720" cy="1143000"/>
+            <a:pPr algn="ctr" indent="0" marL="0">
+              <a:buNone/>
+            </a:pPr>
+            <a:r>
+              <a:rPr lang="en-US" sz="880" b="1" dirty="0">
+                <a:solidFill>
+                  <a:srgbClr val="FFFFFF"/>
+                </a:solidFill>
+                <a:latin typeface="Aptos" pitchFamily="34" charset="0"/>
+                <a:ea typeface="Aptos" pitchFamily="34" charset="-122"/>
+                <a:cs typeface="Aptos" pitchFamily="34" charset="-120"/>
+              </a:rPr>
+              <a:t>Submit</a:t>
+            </a:r>
+            <a:endParaRPr lang="en-US" sz="880" dirty="0"/>
+          </a:p>
+        </p:txBody>
+      </p:sp>
+      <p:sp>
+        <p:nvSpPr>
+          <p:cNvPr id="18" name="Shape 16"/>
+          <p:cNvSpPr/>
+          <p:nvPr/>
+        </p:nvSpPr>
+        <p:spPr>
+          <a:xfrm>
+            <a:off x="9817608" y="3399739"/>
+            <a:ext cx="164592" cy="0"/>
+          </a:xfrm>
+          <a:prstGeom prst="line">
+            <a:avLst/>
+          </a:prstGeom>
+          <a:noFill/>
+          <a:ln w="15240">
+            <a:solidFill>
+              <a:srgbClr val="8ABBD8"/>
+            </a:solidFill>
+            <a:prstDash val="solid"/>
+          </a:ln>
+        </p:spPr>
+      </p:sp>
+      <p:sp>
+        <p:nvSpPr>
+          <p:cNvPr id="19" name="Shape 17"/>
+          <p:cNvSpPr/>
+          <p:nvPr/>
+        </p:nvSpPr>
+        <p:spPr>
+          <a:xfrm>
+            <a:off x="8927592" y="3248863"/>
+            <a:ext cx="890016" cy="301752"/>
           </a:xfrm>
           <a:prstGeom prst="roundRect">
             <a:avLst>
-              <a:gd name="adj" fmla="val 9600"/>
+              <a:gd name="adj" fmla="val 24242"/>
+            </a:avLst>
+          </a:prstGeom>
+          <a:solidFill>
+            <a:srgbClr val="2F8A28"/>
+          </a:solidFill>
+          <a:ln w="12700">
+            <a:solidFill>
+              <a:srgbClr val="2F8A28"/>
+            </a:solidFill>
+            <a:prstDash val="solid"/>
+          </a:ln>
+        </p:spPr>
+      </p:sp>
+      <p:sp>
+        <p:nvSpPr>
+          <p:cNvPr id="20" name="Text 18"/>
+          <p:cNvSpPr/>
+          <p:nvPr/>
+        </p:nvSpPr>
+        <p:spPr>
+          <a:xfrm>
+            <a:off x="8964168" y="3322015"/>
+            <a:ext cx="816864" cy="146304"/>
+          </a:xfrm>
+          <a:prstGeom prst="rect">
+            <a:avLst/>
+          </a:prstGeom>
+          <a:noFill/>
+          <a:ln/>
+        </p:spPr>
+        <p:txBody>
+          <a:bodyPr wrap="square" lIns="0" tIns="0" rIns="0" bIns="0" rtlCol="0" anchor="ctr">
+            <a:normAutofit/>
+          </a:bodyPr>
+          <a:lstStyle/>
+          <a:p>
+            <a:pPr algn="ctr" indent="0" marL="0">
+              <a:buNone/>
+            </a:pPr>
+            <a:r>
+              <a:rPr lang="en-US" sz="880" b="1" dirty="0">
+                <a:solidFill>
+                  <a:srgbClr val="FFFFFF"/>
+                </a:solidFill>
+                <a:latin typeface="Aptos" pitchFamily="34" charset="0"/>
+                <a:ea typeface="Aptos" pitchFamily="34" charset="-122"/>
+                <a:cs typeface="Aptos" pitchFamily="34" charset="-120"/>
+              </a:rPr>
+              <a:t>Review</a:t>
+            </a:r>
+            <a:endParaRPr lang="en-US" sz="880" dirty="0"/>
+          </a:p>
+        </p:txBody>
+      </p:sp>
+      <p:sp>
+        <p:nvSpPr>
+          <p:cNvPr id="21" name="Shape 19"/>
+          <p:cNvSpPr/>
+          <p:nvPr/>
+        </p:nvSpPr>
+        <p:spPr>
+          <a:xfrm>
+            <a:off x="9982200" y="3248863"/>
+            <a:ext cx="890016" cy="301752"/>
+          </a:xfrm>
+          <a:prstGeom prst="roundRect">
+            <a:avLst>
+              <a:gd name="adj" fmla="val 24242"/>
+            </a:avLst>
+          </a:prstGeom>
+          <a:solidFill>
+            <a:srgbClr val="6A4CA3"/>
+          </a:solidFill>
+          <a:ln w="12700">
+            <a:solidFill>
+              <a:srgbClr val="6A4CA3"/>
+            </a:solidFill>
+            <a:prstDash val="solid"/>
+          </a:ln>
+        </p:spPr>
+      </p:sp>
+      <p:sp>
+        <p:nvSpPr>
+          <p:cNvPr id="22" name="Text 20"/>
+          <p:cNvSpPr/>
+          <p:nvPr/>
+        </p:nvSpPr>
+        <p:spPr>
+          <a:xfrm>
+            <a:off x="10018776" y="3322015"/>
+            <a:ext cx="816864" cy="146304"/>
+          </a:xfrm>
+          <a:prstGeom prst="rect">
+            <a:avLst/>
+          </a:prstGeom>
+          <a:noFill/>
+          <a:ln/>
+        </p:spPr>
+        <p:txBody>
+          <a:bodyPr wrap="square" lIns="0" tIns="0" rIns="0" bIns="0" rtlCol="0" anchor="ctr">
+            <a:normAutofit/>
+          </a:bodyPr>
+          <a:lstStyle/>
+          <a:p>
+            <a:pPr algn="ctr" indent="0" marL="0">
+              <a:buNone/>
+            </a:pPr>
+            <a:r>
+              <a:rPr lang="en-US" sz="880" b="1" dirty="0">
+                <a:solidFill>
+                  <a:srgbClr val="FFFFFF"/>
+                </a:solidFill>
+                <a:latin typeface="Aptos" pitchFamily="34" charset="0"/>
+                <a:ea typeface="Aptos" pitchFamily="34" charset="-122"/>
+                <a:cs typeface="Aptos" pitchFamily="34" charset="-120"/>
+              </a:rPr>
+              <a:t>Oversee</a:t>
+            </a:r>
+            <a:endParaRPr lang="en-US" sz="880" dirty="0"/>
+          </a:p>
+        </p:txBody>
+      </p:sp>
+      <p:sp>
+        <p:nvSpPr>
+          <p:cNvPr id="23" name="Text 21"/>
+          <p:cNvSpPr/>
+          <p:nvPr/>
+        </p:nvSpPr>
+        <p:spPr>
+          <a:xfrm>
+            <a:off x="7854696" y="3742639"/>
+            <a:ext cx="3035808" cy="158191"/>
+          </a:xfrm>
+          <a:prstGeom prst="rect">
+            <a:avLst/>
+          </a:prstGeom>
+          <a:noFill/>
+          <a:ln/>
+        </p:spPr>
+        <p:txBody>
+          <a:bodyPr wrap="square" lIns="254" tIns="254" rIns="254" bIns="254" rtlCol="0" anchor="t">
+            <a:normAutofit/>
+          </a:bodyPr>
+          <a:lstStyle/>
+          <a:p>
+            <a:pPr indent="0" marL="0">
+              <a:buNone/>
+            </a:pPr>
+            <a:r>
+              <a:rPr lang="en-US" sz="1120" dirty="0">
+                <a:solidFill>
+                  <a:srgbClr val="17364A"/>
+                </a:solidFill>
+                <a:latin typeface="Aptos" pitchFamily="34" charset="0"/>
+                <a:ea typeface="Aptos" pitchFamily="34" charset="-122"/>
+                <a:cs typeface="Aptos" pitchFamily="34" charset="-120"/>
+              </a:rPr>
+              <a:t>A proposed AI use should move through documented review before it becomes an operational workflow.</a:t>
+            </a:r>
+            <a:endParaRPr lang="en-US" sz="1120" dirty="0"/>
+          </a:p>
+        </p:txBody>
+      </p:sp>
+      <p:sp>
+        <p:nvSpPr>
+          <p:cNvPr id="24" name="Shape 22"/>
+          <p:cNvSpPr/>
+          <p:nvPr/>
+        </p:nvSpPr>
+        <p:spPr>
+          <a:xfrm>
+            <a:off x="7635240" y="4184294"/>
+            <a:ext cx="3474720" cy="1466698"/>
+          </a:xfrm>
+          <a:prstGeom prst="roundRect">
+            <a:avLst>
+              <a:gd name="adj" fmla="val 7481"/>
             </a:avLst>
           </a:prstGeom>
           <a:solidFill>
@@ -14355,13 +14571,13 @@
       </p:sp>
       <p:sp>
         <p:nvSpPr>
-          <p:cNvPr id="17" name="Text 15"/>
-          <p:cNvSpPr/>
-          <p:nvPr/>
-        </p:nvSpPr>
-        <p:spPr>
-          <a:xfrm>
-            <a:off x="7799832" y="4645152"/>
+          <p:cNvPr id="25" name="Text 23"/>
+          <p:cNvSpPr/>
+          <p:nvPr/>
+        </p:nvSpPr>
+        <p:spPr>
+          <a:xfrm>
+            <a:off x="7799832" y="4330598"/>
             <a:ext cx="3145536" cy="256032"/>
           </a:xfrm>
           <a:prstGeom prst="rect">
@@ -14394,14 +14610,14 @@
       </p:sp>
       <p:sp>
         <p:nvSpPr>
-          <p:cNvPr id="18" name="Text 16"/>
-          <p:cNvSpPr/>
-          <p:nvPr/>
-        </p:nvSpPr>
-        <p:spPr>
-          <a:xfrm>
-            <a:off x="7799832" y="4974336"/>
-            <a:ext cx="3145536" cy="576072"/>
+          <p:cNvPr id="26" name="Text 24"/>
+          <p:cNvSpPr/>
+          <p:nvPr/>
+        </p:nvSpPr>
+        <p:spPr>
+          <a:xfrm>
+            <a:off x="7799832" y="4659782"/>
+            <a:ext cx="3145536" cy="899770"/>
           </a:xfrm>
           <a:prstGeom prst="rect">
             <a:avLst/>
@@ -14427,7 +14643,7 @@
                 <a:ea typeface="Aptos" pitchFamily="34" charset="-122"/>
                 <a:cs typeface="Aptos" pitchFamily="34" charset="-120"/>
               </a:rPr>
-              <a:t>Connect the concept to public health purpose, responsible use, required safeguards, documentation, and the next action a.</a:t>
+              <a:t>Connect the concept to public health purpose, responsible use, required safeguards, documentation, and the next action a department should take.</a:t>
             </a:r>
             <a:endParaRPr lang="en-US" sz="1320" dirty="0"/>
           </a:p>
@@ -14796,11 +15012,11 @@
         <p:spPr>
           <a:xfrm>
             <a:off x="7635240" y="1325880"/>
-            <a:ext cx="3474720" cy="1325880"/>
+            <a:ext cx="3474720" cy="1207008"/>
           </a:xfrm>
           <a:prstGeom prst="roundRect">
             <a:avLst>
-              <a:gd name="adj" fmla="val 8276"/>
+              <a:gd name="adj" fmla="val 9091"/>
             </a:avLst>
           </a:prstGeom>
           <a:solidFill>
@@ -14862,7 +15078,7 @@
         <p:spPr>
           <a:xfrm>
             <a:off x="7799832" y="1801368"/>
-            <a:ext cx="3145536" cy="758952"/>
+            <a:ext cx="3145536" cy="640080"/>
           </a:xfrm>
           <a:prstGeom prst="rect">
             <a:avLst/>
@@ -14888,7 +15104,7 @@
                 <a:ea typeface="Aptos" pitchFamily="34" charset="-122"/>
                 <a:cs typeface="Aptos" pitchFamily="34" charset="-120"/>
               </a:rPr>
-              <a:t>This module provides national-level training guidance for public health agencies and partners.</a:t>
+              <a:t>This module provides national-level training guidance for public health agencies and.</a:t>
             </a:r>
             <a:endParaRPr lang="en-US" sz="1320" dirty="0"/>
           </a:p>
@@ -14902,12 +15118,12 @@
         </p:nvSpPr>
         <p:spPr>
           <a:xfrm>
-            <a:off x="7635240" y="2788920"/>
-            <a:ext cx="3474720" cy="1536192"/>
+            <a:off x="7635240" y="2670048"/>
+            <a:ext cx="3474720" cy="1377086"/>
           </a:xfrm>
           <a:prstGeom prst="roundRect">
             <a:avLst>
-              <a:gd name="adj" fmla="val 7143"/>
+              <a:gd name="adj" fmla="val 7968"/>
             </a:avLst>
           </a:prstGeom>
           <a:solidFill>
@@ -14929,8 +15145,8 @@
         </p:nvSpPr>
         <p:spPr>
           <a:xfrm>
-            <a:off x="7799832" y="2935224"/>
-            <a:ext cx="3145536" cy="256032"/>
+            <a:off x="7799832" y="2798064"/>
+            <a:ext cx="3145536" cy="237744"/>
           </a:xfrm>
           <a:prstGeom prst="rect">
             <a:avLst/>
@@ -14946,7 +15162,7 @@
               <a:buNone/>
             </a:pPr>
             <a:r>
-              <a:rPr lang="en-US" sz="1300" b="1" dirty="0">
+              <a:rPr lang="en-US" sz="1250" b="1" dirty="0">
                 <a:solidFill>
                   <a:srgbClr val="0068B7"/>
                 </a:solidFill>
@@ -14954,101 +15170,317 @@
                 <a:ea typeface="Aptos" pitchFamily="34" charset="-122"/>
                 <a:cs typeface="Aptos" pitchFamily="34" charset="-120"/>
               </a:rPr>
-              <a:t>Concept checkpoints</a:t>
-            </a:r>
-            <a:endParaRPr lang="en-US" sz="1300" dirty="0"/>
-          </a:p>
-        </p:txBody>
-      </p:sp>
-      <p:sp>
-        <p:nvSpPr>
-          <p:cNvPr id="15" name="Text 13"/>
-          <p:cNvSpPr/>
-          <p:nvPr/>
-        </p:nvSpPr>
-        <p:spPr>
-          <a:xfrm>
-            <a:off x="7818120" y="3300984"/>
-            <a:ext cx="3090672" cy="877824"/>
-          </a:xfrm>
-          <a:prstGeom prst="rect">
-            <a:avLst/>
-          </a:prstGeom>
-          <a:noFill/>
-          <a:ln/>
-        </p:spPr>
-        <p:txBody>
-          <a:bodyPr wrap="square" lIns="508" tIns="508" rIns="508" bIns="508" rtlCol="0" anchor="t">
+              <a:t>Governance pathway</a:t>
+            </a:r>
+            <a:endParaRPr lang="en-US" sz="1250" dirty="0"/>
+          </a:p>
+        </p:txBody>
+      </p:sp>
+      <p:sp>
+        <p:nvSpPr>
+          <p:cNvPr id="15" name="Shape 13"/>
+          <p:cNvSpPr/>
+          <p:nvPr/>
+        </p:nvSpPr>
+        <p:spPr>
+          <a:xfrm>
+            <a:off x="8763000" y="3351276"/>
+            <a:ext cx="164592" cy="0"/>
+          </a:xfrm>
+          <a:prstGeom prst="line">
+            <a:avLst/>
+          </a:prstGeom>
+          <a:noFill/>
+          <a:ln w="15240">
+            <a:solidFill>
+              <a:srgbClr val="8ABBD8"/>
+            </a:solidFill>
+            <a:prstDash val="solid"/>
+          </a:ln>
+        </p:spPr>
+      </p:sp>
+      <p:sp>
+        <p:nvSpPr>
+          <p:cNvPr id="16" name="Shape 14"/>
+          <p:cNvSpPr/>
+          <p:nvPr/>
+        </p:nvSpPr>
+        <p:spPr>
+          <a:xfrm>
+            <a:off x="7872984" y="3200400"/>
+            <a:ext cx="890016" cy="301752"/>
+          </a:xfrm>
+          <a:prstGeom prst="roundRect">
+            <a:avLst>
+              <a:gd name="adj" fmla="val 24242"/>
+            </a:avLst>
+          </a:prstGeom>
+          <a:solidFill>
+            <a:srgbClr val="0068B7"/>
+          </a:solidFill>
+          <a:ln w="12700">
+            <a:solidFill>
+              <a:srgbClr val="0068B7"/>
+            </a:solidFill>
+            <a:prstDash val="solid"/>
+          </a:ln>
+        </p:spPr>
+      </p:sp>
+      <p:sp>
+        <p:nvSpPr>
+          <p:cNvPr id="17" name="Text 15"/>
+          <p:cNvSpPr/>
+          <p:nvPr/>
+        </p:nvSpPr>
+        <p:spPr>
+          <a:xfrm>
+            <a:off x="7909560" y="3273552"/>
+            <a:ext cx="816864" cy="146304"/>
+          </a:xfrm>
+          <a:prstGeom prst="rect">
+            <a:avLst/>
+          </a:prstGeom>
+          <a:noFill/>
+          <a:ln/>
+        </p:spPr>
+        <p:txBody>
+          <a:bodyPr wrap="square" lIns="0" tIns="0" rIns="0" bIns="0" rtlCol="0" anchor="ctr">
             <a:normAutofit/>
           </a:bodyPr>
           <a:lstStyle/>
           <a:p>
-            <a:pPr indent="0" marL="0">
-              <a:buNone/>
-            </a:pPr>
-            <a:r>
-              <a:rPr lang="en-US" sz="1220" dirty="0">
-                <a:solidFill>
-                  <a:srgbClr val="17364A"/>
-                </a:solidFill>
-                <a:latin typeface="Aptos" pitchFamily="34" charset="0"/>
-                <a:ea typeface="Aptos" pitchFamily="34" charset="-122"/>
-                <a:cs typeface="Aptos" pitchFamily="34" charset="-120"/>
-              </a:rPr>
-              <a:t>It is not legal advice and does not replace review by agency legal.</a:t>
-            </a:r>
-            <a:endParaRPr lang="en-US" sz="1220" dirty="0"/>
-          </a:p>
-          <a:p>
-            <a:pPr indent="0" marL="0">
-              <a:buNone/>
-            </a:pPr>
-            <a:r>
-              <a:rPr lang="en-US" sz="1220" dirty="0">
-                <a:solidFill>
-                  <a:srgbClr val="17364A"/>
-                </a:solidFill>
-                <a:latin typeface="Aptos" pitchFamily="34" charset="0"/>
-                <a:ea typeface="Aptos" pitchFamily="34" charset="-122"/>
-                <a:cs typeface="Aptos" pitchFamily="34" charset="-120"/>
-              </a:rPr>
-              <a:t>Requirements may vary by state, locality, territory, Tribe,.</a:t>
-            </a:r>
-            <a:endParaRPr lang="en-US" sz="1220" dirty="0"/>
-          </a:p>
-          <a:p>
-            <a:pPr indent="0" marL="0">
-              <a:buNone/>
-            </a:pPr>
-            <a:r>
-              <a:rPr lang="en-US" sz="1220" dirty="0">
-                <a:solidFill>
-                  <a:srgbClr val="17364A"/>
-                </a:solidFill>
-                <a:latin typeface="Aptos" pitchFamily="34" charset="0"/>
-                <a:ea typeface="Aptos" pitchFamily="34" charset="-122"/>
-                <a:cs typeface="Aptos" pitchFamily="34" charset="-120"/>
-              </a:rPr>
-              <a:t>Learners should use this module to identify the issues that.</a:t>
-            </a:r>
-            <a:endParaRPr lang="en-US" sz="1220" dirty="0"/>
-          </a:p>
-        </p:txBody>
-      </p:sp>
-      <p:sp>
-        <p:nvSpPr>
-          <p:cNvPr id="16" name="Shape 14"/>
-          <p:cNvSpPr/>
-          <p:nvPr/>
-        </p:nvSpPr>
-        <p:spPr>
-          <a:xfrm>
-            <a:off x="7635240" y="4498848"/>
-            <a:ext cx="3474720" cy="1143000"/>
+            <a:pPr algn="ctr" indent="0" marL="0">
+              <a:buNone/>
+            </a:pPr>
+            <a:r>
+              <a:rPr lang="en-US" sz="880" b="1" dirty="0">
+                <a:solidFill>
+                  <a:srgbClr val="FFFFFF"/>
+                </a:solidFill>
+                <a:latin typeface="Aptos" pitchFamily="34" charset="0"/>
+                <a:ea typeface="Aptos" pitchFamily="34" charset="-122"/>
+                <a:cs typeface="Aptos" pitchFamily="34" charset="-120"/>
+              </a:rPr>
+              <a:t>Submit</a:t>
+            </a:r>
+            <a:endParaRPr lang="en-US" sz="880" dirty="0"/>
+          </a:p>
+        </p:txBody>
+      </p:sp>
+      <p:sp>
+        <p:nvSpPr>
+          <p:cNvPr id="18" name="Shape 16"/>
+          <p:cNvSpPr/>
+          <p:nvPr/>
+        </p:nvSpPr>
+        <p:spPr>
+          <a:xfrm>
+            <a:off x="9817608" y="3351276"/>
+            <a:ext cx="164592" cy="0"/>
+          </a:xfrm>
+          <a:prstGeom prst="line">
+            <a:avLst/>
+          </a:prstGeom>
+          <a:noFill/>
+          <a:ln w="15240">
+            <a:solidFill>
+              <a:srgbClr val="8ABBD8"/>
+            </a:solidFill>
+            <a:prstDash val="solid"/>
+          </a:ln>
+        </p:spPr>
+      </p:sp>
+      <p:sp>
+        <p:nvSpPr>
+          <p:cNvPr id="19" name="Shape 17"/>
+          <p:cNvSpPr/>
+          <p:nvPr/>
+        </p:nvSpPr>
+        <p:spPr>
+          <a:xfrm>
+            <a:off x="8927592" y="3200400"/>
+            <a:ext cx="890016" cy="301752"/>
           </a:xfrm>
           <a:prstGeom prst="roundRect">
             <a:avLst>
-              <a:gd name="adj" fmla="val 9600"/>
+              <a:gd name="adj" fmla="val 24242"/>
+            </a:avLst>
+          </a:prstGeom>
+          <a:solidFill>
+            <a:srgbClr val="2F8A28"/>
+          </a:solidFill>
+          <a:ln w="12700">
+            <a:solidFill>
+              <a:srgbClr val="2F8A28"/>
+            </a:solidFill>
+            <a:prstDash val="solid"/>
+          </a:ln>
+        </p:spPr>
+      </p:sp>
+      <p:sp>
+        <p:nvSpPr>
+          <p:cNvPr id="20" name="Text 18"/>
+          <p:cNvSpPr/>
+          <p:nvPr/>
+        </p:nvSpPr>
+        <p:spPr>
+          <a:xfrm>
+            <a:off x="8964168" y="3273552"/>
+            <a:ext cx="816864" cy="146304"/>
+          </a:xfrm>
+          <a:prstGeom prst="rect">
+            <a:avLst/>
+          </a:prstGeom>
+          <a:noFill/>
+          <a:ln/>
+        </p:spPr>
+        <p:txBody>
+          <a:bodyPr wrap="square" lIns="0" tIns="0" rIns="0" bIns="0" rtlCol="0" anchor="ctr">
+            <a:normAutofit/>
+          </a:bodyPr>
+          <a:lstStyle/>
+          <a:p>
+            <a:pPr algn="ctr" indent="0" marL="0">
+              <a:buNone/>
+            </a:pPr>
+            <a:r>
+              <a:rPr lang="en-US" sz="880" b="1" dirty="0">
+                <a:solidFill>
+                  <a:srgbClr val="FFFFFF"/>
+                </a:solidFill>
+                <a:latin typeface="Aptos" pitchFamily="34" charset="0"/>
+                <a:ea typeface="Aptos" pitchFamily="34" charset="-122"/>
+                <a:cs typeface="Aptos" pitchFamily="34" charset="-120"/>
+              </a:rPr>
+              <a:t>Review</a:t>
+            </a:r>
+            <a:endParaRPr lang="en-US" sz="880" dirty="0"/>
+          </a:p>
+        </p:txBody>
+      </p:sp>
+      <p:sp>
+        <p:nvSpPr>
+          <p:cNvPr id="21" name="Shape 19"/>
+          <p:cNvSpPr/>
+          <p:nvPr/>
+        </p:nvSpPr>
+        <p:spPr>
+          <a:xfrm>
+            <a:off x="9982200" y="3200400"/>
+            <a:ext cx="890016" cy="301752"/>
+          </a:xfrm>
+          <a:prstGeom prst="roundRect">
+            <a:avLst>
+              <a:gd name="adj" fmla="val 24242"/>
+            </a:avLst>
+          </a:prstGeom>
+          <a:solidFill>
+            <a:srgbClr val="6A4CA3"/>
+          </a:solidFill>
+          <a:ln w="12700">
+            <a:solidFill>
+              <a:srgbClr val="6A4CA3"/>
+            </a:solidFill>
+            <a:prstDash val="solid"/>
+          </a:ln>
+        </p:spPr>
+      </p:sp>
+      <p:sp>
+        <p:nvSpPr>
+          <p:cNvPr id="22" name="Text 20"/>
+          <p:cNvSpPr/>
+          <p:nvPr/>
+        </p:nvSpPr>
+        <p:spPr>
+          <a:xfrm>
+            <a:off x="10018776" y="3273552"/>
+            <a:ext cx="816864" cy="146304"/>
+          </a:xfrm>
+          <a:prstGeom prst="rect">
+            <a:avLst/>
+          </a:prstGeom>
+          <a:noFill/>
+          <a:ln/>
+        </p:spPr>
+        <p:txBody>
+          <a:bodyPr wrap="square" lIns="0" tIns="0" rIns="0" bIns="0" rtlCol="0" anchor="ctr">
+            <a:normAutofit/>
+          </a:bodyPr>
+          <a:lstStyle/>
+          <a:p>
+            <a:pPr algn="ctr" indent="0" marL="0">
+              <a:buNone/>
+            </a:pPr>
+            <a:r>
+              <a:rPr lang="en-US" sz="880" b="1" dirty="0">
+                <a:solidFill>
+                  <a:srgbClr val="FFFFFF"/>
+                </a:solidFill>
+                <a:latin typeface="Aptos" pitchFamily="34" charset="0"/>
+                <a:ea typeface="Aptos" pitchFamily="34" charset="-122"/>
+                <a:cs typeface="Aptos" pitchFamily="34" charset="-120"/>
+              </a:rPr>
+              <a:t>Oversee</a:t>
+            </a:r>
+            <a:endParaRPr lang="en-US" sz="880" dirty="0"/>
+          </a:p>
+        </p:txBody>
+      </p:sp>
+      <p:sp>
+        <p:nvSpPr>
+          <p:cNvPr id="23" name="Text 21"/>
+          <p:cNvSpPr/>
+          <p:nvPr/>
+        </p:nvSpPr>
+        <p:spPr>
+          <a:xfrm>
+            <a:off x="7854696" y="3694176"/>
+            <a:ext cx="3035808" cy="206654"/>
+          </a:xfrm>
+          <a:prstGeom prst="rect">
+            <a:avLst/>
+          </a:prstGeom>
+          <a:noFill/>
+          <a:ln/>
+        </p:spPr>
+        <p:txBody>
+          <a:bodyPr wrap="square" lIns="254" tIns="254" rIns="254" bIns="254" rtlCol="0" anchor="t">
+            <a:normAutofit/>
+          </a:bodyPr>
+          <a:lstStyle/>
+          <a:p>
+            <a:pPr indent="0" marL="0">
+              <a:buNone/>
+            </a:pPr>
+            <a:r>
+              <a:rPr lang="en-US" sz="1120" dirty="0">
+                <a:solidFill>
+                  <a:srgbClr val="17364A"/>
+                </a:solidFill>
+                <a:latin typeface="Aptos" pitchFamily="34" charset="0"/>
+                <a:ea typeface="Aptos" pitchFamily="34" charset="-122"/>
+                <a:cs typeface="Aptos" pitchFamily="34" charset="-120"/>
+              </a:rPr>
+              <a:t>A proposed AI use should move through documented review before it becomes an operational workflow.</a:t>
+            </a:r>
+            <a:endParaRPr lang="en-US" sz="1120" dirty="0"/>
+          </a:p>
+        </p:txBody>
+      </p:sp>
+      <p:sp>
+        <p:nvSpPr>
+          <p:cNvPr id="24" name="Shape 22"/>
+          <p:cNvSpPr/>
+          <p:nvPr/>
+        </p:nvSpPr>
+        <p:spPr>
+          <a:xfrm>
+            <a:off x="7635240" y="4184294"/>
+            <a:ext cx="3474720" cy="1466698"/>
+          </a:xfrm>
+          <a:prstGeom prst="roundRect">
+            <a:avLst>
+              <a:gd name="adj" fmla="val 7481"/>
             </a:avLst>
           </a:prstGeom>
           <a:solidFill>
@@ -15064,13 +15496,13 @@
       </p:sp>
       <p:sp>
         <p:nvSpPr>
-          <p:cNvPr id="17" name="Text 15"/>
-          <p:cNvSpPr/>
-          <p:nvPr/>
-        </p:nvSpPr>
-        <p:spPr>
-          <a:xfrm>
-            <a:off x="7799832" y="4645152"/>
+          <p:cNvPr id="25" name="Text 23"/>
+          <p:cNvSpPr/>
+          <p:nvPr/>
+        </p:nvSpPr>
+        <p:spPr>
+          <a:xfrm>
+            <a:off x="7799832" y="4330598"/>
             <a:ext cx="3145536" cy="256032"/>
           </a:xfrm>
           <a:prstGeom prst="rect">
@@ -15103,14 +15535,14 @@
       </p:sp>
       <p:sp>
         <p:nvSpPr>
-          <p:cNvPr id="18" name="Text 16"/>
-          <p:cNvSpPr/>
-          <p:nvPr/>
-        </p:nvSpPr>
-        <p:spPr>
-          <a:xfrm>
-            <a:off x="7799832" y="4974336"/>
-            <a:ext cx="3145536" cy="576072"/>
+          <p:cNvPr id="26" name="Text 24"/>
+          <p:cNvSpPr/>
+          <p:nvPr/>
+        </p:nvSpPr>
+        <p:spPr>
+          <a:xfrm>
+            <a:off x="7799832" y="4659782"/>
+            <a:ext cx="3145536" cy="899770"/>
           </a:xfrm>
           <a:prstGeom prst="rect">
             <a:avLst/>
@@ -15136,7 +15568,7 @@
                 <a:ea typeface="Aptos" pitchFamily="34" charset="-122"/>
                 <a:cs typeface="Aptos" pitchFamily="34" charset="-120"/>
               </a:rPr>
-              <a:t>Translate this concept into clear decision rights, review steps, documentation expectations, and escalation paths before.</a:t>
+              <a:t>Translate this concept into clear decision rights, review steps, documentation expectations, and escalation paths before an AI-supported workflow is approved.</a:t>
             </a:r>
             <a:endParaRPr lang="en-US" sz="1320" dirty="0"/>
           </a:p>
@@ -15505,11 +15937,11 @@
         <p:spPr>
           <a:xfrm>
             <a:off x="7635240" y="1325880"/>
-            <a:ext cx="3474720" cy="1325880"/>
+            <a:ext cx="3474720" cy="1207008"/>
           </a:xfrm>
           <a:prstGeom prst="roundRect">
             <a:avLst>
-              <a:gd name="adj" fmla="val 8276"/>
+              <a:gd name="adj" fmla="val 9091"/>
             </a:avLst>
           </a:prstGeom>
           <a:solidFill>
@@ -15571,7 +16003,7 @@
         <p:spPr>
           <a:xfrm>
             <a:off x="7799832" y="1801368"/>
-            <a:ext cx="3145536" cy="758952"/>
+            <a:ext cx="3145536" cy="640080"/>
           </a:xfrm>
           <a:prstGeom prst="rect">
             <a:avLst/>
@@ -15611,12 +16043,12 @@
         </p:nvSpPr>
         <p:spPr>
           <a:xfrm>
-            <a:off x="7635240" y="2788920"/>
-            <a:ext cx="3474720" cy="1536192"/>
+            <a:off x="7635240" y="2670048"/>
+            <a:ext cx="3474720" cy="1377086"/>
           </a:xfrm>
           <a:prstGeom prst="roundRect">
             <a:avLst>
-              <a:gd name="adj" fmla="val 7143"/>
+              <a:gd name="adj" fmla="val 7968"/>
             </a:avLst>
           </a:prstGeom>
           <a:solidFill>
@@ -15638,8 +16070,8 @@
         </p:nvSpPr>
         <p:spPr>
           <a:xfrm>
-            <a:off x="7799832" y="2935224"/>
-            <a:ext cx="3145536" cy="256032"/>
+            <a:off x="7799832" y="2798064"/>
+            <a:ext cx="3145536" cy="237744"/>
           </a:xfrm>
           <a:prstGeom prst="rect">
             <a:avLst/>
@@ -15655,7 +16087,7 @@
               <a:buNone/>
             </a:pPr>
             <a:r>
-              <a:rPr lang="en-US" sz="1300" b="1" dirty="0">
+              <a:rPr lang="en-US" sz="1250" b="1" dirty="0">
                 <a:solidFill>
                   <a:srgbClr val="0068B7"/>
                 </a:solidFill>
@@ -15663,101 +16095,317 @@
                 <a:ea typeface="Aptos" pitchFamily="34" charset="-122"/>
                 <a:cs typeface="Aptos" pitchFamily="34" charset="-120"/>
               </a:rPr>
-              <a:t>Concept checkpoints</a:t>
-            </a:r>
-            <a:endParaRPr lang="en-US" sz="1300" dirty="0"/>
-          </a:p>
-        </p:txBody>
-      </p:sp>
-      <p:sp>
-        <p:nvSpPr>
-          <p:cNvPr id="15" name="Text 13"/>
-          <p:cNvSpPr/>
-          <p:nvPr/>
-        </p:nvSpPr>
-        <p:spPr>
-          <a:xfrm>
-            <a:off x="7818120" y="3300984"/>
-            <a:ext cx="3090672" cy="877824"/>
-          </a:xfrm>
-          <a:prstGeom prst="rect">
-            <a:avLst/>
-          </a:prstGeom>
-          <a:noFill/>
-          <a:ln/>
-        </p:spPr>
-        <p:txBody>
-          <a:bodyPr wrap="square" lIns="508" tIns="508" rIns="508" bIns="508" rtlCol="0" anchor="t">
+              <a:t>Governance pathway</a:t>
+            </a:r>
+            <a:endParaRPr lang="en-US" sz="1250" dirty="0"/>
+          </a:p>
+        </p:txBody>
+      </p:sp>
+      <p:sp>
+        <p:nvSpPr>
+          <p:cNvPr id="15" name="Shape 13"/>
+          <p:cNvSpPr/>
+          <p:nvPr/>
+        </p:nvSpPr>
+        <p:spPr>
+          <a:xfrm>
+            <a:off x="8763000" y="3351276"/>
+            <a:ext cx="164592" cy="0"/>
+          </a:xfrm>
+          <a:prstGeom prst="line">
+            <a:avLst/>
+          </a:prstGeom>
+          <a:noFill/>
+          <a:ln w="15240">
+            <a:solidFill>
+              <a:srgbClr val="8ABBD8"/>
+            </a:solidFill>
+            <a:prstDash val="solid"/>
+          </a:ln>
+        </p:spPr>
+      </p:sp>
+      <p:sp>
+        <p:nvSpPr>
+          <p:cNvPr id="16" name="Shape 14"/>
+          <p:cNvSpPr/>
+          <p:nvPr/>
+        </p:nvSpPr>
+        <p:spPr>
+          <a:xfrm>
+            <a:off x="7872984" y="3200400"/>
+            <a:ext cx="890016" cy="301752"/>
+          </a:xfrm>
+          <a:prstGeom prst="roundRect">
+            <a:avLst>
+              <a:gd name="adj" fmla="val 24242"/>
+            </a:avLst>
+          </a:prstGeom>
+          <a:solidFill>
+            <a:srgbClr val="0068B7"/>
+          </a:solidFill>
+          <a:ln w="12700">
+            <a:solidFill>
+              <a:srgbClr val="0068B7"/>
+            </a:solidFill>
+            <a:prstDash val="solid"/>
+          </a:ln>
+        </p:spPr>
+      </p:sp>
+      <p:sp>
+        <p:nvSpPr>
+          <p:cNvPr id="17" name="Text 15"/>
+          <p:cNvSpPr/>
+          <p:nvPr/>
+        </p:nvSpPr>
+        <p:spPr>
+          <a:xfrm>
+            <a:off x="7909560" y="3273552"/>
+            <a:ext cx="816864" cy="146304"/>
+          </a:xfrm>
+          <a:prstGeom prst="rect">
+            <a:avLst/>
+          </a:prstGeom>
+          <a:noFill/>
+          <a:ln/>
+        </p:spPr>
+        <p:txBody>
+          <a:bodyPr wrap="square" lIns="0" tIns="0" rIns="0" bIns="0" rtlCol="0" anchor="ctr">
             <a:normAutofit/>
           </a:bodyPr>
           <a:lstStyle/>
           <a:p>
-            <a:pPr indent="0" marL="0">
-              <a:buNone/>
-            </a:pPr>
-            <a:r>
-              <a:rPr lang="en-US" sz="1220" dirty="0">
-                <a:solidFill>
-                  <a:srgbClr val="17364A"/>
-                </a:solidFill>
-                <a:latin typeface="Aptos" pitchFamily="34" charset="0"/>
-                <a:ea typeface="Aptos" pitchFamily="34" charset="-122"/>
-                <a:cs typeface="Aptos" pitchFamily="34" charset="-120"/>
-              </a:rPr>
-              <a:t>If communities discover that AI is being used in surveillance,.</a:t>
-            </a:r>
-            <a:endParaRPr lang="en-US" sz="1220" dirty="0"/>
-          </a:p>
-          <a:p>
-            <a:pPr indent="0" marL="0">
-              <a:buNone/>
-            </a:pPr>
-            <a:r>
-              <a:rPr lang="en-US" sz="1220" dirty="0">
-                <a:solidFill>
-                  <a:srgbClr val="17364A"/>
-                </a:solidFill>
-                <a:latin typeface="Aptos" pitchFamily="34" charset="0"/>
-                <a:ea typeface="Aptos" pitchFamily="34" charset="-122"/>
-                <a:cs typeface="Aptos" pitchFamily="34" charset="-120"/>
-              </a:rPr>
-              <a:t>Transparency does not require agencies to disclose every technical.</a:t>
-            </a:r>
-            <a:endParaRPr lang="en-US" sz="1220" dirty="0"/>
-          </a:p>
-          <a:p>
-            <a:pPr indent="0" marL="0">
-              <a:buNone/>
-            </a:pPr>
-            <a:r>
-              <a:rPr lang="en-US" sz="1220" dirty="0">
-                <a:solidFill>
-                  <a:srgbClr val="17364A"/>
-                </a:solidFill>
-                <a:latin typeface="Aptos" pitchFamily="34" charset="0"/>
-                <a:ea typeface="Aptos" pitchFamily="34" charset="-122"/>
-                <a:cs typeface="Aptos" pitchFamily="34" charset="-120"/>
-              </a:rPr>
-              <a:t>Transparency also improves internal accountability.</a:t>
-            </a:r>
-            <a:endParaRPr lang="en-US" sz="1220" dirty="0"/>
-          </a:p>
-        </p:txBody>
-      </p:sp>
-      <p:sp>
-        <p:nvSpPr>
-          <p:cNvPr id="16" name="Shape 14"/>
-          <p:cNvSpPr/>
-          <p:nvPr/>
-        </p:nvSpPr>
-        <p:spPr>
-          <a:xfrm>
-            <a:off x="7635240" y="4498848"/>
-            <a:ext cx="3474720" cy="1143000"/>
+            <a:pPr algn="ctr" indent="0" marL="0">
+              <a:buNone/>
+            </a:pPr>
+            <a:r>
+              <a:rPr lang="en-US" sz="880" b="1" dirty="0">
+                <a:solidFill>
+                  <a:srgbClr val="FFFFFF"/>
+                </a:solidFill>
+                <a:latin typeface="Aptos" pitchFamily="34" charset="0"/>
+                <a:ea typeface="Aptos" pitchFamily="34" charset="-122"/>
+                <a:cs typeface="Aptos" pitchFamily="34" charset="-120"/>
+              </a:rPr>
+              <a:t>Submit</a:t>
+            </a:r>
+            <a:endParaRPr lang="en-US" sz="880" dirty="0"/>
+          </a:p>
+        </p:txBody>
+      </p:sp>
+      <p:sp>
+        <p:nvSpPr>
+          <p:cNvPr id="18" name="Shape 16"/>
+          <p:cNvSpPr/>
+          <p:nvPr/>
+        </p:nvSpPr>
+        <p:spPr>
+          <a:xfrm>
+            <a:off x="9817608" y="3351276"/>
+            <a:ext cx="164592" cy="0"/>
+          </a:xfrm>
+          <a:prstGeom prst="line">
+            <a:avLst/>
+          </a:prstGeom>
+          <a:noFill/>
+          <a:ln w="15240">
+            <a:solidFill>
+              <a:srgbClr val="8ABBD8"/>
+            </a:solidFill>
+            <a:prstDash val="solid"/>
+          </a:ln>
+        </p:spPr>
+      </p:sp>
+      <p:sp>
+        <p:nvSpPr>
+          <p:cNvPr id="19" name="Shape 17"/>
+          <p:cNvSpPr/>
+          <p:nvPr/>
+        </p:nvSpPr>
+        <p:spPr>
+          <a:xfrm>
+            <a:off x="8927592" y="3200400"/>
+            <a:ext cx="890016" cy="301752"/>
           </a:xfrm>
           <a:prstGeom prst="roundRect">
             <a:avLst>
-              <a:gd name="adj" fmla="val 9600"/>
+              <a:gd name="adj" fmla="val 24242"/>
+            </a:avLst>
+          </a:prstGeom>
+          <a:solidFill>
+            <a:srgbClr val="2F8A28"/>
+          </a:solidFill>
+          <a:ln w="12700">
+            <a:solidFill>
+              <a:srgbClr val="2F8A28"/>
+            </a:solidFill>
+            <a:prstDash val="solid"/>
+          </a:ln>
+        </p:spPr>
+      </p:sp>
+      <p:sp>
+        <p:nvSpPr>
+          <p:cNvPr id="20" name="Text 18"/>
+          <p:cNvSpPr/>
+          <p:nvPr/>
+        </p:nvSpPr>
+        <p:spPr>
+          <a:xfrm>
+            <a:off x="8964168" y="3273552"/>
+            <a:ext cx="816864" cy="146304"/>
+          </a:xfrm>
+          <a:prstGeom prst="rect">
+            <a:avLst/>
+          </a:prstGeom>
+          <a:noFill/>
+          <a:ln/>
+        </p:spPr>
+        <p:txBody>
+          <a:bodyPr wrap="square" lIns="0" tIns="0" rIns="0" bIns="0" rtlCol="0" anchor="ctr">
+            <a:normAutofit/>
+          </a:bodyPr>
+          <a:lstStyle/>
+          <a:p>
+            <a:pPr algn="ctr" indent="0" marL="0">
+              <a:buNone/>
+            </a:pPr>
+            <a:r>
+              <a:rPr lang="en-US" sz="880" b="1" dirty="0">
+                <a:solidFill>
+                  <a:srgbClr val="FFFFFF"/>
+                </a:solidFill>
+                <a:latin typeface="Aptos" pitchFamily="34" charset="0"/>
+                <a:ea typeface="Aptos" pitchFamily="34" charset="-122"/>
+                <a:cs typeface="Aptos" pitchFamily="34" charset="-120"/>
+              </a:rPr>
+              <a:t>Review</a:t>
+            </a:r>
+            <a:endParaRPr lang="en-US" sz="880" dirty="0"/>
+          </a:p>
+        </p:txBody>
+      </p:sp>
+      <p:sp>
+        <p:nvSpPr>
+          <p:cNvPr id="21" name="Shape 19"/>
+          <p:cNvSpPr/>
+          <p:nvPr/>
+        </p:nvSpPr>
+        <p:spPr>
+          <a:xfrm>
+            <a:off x="9982200" y="3200400"/>
+            <a:ext cx="890016" cy="301752"/>
+          </a:xfrm>
+          <a:prstGeom prst="roundRect">
+            <a:avLst>
+              <a:gd name="adj" fmla="val 24242"/>
+            </a:avLst>
+          </a:prstGeom>
+          <a:solidFill>
+            <a:srgbClr val="6A4CA3"/>
+          </a:solidFill>
+          <a:ln w="12700">
+            <a:solidFill>
+              <a:srgbClr val="6A4CA3"/>
+            </a:solidFill>
+            <a:prstDash val="solid"/>
+          </a:ln>
+        </p:spPr>
+      </p:sp>
+      <p:sp>
+        <p:nvSpPr>
+          <p:cNvPr id="22" name="Text 20"/>
+          <p:cNvSpPr/>
+          <p:nvPr/>
+        </p:nvSpPr>
+        <p:spPr>
+          <a:xfrm>
+            <a:off x="10018776" y="3273552"/>
+            <a:ext cx="816864" cy="146304"/>
+          </a:xfrm>
+          <a:prstGeom prst="rect">
+            <a:avLst/>
+          </a:prstGeom>
+          <a:noFill/>
+          <a:ln/>
+        </p:spPr>
+        <p:txBody>
+          <a:bodyPr wrap="square" lIns="0" tIns="0" rIns="0" bIns="0" rtlCol="0" anchor="ctr">
+            <a:normAutofit/>
+          </a:bodyPr>
+          <a:lstStyle/>
+          <a:p>
+            <a:pPr algn="ctr" indent="0" marL="0">
+              <a:buNone/>
+            </a:pPr>
+            <a:r>
+              <a:rPr lang="en-US" sz="880" b="1" dirty="0">
+                <a:solidFill>
+                  <a:srgbClr val="FFFFFF"/>
+                </a:solidFill>
+                <a:latin typeface="Aptos" pitchFamily="34" charset="0"/>
+                <a:ea typeface="Aptos" pitchFamily="34" charset="-122"/>
+                <a:cs typeface="Aptos" pitchFamily="34" charset="-120"/>
+              </a:rPr>
+              <a:t>Oversee</a:t>
+            </a:r>
+            <a:endParaRPr lang="en-US" sz="880" dirty="0"/>
+          </a:p>
+        </p:txBody>
+      </p:sp>
+      <p:sp>
+        <p:nvSpPr>
+          <p:cNvPr id="23" name="Text 21"/>
+          <p:cNvSpPr/>
+          <p:nvPr/>
+        </p:nvSpPr>
+        <p:spPr>
+          <a:xfrm>
+            <a:off x="7854696" y="3694176"/>
+            <a:ext cx="3035808" cy="206654"/>
+          </a:xfrm>
+          <a:prstGeom prst="rect">
+            <a:avLst/>
+          </a:prstGeom>
+          <a:noFill/>
+          <a:ln/>
+        </p:spPr>
+        <p:txBody>
+          <a:bodyPr wrap="square" lIns="254" tIns="254" rIns="254" bIns="254" rtlCol="0" anchor="t">
+            <a:normAutofit/>
+          </a:bodyPr>
+          <a:lstStyle/>
+          <a:p>
+            <a:pPr indent="0" marL="0">
+              <a:buNone/>
+            </a:pPr>
+            <a:r>
+              <a:rPr lang="en-US" sz="1120" dirty="0">
+                <a:solidFill>
+                  <a:srgbClr val="17364A"/>
+                </a:solidFill>
+                <a:latin typeface="Aptos" pitchFamily="34" charset="0"/>
+                <a:ea typeface="Aptos" pitchFamily="34" charset="-122"/>
+                <a:cs typeface="Aptos" pitchFamily="34" charset="-120"/>
+              </a:rPr>
+              <a:t>A proposed AI use should move through documented review before it becomes an operational workflow.</a:t>
+            </a:r>
+            <a:endParaRPr lang="en-US" sz="1120" dirty="0"/>
+          </a:p>
+        </p:txBody>
+      </p:sp>
+      <p:sp>
+        <p:nvSpPr>
+          <p:cNvPr id="24" name="Shape 22"/>
+          <p:cNvSpPr/>
+          <p:nvPr/>
+        </p:nvSpPr>
+        <p:spPr>
+          <a:xfrm>
+            <a:off x="7635240" y="4184294"/>
+            <a:ext cx="3474720" cy="1466698"/>
+          </a:xfrm>
+          <a:prstGeom prst="roundRect">
+            <a:avLst>
+              <a:gd name="adj" fmla="val 7481"/>
             </a:avLst>
           </a:prstGeom>
           <a:solidFill>
@@ -15773,13 +16421,13 @@
       </p:sp>
       <p:sp>
         <p:nvSpPr>
-          <p:cNvPr id="17" name="Text 15"/>
-          <p:cNvSpPr/>
-          <p:nvPr/>
-        </p:nvSpPr>
-        <p:spPr>
-          <a:xfrm>
-            <a:off x="7799832" y="4645152"/>
+          <p:cNvPr id="25" name="Text 23"/>
+          <p:cNvSpPr/>
+          <p:nvPr/>
+        </p:nvSpPr>
+        <p:spPr>
+          <a:xfrm>
+            <a:off x="7799832" y="4330598"/>
             <a:ext cx="3145536" cy="256032"/>
           </a:xfrm>
           <a:prstGeom prst="rect">
@@ -15812,14 +16460,14 @@
       </p:sp>
       <p:sp>
         <p:nvSpPr>
-          <p:cNvPr id="18" name="Text 16"/>
-          <p:cNvSpPr/>
-          <p:nvPr/>
-        </p:nvSpPr>
-        <p:spPr>
-          <a:xfrm>
-            <a:off x="7799832" y="4974336"/>
-            <a:ext cx="3145536" cy="576072"/>
+          <p:cNvPr id="26" name="Text 24"/>
+          <p:cNvSpPr/>
+          <p:nvPr/>
+        </p:nvSpPr>
+        <p:spPr>
+          <a:xfrm>
+            <a:off x="7799832" y="4659782"/>
+            <a:ext cx="3145536" cy="899770"/>
           </a:xfrm>
           <a:prstGeom prst="rect">
             <a:avLst/>
@@ -15845,7 +16493,7 @@
                 <a:ea typeface="Aptos" pitchFamily="34" charset="-122"/>
                 <a:cs typeface="Aptos" pitchFamily="34" charset="-120"/>
               </a:rPr>
-              <a:t>Connect the concept to public health purpose, responsible use, required safeguards, documentation, and the next action a.</a:t>
+              <a:t>Connect the concept to public health purpose, responsible use, required safeguards, documentation, and the next action a department should take.</a:t>
             </a:r>
             <a:endParaRPr lang="en-US" sz="1320" dirty="0"/>
           </a:p>
@@ -16214,11 +16862,11 @@
         <p:spPr>
           <a:xfrm>
             <a:off x="7635240" y="1325880"/>
-            <a:ext cx="3474720" cy="1325880"/>
+            <a:ext cx="3474720" cy="1255471"/>
           </a:xfrm>
           <a:prstGeom prst="roundRect">
             <a:avLst>
-              <a:gd name="adj" fmla="val 8276"/>
+              <a:gd name="adj" fmla="val 8740"/>
             </a:avLst>
           </a:prstGeom>
           <a:solidFill>
@@ -16280,7 +16928,7 @@
         <p:spPr>
           <a:xfrm>
             <a:off x="7799832" y="1801368"/>
-            <a:ext cx="3145536" cy="758952"/>
+            <a:ext cx="3145536" cy="688543"/>
           </a:xfrm>
           <a:prstGeom prst="rect">
             <a:avLst/>
@@ -16320,12 +16968,12 @@
         </p:nvSpPr>
         <p:spPr>
           <a:xfrm>
-            <a:off x="7635240" y="2788920"/>
-            <a:ext cx="3474720" cy="1536192"/>
+            <a:off x="7635240" y="2718511"/>
+            <a:ext cx="3474720" cy="1328623"/>
           </a:xfrm>
           <a:prstGeom prst="roundRect">
             <a:avLst>
-              <a:gd name="adj" fmla="val 7143"/>
+              <a:gd name="adj" fmla="val 8259"/>
             </a:avLst>
           </a:prstGeom>
           <a:solidFill>
@@ -16347,7 +16995,7 @@
         </p:nvSpPr>
         <p:spPr>
           <a:xfrm>
-            <a:off x="7799832" y="2935224"/>
+            <a:off x="7799832" y="2864815"/>
             <a:ext cx="3145536" cy="256032"/>
           </a:xfrm>
           <a:prstGeom prst="rect">
@@ -16386,8 +17034,8 @@
         </p:nvSpPr>
         <p:spPr>
           <a:xfrm>
-            <a:off x="7818120" y="3300984"/>
-            <a:ext cx="3090672" cy="877824"/>
+            <a:off x="7818120" y="3230575"/>
+            <a:ext cx="3090672" cy="670255"/>
           </a:xfrm>
           <a:prstGeom prst="rect">
             <a:avLst/>
@@ -16461,12 +17109,12 @@
         </p:nvSpPr>
         <p:spPr>
           <a:xfrm>
-            <a:off x="7635240" y="4498848"/>
-            <a:ext cx="3474720" cy="1143000"/>
+            <a:off x="7635240" y="4184294"/>
+            <a:ext cx="3474720" cy="1466698"/>
           </a:xfrm>
           <a:prstGeom prst="roundRect">
             <a:avLst>
-              <a:gd name="adj" fmla="val 9600"/>
+              <a:gd name="adj" fmla="val 7481"/>
             </a:avLst>
           </a:prstGeom>
           <a:solidFill>
@@ -16488,7 +17136,7 @@
         </p:nvSpPr>
         <p:spPr>
           <a:xfrm>
-            <a:off x="7799832" y="4645152"/>
+            <a:off x="7799832" y="4330598"/>
             <a:ext cx="3145536" cy="256032"/>
           </a:xfrm>
           <a:prstGeom prst="rect">
@@ -16527,8 +17175,8 @@
         </p:nvSpPr>
         <p:spPr>
           <a:xfrm>
-            <a:off x="7799832" y="4974336"/>
-            <a:ext cx="3145536" cy="576072"/>
+            <a:off x="7799832" y="4659782"/>
+            <a:ext cx="3145536" cy="899770"/>
           </a:xfrm>
           <a:prstGeom prst="rect">
             <a:avLst/>
@@ -16554,7 +17202,7 @@
                 <a:ea typeface="Aptos" pitchFamily="34" charset="-122"/>
                 <a:cs typeface="Aptos" pitchFamily="34" charset="-120"/>
               </a:rPr>
-              <a:t>Connect the concept to public health purpose, responsible use, required safeguards, documentation, and the next action a.</a:t>
+              <a:t>Connect the concept to public health purpose, responsible use, required safeguards, documentation, and the next action a department should take.</a:t>
             </a:r>
             <a:endParaRPr lang="en-US" sz="1320" dirty="0"/>
           </a:p>

--- a/downloads/presentations/modules/gov-420.pptx
+++ b/downloads/presentations/modules/gov-420.pptx
@@ -3243,8 +3243,8 @@
         </p:nvSpPr>
         <p:spPr>
           <a:xfrm>
-            <a:off x="868680" y="1508760"/>
-            <a:ext cx="6309360" cy="4160520"/>
+            <a:off x="822960" y="1463040"/>
+            <a:ext cx="6565392" cy="4343400"/>
           </a:xfrm>
           <a:prstGeom prst="rect">
             <a:avLst/>
@@ -3262,7 +3262,7 @@
               <a:buNone/>
             </a:pPr>
             <a:r>
-              <a:rPr lang="en-US" sz="2100" dirty="0">
+              <a:rPr lang="en-US" sz="1920" dirty="0">
                 <a:solidFill>
                   <a:srgbClr val="003A63"/>
                 </a:solidFill>
@@ -3272,14 +3272,14 @@
               </a:rPr>
               <a:t>• Transparency reporting should be risk-based.</a:t>
             </a:r>
-            <a:endParaRPr lang="en-US" sz="2100" dirty="0"/>
-          </a:p>
-          <a:p>
-            <a:pPr indent="0" marL="0">
-              <a:buNone/>
-            </a:pPr>
-            <a:r>
-              <a:rPr lang="en-US" sz="2100" dirty="0">
+            <a:endParaRPr lang="en-US" sz="1920" dirty="0"/>
+          </a:p>
+          <a:p>
+            <a:pPr indent="0" marL="0">
+              <a:buNone/>
+            </a:pPr>
+            <a:r>
+              <a:rPr lang="en-US" sz="1920" dirty="0">
                 <a:solidFill>
                   <a:srgbClr val="003A63"/>
                 </a:solidFill>
@@ -3289,14 +3289,14 @@
               </a:rPr>
               <a:t>• Low-risk internal tools may be documented in an internal registry.</a:t>
             </a:r>
-            <a:endParaRPr lang="en-US" sz="2100" dirty="0"/>
-          </a:p>
-          <a:p>
-            <a:pPr indent="0" marL="0">
-              <a:buNone/>
-            </a:pPr>
-            <a:r>
-              <a:rPr lang="en-US" sz="2100" dirty="0">
+            <a:endParaRPr lang="en-US" sz="1920" dirty="0"/>
+          </a:p>
+          <a:p>
+            <a:pPr indent="0" marL="0">
+              <a:buNone/>
+            </a:pPr>
+            <a:r>
+              <a:rPr lang="en-US" sz="1920" dirty="0">
                 <a:solidFill>
                   <a:srgbClr val="003A63"/>
                 </a:solidFill>
@@ -3304,9 +3304,9 @@
                 <a:ea typeface="Aptos" pitchFamily="34" charset="-122"/>
                 <a:cs typeface="Aptos" pitchFamily="34" charset="-120"/>
               </a:rPr>
-              <a:t>• Tools that influence public communication, prioritization, access, enforcement, or.</a:t>
-            </a:r>
-            <a:endParaRPr lang="en-US" sz="2100" dirty="0"/>
+              <a:t>• Tools that influence public communication, prioritization, access,.</a:t>
+            </a:r>
+            <a:endParaRPr lang="en-US" sz="1920" dirty="0"/>
           </a:p>
         </p:txBody>
       </p:sp>
@@ -3318,12 +3318,12 @@
         </p:nvSpPr>
         <p:spPr>
           <a:xfrm>
-            <a:off x="7635240" y="1325880"/>
-            <a:ext cx="3474720" cy="1207008"/>
+            <a:off x="7543800" y="1325880"/>
+            <a:ext cx="3611880" cy="1261872"/>
           </a:xfrm>
           <a:prstGeom prst="roundRect">
             <a:avLst>
-              <a:gd name="adj" fmla="val 9091"/>
+              <a:gd name="adj" fmla="val 8696"/>
             </a:avLst>
           </a:prstGeom>
           <a:solidFill>
@@ -3345,8 +3345,8 @@
         </p:nvSpPr>
         <p:spPr>
           <a:xfrm>
-            <a:off x="7799832" y="1472184"/>
-            <a:ext cx="3145536" cy="256032"/>
+            <a:off x="7708392" y="1453896"/>
+            <a:ext cx="3282696" cy="228600"/>
           </a:xfrm>
           <a:prstGeom prst="rect">
             <a:avLst/>
@@ -3362,7 +3362,7 @@
               <a:buNone/>
             </a:pPr>
             <a:r>
-              <a:rPr lang="en-US" sz="1300" b="1" dirty="0">
+              <a:rPr lang="en-US" sz="1220" b="1" dirty="0">
                 <a:solidFill>
                   <a:srgbClr val="0068B7"/>
                 </a:solidFill>
@@ -3372,7 +3372,7 @@
               </a:rPr>
               <a:t>Governance lens</a:t>
             </a:r>
-            <a:endParaRPr lang="en-US" sz="1300" dirty="0"/>
+            <a:endParaRPr lang="en-US" sz="1220" dirty="0"/>
           </a:p>
         </p:txBody>
       </p:sp>
@@ -3384,8 +3384,8 @@
         </p:nvSpPr>
         <p:spPr>
           <a:xfrm>
-            <a:off x="7799832" y="1801368"/>
-            <a:ext cx="3145536" cy="640080"/>
+            <a:off x="7708392" y="1764792"/>
+            <a:ext cx="3282696" cy="749808"/>
           </a:xfrm>
           <a:prstGeom prst="rect">
             <a:avLst/>
@@ -3403,7 +3403,7 @@
               <a:buNone/>
             </a:pPr>
             <a:r>
-              <a:rPr lang="en-US" sz="1320" dirty="0">
+              <a:rPr lang="en-US" sz="1220" dirty="0">
                 <a:solidFill>
                   <a:srgbClr val="17364A"/>
                 </a:solidFill>
@@ -3413,7 +3413,7 @@
               </a:rPr>
               <a:t>Transparency reporting should be risk-based.</a:t>
             </a:r>
-            <a:endParaRPr lang="en-US" sz="1320" dirty="0"/>
+            <a:endParaRPr lang="en-US" sz="1220" dirty="0"/>
           </a:p>
         </p:txBody>
       </p:sp>
@@ -3425,12 +3425,12 @@
         </p:nvSpPr>
         <p:spPr>
           <a:xfrm>
-            <a:off x="7635240" y="2670048"/>
-            <a:ext cx="3474720" cy="1377086"/>
+            <a:off x="7543800" y="2724912"/>
+            <a:ext cx="3611880" cy="1527048"/>
           </a:xfrm>
           <a:prstGeom prst="roundRect">
             <a:avLst>
-              <a:gd name="adj" fmla="val 7968"/>
+              <a:gd name="adj" fmla="val 7186"/>
             </a:avLst>
           </a:prstGeom>
           <a:solidFill>
@@ -3452,8 +3452,8 @@
         </p:nvSpPr>
         <p:spPr>
           <a:xfrm>
-            <a:off x="7799832" y="2816352"/>
-            <a:ext cx="3145536" cy="256032"/>
+            <a:off x="7708392" y="2852928"/>
+            <a:ext cx="3282696" cy="228600"/>
           </a:xfrm>
           <a:prstGeom prst="rect">
             <a:avLst/>
@@ -3469,7 +3469,7 @@
               <a:buNone/>
             </a:pPr>
             <a:r>
-              <a:rPr lang="en-US" sz="1300" b="1" dirty="0">
+              <a:rPr lang="en-US" sz="1220" b="1" dirty="0">
                 <a:solidFill>
                   <a:srgbClr val="0068B7"/>
                 </a:solidFill>
@@ -3479,7 +3479,7 @@
               </a:rPr>
               <a:t>Concept checkpoints</a:t>
             </a:r>
-            <a:endParaRPr lang="en-US" sz="1300" dirty="0"/>
+            <a:endParaRPr lang="en-US" sz="1220" dirty="0"/>
           </a:p>
         </p:txBody>
       </p:sp>
@@ -3491,8 +3491,8 @@
         </p:nvSpPr>
         <p:spPr>
           <a:xfrm>
-            <a:off x="7818120" y="3182112"/>
-            <a:ext cx="3090672" cy="718718"/>
+            <a:off x="7726680" y="3182112"/>
+            <a:ext cx="3227832" cy="960120"/>
           </a:xfrm>
           <a:prstGeom prst="rect">
             <a:avLst/>
@@ -3510,7 +3510,7 @@
               <a:buNone/>
             </a:pPr>
             <a:r>
-              <a:rPr lang="en-US" sz="1220" dirty="0">
+              <a:rPr lang="en-US" sz="1140" dirty="0">
                 <a:solidFill>
                   <a:srgbClr val="17364A"/>
                 </a:solidFill>
@@ -3518,16 +3518,16 @@
                 <a:ea typeface="Aptos" pitchFamily="34" charset="-122"/>
                 <a:cs typeface="Aptos" pitchFamily="34" charset="-120"/>
               </a:rPr>
-              <a:t>Tools that influence public communication, prioritization, access,.</a:t>
-            </a:r>
-            <a:endParaRPr lang="en-US" sz="1220" dirty="0"/>
-          </a:p>
-          <a:p>
-            <a:pPr indent="0" marL="0">
-              <a:buNone/>
-            </a:pPr>
-            <a:r>
-              <a:rPr lang="en-US" sz="1220" dirty="0">
+              <a:t>Tools that influence public communication,.</a:t>
+            </a:r>
+            <a:endParaRPr lang="en-US" sz="1140" dirty="0"/>
+          </a:p>
+          <a:p>
+            <a:pPr indent="0" marL="0">
+              <a:buNone/>
+            </a:pPr>
+            <a:r>
+              <a:rPr lang="en-US" sz="1140" dirty="0">
                 <a:solidFill>
                   <a:srgbClr val="17364A"/>
                 </a:solidFill>
@@ -3535,16 +3535,16 @@
                 <a:ea typeface="Aptos" pitchFamily="34" charset="-122"/>
                 <a:cs typeface="Aptos" pitchFamily="34" charset="-120"/>
               </a:rPr>
-              <a:t>High-impact tools may require more detailed documentation, such as.</a:t>
-            </a:r>
-            <a:endParaRPr lang="en-US" sz="1220" dirty="0"/>
-          </a:p>
-          <a:p>
-            <a:pPr indent="0" marL="0">
-              <a:buNone/>
-            </a:pPr>
-            <a:r>
-              <a:rPr lang="en-US" sz="1220" dirty="0">
+              <a:t>High-impact tools may require more detailed.</a:t>
+            </a:r>
+            <a:endParaRPr lang="en-US" sz="1140" dirty="0"/>
+          </a:p>
+          <a:p>
+            <a:pPr indent="0" marL="0">
+              <a:buNone/>
+            </a:pPr>
+            <a:r>
+              <a:rPr lang="en-US" sz="1140" dirty="0">
                 <a:solidFill>
                   <a:srgbClr val="17364A"/>
                 </a:solidFill>
@@ -3554,7 +3554,7 @@
               </a:rPr>
               <a:t>The reporting process should be accessible.</a:t>
             </a:r>
-            <a:endParaRPr lang="en-US" sz="1220" dirty="0"/>
+            <a:endParaRPr lang="en-US" sz="1140" dirty="0"/>
           </a:p>
         </p:txBody>
       </p:sp>
@@ -3566,12 +3566,12 @@
         </p:nvSpPr>
         <p:spPr>
           <a:xfrm>
-            <a:off x="7635240" y="4184294"/>
-            <a:ext cx="3474720" cy="1466698"/>
+            <a:off x="7543800" y="4389120"/>
+            <a:ext cx="3611880" cy="1261872"/>
           </a:xfrm>
           <a:prstGeom prst="roundRect">
             <a:avLst>
-              <a:gd name="adj" fmla="val 7481"/>
+              <a:gd name="adj" fmla="val 8696"/>
             </a:avLst>
           </a:prstGeom>
           <a:solidFill>
@@ -3593,8 +3593,8 @@
         </p:nvSpPr>
         <p:spPr>
           <a:xfrm>
-            <a:off x="7799832" y="4330598"/>
-            <a:ext cx="3145536" cy="256032"/>
+            <a:off x="7708392" y="4517136"/>
+            <a:ext cx="3282696" cy="228600"/>
           </a:xfrm>
           <a:prstGeom prst="rect">
             <a:avLst/>
@@ -3610,7 +3610,7 @@
               <a:buNone/>
             </a:pPr>
             <a:r>
-              <a:rPr lang="en-US" sz="1300" b="1" dirty="0">
+              <a:rPr lang="en-US" sz="1220" b="1" dirty="0">
                 <a:solidFill>
                   <a:srgbClr val="0068B7"/>
                 </a:solidFill>
@@ -3620,7 +3620,7 @@
               </a:rPr>
               <a:t>What to document</a:t>
             </a:r>
-            <a:endParaRPr lang="en-US" sz="1300" dirty="0"/>
+            <a:endParaRPr lang="en-US" sz="1220" dirty="0"/>
           </a:p>
         </p:txBody>
       </p:sp>
@@ -3632,8 +3632,8 @@
         </p:nvSpPr>
         <p:spPr>
           <a:xfrm>
-            <a:off x="7799832" y="4659782"/>
-            <a:ext cx="3145536" cy="899770"/>
+            <a:off x="7708392" y="4828032"/>
+            <a:ext cx="3282696" cy="749808"/>
           </a:xfrm>
           <a:prstGeom prst="rect">
             <a:avLst/>
@@ -3651,7 +3651,7 @@
               <a:buNone/>
             </a:pPr>
             <a:r>
-              <a:rPr lang="en-US" sz="1320" dirty="0">
+              <a:rPr lang="en-US" sz="1220" dirty="0">
                 <a:solidFill>
                   <a:srgbClr val="17364A"/>
                 </a:solidFill>
@@ -3659,9 +3659,9 @@
                 <a:ea typeface="Aptos" pitchFamily="34" charset="-122"/>
                 <a:cs typeface="Aptos" pitchFamily="34" charset="-120"/>
               </a:rPr>
-              <a:t>Translate this concept into clear decision rights, review steps, documentation expectations, and escalation paths before an AI-supported workflow is approved.</a:t>
-            </a:r>
-            <a:endParaRPr lang="en-US" sz="1320" dirty="0"/>
+              <a:t>Translate this concept into clear decision rights, review steps, documentation.</a:t>
+            </a:r>
+            <a:endParaRPr lang="en-US" sz="1220" dirty="0"/>
           </a:p>
         </p:txBody>
       </p:sp>
@@ -3952,8 +3952,8 @@
         </p:nvSpPr>
         <p:spPr>
           <a:xfrm>
-            <a:off x="868680" y="1508760"/>
-            <a:ext cx="6309360" cy="4160520"/>
+            <a:off x="822960" y="1463040"/>
+            <a:ext cx="6565392" cy="4343400"/>
           </a:xfrm>
           <a:prstGeom prst="rect">
             <a:avLst/>
@@ -3971,7 +3971,7 @@
               <a:buNone/>
             </a:pPr>
             <a:r>
-              <a:rPr lang="en-US" sz="2100" dirty="0">
+              <a:rPr lang="en-US" sz="1920" dirty="0">
                 <a:solidFill>
                   <a:srgbClr val="003A63"/>
                 </a:solidFill>
@@ -3981,14 +3981,14 @@
               </a:rPr>
               <a:t>• One risk is transparency theater.</a:t>
             </a:r>
-            <a:endParaRPr lang="en-US" sz="2100" dirty="0"/>
-          </a:p>
-          <a:p>
-            <a:pPr indent="0" marL="0">
-              <a:buNone/>
-            </a:pPr>
-            <a:r>
-              <a:rPr lang="en-US" sz="2100" dirty="0">
+            <a:endParaRPr lang="en-US" sz="1920" dirty="0"/>
+          </a:p>
+          <a:p>
+            <a:pPr indent="0" marL="0">
+              <a:buNone/>
+            </a:pPr>
+            <a:r>
+              <a:rPr lang="en-US" sz="1920" dirty="0">
                 <a:solidFill>
                   <a:srgbClr val="003A63"/>
                 </a:solidFill>
@@ -3996,16 +3996,16 @@
                 <a:ea typeface="Aptos" pitchFamily="34" charset="-122"/>
                 <a:cs typeface="Aptos" pitchFamily="34" charset="-120"/>
               </a:rPr>
-              <a:t>• Agencies may publish broad statements about responsible AI without disclosing actual uses,.</a:t>
-            </a:r>
-            <a:endParaRPr lang="en-US" sz="2100" dirty="0"/>
-          </a:p>
-          <a:p>
-            <a:pPr indent="0" marL="0">
-              <a:buNone/>
-            </a:pPr>
-            <a:r>
-              <a:rPr lang="en-US" sz="2100" dirty="0">
+              <a:t>• Agencies may publish broad statements about responsible AI without.</a:t>
+            </a:r>
+            <a:endParaRPr lang="en-US" sz="1920" dirty="0"/>
+          </a:p>
+          <a:p>
+            <a:pPr indent="0" marL="0">
+              <a:buNone/>
+            </a:pPr>
+            <a:r>
+              <a:rPr lang="en-US" sz="1920" dirty="0">
                 <a:solidFill>
                   <a:srgbClr val="003A63"/>
                 </a:solidFill>
@@ -4013,9 +4013,9 @@
                 <a:ea typeface="Aptos" pitchFamily="34" charset="-122"/>
                 <a:cs typeface="Aptos" pitchFamily="34" charset="-120"/>
               </a:rPr>
-              <a:t>• A guardrail is to maintain an AI use registry with concrete information about approved and.</a:t>
-            </a:r>
-            <a:endParaRPr lang="en-US" sz="2100" dirty="0"/>
+              <a:t>• A guardrail is to maintain an AI use registry with concrete information.</a:t>
+            </a:r>
+            <a:endParaRPr lang="en-US" sz="1920" dirty="0"/>
           </a:p>
         </p:txBody>
       </p:sp>
@@ -4027,12 +4027,12 @@
         </p:nvSpPr>
         <p:spPr>
           <a:xfrm>
-            <a:off x="7635240" y="1325880"/>
-            <a:ext cx="3474720" cy="1207008"/>
+            <a:off x="7543800" y="1325880"/>
+            <a:ext cx="3611880" cy="1261872"/>
           </a:xfrm>
           <a:prstGeom prst="roundRect">
             <a:avLst>
-              <a:gd name="adj" fmla="val 9091"/>
+              <a:gd name="adj" fmla="val 8696"/>
             </a:avLst>
           </a:prstGeom>
           <a:solidFill>
@@ -4054,8 +4054,8 @@
         </p:nvSpPr>
         <p:spPr>
           <a:xfrm>
-            <a:off x="7799832" y="1472184"/>
-            <a:ext cx="3145536" cy="256032"/>
+            <a:off x="7708392" y="1453896"/>
+            <a:ext cx="3282696" cy="228600"/>
           </a:xfrm>
           <a:prstGeom prst="rect">
             <a:avLst/>
@@ -4071,7 +4071,7 @@
               <a:buNone/>
             </a:pPr>
             <a:r>
-              <a:rPr lang="en-US" sz="1300" b="1" dirty="0">
+              <a:rPr lang="en-US" sz="1220" b="1" dirty="0">
                 <a:solidFill>
                   <a:srgbClr val="0068B7"/>
                 </a:solidFill>
@@ -4081,7 +4081,7 @@
               </a:rPr>
               <a:t>Governance lens</a:t>
             </a:r>
-            <a:endParaRPr lang="en-US" sz="1300" dirty="0"/>
+            <a:endParaRPr lang="en-US" sz="1220" dirty="0"/>
           </a:p>
         </p:txBody>
       </p:sp>
@@ -4093,8 +4093,8 @@
         </p:nvSpPr>
         <p:spPr>
           <a:xfrm>
-            <a:off x="7799832" y="1801368"/>
-            <a:ext cx="3145536" cy="640080"/>
+            <a:off x="7708392" y="1764792"/>
+            <a:ext cx="3282696" cy="749808"/>
           </a:xfrm>
           <a:prstGeom prst="rect">
             <a:avLst/>
@@ -4112,7 +4112,7 @@
               <a:buNone/>
             </a:pPr>
             <a:r>
-              <a:rPr lang="en-US" sz="1320" dirty="0">
+              <a:rPr lang="en-US" sz="1220" dirty="0">
                 <a:solidFill>
                   <a:srgbClr val="17364A"/>
                 </a:solidFill>
@@ -4122,7 +4122,7 @@
               </a:rPr>
               <a:t>One risk is transparency theater.</a:t>
             </a:r>
-            <a:endParaRPr lang="en-US" sz="1320" dirty="0"/>
+            <a:endParaRPr lang="en-US" sz="1220" dirty="0"/>
           </a:p>
         </p:txBody>
       </p:sp>
@@ -4134,12 +4134,12 @@
         </p:nvSpPr>
         <p:spPr>
           <a:xfrm>
-            <a:off x="7635240" y="2670048"/>
-            <a:ext cx="3474720" cy="1536192"/>
+            <a:off x="7543800" y="2724912"/>
+            <a:ext cx="3611880" cy="1527048"/>
           </a:xfrm>
           <a:prstGeom prst="roundRect">
             <a:avLst>
-              <a:gd name="adj" fmla="val 7143"/>
+              <a:gd name="adj" fmla="val 7186"/>
             </a:avLst>
           </a:prstGeom>
           <a:solidFill>
@@ -4161,8 +4161,8 @@
         </p:nvSpPr>
         <p:spPr>
           <a:xfrm>
-            <a:off x="7799832" y="2816352"/>
-            <a:ext cx="3145536" cy="256032"/>
+            <a:off x="7708392" y="2852928"/>
+            <a:ext cx="3282696" cy="228600"/>
           </a:xfrm>
           <a:prstGeom prst="rect">
             <a:avLst/>
@@ -4178,7 +4178,7 @@
               <a:buNone/>
             </a:pPr>
             <a:r>
-              <a:rPr lang="en-US" sz="1300" b="1" dirty="0">
+              <a:rPr lang="en-US" sz="1220" b="1" dirty="0">
                 <a:solidFill>
                   <a:srgbClr val="0068B7"/>
                 </a:solidFill>
@@ -4188,7 +4188,7 @@
               </a:rPr>
               <a:t>Concept checkpoints</a:t>
             </a:r>
-            <a:endParaRPr lang="en-US" sz="1300" dirty="0"/>
+            <a:endParaRPr lang="en-US" sz="1220" dirty="0"/>
           </a:p>
         </p:txBody>
       </p:sp>
@@ -4200,8 +4200,8 @@
         </p:nvSpPr>
         <p:spPr>
           <a:xfrm>
-            <a:off x="7818120" y="3182112"/>
-            <a:ext cx="3090672" cy="877824"/>
+            <a:off x="7726680" y="3182112"/>
+            <a:ext cx="3227832" cy="960120"/>
           </a:xfrm>
           <a:prstGeom prst="rect">
             <a:avLst/>
@@ -4219,7 +4219,7 @@
               <a:buNone/>
             </a:pPr>
             <a:r>
-              <a:rPr lang="en-US" sz="1220" dirty="0">
+              <a:rPr lang="en-US" sz="1140" dirty="0">
                 <a:solidFill>
                   <a:srgbClr val="17364A"/>
                 </a:solidFill>
@@ -4227,16 +4227,16 @@
                 <a:ea typeface="Aptos" pitchFamily="34" charset="-122"/>
                 <a:cs typeface="Aptos" pitchFamily="34" charset="-120"/>
               </a:rPr>
-              <a:t>Agencies may publish broad statements about responsible AI without.</a:t>
-            </a:r>
-            <a:endParaRPr lang="en-US" sz="1220" dirty="0"/>
-          </a:p>
-          <a:p>
-            <a:pPr indent="0" marL="0">
-              <a:buNone/>
-            </a:pPr>
-            <a:r>
-              <a:rPr lang="en-US" sz="1220" dirty="0">
+              <a:t>Agencies may publish broad statements about.</a:t>
+            </a:r>
+            <a:endParaRPr lang="en-US" sz="1140" dirty="0"/>
+          </a:p>
+          <a:p>
+            <a:pPr indent="0" marL="0">
+              <a:buNone/>
+            </a:pPr>
+            <a:r>
+              <a:rPr lang="en-US" sz="1140" dirty="0">
                 <a:solidFill>
                   <a:srgbClr val="17364A"/>
                 </a:solidFill>
@@ -4244,16 +4244,16 @@
                 <a:ea typeface="Aptos" pitchFamily="34" charset="-122"/>
                 <a:cs typeface="Aptos" pitchFamily="34" charset="-120"/>
               </a:rPr>
-              <a:t>A guardrail is to maintain an AI use registry with concrete.</a:t>
-            </a:r>
-            <a:endParaRPr lang="en-US" sz="1220" dirty="0"/>
-          </a:p>
-          <a:p>
-            <a:pPr indent="0" marL="0">
-              <a:buNone/>
-            </a:pPr>
-            <a:r>
-              <a:rPr lang="en-US" sz="1220" dirty="0">
+              <a:t>A guardrail is to maintain an AI use registry with.</a:t>
+            </a:r>
+            <a:endParaRPr lang="en-US" sz="1140" dirty="0"/>
+          </a:p>
+          <a:p>
+            <a:pPr indent="0" marL="0">
+              <a:buNone/>
+            </a:pPr>
+            <a:r>
+              <a:rPr lang="en-US" sz="1140" dirty="0">
                 <a:solidFill>
                   <a:srgbClr val="17364A"/>
                 </a:solidFill>
@@ -4261,9 +4261,9 @@
                 <a:ea typeface="Aptos" pitchFamily="34" charset="-122"/>
                 <a:cs typeface="Aptos" pitchFamily="34" charset="-120"/>
               </a:rPr>
-              <a:t>Another risk is over-disclosure of sensitive details.</a:t>
-            </a:r>
-            <a:endParaRPr lang="en-US" sz="1220" dirty="0"/>
+              <a:t>Another risk is over-disclosure of sensitive.</a:t>
+            </a:r>
+            <a:endParaRPr lang="en-US" sz="1140" dirty="0"/>
           </a:p>
         </p:txBody>
       </p:sp>
@@ -4275,12 +4275,12 @@
         </p:nvSpPr>
         <p:spPr>
           <a:xfrm>
-            <a:off x="7635240" y="4343400"/>
-            <a:ext cx="3474720" cy="1255471"/>
+            <a:off x="7543800" y="4389120"/>
+            <a:ext cx="3611880" cy="1261872"/>
           </a:xfrm>
           <a:prstGeom prst="roundRect">
             <a:avLst>
-              <a:gd name="adj" fmla="val 8740"/>
+              <a:gd name="adj" fmla="val 8696"/>
             </a:avLst>
           </a:prstGeom>
           <a:solidFill>
@@ -4302,8 +4302,8 @@
         </p:nvSpPr>
         <p:spPr>
           <a:xfrm>
-            <a:off x="7799832" y="4489704"/>
-            <a:ext cx="3145536" cy="256032"/>
+            <a:off x="7708392" y="4517136"/>
+            <a:ext cx="3282696" cy="228600"/>
           </a:xfrm>
           <a:prstGeom prst="rect">
             <a:avLst/>
@@ -4319,7 +4319,7 @@
               <a:buNone/>
             </a:pPr>
             <a:r>
-              <a:rPr lang="en-US" sz="1300" b="1" dirty="0">
+              <a:rPr lang="en-US" sz="1220" b="1" dirty="0">
                 <a:solidFill>
                   <a:srgbClr val="0068B7"/>
                 </a:solidFill>
@@ -4329,7 +4329,7 @@
               </a:rPr>
               <a:t>What to document</a:t>
             </a:r>
-            <a:endParaRPr lang="en-US" sz="1300" dirty="0"/>
+            <a:endParaRPr lang="en-US" sz="1220" dirty="0"/>
           </a:p>
         </p:txBody>
       </p:sp>
@@ -4341,8 +4341,8 @@
         </p:nvSpPr>
         <p:spPr>
           <a:xfrm>
-            <a:off x="7799832" y="4818888"/>
-            <a:ext cx="3145536" cy="688543"/>
+            <a:off x="7708392" y="4828032"/>
+            <a:ext cx="3282696" cy="749808"/>
           </a:xfrm>
           <a:prstGeom prst="rect">
             <a:avLst/>
@@ -4360,7 +4360,7 @@
               <a:buNone/>
             </a:pPr>
             <a:r>
-              <a:rPr lang="en-US" sz="1320" dirty="0">
+              <a:rPr lang="en-US" sz="1220" dirty="0">
                 <a:solidFill>
                   <a:srgbClr val="17364A"/>
                 </a:solidFill>
@@ -4368,9 +4368,9 @@
                 <a:ea typeface="Aptos" pitchFamily="34" charset="-122"/>
                 <a:cs typeface="Aptos" pitchFamily="34" charset="-120"/>
               </a:rPr>
-              <a:t>Identify what could go wrong, who could be affected, what safeguards are needed, and what evidence should be reviewed before use.</a:t>
-            </a:r>
-            <a:endParaRPr lang="en-US" sz="1320" dirty="0"/>
+              <a:t>Identify what could go wrong, who could be affected, what safeguards are needed,.</a:t>
+            </a:r>
+            <a:endParaRPr lang="en-US" sz="1220" dirty="0"/>
           </a:p>
         </p:txBody>
       </p:sp>
@@ -4661,8 +4661,8 @@
         </p:nvSpPr>
         <p:spPr>
           <a:xfrm>
-            <a:off x="868680" y="1508760"/>
-            <a:ext cx="6309360" cy="4160520"/>
+            <a:off x="822960" y="1463040"/>
+            <a:ext cx="6565392" cy="4343400"/>
           </a:xfrm>
           <a:prstGeom prst="rect">
             <a:avLst/>
@@ -4680,7 +4680,7 @@
               <a:buNone/>
             </a:pPr>
             <a:r>
-              <a:rPr lang="en-US" sz="2100" dirty="0">
+              <a:rPr lang="en-US" sz="1920" dirty="0">
                 <a:solidFill>
                   <a:srgbClr val="003A63"/>
                 </a:solidFill>
@@ -4688,16 +4688,16 @@
                 <a:ea typeface="Aptos" pitchFamily="34" charset="-122"/>
                 <a:cs typeface="Aptos" pitchFamily="34" charset="-120"/>
               </a:rPr>
-              <a:t>• Generative AI transparency may explain when AI assists drafting and how human review occurs.</a:t>
-            </a:r>
-            <a:endParaRPr lang="en-US" sz="2100" dirty="0"/>
-          </a:p>
-          <a:p>
-            <a:pPr indent="0" marL="0">
-              <a:buNone/>
-            </a:pPr>
-            <a:r>
-              <a:rPr lang="en-US" sz="2100" dirty="0">
+              <a:t>• Generative AI transparency may explain when AI assists drafting and how.</a:t>
+            </a:r>
+            <a:endParaRPr lang="en-US" sz="1920" dirty="0"/>
+          </a:p>
+          <a:p>
+            <a:pPr indent="0" marL="0">
+              <a:buNone/>
+            </a:pPr>
+            <a:r>
+              <a:rPr lang="en-US" sz="1920" dirty="0">
                 <a:solidFill>
                   <a:srgbClr val="003A63"/>
                 </a:solidFill>
@@ -4705,16 +4705,16 @@
                 <a:ea typeface="Aptos" pitchFamily="34" charset="-122"/>
                 <a:cs typeface="Aptos" pitchFamily="34" charset="-120"/>
               </a:rPr>
-              <a:t>• Predictive analytics transparency may explain what the model supports, what decisions remain.</a:t>
-            </a:r>
-            <a:endParaRPr lang="en-US" sz="2100" dirty="0"/>
-          </a:p>
-          <a:p>
-            <a:pPr indent="0" marL="0">
-              <a:buNone/>
-            </a:pPr>
-            <a:r>
-              <a:rPr lang="en-US" sz="2100" dirty="0">
+              <a:t>• Predictive analytics transparency may explain what the model supports, what.</a:t>
+            </a:r>
+            <a:endParaRPr lang="en-US" sz="1920" dirty="0"/>
+          </a:p>
+          <a:p>
+            <a:pPr indent="0" marL="0">
+              <a:buNone/>
+            </a:pPr>
+            <a:r>
+              <a:rPr lang="en-US" sz="1920" dirty="0">
                 <a:solidFill>
                   <a:srgbClr val="003A63"/>
                 </a:solidFill>
@@ -4722,9 +4722,9 @@
                 <a:ea typeface="Aptos" pitchFamily="34" charset="-122"/>
                 <a:cs typeface="Aptos" pitchFamily="34" charset="-120"/>
               </a:rPr>
-              <a:t>• Agentic AI transparency may explain what actions are automated, what approvals are required,.</a:t>
-            </a:r>
-            <a:endParaRPr lang="en-US" sz="2100" dirty="0"/>
+              <a:t>• Agentic AI transparency may explain what actions are automated, what.</a:t>
+            </a:r>
+            <a:endParaRPr lang="en-US" sz="1920" dirty="0"/>
           </a:p>
         </p:txBody>
       </p:sp>
@@ -4736,12 +4736,12 @@
         </p:nvSpPr>
         <p:spPr>
           <a:xfrm>
-            <a:off x="7635240" y="1325880"/>
-            <a:ext cx="3474720" cy="1207008"/>
+            <a:off x="7543800" y="1325880"/>
+            <a:ext cx="3611880" cy="1261872"/>
           </a:xfrm>
           <a:prstGeom prst="roundRect">
             <a:avLst>
-              <a:gd name="adj" fmla="val 9091"/>
+              <a:gd name="adj" fmla="val 8696"/>
             </a:avLst>
           </a:prstGeom>
           <a:solidFill>
@@ -4763,8 +4763,8 @@
         </p:nvSpPr>
         <p:spPr>
           <a:xfrm>
-            <a:off x="7799832" y="1472184"/>
-            <a:ext cx="3145536" cy="256032"/>
+            <a:off x="7708392" y="1453896"/>
+            <a:ext cx="3282696" cy="228600"/>
           </a:xfrm>
           <a:prstGeom prst="rect">
             <a:avLst/>
@@ -4780,7 +4780,7 @@
               <a:buNone/>
             </a:pPr>
             <a:r>
-              <a:rPr lang="en-US" sz="1300" b="1" dirty="0">
+              <a:rPr lang="en-US" sz="1220" b="1" dirty="0">
                 <a:solidFill>
                   <a:srgbClr val="0068B7"/>
                 </a:solidFill>
@@ -4790,7 +4790,7 @@
               </a:rPr>
               <a:t>Governance lens</a:t>
             </a:r>
-            <a:endParaRPr lang="en-US" sz="1300" dirty="0"/>
+            <a:endParaRPr lang="en-US" sz="1220" dirty="0"/>
           </a:p>
         </p:txBody>
       </p:sp>
@@ -4802,8 +4802,8 @@
         </p:nvSpPr>
         <p:spPr>
           <a:xfrm>
-            <a:off x="7799832" y="1801368"/>
-            <a:ext cx="3145536" cy="640080"/>
+            <a:off x="7708392" y="1764792"/>
+            <a:ext cx="3282696" cy="749808"/>
           </a:xfrm>
           <a:prstGeom prst="rect">
             <a:avLst/>
@@ -4821,7 +4821,7 @@
               <a:buNone/>
             </a:pPr>
             <a:r>
-              <a:rPr lang="en-US" sz="1320" dirty="0">
+              <a:rPr lang="en-US" sz="1220" dirty="0">
                 <a:solidFill>
                   <a:srgbClr val="17364A"/>
                 </a:solidFill>
@@ -4829,9 +4829,9 @@
                 <a:ea typeface="Aptos" pitchFamily="34" charset="-122"/>
                 <a:cs typeface="Aptos" pitchFamily="34" charset="-120"/>
               </a:rPr>
-              <a:t>Generative AI transparency may explain when AI assists drafting and how human review.</a:t>
-            </a:r>
-            <a:endParaRPr lang="en-US" sz="1320" dirty="0"/>
+              <a:t>Generative AI transparency may explain when AI assists drafting and how human.</a:t>
+            </a:r>
+            <a:endParaRPr lang="en-US" sz="1220" dirty="0"/>
           </a:p>
         </p:txBody>
       </p:sp>
@@ -4843,12 +4843,12 @@
         </p:nvSpPr>
         <p:spPr>
           <a:xfrm>
-            <a:off x="7635240" y="2670048"/>
-            <a:ext cx="3474720" cy="1377086"/>
+            <a:off x="7543800" y="2724912"/>
+            <a:ext cx="3611880" cy="1527048"/>
           </a:xfrm>
           <a:prstGeom prst="roundRect">
             <a:avLst>
-              <a:gd name="adj" fmla="val 7968"/>
+              <a:gd name="adj" fmla="val 7186"/>
             </a:avLst>
           </a:prstGeom>
           <a:solidFill>
@@ -4870,8 +4870,8 @@
         </p:nvSpPr>
         <p:spPr>
           <a:xfrm>
-            <a:off x="7799832" y="2816352"/>
-            <a:ext cx="3145536" cy="256032"/>
+            <a:off x="7708392" y="2852928"/>
+            <a:ext cx="3282696" cy="228600"/>
           </a:xfrm>
           <a:prstGeom prst="rect">
             <a:avLst/>
@@ -4887,7 +4887,7 @@
               <a:buNone/>
             </a:pPr>
             <a:r>
-              <a:rPr lang="en-US" sz="1300" b="1" dirty="0">
+              <a:rPr lang="en-US" sz="1220" b="1" dirty="0">
                 <a:solidFill>
                   <a:srgbClr val="0068B7"/>
                 </a:solidFill>
@@ -4897,7 +4897,7 @@
               </a:rPr>
               <a:t>Concept checkpoints</a:t>
             </a:r>
-            <a:endParaRPr lang="en-US" sz="1300" dirty="0"/>
+            <a:endParaRPr lang="en-US" sz="1220" dirty="0"/>
           </a:p>
         </p:txBody>
       </p:sp>
@@ -4909,8 +4909,8 @@
         </p:nvSpPr>
         <p:spPr>
           <a:xfrm>
-            <a:off x="7818120" y="3182112"/>
-            <a:ext cx="3090672" cy="718718"/>
+            <a:off x="7726680" y="3182112"/>
+            <a:ext cx="3227832" cy="960120"/>
           </a:xfrm>
           <a:prstGeom prst="rect">
             <a:avLst/>
@@ -4928,7 +4928,7 @@
               <a:buNone/>
             </a:pPr>
             <a:r>
-              <a:rPr lang="en-US" sz="1220" dirty="0">
+              <a:rPr lang="en-US" sz="1140" dirty="0">
                 <a:solidFill>
                   <a:srgbClr val="17364A"/>
                 </a:solidFill>
@@ -4936,16 +4936,16 @@
                 <a:ea typeface="Aptos" pitchFamily="34" charset="-122"/>
                 <a:cs typeface="Aptos" pitchFamily="34" charset="-120"/>
               </a:rPr>
-              <a:t>Predictive analytics transparency may explain what the model.</a:t>
-            </a:r>
-            <a:endParaRPr lang="en-US" sz="1220" dirty="0"/>
-          </a:p>
-          <a:p>
-            <a:pPr indent="0" marL="0">
-              <a:buNone/>
-            </a:pPr>
-            <a:r>
-              <a:rPr lang="en-US" sz="1220" dirty="0">
+              <a:t>Predictive analytics transparency may explain what.</a:t>
+            </a:r>
+            <a:endParaRPr lang="en-US" sz="1140" dirty="0"/>
+          </a:p>
+          <a:p>
+            <a:pPr indent="0" marL="0">
+              <a:buNone/>
+            </a:pPr>
+            <a:r>
+              <a:rPr lang="en-US" sz="1140" dirty="0">
                 <a:solidFill>
                   <a:srgbClr val="17364A"/>
                 </a:solidFill>
@@ -4953,9 +4953,9 @@
                 <a:ea typeface="Aptos" pitchFamily="34" charset="-122"/>
                 <a:cs typeface="Aptos" pitchFamily="34" charset="-120"/>
               </a:rPr>
-              <a:t>Agentic AI transparency may explain what actions are automated,.</a:t>
-            </a:r>
-            <a:endParaRPr lang="en-US" sz="1220" dirty="0"/>
+              <a:t>Agentic AI transparency may explain what actions.</a:t>
+            </a:r>
+            <a:endParaRPr lang="en-US" sz="1140" dirty="0"/>
           </a:p>
         </p:txBody>
       </p:sp>
@@ -4967,12 +4967,12 @@
         </p:nvSpPr>
         <p:spPr>
           <a:xfrm>
-            <a:off x="7635240" y="4184294"/>
-            <a:ext cx="3474720" cy="1466698"/>
+            <a:off x="7543800" y="4389120"/>
+            <a:ext cx="3611880" cy="1261872"/>
           </a:xfrm>
           <a:prstGeom prst="roundRect">
             <a:avLst>
-              <a:gd name="adj" fmla="val 7481"/>
+              <a:gd name="adj" fmla="val 8696"/>
             </a:avLst>
           </a:prstGeom>
           <a:solidFill>
@@ -4994,8 +4994,8 @@
         </p:nvSpPr>
         <p:spPr>
           <a:xfrm>
-            <a:off x="7799832" y="4330598"/>
-            <a:ext cx="3145536" cy="256032"/>
+            <a:off x="7708392" y="4517136"/>
+            <a:ext cx="3282696" cy="228600"/>
           </a:xfrm>
           <a:prstGeom prst="rect">
             <a:avLst/>
@@ -5011,7 +5011,7 @@
               <a:buNone/>
             </a:pPr>
             <a:r>
-              <a:rPr lang="en-US" sz="1300" b="1" dirty="0">
+              <a:rPr lang="en-US" sz="1220" b="1" dirty="0">
                 <a:solidFill>
                   <a:srgbClr val="0068B7"/>
                 </a:solidFill>
@@ -5021,7 +5021,7 @@
               </a:rPr>
               <a:t>What to document</a:t>
             </a:r>
-            <a:endParaRPr lang="en-US" sz="1300" dirty="0"/>
+            <a:endParaRPr lang="en-US" sz="1220" dirty="0"/>
           </a:p>
         </p:txBody>
       </p:sp>
@@ -5033,8 +5033,8 @@
         </p:nvSpPr>
         <p:spPr>
           <a:xfrm>
-            <a:off x="7799832" y="4659782"/>
-            <a:ext cx="3145536" cy="899770"/>
+            <a:off x="7708392" y="4828032"/>
+            <a:ext cx="3282696" cy="749808"/>
           </a:xfrm>
           <a:prstGeom prst="rect">
             <a:avLst/>
@@ -5052,7 +5052,7 @@
               <a:buNone/>
             </a:pPr>
             <a:r>
-              <a:rPr lang="en-US" sz="1320" dirty="0">
+              <a:rPr lang="en-US" sz="1220" dirty="0">
                 <a:solidFill>
                   <a:srgbClr val="17364A"/>
                 </a:solidFill>
@@ -5060,9 +5060,9 @@
                 <a:ea typeface="Aptos" pitchFamily="34" charset="-122"/>
                 <a:cs typeface="Aptos" pitchFamily="34" charset="-120"/>
               </a:rPr>
-              <a:t>Use the concept to clarify workflow changes, dependencies, staffing, procurement requirements, training needs, and implementation checkpoints.</a:t>
-            </a:r>
-            <a:endParaRPr lang="en-US" sz="1320" dirty="0"/>
+              <a:t>Use the concept to clarify workflow changes, dependencies, staffing, procurement.</a:t>
+            </a:r>
+            <a:endParaRPr lang="en-US" sz="1220" dirty="0"/>
           </a:p>
         </p:txBody>
       </p:sp>
@@ -5353,8 +5353,8 @@
         </p:nvSpPr>
         <p:spPr>
           <a:xfrm>
-            <a:off x="868680" y="1508760"/>
-            <a:ext cx="6309360" cy="4160520"/>
+            <a:off x="822960" y="1463040"/>
+            <a:ext cx="6565392" cy="4343400"/>
           </a:xfrm>
           <a:prstGeom prst="rect">
             <a:avLst/>
@@ -5372,7 +5372,7 @@
               <a:buNone/>
             </a:pPr>
             <a:r>
-              <a:rPr lang="en-US" sz="2100" dirty="0">
+              <a:rPr lang="en-US" sz="1920" dirty="0">
                 <a:solidFill>
                   <a:srgbClr val="003A63"/>
                 </a:solidFill>
@@ -5380,16 +5380,16 @@
                 <a:ea typeface="Aptos" pitchFamily="34" charset="-122"/>
                 <a:cs typeface="Aptos" pitchFamily="34" charset="-120"/>
               </a:rPr>
-              <a:t>• Which current or proposed AI use case in your agency raises this leadership or governance.</a:t>
-            </a:r>
-            <a:endParaRPr lang="en-US" sz="2100" dirty="0"/>
-          </a:p>
-          <a:p>
-            <a:pPr indent="0" marL="0">
-              <a:buNone/>
-            </a:pPr>
-            <a:r>
-              <a:rPr lang="en-US" sz="2100" dirty="0">
+              <a:t>• Which current or proposed AI use case in your agency raises this leadership.</a:t>
+            </a:r>
+            <a:endParaRPr lang="en-US" sz="1920" dirty="0"/>
+          </a:p>
+          <a:p>
+            <a:pPr indent="0" marL="0">
+              <a:buNone/>
+            </a:pPr>
+            <a:r>
+              <a:rPr lang="en-US" sz="1920" dirty="0">
                 <a:solidFill>
                   <a:srgbClr val="003A63"/>
                 </a:solidFill>
@@ -5397,16 +5397,16 @@
                 <a:ea typeface="Aptos" pitchFamily="34" charset="-122"/>
                 <a:cs typeface="Aptos" pitchFamily="34" charset="-120"/>
               </a:rPr>
-              <a:t>• Who currently has authority to make decisions about this issue, and is that authority.</a:t>
-            </a:r>
-            <a:endParaRPr lang="en-US" sz="2100" dirty="0"/>
-          </a:p>
-          <a:p>
-            <a:pPr indent="0" marL="0">
-              <a:buNone/>
-            </a:pPr>
-            <a:r>
-              <a:rPr lang="en-US" sz="2100" dirty="0">
+              <a:t>• Who currently has authority to make decisions about this issue, and is that.</a:t>
+            </a:r>
+            <a:endParaRPr lang="en-US" sz="1920" dirty="0"/>
+          </a:p>
+          <a:p>
+            <a:pPr indent="0" marL="0">
+              <a:buNone/>
+            </a:pPr>
+            <a:r>
+              <a:rPr lang="en-US" sz="1920" dirty="0">
                 <a:solidFill>
                   <a:srgbClr val="003A63"/>
                 </a:solidFill>
@@ -5414,9 +5414,9 @@
                 <a:ea typeface="Aptos" pitchFamily="34" charset="-122"/>
                 <a:cs typeface="Aptos" pitchFamily="34" charset="-120"/>
               </a:rPr>
-              <a:t>• What evidence would governance or leadership need before approving the use case?</a:t>
-            </a:r>
-            <a:endParaRPr lang="en-US" sz="2100" dirty="0"/>
+              <a:t>• What evidence would governance or leadership need before approving the use.</a:t>
+            </a:r>
+            <a:endParaRPr lang="en-US" sz="1920" dirty="0"/>
           </a:p>
         </p:txBody>
       </p:sp>
@@ -5428,12 +5428,12 @@
         </p:nvSpPr>
         <p:spPr>
           <a:xfrm>
-            <a:off x="7635240" y="1325880"/>
-            <a:ext cx="3474720" cy="1255471"/>
+            <a:off x="7543800" y="1325880"/>
+            <a:ext cx="3611880" cy="1261872"/>
           </a:xfrm>
           <a:prstGeom prst="roundRect">
             <a:avLst>
-              <a:gd name="adj" fmla="val 8740"/>
+              <a:gd name="adj" fmla="val 8696"/>
             </a:avLst>
           </a:prstGeom>
           <a:solidFill>
@@ -5455,8 +5455,8 @@
         </p:nvSpPr>
         <p:spPr>
           <a:xfrm>
-            <a:off x="7799832" y="1472184"/>
-            <a:ext cx="3145536" cy="256032"/>
+            <a:off x="7708392" y="1453896"/>
+            <a:ext cx="3282696" cy="228600"/>
           </a:xfrm>
           <a:prstGeom prst="rect">
             <a:avLst/>
@@ -5472,7 +5472,7 @@
               <a:buNone/>
             </a:pPr>
             <a:r>
-              <a:rPr lang="en-US" sz="1300" b="1" dirty="0">
+              <a:rPr lang="en-US" sz="1220" b="1" dirty="0">
                 <a:solidFill>
                   <a:srgbClr val="0068B7"/>
                 </a:solidFill>
@@ -5482,7 +5482,7 @@
               </a:rPr>
               <a:t>Governance lens</a:t>
             </a:r>
-            <a:endParaRPr lang="en-US" sz="1300" dirty="0"/>
+            <a:endParaRPr lang="en-US" sz="1220" dirty="0"/>
           </a:p>
         </p:txBody>
       </p:sp>
@@ -5494,8 +5494,8 @@
         </p:nvSpPr>
         <p:spPr>
           <a:xfrm>
-            <a:off x="7799832" y="1801368"/>
-            <a:ext cx="3145536" cy="688543"/>
+            <a:off x="7708392" y="1764792"/>
+            <a:ext cx="3282696" cy="749808"/>
           </a:xfrm>
           <a:prstGeom prst="rect">
             <a:avLst/>
@@ -5513,7 +5513,7 @@
               <a:buNone/>
             </a:pPr>
             <a:r>
-              <a:rPr lang="en-US" sz="1320" dirty="0">
+              <a:rPr lang="en-US" sz="1220" dirty="0">
                 <a:solidFill>
                   <a:srgbClr val="17364A"/>
                 </a:solidFill>
@@ -5521,9 +5521,9 @@
                 <a:ea typeface="Aptos" pitchFamily="34" charset="-122"/>
                 <a:cs typeface="Aptos" pitchFamily="34" charset="-120"/>
               </a:rPr>
-              <a:t>Which current or proposed AI use case in your agency raises this leadership or governance issue most.</a:t>
-            </a:r>
-            <a:endParaRPr lang="en-US" sz="1320" dirty="0"/>
+              <a:t>Which current or proposed AI use case in your agency raises this leadership or.</a:t>
+            </a:r>
+            <a:endParaRPr lang="en-US" sz="1220" dirty="0"/>
           </a:p>
         </p:txBody>
       </p:sp>
@@ -5535,12 +5535,12 @@
         </p:nvSpPr>
         <p:spPr>
           <a:xfrm>
-            <a:off x="7635240" y="2718511"/>
-            <a:ext cx="3474720" cy="1328623"/>
+            <a:off x="7543800" y="2724912"/>
+            <a:ext cx="3611880" cy="1527048"/>
           </a:xfrm>
           <a:prstGeom prst="roundRect">
             <a:avLst>
-              <a:gd name="adj" fmla="val 8259"/>
+              <a:gd name="adj" fmla="val 7186"/>
             </a:avLst>
           </a:prstGeom>
           <a:solidFill>
@@ -5562,8 +5562,8 @@
         </p:nvSpPr>
         <p:spPr>
           <a:xfrm>
-            <a:off x="7799832" y="2864815"/>
-            <a:ext cx="3145536" cy="256032"/>
+            <a:off x="7708392" y="2852928"/>
+            <a:ext cx="3282696" cy="228600"/>
           </a:xfrm>
           <a:prstGeom prst="rect">
             <a:avLst/>
@@ -5579,7 +5579,7 @@
               <a:buNone/>
             </a:pPr>
             <a:r>
-              <a:rPr lang="en-US" sz="1300" b="1" dirty="0">
+              <a:rPr lang="en-US" sz="1220" b="1" dirty="0">
                 <a:solidFill>
                   <a:srgbClr val="0068B7"/>
                 </a:solidFill>
@@ -5589,7 +5589,7 @@
               </a:rPr>
               <a:t>Concept checkpoints</a:t>
             </a:r>
-            <a:endParaRPr lang="en-US" sz="1300" dirty="0"/>
+            <a:endParaRPr lang="en-US" sz="1220" dirty="0"/>
           </a:p>
         </p:txBody>
       </p:sp>
@@ -5601,8 +5601,8 @@
         </p:nvSpPr>
         <p:spPr>
           <a:xfrm>
-            <a:off x="7818120" y="3230575"/>
-            <a:ext cx="3090672" cy="670255"/>
+            <a:off x="7726680" y="3182112"/>
+            <a:ext cx="3227832" cy="960120"/>
           </a:xfrm>
           <a:prstGeom prst="rect">
             <a:avLst/>
@@ -5620,7 +5620,7 @@
               <a:buNone/>
             </a:pPr>
             <a:r>
-              <a:rPr lang="en-US" sz="1220" dirty="0">
+              <a:rPr lang="en-US" sz="1140" dirty="0">
                 <a:solidFill>
                   <a:srgbClr val="17364A"/>
                 </a:solidFill>
@@ -5628,16 +5628,16 @@
                 <a:ea typeface="Aptos" pitchFamily="34" charset="-122"/>
                 <a:cs typeface="Aptos" pitchFamily="34" charset="-120"/>
               </a:rPr>
-              <a:t>Which current or proposed AI use case in your agency raises this.</a:t>
-            </a:r>
-            <a:endParaRPr lang="en-US" sz="1220" dirty="0"/>
-          </a:p>
-          <a:p>
-            <a:pPr indent="0" marL="0">
-              <a:buNone/>
-            </a:pPr>
-            <a:r>
-              <a:rPr lang="en-US" sz="1220" dirty="0">
+              <a:t>Which current or proposed AI use case in your.</a:t>
+            </a:r>
+            <a:endParaRPr lang="en-US" sz="1140" dirty="0"/>
+          </a:p>
+          <a:p>
+            <a:pPr indent="0" marL="0">
+              <a:buNone/>
+            </a:pPr>
+            <a:r>
+              <a:rPr lang="en-US" sz="1140" dirty="0">
                 <a:solidFill>
                   <a:srgbClr val="17364A"/>
                 </a:solidFill>
@@ -5645,16 +5645,16 @@
                 <a:ea typeface="Aptos" pitchFamily="34" charset="-122"/>
                 <a:cs typeface="Aptos" pitchFamily="34" charset="-120"/>
               </a:rPr>
-              <a:t>Who currently has authority to make decisions about this issue,.</a:t>
-            </a:r>
-            <a:endParaRPr lang="en-US" sz="1220" dirty="0"/>
-          </a:p>
-          <a:p>
-            <a:pPr indent="0" marL="0">
-              <a:buNone/>
-            </a:pPr>
-            <a:r>
-              <a:rPr lang="en-US" sz="1220" dirty="0">
+              <a:t>Who currently has authority to make decisions.</a:t>
+            </a:r>
+            <a:endParaRPr lang="en-US" sz="1140" dirty="0"/>
+          </a:p>
+          <a:p>
+            <a:pPr indent="0" marL="0">
+              <a:buNone/>
+            </a:pPr>
+            <a:r>
+              <a:rPr lang="en-US" sz="1140" dirty="0">
                 <a:solidFill>
                   <a:srgbClr val="17364A"/>
                 </a:solidFill>
@@ -5662,9 +5662,9 @@
                 <a:ea typeface="Aptos" pitchFamily="34" charset="-122"/>
                 <a:cs typeface="Aptos" pitchFamily="34" charset="-120"/>
               </a:rPr>
-              <a:t>What evidence would governance or leadership need before approving.</a:t>
-            </a:r>
-            <a:endParaRPr lang="en-US" sz="1220" dirty="0"/>
+              <a:t>What evidence would governance or leadership need.</a:t>
+            </a:r>
+            <a:endParaRPr lang="en-US" sz="1140" dirty="0"/>
           </a:p>
         </p:txBody>
       </p:sp>
@@ -5676,12 +5676,12 @@
         </p:nvSpPr>
         <p:spPr>
           <a:xfrm>
-            <a:off x="7635240" y="4184294"/>
-            <a:ext cx="3474720" cy="1466698"/>
+            <a:off x="7543800" y="4389120"/>
+            <a:ext cx="3611880" cy="1261872"/>
           </a:xfrm>
           <a:prstGeom prst="roundRect">
             <a:avLst>
-              <a:gd name="adj" fmla="val 7481"/>
+              <a:gd name="adj" fmla="val 8696"/>
             </a:avLst>
           </a:prstGeom>
           <a:solidFill>
@@ -5703,8 +5703,8 @@
         </p:nvSpPr>
         <p:spPr>
           <a:xfrm>
-            <a:off x="7799832" y="4330598"/>
-            <a:ext cx="3145536" cy="256032"/>
+            <a:off x="7708392" y="4517136"/>
+            <a:ext cx="3282696" cy="228600"/>
           </a:xfrm>
           <a:prstGeom prst="rect">
             <a:avLst/>
@@ -5720,7 +5720,7 @@
               <a:buNone/>
             </a:pPr>
             <a:r>
-              <a:rPr lang="en-US" sz="1300" b="1" dirty="0">
+              <a:rPr lang="en-US" sz="1220" b="1" dirty="0">
                 <a:solidFill>
                   <a:srgbClr val="0068B7"/>
                 </a:solidFill>
@@ -5730,7 +5730,7 @@
               </a:rPr>
               <a:t>What to document</a:t>
             </a:r>
-            <a:endParaRPr lang="en-US" sz="1300" dirty="0"/>
+            <a:endParaRPr lang="en-US" sz="1220" dirty="0"/>
           </a:p>
         </p:txBody>
       </p:sp>
@@ -5742,8 +5742,8 @@
         </p:nvSpPr>
         <p:spPr>
           <a:xfrm>
-            <a:off x="7799832" y="4659782"/>
-            <a:ext cx="3145536" cy="899770"/>
+            <a:off x="7708392" y="4828032"/>
+            <a:ext cx="3282696" cy="749808"/>
           </a:xfrm>
           <a:prstGeom prst="rect">
             <a:avLst/>
@@ -5761,7 +5761,7 @@
               <a:buNone/>
             </a:pPr>
             <a:r>
-              <a:rPr lang="en-US" sz="1320" dirty="0">
+              <a:rPr lang="en-US" sz="1220" dirty="0">
                 <a:solidFill>
                   <a:srgbClr val="17364A"/>
                 </a:solidFill>
@@ -5769,9 +5769,9 @@
                 <a:ea typeface="Aptos" pitchFamily="34" charset="-122"/>
                 <a:cs typeface="Aptos" pitchFamily="34" charset="-120"/>
               </a:rPr>
-              <a:t>Connect the concept to public health purpose, responsible use, required safeguards, documentation, and the next action a department should take.</a:t>
-            </a:r>
-            <a:endParaRPr lang="en-US" sz="1320" dirty="0"/>
+              <a:t>Connect the concept to public health purpose, responsible use, required.</a:t>
+            </a:r>
+            <a:endParaRPr lang="en-US" sz="1220" dirty="0"/>
           </a:p>
         </p:txBody>
       </p:sp>
@@ -6062,8 +6062,8 @@
         </p:nvSpPr>
         <p:spPr>
           <a:xfrm>
-            <a:off x="868680" y="1508760"/>
-            <a:ext cx="6309360" cy="4160520"/>
+            <a:off x="822960" y="1463040"/>
+            <a:ext cx="6565392" cy="4343400"/>
           </a:xfrm>
           <a:prstGeom prst="rect">
             <a:avLst/>
@@ -6081,7 +6081,7 @@
               <a:buNone/>
             </a:pPr>
             <a:r>
-              <a:rPr lang="en-US" sz="2100" dirty="0">
+              <a:rPr lang="en-US" sz="1920" dirty="0">
                 <a:solidFill>
                   <a:srgbClr val="003A63"/>
                 </a:solidFill>
@@ -6089,16 +6089,16 @@
                 <a:ea typeface="Aptos" pitchFamily="34" charset="-122"/>
                 <a:cs typeface="Aptos" pitchFamily="34" charset="-120"/>
               </a:rPr>
-              <a:t>• Which staff, partners, or communities would be affected if this issue were handled poorly?</a:t>
-            </a:r>
-            <a:endParaRPr lang="en-US" sz="2100" dirty="0"/>
-          </a:p>
-          <a:p>
-            <a:pPr indent="0" marL="0">
-              <a:buNone/>
-            </a:pPr>
-            <a:r>
-              <a:rPr lang="en-US" sz="2100" dirty="0">
+              <a:t>• Which staff, partners, or communities would be affected if this issue were.</a:t>
+            </a:r>
+            <a:endParaRPr lang="en-US" sz="1920" dirty="0"/>
+          </a:p>
+          <a:p>
+            <a:pPr indent="0" marL="0">
+              <a:buNone/>
+            </a:pPr>
+            <a:r>
+              <a:rPr lang="en-US" sz="1920" dirty="0">
                 <a:solidFill>
                   <a:srgbClr val="003A63"/>
                 </a:solidFill>
@@ -6106,9 +6106,9 @@
                 <a:ea typeface="Aptos" pitchFamily="34" charset="-122"/>
                 <a:cs typeface="Aptos" pitchFamily="34" charset="-120"/>
               </a:rPr>
-              <a:t>• What policy, process, or artifact should be created or updated after this module?</a:t>
-            </a:r>
-            <a:endParaRPr lang="en-US" sz="2100" dirty="0"/>
+              <a:t>• What policy, process, or artifact should be created or updated after this.</a:t>
+            </a:r>
+            <a:endParaRPr lang="en-US" sz="1920" dirty="0"/>
           </a:p>
         </p:txBody>
       </p:sp>
@@ -6120,12 +6120,12 @@
         </p:nvSpPr>
         <p:spPr>
           <a:xfrm>
-            <a:off x="7635240" y="1325880"/>
-            <a:ext cx="3474720" cy="1207008"/>
+            <a:off x="7543800" y="1325880"/>
+            <a:ext cx="3611880" cy="1261872"/>
           </a:xfrm>
           <a:prstGeom prst="roundRect">
             <a:avLst>
-              <a:gd name="adj" fmla="val 9091"/>
+              <a:gd name="adj" fmla="val 8696"/>
             </a:avLst>
           </a:prstGeom>
           <a:solidFill>
@@ -6147,8 +6147,8 @@
         </p:nvSpPr>
         <p:spPr>
           <a:xfrm>
-            <a:off x="7799832" y="1472184"/>
-            <a:ext cx="3145536" cy="256032"/>
+            <a:off x="7708392" y="1453896"/>
+            <a:ext cx="3282696" cy="228600"/>
           </a:xfrm>
           <a:prstGeom prst="rect">
             <a:avLst/>
@@ -6164,7 +6164,7 @@
               <a:buNone/>
             </a:pPr>
             <a:r>
-              <a:rPr lang="en-US" sz="1300" b="1" dirty="0">
+              <a:rPr lang="en-US" sz="1220" b="1" dirty="0">
                 <a:solidFill>
                   <a:srgbClr val="0068B7"/>
                 </a:solidFill>
@@ -6174,7 +6174,7 @@
               </a:rPr>
               <a:t>Governance lens</a:t>
             </a:r>
-            <a:endParaRPr lang="en-US" sz="1300" dirty="0"/>
+            <a:endParaRPr lang="en-US" sz="1220" dirty="0"/>
           </a:p>
         </p:txBody>
       </p:sp>
@@ -6186,8 +6186,8 @@
         </p:nvSpPr>
         <p:spPr>
           <a:xfrm>
-            <a:off x="7799832" y="1801368"/>
-            <a:ext cx="3145536" cy="640080"/>
+            <a:off x="7708392" y="1764792"/>
+            <a:ext cx="3282696" cy="749808"/>
           </a:xfrm>
           <a:prstGeom prst="rect">
             <a:avLst/>
@@ -6205,7 +6205,7 @@
               <a:buNone/>
             </a:pPr>
             <a:r>
-              <a:rPr lang="en-US" sz="1320" dirty="0">
+              <a:rPr lang="en-US" sz="1220" dirty="0">
                 <a:solidFill>
                   <a:srgbClr val="17364A"/>
                 </a:solidFill>
@@ -6213,9 +6213,9 @@
                 <a:ea typeface="Aptos" pitchFamily="34" charset="-122"/>
                 <a:cs typeface="Aptos" pitchFamily="34" charset="-120"/>
               </a:rPr>
-              <a:t>Which staff, partners, or communities would be affected if this issue were handled.</a:t>
-            </a:r>
-            <a:endParaRPr lang="en-US" sz="1320" dirty="0"/>
+              <a:t>Which staff, partners, or communities would be affected if this issue were.</a:t>
+            </a:r>
+            <a:endParaRPr lang="en-US" sz="1220" dirty="0"/>
           </a:p>
         </p:txBody>
       </p:sp>
@@ -6227,12 +6227,12 @@
         </p:nvSpPr>
         <p:spPr>
           <a:xfrm>
-            <a:off x="7635240" y="2670048"/>
-            <a:ext cx="3474720" cy="1377086"/>
+            <a:off x="7543800" y="2724912"/>
+            <a:ext cx="3611880" cy="1527048"/>
           </a:xfrm>
           <a:prstGeom prst="roundRect">
             <a:avLst>
-              <a:gd name="adj" fmla="val 7968"/>
+              <a:gd name="adj" fmla="val 7186"/>
             </a:avLst>
           </a:prstGeom>
           <a:solidFill>
@@ -6254,8 +6254,8 @@
         </p:nvSpPr>
         <p:spPr>
           <a:xfrm>
-            <a:off x="7799832" y="2816352"/>
-            <a:ext cx="3145536" cy="256032"/>
+            <a:off x="7708392" y="2852928"/>
+            <a:ext cx="3282696" cy="228600"/>
           </a:xfrm>
           <a:prstGeom prst="rect">
             <a:avLst/>
@@ -6271,7 +6271,7 @@
               <a:buNone/>
             </a:pPr>
             <a:r>
-              <a:rPr lang="en-US" sz="1300" b="1" dirty="0">
+              <a:rPr lang="en-US" sz="1220" b="1" dirty="0">
                 <a:solidFill>
                   <a:srgbClr val="0068B7"/>
                 </a:solidFill>
@@ -6281,7 +6281,7 @@
               </a:rPr>
               <a:t>Concept checkpoints</a:t>
             </a:r>
-            <a:endParaRPr lang="en-US" sz="1300" dirty="0"/>
+            <a:endParaRPr lang="en-US" sz="1220" dirty="0"/>
           </a:p>
         </p:txBody>
       </p:sp>
@@ -6293,8 +6293,8 @@
         </p:nvSpPr>
         <p:spPr>
           <a:xfrm>
-            <a:off x="7818120" y="3182112"/>
-            <a:ext cx="3090672" cy="718718"/>
+            <a:off x="7726680" y="3182112"/>
+            <a:ext cx="3227832" cy="960120"/>
           </a:xfrm>
           <a:prstGeom prst="rect">
             <a:avLst/>
@@ -6312,7 +6312,7 @@
               <a:buNone/>
             </a:pPr>
             <a:r>
-              <a:rPr lang="en-US" sz="1220" dirty="0">
+              <a:rPr lang="en-US" sz="1140" dirty="0">
                 <a:solidFill>
                   <a:srgbClr val="17364A"/>
                 </a:solidFill>
@@ -6320,16 +6320,16 @@
                 <a:ea typeface="Aptos" pitchFamily="34" charset="-122"/>
                 <a:cs typeface="Aptos" pitchFamily="34" charset="-120"/>
               </a:rPr>
-              <a:t>Which staff, partners, or communities would be affected if this.</a:t>
-            </a:r>
-            <a:endParaRPr lang="en-US" sz="1220" dirty="0"/>
-          </a:p>
-          <a:p>
-            <a:pPr indent="0" marL="0">
-              <a:buNone/>
-            </a:pPr>
-            <a:r>
-              <a:rPr lang="en-US" sz="1220" dirty="0">
+              <a:t>Which staff, partners, or communities would be.</a:t>
+            </a:r>
+            <a:endParaRPr lang="en-US" sz="1140" dirty="0"/>
+          </a:p>
+          <a:p>
+            <a:pPr indent="0" marL="0">
+              <a:buNone/>
+            </a:pPr>
+            <a:r>
+              <a:rPr lang="en-US" sz="1140" dirty="0">
                 <a:solidFill>
                   <a:srgbClr val="17364A"/>
                 </a:solidFill>
@@ -6337,9 +6337,9 @@
                 <a:ea typeface="Aptos" pitchFamily="34" charset="-122"/>
                 <a:cs typeface="Aptos" pitchFamily="34" charset="-120"/>
               </a:rPr>
-              <a:t>What policy, process, or artifact should be created or updated.</a:t>
-            </a:r>
-            <a:endParaRPr lang="en-US" sz="1220" dirty="0"/>
+              <a:t>What policy, process, or artifact should be.</a:t>
+            </a:r>
+            <a:endParaRPr lang="en-US" sz="1140" dirty="0"/>
           </a:p>
         </p:txBody>
       </p:sp>
@@ -6351,12 +6351,12 @@
         </p:nvSpPr>
         <p:spPr>
           <a:xfrm>
-            <a:off x="7635240" y="4184294"/>
-            <a:ext cx="3474720" cy="1466698"/>
+            <a:off x="7543800" y="4389120"/>
+            <a:ext cx="3611880" cy="1261872"/>
           </a:xfrm>
           <a:prstGeom prst="roundRect">
             <a:avLst>
-              <a:gd name="adj" fmla="val 7481"/>
+              <a:gd name="adj" fmla="val 8696"/>
             </a:avLst>
           </a:prstGeom>
           <a:solidFill>
@@ -6378,8 +6378,8 @@
         </p:nvSpPr>
         <p:spPr>
           <a:xfrm>
-            <a:off x="7799832" y="4330598"/>
-            <a:ext cx="3145536" cy="256032"/>
+            <a:off x="7708392" y="4517136"/>
+            <a:ext cx="3282696" cy="228600"/>
           </a:xfrm>
           <a:prstGeom prst="rect">
             <a:avLst/>
@@ -6395,7 +6395,7 @@
               <a:buNone/>
             </a:pPr>
             <a:r>
-              <a:rPr lang="en-US" sz="1300" b="1" dirty="0">
+              <a:rPr lang="en-US" sz="1220" b="1" dirty="0">
                 <a:solidFill>
                   <a:srgbClr val="0068B7"/>
                 </a:solidFill>
@@ -6405,7 +6405,7 @@
               </a:rPr>
               <a:t>What to document</a:t>
             </a:r>
-            <a:endParaRPr lang="en-US" sz="1300" dirty="0"/>
+            <a:endParaRPr lang="en-US" sz="1220" dirty="0"/>
           </a:p>
         </p:txBody>
       </p:sp>
@@ -6417,8 +6417,8 @@
         </p:nvSpPr>
         <p:spPr>
           <a:xfrm>
-            <a:off x="7799832" y="4659782"/>
-            <a:ext cx="3145536" cy="899770"/>
+            <a:off x="7708392" y="4828032"/>
+            <a:ext cx="3282696" cy="749808"/>
           </a:xfrm>
           <a:prstGeom prst="rect">
             <a:avLst/>
@@ -6436,7 +6436,7 @@
               <a:buNone/>
             </a:pPr>
             <a:r>
-              <a:rPr lang="en-US" sz="1320" dirty="0">
+              <a:rPr lang="en-US" sz="1220" dirty="0">
                 <a:solidFill>
                   <a:srgbClr val="17364A"/>
                 </a:solidFill>
@@ -6444,9 +6444,9 @@
                 <a:ea typeface="Aptos" pitchFamily="34" charset="-122"/>
                 <a:cs typeface="Aptos" pitchFamily="34" charset="-120"/>
               </a:rPr>
-              <a:t>Connect the concept to public health purpose, responsible use, required safeguards, documentation, and the next action a department should take.</a:t>
-            </a:r>
-            <a:endParaRPr lang="en-US" sz="1320" dirty="0"/>
+              <a:t>Connect the concept to public health purpose, responsible use, required.</a:t>
+            </a:r>
+            <a:endParaRPr lang="en-US" sz="1220" dirty="0"/>
           </a:p>
         </p:txBody>
       </p:sp>
@@ -6737,8 +6737,8 @@
         </p:nvSpPr>
         <p:spPr>
           <a:xfrm>
-            <a:off x="868680" y="1508760"/>
-            <a:ext cx="6309360" cy="4160520"/>
+            <a:off x="822960" y="1463040"/>
+            <a:ext cx="6565392" cy="4343400"/>
           </a:xfrm>
           <a:prstGeom prst="rect">
             <a:avLst/>
@@ -6756,7 +6756,7 @@
               <a:buNone/>
             </a:pPr>
             <a:r>
-              <a:rPr lang="en-US" sz="2100" dirty="0">
+              <a:rPr lang="en-US" sz="1920" dirty="0">
                 <a:solidFill>
                   <a:srgbClr val="003A63"/>
                 </a:solidFill>
@@ -6766,14 +6766,14 @@
               </a:rPr>
               <a:t>• Create a transparency reporting template and apply it to one AI use case.</a:t>
             </a:r>
-            <a:endParaRPr lang="en-US" sz="2100" dirty="0"/>
-          </a:p>
-          <a:p>
-            <a:pPr indent="0" marL="0">
-              <a:buNone/>
-            </a:pPr>
-            <a:r>
-              <a:rPr lang="en-US" sz="2100" dirty="0">
+            <a:endParaRPr lang="en-US" sz="1920" dirty="0"/>
+          </a:p>
+          <a:p>
+            <a:pPr indent="0" marL="0">
+              <a:buNone/>
+            </a:pPr>
+            <a:r>
+              <a:rPr lang="en-US" sz="1920" dirty="0">
                 <a:solidFill>
                   <a:srgbClr val="003A63"/>
                 </a:solidFill>
@@ -6781,9 +6781,9 @@
                 <a:ea typeface="Aptos" pitchFamily="34" charset="-122"/>
                 <a:cs typeface="Aptos" pitchFamily="34" charset="-120"/>
               </a:rPr>
-              <a:t>• Include purpose, owner, users, data categories, risk level, safeguards, human review,.</a:t>
-            </a:r>
-            <a:endParaRPr lang="en-US" sz="2100" dirty="0"/>
+              <a:t>• Include purpose, owner, users, data categories, risk level, safeguards,.</a:t>
+            </a:r>
+            <a:endParaRPr lang="en-US" sz="1920" dirty="0"/>
           </a:p>
         </p:txBody>
       </p:sp>
@@ -6795,12 +6795,12 @@
         </p:nvSpPr>
         <p:spPr>
           <a:xfrm>
-            <a:off x="7635240" y="1325880"/>
-            <a:ext cx="3474720" cy="1207008"/>
+            <a:off x="7543800" y="1325880"/>
+            <a:ext cx="3611880" cy="1261872"/>
           </a:xfrm>
           <a:prstGeom prst="roundRect">
             <a:avLst>
-              <a:gd name="adj" fmla="val 9091"/>
+              <a:gd name="adj" fmla="val 8696"/>
             </a:avLst>
           </a:prstGeom>
           <a:solidFill>
@@ -6822,8 +6822,8 @@
         </p:nvSpPr>
         <p:spPr>
           <a:xfrm>
-            <a:off x="7799832" y="1472184"/>
-            <a:ext cx="3145536" cy="256032"/>
+            <a:off x="7708392" y="1453896"/>
+            <a:ext cx="3282696" cy="228600"/>
           </a:xfrm>
           <a:prstGeom prst="rect">
             <a:avLst/>
@@ -6839,7 +6839,7 @@
               <a:buNone/>
             </a:pPr>
             <a:r>
-              <a:rPr lang="en-US" sz="1300" b="1" dirty="0">
+              <a:rPr lang="en-US" sz="1220" b="1" dirty="0">
                 <a:solidFill>
                   <a:srgbClr val="0068B7"/>
                 </a:solidFill>
@@ -6849,7 +6849,7 @@
               </a:rPr>
               <a:t>Governance lens</a:t>
             </a:r>
-            <a:endParaRPr lang="en-US" sz="1300" dirty="0"/>
+            <a:endParaRPr lang="en-US" sz="1220" dirty="0"/>
           </a:p>
         </p:txBody>
       </p:sp>
@@ -6861,8 +6861,8 @@
         </p:nvSpPr>
         <p:spPr>
           <a:xfrm>
-            <a:off x="7799832" y="1801368"/>
-            <a:ext cx="3145536" cy="640080"/>
+            <a:off x="7708392" y="1764792"/>
+            <a:ext cx="3282696" cy="749808"/>
           </a:xfrm>
           <a:prstGeom prst="rect">
             <a:avLst/>
@@ -6880,7 +6880,7 @@
               <a:buNone/>
             </a:pPr>
             <a:r>
-              <a:rPr lang="en-US" sz="1320" dirty="0">
+              <a:rPr lang="en-US" sz="1220" dirty="0">
                 <a:solidFill>
                   <a:srgbClr val="17364A"/>
                 </a:solidFill>
@@ -6890,7 +6890,7 @@
               </a:rPr>
               <a:t>Create a transparency reporting template and apply it to one AI use case.</a:t>
             </a:r>
-            <a:endParaRPr lang="en-US" sz="1320" dirty="0"/>
+            <a:endParaRPr lang="en-US" sz="1220" dirty="0"/>
           </a:p>
         </p:txBody>
       </p:sp>
@@ -6902,12 +6902,12 @@
         </p:nvSpPr>
         <p:spPr>
           <a:xfrm>
-            <a:off x="7635240" y="2670048"/>
-            <a:ext cx="3474720" cy="1377086"/>
+            <a:off x="7543800" y="2724912"/>
+            <a:ext cx="3611880" cy="1527048"/>
           </a:xfrm>
           <a:prstGeom prst="roundRect">
             <a:avLst>
-              <a:gd name="adj" fmla="val 7968"/>
+              <a:gd name="adj" fmla="val 7186"/>
             </a:avLst>
           </a:prstGeom>
           <a:solidFill>
@@ -6929,8 +6929,8 @@
         </p:nvSpPr>
         <p:spPr>
           <a:xfrm>
-            <a:off x="7799832" y="2816352"/>
-            <a:ext cx="3145536" cy="256032"/>
+            <a:off x="7708392" y="2852928"/>
+            <a:ext cx="3282696" cy="228600"/>
           </a:xfrm>
           <a:prstGeom prst="rect">
             <a:avLst/>
@@ -6946,7 +6946,7 @@
               <a:buNone/>
             </a:pPr>
             <a:r>
-              <a:rPr lang="en-US" sz="1300" b="1" dirty="0">
+              <a:rPr lang="en-US" sz="1220" b="1" dirty="0">
                 <a:solidFill>
                   <a:srgbClr val="0068B7"/>
                 </a:solidFill>
@@ -6956,7 +6956,7 @@
               </a:rPr>
               <a:t>Concept checkpoints</a:t>
             </a:r>
-            <a:endParaRPr lang="en-US" sz="1300" dirty="0"/>
+            <a:endParaRPr lang="en-US" sz="1220" dirty="0"/>
           </a:p>
         </p:txBody>
       </p:sp>
@@ -6968,8 +6968,8 @@
         </p:nvSpPr>
         <p:spPr>
           <a:xfrm>
-            <a:off x="7818120" y="3182112"/>
-            <a:ext cx="3090672" cy="718718"/>
+            <a:off x="7726680" y="3182112"/>
+            <a:ext cx="3227832" cy="960120"/>
           </a:xfrm>
           <a:prstGeom prst="rect">
             <a:avLst/>
@@ -6987,7 +6987,7 @@
               <a:buNone/>
             </a:pPr>
             <a:r>
-              <a:rPr lang="en-US" sz="1220" dirty="0">
+              <a:rPr lang="en-US" sz="1140" dirty="0">
                 <a:solidFill>
                   <a:srgbClr val="17364A"/>
                 </a:solidFill>
@@ -6995,16 +6995,16 @@
                 <a:ea typeface="Aptos" pitchFamily="34" charset="-122"/>
                 <a:cs typeface="Aptos" pitchFamily="34" charset="-120"/>
               </a:rPr>
-              <a:t>Create a transparency reporting template and apply it to one AI.</a:t>
-            </a:r>
-            <a:endParaRPr lang="en-US" sz="1220" dirty="0"/>
-          </a:p>
-          <a:p>
-            <a:pPr indent="0" marL="0">
-              <a:buNone/>
-            </a:pPr>
-            <a:r>
-              <a:rPr lang="en-US" sz="1220" dirty="0">
+              <a:t>Create a transparency reporting template and apply.</a:t>
+            </a:r>
+            <a:endParaRPr lang="en-US" sz="1140" dirty="0"/>
+          </a:p>
+          <a:p>
+            <a:pPr indent="0" marL="0">
+              <a:buNone/>
+            </a:pPr>
+            <a:r>
+              <a:rPr lang="en-US" sz="1140" dirty="0">
                 <a:solidFill>
                   <a:srgbClr val="17364A"/>
                 </a:solidFill>
@@ -7012,9 +7012,9 @@
                 <a:ea typeface="Aptos" pitchFamily="34" charset="-122"/>
                 <a:cs typeface="Aptos" pitchFamily="34" charset="-120"/>
               </a:rPr>
-              <a:t>Include purpose, owner, users, data categories, risk level,.</a:t>
-            </a:r>
-            <a:endParaRPr lang="en-US" sz="1220" dirty="0"/>
+              <a:t>Include purpose, owner, users, data categories,.</a:t>
+            </a:r>
+            <a:endParaRPr lang="en-US" sz="1140" dirty="0"/>
           </a:p>
         </p:txBody>
       </p:sp>
@@ -7026,12 +7026,12 @@
         </p:nvSpPr>
         <p:spPr>
           <a:xfrm>
-            <a:off x="7635240" y="4184294"/>
-            <a:ext cx="3474720" cy="1466698"/>
+            <a:off x="7543800" y="4389120"/>
+            <a:ext cx="3611880" cy="1261872"/>
           </a:xfrm>
           <a:prstGeom prst="roundRect">
             <a:avLst>
-              <a:gd name="adj" fmla="val 7481"/>
+              <a:gd name="adj" fmla="val 8696"/>
             </a:avLst>
           </a:prstGeom>
           <a:solidFill>
@@ -7053,8 +7053,8 @@
         </p:nvSpPr>
         <p:spPr>
           <a:xfrm>
-            <a:off x="7799832" y="4330598"/>
-            <a:ext cx="3145536" cy="256032"/>
+            <a:off x="7708392" y="4517136"/>
+            <a:ext cx="3282696" cy="228600"/>
           </a:xfrm>
           <a:prstGeom prst="rect">
             <a:avLst/>
@@ -7070,7 +7070,7 @@
               <a:buNone/>
             </a:pPr>
             <a:r>
-              <a:rPr lang="en-US" sz="1300" b="1" dirty="0">
+              <a:rPr lang="en-US" sz="1220" b="1" dirty="0">
                 <a:solidFill>
                   <a:srgbClr val="0068B7"/>
                 </a:solidFill>
@@ -7080,7 +7080,7 @@
               </a:rPr>
               <a:t>What to document</a:t>
             </a:r>
-            <a:endParaRPr lang="en-US" sz="1300" dirty="0"/>
+            <a:endParaRPr lang="en-US" sz="1220" dirty="0"/>
           </a:p>
         </p:txBody>
       </p:sp>
@@ -7092,8 +7092,8 @@
         </p:nvSpPr>
         <p:spPr>
           <a:xfrm>
-            <a:off x="7799832" y="4659782"/>
-            <a:ext cx="3145536" cy="899770"/>
+            <a:off x="7708392" y="4828032"/>
+            <a:ext cx="3282696" cy="749808"/>
           </a:xfrm>
           <a:prstGeom prst="rect">
             <a:avLst/>
@@ -7111,7 +7111,7 @@
               <a:buNone/>
             </a:pPr>
             <a:r>
-              <a:rPr lang="en-US" sz="1320" dirty="0">
+              <a:rPr lang="en-US" sz="1220" dirty="0">
                 <a:solidFill>
                   <a:srgbClr val="17364A"/>
                 </a:solidFill>
@@ -7119,9 +7119,9 @@
                 <a:ea typeface="Aptos" pitchFamily="34" charset="-122"/>
                 <a:cs typeface="Aptos" pitchFamily="34" charset="-120"/>
               </a:rPr>
-              <a:t>Use the assignment to test whether you can explain the concept, apply it to a realistic public health situation, and identify what would need review before the work moves forward.</a:t>
-            </a:r>
-            <a:endParaRPr lang="en-US" sz="1320" dirty="0"/>
+              <a:t>Use the assignment to test whether you can explain the concept, apply it to a.</a:t>
+            </a:r>
+            <a:endParaRPr lang="en-US" sz="1220" dirty="0"/>
           </a:p>
         </p:txBody>
       </p:sp>
@@ -7412,8 +7412,8 @@
         </p:nvSpPr>
         <p:spPr>
           <a:xfrm>
-            <a:off x="868680" y="1508760"/>
-            <a:ext cx="6309360" cy="4160520"/>
+            <a:off x="822960" y="1463040"/>
+            <a:ext cx="6565392" cy="4343400"/>
           </a:xfrm>
           <a:prstGeom prst="rect">
             <a:avLst/>
@@ -7431,7 +7431,7 @@
               <a:buNone/>
             </a:pPr>
             <a:r>
-              <a:rPr lang="en-US" sz="2100" dirty="0">
+              <a:rPr lang="en-US" sz="1920" dirty="0">
                 <a:solidFill>
                   <a:srgbClr val="003A63"/>
                 </a:solidFill>
@@ -7441,14 +7441,14 @@
               </a:rPr>
               <a:t>• Choose a real or realistic public health AI use case.</a:t>
             </a:r>
-            <a:endParaRPr lang="en-US" sz="2100" dirty="0"/>
-          </a:p>
-          <a:p>
-            <a:pPr indent="0" marL="0">
-              <a:buNone/>
-            </a:pPr>
-            <a:r>
-              <a:rPr lang="en-US" sz="2100" dirty="0">
+            <a:endParaRPr lang="en-US" sz="1920" dirty="0"/>
+          </a:p>
+          <a:p>
+            <a:pPr indent="0" marL="0">
+              <a:buNone/>
+            </a:pPr>
+            <a:r>
+              <a:rPr lang="en-US" sz="1920" dirty="0">
                 <a:solidFill>
                   <a:srgbClr val="003A63"/>
                 </a:solidFill>
@@ -7456,16 +7456,16 @@
                 <a:ea typeface="Aptos" pitchFamily="34" charset="-122"/>
                 <a:cs typeface="Aptos" pitchFamily="34" charset="-120"/>
               </a:rPr>
-              <a:t>• Document assumptions, unresolved questions, and which agency roles would need to review the.</a:t>
-            </a:r>
-            <a:endParaRPr lang="en-US" sz="2100" dirty="0"/>
-          </a:p>
-          <a:p>
-            <a:pPr indent="0" marL="0">
-              <a:buNone/>
-            </a:pPr>
-            <a:r>
-              <a:rPr lang="en-US" sz="2100" dirty="0">
+              <a:t>• Document assumptions, unresolved questions, and which agency roles would.</a:t>
+            </a:r>
+            <a:endParaRPr lang="en-US" sz="1920" dirty="0"/>
+          </a:p>
+          <a:p>
+            <a:pPr indent="0" marL="0">
+              <a:buNone/>
+            </a:pPr>
+            <a:r>
+              <a:rPr lang="en-US" sz="1920" dirty="0">
                 <a:solidFill>
                   <a:srgbClr val="003A63"/>
                 </a:solidFill>
@@ -7473,9 +7473,9 @@
                 <a:ea typeface="Aptos" pitchFamily="34" charset="-122"/>
                 <a:cs typeface="Aptos" pitchFamily="34" charset="-120"/>
               </a:rPr>
-              <a:t>• The exercise should produce a work product that could support governance review, leadership.</a:t>
-            </a:r>
-            <a:endParaRPr lang="en-US" sz="2100" dirty="0"/>
+              <a:t>• The exercise should produce a work product that could support governance.</a:t>
+            </a:r>
+            <a:endParaRPr lang="en-US" sz="1920" dirty="0"/>
           </a:p>
         </p:txBody>
       </p:sp>
@@ -7487,12 +7487,12 @@
         </p:nvSpPr>
         <p:spPr>
           <a:xfrm>
-            <a:off x="7635240" y="1325880"/>
-            <a:ext cx="3474720" cy="1207008"/>
+            <a:off x="7543800" y="1325880"/>
+            <a:ext cx="3611880" cy="1261872"/>
           </a:xfrm>
           <a:prstGeom prst="roundRect">
             <a:avLst>
-              <a:gd name="adj" fmla="val 9091"/>
+              <a:gd name="adj" fmla="val 8696"/>
             </a:avLst>
           </a:prstGeom>
           <a:solidFill>
@@ -7514,8 +7514,8 @@
         </p:nvSpPr>
         <p:spPr>
           <a:xfrm>
-            <a:off x="7799832" y="1472184"/>
-            <a:ext cx="3145536" cy="256032"/>
+            <a:off x="7708392" y="1453896"/>
+            <a:ext cx="3282696" cy="228600"/>
           </a:xfrm>
           <a:prstGeom prst="rect">
             <a:avLst/>
@@ -7531,7 +7531,7 @@
               <a:buNone/>
             </a:pPr>
             <a:r>
-              <a:rPr lang="en-US" sz="1300" b="1" dirty="0">
+              <a:rPr lang="en-US" sz="1220" b="1" dirty="0">
                 <a:solidFill>
                   <a:srgbClr val="0068B7"/>
                 </a:solidFill>
@@ -7541,7 +7541,7 @@
               </a:rPr>
               <a:t>Governance lens</a:t>
             </a:r>
-            <a:endParaRPr lang="en-US" sz="1300" dirty="0"/>
+            <a:endParaRPr lang="en-US" sz="1220" dirty="0"/>
           </a:p>
         </p:txBody>
       </p:sp>
@@ -7553,8 +7553,8 @@
         </p:nvSpPr>
         <p:spPr>
           <a:xfrm>
-            <a:off x="7799832" y="1801368"/>
-            <a:ext cx="3145536" cy="640080"/>
+            <a:off x="7708392" y="1764792"/>
+            <a:ext cx="3282696" cy="749808"/>
           </a:xfrm>
           <a:prstGeom prst="rect">
             <a:avLst/>
@@ -7572,7 +7572,7 @@
               <a:buNone/>
             </a:pPr>
             <a:r>
-              <a:rPr lang="en-US" sz="1320" dirty="0">
+              <a:rPr lang="en-US" sz="1220" dirty="0">
                 <a:solidFill>
                   <a:srgbClr val="17364A"/>
                 </a:solidFill>
@@ -7582,7 +7582,7 @@
               </a:rPr>
               <a:t>Choose a real or realistic public health AI use case.</a:t>
             </a:r>
-            <a:endParaRPr lang="en-US" sz="1320" dirty="0"/>
+            <a:endParaRPr lang="en-US" sz="1220" dirty="0"/>
           </a:p>
         </p:txBody>
       </p:sp>
@@ -7594,12 +7594,12 @@
         </p:nvSpPr>
         <p:spPr>
           <a:xfrm>
-            <a:off x="7635240" y="2670048"/>
-            <a:ext cx="3474720" cy="1377086"/>
+            <a:off x="7543800" y="2724912"/>
+            <a:ext cx="3611880" cy="1527048"/>
           </a:xfrm>
           <a:prstGeom prst="roundRect">
             <a:avLst>
-              <a:gd name="adj" fmla="val 7968"/>
+              <a:gd name="adj" fmla="val 7186"/>
             </a:avLst>
           </a:prstGeom>
           <a:solidFill>
@@ -7621,8 +7621,8 @@
         </p:nvSpPr>
         <p:spPr>
           <a:xfrm>
-            <a:off x="7799832" y="2816352"/>
-            <a:ext cx="3145536" cy="256032"/>
+            <a:off x="7708392" y="2852928"/>
+            <a:ext cx="3282696" cy="228600"/>
           </a:xfrm>
           <a:prstGeom prst="rect">
             <a:avLst/>
@@ -7638,7 +7638,7 @@
               <a:buNone/>
             </a:pPr>
             <a:r>
-              <a:rPr lang="en-US" sz="1300" b="1" dirty="0">
+              <a:rPr lang="en-US" sz="1220" b="1" dirty="0">
                 <a:solidFill>
                   <a:srgbClr val="0068B7"/>
                 </a:solidFill>
@@ -7648,7 +7648,7 @@
               </a:rPr>
               <a:t>Concept checkpoints</a:t>
             </a:r>
-            <a:endParaRPr lang="en-US" sz="1300" dirty="0"/>
+            <a:endParaRPr lang="en-US" sz="1220" dirty="0"/>
           </a:p>
         </p:txBody>
       </p:sp>
@@ -7660,8 +7660,8 @@
         </p:nvSpPr>
         <p:spPr>
           <a:xfrm>
-            <a:off x="7818120" y="3182112"/>
-            <a:ext cx="3090672" cy="718718"/>
+            <a:off x="7726680" y="3182112"/>
+            <a:ext cx="3227832" cy="960120"/>
           </a:xfrm>
           <a:prstGeom prst="rect">
             <a:avLst/>
@@ -7679,7 +7679,7 @@
               <a:buNone/>
             </a:pPr>
             <a:r>
-              <a:rPr lang="en-US" sz="1220" dirty="0">
+              <a:rPr lang="en-US" sz="1140" dirty="0">
                 <a:solidFill>
                   <a:srgbClr val="17364A"/>
                 </a:solidFill>
@@ -7687,16 +7687,16 @@
                 <a:ea typeface="Aptos" pitchFamily="34" charset="-122"/>
                 <a:cs typeface="Aptos" pitchFamily="34" charset="-120"/>
               </a:rPr>
-              <a:t>Document assumptions, unresolved questions, and which agency roles.</a:t>
-            </a:r>
-            <a:endParaRPr lang="en-US" sz="1220" dirty="0"/>
-          </a:p>
-          <a:p>
-            <a:pPr indent="0" marL="0">
-              <a:buNone/>
-            </a:pPr>
-            <a:r>
-              <a:rPr lang="en-US" sz="1220" dirty="0">
+              <a:t>Document assumptions, unresolved questions, and.</a:t>
+            </a:r>
+            <a:endParaRPr lang="en-US" sz="1140" dirty="0"/>
+          </a:p>
+          <a:p>
+            <a:pPr indent="0" marL="0">
+              <a:buNone/>
+            </a:pPr>
+            <a:r>
+              <a:rPr lang="en-US" sz="1140" dirty="0">
                 <a:solidFill>
                   <a:srgbClr val="17364A"/>
                 </a:solidFill>
@@ -7704,9 +7704,9 @@
                 <a:ea typeface="Aptos" pitchFamily="34" charset="-122"/>
                 <a:cs typeface="Aptos" pitchFamily="34" charset="-120"/>
               </a:rPr>
-              <a:t>The exercise should produce a work product that could support.</a:t>
-            </a:r>
-            <a:endParaRPr lang="en-US" sz="1220" dirty="0"/>
+              <a:t>The exercise should produce a work product that.</a:t>
+            </a:r>
+            <a:endParaRPr lang="en-US" sz="1140" dirty="0"/>
           </a:p>
         </p:txBody>
       </p:sp>
@@ -7718,12 +7718,12 @@
         </p:nvSpPr>
         <p:spPr>
           <a:xfrm>
-            <a:off x="7635240" y="4184294"/>
-            <a:ext cx="3474720" cy="1466698"/>
+            <a:off x="7543800" y="4389120"/>
+            <a:ext cx="3611880" cy="1261872"/>
           </a:xfrm>
           <a:prstGeom prst="roundRect">
             <a:avLst>
-              <a:gd name="adj" fmla="val 7481"/>
+              <a:gd name="adj" fmla="val 8696"/>
             </a:avLst>
           </a:prstGeom>
           <a:solidFill>
@@ -7745,8 +7745,8 @@
         </p:nvSpPr>
         <p:spPr>
           <a:xfrm>
-            <a:off x="7799832" y="4330598"/>
-            <a:ext cx="3145536" cy="256032"/>
+            <a:off x="7708392" y="4517136"/>
+            <a:ext cx="3282696" cy="228600"/>
           </a:xfrm>
           <a:prstGeom prst="rect">
             <a:avLst/>
@@ -7762,7 +7762,7 @@
               <a:buNone/>
             </a:pPr>
             <a:r>
-              <a:rPr lang="en-US" sz="1300" b="1" dirty="0">
+              <a:rPr lang="en-US" sz="1220" b="1" dirty="0">
                 <a:solidFill>
                   <a:srgbClr val="0068B7"/>
                 </a:solidFill>
@@ -7772,7 +7772,7 @@
               </a:rPr>
               <a:t>What to document</a:t>
             </a:r>
-            <a:endParaRPr lang="en-US" sz="1300" dirty="0"/>
+            <a:endParaRPr lang="en-US" sz="1220" dirty="0"/>
           </a:p>
         </p:txBody>
       </p:sp>
@@ -7784,8 +7784,8 @@
         </p:nvSpPr>
         <p:spPr>
           <a:xfrm>
-            <a:off x="7799832" y="4659782"/>
-            <a:ext cx="3145536" cy="899770"/>
+            <a:off x="7708392" y="4828032"/>
+            <a:ext cx="3282696" cy="749808"/>
           </a:xfrm>
           <a:prstGeom prst="rect">
             <a:avLst/>
@@ -7803,7 +7803,7 @@
               <a:buNone/>
             </a:pPr>
             <a:r>
-              <a:rPr lang="en-US" sz="1320" dirty="0">
+              <a:rPr lang="en-US" sz="1220" dirty="0">
                 <a:solidFill>
                   <a:srgbClr val="17364A"/>
                 </a:solidFill>
@@ -7811,9 +7811,9 @@
                 <a:ea typeface="Aptos" pitchFamily="34" charset="-122"/>
                 <a:cs typeface="Aptos" pitchFamily="34" charset="-120"/>
               </a:rPr>
-              <a:t>Connect the concept to public health purpose, responsible use, required safeguards, documentation, and the next action a department should take.</a:t>
-            </a:r>
-            <a:endParaRPr lang="en-US" sz="1320" dirty="0"/>
+              <a:t>Connect the concept to public health purpose, responsible use, required.</a:t>
+            </a:r>
+            <a:endParaRPr lang="en-US" sz="1220" dirty="0"/>
           </a:p>
         </p:txBody>
       </p:sp>
@@ -8104,8 +8104,8 @@
         </p:nvSpPr>
         <p:spPr>
           <a:xfrm>
-            <a:off x="868680" y="1508760"/>
-            <a:ext cx="6309360" cy="4160520"/>
+            <a:off x="822960" y="1463040"/>
+            <a:ext cx="6565392" cy="4343400"/>
           </a:xfrm>
           <a:prstGeom prst="rect">
             <a:avLst/>
@@ -8123,7 +8123,7 @@
               <a:buNone/>
             </a:pPr>
             <a:r>
-              <a:rPr lang="en-US" sz="2100" dirty="0">
+              <a:rPr lang="en-US" sz="1920" dirty="0">
                 <a:solidFill>
                   <a:srgbClr val="003A63"/>
                 </a:solidFill>
@@ -8131,9 +8131,9 @@
                 <a:ea typeface="Aptos" pitchFamily="34" charset="-122"/>
                 <a:cs typeface="Aptos" pitchFamily="34" charset="-120"/>
               </a:rPr>
-              <a:t>• AI transparency template; sample AI use registry entry; public notice draft; internal review.</a:t>
-            </a:r>
-            <a:endParaRPr lang="en-US" sz="2100" dirty="0"/>
+              <a:t>• AI transparency template; sample AI use registry entry; public notice draft;.</a:t>
+            </a:r>
+            <a:endParaRPr lang="en-US" sz="1920" dirty="0"/>
           </a:p>
         </p:txBody>
       </p:sp>
@@ -8145,12 +8145,12 @@
         </p:nvSpPr>
         <p:spPr>
           <a:xfrm>
-            <a:off x="7635240" y="1325880"/>
-            <a:ext cx="3474720" cy="1255471"/>
+            <a:off x="7543800" y="1325880"/>
+            <a:ext cx="3611880" cy="1261872"/>
           </a:xfrm>
           <a:prstGeom prst="roundRect">
             <a:avLst>
-              <a:gd name="adj" fmla="val 8740"/>
+              <a:gd name="adj" fmla="val 8696"/>
             </a:avLst>
           </a:prstGeom>
           <a:solidFill>
@@ -8172,8 +8172,8 @@
         </p:nvSpPr>
         <p:spPr>
           <a:xfrm>
-            <a:off x="7799832" y="1472184"/>
-            <a:ext cx="3145536" cy="256032"/>
+            <a:off x="7708392" y="1453896"/>
+            <a:ext cx="3282696" cy="228600"/>
           </a:xfrm>
           <a:prstGeom prst="rect">
             <a:avLst/>
@@ -8189,7 +8189,7 @@
               <a:buNone/>
             </a:pPr>
             <a:r>
-              <a:rPr lang="en-US" sz="1300" b="1" dirty="0">
+              <a:rPr lang="en-US" sz="1220" b="1" dirty="0">
                 <a:solidFill>
                   <a:srgbClr val="0068B7"/>
                 </a:solidFill>
@@ -8199,7 +8199,7 @@
               </a:rPr>
               <a:t>Governance lens</a:t>
             </a:r>
-            <a:endParaRPr lang="en-US" sz="1300" dirty="0"/>
+            <a:endParaRPr lang="en-US" sz="1220" dirty="0"/>
           </a:p>
         </p:txBody>
       </p:sp>
@@ -8211,8 +8211,8 @@
         </p:nvSpPr>
         <p:spPr>
           <a:xfrm>
-            <a:off x="7799832" y="1801368"/>
-            <a:ext cx="3145536" cy="688543"/>
+            <a:off x="7708392" y="1764792"/>
+            <a:ext cx="3282696" cy="749808"/>
           </a:xfrm>
           <a:prstGeom prst="rect">
             <a:avLst/>
@@ -8230,7 +8230,7 @@
               <a:buNone/>
             </a:pPr>
             <a:r>
-              <a:rPr lang="en-US" sz="1320" dirty="0">
+              <a:rPr lang="en-US" sz="1220" dirty="0">
                 <a:solidFill>
                   <a:srgbClr val="17364A"/>
                 </a:solidFill>
@@ -8238,9 +8238,9 @@
                 <a:ea typeface="Aptos" pitchFamily="34" charset="-122"/>
                 <a:cs typeface="Aptos" pitchFamily="34" charset="-120"/>
               </a:rPr>
-              <a:t>AI transparency template; sample AI use registry entry; public notice draft; internal review checklist.</a:t>
-            </a:r>
-            <a:endParaRPr lang="en-US" sz="1320" dirty="0"/>
+              <a:t>AI transparency template; sample AI use registry entry; public notice draft;.</a:t>
+            </a:r>
+            <a:endParaRPr lang="en-US" sz="1220" dirty="0"/>
           </a:p>
         </p:txBody>
       </p:sp>
@@ -8252,12 +8252,12 @@
         </p:nvSpPr>
         <p:spPr>
           <a:xfrm>
-            <a:off x="7635240" y="2718511"/>
-            <a:ext cx="3474720" cy="1328623"/>
+            <a:off x="7543800" y="2724912"/>
+            <a:ext cx="3611880" cy="1527048"/>
           </a:xfrm>
           <a:prstGeom prst="roundRect">
             <a:avLst>
-              <a:gd name="adj" fmla="val 8259"/>
+              <a:gd name="adj" fmla="val 7186"/>
             </a:avLst>
           </a:prstGeom>
           <a:solidFill>
@@ -8279,8 +8279,8 @@
         </p:nvSpPr>
         <p:spPr>
           <a:xfrm>
-            <a:off x="7799832" y="2864815"/>
-            <a:ext cx="3145536" cy="256032"/>
+            <a:off x="7708392" y="2852928"/>
+            <a:ext cx="3282696" cy="228600"/>
           </a:xfrm>
           <a:prstGeom prst="rect">
             <a:avLst/>
@@ -8296,7 +8296,7 @@
               <a:buNone/>
             </a:pPr>
             <a:r>
-              <a:rPr lang="en-US" sz="1300" b="1" dirty="0">
+              <a:rPr lang="en-US" sz="1220" b="1" dirty="0">
                 <a:solidFill>
                   <a:srgbClr val="0068B7"/>
                 </a:solidFill>
@@ -8306,7 +8306,7 @@
               </a:rPr>
               <a:t>Concept checkpoints</a:t>
             </a:r>
-            <a:endParaRPr lang="en-US" sz="1300" dirty="0"/>
+            <a:endParaRPr lang="en-US" sz="1220" dirty="0"/>
           </a:p>
         </p:txBody>
       </p:sp>
@@ -8318,8 +8318,8 @@
         </p:nvSpPr>
         <p:spPr>
           <a:xfrm>
-            <a:off x="7818120" y="3230575"/>
-            <a:ext cx="3090672" cy="670255"/>
+            <a:off x="7726680" y="3182112"/>
+            <a:ext cx="3227832" cy="960120"/>
           </a:xfrm>
           <a:prstGeom prst="rect">
             <a:avLst/>
@@ -8337,7 +8337,7 @@
               <a:buNone/>
             </a:pPr>
             <a:r>
-              <a:rPr lang="en-US" sz="1220" dirty="0">
+              <a:rPr lang="en-US" sz="1140" dirty="0">
                 <a:solidFill>
                   <a:srgbClr val="17364A"/>
                 </a:solidFill>
@@ -8345,9 +8345,9 @@
                 <a:ea typeface="Aptos" pitchFamily="34" charset="-122"/>
                 <a:cs typeface="Aptos" pitchFamily="34" charset="-120"/>
               </a:rPr>
-              <a:t>AI transparency template; sample AI use registry entry; public.</a:t>
-            </a:r>
-            <a:endParaRPr lang="en-US" sz="1220" dirty="0"/>
+              <a:t>AI transparency template; sample AI use registry.</a:t>
+            </a:r>
+            <a:endParaRPr lang="en-US" sz="1140" dirty="0"/>
           </a:p>
         </p:txBody>
       </p:sp>
@@ -8359,12 +8359,12 @@
         </p:nvSpPr>
         <p:spPr>
           <a:xfrm>
-            <a:off x="7635240" y="4184294"/>
-            <a:ext cx="3474720" cy="1466698"/>
+            <a:off x="7543800" y="4389120"/>
+            <a:ext cx="3611880" cy="1261872"/>
           </a:xfrm>
           <a:prstGeom prst="roundRect">
             <a:avLst>
-              <a:gd name="adj" fmla="val 7481"/>
+              <a:gd name="adj" fmla="val 8696"/>
             </a:avLst>
           </a:prstGeom>
           <a:solidFill>
@@ -8386,8 +8386,8 @@
         </p:nvSpPr>
         <p:spPr>
           <a:xfrm>
-            <a:off x="7799832" y="4330598"/>
-            <a:ext cx="3145536" cy="256032"/>
+            <a:off x="7708392" y="4517136"/>
+            <a:ext cx="3282696" cy="228600"/>
           </a:xfrm>
           <a:prstGeom prst="rect">
             <a:avLst/>
@@ -8403,7 +8403,7 @@
               <a:buNone/>
             </a:pPr>
             <a:r>
-              <a:rPr lang="en-US" sz="1300" b="1" dirty="0">
+              <a:rPr lang="en-US" sz="1220" b="1" dirty="0">
                 <a:solidFill>
                   <a:srgbClr val="0068B7"/>
                 </a:solidFill>
@@ -8413,7 +8413,7 @@
               </a:rPr>
               <a:t>What to document</a:t>
             </a:r>
-            <a:endParaRPr lang="en-US" sz="1300" dirty="0"/>
+            <a:endParaRPr lang="en-US" sz="1220" dirty="0"/>
           </a:p>
         </p:txBody>
       </p:sp>
@@ -8425,8 +8425,8 @@
         </p:nvSpPr>
         <p:spPr>
           <a:xfrm>
-            <a:off x="7799832" y="4659782"/>
-            <a:ext cx="3145536" cy="899770"/>
+            <a:off x="7708392" y="4828032"/>
+            <a:ext cx="3282696" cy="749808"/>
           </a:xfrm>
           <a:prstGeom prst="rect">
             <a:avLst/>
@@ -8444,7 +8444,7 @@
               <a:buNone/>
             </a:pPr>
             <a:r>
-              <a:rPr lang="en-US" sz="1320" dirty="0">
+              <a:rPr lang="en-US" sz="1220" dirty="0">
                 <a:solidFill>
                   <a:srgbClr val="17364A"/>
                 </a:solidFill>
@@ -8452,9 +8452,9 @@
                 <a:ea typeface="Aptos" pitchFamily="34" charset="-122"/>
                 <a:cs typeface="Aptos" pitchFamily="34" charset="-120"/>
               </a:rPr>
-              <a:t>Connect the concept to public health purpose, responsible use, required safeguards, documentation, and the next action a department should take.</a:t>
-            </a:r>
-            <a:endParaRPr lang="en-US" sz="1320" dirty="0"/>
+              <a:t>Connect the concept to public health purpose, responsible use, required.</a:t>
+            </a:r>
+            <a:endParaRPr lang="en-US" sz="1220" dirty="0"/>
           </a:p>
         </p:txBody>
       </p:sp>
@@ -8745,8 +8745,8 @@
         </p:nvSpPr>
         <p:spPr>
           <a:xfrm>
-            <a:off x="868680" y="1508760"/>
-            <a:ext cx="6309360" cy="4160520"/>
+            <a:off x="822960" y="1463040"/>
+            <a:ext cx="6565392" cy="4343400"/>
           </a:xfrm>
           <a:prstGeom prst="rect">
             <a:avLst/>
@@ -8764,7 +8764,7 @@
               <a:buNone/>
             </a:pPr>
             <a:r>
-              <a:rPr lang="en-US" sz="2100" dirty="0">
+              <a:rPr lang="en-US" sz="1920" dirty="0">
                 <a:solidFill>
                   <a:srgbClr val="003A63"/>
                 </a:solidFill>
@@ -8772,9 +8772,9 @@
                 <a:ea typeface="Aptos" pitchFamily="34" charset="-122"/>
                 <a:cs typeface="Aptos" pitchFamily="34" charset="-120"/>
               </a:rPr>
-              <a:t>• AI transparency template; sample AI use registry entry; public notice draft; internal review.</a:t>
-            </a:r>
-            <a:endParaRPr lang="en-US" sz="2100" dirty="0"/>
+              <a:t>• AI transparency template; sample AI use registry entry; public notice draft;.</a:t>
+            </a:r>
+            <a:endParaRPr lang="en-US" sz="1920" dirty="0"/>
           </a:p>
         </p:txBody>
       </p:sp>
@@ -8786,12 +8786,12 @@
         </p:nvSpPr>
         <p:spPr>
           <a:xfrm>
-            <a:off x="7635240" y="1325880"/>
-            <a:ext cx="3474720" cy="1255471"/>
+            <a:off x="7543800" y="1325880"/>
+            <a:ext cx="3611880" cy="1261872"/>
           </a:xfrm>
           <a:prstGeom prst="roundRect">
             <a:avLst>
-              <a:gd name="adj" fmla="val 8740"/>
+              <a:gd name="adj" fmla="val 8696"/>
             </a:avLst>
           </a:prstGeom>
           <a:solidFill>
@@ -8813,8 +8813,8 @@
         </p:nvSpPr>
         <p:spPr>
           <a:xfrm>
-            <a:off x="7799832" y="1472184"/>
-            <a:ext cx="3145536" cy="256032"/>
+            <a:off x="7708392" y="1453896"/>
+            <a:ext cx="3282696" cy="228600"/>
           </a:xfrm>
           <a:prstGeom prst="rect">
             <a:avLst/>
@@ -8830,7 +8830,7 @@
               <a:buNone/>
             </a:pPr>
             <a:r>
-              <a:rPr lang="en-US" sz="1300" b="1" dirty="0">
+              <a:rPr lang="en-US" sz="1220" b="1" dirty="0">
                 <a:solidFill>
                   <a:srgbClr val="0068B7"/>
                 </a:solidFill>
@@ -8840,7 +8840,7 @@
               </a:rPr>
               <a:t>Governance lens</a:t>
             </a:r>
-            <a:endParaRPr lang="en-US" sz="1300" dirty="0"/>
+            <a:endParaRPr lang="en-US" sz="1220" dirty="0"/>
           </a:p>
         </p:txBody>
       </p:sp>
@@ -8852,8 +8852,8 @@
         </p:nvSpPr>
         <p:spPr>
           <a:xfrm>
-            <a:off x="7799832" y="1801368"/>
-            <a:ext cx="3145536" cy="688543"/>
+            <a:off x="7708392" y="1764792"/>
+            <a:ext cx="3282696" cy="749808"/>
           </a:xfrm>
           <a:prstGeom prst="rect">
             <a:avLst/>
@@ -8871,7 +8871,7 @@
               <a:buNone/>
             </a:pPr>
             <a:r>
-              <a:rPr lang="en-US" sz="1320" dirty="0">
+              <a:rPr lang="en-US" sz="1220" dirty="0">
                 <a:solidFill>
                   <a:srgbClr val="17364A"/>
                 </a:solidFill>
@@ -8879,9 +8879,9 @@
                 <a:ea typeface="Aptos" pitchFamily="34" charset="-122"/>
                 <a:cs typeface="Aptos" pitchFamily="34" charset="-120"/>
               </a:rPr>
-              <a:t>AI transparency template; sample AI use registry entry; public notice draft; internal review checklist.</a:t>
-            </a:r>
-            <a:endParaRPr lang="en-US" sz="1320" dirty="0"/>
+              <a:t>AI transparency template; sample AI use registry entry; public notice draft;.</a:t>
+            </a:r>
+            <a:endParaRPr lang="en-US" sz="1220" dirty="0"/>
           </a:p>
         </p:txBody>
       </p:sp>
@@ -8893,12 +8893,12 @@
         </p:nvSpPr>
         <p:spPr>
           <a:xfrm>
-            <a:off x="7635240" y="2718511"/>
-            <a:ext cx="3474720" cy="1328623"/>
+            <a:off x="7543800" y="2724912"/>
+            <a:ext cx="3611880" cy="1527048"/>
           </a:xfrm>
           <a:prstGeom prst="roundRect">
             <a:avLst>
-              <a:gd name="adj" fmla="val 8259"/>
+              <a:gd name="adj" fmla="val 7186"/>
             </a:avLst>
           </a:prstGeom>
           <a:solidFill>
@@ -8920,8 +8920,8 @@
         </p:nvSpPr>
         <p:spPr>
           <a:xfrm>
-            <a:off x="7799832" y="2864815"/>
-            <a:ext cx="3145536" cy="256032"/>
+            <a:off x="7708392" y="2852928"/>
+            <a:ext cx="3282696" cy="228600"/>
           </a:xfrm>
           <a:prstGeom prst="rect">
             <a:avLst/>
@@ -8937,7 +8937,7 @@
               <a:buNone/>
             </a:pPr>
             <a:r>
-              <a:rPr lang="en-US" sz="1300" b="1" dirty="0">
+              <a:rPr lang="en-US" sz="1220" b="1" dirty="0">
                 <a:solidFill>
                   <a:srgbClr val="0068B7"/>
                 </a:solidFill>
@@ -8947,7 +8947,7 @@
               </a:rPr>
               <a:t>Concept checkpoints</a:t>
             </a:r>
-            <a:endParaRPr lang="en-US" sz="1300" dirty="0"/>
+            <a:endParaRPr lang="en-US" sz="1220" dirty="0"/>
           </a:p>
         </p:txBody>
       </p:sp>
@@ -8959,8 +8959,8 @@
         </p:nvSpPr>
         <p:spPr>
           <a:xfrm>
-            <a:off x="7818120" y="3230575"/>
-            <a:ext cx="3090672" cy="670255"/>
+            <a:off x="7726680" y="3182112"/>
+            <a:ext cx="3227832" cy="960120"/>
           </a:xfrm>
           <a:prstGeom prst="rect">
             <a:avLst/>
@@ -8978,7 +8978,7 @@
               <a:buNone/>
             </a:pPr>
             <a:r>
-              <a:rPr lang="en-US" sz="1220" dirty="0">
+              <a:rPr lang="en-US" sz="1140" dirty="0">
                 <a:solidFill>
                   <a:srgbClr val="17364A"/>
                 </a:solidFill>
@@ -8986,9 +8986,9 @@
                 <a:ea typeface="Aptos" pitchFamily="34" charset="-122"/>
                 <a:cs typeface="Aptos" pitchFamily="34" charset="-120"/>
               </a:rPr>
-              <a:t>AI transparency template; sample AI use registry entry; public.</a:t>
-            </a:r>
-            <a:endParaRPr lang="en-US" sz="1220" dirty="0"/>
+              <a:t>AI transparency template; sample AI use registry.</a:t>
+            </a:r>
+            <a:endParaRPr lang="en-US" sz="1140" dirty="0"/>
           </a:p>
         </p:txBody>
       </p:sp>
@@ -9000,12 +9000,12 @@
         </p:nvSpPr>
         <p:spPr>
           <a:xfrm>
-            <a:off x="7635240" y="4184294"/>
-            <a:ext cx="3474720" cy="1466698"/>
+            <a:off x="7543800" y="4389120"/>
+            <a:ext cx="3611880" cy="1261872"/>
           </a:xfrm>
           <a:prstGeom prst="roundRect">
             <a:avLst>
-              <a:gd name="adj" fmla="val 7481"/>
+              <a:gd name="adj" fmla="val 8696"/>
             </a:avLst>
           </a:prstGeom>
           <a:solidFill>
@@ -9027,8 +9027,8 @@
         </p:nvSpPr>
         <p:spPr>
           <a:xfrm>
-            <a:off x="7799832" y="4330598"/>
-            <a:ext cx="3145536" cy="256032"/>
+            <a:off x="7708392" y="4517136"/>
+            <a:ext cx="3282696" cy="228600"/>
           </a:xfrm>
           <a:prstGeom prst="rect">
             <a:avLst/>
@@ -9044,7 +9044,7 @@
               <a:buNone/>
             </a:pPr>
             <a:r>
-              <a:rPr lang="en-US" sz="1300" b="1" dirty="0">
+              <a:rPr lang="en-US" sz="1220" b="1" dirty="0">
                 <a:solidFill>
                   <a:srgbClr val="0068B7"/>
                 </a:solidFill>
@@ -9054,7 +9054,7 @@
               </a:rPr>
               <a:t>What to document</a:t>
             </a:r>
-            <a:endParaRPr lang="en-US" sz="1300" dirty="0"/>
+            <a:endParaRPr lang="en-US" sz="1220" dirty="0"/>
           </a:p>
         </p:txBody>
       </p:sp>
@@ -9066,8 +9066,8 @@
         </p:nvSpPr>
         <p:spPr>
           <a:xfrm>
-            <a:off x="7799832" y="4659782"/>
-            <a:ext cx="3145536" cy="899770"/>
+            <a:off x="7708392" y="4828032"/>
+            <a:ext cx="3282696" cy="749808"/>
           </a:xfrm>
           <a:prstGeom prst="rect">
             <a:avLst/>
@@ -9085,7 +9085,7 @@
               <a:buNone/>
             </a:pPr>
             <a:r>
-              <a:rPr lang="en-US" sz="1320" dirty="0">
+              <a:rPr lang="en-US" sz="1220" dirty="0">
                 <a:solidFill>
                   <a:srgbClr val="17364A"/>
                 </a:solidFill>
@@ -9093,9 +9093,9 @@
                 <a:ea typeface="Aptos" pitchFamily="34" charset="-122"/>
                 <a:cs typeface="Aptos" pitchFamily="34" charset="-120"/>
               </a:rPr>
-              <a:t>Use the assignment to test whether you can explain the concept, apply it to a realistic public health situation, and identify what would need review before the work moves forward.</a:t>
-            </a:r>
-            <a:endParaRPr lang="en-US" sz="1320" dirty="0"/>
+              <a:t>Use the assignment to test whether you can explain the concept, apply it to a.</a:t>
+            </a:r>
+            <a:endParaRPr lang="en-US" sz="1220" dirty="0"/>
           </a:p>
         </p:txBody>
       </p:sp>
@@ -9386,8 +9386,8 @@
         </p:nvSpPr>
         <p:spPr>
           <a:xfrm>
-            <a:off x="868680" y="1508760"/>
-            <a:ext cx="6309360" cy="4160520"/>
+            <a:off x="822960" y="1463040"/>
+            <a:ext cx="6565392" cy="4343400"/>
           </a:xfrm>
           <a:prstGeom prst="rect">
             <a:avLst/>
@@ -9405,7 +9405,7 @@
               <a:buNone/>
             </a:pPr>
             <a:r>
-              <a:rPr lang="en-US" sz="2100" dirty="0">
+              <a:rPr lang="en-US" sz="1920" dirty="0">
                 <a:solidFill>
                   <a:srgbClr val="003A63"/>
                 </a:solidFill>
@@ -9413,16 +9413,16 @@
                 <a:ea typeface="Aptos" pitchFamily="34" charset="-122"/>
                 <a:cs typeface="Aptos" pitchFamily="34" charset="-120"/>
               </a:rPr>
-              <a:t>• 1. What is the strongest reason this module topic belongs in AI leadership and governance.</a:t>
-            </a:r>
-            <a:endParaRPr lang="en-US" sz="2100" dirty="0"/>
-          </a:p>
-          <a:p>
-            <a:pPr indent="0" marL="0">
-              <a:buNone/>
-            </a:pPr>
-            <a:r>
-              <a:rPr lang="en-US" sz="2100" dirty="0">
+              <a:t>• 1. What is the strongest reason this module topic belongs in AI leadership.</a:t>
+            </a:r>
+            <a:endParaRPr lang="en-US" sz="1920" dirty="0"/>
+          </a:p>
+          <a:p>
+            <a:pPr indent="0" marL="0">
+              <a:buNone/>
+            </a:pPr>
+            <a:r>
+              <a:rPr lang="en-US" sz="1920" dirty="0">
                 <a:solidFill>
                   <a:srgbClr val="003A63"/>
                 </a:solidFill>
@@ -9432,14 +9432,14 @@
               </a:rPr>
               <a:t>• 2. Which practice best supports accountable public health AI governance?</a:t>
             </a:r>
-            <a:endParaRPr lang="en-US" sz="2100" dirty="0"/>
-          </a:p>
-          <a:p>
-            <a:pPr indent="0" marL="0">
-              <a:buNone/>
-            </a:pPr>
-            <a:r>
-              <a:rPr lang="en-US" sz="2100" dirty="0">
+            <a:endParaRPr lang="en-US" sz="1920" dirty="0"/>
+          </a:p>
+          <a:p>
+            <a:pPr indent="0" marL="0">
+              <a:buNone/>
+            </a:pPr>
+            <a:r>
+              <a:rPr lang="en-US" sz="1920" dirty="0">
                 <a:solidFill>
                   <a:srgbClr val="003A63"/>
                 </a:solidFill>
@@ -9447,9 +9447,9 @@
                 <a:ea typeface="Aptos" pitchFamily="34" charset="-122"/>
                 <a:cs typeface="Aptos" pitchFamily="34" charset="-120"/>
               </a:rPr>
-              <a:t>• 3. When should an AI use case be escalated for leadership or governance review?</a:t>
-            </a:r>
-            <a:endParaRPr lang="en-US" sz="2100" dirty="0"/>
+              <a:t>• 3. When should an AI use case be escalated for leadership or governance.</a:t>
+            </a:r>
+            <a:endParaRPr lang="en-US" sz="1920" dirty="0"/>
           </a:p>
         </p:txBody>
       </p:sp>
@@ -9461,12 +9461,12 @@
         </p:nvSpPr>
         <p:spPr>
           <a:xfrm>
-            <a:off x="7635240" y="1325880"/>
-            <a:ext cx="3474720" cy="1255471"/>
+            <a:off x="7543800" y="1325880"/>
+            <a:ext cx="3611880" cy="1261872"/>
           </a:xfrm>
           <a:prstGeom prst="roundRect">
             <a:avLst>
-              <a:gd name="adj" fmla="val 8740"/>
+              <a:gd name="adj" fmla="val 8696"/>
             </a:avLst>
           </a:prstGeom>
           <a:solidFill>
@@ -9488,8 +9488,8 @@
         </p:nvSpPr>
         <p:spPr>
           <a:xfrm>
-            <a:off x="7799832" y="1472184"/>
-            <a:ext cx="3145536" cy="256032"/>
+            <a:off x="7708392" y="1453896"/>
+            <a:ext cx="3282696" cy="228600"/>
           </a:xfrm>
           <a:prstGeom prst="rect">
             <a:avLst/>
@@ -9505,7 +9505,7 @@
               <a:buNone/>
             </a:pPr>
             <a:r>
-              <a:rPr lang="en-US" sz="1300" b="1" dirty="0">
+              <a:rPr lang="en-US" sz="1220" b="1" dirty="0">
                 <a:solidFill>
                   <a:srgbClr val="0068B7"/>
                 </a:solidFill>
@@ -9515,7 +9515,7 @@
               </a:rPr>
               <a:t>Governance lens</a:t>
             </a:r>
-            <a:endParaRPr lang="en-US" sz="1300" dirty="0"/>
+            <a:endParaRPr lang="en-US" sz="1220" dirty="0"/>
           </a:p>
         </p:txBody>
       </p:sp>
@@ -9527,8 +9527,8 @@
         </p:nvSpPr>
         <p:spPr>
           <a:xfrm>
-            <a:off x="7799832" y="1801368"/>
-            <a:ext cx="3145536" cy="688543"/>
+            <a:off x="7708392" y="1764792"/>
+            <a:ext cx="3282696" cy="749808"/>
           </a:xfrm>
           <a:prstGeom prst="rect">
             <a:avLst/>
@@ -9546,7 +9546,7 @@
               <a:buNone/>
             </a:pPr>
             <a:r>
-              <a:rPr lang="en-US" sz="1320" dirty="0">
+              <a:rPr lang="en-US" sz="1220" dirty="0">
                 <a:solidFill>
                   <a:srgbClr val="17364A"/>
                 </a:solidFill>
@@ -9554,9 +9554,9 @@
                 <a:ea typeface="Aptos" pitchFamily="34" charset="-122"/>
                 <a:cs typeface="Aptos" pitchFamily="34" charset="-120"/>
               </a:rPr>
-              <a:t>1. What is the strongest reason this module topic belongs in AI leadership and governance training?</a:t>
-            </a:r>
-            <a:endParaRPr lang="en-US" sz="1320" dirty="0"/>
+              <a:t>1. What is the strongest reason this module topic belongs in AI leadership and.</a:t>
+            </a:r>
+            <a:endParaRPr lang="en-US" sz="1220" dirty="0"/>
           </a:p>
         </p:txBody>
       </p:sp>
@@ -9568,12 +9568,12 @@
         </p:nvSpPr>
         <p:spPr>
           <a:xfrm>
-            <a:off x="7635240" y="2718511"/>
-            <a:ext cx="3474720" cy="1328623"/>
+            <a:off x="7543800" y="2724912"/>
+            <a:ext cx="3611880" cy="1527048"/>
           </a:xfrm>
           <a:prstGeom prst="roundRect">
             <a:avLst>
-              <a:gd name="adj" fmla="val 8259"/>
+              <a:gd name="adj" fmla="val 7186"/>
             </a:avLst>
           </a:prstGeom>
           <a:solidFill>
@@ -9595,8 +9595,8 @@
         </p:nvSpPr>
         <p:spPr>
           <a:xfrm>
-            <a:off x="7799832" y="2864815"/>
-            <a:ext cx="3145536" cy="256032"/>
+            <a:off x="7708392" y="2852928"/>
+            <a:ext cx="3282696" cy="228600"/>
           </a:xfrm>
           <a:prstGeom prst="rect">
             <a:avLst/>
@@ -9612,7 +9612,7 @@
               <a:buNone/>
             </a:pPr>
             <a:r>
-              <a:rPr lang="en-US" sz="1300" b="1" dirty="0">
+              <a:rPr lang="en-US" sz="1220" b="1" dirty="0">
                 <a:solidFill>
                   <a:srgbClr val="0068B7"/>
                 </a:solidFill>
@@ -9622,7 +9622,7 @@
               </a:rPr>
               <a:t>Concept checkpoints</a:t>
             </a:r>
-            <a:endParaRPr lang="en-US" sz="1300" dirty="0"/>
+            <a:endParaRPr lang="en-US" sz="1220" dirty="0"/>
           </a:p>
         </p:txBody>
       </p:sp>
@@ -9634,8 +9634,8 @@
         </p:nvSpPr>
         <p:spPr>
           <a:xfrm>
-            <a:off x="7818120" y="3230575"/>
-            <a:ext cx="3090672" cy="670255"/>
+            <a:off x="7726680" y="3182112"/>
+            <a:ext cx="3227832" cy="960120"/>
           </a:xfrm>
           <a:prstGeom prst="rect">
             <a:avLst/>
@@ -9653,7 +9653,7 @@
               <a:buNone/>
             </a:pPr>
             <a:r>
-              <a:rPr lang="en-US" sz="1220" dirty="0">
+              <a:rPr lang="en-US" sz="1140" dirty="0">
                 <a:solidFill>
                   <a:srgbClr val="17364A"/>
                 </a:solidFill>
@@ -9663,14 +9663,14 @@
               </a:rPr>
               <a:t>1.</a:t>
             </a:r>
-            <a:endParaRPr lang="en-US" sz="1220" dirty="0"/>
-          </a:p>
-          <a:p>
-            <a:pPr indent="0" marL="0">
-              <a:buNone/>
-            </a:pPr>
-            <a:r>
-              <a:rPr lang="en-US" sz="1220" dirty="0">
+            <a:endParaRPr lang="en-US" sz="1140" dirty="0"/>
+          </a:p>
+          <a:p>
+            <a:pPr indent="0" marL="0">
+              <a:buNone/>
+            </a:pPr>
+            <a:r>
+              <a:rPr lang="en-US" sz="1140" dirty="0">
                 <a:solidFill>
                   <a:srgbClr val="17364A"/>
                 </a:solidFill>
@@ -9678,16 +9678,16 @@
                 <a:ea typeface="Aptos" pitchFamily="34" charset="-122"/>
                 <a:cs typeface="Aptos" pitchFamily="34" charset="-120"/>
               </a:rPr>
-              <a:t>What is the strongest reason this module topic belongs in AI.</a:t>
-            </a:r>
-            <a:endParaRPr lang="en-US" sz="1220" dirty="0"/>
-          </a:p>
-          <a:p>
-            <a:pPr indent="0" marL="0">
-              <a:buNone/>
-            </a:pPr>
-            <a:r>
-              <a:rPr lang="en-US" sz="1220" dirty="0">
+              <a:t>What is the strongest reason this module topic.</a:t>
+            </a:r>
+            <a:endParaRPr lang="en-US" sz="1140" dirty="0"/>
+          </a:p>
+          <a:p>
+            <a:pPr indent="0" marL="0">
+              <a:buNone/>
+            </a:pPr>
+            <a:r>
+              <a:rPr lang="en-US" sz="1140" dirty="0">
                 <a:solidFill>
                   <a:srgbClr val="17364A"/>
                 </a:solidFill>
@@ -9697,7 +9697,7 @@
               </a:rPr>
               <a:t>2.</a:t>
             </a:r>
-            <a:endParaRPr lang="en-US" sz="1220" dirty="0"/>
+            <a:endParaRPr lang="en-US" sz="1140" dirty="0"/>
           </a:p>
         </p:txBody>
       </p:sp>
@@ -9709,12 +9709,12 @@
         </p:nvSpPr>
         <p:spPr>
           <a:xfrm>
-            <a:off x="7635240" y="4184294"/>
-            <a:ext cx="3474720" cy="1466698"/>
+            <a:off x="7543800" y="4389120"/>
+            <a:ext cx="3611880" cy="1261872"/>
           </a:xfrm>
           <a:prstGeom prst="roundRect">
             <a:avLst>
-              <a:gd name="adj" fmla="val 7481"/>
+              <a:gd name="adj" fmla="val 8696"/>
             </a:avLst>
           </a:prstGeom>
           <a:solidFill>
@@ -9736,8 +9736,8 @@
         </p:nvSpPr>
         <p:spPr>
           <a:xfrm>
-            <a:off x="7799832" y="4330598"/>
-            <a:ext cx="3145536" cy="256032"/>
+            <a:off x="7708392" y="4517136"/>
+            <a:ext cx="3282696" cy="228600"/>
           </a:xfrm>
           <a:prstGeom prst="rect">
             <a:avLst/>
@@ -9753,7 +9753,7 @@
               <a:buNone/>
             </a:pPr>
             <a:r>
-              <a:rPr lang="en-US" sz="1300" b="1" dirty="0">
+              <a:rPr lang="en-US" sz="1220" b="1" dirty="0">
                 <a:solidFill>
                   <a:srgbClr val="0068B7"/>
                 </a:solidFill>
@@ -9763,7 +9763,7 @@
               </a:rPr>
               <a:t>What to document</a:t>
             </a:r>
-            <a:endParaRPr lang="en-US" sz="1300" dirty="0"/>
+            <a:endParaRPr lang="en-US" sz="1220" dirty="0"/>
           </a:p>
         </p:txBody>
       </p:sp>
@@ -9775,8 +9775,8 @@
         </p:nvSpPr>
         <p:spPr>
           <a:xfrm>
-            <a:off x="7799832" y="4659782"/>
-            <a:ext cx="3145536" cy="899770"/>
+            <a:off x="7708392" y="4828032"/>
+            <a:ext cx="3282696" cy="749808"/>
           </a:xfrm>
           <a:prstGeom prst="rect">
             <a:avLst/>
@@ -9794,7 +9794,7 @@
               <a:buNone/>
             </a:pPr>
             <a:r>
-              <a:rPr lang="en-US" sz="1320" dirty="0">
+              <a:rPr lang="en-US" sz="1220" dirty="0">
                 <a:solidFill>
                   <a:srgbClr val="17364A"/>
                 </a:solidFill>
@@ -9802,9 +9802,9 @@
                 <a:ea typeface="Aptos" pitchFamily="34" charset="-122"/>
                 <a:cs typeface="Aptos" pitchFamily="34" charset="-120"/>
               </a:rPr>
-              <a:t>Use the assignment to test whether you can explain the concept, apply it to a realistic public health situation, and identify what would need review before the work moves forward.</a:t>
-            </a:r>
-            <a:endParaRPr lang="en-US" sz="1320" dirty="0"/>
+              <a:t>Use the assignment to test whether you can explain the concept, apply it to a.</a:t>
+            </a:r>
+            <a:endParaRPr lang="en-US" sz="1220" dirty="0"/>
           </a:p>
         </p:txBody>
       </p:sp>
@@ -10122,7 +10122,7 @@
                 <a:ea typeface="Aptos" pitchFamily="34" charset="-122"/>
                 <a:cs typeface="Aptos" pitchFamily="34" charset="-120"/>
               </a:rPr>
-              <a:t>• Public health agencies have a responsibility to explain how AI is used in ways that affect.</a:t>
+              <a:t>• Public health agencies have a responsibility to explain how AI is used in.</a:t>
             </a:r>
             <a:endParaRPr lang="en-US" sz="2100" dirty="0"/>
           </a:p>
@@ -10139,7 +10139,7 @@
                 <a:ea typeface="Aptos" pitchFamily="34" charset="-122"/>
                 <a:cs typeface="Aptos" pitchFamily="34" charset="-120"/>
               </a:rPr>
-              <a:t>• Transparency reporting helps agencies communicate what AI tools are in use, why they are used,.</a:t>
+              <a:t>• Transparency reporting helps agencies communicate what AI tools are in use,.</a:t>
             </a:r>
             <a:endParaRPr lang="en-US" sz="2100" dirty="0"/>
           </a:p>
@@ -10156,7 +10156,7 @@
                 <a:ea typeface="Aptos" pitchFamily="34" charset="-122"/>
                 <a:cs typeface="Aptos" pitchFamily="34" charset="-120"/>
               </a:rPr>
-              <a:t>• This module helps leaders design AI transparency practices that are meaningful, not.</a:t>
+              <a:t>• This module helps leaders design AI transparency practices that are.</a:t>
             </a:r>
             <a:endParaRPr lang="en-US" sz="2100" dirty="0"/>
           </a:p>
@@ -10197,8 +10197,8 @@
         </p:nvSpPr>
         <p:spPr>
           <a:xfrm>
-            <a:off x="8074152" y="1563624"/>
-            <a:ext cx="2825496" cy="256032"/>
+            <a:off x="8074152" y="1545336"/>
+            <a:ext cx="2825496" cy="228600"/>
           </a:xfrm>
           <a:prstGeom prst="rect">
             <a:avLst/>
@@ -10214,7 +10214,7 @@
               <a:buNone/>
             </a:pPr>
             <a:r>
-              <a:rPr lang="en-US" sz="1300" b="1" dirty="0">
+              <a:rPr lang="en-US" sz="1220" b="1" dirty="0">
                 <a:solidFill>
                   <a:srgbClr val="0068B7"/>
                 </a:solidFill>
@@ -10224,7 +10224,7 @@
               </a:rPr>
               <a:t>Module details</a:t>
             </a:r>
-            <a:endParaRPr lang="en-US" sz="1300" dirty="0"/>
+            <a:endParaRPr lang="en-US" sz="1220" dirty="0"/>
           </a:p>
         </p:txBody>
       </p:sp>
@@ -10236,8 +10236,8 @@
         </p:nvSpPr>
         <p:spPr>
           <a:xfrm>
-            <a:off x="8074152" y="1892808"/>
-            <a:ext cx="2825496" cy="1353312"/>
+            <a:off x="8074152" y="1856232"/>
+            <a:ext cx="2825496" cy="1408176"/>
           </a:xfrm>
           <a:prstGeom prst="rect">
             <a:avLst/>
@@ -10255,7 +10255,7 @@
               <a:buNone/>
             </a:pPr>
             <a:r>
-              <a:rPr lang="en-US" sz="1320" dirty="0">
+              <a:rPr lang="en-US" sz="1220" dirty="0">
                 <a:solidFill>
                   <a:srgbClr val="17364A"/>
                 </a:solidFill>
@@ -10263,9 +10263,9 @@
                 <a:ea typeface="Aptos" pitchFamily="34" charset="-122"/>
                 <a:cs typeface="Aptos" pitchFamily="34" charset="-120"/>
               </a:rPr>
-              <a:t>Level: advanced/leadership Primary track: Governance and Security Track Appears in tracks: governance-security</a:t>
-            </a:r>
-            <a:endParaRPr lang="en-US" sz="1320" dirty="0"/>
+              <a:t>Level: advanced/leadership Primary track: Governance and Security Track Appears.</a:t>
+            </a:r>
+            <a:endParaRPr lang="en-US" sz="1220" dirty="0"/>
           </a:p>
         </p:txBody>
       </p:sp>
@@ -10304,8 +10304,8 @@
         </p:nvSpPr>
         <p:spPr>
           <a:xfrm>
-            <a:off x="8074152" y="3822192"/>
-            <a:ext cx="2825496" cy="256032"/>
+            <a:off x="8074152" y="3803904"/>
+            <a:ext cx="2825496" cy="228600"/>
           </a:xfrm>
           <a:prstGeom prst="rect">
             <a:avLst/>
@@ -10321,7 +10321,7 @@
               <a:buNone/>
             </a:pPr>
             <a:r>
-              <a:rPr lang="en-US" sz="1300" b="1" dirty="0">
+              <a:rPr lang="en-US" sz="1220" b="1" dirty="0">
                 <a:solidFill>
                   <a:srgbClr val="0068B7"/>
                 </a:solidFill>
@@ -10331,7 +10331,7 @@
               </a:rPr>
               <a:t>Learning sequence</a:t>
             </a:r>
-            <a:endParaRPr lang="en-US" sz="1300" dirty="0"/>
+            <a:endParaRPr lang="en-US" sz="1220" dirty="0"/>
           </a:p>
         </p:txBody>
       </p:sp>
@@ -10343,8 +10343,8 @@
         </p:nvSpPr>
         <p:spPr>
           <a:xfrm>
-            <a:off x="8092440" y="4187952"/>
-            <a:ext cx="2770632" cy="1033272"/>
+            <a:off x="8092440" y="4133088"/>
+            <a:ext cx="2770632" cy="1124712"/>
           </a:xfrm>
           <a:prstGeom prst="rect">
             <a:avLst/>
@@ -10362,7 +10362,7 @@
               <a:buNone/>
             </a:pPr>
             <a:r>
-              <a:rPr lang="en-US" sz="1220" dirty="0">
+              <a:rPr lang="en-US" sz="1140" dirty="0">
                 <a:solidFill>
                   <a:srgbClr val="17364A"/>
                 </a:solidFill>
@@ -10372,14 +10372,14 @@
               </a:rPr>
               <a:t>Read the module for shared vocabulary and context.</a:t>
             </a:r>
-            <a:endParaRPr lang="en-US" sz="1220" dirty="0"/>
-          </a:p>
-          <a:p>
-            <a:pPr indent="0" marL="0">
-              <a:buNone/>
-            </a:pPr>
-            <a:r>
-              <a:rPr lang="en-US" sz="1220" dirty="0">
+            <a:endParaRPr lang="en-US" sz="1140" dirty="0"/>
+          </a:p>
+          <a:p>
+            <a:pPr indent="0" marL="0">
+              <a:buNone/>
+            </a:pPr>
+            <a:r>
+              <a:rPr lang="en-US" sz="1140" dirty="0">
                 <a:solidFill>
                   <a:srgbClr val="17364A"/>
                 </a:solidFill>
@@ -10387,16 +10387,16 @@
                 <a:ea typeface="Aptos" pitchFamily="34" charset="-122"/>
                 <a:cs typeface="Aptos" pitchFamily="34" charset="-120"/>
               </a:rPr>
-              <a:t>Complete the practical exercise to apply the concept.</a:t>
-            </a:r>
-            <a:endParaRPr lang="en-US" sz="1220" dirty="0"/>
-          </a:p>
-          <a:p>
-            <a:pPr indent="0" marL="0">
-              <a:buNone/>
-            </a:pPr>
-            <a:r>
-              <a:rPr lang="en-US" sz="1220" dirty="0">
+              <a:t>Complete the practical exercise to apply the.</a:t>
+            </a:r>
+            <a:endParaRPr lang="en-US" sz="1140" dirty="0"/>
+          </a:p>
+          <a:p>
+            <a:pPr indent="0" marL="0">
+              <a:buNone/>
+            </a:pPr>
+            <a:r>
+              <a:rPr lang="en-US" sz="1140" dirty="0">
                 <a:solidFill>
                   <a:srgbClr val="17364A"/>
                 </a:solidFill>
@@ -10406,7 +10406,7 @@
               </a:rPr>
               <a:t>Use the notes and references for deeper review.</a:t>
             </a:r>
-            <a:endParaRPr lang="en-US" sz="1220" dirty="0"/>
+            <a:endParaRPr lang="en-US" sz="1140" dirty="0"/>
           </a:p>
         </p:txBody>
       </p:sp>
@@ -10697,8 +10697,8 @@
         </p:nvSpPr>
         <p:spPr>
           <a:xfrm>
-            <a:off x="868680" y="1508760"/>
-            <a:ext cx="6309360" cy="4160520"/>
+            <a:off x="822960" y="1463040"/>
+            <a:ext cx="6565392" cy="4343400"/>
           </a:xfrm>
           <a:prstGeom prst="rect">
             <a:avLst/>
@@ -10716,7 +10716,7 @@
               <a:buNone/>
             </a:pPr>
             <a:r>
-              <a:rPr lang="en-US" sz="2100" dirty="0">
+              <a:rPr lang="en-US" sz="1920" dirty="0">
                 <a:solidFill>
                   <a:srgbClr val="003A63"/>
                 </a:solidFill>
@@ -10726,14 +10726,14 @@
               </a:rPr>
               <a:t>• NIST Artificial Intelligence Risk Management Framework (AI RMF 1.0):.</a:t>
             </a:r>
-            <a:endParaRPr lang="en-US" sz="2100" dirty="0"/>
-          </a:p>
-          <a:p>
-            <a:pPr indent="0" marL="0">
-              <a:buNone/>
-            </a:pPr>
-            <a:r>
-              <a:rPr lang="en-US" sz="2100" dirty="0">
+            <a:endParaRPr lang="en-US" sz="1920" dirty="0"/>
+          </a:p>
+          <a:p>
+            <a:pPr indent="0" marL="0">
+              <a:buNone/>
+            </a:pPr>
+            <a:r>
+              <a:rPr lang="en-US" sz="1920" dirty="0">
                 <a:solidFill>
                   <a:srgbClr val="003A63"/>
                 </a:solidFill>
@@ -10743,14 +10743,14 @@
               </a:rPr>
               <a:t>• NIST Generative AI Profile:.</a:t>
             </a:r>
-            <a:endParaRPr lang="en-US" sz="2100" dirty="0"/>
-          </a:p>
-          <a:p>
-            <a:pPr indent="0" marL="0">
-              <a:buNone/>
-            </a:pPr>
-            <a:r>
-              <a:rPr lang="en-US" sz="2100" dirty="0">
+            <a:endParaRPr lang="en-US" sz="1920" dirty="0"/>
+          </a:p>
+          <a:p>
+            <a:pPr indent="0" marL="0">
+              <a:buNone/>
+            </a:pPr>
+            <a:r>
+              <a:rPr lang="en-US" sz="1920" dirty="0">
                 <a:solidFill>
                   <a:srgbClr val="003A63"/>
                 </a:solidFill>
@@ -10760,7 +10760,7 @@
               </a:rPr>
               <a:t>• NIST Privacy Framework</a:t>
             </a:r>
-            <a:endParaRPr lang="en-US" sz="2100" dirty="0"/>
+            <a:endParaRPr lang="en-US" sz="1920" dirty="0"/>
           </a:p>
         </p:txBody>
       </p:sp>
@@ -10772,12 +10772,12 @@
         </p:nvSpPr>
         <p:spPr>
           <a:xfrm>
-            <a:off x="7635240" y="1325880"/>
-            <a:ext cx="3474720" cy="1207008"/>
+            <a:off x="7543800" y="1325880"/>
+            <a:ext cx="3611880" cy="1261872"/>
           </a:xfrm>
           <a:prstGeom prst="roundRect">
             <a:avLst>
-              <a:gd name="adj" fmla="val 9091"/>
+              <a:gd name="adj" fmla="val 8696"/>
             </a:avLst>
           </a:prstGeom>
           <a:solidFill>
@@ -10799,8 +10799,8 @@
         </p:nvSpPr>
         <p:spPr>
           <a:xfrm>
-            <a:off x="7799832" y="1472184"/>
-            <a:ext cx="3145536" cy="256032"/>
+            <a:off x="7708392" y="1453896"/>
+            <a:ext cx="3282696" cy="228600"/>
           </a:xfrm>
           <a:prstGeom prst="rect">
             <a:avLst/>
@@ -10816,7 +10816,7 @@
               <a:buNone/>
             </a:pPr>
             <a:r>
-              <a:rPr lang="en-US" sz="1300" b="1" dirty="0">
+              <a:rPr lang="en-US" sz="1220" b="1" dirty="0">
                 <a:solidFill>
                   <a:srgbClr val="0068B7"/>
                 </a:solidFill>
@@ -10826,7 +10826,7 @@
               </a:rPr>
               <a:t>Governance lens</a:t>
             </a:r>
-            <a:endParaRPr lang="en-US" sz="1300" dirty="0"/>
+            <a:endParaRPr lang="en-US" sz="1220" dirty="0"/>
           </a:p>
         </p:txBody>
       </p:sp>
@@ -10838,8 +10838,8 @@
         </p:nvSpPr>
         <p:spPr>
           <a:xfrm>
-            <a:off x="7799832" y="1801368"/>
-            <a:ext cx="3145536" cy="640080"/>
+            <a:off x="7708392" y="1764792"/>
+            <a:ext cx="3282696" cy="749808"/>
           </a:xfrm>
           <a:prstGeom prst="rect">
             <a:avLst/>
@@ -10857,7 +10857,7 @@
               <a:buNone/>
             </a:pPr>
             <a:r>
-              <a:rPr lang="en-US" sz="1320" dirty="0">
+              <a:rPr lang="en-US" sz="1220" dirty="0">
                 <a:solidFill>
                   <a:srgbClr val="17364A"/>
                 </a:solidFill>
@@ -10867,7 +10867,7 @@
               </a:rPr>
               <a:t>NIST Artificial Intelligence Risk Management Framework (AI RMF 1.0):.</a:t>
             </a:r>
-            <a:endParaRPr lang="en-US" sz="1320" dirty="0"/>
+            <a:endParaRPr lang="en-US" sz="1220" dirty="0"/>
           </a:p>
         </p:txBody>
       </p:sp>
@@ -10879,12 +10879,12 @@
         </p:nvSpPr>
         <p:spPr>
           <a:xfrm>
-            <a:off x="7635240" y="2670048"/>
-            <a:ext cx="3474720" cy="1377086"/>
+            <a:off x="7543800" y="2724912"/>
+            <a:ext cx="3611880" cy="1527048"/>
           </a:xfrm>
           <a:prstGeom prst="roundRect">
             <a:avLst>
-              <a:gd name="adj" fmla="val 7968"/>
+              <a:gd name="adj" fmla="val 7186"/>
             </a:avLst>
           </a:prstGeom>
           <a:solidFill>
@@ -10906,8 +10906,8 @@
         </p:nvSpPr>
         <p:spPr>
           <a:xfrm>
-            <a:off x="7799832" y="2816352"/>
-            <a:ext cx="3145536" cy="256032"/>
+            <a:off x="7708392" y="2852928"/>
+            <a:ext cx="3282696" cy="228600"/>
           </a:xfrm>
           <a:prstGeom prst="rect">
             <a:avLst/>
@@ -10923,7 +10923,7 @@
               <a:buNone/>
             </a:pPr>
             <a:r>
-              <a:rPr lang="en-US" sz="1300" b="1" dirty="0">
+              <a:rPr lang="en-US" sz="1220" b="1" dirty="0">
                 <a:solidFill>
                   <a:srgbClr val="0068B7"/>
                 </a:solidFill>
@@ -10933,7 +10933,7 @@
               </a:rPr>
               <a:t>Concept checkpoints</a:t>
             </a:r>
-            <a:endParaRPr lang="en-US" sz="1300" dirty="0"/>
+            <a:endParaRPr lang="en-US" sz="1220" dirty="0"/>
           </a:p>
         </p:txBody>
       </p:sp>
@@ -10945,8 +10945,8 @@
         </p:nvSpPr>
         <p:spPr>
           <a:xfrm>
-            <a:off x="7818120" y="3182112"/>
-            <a:ext cx="3090672" cy="718718"/>
+            <a:off x="7726680" y="3182112"/>
+            <a:ext cx="3227832" cy="960120"/>
           </a:xfrm>
           <a:prstGeom prst="rect">
             <a:avLst/>
@@ -10964,7 +10964,7 @@
               <a:buNone/>
             </a:pPr>
             <a:r>
-              <a:rPr lang="en-US" sz="1220" dirty="0">
+              <a:rPr lang="en-US" sz="1140" dirty="0">
                 <a:solidFill>
                   <a:srgbClr val="17364A"/>
                 </a:solidFill>
@@ -10972,16 +10972,16 @@
                 <a:ea typeface="Aptos" pitchFamily="34" charset="-122"/>
                 <a:cs typeface="Aptos" pitchFamily="34" charset="-120"/>
               </a:rPr>
-              <a:t>NIST Artificial Intelligence Risk Management Framework (AI RMF.</a:t>
-            </a:r>
-            <a:endParaRPr lang="en-US" sz="1220" dirty="0"/>
-          </a:p>
-          <a:p>
-            <a:pPr indent="0" marL="0">
-              <a:buNone/>
-            </a:pPr>
-            <a:r>
-              <a:rPr lang="en-US" sz="1220" dirty="0">
+              <a:t>NIST Artificial Intelligence Risk Management.</a:t>
+            </a:r>
+            <a:endParaRPr lang="en-US" sz="1140" dirty="0"/>
+          </a:p>
+          <a:p>
+            <a:pPr indent="0" marL="0">
+              <a:buNone/>
+            </a:pPr>
+            <a:r>
+              <a:rPr lang="en-US" sz="1140" dirty="0">
                 <a:solidFill>
                   <a:srgbClr val="17364A"/>
                 </a:solidFill>
@@ -10989,16 +10989,16 @@
                 <a:ea typeface="Aptos" pitchFamily="34" charset="-122"/>
                 <a:cs typeface="Aptos" pitchFamily="34" charset="-120"/>
               </a:rPr>
-              <a:t>CDC Public Health Data Strategy and Data Modernization resources:.</a:t>
-            </a:r>
-            <a:endParaRPr lang="en-US" sz="1220" dirty="0"/>
-          </a:p>
-          <a:p>
-            <a:pPr indent="0" marL="0">
-              <a:buNone/>
-            </a:pPr>
-            <a:r>
-              <a:rPr lang="en-US" sz="1220" dirty="0">
+              <a:t>CDC Public Health Data Strategy and Data.</a:t>
+            </a:r>
+            <a:endParaRPr lang="en-US" sz="1140" dirty="0"/>
+          </a:p>
+          <a:p>
+            <a:pPr indent="0" marL="0">
+              <a:buNone/>
+            </a:pPr>
+            <a:r>
+              <a:rPr lang="en-US" sz="1140" dirty="0">
                 <a:solidFill>
                   <a:srgbClr val="17364A"/>
                 </a:solidFill>
@@ -11006,9 +11006,9 @@
                 <a:ea typeface="Aptos" pitchFamily="34" charset="-122"/>
                 <a:cs typeface="Aptos" pitchFamily="34" charset="-120"/>
               </a:rPr>
-              <a:t>WHO Ethics and Governance of Artificial Intelligence for Health:.</a:t>
-            </a:r>
-            <a:endParaRPr lang="en-US" sz="1220" dirty="0"/>
+              <a:t>WHO Ethics and Governance of Artificial.</a:t>
+            </a:r>
+            <a:endParaRPr lang="en-US" sz="1140" dirty="0"/>
           </a:p>
         </p:txBody>
       </p:sp>
@@ -11020,12 +11020,12 @@
         </p:nvSpPr>
         <p:spPr>
           <a:xfrm>
-            <a:off x="7635240" y="4184294"/>
-            <a:ext cx="3474720" cy="1466698"/>
+            <a:off x="7543800" y="4389120"/>
+            <a:ext cx="3611880" cy="1261872"/>
           </a:xfrm>
           <a:prstGeom prst="roundRect">
             <a:avLst>
-              <a:gd name="adj" fmla="val 7481"/>
+              <a:gd name="adj" fmla="val 8696"/>
             </a:avLst>
           </a:prstGeom>
           <a:solidFill>
@@ -11047,8 +11047,8 @@
         </p:nvSpPr>
         <p:spPr>
           <a:xfrm>
-            <a:off x="7799832" y="4330598"/>
-            <a:ext cx="3145536" cy="256032"/>
+            <a:off x="7708392" y="4517136"/>
+            <a:ext cx="3282696" cy="228600"/>
           </a:xfrm>
           <a:prstGeom prst="rect">
             <a:avLst/>
@@ -11064,7 +11064,7 @@
               <a:buNone/>
             </a:pPr>
             <a:r>
-              <a:rPr lang="en-US" sz="1300" b="1" dirty="0">
+              <a:rPr lang="en-US" sz="1220" b="1" dirty="0">
                 <a:solidFill>
                   <a:srgbClr val="0068B7"/>
                 </a:solidFill>
@@ -11074,7 +11074,7 @@
               </a:rPr>
               <a:t>What to document</a:t>
             </a:r>
-            <a:endParaRPr lang="en-US" sz="1300" dirty="0"/>
+            <a:endParaRPr lang="en-US" sz="1220" dirty="0"/>
           </a:p>
         </p:txBody>
       </p:sp>
@@ -11086,8 +11086,8 @@
         </p:nvSpPr>
         <p:spPr>
           <a:xfrm>
-            <a:off x="7799832" y="4659782"/>
-            <a:ext cx="3145536" cy="899770"/>
+            <a:off x="7708392" y="4828032"/>
+            <a:ext cx="3282696" cy="749808"/>
           </a:xfrm>
           <a:prstGeom prst="rect">
             <a:avLst/>
@@ -11105,7 +11105,7 @@
               <a:buNone/>
             </a:pPr>
             <a:r>
-              <a:rPr lang="en-US" sz="1320" dirty="0">
+              <a:rPr lang="en-US" sz="1220" dirty="0">
                 <a:solidFill>
                   <a:srgbClr val="17364A"/>
                 </a:solidFill>
@@ -11113,9 +11113,9 @@
                 <a:ea typeface="Aptos" pitchFamily="34" charset="-122"/>
                 <a:cs typeface="Aptos" pitchFamily="34" charset="-120"/>
               </a:rPr>
-              <a:t>Connect the concept to public health purpose, responsible use, required safeguards, documentation, and the next action a department should take.</a:t>
-            </a:r>
-            <a:endParaRPr lang="en-US" sz="1320" dirty="0"/>
+              <a:t>Connect the concept to public health purpose, responsible use, required.</a:t>
+            </a:r>
+            <a:endParaRPr lang="en-US" sz="1220" dirty="0"/>
           </a:p>
         </p:txBody>
       </p:sp>
@@ -11406,8 +11406,8 @@
         </p:nvSpPr>
         <p:spPr>
           <a:xfrm>
-            <a:off x="868680" y="1508760"/>
-            <a:ext cx="6309360" cy="4160520"/>
+            <a:off x="822960" y="1463040"/>
+            <a:ext cx="6565392" cy="4343400"/>
           </a:xfrm>
           <a:prstGeom prst="rect">
             <a:avLst/>
@@ -11425,7 +11425,7 @@
               <a:buNone/>
             </a:pPr>
             <a:r>
-              <a:rPr lang="en-US" sz="2100" dirty="0">
+              <a:rPr lang="en-US" sz="1920" dirty="0">
                 <a:solidFill>
                   <a:srgbClr val="003A63"/>
                 </a:solidFill>
@@ -11433,16 +11433,16 @@
                 <a:ea typeface="Aptos" pitchFamily="34" charset="-122"/>
                 <a:cs typeface="Aptos" pitchFamily="34" charset="-120"/>
               </a:rPr>
-              <a:t>• OMB Memorandum M-24-10 on federal AI governance, risk management, and innovation, where.</a:t>
-            </a:r>
-            <a:endParaRPr lang="en-US" sz="2100" dirty="0"/>
-          </a:p>
-          <a:p>
-            <a:pPr indent="0" marL="0">
-              <a:buNone/>
-            </a:pPr>
-            <a:r>
-              <a:rPr lang="en-US" sz="2100" dirty="0">
+              <a:t>• OMB Memorandum M-24-10 on federal AI governance, risk management, and.</a:t>
+            </a:r>
+            <a:endParaRPr lang="en-US" sz="1920" dirty="0"/>
+          </a:p>
+          <a:p>
+            <a:pPr indent="0" marL="0">
+              <a:buNone/>
+            </a:pPr>
+            <a:r>
+              <a:rPr lang="en-US" sz="1920" dirty="0">
                 <a:solidFill>
                   <a:srgbClr val="003A63"/>
                 </a:solidFill>
@@ -11450,9 +11450,9 @@
                 <a:ea typeface="Aptos" pitchFamily="34" charset="-122"/>
                 <a:cs typeface="Aptos" pitchFamily="34" charset="-120"/>
               </a:rPr>
-              <a:t>• Agency strategic plans, procurement policies, privacy policies, cybersecurity policies, records.</a:t>
-            </a:r>
-            <a:endParaRPr lang="en-US" sz="2100" dirty="0"/>
+              <a:t>• Agency strategic plans, procurement policies, privacy policies,.</a:t>
+            </a:r>
+            <a:endParaRPr lang="en-US" sz="1920" dirty="0"/>
           </a:p>
         </p:txBody>
       </p:sp>
@@ -11464,12 +11464,12 @@
         </p:nvSpPr>
         <p:spPr>
           <a:xfrm>
-            <a:off x="7635240" y="1325880"/>
-            <a:ext cx="3474720" cy="1255471"/>
+            <a:off x="7543800" y="1325880"/>
+            <a:ext cx="3611880" cy="1261872"/>
           </a:xfrm>
           <a:prstGeom prst="roundRect">
             <a:avLst>
-              <a:gd name="adj" fmla="val 8740"/>
+              <a:gd name="adj" fmla="val 8696"/>
             </a:avLst>
           </a:prstGeom>
           <a:solidFill>
@@ -11491,8 +11491,8 @@
         </p:nvSpPr>
         <p:spPr>
           <a:xfrm>
-            <a:off x="7799832" y="1472184"/>
-            <a:ext cx="3145536" cy="256032"/>
+            <a:off x="7708392" y="1453896"/>
+            <a:ext cx="3282696" cy="228600"/>
           </a:xfrm>
           <a:prstGeom prst="rect">
             <a:avLst/>
@@ -11508,7 +11508,7 @@
               <a:buNone/>
             </a:pPr>
             <a:r>
-              <a:rPr lang="en-US" sz="1300" b="1" dirty="0">
+              <a:rPr lang="en-US" sz="1220" b="1" dirty="0">
                 <a:solidFill>
                   <a:srgbClr val="0068B7"/>
                 </a:solidFill>
@@ -11518,7 +11518,7 @@
               </a:rPr>
               <a:t>Governance lens</a:t>
             </a:r>
-            <a:endParaRPr lang="en-US" sz="1300" dirty="0"/>
+            <a:endParaRPr lang="en-US" sz="1220" dirty="0"/>
           </a:p>
         </p:txBody>
       </p:sp>
@@ -11530,8 +11530,8 @@
         </p:nvSpPr>
         <p:spPr>
           <a:xfrm>
-            <a:off x="7799832" y="1801368"/>
-            <a:ext cx="3145536" cy="688543"/>
+            <a:off x="7708392" y="1764792"/>
+            <a:ext cx="3282696" cy="749808"/>
           </a:xfrm>
           <a:prstGeom prst="rect">
             <a:avLst/>
@@ -11549,7 +11549,7 @@
               <a:buNone/>
             </a:pPr>
             <a:r>
-              <a:rPr lang="en-US" sz="1320" dirty="0">
+              <a:rPr lang="en-US" sz="1220" dirty="0">
                 <a:solidFill>
                   <a:srgbClr val="17364A"/>
                 </a:solidFill>
@@ -11557,9 +11557,9 @@
                 <a:ea typeface="Aptos" pitchFamily="34" charset="-122"/>
                 <a:cs typeface="Aptos" pitchFamily="34" charset="-120"/>
               </a:rPr>
-              <a:t>OMB Memorandum M-24-10 on federal AI governance, risk management, and innovation, where relevant to.</a:t>
-            </a:r>
-            <a:endParaRPr lang="en-US" sz="1320" dirty="0"/>
+              <a:t>OMB Memorandum M-24-10 on federal AI governance, risk management, and.</a:t>
+            </a:r>
+            <a:endParaRPr lang="en-US" sz="1220" dirty="0"/>
           </a:p>
         </p:txBody>
       </p:sp>
@@ -11571,12 +11571,12 @@
         </p:nvSpPr>
         <p:spPr>
           <a:xfrm>
-            <a:off x="7635240" y="2718511"/>
-            <a:ext cx="3474720" cy="1328623"/>
+            <a:off x="7543800" y="2724912"/>
+            <a:ext cx="3611880" cy="1527048"/>
           </a:xfrm>
           <a:prstGeom prst="roundRect">
             <a:avLst>
-              <a:gd name="adj" fmla="val 8259"/>
+              <a:gd name="adj" fmla="val 7186"/>
             </a:avLst>
           </a:prstGeom>
           <a:solidFill>
@@ -11598,8 +11598,8 @@
         </p:nvSpPr>
         <p:spPr>
           <a:xfrm>
-            <a:off x="7799832" y="2864815"/>
-            <a:ext cx="3145536" cy="256032"/>
+            <a:off x="7708392" y="2852928"/>
+            <a:ext cx="3282696" cy="228600"/>
           </a:xfrm>
           <a:prstGeom prst="rect">
             <a:avLst/>
@@ -11615,7 +11615,7 @@
               <a:buNone/>
             </a:pPr>
             <a:r>
-              <a:rPr lang="en-US" sz="1300" b="1" dirty="0">
+              <a:rPr lang="en-US" sz="1220" b="1" dirty="0">
                 <a:solidFill>
                   <a:srgbClr val="0068B7"/>
                 </a:solidFill>
@@ -11625,7 +11625,7 @@
               </a:rPr>
               <a:t>Concept checkpoints</a:t>
             </a:r>
-            <a:endParaRPr lang="en-US" sz="1300" dirty="0"/>
+            <a:endParaRPr lang="en-US" sz="1220" dirty="0"/>
           </a:p>
         </p:txBody>
       </p:sp>
@@ -11637,8 +11637,8 @@
         </p:nvSpPr>
         <p:spPr>
           <a:xfrm>
-            <a:off x="7818120" y="3230575"/>
-            <a:ext cx="3090672" cy="670255"/>
+            <a:off x="7726680" y="3182112"/>
+            <a:ext cx="3227832" cy="960120"/>
           </a:xfrm>
           <a:prstGeom prst="rect">
             <a:avLst/>
@@ -11656,7 +11656,7 @@
               <a:buNone/>
             </a:pPr>
             <a:r>
-              <a:rPr lang="en-US" sz="1220" dirty="0">
+              <a:rPr lang="en-US" sz="1140" dirty="0">
                 <a:solidFill>
                   <a:srgbClr val="17364A"/>
                 </a:solidFill>
@@ -11664,16 +11664,16 @@
                 <a:ea typeface="Aptos" pitchFamily="34" charset="-122"/>
                 <a:cs typeface="Aptos" pitchFamily="34" charset="-120"/>
               </a:rPr>
-              <a:t>OMB Memorandum M-24-10 on federal AI governance, risk management,.</a:t>
-            </a:r>
-            <a:endParaRPr lang="en-US" sz="1220" dirty="0"/>
-          </a:p>
-          <a:p>
-            <a:pPr indent="0" marL="0">
-              <a:buNone/>
-            </a:pPr>
-            <a:r>
-              <a:rPr lang="en-US" sz="1220" dirty="0">
+              <a:t>OMB Memorandum M-24-10 on federal AI governance,.</a:t>
+            </a:r>
+            <a:endParaRPr lang="en-US" sz="1140" dirty="0"/>
+          </a:p>
+          <a:p>
+            <a:pPr indent="0" marL="0">
+              <a:buNone/>
+            </a:pPr>
+            <a:r>
+              <a:rPr lang="en-US" sz="1140" dirty="0">
                 <a:solidFill>
                   <a:srgbClr val="17364A"/>
                 </a:solidFill>
@@ -11681,9 +11681,9 @@
                 <a:ea typeface="Aptos" pitchFamily="34" charset="-122"/>
                 <a:cs typeface="Aptos" pitchFamily="34" charset="-120"/>
               </a:rPr>
-              <a:t>Agency strategic plans, procurement policies, privacy policies,.</a:t>
-            </a:r>
-            <a:endParaRPr lang="en-US" sz="1220" dirty="0"/>
+              <a:t>Agency strategic plans, procurement policies,.</a:t>
+            </a:r>
+            <a:endParaRPr lang="en-US" sz="1140" dirty="0"/>
           </a:p>
         </p:txBody>
       </p:sp>
@@ -11695,12 +11695,12 @@
         </p:nvSpPr>
         <p:spPr>
           <a:xfrm>
-            <a:off x="7635240" y="4184294"/>
-            <a:ext cx="3474720" cy="1466698"/>
+            <a:off x="7543800" y="4389120"/>
+            <a:ext cx="3611880" cy="1261872"/>
           </a:xfrm>
           <a:prstGeom prst="roundRect">
             <a:avLst>
-              <a:gd name="adj" fmla="val 7481"/>
+              <a:gd name="adj" fmla="val 8696"/>
             </a:avLst>
           </a:prstGeom>
           <a:solidFill>
@@ -11722,8 +11722,8 @@
         </p:nvSpPr>
         <p:spPr>
           <a:xfrm>
-            <a:off x="7799832" y="4330598"/>
-            <a:ext cx="3145536" cy="256032"/>
+            <a:off x="7708392" y="4517136"/>
+            <a:ext cx="3282696" cy="228600"/>
           </a:xfrm>
           <a:prstGeom prst="rect">
             <a:avLst/>
@@ -11739,7 +11739,7 @@
               <a:buNone/>
             </a:pPr>
             <a:r>
-              <a:rPr lang="en-US" sz="1300" b="1" dirty="0">
+              <a:rPr lang="en-US" sz="1220" b="1" dirty="0">
                 <a:solidFill>
                   <a:srgbClr val="0068B7"/>
                 </a:solidFill>
@@ -11749,7 +11749,7 @@
               </a:rPr>
               <a:t>What to document</a:t>
             </a:r>
-            <a:endParaRPr lang="en-US" sz="1300" dirty="0"/>
+            <a:endParaRPr lang="en-US" sz="1220" dirty="0"/>
           </a:p>
         </p:txBody>
       </p:sp>
@@ -11761,8 +11761,8 @@
         </p:nvSpPr>
         <p:spPr>
           <a:xfrm>
-            <a:off x="7799832" y="4659782"/>
-            <a:ext cx="3145536" cy="899770"/>
+            <a:off x="7708392" y="4828032"/>
+            <a:ext cx="3282696" cy="749808"/>
           </a:xfrm>
           <a:prstGeom prst="rect">
             <a:avLst/>
@@ -11780,7 +11780,7 @@
               <a:buNone/>
             </a:pPr>
             <a:r>
-              <a:rPr lang="en-US" sz="1320" dirty="0">
+              <a:rPr lang="en-US" sz="1220" dirty="0">
                 <a:solidFill>
                   <a:srgbClr val="17364A"/>
                 </a:solidFill>
@@ -11788,9 +11788,9 @@
                 <a:ea typeface="Aptos" pitchFamily="34" charset="-122"/>
                 <a:cs typeface="Aptos" pitchFamily="34" charset="-120"/>
               </a:rPr>
-              <a:t>Connect the concept to public health purpose, responsible use, required safeguards, documentation, and the next action a department should take.</a:t>
-            </a:r>
-            <a:endParaRPr lang="en-US" sz="1320" dirty="0"/>
+              <a:t>Connect the concept to public health purpose, responsible use, required.</a:t>
+            </a:r>
+            <a:endParaRPr lang="en-US" sz="1220" dirty="0"/>
           </a:p>
         </p:txBody>
       </p:sp>
@@ -12108,7 +12108,7 @@
                 <a:ea typeface="Aptos" pitchFamily="34" charset="-122"/>
                 <a:cs typeface="Aptos" pitchFamily="34" charset="-120"/>
               </a:rPr>
-              <a:t>• Play 11: Build and Deploy AI Solutions - This lesson informs Play 11 by helping learners.</a:t>
+              <a:t>• Play 11: Build and Deploy AI Solutions - This lesson informs Play 11 by.</a:t>
             </a:r>
             <a:endParaRPr lang="en-US" sz="1900" dirty="0"/>
           </a:p>
@@ -12125,7 +12125,7 @@
                 <a:ea typeface="Aptos" pitchFamily="34" charset="-122"/>
                 <a:cs typeface="Aptos" pitchFamily="34" charset="-120"/>
               </a:rPr>
-              <a:t>• Play 7: Prioritize Use Cases - This lesson informs Play 7 by helping learners connect the.</a:t>
+              <a:t>• Play 7: Prioritize Use Cases - This lesson informs Play 7 by helping.</a:t>
             </a:r>
             <a:endParaRPr lang="en-US" sz="1900" dirty="0"/>
           </a:p>
@@ -12142,7 +12142,7 @@
                 <a:ea typeface="Aptos" pitchFamily="34" charset="-122"/>
                 <a:cs typeface="Aptos" pitchFamily="34" charset="-120"/>
               </a:rPr>
-              <a:t>• Play 1: Vision &amp; Guardrails - This lesson informs Play 1 by helping learners connect the.</a:t>
+              <a:t>• Play 1: Vision &amp; Guardrails - This lesson informs Play 1 by helping learners.</a:t>
             </a:r>
             <a:endParaRPr lang="en-US" sz="1900" dirty="0"/>
           </a:p>
@@ -12159,7 +12159,7 @@
                 <a:ea typeface="Aptos" pitchFamily="34" charset="-122"/>
                 <a:cs typeface="Aptos" pitchFamily="34" charset="-120"/>
               </a:rPr>
-              <a:t>• Play 2: Readiness Assessment - This lesson informs Play 2 by helping learners connect the.</a:t>
+              <a:t>• Play 2: Readiness Assessment - This lesson informs Play 2 by helping.</a:t>
             </a:r>
             <a:endParaRPr lang="en-US" sz="1900" dirty="0"/>
           </a:p>
@@ -12200,8 +12200,8 @@
         </p:nvSpPr>
         <p:spPr>
           <a:xfrm>
-            <a:off x="8211312" y="1563624"/>
-            <a:ext cx="2734056" cy="256032"/>
+            <a:off x="8211312" y="1545336"/>
+            <a:ext cx="2734056" cy="228600"/>
           </a:xfrm>
           <a:prstGeom prst="rect">
             <a:avLst/>
@@ -12217,7 +12217,7 @@
               <a:buNone/>
             </a:pPr>
             <a:r>
-              <a:rPr lang="en-US" sz="1300" b="1" dirty="0">
+              <a:rPr lang="en-US" sz="1220" b="1" dirty="0">
                 <a:solidFill>
                   <a:srgbClr val="0068B7"/>
                 </a:solidFill>
@@ -12227,7 +12227,7 @@
               </a:rPr>
               <a:t>Apply the lesson</a:t>
             </a:r>
-            <a:endParaRPr lang="en-US" sz="1300" dirty="0"/>
+            <a:endParaRPr lang="en-US" sz="1220" dirty="0"/>
           </a:p>
         </p:txBody>
       </p:sp>
@@ -12239,8 +12239,8 @@
         </p:nvSpPr>
         <p:spPr>
           <a:xfrm>
-            <a:off x="8211312" y="1892808"/>
-            <a:ext cx="2734056" cy="1536192"/>
+            <a:off x="8211312" y="1856232"/>
+            <a:ext cx="2734056" cy="1591056"/>
           </a:xfrm>
           <a:prstGeom prst="rect">
             <a:avLst/>
@@ -12258,7 +12258,7 @@
               <a:buNone/>
             </a:pPr>
             <a:r>
-              <a:rPr lang="en-US" sz="1320" dirty="0">
+              <a:rPr lang="en-US" sz="1220" dirty="0">
                 <a:solidFill>
                   <a:srgbClr val="17364A"/>
                 </a:solidFill>
@@ -12266,9 +12266,9 @@
                 <a:ea typeface="Aptos" pitchFamily="34" charset="-122"/>
                 <a:cs typeface="Aptos" pitchFamily="34" charset="-120"/>
               </a:rPr>
-              <a:t>Use the related plays to identify decisions, participants, timing, approvals, and documentation needed for responsible implementation.</a:t>
-            </a:r>
-            <a:endParaRPr lang="en-US" sz="1320" dirty="0"/>
+              <a:t>Use the related plays to identify decisions, participants, timing, approvals,.</a:t>
+            </a:r>
+            <a:endParaRPr lang="en-US" sz="1220" dirty="0"/>
           </a:p>
         </p:txBody>
       </p:sp>
@@ -12307,8 +12307,8 @@
         </p:nvSpPr>
         <p:spPr>
           <a:xfrm>
-            <a:off x="8211312" y="3941064"/>
-            <a:ext cx="2734056" cy="256032"/>
+            <a:off x="8211312" y="3922776"/>
+            <a:ext cx="2734056" cy="228600"/>
           </a:xfrm>
           <a:prstGeom prst="rect">
             <a:avLst/>
@@ -12324,7 +12324,7 @@
               <a:buNone/>
             </a:pPr>
             <a:r>
-              <a:rPr lang="en-US" sz="1300" b="1" dirty="0">
+              <a:rPr lang="en-US" sz="1220" b="1" dirty="0">
                 <a:solidFill>
                   <a:srgbClr val="0068B7"/>
                 </a:solidFill>
@@ -12334,7 +12334,7 @@
               </a:rPr>
               <a:t>Use the play links to</a:t>
             </a:r>
-            <a:endParaRPr lang="en-US" sz="1300" dirty="0"/>
+            <a:endParaRPr lang="en-US" sz="1220" dirty="0"/>
           </a:p>
         </p:txBody>
       </p:sp>
@@ -12346,8 +12346,8 @@
         </p:nvSpPr>
         <p:spPr>
           <a:xfrm>
-            <a:off x="8229600" y="4306824"/>
-            <a:ext cx="2679192" cy="941832"/>
+            <a:off x="8229600" y="4251960"/>
+            <a:ext cx="2679192" cy="1033272"/>
           </a:xfrm>
           <a:prstGeom prst="rect">
             <a:avLst/>
@@ -12365,7 +12365,7 @@
               <a:buNone/>
             </a:pPr>
             <a:r>
-              <a:rPr lang="en-US" sz="1220" dirty="0">
+              <a:rPr lang="en-US" sz="1140" dirty="0">
                 <a:solidFill>
                   <a:srgbClr val="17364A"/>
                 </a:solidFill>
@@ -12375,14 +12375,14 @@
               </a:rPr>
               <a:t>Locate the decision point in the playbook sequence.</a:t>
             </a:r>
-            <a:endParaRPr lang="en-US" sz="1220" dirty="0"/>
-          </a:p>
-          <a:p>
-            <a:pPr indent="0" marL="0">
-              <a:buNone/>
-            </a:pPr>
-            <a:r>
-              <a:rPr lang="en-US" sz="1220" dirty="0">
+            <a:endParaRPr lang="en-US" sz="1140" dirty="0"/>
+          </a:p>
+          <a:p>
+            <a:pPr indent="0" marL="0">
+              <a:buNone/>
+            </a:pPr>
+            <a:r>
+              <a:rPr lang="en-US" sz="1140" dirty="0">
                 <a:solidFill>
                   <a:srgbClr val="17364A"/>
                 </a:solidFill>
@@ -12392,14 +12392,14 @@
               </a:rPr>
               <a:t>Identify who should participate in the work.</a:t>
             </a:r>
-            <a:endParaRPr lang="en-US" sz="1220" dirty="0"/>
-          </a:p>
-          <a:p>
-            <a:pPr indent="0" marL="0">
-              <a:buNone/>
-            </a:pPr>
-            <a:r>
-              <a:rPr lang="en-US" sz="1220" dirty="0">
+            <a:endParaRPr lang="en-US" sz="1140" dirty="0"/>
+          </a:p>
+          <a:p>
+            <a:pPr indent="0" marL="0">
+              <a:buNone/>
+            </a:pPr>
+            <a:r>
+              <a:rPr lang="en-US" sz="1140" dirty="0">
                 <a:solidFill>
                   <a:srgbClr val="17364A"/>
                 </a:solidFill>
@@ -12407,9 +12407,9 @@
                 <a:ea typeface="Aptos" pitchFamily="34" charset="-122"/>
                 <a:cs typeface="Aptos" pitchFamily="34" charset="-120"/>
               </a:rPr>
-              <a:t>Document the review, approval, or implementation step.</a:t>
-            </a:r>
-            <a:endParaRPr lang="en-US" sz="1220" dirty="0"/>
+              <a:t>Document the review, approval, or implementation.</a:t>
+            </a:r>
+            <a:endParaRPr lang="en-US" sz="1140" dirty="0"/>
           </a:p>
         </p:txBody>
       </p:sp>
@@ -12727,7 +12727,7 @@
                 <a:ea typeface="Aptos" pitchFamily="34" charset="-122"/>
                 <a:cs typeface="Aptos" pitchFamily="34" charset="-120"/>
               </a:rPr>
-              <a:t>• Tool 3: Equity Impact Assessment Checklist (Checklist) - Use this tool to complete or.</a:t>
+              <a:t>• Tool 3: Equity Impact Assessment Checklist (Checklist) - Use this tool to.</a:t>
             </a:r>
             <a:endParaRPr lang="en-US" sz="1850" dirty="0"/>
           </a:p>
@@ -12744,7 +12744,7 @@
                 <a:ea typeface="Aptos" pitchFamily="34" charset="-122"/>
                 <a:cs typeface="Aptos" pitchFamily="34" charset="-120"/>
               </a:rPr>
-              <a:t>• Tool 4: AI Policy Landscape Scan (Worksheet) - Use AI Policy Landscape Scan to translate this.</a:t>
+              <a:t>• Tool 4: AI Policy Landscape Scan (Worksheet) - Use AI Policy Landscape Scan.</a:t>
             </a:r>
             <a:endParaRPr lang="en-US" sz="1850" dirty="0"/>
           </a:p>
@@ -12761,7 +12761,7 @@
                 <a:ea typeface="Aptos" pitchFamily="34" charset="-122"/>
                 <a:cs typeface="Aptos" pitchFamily="34" charset="-120"/>
               </a:rPr>
-              <a:t>• Tool 5: AI Environmental and Resource Impact Review (Checklist) - Use AI Environmental and.</a:t>
+              <a:t>• Tool 5: AI Environmental and Resource Impact Review (Checklist) - Use AI.</a:t>
             </a:r>
             <a:endParaRPr lang="en-US" sz="1850" dirty="0"/>
           </a:p>
@@ -12778,7 +12778,7 @@
                 <a:ea typeface="Aptos" pitchFamily="34" charset="-122"/>
                 <a:cs typeface="Aptos" pitchFamily="34" charset="-120"/>
               </a:rPr>
-              <a:t>• Tool 6: Human-Centered AI Decision Rule Checklist (Checklist) - Use this tool to complete or.</a:t>
+              <a:t>• Tool 6: Human-Centered AI Decision Rule Checklist (Checklist) - Use this.</a:t>
             </a:r>
             <a:endParaRPr lang="en-US" sz="1850" dirty="0"/>
           </a:p>
@@ -12819,8 +12819,8 @@
         </p:nvSpPr>
         <p:spPr>
           <a:xfrm>
-            <a:off x="8211312" y="1563624"/>
-            <a:ext cx="2734056" cy="256032"/>
+            <a:off x="8211312" y="1545336"/>
+            <a:ext cx="2734056" cy="228600"/>
           </a:xfrm>
           <a:prstGeom prst="rect">
             <a:avLst/>
@@ -12836,7 +12836,7 @@
               <a:buNone/>
             </a:pPr>
             <a:r>
-              <a:rPr lang="en-US" sz="1300" b="1" dirty="0">
+              <a:rPr lang="en-US" sz="1220" b="1" dirty="0">
                 <a:solidFill>
                   <a:srgbClr val="0068B7"/>
                 </a:solidFill>
@@ -12846,7 +12846,7 @@
               </a:rPr>
               <a:t>Use the tools</a:t>
             </a:r>
-            <a:endParaRPr lang="en-US" sz="1300" dirty="0"/>
+            <a:endParaRPr lang="en-US" sz="1220" dirty="0"/>
           </a:p>
         </p:txBody>
       </p:sp>
@@ -12858,8 +12858,8 @@
         </p:nvSpPr>
         <p:spPr>
           <a:xfrm>
-            <a:off x="8211312" y="1892808"/>
-            <a:ext cx="2734056" cy="1536192"/>
+            <a:off x="8211312" y="1856232"/>
+            <a:ext cx="2734056" cy="1591056"/>
           </a:xfrm>
           <a:prstGeom prst="rect">
             <a:avLst/>
@@ -12877,7 +12877,7 @@
               <a:buNone/>
             </a:pPr>
             <a:r>
-              <a:rPr lang="en-US" sz="1320" dirty="0">
+              <a:rPr lang="en-US" sz="1220" dirty="0">
                 <a:solidFill>
                   <a:srgbClr val="17364A"/>
                 </a:solidFill>
@@ -12885,9 +12885,9 @@
                 <a:ea typeface="Aptos" pitchFamily="34" charset="-122"/>
                 <a:cs typeface="Aptos" pitchFamily="34" charset="-120"/>
               </a:rPr>
-              <a:t>Use linked tools when your department needs a structured worksheet, template, checklist, review process, or documentation artifact.</a:t>
-            </a:r>
-            <a:endParaRPr lang="en-US" sz="1320" dirty="0"/>
+              <a:t>Use linked tools when your department needs a structured worksheet, template,.</a:t>
+            </a:r>
+            <a:endParaRPr lang="en-US" sz="1220" dirty="0"/>
           </a:p>
         </p:txBody>
       </p:sp>
@@ -12926,8 +12926,8 @@
         </p:nvSpPr>
         <p:spPr>
           <a:xfrm>
-            <a:off x="8211312" y="3941064"/>
-            <a:ext cx="2734056" cy="256032"/>
+            <a:off x="8211312" y="3922776"/>
+            <a:ext cx="2734056" cy="228600"/>
           </a:xfrm>
           <a:prstGeom prst="rect">
             <a:avLst/>
@@ -12943,7 +12943,7 @@
               <a:buNone/>
             </a:pPr>
             <a:r>
-              <a:rPr lang="en-US" sz="1300" b="1" dirty="0">
+              <a:rPr lang="en-US" sz="1220" b="1" dirty="0">
                 <a:solidFill>
                   <a:srgbClr val="0068B7"/>
                 </a:solidFill>
@@ -12953,7 +12953,7 @@
               </a:rPr>
               <a:t>Tool selection cues</a:t>
             </a:r>
-            <a:endParaRPr lang="en-US" sz="1300" dirty="0"/>
+            <a:endParaRPr lang="en-US" sz="1220" dirty="0"/>
           </a:p>
         </p:txBody>
       </p:sp>
@@ -12965,8 +12965,8 @@
         </p:nvSpPr>
         <p:spPr>
           <a:xfrm>
-            <a:off x="8229600" y="4306824"/>
-            <a:ext cx="2679192" cy="941832"/>
+            <a:off x="8229600" y="4251960"/>
+            <a:ext cx="2679192" cy="1033272"/>
           </a:xfrm>
           <a:prstGeom prst="rect">
             <a:avLst/>
@@ -12984,7 +12984,7 @@
               <a:buNone/>
             </a:pPr>
             <a:r>
-              <a:rPr lang="en-US" sz="1220" dirty="0">
+              <a:rPr lang="en-US" sz="1140" dirty="0">
                 <a:solidFill>
                   <a:srgbClr val="17364A"/>
                 </a:solidFill>
@@ -12994,14 +12994,14 @@
               </a:rPr>
               <a:t>Use a tool when no comparable local process exists.</a:t>
             </a:r>
-            <a:endParaRPr lang="en-US" sz="1220" dirty="0"/>
-          </a:p>
-          <a:p>
-            <a:pPr indent="0" marL="0">
-              <a:buNone/>
-            </a:pPr>
-            <a:r>
-              <a:rPr lang="en-US" sz="1220" dirty="0">
+            <a:endParaRPr lang="en-US" sz="1140" dirty="0"/>
+          </a:p>
+          <a:p>
+            <a:pPr indent="0" marL="0">
+              <a:buNone/>
+            </a:pPr>
+            <a:r>
+              <a:rPr lang="en-US" sz="1140" dirty="0">
                 <a:solidFill>
                   <a:srgbClr val="17364A"/>
                 </a:solidFill>
@@ -13009,16 +13009,16 @@
                 <a:ea typeface="Aptos" pitchFamily="34" charset="-122"/>
                 <a:cs typeface="Aptos" pitchFamily="34" charset="-120"/>
               </a:rPr>
-              <a:t>Adapt existing department templates when they already fit the.</a:t>
-            </a:r>
-            <a:endParaRPr lang="en-US" sz="1220" dirty="0"/>
-          </a:p>
-          <a:p>
-            <a:pPr indent="0" marL="0">
-              <a:buNone/>
-            </a:pPr>
-            <a:r>
-              <a:rPr lang="en-US" sz="1220" dirty="0">
+              <a:t>Adapt existing department templates when they.</a:t>
+            </a:r>
+            <a:endParaRPr lang="en-US" sz="1140" dirty="0"/>
+          </a:p>
+          <a:p>
+            <a:pPr indent="0" marL="0">
+              <a:buNone/>
+            </a:pPr>
+            <a:r>
+              <a:rPr lang="en-US" sz="1140" dirty="0">
                 <a:solidFill>
                   <a:srgbClr val="17364A"/>
                 </a:solidFill>
@@ -13026,9 +13026,9 @@
                 <a:ea typeface="Aptos" pitchFamily="34" charset="-122"/>
                 <a:cs typeface="Aptos" pitchFamily="34" charset="-120"/>
               </a:rPr>
-              <a:t>Save the completed artifact as evidence of the decision.</a:t>
-            </a:r>
-            <a:endParaRPr lang="en-US" sz="1220" dirty="0"/>
+              <a:t>Save the completed artifact as evidence of the.</a:t>
+            </a:r>
+            <a:endParaRPr lang="en-US" sz="1140" dirty="0"/>
           </a:p>
         </p:txBody>
       </p:sp>
@@ -13319,8 +13319,8 @@
         </p:nvSpPr>
         <p:spPr>
           <a:xfrm>
-            <a:off x="868680" y="1508760"/>
-            <a:ext cx="6309360" cy="4160520"/>
+            <a:off x="822960" y="1463040"/>
+            <a:ext cx="6565392" cy="4343400"/>
           </a:xfrm>
           <a:prstGeom prst="rect">
             <a:avLst/>
@@ -13338,7 +13338,7 @@
               <a:buNone/>
             </a:pPr>
             <a:r>
-              <a:rPr lang="en-US" sz="2100" dirty="0">
+              <a:rPr lang="en-US" sz="1920" dirty="0">
                 <a:solidFill>
                   <a:srgbClr val="003A63"/>
                 </a:solidFill>
@@ -13348,14 +13348,14 @@
               </a:rPr>
               <a:t>• Explain why transparency reporting matters for public health AI.</a:t>
             </a:r>
-            <a:endParaRPr lang="en-US" sz="2100" dirty="0"/>
-          </a:p>
-          <a:p>
-            <a:pPr indent="0" marL="0">
-              <a:buNone/>
-            </a:pPr>
-            <a:r>
-              <a:rPr lang="en-US" sz="2100" dirty="0">
+            <a:endParaRPr lang="en-US" sz="1920" dirty="0"/>
+          </a:p>
+          <a:p>
+            <a:pPr indent="0" marL="0">
+              <a:buNone/>
+            </a:pPr>
+            <a:r>
+              <a:rPr lang="en-US" sz="1920" dirty="0">
                 <a:solidFill>
                   <a:srgbClr val="003A63"/>
                 </a:solidFill>
@@ -13363,16 +13363,16 @@
                 <a:ea typeface="Aptos" pitchFamily="34" charset="-122"/>
                 <a:cs typeface="Aptos" pitchFamily="34" charset="-120"/>
               </a:rPr>
-              <a:t>• Identify which AI uses should be disclosed internally, publicly, or to specific partners.</a:t>
-            </a:r>
-            <a:endParaRPr lang="en-US" sz="2100" dirty="0"/>
-          </a:p>
-          <a:p>
-            <a:pPr indent="0" marL="0">
-              <a:buNone/>
-            </a:pPr>
-            <a:r>
-              <a:rPr lang="en-US" sz="2100" dirty="0">
+              <a:t>• Identify which AI uses should be disclosed internally, publicly, or to.</a:t>
+            </a:r>
+            <a:endParaRPr lang="en-US" sz="1920" dirty="0"/>
+          </a:p>
+          <a:p>
+            <a:pPr indent="0" marL="0">
+              <a:buNone/>
+            </a:pPr>
+            <a:r>
+              <a:rPr lang="en-US" sz="1920" dirty="0">
                 <a:solidFill>
                   <a:srgbClr val="003A63"/>
                 </a:solidFill>
@@ -13382,7 +13382,7 @@
               </a:rPr>
               <a:t>• Develop contents for an AI transparency notice or AI use registry.</a:t>
             </a:r>
-            <a:endParaRPr lang="en-US" sz="2100" dirty="0"/>
+            <a:endParaRPr lang="en-US" sz="1920" dirty="0"/>
           </a:p>
         </p:txBody>
       </p:sp>
@@ -13394,12 +13394,12 @@
         </p:nvSpPr>
         <p:spPr>
           <a:xfrm>
-            <a:off x="7635240" y="1325880"/>
-            <a:ext cx="3474720" cy="1207008"/>
+            <a:off x="7543800" y="1325880"/>
+            <a:ext cx="3611880" cy="1261872"/>
           </a:xfrm>
           <a:prstGeom prst="roundRect">
             <a:avLst>
-              <a:gd name="adj" fmla="val 9091"/>
+              <a:gd name="adj" fmla="val 8696"/>
             </a:avLst>
           </a:prstGeom>
           <a:solidFill>
@@ -13421,8 +13421,8 @@
         </p:nvSpPr>
         <p:spPr>
           <a:xfrm>
-            <a:off x="7799832" y="1472184"/>
-            <a:ext cx="3145536" cy="256032"/>
+            <a:off x="7708392" y="1453896"/>
+            <a:ext cx="3282696" cy="228600"/>
           </a:xfrm>
           <a:prstGeom prst="rect">
             <a:avLst/>
@@ -13438,7 +13438,7 @@
               <a:buNone/>
             </a:pPr>
             <a:r>
-              <a:rPr lang="en-US" sz="1300" b="1" dirty="0">
+              <a:rPr lang="en-US" sz="1220" b="1" dirty="0">
                 <a:solidFill>
                   <a:srgbClr val="0068B7"/>
                 </a:solidFill>
@@ -13448,7 +13448,7 @@
               </a:rPr>
               <a:t>Governance lens</a:t>
             </a:r>
-            <a:endParaRPr lang="en-US" sz="1300" dirty="0"/>
+            <a:endParaRPr lang="en-US" sz="1220" dirty="0"/>
           </a:p>
         </p:txBody>
       </p:sp>
@@ -13460,8 +13460,8 @@
         </p:nvSpPr>
         <p:spPr>
           <a:xfrm>
-            <a:off x="7799832" y="1801368"/>
-            <a:ext cx="3145536" cy="640080"/>
+            <a:off x="7708392" y="1764792"/>
+            <a:ext cx="3282696" cy="749808"/>
           </a:xfrm>
           <a:prstGeom prst="rect">
             <a:avLst/>
@@ -13479,7 +13479,7 @@
               <a:buNone/>
             </a:pPr>
             <a:r>
-              <a:rPr lang="en-US" sz="1320" dirty="0">
+              <a:rPr lang="en-US" sz="1220" dirty="0">
                 <a:solidFill>
                   <a:srgbClr val="17364A"/>
                 </a:solidFill>
@@ -13489,7 +13489,7 @@
               </a:rPr>
               <a:t>Explain why transparency reporting matters for public health AI.</a:t>
             </a:r>
-            <a:endParaRPr lang="en-US" sz="1320" dirty="0"/>
+            <a:endParaRPr lang="en-US" sz="1220" dirty="0"/>
           </a:p>
         </p:txBody>
       </p:sp>
@@ -13501,12 +13501,12 @@
         </p:nvSpPr>
         <p:spPr>
           <a:xfrm>
-            <a:off x="7635240" y="2670048"/>
-            <a:ext cx="3474720" cy="1377086"/>
+            <a:off x="7543800" y="2724912"/>
+            <a:ext cx="3611880" cy="1527048"/>
           </a:xfrm>
           <a:prstGeom prst="roundRect">
             <a:avLst>
-              <a:gd name="adj" fmla="val 7968"/>
+              <a:gd name="adj" fmla="val 7186"/>
             </a:avLst>
           </a:prstGeom>
           <a:solidFill>
@@ -13528,8 +13528,8 @@
         </p:nvSpPr>
         <p:spPr>
           <a:xfrm>
-            <a:off x="7799832" y="2816352"/>
-            <a:ext cx="3145536" cy="256032"/>
+            <a:off x="7708392" y="2852928"/>
+            <a:ext cx="3282696" cy="228600"/>
           </a:xfrm>
           <a:prstGeom prst="rect">
             <a:avLst/>
@@ -13545,7 +13545,7 @@
               <a:buNone/>
             </a:pPr>
             <a:r>
-              <a:rPr lang="en-US" sz="1300" b="1" dirty="0">
+              <a:rPr lang="en-US" sz="1220" b="1" dirty="0">
                 <a:solidFill>
                   <a:srgbClr val="0068B7"/>
                 </a:solidFill>
@@ -13555,7 +13555,7 @@
               </a:rPr>
               <a:t>Concept checkpoints</a:t>
             </a:r>
-            <a:endParaRPr lang="en-US" sz="1300" dirty="0"/>
+            <a:endParaRPr lang="en-US" sz="1220" dirty="0"/>
           </a:p>
         </p:txBody>
       </p:sp>
@@ -13567,8 +13567,8 @@
         </p:nvSpPr>
         <p:spPr>
           <a:xfrm>
-            <a:off x="7818120" y="3182112"/>
-            <a:ext cx="3090672" cy="718718"/>
+            <a:off x="7726680" y="3182112"/>
+            <a:ext cx="3227832" cy="960120"/>
           </a:xfrm>
           <a:prstGeom prst="rect">
             <a:avLst/>
@@ -13586,7 +13586,7 @@
               <a:buNone/>
             </a:pPr>
             <a:r>
-              <a:rPr lang="en-US" sz="1220" dirty="0">
+              <a:rPr lang="en-US" sz="1140" dirty="0">
                 <a:solidFill>
                   <a:srgbClr val="17364A"/>
                 </a:solidFill>
@@ -13594,16 +13594,16 @@
                 <a:ea typeface="Aptos" pitchFamily="34" charset="-122"/>
                 <a:cs typeface="Aptos" pitchFamily="34" charset="-120"/>
               </a:rPr>
-              <a:t>Balance transparency with privacy, security, confidentiality, and.</a:t>
-            </a:r>
-            <a:endParaRPr lang="en-US" sz="1220" dirty="0"/>
-          </a:p>
-          <a:p>
-            <a:pPr indent="0" marL="0">
-              <a:buNone/>
-            </a:pPr>
-            <a:r>
-              <a:rPr lang="en-US" sz="1220" dirty="0">
+              <a:t>Balance transparency with privacy, security,.</a:t>
+            </a:r>
+            <a:endParaRPr lang="en-US" sz="1140" dirty="0"/>
+          </a:p>
+          <a:p>
+            <a:pPr indent="0" marL="0">
+              <a:buNone/>
+            </a:pPr>
+            <a:r>
+              <a:rPr lang="en-US" sz="1140" dirty="0">
                 <a:solidFill>
                   <a:srgbClr val="17364A"/>
                 </a:solidFill>
@@ -13613,7 +13613,7 @@
               </a:rPr>
               <a:t>Produce a draft AI transparency reporting template.</a:t>
             </a:r>
-            <a:endParaRPr lang="en-US" sz="1220" dirty="0"/>
+            <a:endParaRPr lang="en-US" sz="1140" dirty="0"/>
           </a:p>
         </p:txBody>
       </p:sp>
@@ -13625,12 +13625,12 @@
         </p:nvSpPr>
         <p:spPr>
           <a:xfrm>
-            <a:off x="7635240" y="4184294"/>
-            <a:ext cx="3474720" cy="1466698"/>
+            <a:off x="7543800" y="4389120"/>
+            <a:ext cx="3611880" cy="1261872"/>
           </a:xfrm>
           <a:prstGeom prst="roundRect">
             <a:avLst>
-              <a:gd name="adj" fmla="val 7481"/>
+              <a:gd name="adj" fmla="val 8696"/>
             </a:avLst>
           </a:prstGeom>
           <a:solidFill>
@@ -13652,8 +13652,8 @@
         </p:nvSpPr>
         <p:spPr>
           <a:xfrm>
-            <a:off x="7799832" y="4330598"/>
-            <a:ext cx="3145536" cy="256032"/>
+            <a:off x="7708392" y="4517136"/>
+            <a:ext cx="3282696" cy="228600"/>
           </a:xfrm>
           <a:prstGeom prst="rect">
             <a:avLst/>
@@ -13669,7 +13669,7 @@
               <a:buNone/>
             </a:pPr>
             <a:r>
-              <a:rPr lang="en-US" sz="1300" b="1" dirty="0">
+              <a:rPr lang="en-US" sz="1220" b="1" dirty="0">
                 <a:solidFill>
                   <a:srgbClr val="0068B7"/>
                 </a:solidFill>
@@ -13679,7 +13679,7 @@
               </a:rPr>
               <a:t>What to document</a:t>
             </a:r>
-            <a:endParaRPr lang="en-US" sz="1300" dirty="0"/>
+            <a:endParaRPr lang="en-US" sz="1220" dirty="0"/>
           </a:p>
         </p:txBody>
       </p:sp>
@@ -13691,8 +13691,8 @@
         </p:nvSpPr>
         <p:spPr>
           <a:xfrm>
-            <a:off x="7799832" y="4659782"/>
-            <a:ext cx="3145536" cy="899770"/>
+            <a:off x="7708392" y="4828032"/>
+            <a:ext cx="3282696" cy="749808"/>
           </a:xfrm>
           <a:prstGeom prst="rect">
             <a:avLst/>
@@ -13710,7 +13710,7 @@
               <a:buNone/>
             </a:pPr>
             <a:r>
-              <a:rPr lang="en-US" sz="1320" dirty="0">
+              <a:rPr lang="en-US" sz="1220" dirty="0">
                 <a:solidFill>
                   <a:srgbClr val="17364A"/>
                 </a:solidFill>
@@ -13718,9 +13718,9 @@
                 <a:ea typeface="Aptos" pitchFamily="34" charset="-122"/>
                 <a:cs typeface="Aptos" pitchFamily="34" charset="-120"/>
               </a:rPr>
-              <a:t>Use the assignment to test whether you can explain the concept, apply it to a realistic public health situation, and identify what would need review before the work moves forward.</a:t>
-            </a:r>
-            <a:endParaRPr lang="en-US" sz="1320" dirty="0"/>
+              <a:t>Use the assignment to test whether you can explain the concept, apply it to a.</a:t>
+            </a:r>
+            <a:endParaRPr lang="en-US" sz="1220" dirty="0"/>
           </a:p>
         </p:txBody>
       </p:sp>
@@ -14011,8 +14011,8 @@
         </p:nvSpPr>
         <p:spPr>
           <a:xfrm>
-            <a:off x="868680" y="1508760"/>
-            <a:ext cx="6309360" cy="4160520"/>
+            <a:off x="822960" y="1463040"/>
+            <a:ext cx="6565392" cy="4343400"/>
           </a:xfrm>
           <a:prstGeom prst="rect">
             <a:avLst/>
@@ -14030,7 +14030,7 @@
               <a:buNone/>
             </a:pPr>
             <a:r>
-              <a:rPr lang="en-US" sz="2100" dirty="0">
+              <a:rPr lang="en-US" sz="1920" dirty="0">
                 <a:solidFill>
                   <a:srgbClr val="003A63"/>
                 </a:solidFill>
@@ -14038,16 +14038,16 @@
                 <a:ea typeface="Aptos" pitchFamily="34" charset="-122"/>
                 <a:cs typeface="Aptos" pitchFamily="34" charset="-120"/>
               </a:rPr>
-              <a:t>• Public health agencies have a responsibility to explain how AI is used in ways that affect.</a:t>
-            </a:r>
-            <a:endParaRPr lang="en-US" sz="2100" dirty="0"/>
-          </a:p>
-          <a:p>
-            <a:pPr indent="0" marL="0">
-              <a:buNone/>
-            </a:pPr>
-            <a:r>
-              <a:rPr lang="en-US" sz="2100" dirty="0">
+              <a:t>• Public health agencies have a responsibility to explain how AI is used in.</a:t>
+            </a:r>
+            <a:endParaRPr lang="en-US" sz="1920" dirty="0"/>
+          </a:p>
+          <a:p>
+            <a:pPr indent="0" marL="0">
+              <a:buNone/>
+            </a:pPr>
+            <a:r>
+              <a:rPr lang="en-US" sz="1920" dirty="0">
                 <a:solidFill>
                   <a:srgbClr val="003A63"/>
                 </a:solidFill>
@@ -14055,16 +14055,16 @@
                 <a:ea typeface="Aptos" pitchFamily="34" charset="-122"/>
                 <a:cs typeface="Aptos" pitchFamily="34" charset="-120"/>
               </a:rPr>
-              <a:t>• Transparency reporting helps agencies communicate what AI tools are in use, why they are used,.</a:t>
-            </a:r>
-            <a:endParaRPr lang="en-US" sz="2100" dirty="0"/>
-          </a:p>
-          <a:p>
-            <a:pPr indent="0" marL="0">
-              <a:buNone/>
-            </a:pPr>
-            <a:r>
-              <a:rPr lang="en-US" sz="2100" dirty="0">
+              <a:t>• Transparency reporting helps agencies communicate what AI tools are in use,.</a:t>
+            </a:r>
+            <a:endParaRPr lang="en-US" sz="1920" dirty="0"/>
+          </a:p>
+          <a:p>
+            <a:pPr indent="0" marL="0">
+              <a:buNone/>
+            </a:pPr>
+            <a:r>
+              <a:rPr lang="en-US" sz="1920" dirty="0">
                 <a:solidFill>
                   <a:srgbClr val="003A63"/>
                 </a:solidFill>
@@ -14072,9 +14072,9 @@
                 <a:ea typeface="Aptos" pitchFamily="34" charset="-122"/>
                 <a:cs typeface="Aptos" pitchFamily="34" charset="-120"/>
               </a:rPr>
-              <a:t>• This module helps leaders design AI transparency practices that are meaningful, not.</a:t>
-            </a:r>
-            <a:endParaRPr lang="en-US" sz="2100" dirty="0"/>
+              <a:t>• This module helps leaders design AI transparency practices that are.</a:t>
+            </a:r>
+            <a:endParaRPr lang="en-US" sz="1920" dirty="0"/>
           </a:p>
         </p:txBody>
       </p:sp>
@@ -14086,12 +14086,12 @@
         </p:nvSpPr>
         <p:spPr>
           <a:xfrm>
-            <a:off x="7635240" y="1325880"/>
-            <a:ext cx="3474720" cy="1255471"/>
+            <a:off x="7543800" y="1325880"/>
+            <a:ext cx="3611880" cy="1261872"/>
           </a:xfrm>
           <a:prstGeom prst="roundRect">
             <a:avLst>
-              <a:gd name="adj" fmla="val 8740"/>
+              <a:gd name="adj" fmla="val 8696"/>
             </a:avLst>
           </a:prstGeom>
           <a:solidFill>
@@ -14113,8 +14113,8 @@
         </p:nvSpPr>
         <p:spPr>
           <a:xfrm>
-            <a:off x="7799832" y="1472184"/>
-            <a:ext cx="3145536" cy="256032"/>
+            <a:off x="7708392" y="1453896"/>
+            <a:ext cx="3282696" cy="228600"/>
           </a:xfrm>
           <a:prstGeom prst="rect">
             <a:avLst/>
@@ -14130,7 +14130,7 @@
               <a:buNone/>
             </a:pPr>
             <a:r>
-              <a:rPr lang="en-US" sz="1300" b="1" dirty="0">
+              <a:rPr lang="en-US" sz="1220" b="1" dirty="0">
                 <a:solidFill>
                   <a:srgbClr val="0068B7"/>
                 </a:solidFill>
@@ -14140,7 +14140,7 @@
               </a:rPr>
               <a:t>Governance lens</a:t>
             </a:r>
-            <a:endParaRPr lang="en-US" sz="1300" dirty="0"/>
+            <a:endParaRPr lang="en-US" sz="1220" dirty="0"/>
           </a:p>
         </p:txBody>
       </p:sp>
@@ -14152,8 +14152,8 @@
         </p:nvSpPr>
         <p:spPr>
           <a:xfrm>
-            <a:off x="7799832" y="1801368"/>
-            <a:ext cx="3145536" cy="688543"/>
+            <a:off x="7708392" y="1764792"/>
+            <a:ext cx="3282696" cy="749808"/>
           </a:xfrm>
           <a:prstGeom prst="rect">
             <a:avLst/>
@@ -14171,7 +14171,7 @@
               <a:buNone/>
             </a:pPr>
             <a:r>
-              <a:rPr lang="en-US" sz="1320" dirty="0">
+              <a:rPr lang="en-US" sz="1220" dirty="0">
                 <a:solidFill>
                   <a:srgbClr val="17364A"/>
                 </a:solidFill>
@@ -14179,9 +14179,9 @@
                 <a:ea typeface="Aptos" pitchFamily="34" charset="-122"/>
                 <a:cs typeface="Aptos" pitchFamily="34" charset="-120"/>
               </a:rPr>
-              <a:t>Public health agencies have a responsibility to explain how AI is used in ways that affect public.</a:t>
-            </a:r>
-            <a:endParaRPr lang="en-US" sz="1320" dirty="0"/>
+              <a:t>Public health agencies have a responsibility to explain how AI is used in ways.</a:t>
+            </a:r>
+            <a:endParaRPr lang="en-US" sz="1220" dirty="0"/>
           </a:p>
         </p:txBody>
       </p:sp>
@@ -14193,12 +14193,12 @@
         </p:nvSpPr>
         <p:spPr>
           <a:xfrm>
-            <a:off x="7635240" y="2718511"/>
-            <a:ext cx="3474720" cy="1328623"/>
+            <a:off x="7543800" y="2724912"/>
+            <a:ext cx="3611880" cy="1527048"/>
           </a:xfrm>
           <a:prstGeom prst="roundRect">
             <a:avLst>
-              <a:gd name="adj" fmla="val 8259"/>
+              <a:gd name="adj" fmla="val 7186"/>
             </a:avLst>
           </a:prstGeom>
           <a:solidFill>
@@ -14220,24 +14220,26 @@
         </p:nvSpPr>
         <p:spPr>
           <a:xfrm>
-            <a:off x="7799832" y="2846527"/>
-            <a:ext cx="3145536" cy="237744"/>
-          </a:xfrm>
-          <a:prstGeom prst="rect">
-            <a:avLst/>
-          </a:prstGeom>
-          <a:noFill/>
-          <a:ln/>
-        </p:spPr>
-        <p:txBody>
-          <a:bodyPr wrap="square" lIns="0" tIns="0" rIns="0" bIns="0" rtlCol="0" anchor="ctr"/>
-          <a:lstStyle/>
-          <a:p>
-            <a:pPr indent="0" marL="0">
-              <a:buNone/>
-            </a:pPr>
-            <a:r>
-              <a:rPr lang="en-US" sz="1250" b="1" dirty="0">
+            <a:off x="7708392" y="2852928"/>
+            <a:ext cx="3282696" cy="219456"/>
+          </a:xfrm>
+          <a:prstGeom prst="rect">
+            <a:avLst/>
+          </a:prstGeom>
+          <a:noFill/>
+          <a:ln/>
+        </p:spPr>
+        <p:txBody>
+          <a:bodyPr wrap="square" lIns="0" tIns="0" rIns="0" bIns="0" rtlCol="0" anchor="ctr">
+            <a:normAutofit/>
+          </a:bodyPr>
+          <a:lstStyle/>
+          <a:p>
+            <a:pPr indent="0" marL="0">
+              <a:buNone/>
+            </a:pPr>
+            <a:r>
+              <a:rPr lang="en-US" sz="1160" b="1" dirty="0">
                 <a:solidFill>
                   <a:srgbClr val="0068B7"/>
                 </a:solidFill>
@@ -14247,7 +14249,7 @@
               </a:rPr>
               <a:t>Governance pathway</a:t>
             </a:r>
-            <a:endParaRPr lang="en-US" sz="1250" dirty="0"/>
+            <a:endParaRPr lang="en-US" sz="1160" dirty="0"/>
           </a:p>
         </p:txBody>
       </p:sp>
@@ -14259,7 +14261,7 @@
         </p:nvSpPr>
         <p:spPr>
           <a:xfrm>
-            <a:off x="8763000" y="3399739"/>
+            <a:off x="8717280" y="3406140"/>
             <a:ext cx="164592" cy="0"/>
           </a:xfrm>
           <a:prstGeom prst="line">
@@ -14282,8 +14284,8 @@
         </p:nvSpPr>
         <p:spPr>
           <a:xfrm>
-            <a:off x="7872984" y="3248863"/>
-            <a:ext cx="890016" cy="301752"/>
+            <a:off x="7781544" y="3255264"/>
+            <a:ext cx="935736" cy="301752"/>
           </a:xfrm>
           <a:prstGeom prst="roundRect">
             <a:avLst>
@@ -14309,8 +14311,8 @@
         </p:nvSpPr>
         <p:spPr>
           <a:xfrm>
-            <a:off x="7909560" y="3322015"/>
-            <a:ext cx="816864" cy="146304"/>
+            <a:off x="7818120" y="3328416"/>
+            <a:ext cx="862584" cy="146304"/>
           </a:xfrm>
           <a:prstGeom prst="rect">
             <a:avLst/>
@@ -14350,7 +14352,7 @@
         </p:nvSpPr>
         <p:spPr>
           <a:xfrm>
-            <a:off x="9817608" y="3399739"/>
+            <a:off x="9817608" y="3406140"/>
             <a:ext cx="164592" cy="0"/>
           </a:xfrm>
           <a:prstGeom prst="line">
@@ -14373,8 +14375,8 @@
         </p:nvSpPr>
         <p:spPr>
           <a:xfrm>
-            <a:off x="8927592" y="3248863"/>
-            <a:ext cx="890016" cy="301752"/>
+            <a:off x="8881872" y="3255264"/>
+            <a:ext cx="935736" cy="301752"/>
           </a:xfrm>
           <a:prstGeom prst="roundRect">
             <a:avLst>
@@ -14400,8 +14402,8 @@
         </p:nvSpPr>
         <p:spPr>
           <a:xfrm>
-            <a:off x="8964168" y="3322015"/>
-            <a:ext cx="816864" cy="146304"/>
+            <a:off x="8918448" y="3328416"/>
+            <a:ext cx="862584" cy="146304"/>
           </a:xfrm>
           <a:prstGeom prst="rect">
             <a:avLst/>
@@ -14441,8 +14443,8 @@
         </p:nvSpPr>
         <p:spPr>
           <a:xfrm>
-            <a:off x="9982200" y="3248863"/>
-            <a:ext cx="890016" cy="301752"/>
+            <a:off x="9982200" y="3255264"/>
+            <a:ext cx="935736" cy="301752"/>
           </a:xfrm>
           <a:prstGeom prst="roundRect">
             <a:avLst>
@@ -14468,8 +14470,8 @@
         </p:nvSpPr>
         <p:spPr>
           <a:xfrm>
-            <a:off x="10018776" y="3322015"/>
-            <a:ext cx="816864" cy="146304"/>
+            <a:off x="10018776" y="3328416"/>
+            <a:ext cx="862584" cy="146304"/>
           </a:xfrm>
           <a:prstGeom prst="rect">
             <a:avLst/>
@@ -14509,8 +14511,8 @@
         </p:nvSpPr>
         <p:spPr>
           <a:xfrm>
-            <a:off x="7854696" y="3742639"/>
-            <a:ext cx="3035808" cy="158191"/>
+            <a:off x="7763256" y="3749040"/>
+            <a:ext cx="3172968" cy="356616"/>
           </a:xfrm>
           <a:prstGeom prst="rect">
             <a:avLst/>
@@ -14528,7 +14530,7 @@
               <a:buNone/>
             </a:pPr>
             <a:r>
-              <a:rPr lang="en-US" sz="1120" dirty="0">
+              <a:rPr lang="en-US" sz="1040" dirty="0">
                 <a:solidFill>
                   <a:srgbClr val="17364A"/>
                 </a:solidFill>
@@ -14536,9 +14538,9 @@
                 <a:ea typeface="Aptos" pitchFamily="34" charset="-122"/>
                 <a:cs typeface="Aptos" pitchFamily="34" charset="-120"/>
               </a:rPr>
-              <a:t>A proposed AI use should move through documented review before it becomes an operational workflow.</a:t>
-            </a:r>
-            <a:endParaRPr lang="en-US" sz="1120" dirty="0"/>
+              <a:t>A proposed AI use should move through documented review before it.</a:t>
+            </a:r>
+            <a:endParaRPr lang="en-US" sz="1040" dirty="0"/>
           </a:p>
         </p:txBody>
       </p:sp>
@@ -14550,12 +14552,12 @@
         </p:nvSpPr>
         <p:spPr>
           <a:xfrm>
-            <a:off x="7635240" y="4184294"/>
-            <a:ext cx="3474720" cy="1466698"/>
+            <a:off x="7543800" y="4389120"/>
+            <a:ext cx="3611880" cy="1261872"/>
           </a:xfrm>
           <a:prstGeom prst="roundRect">
             <a:avLst>
-              <a:gd name="adj" fmla="val 7481"/>
+              <a:gd name="adj" fmla="val 8696"/>
             </a:avLst>
           </a:prstGeom>
           <a:solidFill>
@@ -14577,8 +14579,8 @@
         </p:nvSpPr>
         <p:spPr>
           <a:xfrm>
-            <a:off x="7799832" y="4330598"/>
-            <a:ext cx="3145536" cy="256032"/>
+            <a:off x="7708392" y="4517136"/>
+            <a:ext cx="3282696" cy="228600"/>
           </a:xfrm>
           <a:prstGeom prst="rect">
             <a:avLst/>
@@ -14594,7 +14596,7 @@
               <a:buNone/>
             </a:pPr>
             <a:r>
-              <a:rPr lang="en-US" sz="1300" b="1" dirty="0">
+              <a:rPr lang="en-US" sz="1220" b="1" dirty="0">
                 <a:solidFill>
                   <a:srgbClr val="0068B7"/>
                 </a:solidFill>
@@ -14604,7 +14606,7 @@
               </a:rPr>
               <a:t>What to document</a:t>
             </a:r>
-            <a:endParaRPr lang="en-US" sz="1300" dirty="0"/>
+            <a:endParaRPr lang="en-US" sz="1220" dirty="0"/>
           </a:p>
         </p:txBody>
       </p:sp>
@@ -14616,8 +14618,8 @@
         </p:nvSpPr>
         <p:spPr>
           <a:xfrm>
-            <a:off x="7799832" y="4659782"/>
-            <a:ext cx="3145536" cy="899770"/>
+            <a:off x="7708392" y="4828032"/>
+            <a:ext cx="3282696" cy="749808"/>
           </a:xfrm>
           <a:prstGeom prst="rect">
             <a:avLst/>
@@ -14635,7 +14637,7 @@
               <a:buNone/>
             </a:pPr>
             <a:r>
-              <a:rPr lang="en-US" sz="1320" dirty="0">
+              <a:rPr lang="en-US" sz="1220" dirty="0">
                 <a:solidFill>
                   <a:srgbClr val="17364A"/>
                 </a:solidFill>
@@ -14643,9 +14645,9 @@
                 <a:ea typeface="Aptos" pitchFamily="34" charset="-122"/>
                 <a:cs typeface="Aptos" pitchFamily="34" charset="-120"/>
               </a:rPr>
-              <a:t>Connect the concept to public health purpose, responsible use, required safeguards, documentation, and the next action a department should take.</a:t>
-            </a:r>
-            <a:endParaRPr lang="en-US" sz="1320" dirty="0"/>
+              <a:t>Connect the concept to public health purpose, responsible use, required.</a:t>
+            </a:r>
+            <a:endParaRPr lang="en-US" sz="1220" dirty="0"/>
           </a:p>
         </p:txBody>
       </p:sp>
@@ -14936,8 +14938,8 @@
         </p:nvSpPr>
         <p:spPr>
           <a:xfrm>
-            <a:off x="868680" y="1508760"/>
-            <a:ext cx="6309360" cy="4160520"/>
+            <a:off x="822960" y="1463040"/>
+            <a:ext cx="6565392" cy="4343400"/>
           </a:xfrm>
           <a:prstGeom prst="rect">
             <a:avLst/>
@@ -14955,7 +14957,7 @@
               <a:buNone/>
             </a:pPr>
             <a:r>
-              <a:rPr lang="en-US" sz="2100" dirty="0">
+              <a:rPr lang="en-US" sz="1920" dirty="0">
                 <a:solidFill>
                   <a:srgbClr val="003A63"/>
                 </a:solidFill>
@@ -14963,16 +14965,16 @@
                 <a:ea typeface="Aptos" pitchFamily="34" charset="-122"/>
                 <a:cs typeface="Aptos" pitchFamily="34" charset="-120"/>
               </a:rPr>
-              <a:t>• This module provides national-level training guidance for public health agencies and partners.</a:t>
-            </a:r>
-            <a:endParaRPr lang="en-US" sz="2100" dirty="0"/>
-          </a:p>
-          <a:p>
-            <a:pPr indent="0" marL="0">
-              <a:buNone/>
-            </a:pPr>
-            <a:r>
-              <a:rPr lang="en-US" sz="2100" dirty="0">
+              <a:t>• This module provides national-level training guidance for public health.</a:t>
+            </a:r>
+            <a:endParaRPr lang="en-US" sz="1920" dirty="0"/>
+          </a:p>
+          <a:p>
+            <a:pPr indent="0" marL="0">
+              <a:buNone/>
+            </a:pPr>
+            <a:r>
+              <a:rPr lang="en-US" sz="1920" dirty="0">
                 <a:solidFill>
                   <a:srgbClr val="003A63"/>
                 </a:solidFill>
@@ -14980,16 +14982,16 @@
                 <a:ea typeface="Aptos" pitchFamily="34" charset="-122"/>
                 <a:cs typeface="Aptos" pitchFamily="34" charset="-120"/>
               </a:rPr>
-              <a:t>• It is not legal advice and does not replace review by agency legal counsel, privacy officers,.</a:t>
-            </a:r>
-            <a:endParaRPr lang="en-US" sz="2100" dirty="0"/>
-          </a:p>
-          <a:p>
-            <a:pPr indent="0" marL="0">
-              <a:buNone/>
-            </a:pPr>
-            <a:r>
-              <a:rPr lang="en-US" sz="2100" dirty="0">
+              <a:t>• It is not legal advice and does not replace review by agency legal counsel,.</a:t>
+            </a:r>
+            <a:endParaRPr lang="en-US" sz="1920" dirty="0"/>
+          </a:p>
+          <a:p>
+            <a:pPr indent="0" marL="0">
+              <a:buNone/>
+            </a:pPr>
+            <a:r>
+              <a:rPr lang="en-US" sz="1920" dirty="0">
                 <a:solidFill>
                   <a:srgbClr val="003A63"/>
                 </a:solidFill>
@@ -14997,9 +14999,9 @@
                 <a:ea typeface="Aptos" pitchFamily="34" charset="-122"/>
                 <a:cs typeface="Aptos" pitchFamily="34" charset="-120"/>
               </a:rPr>
-              <a:t>• Requirements may vary by state, locality, territory, Tribe, agency, funding source,.</a:t>
-            </a:r>
-            <a:endParaRPr lang="en-US" sz="2100" dirty="0"/>
+              <a:t>• Requirements may vary by state, locality, territory, Tribe, agency, funding.</a:t>
+            </a:r>
+            <a:endParaRPr lang="en-US" sz="1920" dirty="0"/>
           </a:p>
         </p:txBody>
       </p:sp>
@@ -15011,12 +15013,12 @@
         </p:nvSpPr>
         <p:spPr>
           <a:xfrm>
-            <a:off x="7635240" y="1325880"/>
-            <a:ext cx="3474720" cy="1207008"/>
+            <a:off x="7543800" y="1325880"/>
+            <a:ext cx="3611880" cy="1261872"/>
           </a:xfrm>
           <a:prstGeom prst="roundRect">
             <a:avLst>
-              <a:gd name="adj" fmla="val 9091"/>
+              <a:gd name="adj" fmla="val 8696"/>
             </a:avLst>
           </a:prstGeom>
           <a:solidFill>
@@ -15038,8 +15040,8 @@
         </p:nvSpPr>
         <p:spPr>
           <a:xfrm>
-            <a:off x="7799832" y="1472184"/>
-            <a:ext cx="3145536" cy="256032"/>
+            <a:off x="7708392" y="1453896"/>
+            <a:ext cx="3282696" cy="228600"/>
           </a:xfrm>
           <a:prstGeom prst="rect">
             <a:avLst/>
@@ -15055,7 +15057,7 @@
               <a:buNone/>
             </a:pPr>
             <a:r>
-              <a:rPr lang="en-US" sz="1300" b="1" dirty="0">
+              <a:rPr lang="en-US" sz="1220" b="1" dirty="0">
                 <a:solidFill>
                   <a:srgbClr val="0068B7"/>
                 </a:solidFill>
@@ -15065,7 +15067,7 @@
               </a:rPr>
               <a:t>Governance lens</a:t>
             </a:r>
-            <a:endParaRPr lang="en-US" sz="1300" dirty="0"/>
+            <a:endParaRPr lang="en-US" sz="1220" dirty="0"/>
           </a:p>
         </p:txBody>
       </p:sp>
@@ -15077,8 +15079,8 @@
         </p:nvSpPr>
         <p:spPr>
           <a:xfrm>
-            <a:off x="7799832" y="1801368"/>
-            <a:ext cx="3145536" cy="640080"/>
+            <a:off x="7708392" y="1764792"/>
+            <a:ext cx="3282696" cy="749808"/>
           </a:xfrm>
           <a:prstGeom prst="rect">
             <a:avLst/>
@@ -15096,7 +15098,7 @@
               <a:buNone/>
             </a:pPr>
             <a:r>
-              <a:rPr lang="en-US" sz="1320" dirty="0">
+              <a:rPr lang="en-US" sz="1220" dirty="0">
                 <a:solidFill>
                   <a:srgbClr val="17364A"/>
                 </a:solidFill>
@@ -15104,9 +15106,9 @@
                 <a:ea typeface="Aptos" pitchFamily="34" charset="-122"/>
                 <a:cs typeface="Aptos" pitchFamily="34" charset="-120"/>
               </a:rPr>
-              <a:t>This module provides national-level training guidance for public health agencies and.</a:t>
-            </a:r>
-            <a:endParaRPr lang="en-US" sz="1320" dirty="0"/>
+              <a:t>This module provides national-level training guidance for public health agencies.</a:t>
+            </a:r>
+            <a:endParaRPr lang="en-US" sz="1220" dirty="0"/>
           </a:p>
         </p:txBody>
       </p:sp>
@@ -15118,12 +15120,12 @@
         </p:nvSpPr>
         <p:spPr>
           <a:xfrm>
-            <a:off x="7635240" y="2670048"/>
-            <a:ext cx="3474720" cy="1377086"/>
+            <a:off x="7543800" y="2724912"/>
+            <a:ext cx="3611880" cy="1527048"/>
           </a:xfrm>
           <a:prstGeom prst="roundRect">
             <a:avLst>
-              <a:gd name="adj" fmla="val 7968"/>
+              <a:gd name="adj" fmla="val 7186"/>
             </a:avLst>
           </a:prstGeom>
           <a:solidFill>
@@ -15145,24 +15147,26 @@
         </p:nvSpPr>
         <p:spPr>
           <a:xfrm>
-            <a:off x="7799832" y="2798064"/>
-            <a:ext cx="3145536" cy="237744"/>
-          </a:xfrm>
-          <a:prstGeom prst="rect">
-            <a:avLst/>
-          </a:prstGeom>
-          <a:noFill/>
-          <a:ln/>
-        </p:spPr>
-        <p:txBody>
-          <a:bodyPr wrap="square" lIns="0" tIns="0" rIns="0" bIns="0" rtlCol="0" anchor="ctr"/>
-          <a:lstStyle/>
-          <a:p>
-            <a:pPr indent="0" marL="0">
-              <a:buNone/>
-            </a:pPr>
-            <a:r>
-              <a:rPr lang="en-US" sz="1250" b="1" dirty="0">
+            <a:off x="7708392" y="2852928"/>
+            <a:ext cx="3282696" cy="219456"/>
+          </a:xfrm>
+          <a:prstGeom prst="rect">
+            <a:avLst/>
+          </a:prstGeom>
+          <a:noFill/>
+          <a:ln/>
+        </p:spPr>
+        <p:txBody>
+          <a:bodyPr wrap="square" lIns="0" tIns="0" rIns="0" bIns="0" rtlCol="0" anchor="ctr">
+            <a:normAutofit/>
+          </a:bodyPr>
+          <a:lstStyle/>
+          <a:p>
+            <a:pPr indent="0" marL="0">
+              <a:buNone/>
+            </a:pPr>
+            <a:r>
+              <a:rPr lang="en-US" sz="1160" b="1" dirty="0">
                 <a:solidFill>
                   <a:srgbClr val="0068B7"/>
                 </a:solidFill>
@@ -15172,7 +15176,7 @@
               </a:rPr>
               <a:t>Governance pathway</a:t>
             </a:r>
-            <a:endParaRPr lang="en-US" sz="1250" dirty="0"/>
+            <a:endParaRPr lang="en-US" sz="1160" dirty="0"/>
           </a:p>
         </p:txBody>
       </p:sp>
@@ -15184,7 +15188,7 @@
         </p:nvSpPr>
         <p:spPr>
           <a:xfrm>
-            <a:off x="8763000" y="3351276"/>
+            <a:off x="8717280" y="3406140"/>
             <a:ext cx="164592" cy="0"/>
           </a:xfrm>
           <a:prstGeom prst="line">
@@ -15207,8 +15211,8 @@
         </p:nvSpPr>
         <p:spPr>
           <a:xfrm>
-            <a:off x="7872984" y="3200400"/>
-            <a:ext cx="890016" cy="301752"/>
+            <a:off x="7781544" y="3255264"/>
+            <a:ext cx="935736" cy="301752"/>
           </a:xfrm>
           <a:prstGeom prst="roundRect">
             <a:avLst>
@@ -15234,8 +15238,8 @@
         </p:nvSpPr>
         <p:spPr>
           <a:xfrm>
-            <a:off x="7909560" y="3273552"/>
-            <a:ext cx="816864" cy="146304"/>
+            <a:off x="7818120" y="3328416"/>
+            <a:ext cx="862584" cy="146304"/>
           </a:xfrm>
           <a:prstGeom prst="rect">
             <a:avLst/>
@@ -15275,7 +15279,7 @@
         </p:nvSpPr>
         <p:spPr>
           <a:xfrm>
-            <a:off x="9817608" y="3351276"/>
+            <a:off x="9817608" y="3406140"/>
             <a:ext cx="164592" cy="0"/>
           </a:xfrm>
           <a:prstGeom prst="line">
@@ -15298,8 +15302,8 @@
         </p:nvSpPr>
         <p:spPr>
           <a:xfrm>
-            <a:off x="8927592" y="3200400"/>
-            <a:ext cx="890016" cy="301752"/>
+            <a:off x="8881872" y="3255264"/>
+            <a:ext cx="935736" cy="301752"/>
           </a:xfrm>
           <a:prstGeom prst="roundRect">
             <a:avLst>
@@ -15325,8 +15329,8 @@
         </p:nvSpPr>
         <p:spPr>
           <a:xfrm>
-            <a:off x="8964168" y="3273552"/>
-            <a:ext cx="816864" cy="146304"/>
+            <a:off x="8918448" y="3328416"/>
+            <a:ext cx="862584" cy="146304"/>
           </a:xfrm>
           <a:prstGeom prst="rect">
             <a:avLst/>
@@ -15366,8 +15370,8 @@
         </p:nvSpPr>
         <p:spPr>
           <a:xfrm>
-            <a:off x="9982200" y="3200400"/>
-            <a:ext cx="890016" cy="301752"/>
+            <a:off x="9982200" y="3255264"/>
+            <a:ext cx="935736" cy="301752"/>
           </a:xfrm>
           <a:prstGeom prst="roundRect">
             <a:avLst>
@@ -15393,8 +15397,8 @@
         </p:nvSpPr>
         <p:spPr>
           <a:xfrm>
-            <a:off x="10018776" y="3273552"/>
-            <a:ext cx="816864" cy="146304"/>
+            <a:off x="10018776" y="3328416"/>
+            <a:ext cx="862584" cy="146304"/>
           </a:xfrm>
           <a:prstGeom prst="rect">
             <a:avLst/>
@@ -15434,8 +15438,8 @@
         </p:nvSpPr>
         <p:spPr>
           <a:xfrm>
-            <a:off x="7854696" y="3694176"/>
-            <a:ext cx="3035808" cy="206654"/>
+            <a:off x="7763256" y="3749040"/>
+            <a:ext cx="3172968" cy="356616"/>
           </a:xfrm>
           <a:prstGeom prst="rect">
             <a:avLst/>
@@ -15453,7 +15457,7 @@
               <a:buNone/>
             </a:pPr>
             <a:r>
-              <a:rPr lang="en-US" sz="1120" dirty="0">
+              <a:rPr lang="en-US" sz="1040" dirty="0">
                 <a:solidFill>
                   <a:srgbClr val="17364A"/>
                 </a:solidFill>
@@ -15461,9 +15465,9 @@
                 <a:ea typeface="Aptos" pitchFamily="34" charset="-122"/>
                 <a:cs typeface="Aptos" pitchFamily="34" charset="-120"/>
               </a:rPr>
-              <a:t>A proposed AI use should move through documented review before it becomes an operational workflow.</a:t>
-            </a:r>
-            <a:endParaRPr lang="en-US" sz="1120" dirty="0"/>
+              <a:t>A proposed AI use should move through documented review before it.</a:t>
+            </a:r>
+            <a:endParaRPr lang="en-US" sz="1040" dirty="0"/>
           </a:p>
         </p:txBody>
       </p:sp>
@@ -15475,12 +15479,12 @@
         </p:nvSpPr>
         <p:spPr>
           <a:xfrm>
-            <a:off x="7635240" y="4184294"/>
-            <a:ext cx="3474720" cy="1466698"/>
+            <a:off x="7543800" y="4389120"/>
+            <a:ext cx="3611880" cy="1261872"/>
           </a:xfrm>
           <a:prstGeom prst="roundRect">
             <a:avLst>
-              <a:gd name="adj" fmla="val 7481"/>
+              <a:gd name="adj" fmla="val 8696"/>
             </a:avLst>
           </a:prstGeom>
           <a:solidFill>
@@ -15502,8 +15506,8 @@
         </p:nvSpPr>
         <p:spPr>
           <a:xfrm>
-            <a:off x="7799832" y="4330598"/>
-            <a:ext cx="3145536" cy="256032"/>
+            <a:off x="7708392" y="4517136"/>
+            <a:ext cx="3282696" cy="228600"/>
           </a:xfrm>
           <a:prstGeom prst="rect">
             <a:avLst/>
@@ -15519,7 +15523,7 @@
               <a:buNone/>
             </a:pPr>
             <a:r>
-              <a:rPr lang="en-US" sz="1300" b="1" dirty="0">
+              <a:rPr lang="en-US" sz="1220" b="1" dirty="0">
                 <a:solidFill>
                   <a:srgbClr val="0068B7"/>
                 </a:solidFill>
@@ -15529,7 +15533,7 @@
               </a:rPr>
               <a:t>What to document</a:t>
             </a:r>
-            <a:endParaRPr lang="en-US" sz="1300" dirty="0"/>
+            <a:endParaRPr lang="en-US" sz="1220" dirty="0"/>
           </a:p>
         </p:txBody>
       </p:sp>
@@ -15541,8 +15545,8 @@
         </p:nvSpPr>
         <p:spPr>
           <a:xfrm>
-            <a:off x="7799832" y="4659782"/>
-            <a:ext cx="3145536" cy="899770"/>
+            <a:off x="7708392" y="4828032"/>
+            <a:ext cx="3282696" cy="749808"/>
           </a:xfrm>
           <a:prstGeom prst="rect">
             <a:avLst/>
@@ -15560,7 +15564,7 @@
               <a:buNone/>
             </a:pPr>
             <a:r>
-              <a:rPr lang="en-US" sz="1320" dirty="0">
+              <a:rPr lang="en-US" sz="1220" dirty="0">
                 <a:solidFill>
                   <a:srgbClr val="17364A"/>
                 </a:solidFill>
@@ -15568,9 +15572,9 @@
                 <a:ea typeface="Aptos" pitchFamily="34" charset="-122"/>
                 <a:cs typeface="Aptos" pitchFamily="34" charset="-120"/>
               </a:rPr>
-              <a:t>Translate this concept into clear decision rights, review steps, documentation expectations, and escalation paths before an AI-supported workflow is approved.</a:t>
-            </a:r>
-            <a:endParaRPr lang="en-US" sz="1320" dirty="0"/>
+              <a:t>Translate this concept into clear decision rights, review steps, documentation.</a:t>
+            </a:r>
+            <a:endParaRPr lang="en-US" sz="1220" dirty="0"/>
           </a:p>
         </p:txBody>
       </p:sp>
@@ -15861,8 +15865,8 @@
         </p:nvSpPr>
         <p:spPr>
           <a:xfrm>
-            <a:off x="868680" y="1508760"/>
-            <a:ext cx="6309360" cy="4160520"/>
+            <a:off x="822960" y="1463040"/>
+            <a:ext cx="6565392" cy="4343400"/>
           </a:xfrm>
           <a:prstGeom prst="rect">
             <a:avLst/>
@@ -15880,7 +15884,7 @@
               <a:buNone/>
             </a:pPr>
             <a:r>
-              <a:rPr lang="en-US" sz="2100" dirty="0">
+              <a:rPr lang="en-US" sz="1920" dirty="0">
                 <a:solidFill>
                   <a:srgbClr val="003A63"/>
                 </a:solidFill>
@@ -15890,14 +15894,14 @@
               </a:rPr>
               <a:t>• Public health depends on trust.</a:t>
             </a:r>
-            <a:endParaRPr lang="en-US" sz="2100" dirty="0"/>
-          </a:p>
-          <a:p>
-            <a:pPr indent="0" marL="0">
-              <a:buNone/>
-            </a:pPr>
-            <a:r>
-              <a:rPr lang="en-US" sz="2100" dirty="0">
+            <a:endParaRPr lang="en-US" sz="1920" dirty="0"/>
+          </a:p>
+          <a:p>
+            <a:pPr indent="0" marL="0">
+              <a:buNone/>
+            </a:pPr>
+            <a:r>
+              <a:rPr lang="en-US" sz="1920" dirty="0">
                 <a:solidFill>
                   <a:srgbClr val="003A63"/>
                 </a:solidFill>
@@ -15905,16 +15909,16 @@
                 <a:ea typeface="Aptos" pitchFamily="34" charset="-122"/>
                 <a:cs typeface="Aptos" pitchFamily="34" charset="-120"/>
               </a:rPr>
-              <a:t>• If communities discover that AI is being used in surveillance, communication, service routing,.</a:t>
-            </a:r>
-            <a:endParaRPr lang="en-US" sz="2100" dirty="0"/>
-          </a:p>
-          <a:p>
-            <a:pPr indent="0" marL="0">
-              <a:buNone/>
-            </a:pPr>
-            <a:r>
-              <a:rPr lang="en-US" sz="2100" dirty="0">
+              <a:t>• If communities discover that AI is being used in surveillance,.</a:t>
+            </a:r>
+            <a:endParaRPr lang="en-US" sz="1920" dirty="0"/>
+          </a:p>
+          <a:p>
+            <a:pPr indent="0" marL="0">
+              <a:buNone/>
+            </a:pPr>
+            <a:r>
+              <a:rPr lang="en-US" sz="1920" dirty="0">
                 <a:solidFill>
                   <a:srgbClr val="003A63"/>
                 </a:solidFill>
@@ -15922,9 +15926,9 @@
                 <a:ea typeface="Aptos" pitchFamily="34" charset="-122"/>
                 <a:cs typeface="Aptos" pitchFamily="34" charset="-120"/>
               </a:rPr>
-              <a:t>• Transparency does not require agencies to disclose every technical detail, but it does require.</a:t>
-            </a:r>
-            <a:endParaRPr lang="en-US" sz="2100" dirty="0"/>
+              <a:t>• Transparency does not require agencies to disclose every technical detail,.</a:t>
+            </a:r>
+            <a:endParaRPr lang="en-US" sz="1920" dirty="0"/>
           </a:p>
         </p:txBody>
       </p:sp>
@@ -15936,12 +15940,12 @@
         </p:nvSpPr>
         <p:spPr>
           <a:xfrm>
-            <a:off x="7635240" y="1325880"/>
-            <a:ext cx="3474720" cy="1207008"/>
+            <a:off x="7543800" y="1325880"/>
+            <a:ext cx="3611880" cy="1261872"/>
           </a:xfrm>
           <a:prstGeom prst="roundRect">
             <a:avLst>
-              <a:gd name="adj" fmla="val 9091"/>
+              <a:gd name="adj" fmla="val 8696"/>
             </a:avLst>
           </a:prstGeom>
           <a:solidFill>
@@ -15963,8 +15967,8 @@
         </p:nvSpPr>
         <p:spPr>
           <a:xfrm>
-            <a:off x="7799832" y="1472184"/>
-            <a:ext cx="3145536" cy="256032"/>
+            <a:off x="7708392" y="1453896"/>
+            <a:ext cx="3282696" cy="228600"/>
           </a:xfrm>
           <a:prstGeom prst="rect">
             <a:avLst/>
@@ -15980,7 +15984,7 @@
               <a:buNone/>
             </a:pPr>
             <a:r>
-              <a:rPr lang="en-US" sz="1300" b="1" dirty="0">
+              <a:rPr lang="en-US" sz="1220" b="1" dirty="0">
                 <a:solidFill>
                   <a:srgbClr val="0068B7"/>
                 </a:solidFill>
@@ -15990,7 +15994,7 @@
               </a:rPr>
               <a:t>Governance lens</a:t>
             </a:r>
-            <a:endParaRPr lang="en-US" sz="1300" dirty="0"/>
+            <a:endParaRPr lang="en-US" sz="1220" dirty="0"/>
           </a:p>
         </p:txBody>
       </p:sp>
@@ -16002,8 +16006,8 @@
         </p:nvSpPr>
         <p:spPr>
           <a:xfrm>
-            <a:off x="7799832" y="1801368"/>
-            <a:ext cx="3145536" cy="640080"/>
+            <a:off x="7708392" y="1764792"/>
+            <a:ext cx="3282696" cy="749808"/>
           </a:xfrm>
           <a:prstGeom prst="rect">
             <a:avLst/>
@@ -16021,7 +16025,7 @@
               <a:buNone/>
             </a:pPr>
             <a:r>
-              <a:rPr lang="en-US" sz="1320" dirty="0">
+              <a:rPr lang="en-US" sz="1220" dirty="0">
                 <a:solidFill>
                   <a:srgbClr val="17364A"/>
                 </a:solidFill>
@@ -16031,7 +16035,7 @@
               </a:rPr>
               <a:t>Public health depends on trust.</a:t>
             </a:r>
-            <a:endParaRPr lang="en-US" sz="1320" dirty="0"/>
+            <a:endParaRPr lang="en-US" sz="1220" dirty="0"/>
           </a:p>
         </p:txBody>
       </p:sp>
@@ -16043,12 +16047,12 @@
         </p:nvSpPr>
         <p:spPr>
           <a:xfrm>
-            <a:off x="7635240" y="2670048"/>
-            <a:ext cx="3474720" cy="1377086"/>
+            <a:off x="7543800" y="2724912"/>
+            <a:ext cx="3611880" cy="1527048"/>
           </a:xfrm>
           <a:prstGeom prst="roundRect">
             <a:avLst>
-              <a:gd name="adj" fmla="val 7968"/>
+              <a:gd name="adj" fmla="val 7186"/>
             </a:avLst>
           </a:prstGeom>
           <a:solidFill>
@@ -16070,24 +16074,26 @@
         </p:nvSpPr>
         <p:spPr>
           <a:xfrm>
-            <a:off x="7799832" y="2798064"/>
-            <a:ext cx="3145536" cy="237744"/>
-          </a:xfrm>
-          <a:prstGeom prst="rect">
-            <a:avLst/>
-          </a:prstGeom>
-          <a:noFill/>
-          <a:ln/>
-        </p:spPr>
-        <p:txBody>
-          <a:bodyPr wrap="square" lIns="0" tIns="0" rIns="0" bIns="0" rtlCol="0" anchor="ctr"/>
-          <a:lstStyle/>
-          <a:p>
-            <a:pPr indent="0" marL="0">
-              <a:buNone/>
-            </a:pPr>
-            <a:r>
-              <a:rPr lang="en-US" sz="1250" b="1" dirty="0">
+            <a:off x="7708392" y="2852928"/>
+            <a:ext cx="3282696" cy="219456"/>
+          </a:xfrm>
+          <a:prstGeom prst="rect">
+            <a:avLst/>
+          </a:prstGeom>
+          <a:noFill/>
+          <a:ln/>
+        </p:spPr>
+        <p:txBody>
+          <a:bodyPr wrap="square" lIns="0" tIns="0" rIns="0" bIns="0" rtlCol="0" anchor="ctr">
+            <a:normAutofit/>
+          </a:bodyPr>
+          <a:lstStyle/>
+          <a:p>
+            <a:pPr indent="0" marL="0">
+              <a:buNone/>
+            </a:pPr>
+            <a:r>
+              <a:rPr lang="en-US" sz="1160" b="1" dirty="0">
                 <a:solidFill>
                   <a:srgbClr val="0068B7"/>
                 </a:solidFill>
@@ -16097,7 +16103,7 @@
               </a:rPr>
               <a:t>Governance pathway</a:t>
             </a:r>
-            <a:endParaRPr lang="en-US" sz="1250" dirty="0"/>
+            <a:endParaRPr lang="en-US" sz="1160" dirty="0"/>
           </a:p>
         </p:txBody>
       </p:sp>
@@ -16109,7 +16115,7 @@
         </p:nvSpPr>
         <p:spPr>
           <a:xfrm>
-            <a:off x="8763000" y="3351276"/>
+            <a:off x="8717280" y="3406140"/>
             <a:ext cx="164592" cy="0"/>
           </a:xfrm>
           <a:prstGeom prst="line">
@@ -16132,8 +16138,8 @@
         </p:nvSpPr>
         <p:spPr>
           <a:xfrm>
-            <a:off x="7872984" y="3200400"/>
-            <a:ext cx="890016" cy="301752"/>
+            <a:off x="7781544" y="3255264"/>
+            <a:ext cx="935736" cy="301752"/>
           </a:xfrm>
           <a:prstGeom prst="roundRect">
             <a:avLst>
@@ -16159,8 +16165,8 @@
         </p:nvSpPr>
         <p:spPr>
           <a:xfrm>
-            <a:off x="7909560" y="3273552"/>
-            <a:ext cx="816864" cy="146304"/>
+            <a:off x="7818120" y="3328416"/>
+            <a:ext cx="862584" cy="146304"/>
           </a:xfrm>
           <a:prstGeom prst="rect">
             <a:avLst/>
@@ -16200,7 +16206,7 @@
         </p:nvSpPr>
         <p:spPr>
           <a:xfrm>
-            <a:off x="9817608" y="3351276"/>
+            <a:off x="9817608" y="3406140"/>
             <a:ext cx="164592" cy="0"/>
           </a:xfrm>
           <a:prstGeom prst="line">
@@ -16223,8 +16229,8 @@
         </p:nvSpPr>
         <p:spPr>
           <a:xfrm>
-            <a:off x="8927592" y="3200400"/>
-            <a:ext cx="890016" cy="301752"/>
+            <a:off x="8881872" y="3255264"/>
+            <a:ext cx="935736" cy="301752"/>
           </a:xfrm>
           <a:prstGeom prst="roundRect">
             <a:avLst>
@@ -16250,8 +16256,8 @@
         </p:nvSpPr>
         <p:spPr>
           <a:xfrm>
-            <a:off x="8964168" y="3273552"/>
-            <a:ext cx="816864" cy="146304"/>
+            <a:off x="8918448" y="3328416"/>
+            <a:ext cx="862584" cy="146304"/>
           </a:xfrm>
           <a:prstGeom prst="rect">
             <a:avLst/>
@@ -16291,8 +16297,8 @@
         </p:nvSpPr>
         <p:spPr>
           <a:xfrm>
-            <a:off x="9982200" y="3200400"/>
-            <a:ext cx="890016" cy="301752"/>
+            <a:off x="9982200" y="3255264"/>
+            <a:ext cx="935736" cy="301752"/>
           </a:xfrm>
           <a:prstGeom prst="roundRect">
             <a:avLst>
@@ -16318,8 +16324,8 @@
         </p:nvSpPr>
         <p:spPr>
           <a:xfrm>
-            <a:off x="10018776" y="3273552"/>
-            <a:ext cx="816864" cy="146304"/>
+            <a:off x="10018776" y="3328416"/>
+            <a:ext cx="862584" cy="146304"/>
           </a:xfrm>
           <a:prstGeom prst="rect">
             <a:avLst/>
@@ -16359,8 +16365,8 @@
         </p:nvSpPr>
         <p:spPr>
           <a:xfrm>
-            <a:off x="7854696" y="3694176"/>
-            <a:ext cx="3035808" cy="206654"/>
+            <a:off x="7763256" y="3749040"/>
+            <a:ext cx="3172968" cy="356616"/>
           </a:xfrm>
           <a:prstGeom prst="rect">
             <a:avLst/>
@@ -16378,7 +16384,7 @@
               <a:buNone/>
             </a:pPr>
             <a:r>
-              <a:rPr lang="en-US" sz="1120" dirty="0">
+              <a:rPr lang="en-US" sz="1040" dirty="0">
                 <a:solidFill>
                   <a:srgbClr val="17364A"/>
                 </a:solidFill>
@@ -16386,9 +16392,9 @@
                 <a:ea typeface="Aptos" pitchFamily="34" charset="-122"/>
                 <a:cs typeface="Aptos" pitchFamily="34" charset="-120"/>
               </a:rPr>
-              <a:t>A proposed AI use should move through documented review before it becomes an operational workflow.</a:t>
-            </a:r>
-            <a:endParaRPr lang="en-US" sz="1120" dirty="0"/>
+              <a:t>A proposed AI use should move through documented review before it.</a:t>
+            </a:r>
+            <a:endParaRPr lang="en-US" sz="1040" dirty="0"/>
           </a:p>
         </p:txBody>
       </p:sp>
@@ -16400,12 +16406,12 @@
         </p:nvSpPr>
         <p:spPr>
           <a:xfrm>
-            <a:off x="7635240" y="4184294"/>
-            <a:ext cx="3474720" cy="1466698"/>
+            <a:off x="7543800" y="4389120"/>
+            <a:ext cx="3611880" cy="1261872"/>
           </a:xfrm>
           <a:prstGeom prst="roundRect">
             <a:avLst>
-              <a:gd name="adj" fmla="val 7481"/>
+              <a:gd name="adj" fmla="val 8696"/>
             </a:avLst>
           </a:prstGeom>
           <a:solidFill>
@@ -16427,8 +16433,8 @@
         </p:nvSpPr>
         <p:spPr>
           <a:xfrm>
-            <a:off x="7799832" y="4330598"/>
-            <a:ext cx="3145536" cy="256032"/>
+            <a:off x="7708392" y="4517136"/>
+            <a:ext cx="3282696" cy="228600"/>
           </a:xfrm>
           <a:prstGeom prst="rect">
             <a:avLst/>
@@ -16444,7 +16450,7 @@
               <a:buNone/>
             </a:pPr>
             <a:r>
-              <a:rPr lang="en-US" sz="1300" b="1" dirty="0">
+              <a:rPr lang="en-US" sz="1220" b="1" dirty="0">
                 <a:solidFill>
                   <a:srgbClr val="0068B7"/>
                 </a:solidFill>
@@ -16454,7 +16460,7 @@
               </a:rPr>
               <a:t>What to document</a:t>
             </a:r>
-            <a:endParaRPr lang="en-US" sz="1300" dirty="0"/>
+            <a:endParaRPr lang="en-US" sz="1220" dirty="0"/>
           </a:p>
         </p:txBody>
       </p:sp>
@@ -16466,8 +16472,8 @@
         </p:nvSpPr>
         <p:spPr>
           <a:xfrm>
-            <a:off x="7799832" y="4659782"/>
-            <a:ext cx="3145536" cy="899770"/>
+            <a:off x="7708392" y="4828032"/>
+            <a:ext cx="3282696" cy="749808"/>
           </a:xfrm>
           <a:prstGeom prst="rect">
             <a:avLst/>
@@ -16485,7 +16491,7 @@
               <a:buNone/>
             </a:pPr>
             <a:r>
-              <a:rPr lang="en-US" sz="1320" dirty="0">
+              <a:rPr lang="en-US" sz="1220" dirty="0">
                 <a:solidFill>
                   <a:srgbClr val="17364A"/>
                 </a:solidFill>
@@ -16493,9 +16499,9 @@
                 <a:ea typeface="Aptos" pitchFamily="34" charset="-122"/>
                 <a:cs typeface="Aptos" pitchFamily="34" charset="-120"/>
               </a:rPr>
-              <a:t>Connect the concept to public health purpose, responsible use, required safeguards, documentation, and the next action a department should take.</a:t>
-            </a:r>
-            <a:endParaRPr lang="en-US" sz="1320" dirty="0"/>
+              <a:t>Connect the concept to public health purpose, responsible use, required.</a:t>
+            </a:r>
+            <a:endParaRPr lang="en-US" sz="1220" dirty="0"/>
           </a:p>
         </p:txBody>
       </p:sp>
@@ -16786,8 +16792,8 @@
         </p:nvSpPr>
         <p:spPr>
           <a:xfrm>
-            <a:off x="868680" y="1508760"/>
-            <a:ext cx="6309360" cy="4160520"/>
+            <a:off x="822960" y="1463040"/>
+            <a:ext cx="6565392" cy="4343400"/>
           </a:xfrm>
           <a:prstGeom prst="rect">
             <a:avLst/>
@@ -16805,7 +16811,7 @@
               <a:buNone/>
             </a:pPr>
             <a:r>
-              <a:rPr lang="en-US" sz="2100" dirty="0">
+              <a:rPr lang="en-US" sz="1920" dirty="0">
                 <a:solidFill>
                   <a:srgbClr val="003A63"/>
                 </a:solidFill>
@@ -16813,16 +16819,16 @@
                 <a:ea typeface="Aptos" pitchFamily="34" charset="-122"/>
                 <a:cs typeface="Aptos" pitchFamily="34" charset="-120"/>
               </a:rPr>
-              <a:t>• A health department uses AI to draft public health messages, summarize internal reports, and.</a:t>
-            </a:r>
-            <a:endParaRPr lang="en-US" sz="2100" dirty="0"/>
-          </a:p>
-          <a:p>
-            <a:pPr indent="0" marL="0">
-              <a:buNone/>
-            </a:pPr>
-            <a:r>
-              <a:rPr lang="en-US" sz="2100" dirty="0">
+              <a:t>• A health department uses AI to draft public health messages, summarize.</a:t>
+            </a:r>
+            <a:endParaRPr lang="en-US" sz="1920" dirty="0"/>
+          </a:p>
+          <a:p>
+            <a:pPr indent="0" marL="0">
+              <a:buNone/>
+            </a:pPr>
+            <a:r>
+              <a:rPr lang="en-US" sz="1920" dirty="0">
                 <a:solidFill>
                   <a:srgbClr val="003A63"/>
                 </a:solidFill>
@@ -16830,16 +16836,16 @@
                 <a:ea typeface="Aptos" pitchFamily="34" charset="-122"/>
                 <a:cs typeface="Aptos" pitchFamily="34" charset="-120"/>
               </a:rPr>
-              <a:t>• Some uses may not require broad public disclosure, while others may affect public services and.</a:t>
-            </a:r>
-            <a:endParaRPr lang="en-US" sz="2100" dirty="0"/>
-          </a:p>
-          <a:p>
-            <a:pPr indent="0" marL="0">
-              <a:buNone/>
-            </a:pPr>
-            <a:r>
-              <a:rPr lang="en-US" sz="2100" dirty="0">
+              <a:t>• Some uses may not require broad public disclosure, while others may affect.</a:t>
+            </a:r>
+            <a:endParaRPr lang="en-US" sz="1920" dirty="0"/>
+          </a:p>
+          <a:p>
+            <a:pPr indent="0" marL="0">
+              <a:buNone/>
+            </a:pPr>
+            <a:r>
+              <a:rPr lang="en-US" sz="1920" dirty="0">
                 <a:solidFill>
                   <a:srgbClr val="003A63"/>
                 </a:solidFill>
@@ -16847,9 +16853,9 @@
                 <a:ea typeface="Aptos" pitchFamily="34" charset="-122"/>
                 <a:cs typeface="Aptos" pitchFamily="34" charset="-120"/>
               </a:rPr>
-              <a:t>• The registry does not need to reveal sensitive security details, but it should identify the.</a:t>
-            </a:r>
-            <a:endParaRPr lang="en-US" sz="2100" dirty="0"/>
+              <a:t>• The registry does not need to reveal sensitive security details, but it.</a:t>
+            </a:r>
+            <a:endParaRPr lang="en-US" sz="1920" dirty="0"/>
           </a:p>
         </p:txBody>
       </p:sp>
@@ -16861,12 +16867,12 @@
         </p:nvSpPr>
         <p:spPr>
           <a:xfrm>
-            <a:off x="7635240" y="1325880"/>
-            <a:ext cx="3474720" cy="1255471"/>
+            <a:off x="7543800" y="1325880"/>
+            <a:ext cx="3611880" cy="1261872"/>
           </a:xfrm>
           <a:prstGeom prst="roundRect">
             <a:avLst>
-              <a:gd name="adj" fmla="val 8740"/>
+              <a:gd name="adj" fmla="val 8696"/>
             </a:avLst>
           </a:prstGeom>
           <a:solidFill>
@@ -16888,8 +16894,8 @@
         </p:nvSpPr>
         <p:spPr>
           <a:xfrm>
-            <a:off x="7799832" y="1472184"/>
-            <a:ext cx="3145536" cy="256032"/>
+            <a:off x="7708392" y="1453896"/>
+            <a:ext cx="3282696" cy="228600"/>
           </a:xfrm>
           <a:prstGeom prst="rect">
             <a:avLst/>
@@ -16905,7 +16911,7 @@
               <a:buNone/>
             </a:pPr>
             <a:r>
-              <a:rPr lang="en-US" sz="1300" b="1" dirty="0">
+              <a:rPr lang="en-US" sz="1220" b="1" dirty="0">
                 <a:solidFill>
                   <a:srgbClr val="0068B7"/>
                 </a:solidFill>
@@ -16915,7 +16921,7 @@
               </a:rPr>
               <a:t>Governance lens</a:t>
             </a:r>
-            <a:endParaRPr lang="en-US" sz="1300" dirty="0"/>
+            <a:endParaRPr lang="en-US" sz="1220" dirty="0"/>
           </a:p>
         </p:txBody>
       </p:sp>
@@ -16927,8 +16933,8 @@
         </p:nvSpPr>
         <p:spPr>
           <a:xfrm>
-            <a:off x="7799832" y="1801368"/>
-            <a:ext cx="3145536" cy="688543"/>
+            <a:off x="7708392" y="1764792"/>
+            <a:ext cx="3282696" cy="749808"/>
           </a:xfrm>
           <a:prstGeom prst="rect">
             <a:avLst/>
@@ -16946,7 +16952,7 @@
               <a:buNone/>
             </a:pPr>
             <a:r>
-              <a:rPr lang="en-US" sz="1320" dirty="0">
+              <a:rPr lang="en-US" sz="1220" dirty="0">
                 <a:solidFill>
                   <a:srgbClr val="17364A"/>
                 </a:solidFill>
@@ -16954,9 +16960,9 @@
                 <a:ea typeface="Aptos" pitchFamily="34" charset="-122"/>
                 <a:cs typeface="Aptos" pitchFamily="34" charset="-120"/>
               </a:rPr>
-              <a:t>A health department uses AI to draft public health messages, summarize internal reports, and prioritize.</a:t>
-            </a:r>
-            <a:endParaRPr lang="en-US" sz="1320" dirty="0"/>
+              <a:t>A health department uses AI to draft public health messages, summarize internal.</a:t>
+            </a:r>
+            <a:endParaRPr lang="en-US" sz="1220" dirty="0"/>
           </a:p>
         </p:txBody>
       </p:sp>
@@ -16968,12 +16974,12 @@
         </p:nvSpPr>
         <p:spPr>
           <a:xfrm>
-            <a:off x="7635240" y="2718511"/>
-            <a:ext cx="3474720" cy="1328623"/>
+            <a:off x="7543800" y="2724912"/>
+            <a:ext cx="3611880" cy="1527048"/>
           </a:xfrm>
           <a:prstGeom prst="roundRect">
             <a:avLst>
-              <a:gd name="adj" fmla="val 8259"/>
+              <a:gd name="adj" fmla="val 7186"/>
             </a:avLst>
           </a:prstGeom>
           <a:solidFill>
@@ -16995,8 +17001,8 @@
         </p:nvSpPr>
         <p:spPr>
           <a:xfrm>
-            <a:off x="7799832" y="2864815"/>
-            <a:ext cx="3145536" cy="256032"/>
+            <a:off x="7708392" y="2852928"/>
+            <a:ext cx="3282696" cy="228600"/>
           </a:xfrm>
           <a:prstGeom prst="rect">
             <a:avLst/>
@@ -17012,7 +17018,7 @@
               <a:buNone/>
             </a:pPr>
             <a:r>
-              <a:rPr lang="en-US" sz="1300" b="1" dirty="0">
+              <a:rPr lang="en-US" sz="1220" b="1" dirty="0">
                 <a:solidFill>
                   <a:srgbClr val="0068B7"/>
                 </a:solidFill>
@@ -17022,7 +17028,7 @@
               </a:rPr>
               <a:t>Concept checkpoints</a:t>
             </a:r>
-            <a:endParaRPr lang="en-US" sz="1300" dirty="0"/>
+            <a:endParaRPr lang="en-US" sz="1220" dirty="0"/>
           </a:p>
         </p:txBody>
       </p:sp>
@@ -17034,8 +17040,8 @@
         </p:nvSpPr>
         <p:spPr>
           <a:xfrm>
-            <a:off x="7818120" y="3230575"/>
-            <a:ext cx="3090672" cy="670255"/>
+            <a:off x="7726680" y="3182112"/>
+            <a:ext cx="3227832" cy="960120"/>
           </a:xfrm>
           <a:prstGeom prst="rect">
             <a:avLst/>
@@ -17053,7 +17059,7 @@
               <a:buNone/>
             </a:pPr>
             <a:r>
-              <a:rPr lang="en-US" sz="1220" dirty="0">
+              <a:rPr lang="en-US" sz="1140" dirty="0">
                 <a:solidFill>
                   <a:srgbClr val="17364A"/>
                 </a:solidFill>
@@ -17061,16 +17067,16 @@
                 <a:ea typeface="Aptos" pitchFamily="34" charset="-122"/>
                 <a:cs typeface="Aptos" pitchFamily="34" charset="-120"/>
               </a:rPr>
-              <a:t>A health department uses AI to draft public health messages,.</a:t>
-            </a:r>
-            <a:endParaRPr lang="en-US" sz="1220" dirty="0"/>
-          </a:p>
-          <a:p>
-            <a:pPr indent="0" marL="0">
-              <a:buNone/>
-            </a:pPr>
-            <a:r>
-              <a:rPr lang="en-US" sz="1220" dirty="0">
+              <a:t>A health department uses AI to draft public health.</a:t>
+            </a:r>
+            <a:endParaRPr lang="en-US" sz="1140" dirty="0"/>
+          </a:p>
+          <a:p>
+            <a:pPr indent="0" marL="0">
+              <a:buNone/>
+            </a:pPr>
+            <a:r>
+              <a:rPr lang="en-US" sz="1140" dirty="0">
                 <a:solidFill>
                   <a:srgbClr val="17364A"/>
                 </a:solidFill>
@@ -17078,16 +17084,16 @@
                 <a:ea typeface="Aptos" pitchFamily="34" charset="-122"/>
                 <a:cs typeface="Aptos" pitchFamily="34" charset="-120"/>
               </a:rPr>
-              <a:t>Some uses may not require broad public disclosure, while others.</a:t>
-            </a:r>
-            <a:endParaRPr lang="en-US" sz="1220" dirty="0"/>
-          </a:p>
-          <a:p>
-            <a:pPr indent="0" marL="0">
-              <a:buNone/>
-            </a:pPr>
-            <a:r>
-              <a:rPr lang="en-US" sz="1220" dirty="0">
+              <a:t>Some uses may not require broad public disclosure,.</a:t>
+            </a:r>
+            <a:endParaRPr lang="en-US" sz="1140" dirty="0"/>
+          </a:p>
+          <a:p>
+            <a:pPr indent="0" marL="0">
+              <a:buNone/>
+            </a:pPr>
+            <a:r>
+              <a:rPr lang="en-US" sz="1140" dirty="0">
                 <a:solidFill>
                   <a:srgbClr val="17364A"/>
                 </a:solidFill>
@@ -17095,9 +17101,9 @@
                 <a:ea typeface="Aptos" pitchFamily="34" charset="-122"/>
                 <a:cs typeface="Aptos" pitchFamily="34" charset="-120"/>
               </a:rPr>
-              <a:t>The registry does not need to reveal sensitive security details,.</a:t>
-            </a:r>
-            <a:endParaRPr lang="en-US" sz="1220" dirty="0"/>
+              <a:t>The registry does not need to reveal sensitive.</a:t>
+            </a:r>
+            <a:endParaRPr lang="en-US" sz="1140" dirty="0"/>
           </a:p>
         </p:txBody>
       </p:sp>
@@ -17109,12 +17115,12 @@
         </p:nvSpPr>
         <p:spPr>
           <a:xfrm>
-            <a:off x="7635240" y="4184294"/>
-            <a:ext cx="3474720" cy="1466698"/>
+            <a:off x="7543800" y="4389120"/>
+            <a:ext cx="3611880" cy="1261872"/>
           </a:xfrm>
           <a:prstGeom prst="roundRect">
             <a:avLst>
-              <a:gd name="adj" fmla="val 7481"/>
+              <a:gd name="adj" fmla="val 8696"/>
             </a:avLst>
           </a:prstGeom>
           <a:solidFill>
@@ -17136,8 +17142,8 @@
         </p:nvSpPr>
         <p:spPr>
           <a:xfrm>
-            <a:off x="7799832" y="4330598"/>
-            <a:ext cx="3145536" cy="256032"/>
+            <a:off x="7708392" y="4517136"/>
+            <a:ext cx="3282696" cy="228600"/>
           </a:xfrm>
           <a:prstGeom prst="rect">
             <a:avLst/>
@@ -17153,7 +17159,7 @@
               <a:buNone/>
             </a:pPr>
             <a:r>
-              <a:rPr lang="en-US" sz="1300" b="1" dirty="0">
+              <a:rPr lang="en-US" sz="1220" b="1" dirty="0">
                 <a:solidFill>
                   <a:srgbClr val="0068B7"/>
                 </a:solidFill>
@@ -17163,7 +17169,7 @@
               </a:rPr>
               <a:t>What to document</a:t>
             </a:r>
-            <a:endParaRPr lang="en-US" sz="1300" dirty="0"/>
+            <a:endParaRPr lang="en-US" sz="1220" dirty="0"/>
           </a:p>
         </p:txBody>
       </p:sp>
@@ -17175,8 +17181,8 @@
         </p:nvSpPr>
         <p:spPr>
           <a:xfrm>
-            <a:off x="7799832" y="4659782"/>
-            <a:ext cx="3145536" cy="899770"/>
+            <a:off x="7708392" y="4828032"/>
+            <a:ext cx="3282696" cy="749808"/>
           </a:xfrm>
           <a:prstGeom prst="rect">
             <a:avLst/>
@@ -17194,7 +17200,7 @@
               <a:buNone/>
             </a:pPr>
             <a:r>
-              <a:rPr lang="en-US" sz="1320" dirty="0">
+              <a:rPr lang="en-US" sz="1220" dirty="0">
                 <a:solidFill>
                   <a:srgbClr val="17364A"/>
                 </a:solidFill>
@@ -17202,9 +17208,9 @@
                 <a:ea typeface="Aptos" pitchFamily="34" charset="-122"/>
                 <a:cs typeface="Aptos" pitchFamily="34" charset="-120"/>
               </a:rPr>
-              <a:t>Connect the concept to public health purpose, responsible use, required safeguards, documentation, and the next action a department should take.</a:t>
-            </a:r>
-            <a:endParaRPr lang="en-US" sz="1320" dirty="0"/>
+              <a:t>Connect the concept to public health purpose, responsible use, required.</a:t>
+            </a:r>
+            <a:endParaRPr lang="en-US" sz="1220" dirty="0"/>
           </a:p>
         </p:txBody>
       </p:sp>

--- a/downloads/presentations/modules/gov-420.pptx
+++ b/downloads/presentations/modules/gov-420.pptx
@@ -9413,7 +9413,7 @@
                 <a:ea typeface="Aptos" pitchFamily="34" charset="-122"/>
                 <a:cs typeface="Aptos" pitchFamily="34" charset="-120"/>
               </a:rPr>
-              <a:t>• 1. What is the strongest reason this module topic belongs in AI leadership.</a:t>
+              <a:t>1. What is the strongest reason this module topic belongs in AI leadership.</a:t>
             </a:r>
             <a:endParaRPr lang="en-US" sz="1920" dirty="0"/>
           </a:p>
@@ -9430,7 +9430,7 @@
                 <a:ea typeface="Aptos" pitchFamily="34" charset="-122"/>
                 <a:cs typeface="Aptos" pitchFamily="34" charset="-120"/>
               </a:rPr>
-              <a:t>• 2. Which practice best supports accountable public health AI governance?</a:t>
+              <a:t>2. Which practice best supports accountable public health AI governance?</a:t>
             </a:r>
             <a:endParaRPr lang="en-US" sz="1920" dirty="0"/>
           </a:p>
@@ -9447,7 +9447,7 @@
                 <a:ea typeface="Aptos" pitchFamily="34" charset="-122"/>
                 <a:cs typeface="Aptos" pitchFamily="34" charset="-120"/>
               </a:rPr>
-              <a:t>• 3. When should an AI use case be escalated for leadership or governance.</a:t>
+              <a:t>3. When should an AI use case be escalated for leadership or governance.</a:t>
             </a:r>
             <a:endParaRPr lang="en-US" sz="1920" dirty="0"/>
           </a:p>
@@ -9554,7 +9554,7 @@
                 <a:ea typeface="Aptos" pitchFamily="34" charset="-122"/>
                 <a:cs typeface="Aptos" pitchFamily="34" charset="-120"/>
               </a:rPr>
-              <a:t>1. What is the strongest reason this module topic belongs in AI leadership and.</a:t>
+              <a:t>What is the strongest reason this module topic belongs in AI leadership and.</a:t>
             </a:r>
             <a:endParaRPr lang="en-US" sz="1220" dirty="0"/>
           </a:p>
@@ -9661,41 +9661,7 @@
                 <a:ea typeface="Aptos" pitchFamily="34" charset="-122"/>
                 <a:cs typeface="Aptos" pitchFamily="34" charset="-120"/>
               </a:rPr>
-              <a:t>1.</a:t>
-            </a:r>
-            <a:endParaRPr lang="en-US" sz="1140" dirty="0"/>
-          </a:p>
-          <a:p>
-            <a:pPr indent="0" marL="0">
-              <a:buNone/>
-            </a:pPr>
-            <a:r>
-              <a:rPr lang="en-US" sz="1140" dirty="0">
-                <a:solidFill>
-                  <a:srgbClr val="17364A"/>
-                </a:solidFill>
-                <a:latin typeface="Aptos" pitchFamily="34" charset="0"/>
-                <a:ea typeface="Aptos" pitchFamily="34" charset="-122"/>
-                <a:cs typeface="Aptos" pitchFamily="34" charset="-120"/>
-              </a:rPr>
               <a:t>What is the strongest reason this module topic.</a:t>
-            </a:r>
-            <a:endParaRPr lang="en-US" sz="1140" dirty="0"/>
-          </a:p>
-          <a:p>
-            <a:pPr indent="0" marL="0">
-              <a:buNone/>
-            </a:pPr>
-            <a:r>
-              <a:rPr lang="en-US" sz="1140" dirty="0">
-                <a:solidFill>
-                  <a:srgbClr val="17364A"/>
-                </a:solidFill>
-                <a:latin typeface="Aptos" pitchFamily="34" charset="0"/>
-                <a:ea typeface="Aptos" pitchFamily="34" charset="-122"/>
-                <a:cs typeface="Aptos" pitchFamily="34" charset="-120"/>
-              </a:rPr>
-              <a:t>2.</a:t>
             </a:r>
             <a:endParaRPr lang="en-US" sz="1140" dirty="0"/>
           </a:p>
